--- a/report/data_cluster/Proyect_US_cluster.pptx
+++ b/report/data_cluster/Proyect_US_cluster.pptx
@@ -50,6 +50,7 @@
     <p:sldId id="298" r:id="rId50"/>
     <p:sldId id="299" r:id="rId51"/>
     <p:sldId id="300" r:id="rId52"/>
+    <p:sldId id="301" r:id="rId53"/>
   </p:sldIdLst>
   <p:sldSz cx="12191695" cy="6858000" type="screen4x3"/>
   <p:notesSz cx="6858000" cy="9144000"/>
@@ -826,7 +827,7 @@
           <a:lstStyle/>
           <a:p>
             <a:r>
-              <a:t>El grupo que sale antes de los 55: mas de la mitad son madres con un hijo en casa (13 de los 24). El 13 por ciento del grupo estudia, casi todos sin hijos: 25 por ciento de esas mujeres y 48 por ciento de esos hombres, frente al 3 por ciento de las madres.</a:t>
+              <a:t>El grupo que sale antes de los 55: la salida temprana es una historia de familia, mas de la mitad son madres con un hijo en casa (13 de los 24).</a:t>
             </a:r>
           </a:p>
         </p:txBody>
@@ -852,6 +853,76 @@
 </file>
 
 <file path=ppt/notesSlides/notesSlide6.xml><?xml version="1.0" encoding="utf-8"?>
+<p:notes xmlns:a="http://schemas.openxmlformats.org/drawingml/2006/main" xmlns:p="http://schemas.openxmlformats.org/presentationml/2006/main" xmlns:r="http://schemas.openxmlformats.org/officeDocument/2006/relationships">
+  <p:cSld>
+    <p:spTree>
+      <p:nvGrpSpPr>
+        <p:cNvPr id="1" name=""/>
+        <p:cNvGrpSpPr/>
+        <p:nvPr/>
+      </p:nvGrpSpPr>
+      <p:grpSpPr>
+        <a:xfrm>
+          <a:off x="0" y="0"/>
+          <a:ext cx="0" cy="0"/>
+          <a:chOff x="0" y="0"/>
+          <a:chExt cx="0" cy="0"/>
+        </a:xfrm>
+      </p:grpSpPr>
+      <p:sp>
+        <p:nvSpPr>
+          <p:cNvPr id="2" name="Slide Image Placeholder 1"/>
+          <p:cNvSpPr>
+            <a:spLocks noGrp="1"/>
+          </p:cNvSpPr>
+          <p:nvPr>
+            <p:ph type="sldImg" idx="2"/>
+          </p:nvPr>
+        </p:nvSpPr>
+        <p:spPr/>
+      </p:sp>
+      <p:sp>
+        <p:nvSpPr>
+          <p:cNvPr id="3" name="Notes Placeholder 2"/>
+          <p:cNvSpPr>
+            <a:spLocks noGrp="1"/>
+          </p:cNvSpPr>
+          <p:nvPr>
+            <p:ph type="body" idx="3" sz="quarter"/>
+          </p:nvPr>
+        </p:nvSpPr>
+        <p:spPr/>
+        <p:txBody>
+          <a:bodyPr/>
+          <a:lstStyle/>
+          <a:p>
+            <a:r>
+              <a:t>Y los mas jovenes se van a estudiar: entre los que salen de la poblacion activa antes de los 55, estudia el 45 por ciento de los menores de 30 (8 por ciento de 30-39, 3 por ciento de 40-54) y el 31 por ciento de los que no tienen hijos en casa, frente al 3 por ciento de los que si. Ojo: n pequenos, va indicado en cada barra.</a:t>
+            </a:r>
+          </a:p>
+        </p:txBody>
+      </p:sp>
+      <p:sp>
+        <p:nvSpPr>
+          <p:cNvPr id="4" name="Slide Number Placeholder 3"/>
+          <p:cNvSpPr>
+            <a:spLocks noGrp="1"/>
+          </p:cNvSpPr>
+          <p:nvPr>
+            <p:ph type="sldNum" idx="5" sz="quarter"/>
+          </p:nvPr>
+        </p:nvSpPr>
+        <p:spPr/>
+      </p:sp>
+    </p:spTree>
+  </p:cSld>
+  <p:clrMapOvr>
+    <a:masterClrMapping/>
+  </p:clrMapOvr>
+</p:notes>
+</file>
+
+<file path=ppt/notesSlides/notesSlide7.xml><?xml version="1.0" encoding="utf-8"?>
 <p:notes xmlns:a="http://schemas.openxmlformats.org/drawingml/2006/main" xmlns:p="http://schemas.openxmlformats.org/presentationml/2006/main" xmlns:r="http://schemas.openxmlformats.org/officeDocument/2006/relationships">
   <p:cSld>
     <p:spTree>
@@ -4278,7 +4349,7 @@
         </p:nvSpPr>
         <p:spPr>
           <a:xfrm>
-            <a:off x="605225" y="6225232"/>
+            <a:off x="605225" y="6311253"/>
             <a:ext cx="1669633" cy="375321"/>
           </a:xfrm>
           <a:prstGeom prst="rect">
@@ -4406,7 +4477,7 @@
         </p:nvSpPr>
         <p:spPr>
           <a:xfrm>
-            <a:off x="605225" y="6225232"/>
+            <a:off x="605225" y="6311253"/>
             <a:ext cx="1682240" cy="375321"/>
           </a:xfrm>
           <a:prstGeom prst="rect">
@@ -4864,182 +4935,6 @@
           </a:prstGeom>
         </p:spPr>
       </p:pic>
-      <p:sp>
-        <p:nvSpPr>
-          <p:cNvPr id="3" name="Rectangle 2">
-            <a:hlinkClick action="ppaction://hlinksldjump" r:id="rId4"/>
-          </p:cNvPr>
-          <p:cNvSpPr/>
-          <p:nvPr/>
-        </p:nvSpPr>
-        <p:spPr>
-          <a:xfrm>
-            <a:off x="605225" y="4796793"/>
-            <a:ext cx="860192" cy="375321"/>
-          </a:xfrm>
-          <a:prstGeom prst="rect">
-            <a:avLst/>
-          </a:prstGeom>
-          <a:noFill/>
-          <a:ln>
-            <a:noFill/>
-          </a:ln>
-          <a:effectLst/>
-        </p:spPr>
-        <p:style>
-          <a:lnRef idx="1">
-            <a:schemeClr val="accent1"/>
-          </a:lnRef>
-          <a:fillRef idx="3">
-            <a:schemeClr val="accent1"/>
-          </a:fillRef>
-          <a:effectRef idx="2">
-            <a:schemeClr val="accent1"/>
-          </a:effectRef>
-          <a:fontRef idx="minor">
-            <a:schemeClr val="lt1"/>
-          </a:fontRef>
-        </p:style>
-        <p:txBody>
-          <a:bodyPr rtlCol="0" anchor="ctr"/>
-          <a:lstStyle/>
-          <a:p>
-            <a:pPr algn="ctr"/>
-          </a:p>
-        </p:txBody>
-      </p:sp>
-      <p:sp>
-        <p:nvSpPr>
-          <p:cNvPr id="4" name="Rectangle 3">
-            <a:hlinkClick action="ppaction://hlinksldjump" r:id="rId5"/>
-          </p:cNvPr>
-          <p:cNvSpPr/>
-          <p:nvPr/>
-        </p:nvSpPr>
-        <p:spPr>
-          <a:xfrm>
-            <a:off x="1483509" y="4796793"/>
-            <a:ext cx="1439881" cy="375321"/>
-          </a:xfrm>
-          <a:prstGeom prst="rect">
-            <a:avLst/>
-          </a:prstGeom>
-          <a:noFill/>
-          <a:ln>
-            <a:noFill/>
-          </a:ln>
-          <a:effectLst/>
-        </p:spPr>
-        <p:style>
-          <a:lnRef idx="1">
-            <a:schemeClr val="accent1"/>
-          </a:lnRef>
-          <a:fillRef idx="3">
-            <a:schemeClr val="accent1"/>
-          </a:fillRef>
-          <a:effectRef idx="2">
-            <a:schemeClr val="accent1"/>
-          </a:effectRef>
-          <a:fontRef idx="minor">
-            <a:schemeClr val="lt1"/>
-          </a:fontRef>
-        </p:style>
-        <p:txBody>
-          <a:bodyPr rtlCol="0" anchor="ctr"/>
-          <a:lstStyle/>
-          <a:p>
-            <a:pPr algn="ctr"/>
-          </a:p>
-        </p:txBody>
-      </p:sp>
-      <p:sp>
-        <p:nvSpPr>
-          <p:cNvPr id="5" name="Rectangle 4">
-            <a:hlinkClick action="ppaction://hlinksldjump" r:id="rId6"/>
-          </p:cNvPr>
-          <p:cNvSpPr/>
-          <p:nvPr/>
-        </p:nvSpPr>
-        <p:spPr>
-          <a:xfrm>
-            <a:off x="2941481" y="4796793"/>
-            <a:ext cx="1196608" cy="375321"/>
-          </a:xfrm>
-          <a:prstGeom prst="rect">
-            <a:avLst/>
-          </a:prstGeom>
-          <a:noFill/>
-          <a:ln>
-            <a:noFill/>
-          </a:ln>
-          <a:effectLst/>
-        </p:spPr>
-        <p:style>
-          <a:lnRef idx="1">
-            <a:schemeClr val="accent1"/>
-          </a:lnRef>
-          <a:fillRef idx="3">
-            <a:schemeClr val="accent1"/>
-          </a:fillRef>
-          <a:effectRef idx="2">
-            <a:schemeClr val="accent1"/>
-          </a:effectRef>
-          <a:fontRef idx="minor">
-            <a:schemeClr val="lt1"/>
-          </a:fontRef>
-        </p:style>
-        <p:txBody>
-          <a:bodyPr rtlCol="0" anchor="ctr"/>
-          <a:lstStyle/>
-          <a:p>
-            <a:pPr algn="ctr"/>
-          </a:p>
-        </p:txBody>
-      </p:sp>
-      <p:sp>
-        <p:nvSpPr>
-          <p:cNvPr id="6" name="Rectangle 5">
-            <a:hlinkClick action="ppaction://hlinksldjump" r:id="rId7"/>
-          </p:cNvPr>
-          <p:cNvSpPr/>
-          <p:nvPr/>
-        </p:nvSpPr>
-        <p:spPr>
-          <a:xfrm>
-            <a:off x="4156180" y="4796793"/>
-            <a:ext cx="1686944" cy="375321"/>
-          </a:xfrm>
-          <a:prstGeom prst="rect">
-            <a:avLst/>
-          </a:prstGeom>
-          <a:noFill/>
-          <a:ln>
-            <a:noFill/>
-          </a:ln>
-          <a:effectLst/>
-        </p:spPr>
-        <p:style>
-          <a:lnRef idx="1">
-            <a:schemeClr val="accent1"/>
-          </a:lnRef>
-          <a:fillRef idx="3">
-            <a:schemeClr val="accent1"/>
-          </a:fillRef>
-          <a:effectRef idx="2">
-            <a:schemeClr val="accent1"/>
-          </a:effectRef>
-          <a:fontRef idx="minor">
-            <a:schemeClr val="lt1"/>
-          </a:fontRef>
-        </p:style>
-        <p:txBody>
-          <a:bodyPr rtlCol="0" anchor="ctr"/>
-          <a:lstStyle/>
-          <a:p>
-            <a:pPr algn="ctr"/>
-          </a:p>
-        </p:txBody>
-      </p:sp>
     </p:spTree>
   </p:cSld>
   <p:clrMapOvr>
@@ -5082,6 +4977,182 @@
           </a:prstGeom>
         </p:spPr>
       </p:pic>
+      <p:sp>
+        <p:nvSpPr>
+          <p:cNvPr id="3" name="Rectangle 2">
+            <a:hlinkClick action="ppaction://hlinksldjump" r:id="rId4"/>
+          </p:cNvPr>
+          <p:cNvSpPr/>
+          <p:nvPr/>
+        </p:nvSpPr>
+        <p:spPr>
+          <a:xfrm>
+            <a:off x="605225" y="5851119"/>
+            <a:ext cx="860192" cy="375348"/>
+          </a:xfrm>
+          <a:prstGeom prst="rect">
+            <a:avLst/>
+          </a:prstGeom>
+          <a:noFill/>
+          <a:ln>
+            <a:noFill/>
+          </a:ln>
+          <a:effectLst/>
+        </p:spPr>
+        <p:style>
+          <a:lnRef idx="1">
+            <a:schemeClr val="accent1"/>
+          </a:lnRef>
+          <a:fillRef idx="3">
+            <a:schemeClr val="accent1"/>
+          </a:fillRef>
+          <a:effectRef idx="2">
+            <a:schemeClr val="accent1"/>
+          </a:effectRef>
+          <a:fontRef idx="minor">
+            <a:schemeClr val="lt1"/>
+          </a:fontRef>
+        </p:style>
+        <p:txBody>
+          <a:bodyPr rtlCol="0" anchor="ctr"/>
+          <a:lstStyle/>
+          <a:p>
+            <a:pPr algn="ctr"/>
+          </a:p>
+        </p:txBody>
+      </p:sp>
+      <p:sp>
+        <p:nvSpPr>
+          <p:cNvPr id="4" name="Rectangle 3">
+            <a:hlinkClick action="ppaction://hlinksldjump" r:id="rId5"/>
+          </p:cNvPr>
+          <p:cNvSpPr/>
+          <p:nvPr/>
+        </p:nvSpPr>
+        <p:spPr>
+          <a:xfrm>
+            <a:off x="1483509" y="5851119"/>
+            <a:ext cx="1439881" cy="375348"/>
+          </a:xfrm>
+          <a:prstGeom prst="rect">
+            <a:avLst/>
+          </a:prstGeom>
+          <a:noFill/>
+          <a:ln>
+            <a:noFill/>
+          </a:ln>
+          <a:effectLst/>
+        </p:spPr>
+        <p:style>
+          <a:lnRef idx="1">
+            <a:schemeClr val="accent1"/>
+          </a:lnRef>
+          <a:fillRef idx="3">
+            <a:schemeClr val="accent1"/>
+          </a:fillRef>
+          <a:effectRef idx="2">
+            <a:schemeClr val="accent1"/>
+          </a:effectRef>
+          <a:fontRef idx="minor">
+            <a:schemeClr val="lt1"/>
+          </a:fontRef>
+        </p:style>
+        <p:txBody>
+          <a:bodyPr rtlCol="0" anchor="ctr"/>
+          <a:lstStyle/>
+          <a:p>
+            <a:pPr algn="ctr"/>
+          </a:p>
+        </p:txBody>
+      </p:sp>
+      <p:sp>
+        <p:nvSpPr>
+          <p:cNvPr id="5" name="Rectangle 4">
+            <a:hlinkClick action="ppaction://hlinksldjump" r:id="rId6"/>
+          </p:cNvPr>
+          <p:cNvSpPr/>
+          <p:nvPr/>
+        </p:nvSpPr>
+        <p:spPr>
+          <a:xfrm>
+            <a:off x="2941481" y="5851119"/>
+            <a:ext cx="1196608" cy="375348"/>
+          </a:xfrm>
+          <a:prstGeom prst="rect">
+            <a:avLst/>
+          </a:prstGeom>
+          <a:noFill/>
+          <a:ln>
+            <a:noFill/>
+          </a:ln>
+          <a:effectLst/>
+        </p:spPr>
+        <p:style>
+          <a:lnRef idx="1">
+            <a:schemeClr val="accent1"/>
+          </a:lnRef>
+          <a:fillRef idx="3">
+            <a:schemeClr val="accent1"/>
+          </a:fillRef>
+          <a:effectRef idx="2">
+            <a:schemeClr val="accent1"/>
+          </a:effectRef>
+          <a:fontRef idx="minor">
+            <a:schemeClr val="lt1"/>
+          </a:fontRef>
+        </p:style>
+        <p:txBody>
+          <a:bodyPr rtlCol="0" anchor="ctr"/>
+          <a:lstStyle/>
+          <a:p>
+            <a:pPr algn="ctr"/>
+          </a:p>
+        </p:txBody>
+      </p:sp>
+      <p:sp>
+        <p:nvSpPr>
+          <p:cNvPr id="6" name="Rectangle 5">
+            <a:hlinkClick action="ppaction://hlinksldjump" r:id="rId7"/>
+          </p:cNvPr>
+          <p:cNvSpPr/>
+          <p:nvPr/>
+        </p:nvSpPr>
+        <p:spPr>
+          <a:xfrm>
+            <a:off x="4156180" y="5851119"/>
+            <a:ext cx="1686944" cy="375348"/>
+          </a:xfrm>
+          <a:prstGeom prst="rect">
+            <a:avLst/>
+          </a:prstGeom>
+          <a:noFill/>
+          <a:ln>
+            <a:noFill/>
+          </a:ln>
+          <a:effectLst/>
+        </p:spPr>
+        <p:style>
+          <a:lnRef idx="1">
+            <a:schemeClr val="accent1"/>
+          </a:lnRef>
+          <a:fillRef idx="3">
+            <a:schemeClr val="accent1"/>
+          </a:fillRef>
+          <a:effectRef idx="2">
+            <a:schemeClr val="accent1"/>
+          </a:effectRef>
+          <a:fontRef idx="minor">
+            <a:schemeClr val="lt1"/>
+          </a:fontRef>
+        </p:style>
+        <p:txBody>
+          <a:bodyPr rtlCol="0" anchor="ctr"/>
+          <a:lstStyle/>
+          <a:p>
+            <a:pPr algn="ctr"/>
+          </a:p>
+        </p:txBody>
+      </p:sp>
     </p:spTree>
   </p:cSld>
   <p:clrMapOvr>
@@ -5418,50 +5489,6 @@
           </a:prstGeom>
         </p:spPr>
       </p:pic>
-      <p:sp>
-        <p:nvSpPr>
-          <p:cNvPr id="3" name="Rectangle 2">
-            <a:hlinkClick action="ppaction://hlinksldjump" r:id="rId3"/>
-          </p:cNvPr>
-          <p:cNvSpPr/>
-          <p:nvPr/>
-        </p:nvSpPr>
-        <p:spPr>
-          <a:xfrm>
-            <a:off x="10747754" y="6415097"/>
-            <a:ext cx="838714" cy="375348"/>
-          </a:xfrm>
-          <a:prstGeom prst="rect">
-            <a:avLst/>
-          </a:prstGeom>
-          <a:noFill/>
-          <a:ln>
-            <a:noFill/>
-          </a:ln>
-          <a:effectLst/>
-        </p:spPr>
-        <p:style>
-          <a:lnRef idx="1">
-            <a:schemeClr val="accent1"/>
-          </a:lnRef>
-          <a:fillRef idx="3">
-            <a:schemeClr val="accent1"/>
-          </a:fillRef>
-          <a:effectRef idx="2">
-            <a:schemeClr val="accent1"/>
-          </a:effectRef>
-          <a:fontRef idx="minor">
-            <a:schemeClr val="lt1"/>
-          </a:fontRef>
-        </p:style>
-        <p:txBody>
-          <a:bodyPr rtlCol="0" anchor="ctr"/>
-          <a:lstStyle/>
-          <a:p>
-            <a:pPr algn="ctr"/>
-          </a:p>
-        </p:txBody>
-      </p:sp>
     </p:spTree>
   </p:cSld>
   <p:clrMapOvr>
@@ -5514,8 +5541,8 @@
         </p:nvSpPr>
         <p:spPr>
           <a:xfrm>
-            <a:off x="10747754" y="5686146"/>
-            <a:ext cx="838714" cy="375321"/>
+            <a:off x="10747754" y="6415097"/>
+            <a:ext cx="838714" cy="375348"/>
           </a:xfrm>
           <a:prstGeom prst="rect">
             <a:avLst/>
@@ -5600,8 +5627,8 @@
         </p:nvSpPr>
         <p:spPr>
           <a:xfrm>
-            <a:off x="10747754" y="5398674"/>
-            <a:ext cx="838714" cy="375348"/>
+            <a:off x="10747754" y="5686146"/>
+            <a:ext cx="838714" cy="375321"/>
           </a:xfrm>
           <a:prstGeom prst="rect">
             <a:avLst/>
@@ -5686,8 +5713,8 @@
         </p:nvSpPr>
         <p:spPr>
           <a:xfrm>
-            <a:off x="10747754" y="6244076"/>
-            <a:ext cx="838714" cy="375321"/>
+            <a:off x="10747754" y="5398674"/>
+            <a:ext cx="838714" cy="375348"/>
           </a:xfrm>
           <a:prstGeom prst="rect">
             <a:avLst/>
@@ -5772,7 +5799,7 @@
         </p:nvSpPr>
         <p:spPr>
           <a:xfrm>
-            <a:off x="10747754" y="5731415"/>
+            <a:off x="10747754" y="6244076"/>
             <a:ext cx="838714" cy="375321"/>
           </a:xfrm>
           <a:prstGeom prst="rect">
@@ -5858,7 +5885,7 @@
         </p:nvSpPr>
         <p:spPr>
           <a:xfrm>
-            <a:off x="10747754" y="6244076"/>
+            <a:off x="10747754" y="5731415"/>
             <a:ext cx="838714" cy="375321"/>
           </a:xfrm>
           <a:prstGeom prst="rect">
@@ -6244,8 +6271,8 @@
         </p:nvSpPr>
         <p:spPr>
           <a:xfrm>
-            <a:off x="10747754" y="5626147"/>
-            <a:ext cx="838714" cy="375348"/>
+            <a:off x="10747754" y="6244076"/>
+            <a:ext cx="838714" cy="375321"/>
           </a:xfrm>
           <a:prstGeom prst="rect">
             <a:avLst/>
@@ -6330,8 +6357,8 @@
         </p:nvSpPr>
         <p:spPr>
           <a:xfrm>
-            <a:off x="10747754" y="6244076"/>
-            <a:ext cx="838714" cy="375321"/>
+            <a:off x="10747754" y="5626147"/>
+            <a:ext cx="838714" cy="375348"/>
           </a:xfrm>
           <a:prstGeom prst="rect">
             <a:avLst/>
@@ -6416,7 +6443,7 @@
         </p:nvSpPr>
         <p:spPr>
           <a:xfrm>
-            <a:off x="10747754" y="5574346"/>
+            <a:off x="10747754" y="6244076"/>
             <a:ext cx="838714" cy="375321"/>
           </a:xfrm>
           <a:prstGeom prst="rect">
@@ -6588,7 +6615,7 @@
         </p:nvSpPr>
         <p:spPr>
           <a:xfrm>
-            <a:off x="10747754" y="6268431"/>
+            <a:off x="10747754" y="5574346"/>
             <a:ext cx="838714" cy="375321"/>
           </a:xfrm>
           <a:prstGeom prst="rect">
@@ -6643,6 +6670,92 @@
       <p:pic>
         <p:nvPicPr>
           <p:cNvPr id="2" name="Picture 1" descr="pg-45.png"/>
+          <p:cNvPicPr>
+            <a:picLocks noChangeAspect="1"/>
+          </p:cNvPicPr>
+          <p:nvPr/>
+        </p:nvPicPr>
+        <p:blipFill>
+          <a:blip r:embed="rId2"/>
+          <a:stretch>
+            <a:fillRect/>
+          </a:stretch>
+        </p:blipFill>
+        <p:spPr>
+          <a:xfrm>
+            <a:off x="0" y="0"/>
+            <a:ext cx="12191695" cy="6858000"/>
+          </a:xfrm>
+          <a:prstGeom prst="rect">
+            <a:avLst/>
+          </a:prstGeom>
+        </p:spPr>
+      </p:pic>
+      <p:sp>
+        <p:nvSpPr>
+          <p:cNvPr id="3" name="Rectangle 2">
+            <a:hlinkClick action="ppaction://hlinksldjump" r:id="rId3"/>
+          </p:cNvPr>
+          <p:cNvSpPr/>
+          <p:nvPr/>
+        </p:nvSpPr>
+        <p:spPr>
+          <a:xfrm>
+            <a:off x="10747754" y="6268431"/>
+            <a:ext cx="838714" cy="375321"/>
+          </a:xfrm>
+          <a:prstGeom prst="rect">
+            <a:avLst/>
+          </a:prstGeom>
+          <a:noFill/>
+          <a:ln>
+            <a:noFill/>
+          </a:ln>
+          <a:effectLst/>
+        </p:spPr>
+        <p:style>
+          <a:lnRef idx="1">
+            <a:schemeClr val="accent1"/>
+          </a:lnRef>
+          <a:fillRef idx="3">
+            <a:schemeClr val="accent1"/>
+          </a:fillRef>
+          <a:effectRef idx="2">
+            <a:schemeClr val="accent1"/>
+          </a:effectRef>
+          <a:fontRef idx="minor">
+            <a:schemeClr val="lt1"/>
+          </a:fontRef>
+        </p:style>
+        <p:txBody>
+          <a:bodyPr rtlCol="0" anchor="ctr"/>
+          <a:lstStyle/>
+          <a:p>
+            <a:pPr algn="ctr"/>
+          </a:p>
+        </p:txBody>
+      </p:sp>
+    </p:spTree>
+  </p:cSld>
+  <p:clrMapOvr>
+    <a:masterClrMapping/>
+  </p:clrMapOvr>
+</p:sld>
+</file>
+
+<file path=ppt/slides/slide46.xml><?xml version="1.0" encoding="utf-8"?>
+<p:sld xmlns:a="http://schemas.openxmlformats.org/drawingml/2006/main" xmlns:p="http://schemas.openxmlformats.org/presentationml/2006/main" xmlns:r="http://schemas.openxmlformats.org/officeDocument/2006/relationships">
+  <p:cSld>
+    <p:spTree>
+      <p:nvGrpSpPr>
+        <p:cNvPr id="1" name=""/>
+        <p:cNvGrpSpPr/>
+        <p:nvPr/>
+      </p:nvGrpSpPr>
+      <p:grpSpPr/>
+      <p:pic>
+        <p:nvPicPr>
+          <p:cNvPr id="2" name="Picture 1" descr="pg-46.png"/>
           <p:cNvPicPr>
             <a:picLocks noChangeAspect="1"/>
           </p:cNvPicPr>

--- a/report/data_cluster/Proyect_US_cluster.pptx
+++ b/report/data_cluster/Proyect_US_cluster.pptx
@@ -5713,7 +5713,7 @@
         </p:nvSpPr>
         <p:spPr>
           <a:xfrm>
-            <a:off x="10747754" y="5398674"/>
+            <a:off x="10747754" y="5420986"/>
             <a:ext cx="838714" cy="375348"/>
           </a:xfrm>
           <a:prstGeom prst="rect">
@@ -6357,8 +6357,8 @@
         </p:nvSpPr>
         <p:spPr>
           <a:xfrm>
-            <a:off x="10747754" y="5626147"/>
-            <a:ext cx="838714" cy="375348"/>
+            <a:off x="10747754" y="6637086"/>
+            <a:ext cx="838714" cy="220913"/>
           </a:xfrm>
           <a:prstGeom prst="rect">
             <a:avLst/>
@@ -6529,8 +6529,8 @@
         </p:nvSpPr>
         <p:spPr>
           <a:xfrm>
-            <a:off x="10747754" y="5574346"/>
-            <a:ext cx="838714" cy="375321"/>
+            <a:off x="10747754" y="6854532"/>
+            <a:ext cx="838714" cy="3467"/>
           </a:xfrm>
           <a:prstGeom prst="rect">
             <a:avLst/>
@@ -6615,8 +6615,8 @@
         </p:nvSpPr>
         <p:spPr>
           <a:xfrm>
-            <a:off x="10747754" y="5574346"/>
-            <a:ext cx="838714" cy="375321"/>
+            <a:off x="10747754" y="7218752"/>
+            <a:ext cx="838714" cy="-360752"/>
           </a:xfrm>
           <a:prstGeom prst="rect">
             <a:avLst/>

--- a/report/data_cluster/Proyect_US_cluster.pptx
+++ b/report/data_cluster/Proyect_US_cluster.pptx
@@ -12222,7 +12222,7 @@
         </p:nvSpPr>
         <p:spPr>
           <a:xfrm>
-            <a:off x="822960" y="1417320"/>
+            <a:off x="822960" y="1325880"/>
             <a:ext cx="10789920" cy="5120640"/>
           </a:xfrm>
           <a:prstGeom prst="rect">
@@ -12241,7 +12241,7 @@
                 <a:spcPts val="2432"/>
               </a:lnSpc>
               <a:spcAft>
-                <a:spcPts val="2600"/>
+                <a:spcPts val="2400"/>
               </a:spcAft>
             </a:pPr>
             <a:r>
@@ -12260,7 +12260,7 @@
                 </a:solidFill>
                 <a:latin typeface="Garamond"/>
               </a:rPr>
-              <a:t>Teacher attrition is not bad in itself. Much of it reflects an active labor market, and it moves with the general cycle. The question for policy is who leaves, and why.</a:t>
+              <a:t>Job security is fundamental to retain a teacher. Our analysis shows that a full-year contract and pension coverage are strongly correlated with a lower leaving rate.</a:t>
             </a:r>
           </a:p>
           <a:p>
@@ -12269,7 +12269,7 @@
                 <a:spcPts val="2432"/>
               </a:lnSpc>
               <a:spcAft>
-                <a:spcPts val="2600"/>
+                <a:spcPts val="2400"/>
               </a:spcAft>
             </a:pPr>
             <a:r>
@@ -12288,7 +12288,7 @@
                 </a:solidFill>
                 <a:latin typeface="Garamond"/>
               </a:rPr>
-              <a:t>Working conditions weigh heavily. A full-year contract is the single strongest protection against leaving, so job security is fundamental to retain a teacher.</a:t>
+              <a:t>The financial margin still has room as a retention incentive in the US. Most leavers concentrate in the bottom deciles of income.</a:t>
             </a:r>
           </a:p>
           <a:p>
@@ -12297,7 +12297,7 @@
                 <a:spcPts val="2432"/>
               </a:lnSpc>
               <a:spcAft>
-                <a:spcPts val="2600"/>
+                <a:spcPts val="2400"/>
               </a:spcAft>
             </a:pPr>
             <a:r>
@@ -12316,7 +12316,7 @@
                 </a:solidFill>
                 <a:latin typeface="Garamond"/>
               </a:rPr>
-              <a:t>Not everyone who leaves earns more afterwards, and leaving concentrates at the bottom of the pay scale. The financial lever still has room as a retention incentive.</a:t>
+              <a:t>A quarter of exits are neither another job nor retirement but care at home or further study. Flexibility can ease the return of part of that group, and additional qualifications should pay when they return.</a:t>
             </a:r>
           </a:p>
           <a:p>
@@ -12344,7 +12344,7 @@
                 </a:solidFill>
                 <a:latin typeface="Garamond"/>
               </a:rPr>
-              <a:t>A quarter of exits are neither another job nor retirement but care at home or further study. Flexibility can bring that group back, and additional qualifications should pay when they return.</a:t>
+              <a:t>Age matters beyond working conditions. The risk of leaving follows the life cycle and is highest at the two ends of a career: the young leave for other jobs or further study, the old retire. Early-career mentoring is where prevention pays the most.</a:t>
             </a:r>
           </a:p>
         </p:txBody>
@@ -17505,8 +17505,8 @@
         </p:blipFill>
         <p:spPr>
           <a:xfrm>
-            <a:off x="1297304" y="1097280"/>
-            <a:ext cx="9566910" cy="4937760"/>
+            <a:off x="1563052" y="1097280"/>
+            <a:ext cx="9035415" cy="4663440"/>
           </a:xfrm>
           <a:prstGeom prst="rect">
             <a:avLst/>
@@ -17515,7 +17515,49 @@
       </p:pic>
       <p:sp>
         <p:nvSpPr>
-          <p:cNvPr id="5" name="Rounded Rectangle 4">
+          <p:cNvPr id="5" name="TextBox 4"/>
+          <p:cNvSpPr txBox="1"/>
+          <p:nvPr/>
+        </p:nvSpPr>
+        <p:spPr>
+          <a:xfrm>
+            <a:off x="822960" y="5897880"/>
+            <a:ext cx="10789920" cy="365760"/>
+          </a:xfrm>
+          <a:prstGeom prst="rect">
+            <a:avLst/>
+          </a:prstGeom>
+          <a:noFill/>
+        </p:spPr>
+        <p:txBody>
+          <a:bodyPr wrap="square" lIns="0" rIns="0" tIns="0" bIns="0">
+            <a:spAutoFit/>
+          </a:bodyPr>
+          <a:lstStyle/>
+          <a:p>
+            <a:pPr algn="l">
+              <a:lnSpc>
+                <a:spcPts val="1600"/>
+              </a:lnSpc>
+              <a:spcAft>
+                <a:spcPts val="0"/>
+              </a:spcAft>
+            </a:pPr>
+            <a:r>
+              <a:rPr sz="1250" b="0" i="1">
+                <a:solidFill>
+                  <a:srgbClr val="6B7480"/>
+                </a:solidFill>
+                <a:latin typeface="Garamond"/>
+              </a:rPr>
+              <a:t>Three-year moving averages, for readability with nine professions. The main charts use the raw annual series.</a:t>
+            </a:r>
+          </a:p>
+        </p:txBody>
+      </p:sp>
+      <p:sp>
+        <p:nvSpPr>
+          <p:cNvPr id="6" name="Rounded Rectangle 5">
             <a:hlinkClick action="ppaction://hlinksldjump" r:id="rId3"/>
           </p:cNvPr>
           <p:cNvSpPr/>

--- a/report/data_cluster/Proyect_US_cluster.pptx
+++ b/report/data_cluster/Proyect_US_cluster.pptx
@@ -12260,7 +12260,7 @@
                 </a:solidFill>
                 <a:latin typeface="Garamond"/>
               </a:rPr>
-              <a:t>Job security is fundamental to retain a teacher. Our analysis shows that a full-year contract and pension coverage are strongly correlated with a lower leaving rate.</a:t>
+              <a:t>Job security is fundamental to retain a teacher, our analysis shows that a full-year contract and pension coverage are strongly correlated with a lower teacher leaving rate.</a:t>
             </a:r>
           </a:p>
           <a:p>
@@ -12288,7 +12288,7 @@
                 </a:solidFill>
                 <a:latin typeface="Garamond"/>
               </a:rPr>
-              <a:t>The financial margin still has room as a retention incentive in the US. Most leavers concentrate in the bottom deciles of income.</a:t>
+              <a:t>The financial margin still has room as a retention incentive in the US as most leavers concentrate in the bottom deciles of income.</a:t>
             </a:r>
           </a:p>
           <a:p>
@@ -12316,7 +12316,7 @@
                 </a:solidFill>
                 <a:latin typeface="Garamond"/>
               </a:rPr>
-              <a:t>A quarter of exits are neither another job nor retirement but care at home or further study. Flexibility can ease the return of part of that group, and additional qualifications should pay when they return.</a:t>
+              <a:t>The most important group of teachers that leave without moving to another job are mothers with a child at home, followed by the young who go back to study. Flexibility can ease the return of that group, and additional qualifications should pay when they come back.</a:t>
             </a:r>
           </a:p>
           <a:p>
@@ -12344,7 +12344,7 @@
                 </a:solidFill>
                 <a:latin typeface="Garamond"/>
               </a:rPr>
-              <a:t>Age matters beyond working conditions. The risk of leaving follows the life cycle and is highest at the two ends of a career: the young leave for other jobs or further study, the old retire. Early-career mentoring is where prevention pays the most.</a:t>
+              <a:t>Age matters beyond working conditions, the risk of leaving follows the life cycle and peaks at the two ends of a career. Therefore, early-career retention efforts are key (e.g. mentorship, balanced working conditions, secure placements).</a:t>
             </a:r>
           </a:p>
         </p:txBody>

--- a/report/data_cluster/Proyect_US_cluster.pptx
+++ b/report/data_cluster/Proyect_US_cluster.pptx
@@ -12222,7 +12222,7 @@
         </p:nvSpPr>
         <p:spPr>
           <a:xfrm>
-            <a:off x="822960" y="1325880"/>
+            <a:off x="822960" y="1417320"/>
             <a:ext cx="10789920" cy="5120640"/>
           </a:xfrm>
           <a:prstGeom prst="rect">
@@ -12241,7 +12241,7 @@
                 <a:spcPts val="2432"/>
               </a:lnSpc>
               <a:spcAft>
-                <a:spcPts val="2400"/>
+                <a:spcPts val="3000"/>
               </a:spcAft>
             </a:pPr>
             <a:r>
@@ -12269,7 +12269,7 @@
                 <a:spcPts val="2432"/>
               </a:lnSpc>
               <a:spcAft>
-                <a:spcPts val="2400"/>
+                <a:spcPts val="3000"/>
               </a:spcAft>
             </a:pPr>
             <a:r>
@@ -12288,7 +12288,7 @@
                 </a:solidFill>
                 <a:latin typeface="Garamond"/>
               </a:rPr>
-              <a:t>The financial margin still has room as a retention incentive in the US as most leavers concentrate in the bottom deciles of income.</a:t>
+              <a:t>Most leavers concentrate in the bottom deciles of income and the ones that switch jobs do not necessarily earn more, suggesting that on top of better working conditions the financial margin still has room as a retention incentive in the US.</a:t>
             </a:r>
           </a:p>
           <a:p>
@@ -12297,7 +12297,7 @@
                 <a:spcPts val="2432"/>
               </a:lnSpc>
               <a:spcAft>
-                <a:spcPts val="2400"/>
+                <a:spcPts val="0"/>
               </a:spcAft>
             </a:pPr>
             <a:r>
@@ -12316,35 +12316,7 @@
                 </a:solidFill>
                 <a:latin typeface="Garamond"/>
               </a:rPr>
-              <a:t>The most important group of teachers that leave without moving to another job are mothers with a child at home, followed by the young who go back to study. Flexibility can ease the return of that group, and additional qualifications should pay when they come back.</a:t>
-            </a:r>
-          </a:p>
-          <a:p>
-            <a:pPr algn="l">
-              <a:lnSpc>
-                <a:spcPts val="2432"/>
-              </a:lnSpc>
-              <a:spcAft>
-                <a:spcPts val="0"/>
-              </a:spcAft>
-            </a:pPr>
-            <a:r>
-              <a:rPr sz="1900" b="1" i="0">
-                <a:solidFill>
-                  <a:srgbClr val="2D6CB5"/>
-                </a:solidFill>
-                <a:latin typeface="Garamond"/>
-              </a:rPr>
-              <a:t>▪  </a:t>
-            </a:r>
-            <a:r>
-              <a:rPr sz="1900" b="0" i="0">
-                <a:solidFill>
-                  <a:srgbClr val="212529"/>
-                </a:solidFill>
-                <a:latin typeface="Garamond"/>
-              </a:rPr>
-              <a:t>Age matters beyond working conditions, the risk of leaving follows the life cycle and peaks at the two ends of a career. Therefore, early-career retention efforts are key (e.g. mentorship, balanced working conditions, secure placements).</a:t>
+              <a:t>The probability of leaving is highest at the start of the career, making mentoring and accompaniment a priority for retention policies.</a:t>
             </a:r>
           </a:p>
         </p:txBody>

--- a/report/data_cluster/Proyect_US_cluster.pptx
+++ b/report/data_cluster/Proyect_US_cluster.pptx
@@ -12288,7 +12288,7 @@
                 </a:solidFill>
                 <a:latin typeface="Garamond"/>
               </a:rPr>
-              <a:t>Most leavers concentrate in the bottom deciles of income and the ones that switch jobs do not necessarily earn more, suggesting that on top of better working conditions the financial margin still has room as a retention incentive in the US.</a:t>
+              <a:t>Leaving is concentrated at the bottom of the income distribution, and those who switch jobs do not necessarily earn more afterwards. Pay, alongside working conditions, still has room as a retention lever in the US.</a:t>
             </a:r>
           </a:p>
           <a:p>

--- a/report/data_cluster/Proyect_US_cluster.pptx
+++ b/report/data_cluster/Proyect_US_cluster.pptx
@@ -54,6 +54,7 @@
     <p:sldId id="302" r:id="rId53"/>
     <p:sldId id="303" r:id="rId54"/>
     <p:sldId id="304" r:id="rId55"/>
+    <p:sldId id="305" r:id="rId56"/>
   </p:sldIdLst>
   <p:sldSz cx="12191695" cy="6858000" type="screen4x3"/>
   <p:notesSz cx="6858000" cy="9144000"/>
@@ -12321,6 +12322,70 @@
           </a:p>
         </p:txBody>
       </p:sp>
+      <p:sp>
+        <p:nvSpPr>
+          <p:cNvPr id="5" name="Rounded Rectangle 4">
+            <a:hlinkClick action="ppaction://hlinksldjump" r:id="rId2"/>
+          </p:cNvPr>
+          <p:cNvSpPr/>
+          <p:nvPr/>
+        </p:nvSpPr>
+        <p:spPr>
+          <a:xfrm>
+            <a:off x="822960" y="6327648"/>
+            <a:ext cx="2853842" cy="365760"/>
+          </a:xfrm>
+          <a:prstGeom prst="roundRect">
+            <a:avLst/>
+          </a:prstGeom>
+          <a:solidFill>
+            <a:srgbClr val="BED3EE"/>
+          </a:solidFill>
+          <a:ln>
+            <a:noFill/>
+          </a:ln>
+          <a:effectLst/>
+        </p:spPr>
+        <p:style>
+          <a:lnRef idx="1">
+            <a:schemeClr val="accent1"/>
+          </a:lnRef>
+          <a:fillRef idx="3">
+            <a:schemeClr val="accent1"/>
+          </a:fillRef>
+          <a:effectRef idx="2">
+            <a:schemeClr val="accent1"/>
+          </a:effectRef>
+          <a:fontRef idx="minor">
+            <a:schemeClr val="lt1"/>
+          </a:fontRef>
+        </p:style>
+        <p:txBody>
+          <a:bodyPr rtlCol="0" anchor="ctr" wrap="none" lIns="36576" rIns="36576" tIns="0" bIns="0"/>
+          <a:lstStyle/>
+          <a:p>
+            <a:pPr algn="ctr"/>
+            <a:r>
+              <a:rPr sz="1800" b="1">
+                <a:solidFill>
+                  <a:srgbClr val="102D5E"/>
+                </a:solidFill>
+                <a:latin typeface="Garamond"/>
+              </a:rPr>
+              <a:t>☞ </a:t>
+            </a:r>
+            <a:r>
+              <a:rPr sz="1400">
+                <a:solidFill>
+                  <a:srgbClr val="102D5E"/>
+                </a:solidFill>
+                <a:latin typeface="Garamond"/>
+              </a:rPr>
+              <a:t>Do switchers earn more?</a:t>
+            </a:r>
+          </a:p>
+        </p:txBody>
+      </p:sp>
     </p:spTree>
   </p:cSld>
   <p:clrMapOvr>
@@ -19114,7 +19179,7 @@
                 </a:solidFill>
                 <a:latin typeface="Garamond"/>
               </a:rPr>
-              <a:t>The proportions behind the destinations chart</a:t>
+              <a:t>Do switchers earn more?</a:t>
             </a:r>
           </a:p>
         </p:txBody>
@@ -19154,42 +19219,30 @@
           </a:p>
         </p:txBody>
       </p:sp>
-      <p:cxnSp>
-        <p:nvCxnSpPr>
-          <p:cNvPr id="4" name="Connector 3"/>
-          <p:cNvCxnSpPr/>
-          <p:nvPr/>
-        </p:nvCxnSpPr>
-        <p:spPr>
-          <a:xfrm>
-            <a:off x="822960" y="1554480"/>
-            <a:ext cx="9143999" cy="0"/>
-          </a:xfrm>
-          <a:prstGeom prst="line">
-            <a:avLst/>
-          </a:prstGeom>
-          <a:ln w="16510">
-            <a:solidFill>
-              <a:srgbClr val="212529"/>
-            </a:solidFill>
-          </a:ln>
-          <a:effectLst/>
-        </p:spPr>
-        <p:style>
-          <a:lnRef idx="2">
-            <a:schemeClr val="accent1"/>
-          </a:lnRef>
-          <a:fillRef idx="0">
-            <a:schemeClr val="accent1"/>
-          </a:fillRef>
-          <a:effectRef idx="1">
-            <a:schemeClr val="accent1"/>
-          </a:effectRef>
-          <a:fontRef idx="minor">
-            <a:schemeClr val="tx1"/>
-          </a:fontRef>
-        </p:style>
-      </p:cxnSp>
+      <p:pic>
+        <p:nvPicPr>
+          <p:cNvPr id="4" name="Picture 3" descr="pay7_destinations_deck.png"/>
+          <p:cNvPicPr>
+            <a:picLocks noChangeAspect="1"/>
+          </p:cNvPicPr>
+          <p:nvPr/>
+        </p:nvPicPr>
+        <p:blipFill>
+          <a:blip r:embed="rId2"/>
+          <a:stretch>
+            <a:fillRect/>
+          </a:stretch>
+        </p:blipFill>
+        <p:spPr>
+          <a:xfrm>
+            <a:off x="1600199" y="1051560"/>
+            <a:ext cx="8961120" cy="4480560"/>
+          </a:xfrm>
+          <a:prstGeom prst="rect">
+            <a:avLst/>
+          </a:prstGeom>
+        </p:spPr>
+      </p:pic>
       <p:sp>
         <p:nvSpPr>
           <p:cNvPr id="5" name="TextBox 4"/>
@@ -19198,8 +19251,8 @@
         </p:nvSpPr>
         <p:spPr>
           <a:xfrm>
-            <a:off x="822960" y="1664207"/>
-            <a:ext cx="6949440" cy="384048"/>
+            <a:off x="822960" y="5715000"/>
+            <a:ext cx="10789920" cy="914400"/>
           </a:xfrm>
           <a:prstGeom prst="rect">
             <a:avLst/>
@@ -19214,640 +19267,28 @@
           <a:p>
             <a:pPr algn="l">
               <a:lnSpc>
-                <a:spcPts val="1920"/>
-              </a:lnSpc>
-              <a:spcAft>
-                <a:spcPts val="0"/>
-              </a:spcAft>
-            </a:pPr>
-            <a:r>
-              <a:rPr sz="1500" b="1" i="0">
+                <a:spcPts val="1728"/>
+              </a:lnSpc>
+              <a:spcAft>
+                <a:spcPts val="0"/>
+              </a:spcAft>
+            </a:pPr>
+            <a:r>
+              <a:rPr sz="1350" b="0" i="0">
                 <a:solidFill>
                   <a:srgbClr val="212529"/>
                 </a:solidFill>
                 <a:latin typeface="Garamond"/>
               </a:rPr>
-              <a:t>Of every 100 employed leavers…</a:t>
-            </a:r>
-          </a:p>
-        </p:txBody>
-      </p:sp>
-      <p:sp>
-        <p:nvSpPr>
-          <p:cNvPr id="6" name="TextBox 5"/>
-          <p:cNvSpPr txBox="1"/>
-          <p:nvPr/>
-        </p:nvSpPr>
-        <p:spPr>
-          <a:xfrm>
-            <a:off x="7955279" y="1664207"/>
-            <a:ext cx="2011680" cy="384048"/>
-          </a:xfrm>
-          <a:prstGeom prst="rect">
-            <a:avLst/>
-          </a:prstGeom>
-          <a:noFill/>
-        </p:spPr>
-        <p:txBody>
-          <a:bodyPr wrap="square" lIns="0" rIns="0" tIns="0" bIns="0">
-            <a:spAutoFit/>
-          </a:bodyPr>
-          <a:lstStyle/>
-          <a:p>
-            <a:pPr algn="r">
-              <a:lnSpc>
-                <a:spcPts val="1920"/>
-              </a:lnSpc>
-              <a:spcAft>
-                <a:spcPts val="0"/>
-              </a:spcAft>
-            </a:pPr>
-            <a:r>
-              <a:rPr sz="1500" b="1" i="0">
-                <a:solidFill>
-                  <a:srgbClr val="212529"/>
-                </a:solidFill>
-                <a:latin typeface="Garamond"/>
-              </a:rPr>
-              <a:t>share</a:t>
-            </a:r>
-          </a:p>
-        </p:txBody>
-      </p:sp>
-      <p:cxnSp>
-        <p:nvCxnSpPr>
-          <p:cNvPr id="7" name="Connector 6"/>
-          <p:cNvCxnSpPr/>
-          <p:nvPr/>
-        </p:nvCxnSpPr>
-        <p:spPr>
-          <a:xfrm>
-            <a:off x="822960" y="2066543"/>
-            <a:ext cx="9143999" cy="0"/>
-          </a:xfrm>
-          <a:prstGeom prst="line">
-            <a:avLst/>
-          </a:prstGeom>
-          <a:ln w="8890">
-            <a:solidFill>
-              <a:srgbClr val="212529"/>
-            </a:solidFill>
-          </a:ln>
-          <a:effectLst/>
-        </p:spPr>
-        <p:style>
-          <a:lnRef idx="2">
-            <a:schemeClr val="accent1"/>
-          </a:lnRef>
-          <a:fillRef idx="0">
-            <a:schemeClr val="accent1"/>
-          </a:fillRef>
-          <a:effectRef idx="1">
-            <a:schemeClr val="accent1"/>
-          </a:effectRef>
-          <a:fontRef idx="minor">
-            <a:schemeClr val="tx1"/>
-          </a:fontRef>
-        </p:style>
-      </p:cxnSp>
-      <p:sp>
-        <p:nvSpPr>
-          <p:cNvPr id="8" name="TextBox 7"/>
-          <p:cNvSpPr txBox="1"/>
-          <p:nvPr/>
-        </p:nvSpPr>
-        <p:spPr>
-          <a:xfrm>
-            <a:off x="822960" y="2176272"/>
-            <a:ext cx="6949440" cy="384048"/>
-          </a:xfrm>
-          <a:prstGeom prst="rect">
-            <a:avLst/>
-          </a:prstGeom>
-          <a:noFill/>
-        </p:spPr>
-        <p:txBody>
-          <a:bodyPr wrap="square" lIns="0" rIns="0" tIns="0" bIns="0">
-            <a:spAutoFit/>
-          </a:bodyPr>
-          <a:lstStyle/>
-          <a:p>
-            <a:pPr algn="l">
-              <a:lnSpc>
-                <a:spcPts val="1920"/>
-              </a:lnSpc>
-              <a:spcAft>
-                <a:spcPts val="0"/>
-              </a:spcAft>
-            </a:pPr>
-            <a:r>
-              <a:rPr sz="1500" b="0" i="0">
-                <a:solidFill>
-                  <a:srgbClr val="212529"/>
-                </a:solidFill>
-                <a:latin typeface="Garamond"/>
-              </a:rPr>
-              <a:t>Education, non-teaching</a:t>
-            </a:r>
-          </a:p>
-        </p:txBody>
-      </p:sp>
-      <p:sp>
-        <p:nvSpPr>
-          <p:cNvPr id="9" name="TextBox 8"/>
-          <p:cNvSpPr txBox="1"/>
-          <p:nvPr/>
-        </p:nvSpPr>
-        <p:spPr>
-          <a:xfrm>
-            <a:off x="7955279" y="2176272"/>
-            <a:ext cx="2011680" cy="384048"/>
-          </a:xfrm>
-          <a:prstGeom prst="rect">
-            <a:avLst/>
-          </a:prstGeom>
-          <a:noFill/>
-        </p:spPr>
-        <p:txBody>
-          <a:bodyPr wrap="square" lIns="0" rIns="0" tIns="0" bIns="0">
-            <a:spAutoFit/>
-          </a:bodyPr>
-          <a:lstStyle/>
-          <a:p>
-            <a:pPr algn="r">
-              <a:lnSpc>
-                <a:spcPts val="1920"/>
-              </a:lnSpc>
-              <a:spcAft>
-                <a:spcPts val="0"/>
-              </a:spcAft>
-            </a:pPr>
-            <a:r>
-              <a:rPr sz="1500" b="0" i="0">
-                <a:solidFill>
-                  <a:srgbClr val="212529"/>
-                </a:solidFill>
-                <a:latin typeface="Garamond"/>
-              </a:rPr>
-              <a:t>22.6</a:t>
-            </a:r>
-          </a:p>
-        </p:txBody>
-      </p:sp>
-      <p:sp>
-        <p:nvSpPr>
-          <p:cNvPr id="10" name="TextBox 9"/>
-          <p:cNvSpPr txBox="1"/>
-          <p:nvPr/>
-        </p:nvSpPr>
-        <p:spPr>
-          <a:xfrm>
-            <a:off x="822960" y="2560320"/>
-            <a:ext cx="6949440" cy="384048"/>
-          </a:xfrm>
-          <a:prstGeom prst="rect">
-            <a:avLst/>
-          </a:prstGeom>
-          <a:noFill/>
-        </p:spPr>
-        <p:txBody>
-          <a:bodyPr wrap="square" lIns="0" rIns="0" tIns="0" bIns="0">
-            <a:spAutoFit/>
-          </a:bodyPr>
-          <a:lstStyle/>
-          <a:p>
-            <a:pPr algn="l">
-              <a:lnSpc>
-                <a:spcPts val="1920"/>
-              </a:lnSpc>
-              <a:spcAft>
-                <a:spcPts val="0"/>
-              </a:spcAft>
-            </a:pPr>
-            <a:r>
-              <a:rPr sz="1500" b="0" i="0">
-                <a:solidFill>
-                  <a:srgbClr val="212529"/>
-                </a:solidFill>
-                <a:latin typeface="Garamond"/>
-              </a:rPr>
-              <a:t>Care</a:t>
-            </a:r>
-          </a:p>
-        </p:txBody>
-      </p:sp>
-      <p:sp>
-        <p:nvSpPr>
-          <p:cNvPr id="11" name="TextBox 10"/>
-          <p:cNvSpPr txBox="1"/>
-          <p:nvPr/>
-        </p:nvSpPr>
-        <p:spPr>
-          <a:xfrm>
-            <a:off x="7955279" y="2560320"/>
-            <a:ext cx="2011680" cy="384048"/>
-          </a:xfrm>
-          <a:prstGeom prst="rect">
-            <a:avLst/>
-          </a:prstGeom>
-          <a:noFill/>
-        </p:spPr>
-        <p:txBody>
-          <a:bodyPr wrap="square" lIns="0" rIns="0" tIns="0" bIns="0">
-            <a:spAutoFit/>
-          </a:bodyPr>
-          <a:lstStyle/>
-          <a:p>
-            <a:pPr algn="r">
-              <a:lnSpc>
-                <a:spcPts val="1920"/>
-              </a:lnSpc>
-              <a:spcAft>
-                <a:spcPts val="0"/>
-              </a:spcAft>
-            </a:pPr>
-            <a:r>
-              <a:rPr sz="1500" b="0" i="0">
-                <a:solidFill>
-                  <a:srgbClr val="212529"/>
-                </a:solidFill>
-                <a:latin typeface="Garamond"/>
-              </a:rPr>
-              <a:t>8.5</a:t>
-            </a:r>
-          </a:p>
-        </p:txBody>
-      </p:sp>
-      <p:sp>
-        <p:nvSpPr>
-          <p:cNvPr id="12" name="TextBox 11"/>
-          <p:cNvSpPr txBox="1"/>
-          <p:nvPr/>
-        </p:nvSpPr>
-        <p:spPr>
-          <a:xfrm>
-            <a:off x="822960" y="2944368"/>
-            <a:ext cx="6949440" cy="384048"/>
-          </a:xfrm>
-          <a:prstGeom prst="rect">
-            <a:avLst/>
-          </a:prstGeom>
-          <a:noFill/>
-        </p:spPr>
-        <p:txBody>
-          <a:bodyPr wrap="square" lIns="0" rIns="0" tIns="0" bIns="0">
-            <a:spAutoFit/>
-          </a:bodyPr>
-          <a:lstStyle/>
-          <a:p>
-            <a:pPr algn="l">
-              <a:lnSpc>
-                <a:spcPts val="1920"/>
-              </a:lnSpc>
-              <a:spcAft>
-                <a:spcPts val="0"/>
-              </a:spcAft>
-            </a:pPr>
-            <a:r>
-              <a:rPr sz="1500" b="0" i="0">
-                <a:solidFill>
-                  <a:srgbClr val="212529"/>
-                </a:solidFill>
-                <a:latin typeface="Garamond"/>
-              </a:rPr>
-              <a:t>Professional and managerial</a:t>
-            </a:r>
-          </a:p>
-        </p:txBody>
-      </p:sp>
-      <p:sp>
-        <p:nvSpPr>
-          <p:cNvPr id="13" name="TextBox 12"/>
-          <p:cNvSpPr txBox="1"/>
-          <p:nvPr/>
-        </p:nvSpPr>
-        <p:spPr>
-          <a:xfrm>
-            <a:off x="7955279" y="2944368"/>
-            <a:ext cx="2011680" cy="384048"/>
-          </a:xfrm>
-          <a:prstGeom prst="rect">
-            <a:avLst/>
-          </a:prstGeom>
-          <a:noFill/>
-        </p:spPr>
-        <p:txBody>
-          <a:bodyPr wrap="square" lIns="0" rIns="0" tIns="0" bIns="0">
-            <a:spAutoFit/>
-          </a:bodyPr>
-          <a:lstStyle/>
-          <a:p>
-            <a:pPr algn="r">
-              <a:lnSpc>
-                <a:spcPts val="1920"/>
-              </a:lnSpc>
-              <a:spcAft>
-                <a:spcPts val="0"/>
-              </a:spcAft>
-            </a:pPr>
-            <a:r>
-              <a:rPr sz="1500" b="0" i="0">
-                <a:solidFill>
-                  <a:srgbClr val="212529"/>
-                </a:solidFill>
-                <a:latin typeface="Garamond"/>
-              </a:rPr>
-              <a:t>32.4</a:t>
-            </a:r>
-          </a:p>
-        </p:txBody>
-      </p:sp>
-      <p:sp>
-        <p:nvSpPr>
-          <p:cNvPr id="14" name="TextBox 13"/>
-          <p:cNvSpPr txBox="1"/>
-          <p:nvPr/>
-        </p:nvSpPr>
-        <p:spPr>
-          <a:xfrm>
-            <a:off x="822960" y="3328415"/>
-            <a:ext cx="6949440" cy="384048"/>
-          </a:xfrm>
-          <a:prstGeom prst="rect">
-            <a:avLst/>
-          </a:prstGeom>
-          <a:noFill/>
-        </p:spPr>
-        <p:txBody>
-          <a:bodyPr wrap="square" lIns="0" rIns="0" tIns="0" bIns="0">
-            <a:spAutoFit/>
-          </a:bodyPr>
-          <a:lstStyle/>
-          <a:p>
-            <a:pPr algn="l">
-              <a:lnSpc>
-                <a:spcPts val="1920"/>
-              </a:lnSpc>
-              <a:spcAft>
-                <a:spcPts val="0"/>
-              </a:spcAft>
-            </a:pPr>
-            <a:r>
-              <a:rPr sz="1500" b="0" i="0">
-                <a:solidFill>
-                  <a:srgbClr val="212529"/>
-                </a:solidFill>
-                <a:latin typeface="Garamond"/>
-              </a:rPr>
-              <a:t>Sales, office and manual</a:t>
-            </a:r>
-          </a:p>
-        </p:txBody>
-      </p:sp>
-      <p:sp>
-        <p:nvSpPr>
-          <p:cNvPr id="15" name="TextBox 14"/>
-          <p:cNvSpPr txBox="1"/>
-          <p:nvPr/>
-        </p:nvSpPr>
-        <p:spPr>
-          <a:xfrm>
-            <a:off x="7955279" y="3328415"/>
-            <a:ext cx="2011680" cy="384048"/>
-          </a:xfrm>
-          <a:prstGeom prst="rect">
-            <a:avLst/>
-          </a:prstGeom>
-          <a:noFill/>
-        </p:spPr>
-        <p:txBody>
-          <a:bodyPr wrap="square" lIns="0" rIns="0" tIns="0" bIns="0">
-            <a:spAutoFit/>
-          </a:bodyPr>
-          <a:lstStyle/>
-          <a:p>
-            <a:pPr algn="r">
-              <a:lnSpc>
-                <a:spcPts val="1920"/>
-              </a:lnSpc>
-              <a:spcAft>
-                <a:spcPts val="0"/>
-              </a:spcAft>
-            </a:pPr>
-            <a:r>
-              <a:rPr sz="1500" b="0" i="0">
-                <a:solidFill>
-                  <a:srgbClr val="212529"/>
-                </a:solidFill>
-                <a:latin typeface="Garamond"/>
-              </a:rPr>
-              <a:t>36.5</a:t>
-            </a:r>
-          </a:p>
-        </p:txBody>
-      </p:sp>
-      <p:cxnSp>
-        <p:nvCxnSpPr>
-          <p:cNvPr id="16" name="Connector 15"/>
-          <p:cNvCxnSpPr/>
-          <p:nvPr/>
-        </p:nvCxnSpPr>
-        <p:spPr>
-          <a:xfrm>
-            <a:off x="822960" y="3730751"/>
-            <a:ext cx="9143999" cy="0"/>
-          </a:xfrm>
-          <a:prstGeom prst="line">
-            <a:avLst/>
-          </a:prstGeom>
-          <a:ln w="8890">
-            <a:solidFill>
-              <a:srgbClr val="212529"/>
-            </a:solidFill>
-          </a:ln>
-          <a:effectLst/>
-        </p:spPr>
-        <p:style>
-          <a:lnRef idx="2">
-            <a:schemeClr val="accent1"/>
-          </a:lnRef>
-          <a:fillRef idx="0">
-            <a:schemeClr val="accent1"/>
-          </a:fillRef>
-          <a:effectRef idx="1">
-            <a:schemeClr val="accent1"/>
-          </a:effectRef>
-          <a:fontRef idx="minor">
-            <a:schemeClr val="tx1"/>
-          </a:fontRef>
-        </p:style>
-      </p:cxnSp>
-      <p:sp>
-        <p:nvSpPr>
-          <p:cNvPr id="17" name="TextBox 16"/>
-          <p:cNvSpPr txBox="1"/>
-          <p:nvPr/>
-        </p:nvSpPr>
-        <p:spPr>
-          <a:xfrm>
-            <a:off x="822960" y="3840479"/>
-            <a:ext cx="6949440" cy="384048"/>
-          </a:xfrm>
-          <a:prstGeom prst="rect">
-            <a:avLst/>
-          </a:prstGeom>
-          <a:noFill/>
-        </p:spPr>
-        <p:txBody>
-          <a:bodyPr wrap="square" lIns="0" rIns="0" tIns="0" bIns="0">
-            <a:spAutoFit/>
-          </a:bodyPr>
-          <a:lstStyle/>
-          <a:p>
-            <a:pPr algn="l">
-              <a:lnSpc>
-                <a:spcPts val="1920"/>
-              </a:lnSpc>
-              <a:spcAft>
-                <a:spcPts val="0"/>
-              </a:spcAft>
-            </a:pPr>
-            <a:r>
-              <a:rPr sz="1500" b="0" i="0">
-                <a:solidFill>
-                  <a:srgbClr val="8F2B36"/>
-                </a:solidFill>
-                <a:latin typeface="Garamond"/>
-              </a:rPr>
-              <a:t>Memo: occupations where fewer than half of US workers hold a college degree (in red)</a:t>
-            </a:r>
-          </a:p>
-        </p:txBody>
-      </p:sp>
-      <p:sp>
-        <p:nvSpPr>
-          <p:cNvPr id="18" name="TextBox 17"/>
-          <p:cNvSpPr txBox="1"/>
-          <p:nvPr/>
-        </p:nvSpPr>
-        <p:spPr>
-          <a:xfrm>
-            <a:off x="7955279" y="3840479"/>
-            <a:ext cx="2011680" cy="384048"/>
-          </a:xfrm>
-          <a:prstGeom prst="rect">
-            <a:avLst/>
-          </a:prstGeom>
-          <a:noFill/>
-        </p:spPr>
-        <p:txBody>
-          <a:bodyPr wrap="square" lIns="0" rIns="0" tIns="0" bIns="0">
-            <a:spAutoFit/>
-          </a:bodyPr>
-          <a:lstStyle/>
-          <a:p>
-            <a:pPr algn="r">
-              <a:lnSpc>
-                <a:spcPts val="1920"/>
-              </a:lnSpc>
-              <a:spcAft>
-                <a:spcPts val="0"/>
-              </a:spcAft>
-            </a:pPr>
-            <a:r>
-              <a:rPr sz="1500" b="1" i="0">
-                <a:solidFill>
-                  <a:srgbClr val="8F2B36"/>
-                </a:solidFill>
-                <a:latin typeface="Garamond"/>
-              </a:rPr>
-              <a:t>36.3</a:t>
-            </a:r>
-          </a:p>
-        </p:txBody>
-      </p:sp>
-      <p:cxnSp>
-        <p:nvCxnSpPr>
-          <p:cNvPr id="19" name="Connector 18"/>
-          <p:cNvCxnSpPr/>
-          <p:nvPr/>
-        </p:nvCxnSpPr>
-        <p:spPr>
-          <a:xfrm>
-            <a:off x="822960" y="4261103"/>
-            <a:ext cx="9143999" cy="0"/>
-          </a:xfrm>
-          <a:prstGeom prst="line">
-            <a:avLst/>
-          </a:prstGeom>
-          <a:ln w="16510">
-            <a:solidFill>
-              <a:srgbClr val="212529"/>
-            </a:solidFill>
-          </a:ln>
-          <a:effectLst/>
-        </p:spPr>
-        <p:style>
-          <a:lnRef idx="2">
-            <a:schemeClr val="accent1"/>
-          </a:lnRef>
-          <a:fillRef idx="0">
-            <a:schemeClr val="accent1"/>
-          </a:fillRef>
-          <a:effectRef idx="1">
-            <a:schemeClr val="accent1"/>
-          </a:effectRef>
-          <a:fontRef idx="minor">
-            <a:schemeClr val="tx1"/>
-          </a:fontRef>
-        </p:style>
-      </p:cxnSp>
-      <p:sp>
-        <p:nvSpPr>
-          <p:cNvPr id="20" name="TextBox 19"/>
-          <p:cNvSpPr txBox="1"/>
-          <p:nvPr/>
-        </p:nvSpPr>
-        <p:spPr>
-          <a:xfrm>
-            <a:off x="822960" y="4498847"/>
-            <a:ext cx="10789920" cy="1097280"/>
-          </a:xfrm>
-          <a:prstGeom prst="rect">
-            <a:avLst/>
-          </a:prstGeom>
-          <a:noFill/>
-        </p:spPr>
-        <p:txBody>
-          <a:bodyPr wrap="square" lIns="0" rIns="0" tIns="0" bIns="0">
-            <a:spAutoFit/>
-          </a:bodyPr>
-          <a:lstStyle/>
-          <a:p>
-            <a:pPr algn="l">
-              <a:lnSpc>
-                <a:spcPts val="1664"/>
-              </a:lnSpc>
-              <a:spcAft>
-                <a:spcPts val="0"/>
-              </a:spcAft>
-            </a:pPr>
-            <a:r>
-              <a:rPr sz="1300" b="0" i="0">
-                <a:solidFill>
-                  <a:srgbClr val="6B7480"/>
-                </a:solidFill>
-                <a:latin typeface="Garamond"/>
-              </a:rPr>
-              <a:t>Calendar 2020–2024; 344 employed leavers. The college-degree share of each destination occupation is computed among all employed US workers aged 25–64 in the same ASEC files, 2021–2025. 31.2 of the 36.3 red points sit in the sales, office and manual group; 5.1 in professional occupations.</a:t>
-            </a:r>
-          </a:p>
-        </p:txBody>
-      </p:sp>
-      <p:sp>
-        <p:nvSpPr>
-          <p:cNvPr id="21" name="Rounded Rectangle 20">
-            <a:hlinkClick action="ppaction://hlinksldjump" r:id="rId2"/>
+              <a:t>Same person observed in two consecutive March supplements. Moves into education jobs or care pay no more than staying; only the minority moving to other professional occupations clearly gains. Half of all switchers land in occupations whose median pay is below the teacher median.</a:t>
+            </a:r>
+          </a:p>
+        </p:txBody>
+      </p:sp>
+      <p:sp>
+        <p:nvSpPr>
+          <p:cNvPr id="6" name="Rounded Rectangle 5">
+            <a:hlinkClick action="ppaction://hlinksldjump" r:id="rId3"/>
           </p:cNvPr>
           <p:cNvSpPr/>
           <p:nvPr/>
@@ -19953,7 +19394,7 @@
                 </a:solidFill>
                 <a:latin typeface="Garamond"/>
               </a:rPr>
-              <a:t>Is the teacher group constant across code changes?</a:t>
+              <a:t>The proportions behind the destinations chart</a:t>
             </a:r>
           </a:p>
         </p:txBody>
@@ -19993,30 +19434,42 @@
           </a:p>
         </p:txBody>
       </p:sp>
-      <p:pic>
-        <p:nvPicPr>
-          <p:cNvPr id="4" name="Picture 3" descr="codes_narrow.png"/>
-          <p:cNvPicPr>
-            <a:picLocks noChangeAspect="1"/>
-          </p:cNvPicPr>
-          <p:nvPr/>
-        </p:nvPicPr>
-        <p:blipFill>
-          <a:blip r:embed="rId2"/>
-          <a:stretch>
-            <a:fillRect/>
-          </a:stretch>
-        </p:blipFill>
-        <p:spPr>
-          <a:xfrm>
-            <a:off x="1119260" y="1051560"/>
-            <a:ext cx="9922998" cy="4526280"/>
-          </a:xfrm>
-          <a:prstGeom prst="rect">
-            <a:avLst/>
-          </a:prstGeom>
-        </p:spPr>
-      </p:pic>
+      <p:cxnSp>
+        <p:nvCxnSpPr>
+          <p:cNvPr id="4" name="Connector 3"/>
+          <p:cNvCxnSpPr/>
+          <p:nvPr/>
+        </p:nvCxnSpPr>
+        <p:spPr>
+          <a:xfrm>
+            <a:off x="822960" y="1554480"/>
+            <a:ext cx="9143999" cy="0"/>
+          </a:xfrm>
+          <a:prstGeom prst="line">
+            <a:avLst/>
+          </a:prstGeom>
+          <a:ln w="16510">
+            <a:solidFill>
+              <a:srgbClr val="212529"/>
+            </a:solidFill>
+          </a:ln>
+          <a:effectLst/>
+        </p:spPr>
+        <p:style>
+          <a:lnRef idx="2">
+            <a:schemeClr val="accent1"/>
+          </a:lnRef>
+          <a:fillRef idx="0">
+            <a:schemeClr val="accent1"/>
+          </a:fillRef>
+          <a:effectRef idx="1">
+            <a:schemeClr val="accent1"/>
+          </a:effectRef>
+          <a:fontRef idx="minor">
+            <a:schemeClr val="tx1"/>
+          </a:fontRef>
+        </p:style>
+      </p:cxnSp>
       <p:sp>
         <p:nvSpPr>
           <p:cNvPr id="5" name="TextBox 4"/>
@@ -20025,8 +19478,8 @@
         </p:nvSpPr>
         <p:spPr>
           <a:xfrm>
-            <a:off x="822960" y="5806440"/>
-            <a:ext cx="10789920" cy="822960"/>
+            <a:off x="822960" y="1664207"/>
+            <a:ext cx="6949440" cy="384048"/>
           </a:xfrm>
           <a:prstGeom prst="rect">
             <a:avLst/>
@@ -20041,37 +19494,640 @@
           <a:p>
             <a:pPr algn="l">
               <a:lnSpc>
-                <a:spcPts val="1855"/>
-              </a:lnSpc>
-              <a:spcAft>
-                <a:spcPts val="0"/>
-              </a:spcAft>
-            </a:pPr>
-            <a:r>
-              <a:rPr sz="1450" b="1" i="0">
-                <a:solidFill>
-                  <a:srgbClr val="102D5E"/>
-                </a:solidFill>
-                <a:latin typeface="Garamond"/>
-              </a:rPr>
-              <a:t>Key message.  </a:t>
-            </a:r>
-            <a:r>
-              <a:rPr sz="1450" b="0" i="0">
+                <a:spcPts val="1920"/>
+              </a:lnSpc>
+              <a:spcAft>
+                <a:spcPts val="0"/>
+              </a:spcAft>
+            </a:pPr>
+            <a:r>
+              <a:rPr sz="1500" b="1" i="0">
                 <a:solidFill>
                   <a:srgbClr val="212529"/>
                 </a:solidFill>
                 <a:latin typeface="Garamond"/>
               </a:rPr>
-              <a:t>Recomputing the whole series on the narrow core moves the pooled rate by 0.1 points. The 2003 and 2020 reclassifications leave no visible break.</a:t>
-            </a:r>
-          </a:p>
-        </p:txBody>
-      </p:sp>
-      <p:sp>
-        <p:nvSpPr>
-          <p:cNvPr id="6" name="Rounded Rectangle 5">
-            <a:hlinkClick action="ppaction://hlinksldjump" r:id="rId3"/>
+              <a:t>Of every 100 employed leavers…</a:t>
+            </a:r>
+          </a:p>
+        </p:txBody>
+      </p:sp>
+      <p:sp>
+        <p:nvSpPr>
+          <p:cNvPr id="6" name="TextBox 5"/>
+          <p:cNvSpPr txBox="1"/>
+          <p:nvPr/>
+        </p:nvSpPr>
+        <p:spPr>
+          <a:xfrm>
+            <a:off x="7955279" y="1664207"/>
+            <a:ext cx="2011680" cy="384048"/>
+          </a:xfrm>
+          <a:prstGeom prst="rect">
+            <a:avLst/>
+          </a:prstGeom>
+          <a:noFill/>
+        </p:spPr>
+        <p:txBody>
+          <a:bodyPr wrap="square" lIns="0" rIns="0" tIns="0" bIns="0">
+            <a:spAutoFit/>
+          </a:bodyPr>
+          <a:lstStyle/>
+          <a:p>
+            <a:pPr algn="r">
+              <a:lnSpc>
+                <a:spcPts val="1920"/>
+              </a:lnSpc>
+              <a:spcAft>
+                <a:spcPts val="0"/>
+              </a:spcAft>
+            </a:pPr>
+            <a:r>
+              <a:rPr sz="1500" b="1" i="0">
+                <a:solidFill>
+                  <a:srgbClr val="212529"/>
+                </a:solidFill>
+                <a:latin typeface="Garamond"/>
+              </a:rPr>
+              <a:t>share</a:t>
+            </a:r>
+          </a:p>
+        </p:txBody>
+      </p:sp>
+      <p:cxnSp>
+        <p:nvCxnSpPr>
+          <p:cNvPr id="7" name="Connector 6"/>
+          <p:cNvCxnSpPr/>
+          <p:nvPr/>
+        </p:nvCxnSpPr>
+        <p:spPr>
+          <a:xfrm>
+            <a:off x="822960" y="2066543"/>
+            <a:ext cx="9143999" cy="0"/>
+          </a:xfrm>
+          <a:prstGeom prst="line">
+            <a:avLst/>
+          </a:prstGeom>
+          <a:ln w="8890">
+            <a:solidFill>
+              <a:srgbClr val="212529"/>
+            </a:solidFill>
+          </a:ln>
+          <a:effectLst/>
+        </p:spPr>
+        <p:style>
+          <a:lnRef idx="2">
+            <a:schemeClr val="accent1"/>
+          </a:lnRef>
+          <a:fillRef idx="0">
+            <a:schemeClr val="accent1"/>
+          </a:fillRef>
+          <a:effectRef idx="1">
+            <a:schemeClr val="accent1"/>
+          </a:effectRef>
+          <a:fontRef idx="minor">
+            <a:schemeClr val="tx1"/>
+          </a:fontRef>
+        </p:style>
+      </p:cxnSp>
+      <p:sp>
+        <p:nvSpPr>
+          <p:cNvPr id="8" name="TextBox 7"/>
+          <p:cNvSpPr txBox="1"/>
+          <p:nvPr/>
+        </p:nvSpPr>
+        <p:spPr>
+          <a:xfrm>
+            <a:off x="822960" y="2176272"/>
+            <a:ext cx="6949440" cy="384048"/>
+          </a:xfrm>
+          <a:prstGeom prst="rect">
+            <a:avLst/>
+          </a:prstGeom>
+          <a:noFill/>
+        </p:spPr>
+        <p:txBody>
+          <a:bodyPr wrap="square" lIns="0" rIns="0" tIns="0" bIns="0">
+            <a:spAutoFit/>
+          </a:bodyPr>
+          <a:lstStyle/>
+          <a:p>
+            <a:pPr algn="l">
+              <a:lnSpc>
+                <a:spcPts val="1920"/>
+              </a:lnSpc>
+              <a:spcAft>
+                <a:spcPts val="0"/>
+              </a:spcAft>
+            </a:pPr>
+            <a:r>
+              <a:rPr sz="1500" b="0" i="0">
+                <a:solidFill>
+                  <a:srgbClr val="212529"/>
+                </a:solidFill>
+                <a:latin typeface="Garamond"/>
+              </a:rPr>
+              <a:t>Education, non-teaching</a:t>
+            </a:r>
+          </a:p>
+        </p:txBody>
+      </p:sp>
+      <p:sp>
+        <p:nvSpPr>
+          <p:cNvPr id="9" name="TextBox 8"/>
+          <p:cNvSpPr txBox="1"/>
+          <p:nvPr/>
+        </p:nvSpPr>
+        <p:spPr>
+          <a:xfrm>
+            <a:off x="7955279" y="2176272"/>
+            <a:ext cx="2011680" cy="384048"/>
+          </a:xfrm>
+          <a:prstGeom prst="rect">
+            <a:avLst/>
+          </a:prstGeom>
+          <a:noFill/>
+        </p:spPr>
+        <p:txBody>
+          <a:bodyPr wrap="square" lIns="0" rIns="0" tIns="0" bIns="0">
+            <a:spAutoFit/>
+          </a:bodyPr>
+          <a:lstStyle/>
+          <a:p>
+            <a:pPr algn="r">
+              <a:lnSpc>
+                <a:spcPts val="1920"/>
+              </a:lnSpc>
+              <a:spcAft>
+                <a:spcPts val="0"/>
+              </a:spcAft>
+            </a:pPr>
+            <a:r>
+              <a:rPr sz="1500" b="0" i="0">
+                <a:solidFill>
+                  <a:srgbClr val="212529"/>
+                </a:solidFill>
+                <a:latin typeface="Garamond"/>
+              </a:rPr>
+              <a:t>22.6</a:t>
+            </a:r>
+          </a:p>
+        </p:txBody>
+      </p:sp>
+      <p:sp>
+        <p:nvSpPr>
+          <p:cNvPr id="10" name="TextBox 9"/>
+          <p:cNvSpPr txBox="1"/>
+          <p:nvPr/>
+        </p:nvSpPr>
+        <p:spPr>
+          <a:xfrm>
+            <a:off x="822960" y="2560320"/>
+            <a:ext cx="6949440" cy="384048"/>
+          </a:xfrm>
+          <a:prstGeom prst="rect">
+            <a:avLst/>
+          </a:prstGeom>
+          <a:noFill/>
+        </p:spPr>
+        <p:txBody>
+          <a:bodyPr wrap="square" lIns="0" rIns="0" tIns="0" bIns="0">
+            <a:spAutoFit/>
+          </a:bodyPr>
+          <a:lstStyle/>
+          <a:p>
+            <a:pPr algn="l">
+              <a:lnSpc>
+                <a:spcPts val="1920"/>
+              </a:lnSpc>
+              <a:spcAft>
+                <a:spcPts val="0"/>
+              </a:spcAft>
+            </a:pPr>
+            <a:r>
+              <a:rPr sz="1500" b="0" i="0">
+                <a:solidFill>
+                  <a:srgbClr val="212529"/>
+                </a:solidFill>
+                <a:latin typeface="Garamond"/>
+              </a:rPr>
+              <a:t>Care</a:t>
+            </a:r>
+          </a:p>
+        </p:txBody>
+      </p:sp>
+      <p:sp>
+        <p:nvSpPr>
+          <p:cNvPr id="11" name="TextBox 10"/>
+          <p:cNvSpPr txBox="1"/>
+          <p:nvPr/>
+        </p:nvSpPr>
+        <p:spPr>
+          <a:xfrm>
+            <a:off x="7955279" y="2560320"/>
+            <a:ext cx="2011680" cy="384048"/>
+          </a:xfrm>
+          <a:prstGeom prst="rect">
+            <a:avLst/>
+          </a:prstGeom>
+          <a:noFill/>
+        </p:spPr>
+        <p:txBody>
+          <a:bodyPr wrap="square" lIns="0" rIns="0" tIns="0" bIns="0">
+            <a:spAutoFit/>
+          </a:bodyPr>
+          <a:lstStyle/>
+          <a:p>
+            <a:pPr algn="r">
+              <a:lnSpc>
+                <a:spcPts val="1920"/>
+              </a:lnSpc>
+              <a:spcAft>
+                <a:spcPts val="0"/>
+              </a:spcAft>
+            </a:pPr>
+            <a:r>
+              <a:rPr sz="1500" b="0" i="0">
+                <a:solidFill>
+                  <a:srgbClr val="212529"/>
+                </a:solidFill>
+                <a:latin typeface="Garamond"/>
+              </a:rPr>
+              <a:t>8.5</a:t>
+            </a:r>
+          </a:p>
+        </p:txBody>
+      </p:sp>
+      <p:sp>
+        <p:nvSpPr>
+          <p:cNvPr id="12" name="TextBox 11"/>
+          <p:cNvSpPr txBox="1"/>
+          <p:nvPr/>
+        </p:nvSpPr>
+        <p:spPr>
+          <a:xfrm>
+            <a:off x="822960" y="2944368"/>
+            <a:ext cx="6949440" cy="384048"/>
+          </a:xfrm>
+          <a:prstGeom prst="rect">
+            <a:avLst/>
+          </a:prstGeom>
+          <a:noFill/>
+        </p:spPr>
+        <p:txBody>
+          <a:bodyPr wrap="square" lIns="0" rIns="0" tIns="0" bIns="0">
+            <a:spAutoFit/>
+          </a:bodyPr>
+          <a:lstStyle/>
+          <a:p>
+            <a:pPr algn="l">
+              <a:lnSpc>
+                <a:spcPts val="1920"/>
+              </a:lnSpc>
+              <a:spcAft>
+                <a:spcPts val="0"/>
+              </a:spcAft>
+            </a:pPr>
+            <a:r>
+              <a:rPr sz="1500" b="0" i="0">
+                <a:solidFill>
+                  <a:srgbClr val="212529"/>
+                </a:solidFill>
+                <a:latin typeface="Garamond"/>
+              </a:rPr>
+              <a:t>Professional and managerial</a:t>
+            </a:r>
+          </a:p>
+        </p:txBody>
+      </p:sp>
+      <p:sp>
+        <p:nvSpPr>
+          <p:cNvPr id="13" name="TextBox 12"/>
+          <p:cNvSpPr txBox="1"/>
+          <p:nvPr/>
+        </p:nvSpPr>
+        <p:spPr>
+          <a:xfrm>
+            <a:off x="7955279" y="2944368"/>
+            <a:ext cx="2011680" cy="384048"/>
+          </a:xfrm>
+          <a:prstGeom prst="rect">
+            <a:avLst/>
+          </a:prstGeom>
+          <a:noFill/>
+        </p:spPr>
+        <p:txBody>
+          <a:bodyPr wrap="square" lIns="0" rIns="0" tIns="0" bIns="0">
+            <a:spAutoFit/>
+          </a:bodyPr>
+          <a:lstStyle/>
+          <a:p>
+            <a:pPr algn="r">
+              <a:lnSpc>
+                <a:spcPts val="1920"/>
+              </a:lnSpc>
+              <a:spcAft>
+                <a:spcPts val="0"/>
+              </a:spcAft>
+            </a:pPr>
+            <a:r>
+              <a:rPr sz="1500" b="0" i="0">
+                <a:solidFill>
+                  <a:srgbClr val="212529"/>
+                </a:solidFill>
+                <a:latin typeface="Garamond"/>
+              </a:rPr>
+              <a:t>32.4</a:t>
+            </a:r>
+          </a:p>
+        </p:txBody>
+      </p:sp>
+      <p:sp>
+        <p:nvSpPr>
+          <p:cNvPr id="14" name="TextBox 13"/>
+          <p:cNvSpPr txBox="1"/>
+          <p:nvPr/>
+        </p:nvSpPr>
+        <p:spPr>
+          <a:xfrm>
+            <a:off x="822960" y="3328415"/>
+            <a:ext cx="6949440" cy="384048"/>
+          </a:xfrm>
+          <a:prstGeom prst="rect">
+            <a:avLst/>
+          </a:prstGeom>
+          <a:noFill/>
+        </p:spPr>
+        <p:txBody>
+          <a:bodyPr wrap="square" lIns="0" rIns="0" tIns="0" bIns="0">
+            <a:spAutoFit/>
+          </a:bodyPr>
+          <a:lstStyle/>
+          <a:p>
+            <a:pPr algn="l">
+              <a:lnSpc>
+                <a:spcPts val="1920"/>
+              </a:lnSpc>
+              <a:spcAft>
+                <a:spcPts val="0"/>
+              </a:spcAft>
+            </a:pPr>
+            <a:r>
+              <a:rPr sz="1500" b="0" i="0">
+                <a:solidFill>
+                  <a:srgbClr val="212529"/>
+                </a:solidFill>
+                <a:latin typeface="Garamond"/>
+              </a:rPr>
+              <a:t>Sales, office and manual</a:t>
+            </a:r>
+          </a:p>
+        </p:txBody>
+      </p:sp>
+      <p:sp>
+        <p:nvSpPr>
+          <p:cNvPr id="15" name="TextBox 14"/>
+          <p:cNvSpPr txBox="1"/>
+          <p:nvPr/>
+        </p:nvSpPr>
+        <p:spPr>
+          <a:xfrm>
+            <a:off x="7955279" y="3328415"/>
+            <a:ext cx="2011680" cy="384048"/>
+          </a:xfrm>
+          <a:prstGeom prst="rect">
+            <a:avLst/>
+          </a:prstGeom>
+          <a:noFill/>
+        </p:spPr>
+        <p:txBody>
+          <a:bodyPr wrap="square" lIns="0" rIns="0" tIns="0" bIns="0">
+            <a:spAutoFit/>
+          </a:bodyPr>
+          <a:lstStyle/>
+          <a:p>
+            <a:pPr algn="r">
+              <a:lnSpc>
+                <a:spcPts val="1920"/>
+              </a:lnSpc>
+              <a:spcAft>
+                <a:spcPts val="0"/>
+              </a:spcAft>
+            </a:pPr>
+            <a:r>
+              <a:rPr sz="1500" b="0" i="0">
+                <a:solidFill>
+                  <a:srgbClr val="212529"/>
+                </a:solidFill>
+                <a:latin typeface="Garamond"/>
+              </a:rPr>
+              <a:t>36.5</a:t>
+            </a:r>
+          </a:p>
+        </p:txBody>
+      </p:sp>
+      <p:cxnSp>
+        <p:nvCxnSpPr>
+          <p:cNvPr id="16" name="Connector 15"/>
+          <p:cNvCxnSpPr/>
+          <p:nvPr/>
+        </p:nvCxnSpPr>
+        <p:spPr>
+          <a:xfrm>
+            <a:off x="822960" y="3730751"/>
+            <a:ext cx="9143999" cy="0"/>
+          </a:xfrm>
+          <a:prstGeom prst="line">
+            <a:avLst/>
+          </a:prstGeom>
+          <a:ln w="8890">
+            <a:solidFill>
+              <a:srgbClr val="212529"/>
+            </a:solidFill>
+          </a:ln>
+          <a:effectLst/>
+        </p:spPr>
+        <p:style>
+          <a:lnRef idx="2">
+            <a:schemeClr val="accent1"/>
+          </a:lnRef>
+          <a:fillRef idx="0">
+            <a:schemeClr val="accent1"/>
+          </a:fillRef>
+          <a:effectRef idx="1">
+            <a:schemeClr val="accent1"/>
+          </a:effectRef>
+          <a:fontRef idx="minor">
+            <a:schemeClr val="tx1"/>
+          </a:fontRef>
+        </p:style>
+      </p:cxnSp>
+      <p:sp>
+        <p:nvSpPr>
+          <p:cNvPr id="17" name="TextBox 16"/>
+          <p:cNvSpPr txBox="1"/>
+          <p:nvPr/>
+        </p:nvSpPr>
+        <p:spPr>
+          <a:xfrm>
+            <a:off x="822960" y="3840479"/>
+            <a:ext cx="6949440" cy="384048"/>
+          </a:xfrm>
+          <a:prstGeom prst="rect">
+            <a:avLst/>
+          </a:prstGeom>
+          <a:noFill/>
+        </p:spPr>
+        <p:txBody>
+          <a:bodyPr wrap="square" lIns="0" rIns="0" tIns="0" bIns="0">
+            <a:spAutoFit/>
+          </a:bodyPr>
+          <a:lstStyle/>
+          <a:p>
+            <a:pPr algn="l">
+              <a:lnSpc>
+                <a:spcPts val="1920"/>
+              </a:lnSpc>
+              <a:spcAft>
+                <a:spcPts val="0"/>
+              </a:spcAft>
+            </a:pPr>
+            <a:r>
+              <a:rPr sz="1500" b="0" i="0">
+                <a:solidFill>
+                  <a:srgbClr val="8F2B36"/>
+                </a:solidFill>
+                <a:latin typeface="Garamond"/>
+              </a:rPr>
+              <a:t>Memo: occupations where fewer than half of US workers hold a college degree (in red)</a:t>
+            </a:r>
+          </a:p>
+        </p:txBody>
+      </p:sp>
+      <p:sp>
+        <p:nvSpPr>
+          <p:cNvPr id="18" name="TextBox 17"/>
+          <p:cNvSpPr txBox="1"/>
+          <p:nvPr/>
+        </p:nvSpPr>
+        <p:spPr>
+          <a:xfrm>
+            <a:off x="7955279" y="3840479"/>
+            <a:ext cx="2011680" cy="384048"/>
+          </a:xfrm>
+          <a:prstGeom prst="rect">
+            <a:avLst/>
+          </a:prstGeom>
+          <a:noFill/>
+        </p:spPr>
+        <p:txBody>
+          <a:bodyPr wrap="square" lIns="0" rIns="0" tIns="0" bIns="0">
+            <a:spAutoFit/>
+          </a:bodyPr>
+          <a:lstStyle/>
+          <a:p>
+            <a:pPr algn="r">
+              <a:lnSpc>
+                <a:spcPts val="1920"/>
+              </a:lnSpc>
+              <a:spcAft>
+                <a:spcPts val="0"/>
+              </a:spcAft>
+            </a:pPr>
+            <a:r>
+              <a:rPr sz="1500" b="1" i="0">
+                <a:solidFill>
+                  <a:srgbClr val="8F2B36"/>
+                </a:solidFill>
+                <a:latin typeface="Garamond"/>
+              </a:rPr>
+              <a:t>36.3</a:t>
+            </a:r>
+          </a:p>
+        </p:txBody>
+      </p:sp>
+      <p:cxnSp>
+        <p:nvCxnSpPr>
+          <p:cNvPr id="19" name="Connector 18"/>
+          <p:cNvCxnSpPr/>
+          <p:nvPr/>
+        </p:nvCxnSpPr>
+        <p:spPr>
+          <a:xfrm>
+            <a:off x="822960" y="4261103"/>
+            <a:ext cx="9143999" cy="0"/>
+          </a:xfrm>
+          <a:prstGeom prst="line">
+            <a:avLst/>
+          </a:prstGeom>
+          <a:ln w="16510">
+            <a:solidFill>
+              <a:srgbClr val="212529"/>
+            </a:solidFill>
+          </a:ln>
+          <a:effectLst/>
+        </p:spPr>
+        <p:style>
+          <a:lnRef idx="2">
+            <a:schemeClr val="accent1"/>
+          </a:lnRef>
+          <a:fillRef idx="0">
+            <a:schemeClr val="accent1"/>
+          </a:fillRef>
+          <a:effectRef idx="1">
+            <a:schemeClr val="accent1"/>
+          </a:effectRef>
+          <a:fontRef idx="minor">
+            <a:schemeClr val="tx1"/>
+          </a:fontRef>
+        </p:style>
+      </p:cxnSp>
+      <p:sp>
+        <p:nvSpPr>
+          <p:cNvPr id="20" name="TextBox 19"/>
+          <p:cNvSpPr txBox="1"/>
+          <p:nvPr/>
+        </p:nvSpPr>
+        <p:spPr>
+          <a:xfrm>
+            <a:off x="822960" y="4498847"/>
+            <a:ext cx="10789920" cy="1097280"/>
+          </a:xfrm>
+          <a:prstGeom prst="rect">
+            <a:avLst/>
+          </a:prstGeom>
+          <a:noFill/>
+        </p:spPr>
+        <p:txBody>
+          <a:bodyPr wrap="square" lIns="0" rIns="0" tIns="0" bIns="0">
+            <a:spAutoFit/>
+          </a:bodyPr>
+          <a:lstStyle/>
+          <a:p>
+            <a:pPr algn="l">
+              <a:lnSpc>
+                <a:spcPts val="1664"/>
+              </a:lnSpc>
+              <a:spcAft>
+                <a:spcPts val="0"/>
+              </a:spcAft>
+            </a:pPr>
+            <a:r>
+              <a:rPr sz="1300" b="0" i="0">
+                <a:solidFill>
+                  <a:srgbClr val="6B7480"/>
+                </a:solidFill>
+                <a:latin typeface="Garamond"/>
+              </a:rPr>
+              <a:t>Calendar 2020–2024; 344 employed leavers. The college-degree share of each destination occupation is computed among all employed US workers aged 25–64 in the same ASEC files, 2021–2025. 31.2 of the 36.3 red points sit in the sales, office and manual group; 5.1 in professional occupations.</a:t>
+            </a:r>
+          </a:p>
+        </p:txBody>
+      </p:sp>
+      <p:sp>
+        <p:nvSpPr>
+          <p:cNvPr id="21" name="Rounded Rectangle 20">
+            <a:hlinkClick action="ppaction://hlinksldjump" r:id="rId2"/>
           </p:cNvPr>
           <p:cNvSpPr/>
           <p:nvPr/>
@@ -20177,7 +20233,7 @@
                 </a:solidFill>
                 <a:latin typeface="Garamond"/>
               </a:rPr>
-              <a:t>Linear probability model, fixed-effects variants</a:t>
+              <a:t>Is the teacher group constant across code changes?</a:t>
             </a:r>
           </a:p>
         </p:txBody>
@@ -20217,42 +20273,30 @@
           </a:p>
         </p:txBody>
       </p:sp>
-      <p:cxnSp>
-        <p:nvCxnSpPr>
-          <p:cNvPr id="4" name="Connector 3"/>
-          <p:cNvCxnSpPr/>
-          <p:nvPr/>
-        </p:nvCxnSpPr>
-        <p:spPr>
-          <a:xfrm>
-            <a:off x="1005840" y="1298448"/>
-            <a:ext cx="9509760" cy="0"/>
-          </a:xfrm>
-          <a:prstGeom prst="line">
-            <a:avLst/>
-          </a:prstGeom>
-          <a:ln w="16510">
-            <a:solidFill>
-              <a:srgbClr val="212529"/>
-            </a:solidFill>
-          </a:ln>
-          <a:effectLst/>
-        </p:spPr>
-        <p:style>
-          <a:lnRef idx="2">
-            <a:schemeClr val="accent1"/>
-          </a:lnRef>
-          <a:fillRef idx="0">
-            <a:schemeClr val="accent1"/>
-          </a:fillRef>
-          <a:effectRef idx="1">
-            <a:schemeClr val="accent1"/>
-          </a:effectRef>
-          <a:fontRef idx="minor">
-            <a:schemeClr val="tx1"/>
-          </a:fontRef>
-        </p:style>
-      </p:cxnSp>
+      <p:pic>
+        <p:nvPicPr>
+          <p:cNvPr id="4" name="Picture 3" descr="codes_narrow.png"/>
+          <p:cNvPicPr>
+            <a:picLocks noChangeAspect="1"/>
+          </p:cNvPicPr>
+          <p:nvPr/>
+        </p:nvPicPr>
+        <p:blipFill>
+          <a:blip r:embed="rId2"/>
+          <a:stretch>
+            <a:fillRect/>
+          </a:stretch>
+        </p:blipFill>
+        <p:spPr>
+          <a:xfrm>
+            <a:off x="1119260" y="1051560"/>
+            <a:ext cx="9922998" cy="4526280"/>
+          </a:xfrm>
+          <a:prstGeom prst="rect">
+            <a:avLst/>
+          </a:prstGeom>
+        </p:spPr>
+      </p:pic>
       <p:sp>
         <p:nvSpPr>
           <p:cNvPr id="5" name="TextBox 4"/>
@@ -20261,2918 +20305,53 @@
         </p:nvSpPr>
         <p:spPr>
           <a:xfrm>
-            <a:off x="5029200" y="1371600"/>
-            <a:ext cx="5486400" cy="274320"/>
-          </a:xfrm>
-          <a:prstGeom prst="rect">
-            <a:avLst/>
-          </a:prstGeom>
-          <a:noFill/>
-        </p:spPr>
-        <p:txBody>
-          <a:bodyPr wrap="square" lIns="0" rIns="0" tIns="0" bIns="0">
-            <a:spAutoFit/>
-          </a:bodyPr>
-          <a:lstStyle/>
-          <a:p>
-            <a:pPr algn="ctr">
-              <a:lnSpc>
-                <a:spcPts val="1600"/>
-              </a:lnSpc>
-              <a:spcAft>
-                <a:spcPts val="0"/>
-              </a:spcAft>
-            </a:pPr>
-            <a:r>
-              <a:rPr sz="1250" b="0" i="0">
+            <a:off x="822960" y="5806440"/>
+            <a:ext cx="10789920" cy="822960"/>
+          </a:xfrm>
+          <a:prstGeom prst="rect">
+            <a:avLst/>
+          </a:prstGeom>
+          <a:noFill/>
+        </p:spPr>
+        <p:txBody>
+          <a:bodyPr wrap="square" lIns="0" rIns="0" tIns="0" bIns="0">
+            <a:spAutoFit/>
+          </a:bodyPr>
+          <a:lstStyle/>
+          <a:p>
+            <a:pPr algn="l">
+              <a:lnSpc>
+                <a:spcPts val="1855"/>
+              </a:lnSpc>
+              <a:spcAft>
+                <a:spcPts val="0"/>
+              </a:spcAft>
+            </a:pPr>
+            <a:r>
+              <a:rPr sz="1450" b="1" i="0">
+                <a:solidFill>
+                  <a:srgbClr val="102D5E"/>
+                </a:solidFill>
+                <a:latin typeface="Garamond"/>
+              </a:rPr>
+              <a:t>Key message.  </a:t>
+            </a:r>
+            <a:r>
+              <a:rPr sz="1450" b="0" i="0">
                 <a:solidFill>
                   <a:srgbClr val="212529"/>
                 </a:solidFill>
                 <a:latin typeface="Garamond"/>
               </a:rPr>
-              <a:t>Dependent variable: left teaching (×100)</a:t>
-            </a:r>
-          </a:p>
-        </p:txBody>
-      </p:sp>
-      <p:cxnSp>
-        <p:nvCxnSpPr>
-          <p:cNvPr id="6" name="Connector 5"/>
-          <p:cNvCxnSpPr/>
-          <p:nvPr/>
-        </p:nvCxnSpPr>
-        <p:spPr>
-          <a:xfrm>
-            <a:off x="5029200" y="1700784"/>
-            <a:ext cx="5486400" cy="0"/>
-          </a:xfrm>
-          <a:prstGeom prst="line">
-            <a:avLst/>
-          </a:prstGeom>
-          <a:ln w="8890">
-            <a:solidFill>
-              <a:srgbClr val="212529"/>
-            </a:solidFill>
-          </a:ln>
-          <a:effectLst/>
-        </p:spPr>
-        <p:style>
-          <a:lnRef idx="2">
-            <a:schemeClr val="accent1"/>
-          </a:lnRef>
-          <a:fillRef idx="0">
-            <a:schemeClr val="accent1"/>
-          </a:fillRef>
-          <a:effectRef idx="1">
-            <a:schemeClr val="accent1"/>
-          </a:effectRef>
-          <a:fontRef idx="minor">
-            <a:schemeClr val="tx1"/>
-          </a:fontRef>
-        </p:style>
-      </p:cxnSp>
-      <p:sp>
-        <p:nvSpPr>
-          <p:cNvPr id="7" name="TextBox 6"/>
-          <p:cNvSpPr txBox="1"/>
-          <p:nvPr/>
-        </p:nvSpPr>
-        <p:spPr>
-          <a:xfrm>
-            <a:off x="5029200" y="1764792"/>
-            <a:ext cx="1691640" cy="274320"/>
-          </a:xfrm>
-          <a:prstGeom prst="rect">
-            <a:avLst/>
-          </a:prstGeom>
-          <a:noFill/>
-        </p:spPr>
-        <p:txBody>
-          <a:bodyPr wrap="square" lIns="0" rIns="0" tIns="0" bIns="0">
-            <a:spAutoFit/>
-          </a:bodyPr>
-          <a:lstStyle/>
-          <a:p>
-            <a:pPr algn="r">
-              <a:lnSpc>
-                <a:spcPts val="1600"/>
-              </a:lnSpc>
-              <a:spcAft>
-                <a:spcPts val="0"/>
-              </a:spcAft>
-            </a:pPr>
-            <a:r>
-              <a:rPr sz="1250" b="1" i="0">
-                <a:solidFill>
-                  <a:srgbClr val="212529"/>
-                </a:solidFill>
-                <a:latin typeface="Garamond"/>
-              </a:rPr>
-              <a:t>(1)</a:t>
-            </a:r>
-          </a:p>
-        </p:txBody>
-      </p:sp>
-      <p:sp>
-        <p:nvSpPr>
-          <p:cNvPr id="8" name="TextBox 7"/>
-          <p:cNvSpPr txBox="1"/>
-          <p:nvPr/>
-        </p:nvSpPr>
-        <p:spPr>
-          <a:xfrm>
-            <a:off x="6903720" y="1764792"/>
-            <a:ext cx="1691640" cy="274320"/>
-          </a:xfrm>
-          <a:prstGeom prst="rect">
-            <a:avLst/>
-          </a:prstGeom>
-          <a:noFill/>
-        </p:spPr>
-        <p:txBody>
-          <a:bodyPr wrap="square" lIns="0" rIns="0" tIns="0" bIns="0">
-            <a:spAutoFit/>
-          </a:bodyPr>
-          <a:lstStyle/>
-          <a:p>
-            <a:pPr algn="r">
-              <a:lnSpc>
-                <a:spcPts val="1600"/>
-              </a:lnSpc>
-              <a:spcAft>
-                <a:spcPts val="0"/>
-              </a:spcAft>
-            </a:pPr>
-            <a:r>
-              <a:rPr sz="1250" b="1" i="0">
-                <a:solidFill>
-                  <a:srgbClr val="212529"/>
-                </a:solidFill>
-                <a:latin typeface="Garamond"/>
-              </a:rPr>
-              <a:t>(2)</a:t>
-            </a:r>
-          </a:p>
-        </p:txBody>
-      </p:sp>
-      <p:sp>
-        <p:nvSpPr>
-          <p:cNvPr id="9" name="TextBox 8"/>
-          <p:cNvSpPr txBox="1"/>
-          <p:nvPr/>
-        </p:nvSpPr>
-        <p:spPr>
-          <a:xfrm>
-            <a:off x="8778240" y="1764792"/>
-            <a:ext cx="1691640" cy="274320"/>
-          </a:xfrm>
-          <a:prstGeom prst="rect">
-            <a:avLst/>
-          </a:prstGeom>
-          <a:noFill/>
-        </p:spPr>
-        <p:txBody>
-          <a:bodyPr wrap="square" lIns="0" rIns="0" tIns="0" bIns="0">
-            <a:spAutoFit/>
-          </a:bodyPr>
-          <a:lstStyle/>
-          <a:p>
-            <a:pPr algn="r">
-              <a:lnSpc>
-                <a:spcPts val="1600"/>
-              </a:lnSpc>
-              <a:spcAft>
-                <a:spcPts val="0"/>
-              </a:spcAft>
-            </a:pPr>
-            <a:r>
-              <a:rPr sz="1250" b="1" i="0">
-                <a:solidFill>
-                  <a:srgbClr val="212529"/>
-                </a:solidFill>
-                <a:latin typeface="Garamond"/>
-              </a:rPr>
-              <a:t>(3)</a:t>
-            </a:r>
-          </a:p>
-        </p:txBody>
-      </p:sp>
-      <p:cxnSp>
-        <p:nvCxnSpPr>
-          <p:cNvPr id="10" name="Connector 9"/>
-          <p:cNvCxnSpPr/>
-          <p:nvPr/>
-        </p:nvCxnSpPr>
-        <p:spPr>
-          <a:xfrm>
-            <a:off x="1005840" y="2093976"/>
-            <a:ext cx="9509760" cy="0"/>
-          </a:xfrm>
-          <a:prstGeom prst="line">
-            <a:avLst/>
-          </a:prstGeom>
-          <a:ln w="8890">
-            <a:solidFill>
-              <a:srgbClr val="212529"/>
-            </a:solidFill>
-          </a:ln>
-          <a:effectLst/>
-        </p:spPr>
-        <p:style>
-          <a:lnRef idx="2">
-            <a:schemeClr val="accent1"/>
-          </a:lnRef>
-          <a:fillRef idx="0">
-            <a:schemeClr val="accent1"/>
-          </a:fillRef>
-          <a:effectRef idx="1">
-            <a:schemeClr val="accent1"/>
-          </a:effectRef>
-          <a:fontRef idx="minor">
-            <a:schemeClr val="tx1"/>
-          </a:fontRef>
-        </p:style>
-      </p:cxnSp>
-      <p:sp>
-        <p:nvSpPr>
-          <p:cNvPr id="11" name="TextBox 10"/>
-          <p:cNvSpPr txBox="1"/>
-          <p:nvPr/>
-        </p:nvSpPr>
-        <p:spPr>
-          <a:xfrm>
-            <a:off x="1005840" y="2176272"/>
-            <a:ext cx="3840480" cy="274320"/>
-          </a:xfrm>
-          <a:prstGeom prst="rect">
-            <a:avLst/>
-          </a:prstGeom>
-          <a:noFill/>
-        </p:spPr>
-        <p:txBody>
-          <a:bodyPr wrap="square" lIns="0" rIns="0" tIns="0" bIns="0">
-            <a:spAutoFit/>
-          </a:bodyPr>
-          <a:lstStyle/>
-          <a:p>
-            <a:pPr algn="l">
-              <a:lnSpc>
-                <a:spcPts val="1600"/>
-              </a:lnSpc>
-              <a:spcAft>
-                <a:spcPts val="0"/>
-              </a:spcAft>
-            </a:pPr>
-            <a:r>
-              <a:rPr sz="1250" b="0" i="0">
-                <a:solidFill>
-                  <a:srgbClr val="212529"/>
-                </a:solidFill>
-                <a:latin typeface="Garamond"/>
-              </a:rPr>
-              <a:t>Full-year contract</a:t>
-            </a:r>
-          </a:p>
-        </p:txBody>
-      </p:sp>
-      <p:sp>
-        <p:nvSpPr>
-          <p:cNvPr id="12" name="TextBox 11"/>
-          <p:cNvSpPr txBox="1"/>
-          <p:nvPr/>
-        </p:nvSpPr>
-        <p:spPr>
-          <a:xfrm>
-            <a:off x="5029200" y="2176272"/>
-            <a:ext cx="1691640" cy="274320"/>
-          </a:xfrm>
-          <a:prstGeom prst="rect">
-            <a:avLst/>
-          </a:prstGeom>
-          <a:noFill/>
-        </p:spPr>
-        <p:txBody>
-          <a:bodyPr wrap="square" lIns="0" rIns="0" tIns="0" bIns="0">
-            <a:spAutoFit/>
-          </a:bodyPr>
-          <a:lstStyle/>
-          <a:p>
-            <a:pPr algn="r">
-              <a:lnSpc>
-                <a:spcPts val="1600"/>
-              </a:lnSpc>
-              <a:spcAft>
-                <a:spcPts val="0"/>
-              </a:spcAft>
-            </a:pPr>
-            <a:r>
-              <a:rPr sz="1250" b="0" i="0">
-                <a:solidFill>
-                  <a:srgbClr val="212529"/>
-                </a:solidFill>
-                <a:latin typeface="Garamond"/>
-              </a:rPr>
-              <a:t>−11.54***</a:t>
-            </a:r>
-          </a:p>
-        </p:txBody>
-      </p:sp>
-      <p:sp>
-        <p:nvSpPr>
-          <p:cNvPr id="13" name="TextBox 12"/>
-          <p:cNvSpPr txBox="1"/>
-          <p:nvPr/>
-        </p:nvSpPr>
-        <p:spPr>
-          <a:xfrm>
-            <a:off x="6903720" y="2176272"/>
-            <a:ext cx="1691640" cy="274320"/>
-          </a:xfrm>
-          <a:prstGeom prst="rect">
-            <a:avLst/>
-          </a:prstGeom>
-          <a:noFill/>
-        </p:spPr>
-        <p:txBody>
-          <a:bodyPr wrap="square" lIns="0" rIns="0" tIns="0" bIns="0">
-            <a:spAutoFit/>
-          </a:bodyPr>
-          <a:lstStyle/>
-          <a:p>
-            <a:pPr algn="r">
-              <a:lnSpc>
-                <a:spcPts val="1600"/>
-              </a:lnSpc>
-              <a:spcAft>
-                <a:spcPts val="0"/>
-              </a:spcAft>
-            </a:pPr>
-            <a:r>
-              <a:rPr sz="1250" b="0" i="0">
-                <a:solidFill>
-                  <a:srgbClr val="212529"/>
-                </a:solidFill>
-                <a:latin typeface="Garamond"/>
-              </a:rPr>
-              <a:t>−11.55***</a:t>
-            </a:r>
-          </a:p>
-        </p:txBody>
-      </p:sp>
-      <p:sp>
-        <p:nvSpPr>
-          <p:cNvPr id="14" name="TextBox 13"/>
-          <p:cNvSpPr txBox="1"/>
-          <p:nvPr/>
-        </p:nvSpPr>
-        <p:spPr>
-          <a:xfrm>
-            <a:off x="8778240" y="2176272"/>
-            <a:ext cx="1691640" cy="274320"/>
-          </a:xfrm>
-          <a:prstGeom prst="rect">
-            <a:avLst/>
-          </a:prstGeom>
-          <a:noFill/>
-        </p:spPr>
-        <p:txBody>
-          <a:bodyPr wrap="square" lIns="0" rIns="0" tIns="0" bIns="0">
-            <a:spAutoFit/>
-          </a:bodyPr>
-          <a:lstStyle/>
-          <a:p>
-            <a:pPr algn="r">
-              <a:lnSpc>
-                <a:spcPts val="1600"/>
-              </a:lnSpc>
-              <a:spcAft>
-                <a:spcPts val="0"/>
-              </a:spcAft>
-            </a:pPr>
-            <a:r>
-              <a:rPr sz="1250" b="0" i="0">
-                <a:solidFill>
-                  <a:srgbClr val="212529"/>
-                </a:solidFill>
-                <a:latin typeface="Garamond"/>
-              </a:rPr>
-              <a:t>−11.65***</a:t>
-            </a:r>
-          </a:p>
-        </p:txBody>
-      </p:sp>
-      <p:sp>
-        <p:nvSpPr>
-          <p:cNvPr id="15" name="TextBox 14"/>
-          <p:cNvSpPr txBox="1"/>
-          <p:nvPr/>
-        </p:nvSpPr>
-        <p:spPr>
-          <a:xfrm>
-            <a:off x="5029200" y="2400300"/>
-            <a:ext cx="1691640" cy="274320"/>
-          </a:xfrm>
-          <a:prstGeom prst="rect">
-            <a:avLst/>
-          </a:prstGeom>
-          <a:noFill/>
-        </p:spPr>
-        <p:txBody>
-          <a:bodyPr wrap="square" lIns="0" rIns="0" tIns="0" bIns="0">
-            <a:spAutoFit/>
-          </a:bodyPr>
-          <a:lstStyle/>
-          <a:p>
-            <a:pPr algn="r">
-              <a:lnSpc>
-                <a:spcPts val="1408"/>
-              </a:lnSpc>
-              <a:spcAft>
-                <a:spcPts val="0"/>
-              </a:spcAft>
-            </a:pPr>
-            <a:r>
-              <a:rPr sz="1100" b="0" i="0">
-                <a:solidFill>
-                  <a:srgbClr val="6B7480"/>
-                </a:solidFill>
-                <a:latin typeface="Garamond"/>
-              </a:rPr>
-              <a:t>(0.67)</a:t>
-            </a:r>
-          </a:p>
-        </p:txBody>
-      </p:sp>
-      <p:sp>
-        <p:nvSpPr>
-          <p:cNvPr id="16" name="TextBox 15"/>
-          <p:cNvSpPr txBox="1"/>
-          <p:nvPr/>
-        </p:nvSpPr>
-        <p:spPr>
-          <a:xfrm>
-            <a:off x="6903720" y="2400300"/>
-            <a:ext cx="1691640" cy="274320"/>
-          </a:xfrm>
-          <a:prstGeom prst="rect">
-            <a:avLst/>
-          </a:prstGeom>
-          <a:noFill/>
-        </p:spPr>
-        <p:txBody>
-          <a:bodyPr wrap="square" lIns="0" rIns="0" tIns="0" bIns="0">
-            <a:spAutoFit/>
-          </a:bodyPr>
-          <a:lstStyle/>
-          <a:p>
-            <a:pPr algn="r">
-              <a:lnSpc>
-                <a:spcPts val="1408"/>
-              </a:lnSpc>
-              <a:spcAft>
-                <a:spcPts val="0"/>
-              </a:spcAft>
-            </a:pPr>
-            <a:r>
-              <a:rPr sz="1100" b="0" i="0">
-                <a:solidFill>
-                  <a:srgbClr val="6B7480"/>
-                </a:solidFill>
-                <a:latin typeface="Garamond"/>
-              </a:rPr>
-              <a:t>(0.66)</a:t>
-            </a:r>
-          </a:p>
-        </p:txBody>
-      </p:sp>
-      <p:sp>
-        <p:nvSpPr>
-          <p:cNvPr id="17" name="TextBox 16"/>
-          <p:cNvSpPr txBox="1"/>
-          <p:nvPr/>
-        </p:nvSpPr>
-        <p:spPr>
-          <a:xfrm>
-            <a:off x="8778240" y="2400300"/>
-            <a:ext cx="1691640" cy="274320"/>
-          </a:xfrm>
-          <a:prstGeom prst="rect">
-            <a:avLst/>
-          </a:prstGeom>
-          <a:noFill/>
-        </p:spPr>
-        <p:txBody>
-          <a:bodyPr wrap="square" lIns="0" rIns="0" tIns="0" bIns="0">
-            <a:spAutoFit/>
-          </a:bodyPr>
-          <a:lstStyle/>
-          <a:p>
-            <a:pPr algn="r">
-              <a:lnSpc>
-                <a:spcPts val="1408"/>
-              </a:lnSpc>
-              <a:spcAft>
-                <a:spcPts val="0"/>
-              </a:spcAft>
-            </a:pPr>
-            <a:r>
-              <a:rPr sz="1100" b="0" i="0">
-                <a:solidFill>
-                  <a:srgbClr val="6B7480"/>
-                </a:solidFill>
-                <a:latin typeface="Garamond"/>
-              </a:rPr>
-              <a:t>(0.67)</a:t>
-            </a:r>
-          </a:p>
-        </p:txBody>
-      </p:sp>
-      <p:sp>
-        <p:nvSpPr>
-          <p:cNvPr id="18" name="TextBox 17"/>
-          <p:cNvSpPr txBox="1"/>
-          <p:nvPr/>
-        </p:nvSpPr>
-        <p:spPr>
-          <a:xfrm>
-            <a:off x="1005840" y="2633472"/>
-            <a:ext cx="3840480" cy="274320"/>
-          </a:xfrm>
-          <a:prstGeom prst="rect">
-            <a:avLst/>
-          </a:prstGeom>
-          <a:noFill/>
-        </p:spPr>
-        <p:txBody>
-          <a:bodyPr wrap="square" lIns="0" rIns="0" tIns="0" bIns="0">
-            <a:spAutoFit/>
-          </a:bodyPr>
-          <a:lstStyle/>
-          <a:p>
-            <a:pPr algn="l">
-              <a:lnSpc>
-                <a:spcPts val="1600"/>
-              </a:lnSpc>
-              <a:spcAft>
-                <a:spcPts val="0"/>
-              </a:spcAft>
-            </a:pPr>
-            <a:r>
-              <a:rPr sz="1250" b="0" i="0">
-                <a:solidFill>
-                  <a:srgbClr val="212529"/>
-                </a:solidFill>
-                <a:latin typeface="Garamond"/>
-              </a:rPr>
-              <a:t>Part-time contract</a:t>
-            </a:r>
-          </a:p>
-        </p:txBody>
-      </p:sp>
-      <p:sp>
-        <p:nvSpPr>
-          <p:cNvPr id="19" name="TextBox 18"/>
-          <p:cNvSpPr txBox="1"/>
-          <p:nvPr/>
-        </p:nvSpPr>
-        <p:spPr>
-          <a:xfrm>
-            <a:off x="5029200" y="2633472"/>
-            <a:ext cx="1691640" cy="274320"/>
-          </a:xfrm>
-          <a:prstGeom prst="rect">
-            <a:avLst/>
-          </a:prstGeom>
-          <a:noFill/>
-        </p:spPr>
-        <p:txBody>
-          <a:bodyPr wrap="square" lIns="0" rIns="0" tIns="0" bIns="0">
-            <a:spAutoFit/>
-          </a:bodyPr>
-          <a:lstStyle/>
-          <a:p>
-            <a:pPr algn="r">
-              <a:lnSpc>
-                <a:spcPts val="1600"/>
-              </a:lnSpc>
-              <a:spcAft>
-                <a:spcPts val="0"/>
-              </a:spcAft>
-            </a:pPr>
-            <a:r>
-              <a:rPr sz="1250" b="0" i="0">
-                <a:solidFill>
-                  <a:srgbClr val="212529"/>
-                </a:solidFill>
-                <a:latin typeface="Garamond"/>
-              </a:rPr>
-              <a:t>+8.67***</a:t>
-            </a:r>
-          </a:p>
-        </p:txBody>
-      </p:sp>
-      <p:sp>
-        <p:nvSpPr>
-          <p:cNvPr id="20" name="TextBox 19"/>
-          <p:cNvSpPr txBox="1"/>
-          <p:nvPr/>
-        </p:nvSpPr>
-        <p:spPr>
-          <a:xfrm>
-            <a:off x="6903720" y="2633472"/>
-            <a:ext cx="1691640" cy="274320"/>
-          </a:xfrm>
-          <a:prstGeom prst="rect">
-            <a:avLst/>
-          </a:prstGeom>
-          <a:noFill/>
-        </p:spPr>
-        <p:txBody>
-          <a:bodyPr wrap="square" lIns="0" rIns="0" tIns="0" bIns="0">
-            <a:spAutoFit/>
-          </a:bodyPr>
-          <a:lstStyle/>
-          <a:p>
-            <a:pPr algn="r">
-              <a:lnSpc>
-                <a:spcPts val="1600"/>
-              </a:lnSpc>
-              <a:spcAft>
-                <a:spcPts val="0"/>
-              </a:spcAft>
-            </a:pPr>
-            <a:r>
-              <a:rPr sz="1250" b="0" i="0">
-                <a:solidFill>
-                  <a:srgbClr val="212529"/>
-                </a:solidFill>
-                <a:latin typeface="Garamond"/>
-              </a:rPr>
-              <a:t>+8.67***</a:t>
-            </a:r>
-          </a:p>
-        </p:txBody>
-      </p:sp>
-      <p:sp>
-        <p:nvSpPr>
-          <p:cNvPr id="21" name="TextBox 20"/>
-          <p:cNvSpPr txBox="1"/>
-          <p:nvPr/>
-        </p:nvSpPr>
-        <p:spPr>
-          <a:xfrm>
-            <a:off x="8778240" y="2633472"/>
-            <a:ext cx="1691640" cy="274320"/>
-          </a:xfrm>
-          <a:prstGeom prst="rect">
-            <a:avLst/>
-          </a:prstGeom>
-          <a:noFill/>
-        </p:spPr>
-        <p:txBody>
-          <a:bodyPr wrap="square" lIns="0" rIns="0" tIns="0" bIns="0">
-            <a:spAutoFit/>
-          </a:bodyPr>
-          <a:lstStyle/>
-          <a:p>
-            <a:pPr algn="r">
-              <a:lnSpc>
-                <a:spcPts val="1600"/>
-              </a:lnSpc>
-              <a:spcAft>
-                <a:spcPts val="0"/>
-              </a:spcAft>
-            </a:pPr>
-            <a:r>
-              <a:rPr sz="1250" b="0" i="0">
-                <a:solidFill>
-                  <a:srgbClr val="212529"/>
-                </a:solidFill>
-                <a:latin typeface="Garamond"/>
-              </a:rPr>
-              <a:t>+8.63***</a:t>
-            </a:r>
-          </a:p>
-        </p:txBody>
-      </p:sp>
-      <p:sp>
-        <p:nvSpPr>
-          <p:cNvPr id="22" name="TextBox 21"/>
-          <p:cNvSpPr txBox="1"/>
-          <p:nvPr/>
-        </p:nvSpPr>
-        <p:spPr>
-          <a:xfrm>
-            <a:off x="5029200" y="2857500"/>
-            <a:ext cx="1691640" cy="274320"/>
-          </a:xfrm>
-          <a:prstGeom prst="rect">
-            <a:avLst/>
-          </a:prstGeom>
-          <a:noFill/>
-        </p:spPr>
-        <p:txBody>
-          <a:bodyPr wrap="square" lIns="0" rIns="0" tIns="0" bIns="0">
-            <a:spAutoFit/>
-          </a:bodyPr>
-          <a:lstStyle/>
-          <a:p>
-            <a:pPr algn="r">
-              <a:lnSpc>
-                <a:spcPts val="1408"/>
-              </a:lnSpc>
-              <a:spcAft>
-                <a:spcPts val="0"/>
-              </a:spcAft>
-            </a:pPr>
-            <a:r>
-              <a:rPr sz="1100" b="0" i="0">
-                <a:solidFill>
-                  <a:srgbClr val="6B7480"/>
-                </a:solidFill>
-                <a:latin typeface="Garamond"/>
-              </a:rPr>
-              <a:t>(1.09)</a:t>
-            </a:r>
-          </a:p>
-        </p:txBody>
-      </p:sp>
-      <p:sp>
-        <p:nvSpPr>
-          <p:cNvPr id="23" name="TextBox 22"/>
-          <p:cNvSpPr txBox="1"/>
-          <p:nvPr/>
-        </p:nvSpPr>
-        <p:spPr>
-          <a:xfrm>
-            <a:off x="6903720" y="2857500"/>
-            <a:ext cx="1691640" cy="274320"/>
-          </a:xfrm>
-          <a:prstGeom prst="rect">
-            <a:avLst/>
-          </a:prstGeom>
-          <a:noFill/>
-        </p:spPr>
-        <p:txBody>
-          <a:bodyPr wrap="square" lIns="0" rIns="0" tIns="0" bIns="0">
-            <a:spAutoFit/>
-          </a:bodyPr>
-          <a:lstStyle/>
-          <a:p>
-            <a:pPr algn="r">
-              <a:lnSpc>
-                <a:spcPts val="1408"/>
-              </a:lnSpc>
-              <a:spcAft>
-                <a:spcPts val="0"/>
-              </a:spcAft>
-            </a:pPr>
-            <a:r>
-              <a:rPr sz="1100" b="0" i="0">
-                <a:solidFill>
-                  <a:srgbClr val="6B7480"/>
-                </a:solidFill>
-                <a:latin typeface="Garamond"/>
-              </a:rPr>
-              <a:t>(1.09)</a:t>
-            </a:r>
-          </a:p>
-        </p:txBody>
-      </p:sp>
-      <p:sp>
-        <p:nvSpPr>
-          <p:cNvPr id="24" name="TextBox 23"/>
-          <p:cNvSpPr txBox="1"/>
-          <p:nvPr/>
-        </p:nvSpPr>
-        <p:spPr>
-          <a:xfrm>
-            <a:off x="8778240" y="2857500"/>
-            <a:ext cx="1691640" cy="274320"/>
-          </a:xfrm>
-          <a:prstGeom prst="rect">
-            <a:avLst/>
-          </a:prstGeom>
-          <a:noFill/>
-        </p:spPr>
-        <p:txBody>
-          <a:bodyPr wrap="square" lIns="0" rIns="0" tIns="0" bIns="0">
-            <a:spAutoFit/>
-          </a:bodyPr>
-          <a:lstStyle/>
-          <a:p>
-            <a:pPr algn="r">
-              <a:lnSpc>
-                <a:spcPts val="1408"/>
-              </a:lnSpc>
-              <a:spcAft>
-                <a:spcPts val="0"/>
-              </a:spcAft>
-            </a:pPr>
-            <a:r>
-              <a:rPr sz="1100" b="0" i="0">
-                <a:solidFill>
-                  <a:srgbClr val="6B7480"/>
-                </a:solidFill>
-                <a:latin typeface="Garamond"/>
-              </a:rPr>
-              <a:t>(1.10)</a:t>
-            </a:r>
-          </a:p>
-        </p:txBody>
-      </p:sp>
-      <p:sp>
-        <p:nvSpPr>
-          <p:cNvPr id="25" name="TextBox 24"/>
-          <p:cNvSpPr txBox="1"/>
-          <p:nvPr/>
-        </p:nvSpPr>
-        <p:spPr>
-          <a:xfrm>
-            <a:off x="1005840" y="3090672"/>
-            <a:ext cx="3840480" cy="274320"/>
-          </a:xfrm>
-          <a:prstGeom prst="rect">
-            <a:avLst/>
-          </a:prstGeom>
-          <a:noFill/>
-        </p:spPr>
-        <p:txBody>
-          <a:bodyPr wrap="square" lIns="0" rIns="0" tIns="0" bIns="0">
-            <a:spAutoFit/>
-          </a:bodyPr>
-          <a:lstStyle/>
-          <a:p>
-            <a:pPr algn="l">
-              <a:lnSpc>
-                <a:spcPts val="1600"/>
-              </a:lnSpc>
-              <a:spcAft>
-                <a:spcPts val="0"/>
-              </a:spcAft>
-            </a:pPr>
-            <a:r>
-              <a:rPr sz="1250" b="0" i="0">
-                <a:solidFill>
-                  <a:srgbClr val="212529"/>
-                </a:solidFill>
-                <a:latin typeface="Garamond"/>
-              </a:rPr>
-              <a:t>Employer pension plan</a:t>
-            </a:r>
-          </a:p>
-        </p:txBody>
-      </p:sp>
-      <p:sp>
-        <p:nvSpPr>
-          <p:cNvPr id="26" name="TextBox 25"/>
-          <p:cNvSpPr txBox="1"/>
-          <p:nvPr/>
-        </p:nvSpPr>
-        <p:spPr>
-          <a:xfrm>
-            <a:off x="5029200" y="3090672"/>
-            <a:ext cx="1691640" cy="274320"/>
-          </a:xfrm>
-          <a:prstGeom prst="rect">
-            <a:avLst/>
-          </a:prstGeom>
-          <a:noFill/>
-        </p:spPr>
-        <p:txBody>
-          <a:bodyPr wrap="square" lIns="0" rIns="0" tIns="0" bIns="0">
-            <a:spAutoFit/>
-          </a:bodyPr>
-          <a:lstStyle/>
-          <a:p>
-            <a:pPr algn="r">
-              <a:lnSpc>
-                <a:spcPts val="1600"/>
-              </a:lnSpc>
-              <a:spcAft>
-                <a:spcPts val="0"/>
-              </a:spcAft>
-            </a:pPr>
-            <a:r>
-              <a:rPr sz="1250" b="0" i="0">
-                <a:solidFill>
-                  <a:srgbClr val="212529"/>
-                </a:solidFill>
-                <a:latin typeface="Garamond"/>
-              </a:rPr>
-              <a:t>−2.35***</a:t>
-            </a:r>
-          </a:p>
-        </p:txBody>
-      </p:sp>
-      <p:sp>
-        <p:nvSpPr>
-          <p:cNvPr id="27" name="TextBox 26"/>
-          <p:cNvSpPr txBox="1"/>
-          <p:nvPr/>
-        </p:nvSpPr>
-        <p:spPr>
-          <a:xfrm>
-            <a:off x="6903720" y="3090672"/>
-            <a:ext cx="1691640" cy="274320"/>
-          </a:xfrm>
-          <a:prstGeom prst="rect">
-            <a:avLst/>
-          </a:prstGeom>
-          <a:noFill/>
-        </p:spPr>
-        <p:txBody>
-          <a:bodyPr wrap="square" lIns="0" rIns="0" tIns="0" bIns="0">
-            <a:spAutoFit/>
-          </a:bodyPr>
-          <a:lstStyle/>
-          <a:p>
-            <a:pPr algn="r">
-              <a:lnSpc>
-                <a:spcPts val="1600"/>
-              </a:lnSpc>
-              <a:spcAft>
-                <a:spcPts val="0"/>
-              </a:spcAft>
-            </a:pPr>
-            <a:r>
-              <a:rPr sz="1250" b="0" i="0">
-                <a:solidFill>
-                  <a:srgbClr val="212529"/>
-                </a:solidFill>
-                <a:latin typeface="Garamond"/>
-              </a:rPr>
-              <a:t>−2.33***</a:t>
-            </a:r>
-          </a:p>
-        </p:txBody>
-      </p:sp>
-      <p:sp>
-        <p:nvSpPr>
-          <p:cNvPr id="28" name="TextBox 27"/>
-          <p:cNvSpPr txBox="1"/>
-          <p:nvPr/>
-        </p:nvSpPr>
-        <p:spPr>
-          <a:xfrm>
-            <a:off x="8778240" y="3090672"/>
-            <a:ext cx="1691640" cy="274320"/>
-          </a:xfrm>
-          <a:prstGeom prst="rect">
-            <a:avLst/>
-          </a:prstGeom>
-          <a:noFill/>
-        </p:spPr>
-        <p:txBody>
-          <a:bodyPr wrap="square" lIns="0" rIns="0" tIns="0" bIns="0">
-            <a:spAutoFit/>
-          </a:bodyPr>
-          <a:lstStyle/>
-          <a:p>
-            <a:pPr algn="r">
-              <a:lnSpc>
-                <a:spcPts val="1600"/>
-              </a:lnSpc>
-              <a:spcAft>
-                <a:spcPts val="0"/>
-              </a:spcAft>
-            </a:pPr>
-            <a:r>
-              <a:rPr sz="1250" b="0" i="0">
-                <a:solidFill>
-                  <a:srgbClr val="212529"/>
-                </a:solidFill>
-                <a:latin typeface="Garamond"/>
-              </a:rPr>
-              <a:t>−2.33***</a:t>
-            </a:r>
-          </a:p>
-        </p:txBody>
-      </p:sp>
-      <p:sp>
-        <p:nvSpPr>
-          <p:cNvPr id="29" name="TextBox 28"/>
-          <p:cNvSpPr txBox="1"/>
-          <p:nvPr/>
-        </p:nvSpPr>
-        <p:spPr>
-          <a:xfrm>
-            <a:off x="5029200" y="3314700"/>
-            <a:ext cx="1691640" cy="274320"/>
-          </a:xfrm>
-          <a:prstGeom prst="rect">
-            <a:avLst/>
-          </a:prstGeom>
-          <a:noFill/>
-        </p:spPr>
-        <p:txBody>
-          <a:bodyPr wrap="square" lIns="0" rIns="0" tIns="0" bIns="0">
-            <a:spAutoFit/>
-          </a:bodyPr>
-          <a:lstStyle/>
-          <a:p>
-            <a:pPr algn="r">
-              <a:lnSpc>
-                <a:spcPts val="1408"/>
-              </a:lnSpc>
-              <a:spcAft>
-                <a:spcPts val="0"/>
-              </a:spcAft>
-            </a:pPr>
-            <a:r>
-              <a:rPr sz="1100" b="0" i="0">
-                <a:solidFill>
-                  <a:srgbClr val="6B7480"/>
-                </a:solidFill>
-                <a:latin typeface="Garamond"/>
-              </a:rPr>
-              <a:t>(0.52)</a:t>
-            </a:r>
-          </a:p>
-        </p:txBody>
-      </p:sp>
-      <p:sp>
-        <p:nvSpPr>
-          <p:cNvPr id="30" name="TextBox 29"/>
-          <p:cNvSpPr txBox="1"/>
-          <p:nvPr/>
-        </p:nvSpPr>
-        <p:spPr>
-          <a:xfrm>
-            <a:off x="6903720" y="3314700"/>
-            <a:ext cx="1691640" cy="274320"/>
-          </a:xfrm>
-          <a:prstGeom prst="rect">
-            <a:avLst/>
-          </a:prstGeom>
-          <a:noFill/>
-        </p:spPr>
-        <p:txBody>
-          <a:bodyPr wrap="square" lIns="0" rIns="0" tIns="0" bIns="0">
-            <a:spAutoFit/>
-          </a:bodyPr>
-          <a:lstStyle/>
-          <a:p>
-            <a:pPr algn="r">
-              <a:lnSpc>
-                <a:spcPts val="1408"/>
-              </a:lnSpc>
-              <a:spcAft>
-                <a:spcPts val="0"/>
-              </a:spcAft>
-            </a:pPr>
-            <a:r>
-              <a:rPr sz="1100" b="0" i="0">
-                <a:solidFill>
-                  <a:srgbClr val="6B7480"/>
-                </a:solidFill>
-                <a:latin typeface="Garamond"/>
-              </a:rPr>
-              <a:t>(0.52)</a:t>
-            </a:r>
-          </a:p>
-        </p:txBody>
-      </p:sp>
-      <p:sp>
-        <p:nvSpPr>
-          <p:cNvPr id="31" name="TextBox 30"/>
-          <p:cNvSpPr txBox="1"/>
-          <p:nvPr/>
-        </p:nvSpPr>
-        <p:spPr>
-          <a:xfrm>
-            <a:off x="8778240" y="3314700"/>
-            <a:ext cx="1691640" cy="274320"/>
-          </a:xfrm>
-          <a:prstGeom prst="rect">
-            <a:avLst/>
-          </a:prstGeom>
-          <a:noFill/>
-        </p:spPr>
-        <p:txBody>
-          <a:bodyPr wrap="square" lIns="0" rIns="0" tIns="0" bIns="0">
-            <a:spAutoFit/>
-          </a:bodyPr>
-          <a:lstStyle/>
-          <a:p>
-            <a:pPr algn="r">
-              <a:lnSpc>
-                <a:spcPts val="1408"/>
-              </a:lnSpc>
-              <a:spcAft>
-                <a:spcPts val="0"/>
-              </a:spcAft>
-            </a:pPr>
-            <a:r>
-              <a:rPr sz="1100" b="0" i="0">
-                <a:solidFill>
-                  <a:srgbClr val="6B7480"/>
-                </a:solidFill>
-                <a:latin typeface="Garamond"/>
-              </a:rPr>
-              <a:t>(0.52)</a:t>
-            </a:r>
-          </a:p>
-        </p:txBody>
-      </p:sp>
-      <p:sp>
-        <p:nvSpPr>
-          <p:cNvPr id="32" name="TextBox 31"/>
-          <p:cNvSpPr txBox="1"/>
-          <p:nvPr/>
-        </p:nvSpPr>
-        <p:spPr>
-          <a:xfrm>
-            <a:off x="1005840" y="3547872"/>
-            <a:ext cx="3840480" cy="274320"/>
-          </a:xfrm>
-          <a:prstGeom prst="rect">
-            <a:avLst/>
-          </a:prstGeom>
-          <a:noFill/>
-        </p:spPr>
-        <p:txBody>
-          <a:bodyPr wrap="square" lIns="0" rIns="0" tIns="0" bIns="0">
-            <a:spAutoFit/>
-          </a:bodyPr>
-          <a:lstStyle/>
-          <a:p>
-            <a:pPr algn="l">
-              <a:lnSpc>
-                <a:spcPts val="1600"/>
-              </a:lnSpc>
-              <a:spcAft>
-                <a:spcPts val="0"/>
-              </a:spcAft>
-            </a:pPr>
-            <a:r>
-              <a:rPr sz="1250" b="0" i="0">
-                <a:solidFill>
-                  <a:srgbClr val="212529"/>
-                </a:solidFill>
-                <a:latin typeface="Garamond"/>
-              </a:rPr>
-              <a:t>Public sector</a:t>
-            </a:r>
-          </a:p>
-        </p:txBody>
-      </p:sp>
-      <p:sp>
-        <p:nvSpPr>
-          <p:cNvPr id="33" name="TextBox 32"/>
-          <p:cNvSpPr txBox="1"/>
-          <p:nvPr/>
-        </p:nvSpPr>
-        <p:spPr>
-          <a:xfrm>
-            <a:off x="5029200" y="3547872"/>
-            <a:ext cx="1691640" cy="274320"/>
-          </a:xfrm>
-          <a:prstGeom prst="rect">
-            <a:avLst/>
-          </a:prstGeom>
-          <a:noFill/>
-        </p:spPr>
-        <p:txBody>
-          <a:bodyPr wrap="square" lIns="0" rIns="0" tIns="0" bIns="0">
-            <a:spAutoFit/>
-          </a:bodyPr>
-          <a:lstStyle/>
-          <a:p>
-            <a:pPr algn="r">
-              <a:lnSpc>
-                <a:spcPts val="1600"/>
-              </a:lnSpc>
-              <a:spcAft>
-                <a:spcPts val="0"/>
-              </a:spcAft>
-            </a:pPr>
-            <a:r>
-              <a:rPr sz="1250" b="0" i="0">
-                <a:solidFill>
-                  <a:srgbClr val="212529"/>
-                </a:solidFill>
-                <a:latin typeface="Garamond"/>
-              </a:rPr>
-              <a:t>−2.35***</a:t>
-            </a:r>
-          </a:p>
-        </p:txBody>
-      </p:sp>
-      <p:sp>
-        <p:nvSpPr>
-          <p:cNvPr id="34" name="TextBox 33"/>
-          <p:cNvSpPr txBox="1"/>
-          <p:nvPr/>
-        </p:nvSpPr>
-        <p:spPr>
-          <a:xfrm>
-            <a:off x="6903720" y="3547872"/>
-            <a:ext cx="1691640" cy="274320"/>
-          </a:xfrm>
-          <a:prstGeom prst="rect">
-            <a:avLst/>
-          </a:prstGeom>
-          <a:noFill/>
-        </p:spPr>
-        <p:txBody>
-          <a:bodyPr wrap="square" lIns="0" rIns="0" tIns="0" bIns="0">
-            <a:spAutoFit/>
-          </a:bodyPr>
-          <a:lstStyle/>
-          <a:p>
-            <a:pPr algn="r">
-              <a:lnSpc>
-                <a:spcPts val="1600"/>
-              </a:lnSpc>
-              <a:spcAft>
-                <a:spcPts val="0"/>
-              </a:spcAft>
-            </a:pPr>
-            <a:r>
-              <a:rPr sz="1250" b="0" i="0">
-                <a:solidFill>
-                  <a:srgbClr val="212529"/>
-                </a:solidFill>
-                <a:latin typeface="Garamond"/>
-              </a:rPr>
-              <a:t>−2.38***</a:t>
-            </a:r>
-          </a:p>
-        </p:txBody>
-      </p:sp>
-      <p:sp>
-        <p:nvSpPr>
-          <p:cNvPr id="35" name="TextBox 34"/>
-          <p:cNvSpPr txBox="1"/>
-          <p:nvPr/>
-        </p:nvSpPr>
-        <p:spPr>
-          <a:xfrm>
-            <a:off x="8778240" y="3547872"/>
-            <a:ext cx="1691640" cy="274320"/>
-          </a:xfrm>
-          <a:prstGeom prst="rect">
-            <a:avLst/>
-          </a:prstGeom>
-          <a:noFill/>
-        </p:spPr>
-        <p:txBody>
-          <a:bodyPr wrap="square" lIns="0" rIns="0" tIns="0" bIns="0">
-            <a:spAutoFit/>
-          </a:bodyPr>
-          <a:lstStyle/>
-          <a:p>
-            <a:pPr algn="r">
-              <a:lnSpc>
-                <a:spcPts val="1600"/>
-              </a:lnSpc>
-              <a:spcAft>
-                <a:spcPts val="0"/>
-              </a:spcAft>
-            </a:pPr>
-            <a:r>
-              <a:rPr sz="1250" b="0" i="0">
-                <a:solidFill>
-                  <a:srgbClr val="212529"/>
-                </a:solidFill>
-                <a:latin typeface="Garamond"/>
-              </a:rPr>
-              <a:t>−2.39***</a:t>
-            </a:r>
-          </a:p>
-        </p:txBody>
-      </p:sp>
-      <p:sp>
-        <p:nvSpPr>
-          <p:cNvPr id="36" name="TextBox 35"/>
-          <p:cNvSpPr txBox="1"/>
-          <p:nvPr/>
-        </p:nvSpPr>
-        <p:spPr>
-          <a:xfrm>
-            <a:off x="5029200" y="3771900"/>
-            <a:ext cx="1691640" cy="274320"/>
-          </a:xfrm>
-          <a:prstGeom prst="rect">
-            <a:avLst/>
-          </a:prstGeom>
-          <a:noFill/>
-        </p:spPr>
-        <p:txBody>
-          <a:bodyPr wrap="square" lIns="0" rIns="0" tIns="0" bIns="0">
-            <a:spAutoFit/>
-          </a:bodyPr>
-          <a:lstStyle/>
-          <a:p>
-            <a:pPr algn="r">
-              <a:lnSpc>
-                <a:spcPts val="1408"/>
-              </a:lnSpc>
-              <a:spcAft>
-                <a:spcPts val="0"/>
-              </a:spcAft>
-            </a:pPr>
-            <a:r>
-              <a:rPr sz="1100" b="0" i="0">
-                <a:solidFill>
-                  <a:srgbClr val="6B7480"/>
-                </a:solidFill>
-                <a:latin typeface="Garamond"/>
-              </a:rPr>
-              <a:t>(0.56)</a:t>
-            </a:r>
-          </a:p>
-        </p:txBody>
-      </p:sp>
-      <p:sp>
-        <p:nvSpPr>
-          <p:cNvPr id="37" name="TextBox 36"/>
-          <p:cNvSpPr txBox="1"/>
-          <p:nvPr/>
-        </p:nvSpPr>
-        <p:spPr>
-          <a:xfrm>
-            <a:off x="6903720" y="3771900"/>
-            <a:ext cx="1691640" cy="274320"/>
-          </a:xfrm>
-          <a:prstGeom prst="rect">
-            <a:avLst/>
-          </a:prstGeom>
-          <a:noFill/>
-        </p:spPr>
-        <p:txBody>
-          <a:bodyPr wrap="square" lIns="0" rIns="0" tIns="0" bIns="0">
-            <a:spAutoFit/>
-          </a:bodyPr>
-          <a:lstStyle/>
-          <a:p>
-            <a:pPr algn="r">
-              <a:lnSpc>
-                <a:spcPts val="1408"/>
-              </a:lnSpc>
-              <a:spcAft>
-                <a:spcPts val="0"/>
-              </a:spcAft>
-            </a:pPr>
-            <a:r>
-              <a:rPr sz="1100" b="0" i="0">
-                <a:solidFill>
-                  <a:srgbClr val="6B7480"/>
-                </a:solidFill>
-                <a:latin typeface="Garamond"/>
-              </a:rPr>
-              <a:t>(0.56)</a:t>
-            </a:r>
-          </a:p>
-        </p:txBody>
-      </p:sp>
-      <p:sp>
-        <p:nvSpPr>
-          <p:cNvPr id="38" name="TextBox 37"/>
-          <p:cNvSpPr txBox="1"/>
-          <p:nvPr/>
-        </p:nvSpPr>
-        <p:spPr>
-          <a:xfrm>
-            <a:off x="8778240" y="3771900"/>
-            <a:ext cx="1691640" cy="274320"/>
-          </a:xfrm>
-          <a:prstGeom prst="rect">
-            <a:avLst/>
-          </a:prstGeom>
-          <a:noFill/>
-        </p:spPr>
-        <p:txBody>
-          <a:bodyPr wrap="square" lIns="0" rIns="0" tIns="0" bIns="0">
-            <a:spAutoFit/>
-          </a:bodyPr>
-          <a:lstStyle/>
-          <a:p>
-            <a:pPr algn="r">
-              <a:lnSpc>
-                <a:spcPts val="1408"/>
-              </a:lnSpc>
-              <a:spcAft>
-                <a:spcPts val="0"/>
-              </a:spcAft>
-            </a:pPr>
-            <a:r>
-              <a:rPr sz="1100" b="0" i="0">
-                <a:solidFill>
-                  <a:srgbClr val="6B7480"/>
-                </a:solidFill>
-                <a:latin typeface="Garamond"/>
-              </a:rPr>
-              <a:t>(0.56)</a:t>
-            </a:r>
-          </a:p>
-        </p:txBody>
-      </p:sp>
-      <p:sp>
-        <p:nvSpPr>
-          <p:cNvPr id="39" name="TextBox 38"/>
-          <p:cNvSpPr txBox="1"/>
-          <p:nvPr/>
-        </p:nvSpPr>
-        <p:spPr>
-          <a:xfrm>
-            <a:off x="1005840" y="4005072"/>
-            <a:ext cx="3840480" cy="274320"/>
-          </a:xfrm>
-          <a:prstGeom prst="rect">
-            <a:avLst/>
-          </a:prstGeom>
-          <a:noFill/>
-        </p:spPr>
-        <p:txBody>
-          <a:bodyPr wrap="square" lIns="0" rIns="0" tIns="0" bIns="0">
-            <a:spAutoFit/>
-          </a:bodyPr>
-          <a:lstStyle/>
-          <a:p>
-            <a:pPr algn="l">
-              <a:lnSpc>
-                <a:spcPts val="1600"/>
-              </a:lnSpc>
-              <a:spcAft>
-                <a:spcPts val="0"/>
-              </a:spcAft>
-            </a:pPr>
-            <a:r>
-              <a:rPr sz="1250" b="0" i="0">
-                <a:solidFill>
-                  <a:srgbClr val="212529"/>
-                </a:solidFill>
-                <a:latin typeface="Garamond"/>
-              </a:rPr>
-              <a:t>New baby during the year</a:t>
-            </a:r>
-          </a:p>
-        </p:txBody>
-      </p:sp>
-      <p:sp>
-        <p:nvSpPr>
-          <p:cNvPr id="40" name="TextBox 39"/>
-          <p:cNvSpPr txBox="1"/>
-          <p:nvPr/>
-        </p:nvSpPr>
-        <p:spPr>
-          <a:xfrm>
-            <a:off x="5029200" y="4005072"/>
-            <a:ext cx="1691640" cy="274320"/>
-          </a:xfrm>
-          <a:prstGeom prst="rect">
-            <a:avLst/>
-          </a:prstGeom>
-          <a:noFill/>
-        </p:spPr>
-        <p:txBody>
-          <a:bodyPr wrap="square" lIns="0" rIns="0" tIns="0" bIns="0">
-            <a:spAutoFit/>
-          </a:bodyPr>
-          <a:lstStyle/>
-          <a:p>
-            <a:pPr algn="r">
-              <a:lnSpc>
-                <a:spcPts val="1600"/>
-              </a:lnSpc>
-              <a:spcAft>
-                <a:spcPts val="0"/>
-              </a:spcAft>
-            </a:pPr>
-            <a:r>
-              <a:rPr sz="1250" b="0" i="0">
-                <a:solidFill>
-                  <a:srgbClr val="212529"/>
-                </a:solidFill>
-                <a:latin typeface="Garamond"/>
-              </a:rPr>
-              <a:t>+5.72***</a:t>
-            </a:r>
-          </a:p>
-        </p:txBody>
-      </p:sp>
-      <p:sp>
-        <p:nvSpPr>
-          <p:cNvPr id="41" name="TextBox 40"/>
-          <p:cNvSpPr txBox="1"/>
-          <p:nvPr/>
-        </p:nvSpPr>
-        <p:spPr>
-          <a:xfrm>
-            <a:off x="6903720" y="4005072"/>
-            <a:ext cx="1691640" cy="274320"/>
-          </a:xfrm>
-          <a:prstGeom prst="rect">
-            <a:avLst/>
-          </a:prstGeom>
-          <a:noFill/>
-        </p:spPr>
-        <p:txBody>
-          <a:bodyPr wrap="square" lIns="0" rIns="0" tIns="0" bIns="0">
-            <a:spAutoFit/>
-          </a:bodyPr>
-          <a:lstStyle/>
-          <a:p>
-            <a:pPr algn="r">
-              <a:lnSpc>
-                <a:spcPts val="1600"/>
-              </a:lnSpc>
-              <a:spcAft>
-                <a:spcPts val="0"/>
-              </a:spcAft>
-            </a:pPr>
-            <a:r>
-              <a:rPr sz="1250" b="0" i="0">
-                <a:solidFill>
-                  <a:srgbClr val="212529"/>
-                </a:solidFill>
-                <a:latin typeface="Garamond"/>
-              </a:rPr>
-              <a:t>+5.63***</a:t>
-            </a:r>
-          </a:p>
-        </p:txBody>
-      </p:sp>
-      <p:sp>
-        <p:nvSpPr>
-          <p:cNvPr id="42" name="TextBox 41"/>
-          <p:cNvSpPr txBox="1"/>
-          <p:nvPr/>
-        </p:nvSpPr>
-        <p:spPr>
-          <a:xfrm>
-            <a:off x="8778240" y="4005072"/>
-            <a:ext cx="1691640" cy="274320"/>
-          </a:xfrm>
-          <a:prstGeom prst="rect">
-            <a:avLst/>
-          </a:prstGeom>
-          <a:noFill/>
-        </p:spPr>
-        <p:txBody>
-          <a:bodyPr wrap="square" lIns="0" rIns="0" tIns="0" bIns="0">
-            <a:spAutoFit/>
-          </a:bodyPr>
-          <a:lstStyle/>
-          <a:p>
-            <a:pPr algn="r">
-              <a:lnSpc>
-                <a:spcPts val="1600"/>
-              </a:lnSpc>
-              <a:spcAft>
-                <a:spcPts val="0"/>
-              </a:spcAft>
-            </a:pPr>
-            <a:r>
-              <a:rPr sz="1250" b="0" i="0">
-                <a:solidFill>
-                  <a:srgbClr val="212529"/>
-                </a:solidFill>
-                <a:latin typeface="Garamond"/>
-              </a:rPr>
-              <a:t>+5.71***</a:t>
-            </a:r>
-          </a:p>
-        </p:txBody>
-      </p:sp>
-      <p:sp>
-        <p:nvSpPr>
-          <p:cNvPr id="43" name="TextBox 42"/>
-          <p:cNvSpPr txBox="1"/>
-          <p:nvPr/>
-        </p:nvSpPr>
-        <p:spPr>
-          <a:xfrm>
-            <a:off x="5029200" y="4229100"/>
-            <a:ext cx="1691640" cy="274320"/>
-          </a:xfrm>
-          <a:prstGeom prst="rect">
-            <a:avLst/>
-          </a:prstGeom>
-          <a:noFill/>
-        </p:spPr>
-        <p:txBody>
-          <a:bodyPr wrap="square" lIns="0" rIns="0" tIns="0" bIns="0">
-            <a:spAutoFit/>
-          </a:bodyPr>
-          <a:lstStyle/>
-          <a:p>
-            <a:pPr algn="r">
-              <a:lnSpc>
-                <a:spcPts val="1408"/>
-              </a:lnSpc>
-              <a:spcAft>
-                <a:spcPts val="0"/>
-              </a:spcAft>
-            </a:pPr>
-            <a:r>
-              <a:rPr sz="1100" b="0" i="0">
-                <a:solidFill>
-                  <a:srgbClr val="6B7480"/>
-                </a:solidFill>
-                <a:latin typeface="Garamond"/>
-              </a:rPr>
-              <a:t>(1.56)</a:t>
-            </a:r>
-          </a:p>
-        </p:txBody>
-      </p:sp>
-      <p:sp>
-        <p:nvSpPr>
-          <p:cNvPr id="44" name="TextBox 43"/>
-          <p:cNvSpPr txBox="1"/>
-          <p:nvPr/>
-        </p:nvSpPr>
-        <p:spPr>
-          <a:xfrm>
-            <a:off x="6903720" y="4229100"/>
-            <a:ext cx="1691640" cy="274320"/>
-          </a:xfrm>
-          <a:prstGeom prst="rect">
-            <a:avLst/>
-          </a:prstGeom>
-          <a:noFill/>
-        </p:spPr>
-        <p:txBody>
-          <a:bodyPr wrap="square" lIns="0" rIns="0" tIns="0" bIns="0">
-            <a:spAutoFit/>
-          </a:bodyPr>
-          <a:lstStyle/>
-          <a:p>
-            <a:pPr algn="r">
-              <a:lnSpc>
-                <a:spcPts val="1408"/>
-              </a:lnSpc>
-              <a:spcAft>
-                <a:spcPts val="0"/>
-              </a:spcAft>
-            </a:pPr>
-            <a:r>
-              <a:rPr sz="1100" b="0" i="0">
-                <a:solidFill>
-                  <a:srgbClr val="6B7480"/>
-                </a:solidFill>
-                <a:latin typeface="Garamond"/>
-              </a:rPr>
-              <a:t>(1.56)</a:t>
-            </a:r>
-          </a:p>
-        </p:txBody>
-      </p:sp>
-      <p:sp>
-        <p:nvSpPr>
-          <p:cNvPr id="45" name="TextBox 44"/>
-          <p:cNvSpPr txBox="1"/>
-          <p:nvPr/>
-        </p:nvSpPr>
-        <p:spPr>
-          <a:xfrm>
-            <a:off x="8778240" y="4229100"/>
-            <a:ext cx="1691640" cy="274320"/>
-          </a:xfrm>
-          <a:prstGeom prst="rect">
-            <a:avLst/>
-          </a:prstGeom>
-          <a:noFill/>
-        </p:spPr>
-        <p:txBody>
-          <a:bodyPr wrap="square" lIns="0" rIns="0" tIns="0" bIns="0">
-            <a:spAutoFit/>
-          </a:bodyPr>
-          <a:lstStyle/>
-          <a:p>
-            <a:pPr algn="r">
-              <a:lnSpc>
-                <a:spcPts val="1408"/>
-              </a:lnSpc>
-              <a:spcAft>
-                <a:spcPts val="0"/>
-              </a:spcAft>
-            </a:pPr>
-            <a:r>
-              <a:rPr sz="1100" b="0" i="0">
-                <a:solidFill>
-                  <a:srgbClr val="6B7480"/>
-                </a:solidFill>
-                <a:latin typeface="Garamond"/>
-              </a:rPr>
-              <a:t>(1.56)</a:t>
-            </a:r>
-          </a:p>
-        </p:txBody>
-      </p:sp>
-      <p:sp>
-        <p:nvSpPr>
-          <p:cNvPr id="46" name="TextBox 45"/>
-          <p:cNvSpPr txBox="1"/>
-          <p:nvPr/>
-        </p:nvSpPr>
-        <p:spPr>
-          <a:xfrm>
-            <a:off x="1005840" y="4462272"/>
-            <a:ext cx="3840480" cy="274320"/>
-          </a:xfrm>
-          <a:prstGeom prst="rect">
-            <a:avLst/>
-          </a:prstGeom>
-          <a:noFill/>
-        </p:spPr>
-        <p:txBody>
-          <a:bodyPr wrap="square" lIns="0" rIns="0" tIns="0" bIns="0">
-            <a:spAutoFit/>
-          </a:bodyPr>
-          <a:lstStyle/>
-          <a:p>
-            <a:pPr algn="l">
-              <a:lnSpc>
-                <a:spcPts val="1600"/>
-              </a:lnSpc>
-              <a:spcAft>
-                <a:spcPts val="0"/>
-              </a:spcAft>
-            </a:pPr>
-            <a:r>
-              <a:rPr sz="1250" b="0" i="0">
-                <a:solidFill>
-                  <a:srgbClr val="212529"/>
-                </a:solidFill>
-                <a:latin typeface="Garamond"/>
-              </a:rPr>
-              <a:t>With a disability</a:t>
-            </a:r>
-          </a:p>
-        </p:txBody>
-      </p:sp>
-      <p:sp>
-        <p:nvSpPr>
-          <p:cNvPr id="47" name="TextBox 46"/>
-          <p:cNvSpPr txBox="1"/>
-          <p:nvPr/>
-        </p:nvSpPr>
-        <p:spPr>
-          <a:xfrm>
-            <a:off x="5029200" y="4462272"/>
-            <a:ext cx="1691640" cy="274320"/>
-          </a:xfrm>
-          <a:prstGeom prst="rect">
-            <a:avLst/>
-          </a:prstGeom>
-          <a:noFill/>
-        </p:spPr>
-        <p:txBody>
-          <a:bodyPr wrap="square" lIns="0" rIns="0" tIns="0" bIns="0">
-            <a:spAutoFit/>
-          </a:bodyPr>
-          <a:lstStyle/>
-          <a:p>
-            <a:pPr algn="r">
-              <a:lnSpc>
-                <a:spcPts val="1600"/>
-              </a:lnSpc>
-              <a:spcAft>
-                <a:spcPts val="0"/>
-              </a:spcAft>
-            </a:pPr>
-            <a:r>
-              <a:rPr sz="1250" b="0" i="0">
-                <a:solidFill>
-                  <a:srgbClr val="212529"/>
-                </a:solidFill>
-                <a:latin typeface="Garamond"/>
-              </a:rPr>
-              <a:t>+8.85***</a:t>
-            </a:r>
-          </a:p>
-        </p:txBody>
-      </p:sp>
-      <p:sp>
-        <p:nvSpPr>
-          <p:cNvPr id="48" name="TextBox 47"/>
-          <p:cNvSpPr txBox="1"/>
-          <p:nvPr/>
-        </p:nvSpPr>
-        <p:spPr>
-          <a:xfrm>
-            <a:off x="6903720" y="4462272"/>
-            <a:ext cx="1691640" cy="274320"/>
-          </a:xfrm>
-          <a:prstGeom prst="rect">
-            <a:avLst/>
-          </a:prstGeom>
-          <a:noFill/>
-        </p:spPr>
-        <p:txBody>
-          <a:bodyPr wrap="square" lIns="0" rIns="0" tIns="0" bIns="0">
-            <a:spAutoFit/>
-          </a:bodyPr>
-          <a:lstStyle/>
-          <a:p>
-            <a:pPr algn="r">
-              <a:lnSpc>
-                <a:spcPts val="1600"/>
-              </a:lnSpc>
-              <a:spcAft>
-                <a:spcPts val="0"/>
-              </a:spcAft>
-            </a:pPr>
-            <a:r>
-              <a:rPr sz="1250" b="0" i="0">
-                <a:solidFill>
-                  <a:srgbClr val="212529"/>
-                </a:solidFill>
-                <a:latin typeface="Garamond"/>
-              </a:rPr>
-              <a:t>+8.94***</a:t>
-            </a:r>
-          </a:p>
-        </p:txBody>
-      </p:sp>
-      <p:sp>
-        <p:nvSpPr>
-          <p:cNvPr id="49" name="TextBox 48"/>
-          <p:cNvSpPr txBox="1"/>
-          <p:nvPr/>
-        </p:nvSpPr>
-        <p:spPr>
-          <a:xfrm>
-            <a:off x="8778240" y="4462272"/>
-            <a:ext cx="1691640" cy="274320"/>
-          </a:xfrm>
-          <a:prstGeom prst="rect">
-            <a:avLst/>
-          </a:prstGeom>
-          <a:noFill/>
-        </p:spPr>
-        <p:txBody>
-          <a:bodyPr wrap="square" lIns="0" rIns="0" tIns="0" bIns="0">
-            <a:spAutoFit/>
-          </a:bodyPr>
-          <a:lstStyle/>
-          <a:p>
-            <a:pPr algn="r">
-              <a:lnSpc>
-                <a:spcPts val="1600"/>
-              </a:lnSpc>
-              <a:spcAft>
-                <a:spcPts val="0"/>
-              </a:spcAft>
-            </a:pPr>
-            <a:r>
-              <a:rPr sz="1250" b="0" i="0">
-                <a:solidFill>
-                  <a:srgbClr val="212529"/>
-                </a:solidFill>
-                <a:latin typeface="Garamond"/>
-              </a:rPr>
-              <a:t>+8.94***</a:t>
-            </a:r>
-          </a:p>
-        </p:txBody>
-      </p:sp>
-      <p:sp>
-        <p:nvSpPr>
-          <p:cNvPr id="50" name="TextBox 49"/>
-          <p:cNvSpPr txBox="1"/>
-          <p:nvPr/>
-        </p:nvSpPr>
-        <p:spPr>
-          <a:xfrm>
-            <a:off x="5029200" y="4686300"/>
-            <a:ext cx="1691640" cy="274320"/>
-          </a:xfrm>
-          <a:prstGeom prst="rect">
-            <a:avLst/>
-          </a:prstGeom>
-          <a:noFill/>
-        </p:spPr>
-        <p:txBody>
-          <a:bodyPr wrap="square" lIns="0" rIns="0" tIns="0" bIns="0">
-            <a:spAutoFit/>
-          </a:bodyPr>
-          <a:lstStyle/>
-          <a:p>
-            <a:pPr algn="r">
-              <a:lnSpc>
-                <a:spcPts val="1408"/>
-              </a:lnSpc>
-              <a:spcAft>
-                <a:spcPts val="0"/>
-              </a:spcAft>
-            </a:pPr>
-            <a:r>
-              <a:rPr sz="1100" b="0" i="0">
-                <a:solidFill>
-                  <a:srgbClr val="6B7480"/>
-                </a:solidFill>
-                <a:latin typeface="Garamond"/>
-              </a:rPr>
-              <a:t>(2.14)</a:t>
-            </a:r>
-          </a:p>
-        </p:txBody>
-      </p:sp>
-      <p:sp>
-        <p:nvSpPr>
-          <p:cNvPr id="51" name="TextBox 50"/>
-          <p:cNvSpPr txBox="1"/>
-          <p:nvPr/>
-        </p:nvSpPr>
-        <p:spPr>
-          <a:xfrm>
-            <a:off x="6903720" y="4686300"/>
-            <a:ext cx="1691640" cy="274320"/>
-          </a:xfrm>
-          <a:prstGeom prst="rect">
-            <a:avLst/>
-          </a:prstGeom>
-          <a:noFill/>
-        </p:spPr>
-        <p:txBody>
-          <a:bodyPr wrap="square" lIns="0" rIns="0" tIns="0" bIns="0">
-            <a:spAutoFit/>
-          </a:bodyPr>
-          <a:lstStyle/>
-          <a:p>
-            <a:pPr algn="r">
-              <a:lnSpc>
-                <a:spcPts val="1408"/>
-              </a:lnSpc>
-              <a:spcAft>
-                <a:spcPts val="0"/>
-              </a:spcAft>
-            </a:pPr>
-            <a:r>
-              <a:rPr sz="1100" b="0" i="0">
-                <a:solidFill>
-                  <a:srgbClr val="6B7480"/>
-                </a:solidFill>
-                <a:latin typeface="Garamond"/>
-              </a:rPr>
-              <a:t>(2.14)</a:t>
-            </a:r>
-          </a:p>
-        </p:txBody>
-      </p:sp>
-      <p:sp>
-        <p:nvSpPr>
-          <p:cNvPr id="52" name="TextBox 51"/>
-          <p:cNvSpPr txBox="1"/>
-          <p:nvPr/>
-        </p:nvSpPr>
-        <p:spPr>
-          <a:xfrm>
-            <a:off x="8778240" y="4686300"/>
-            <a:ext cx="1691640" cy="274320"/>
-          </a:xfrm>
-          <a:prstGeom prst="rect">
-            <a:avLst/>
-          </a:prstGeom>
-          <a:noFill/>
-        </p:spPr>
-        <p:txBody>
-          <a:bodyPr wrap="square" lIns="0" rIns="0" tIns="0" bIns="0">
-            <a:spAutoFit/>
-          </a:bodyPr>
-          <a:lstStyle/>
-          <a:p>
-            <a:pPr algn="r">
-              <a:lnSpc>
-                <a:spcPts val="1408"/>
-              </a:lnSpc>
-              <a:spcAft>
-                <a:spcPts val="0"/>
-              </a:spcAft>
-            </a:pPr>
-            <a:r>
-              <a:rPr sz="1100" b="0" i="0">
-                <a:solidFill>
-                  <a:srgbClr val="6B7480"/>
-                </a:solidFill>
-                <a:latin typeface="Garamond"/>
-              </a:rPr>
-              <a:t>(2.14)</a:t>
-            </a:r>
-          </a:p>
-        </p:txBody>
-      </p:sp>
-      <p:sp>
-        <p:nvSpPr>
-          <p:cNvPr id="53" name="TextBox 52"/>
-          <p:cNvSpPr txBox="1"/>
-          <p:nvPr/>
-        </p:nvSpPr>
-        <p:spPr>
-          <a:xfrm>
-            <a:off x="1005840" y="4919472"/>
-            <a:ext cx="3840480" cy="274320"/>
-          </a:xfrm>
-          <a:prstGeom prst="rect">
-            <a:avLst/>
-          </a:prstGeom>
-          <a:noFill/>
-        </p:spPr>
-        <p:txBody>
-          <a:bodyPr wrap="square" lIns="0" rIns="0" tIns="0" bIns="0">
-            <a:spAutoFit/>
-          </a:bodyPr>
-          <a:lstStyle/>
-          <a:p>
-            <a:pPr algn="l">
-              <a:lnSpc>
-                <a:spcPts val="1600"/>
-              </a:lnSpc>
-              <a:spcAft>
-                <a:spcPts val="0"/>
-              </a:spcAft>
-            </a:pPr>
-            <a:r>
-              <a:rPr sz="1250" b="0" i="0">
-                <a:solidFill>
-                  <a:srgbClr val="212529"/>
-                </a:solidFill>
-                <a:latin typeface="Garamond"/>
-              </a:rPr>
-              <a:t>Bottom-quartile household income</a:t>
-            </a:r>
-          </a:p>
-        </p:txBody>
-      </p:sp>
-      <p:sp>
-        <p:nvSpPr>
-          <p:cNvPr id="54" name="TextBox 53"/>
-          <p:cNvSpPr txBox="1"/>
-          <p:nvPr/>
-        </p:nvSpPr>
-        <p:spPr>
-          <a:xfrm>
-            <a:off x="5029200" y="4919472"/>
-            <a:ext cx="1691640" cy="274320"/>
-          </a:xfrm>
-          <a:prstGeom prst="rect">
-            <a:avLst/>
-          </a:prstGeom>
-          <a:noFill/>
-        </p:spPr>
-        <p:txBody>
-          <a:bodyPr wrap="square" lIns="0" rIns="0" tIns="0" bIns="0">
-            <a:spAutoFit/>
-          </a:bodyPr>
-          <a:lstStyle/>
-          <a:p>
-            <a:pPr algn="r">
-              <a:lnSpc>
-                <a:spcPts val="1600"/>
-              </a:lnSpc>
-              <a:spcAft>
-                <a:spcPts val="0"/>
-              </a:spcAft>
-            </a:pPr>
-            <a:r>
-              <a:rPr sz="1250" b="0" i="0">
-                <a:solidFill>
-                  <a:srgbClr val="212529"/>
-                </a:solidFill>
-                <a:latin typeface="Garamond"/>
-              </a:rPr>
-              <a:t>+4.17***</a:t>
-            </a:r>
-          </a:p>
-        </p:txBody>
-      </p:sp>
-      <p:sp>
-        <p:nvSpPr>
-          <p:cNvPr id="55" name="TextBox 54"/>
-          <p:cNvSpPr txBox="1"/>
-          <p:nvPr/>
-        </p:nvSpPr>
-        <p:spPr>
-          <a:xfrm>
-            <a:off x="6903720" y="4919472"/>
-            <a:ext cx="1691640" cy="274320"/>
-          </a:xfrm>
-          <a:prstGeom prst="rect">
-            <a:avLst/>
-          </a:prstGeom>
-          <a:noFill/>
-        </p:spPr>
-        <p:txBody>
-          <a:bodyPr wrap="square" lIns="0" rIns="0" tIns="0" bIns="0">
-            <a:spAutoFit/>
-          </a:bodyPr>
-          <a:lstStyle/>
-          <a:p>
-            <a:pPr algn="r">
-              <a:lnSpc>
-                <a:spcPts val="1600"/>
-              </a:lnSpc>
-              <a:spcAft>
-                <a:spcPts val="0"/>
-              </a:spcAft>
-            </a:pPr>
-            <a:r>
-              <a:rPr sz="1250" b="0" i="0">
-                <a:solidFill>
-                  <a:srgbClr val="212529"/>
-                </a:solidFill>
-                <a:latin typeface="Garamond"/>
-              </a:rPr>
-              <a:t>+4.13***</a:t>
-            </a:r>
-          </a:p>
-        </p:txBody>
-      </p:sp>
-      <p:sp>
-        <p:nvSpPr>
-          <p:cNvPr id="56" name="TextBox 55"/>
-          <p:cNvSpPr txBox="1"/>
-          <p:nvPr/>
-        </p:nvSpPr>
-        <p:spPr>
-          <a:xfrm>
-            <a:off x="8778240" y="4919472"/>
-            <a:ext cx="1691640" cy="274320"/>
-          </a:xfrm>
-          <a:prstGeom prst="rect">
-            <a:avLst/>
-          </a:prstGeom>
-          <a:noFill/>
-        </p:spPr>
-        <p:txBody>
-          <a:bodyPr wrap="square" lIns="0" rIns="0" tIns="0" bIns="0">
-            <a:spAutoFit/>
-          </a:bodyPr>
-          <a:lstStyle/>
-          <a:p>
-            <a:pPr algn="r">
-              <a:lnSpc>
-                <a:spcPts val="1600"/>
-              </a:lnSpc>
-              <a:spcAft>
-                <a:spcPts val="0"/>
-              </a:spcAft>
-            </a:pPr>
-            <a:r>
-              <a:rPr sz="1250" b="0" i="0">
-                <a:solidFill>
-                  <a:srgbClr val="212529"/>
-                </a:solidFill>
-                <a:latin typeface="Garamond"/>
-              </a:rPr>
-              <a:t>+4.01***</a:t>
-            </a:r>
-          </a:p>
-        </p:txBody>
-      </p:sp>
-      <p:sp>
-        <p:nvSpPr>
-          <p:cNvPr id="57" name="TextBox 56"/>
-          <p:cNvSpPr txBox="1"/>
-          <p:nvPr/>
-        </p:nvSpPr>
-        <p:spPr>
-          <a:xfrm>
-            <a:off x="5029200" y="5143500"/>
-            <a:ext cx="1691640" cy="274320"/>
-          </a:xfrm>
-          <a:prstGeom prst="rect">
-            <a:avLst/>
-          </a:prstGeom>
-          <a:noFill/>
-        </p:spPr>
-        <p:txBody>
-          <a:bodyPr wrap="square" lIns="0" rIns="0" tIns="0" bIns="0">
-            <a:spAutoFit/>
-          </a:bodyPr>
-          <a:lstStyle/>
-          <a:p>
-            <a:pPr algn="r">
-              <a:lnSpc>
-                <a:spcPts val="1408"/>
-              </a:lnSpc>
-              <a:spcAft>
-                <a:spcPts val="0"/>
-              </a:spcAft>
-            </a:pPr>
-            <a:r>
-              <a:rPr sz="1100" b="0" i="0">
-                <a:solidFill>
-                  <a:srgbClr val="6B7480"/>
-                </a:solidFill>
-                <a:latin typeface="Garamond"/>
-              </a:rPr>
-              <a:t>(1.24)</a:t>
-            </a:r>
-          </a:p>
-        </p:txBody>
-      </p:sp>
-      <p:sp>
-        <p:nvSpPr>
-          <p:cNvPr id="58" name="TextBox 57"/>
-          <p:cNvSpPr txBox="1"/>
-          <p:nvPr/>
-        </p:nvSpPr>
-        <p:spPr>
-          <a:xfrm>
-            <a:off x="6903720" y="5143500"/>
-            <a:ext cx="1691640" cy="274320"/>
-          </a:xfrm>
-          <a:prstGeom prst="rect">
-            <a:avLst/>
-          </a:prstGeom>
-          <a:noFill/>
-        </p:spPr>
-        <p:txBody>
-          <a:bodyPr wrap="square" lIns="0" rIns="0" tIns="0" bIns="0">
-            <a:spAutoFit/>
-          </a:bodyPr>
-          <a:lstStyle/>
-          <a:p>
-            <a:pPr algn="r">
-              <a:lnSpc>
-                <a:spcPts val="1408"/>
-              </a:lnSpc>
-              <a:spcAft>
-                <a:spcPts val="0"/>
-              </a:spcAft>
-            </a:pPr>
-            <a:r>
-              <a:rPr sz="1100" b="0" i="0">
-                <a:solidFill>
-                  <a:srgbClr val="6B7480"/>
-                </a:solidFill>
-                <a:latin typeface="Garamond"/>
-              </a:rPr>
-              <a:t>(1.24)</a:t>
-            </a:r>
-          </a:p>
-        </p:txBody>
-      </p:sp>
-      <p:sp>
-        <p:nvSpPr>
-          <p:cNvPr id="59" name="TextBox 58"/>
-          <p:cNvSpPr txBox="1"/>
-          <p:nvPr/>
-        </p:nvSpPr>
-        <p:spPr>
-          <a:xfrm>
-            <a:off x="8778240" y="5143500"/>
-            <a:ext cx="1691640" cy="274320"/>
-          </a:xfrm>
-          <a:prstGeom prst="rect">
-            <a:avLst/>
-          </a:prstGeom>
-          <a:noFill/>
-        </p:spPr>
-        <p:txBody>
-          <a:bodyPr wrap="square" lIns="0" rIns="0" tIns="0" bIns="0">
-            <a:spAutoFit/>
-          </a:bodyPr>
-          <a:lstStyle/>
-          <a:p>
-            <a:pPr algn="r">
-              <a:lnSpc>
-                <a:spcPts val="1408"/>
-              </a:lnSpc>
-              <a:spcAft>
-                <a:spcPts val="0"/>
-              </a:spcAft>
-            </a:pPr>
-            <a:r>
-              <a:rPr sz="1100" b="0" i="0">
-                <a:solidFill>
-                  <a:srgbClr val="6B7480"/>
-                </a:solidFill>
-                <a:latin typeface="Garamond"/>
-              </a:rPr>
-              <a:t>(1.25)</a:t>
-            </a:r>
-          </a:p>
-        </p:txBody>
-      </p:sp>
-      <p:cxnSp>
-        <p:nvCxnSpPr>
-          <p:cNvPr id="60" name="Connector 59"/>
-          <p:cNvCxnSpPr/>
-          <p:nvPr/>
-        </p:nvCxnSpPr>
-        <p:spPr>
-          <a:xfrm>
-            <a:off x="1005840" y="5394959"/>
-            <a:ext cx="9509760" cy="0"/>
-          </a:xfrm>
-          <a:prstGeom prst="line">
-            <a:avLst/>
-          </a:prstGeom>
-          <a:ln w="8890">
-            <a:solidFill>
-              <a:srgbClr val="212529"/>
-            </a:solidFill>
-          </a:ln>
-          <a:effectLst/>
-        </p:spPr>
-        <p:style>
-          <a:lnRef idx="2">
-            <a:schemeClr val="accent1"/>
-          </a:lnRef>
-          <a:fillRef idx="0">
-            <a:schemeClr val="accent1"/>
-          </a:fillRef>
-          <a:effectRef idx="1">
-            <a:schemeClr val="accent1"/>
-          </a:effectRef>
-          <a:fontRef idx="minor">
-            <a:schemeClr val="tx1"/>
-          </a:fontRef>
-        </p:style>
-      </p:cxnSp>
-      <p:sp>
-        <p:nvSpPr>
-          <p:cNvPr id="61" name="TextBox 60"/>
-          <p:cNvSpPr txBox="1"/>
-          <p:nvPr/>
-        </p:nvSpPr>
-        <p:spPr>
-          <a:xfrm>
-            <a:off x="1005840" y="5477256"/>
-            <a:ext cx="3840480" cy="274320"/>
-          </a:xfrm>
-          <a:prstGeom prst="rect">
-            <a:avLst/>
-          </a:prstGeom>
-          <a:noFill/>
-        </p:spPr>
-        <p:txBody>
-          <a:bodyPr wrap="square" lIns="0" rIns="0" tIns="0" bIns="0">
-            <a:spAutoFit/>
-          </a:bodyPr>
-          <a:lstStyle/>
-          <a:p>
-            <a:pPr algn="l">
-              <a:lnSpc>
-                <a:spcPts val="1600"/>
-              </a:lnSpc>
-              <a:spcAft>
-                <a:spcPts val="0"/>
-              </a:spcAft>
-            </a:pPr>
-            <a:r>
-              <a:rPr sz="1250" b="0" i="0">
-                <a:solidFill>
-                  <a:srgbClr val="212529"/>
-                </a:solidFill>
-                <a:latin typeface="Garamond"/>
-              </a:rPr>
-              <a:t>Year fixed effects</a:t>
-            </a:r>
-          </a:p>
-        </p:txBody>
-      </p:sp>
-      <p:sp>
-        <p:nvSpPr>
-          <p:cNvPr id="62" name="TextBox 61"/>
-          <p:cNvSpPr txBox="1"/>
-          <p:nvPr/>
-        </p:nvSpPr>
-        <p:spPr>
-          <a:xfrm>
-            <a:off x="5029200" y="5477256"/>
-            <a:ext cx="1691640" cy="274320"/>
-          </a:xfrm>
-          <a:prstGeom prst="rect">
-            <a:avLst/>
-          </a:prstGeom>
-          <a:noFill/>
-        </p:spPr>
-        <p:txBody>
-          <a:bodyPr wrap="square" lIns="0" rIns="0" tIns="0" bIns="0">
-            <a:spAutoFit/>
-          </a:bodyPr>
-          <a:lstStyle/>
-          <a:p>
-            <a:pPr algn="r">
-              <a:lnSpc>
-                <a:spcPts val="1600"/>
-              </a:lnSpc>
-              <a:spcAft>
-                <a:spcPts val="0"/>
-              </a:spcAft>
-            </a:pPr>
-            <a:r>
-              <a:rPr sz="1250" b="0" i="0">
-                <a:solidFill>
-                  <a:srgbClr val="212529"/>
-                </a:solidFill>
-                <a:latin typeface="Garamond"/>
-              </a:rPr>
-              <a:t>No</a:t>
-            </a:r>
-          </a:p>
-        </p:txBody>
-      </p:sp>
-      <p:sp>
-        <p:nvSpPr>
-          <p:cNvPr id="63" name="TextBox 62"/>
-          <p:cNvSpPr txBox="1"/>
-          <p:nvPr/>
-        </p:nvSpPr>
-        <p:spPr>
-          <a:xfrm>
-            <a:off x="6903720" y="5477256"/>
-            <a:ext cx="1691640" cy="274320"/>
-          </a:xfrm>
-          <a:prstGeom prst="rect">
-            <a:avLst/>
-          </a:prstGeom>
-          <a:noFill/>
-        </p:spPr>
-        <p:txBody>
-          <a:bodyPr wrap="square" lIns="0" rIns="0" tIns="0" bIns="0">
-            <a:spAutoFit/>
-          </a:bodyPr>
-          <a:lstStyle/>
-          <a:p>
-            <a:pPr algn="r">
-              <a:lnSpc>
-                <a:spcPts val="1600"/>
-              </a:lnSpc>
-              <a:spcAft>
-                <a:spcPts val="0"/>
-              </a:spcAft>
-            </a:pPr>
-            <a:r>
-              <a:rPr sz="1250" b="0" i="0">
-                <a:solidFill>
-                  <a:srgbClr val="212529"/>
-                </a:solidFill>
-                <a:latin typeface="Garamond"/>
-              </a:rPr>
-              <a:t>Yes</a:t>
-            </a:r>
-          </a:p>
-        </p:txBody>
-      </p:sp>
-      <p:sp>
-        <p:nvSpPr>
-          <p:cNvPr id="64" name="TextBox 63"/>
-          <p:cNvSpPr txBox="1"/>
-          <p:nvPr/>
-        </p:nvSpPr>
-        <p:spPr>
-          <a:xfrm>
-            <a:off x="8778240" y="5477256"/>
-            <a:ext cx="1691640" cy="274320"/>
-          </a:xfrm>
-          <a:prstGeom prst="rect">
-            <a:avLst/>
-          </a:prstGeom>
-          <a:noFill/>
-        </p:spPr>
-        <p:txBody>
-          <a:bodyPr wrap="square" lIns="0" rIns="0" tIns="0" bIns="0">
-            <a:spAutoFit/>
-          </a:bodyPr>
-          <a:lstStyle/>
-          <a:p>
-            <a:pPr algn="r">
-              <a:lnSpc>
-                <a:spcPts val="1600"/>
-              </a:lnSpc>
-              <a:spcAft>
-                <a:spcPts val="0"/>
-              </a:spcAft>
-            </a:pPr>
-            <a:r>
-              <a:rPr sz="1250" b="0" i="0">
-                <a:solidFill>
-                  <a:srgbClr val="212529"/>
-                </a:solidFill>
-                <a:latin typeface="Garamond"/>
-              </a:rPr>
-              <a:t>Yes</a:t>
-            </a:r>
-          </a:p>
-        </p:txBody>
-      </p:sp>
-      <p:sp>
-        <p:nvSpPr>
-          <p:cNvPr id="65" name="TextBox 64"/>
-          <p:cNvSpPr txBox="1"/>
-          <p:nvPr/>
-        </p:nvSpPr>
-        <p:spPr>
-          <a:xfrm>
-            <a:off x="1005840" y="5733288"/>
-            <a:ext cx="3840480" cy="274320"/>
-          </a:xfrm>
-          <a:prstGeom prst="rect">
-            <a:avLst/>
-          </a:prstGeom>
-          <a:noFill/>
-        </p:spPr>
-        <p:txBody>
-          <a:bodyPr wrap="square" lIns="0" rIns="0" tIns="0" bIns="0">
-            <a:spAutoFit/>
-          </a:bodyPr>
-          <a:lstStyle/>
-          <a:p>
-            <a:pPr algn="l">
-              <a:lnSpc>
-                <a:spcPts val="1600"/>
-              </a:lnSpc>
-              <a:spcAft>
-                <a:spcPts val="0"/>
-              </a:spcAft>
-            </a:pPr>
-            <a:r>
-              <a:rPr sz="1250" b="0" i="0">
-                <a:solidFill>
-                  <a:srgbClr val="212529"/>
-                </a:solidFill>
-                <a:latin typeface="Garamond"/>
-              </a:rPr>
-              <a:t>State fixed effects</a:t>
-            </a:r>
-          </a:p>
-        </p:txBody>
-      </p:sp>
-      <p:sp>
-        <p:nvSpPr>
-          <p:cNvPr id="66" name="TextBox 65"/>
-          <p:cNvSpPr txBox="1"/>
-          <p:nvPr/>
-        </p:nvSpPr>
-        <p:spPr>
-          <a:xfrm>
-            <a:off x="5029200" y="5733288"/>
-            <a:ext cx="1691640" cy="274320"/>
-          </a:xfrm>
-          <a:prstGeom prst="rect">
-            <a:avLst/>
-          </a:prstGeom>
-          <a:noFill/>
-        </p:spPr>
-        <p:txBody>
-          <a:bodyPr wrap="square" lIns="0" rIns="0" tIns="0" bIns="0">
-            <a:spAutoFit/>
-          </a:bodyPr>
-          <a:lstStyle/>
-          <a:p>
-            <a:pPr algn="r">
-              <a:lnSpc>
-                <a:spcPts val="1600"/>
-              </a:lnSpc>
-              <a:spcAft>
-                <a:spcPts val="0"/>
-              </a:spcAft>
-            </a:pPr>
-            <a:r>
-              <a:rPr sz="1250" b="0" i="0">
-                <a:solidFill>
-                  <a:srgbClr val="212529"/>
-                </a:solidFill>
-                <a:latin typeface="Garamond"/>
-              </a:rPr>
-              <a:t>No</a:t>
-            </a:r>
-          </a:p>
-        </p:txBody>
-      </p:sp>
-      <p:sp>
-        <p:nvSpPr>
-          <p:cNvPr id="67" name="TextBox 66"/>
-          <p:cNvSpPr txBox="1"/>
-          <p:nvPr/>
-        </p:nvSpPr>
-        <p:spPr>
-          <a:xfrm>
-            <a:off x="6903720" y="5733288"/>
-            <a:ext cx="1691640" cy="274320"/>
-          </a:xfrm>
-          <a:prstGeom prst="rect">
-            <a:avLst/>
-          </a:prstGeom>
-          <a:noFill/>
-        </p:spPr>
-        <p:txBody>
-          <a:bodyPr wrap="square" lIns="0" rIns="0" tIns="0" bIns="0">
-            <a:spAutoFit/>
-          </a:bodyPr>
-          <a:lstStyle/>
-          <a:p>
-            <a:pPr algn="r">
-              <a:lnSpc>
-                <a:spcPts val="1600"/>
-              </a:lnSpc>
-              <a:spcAft>
-                <a:spcPts val="0"/>
-              </a:spcAft>
-            </a:pPr>
-            <a:r>
-              <a:rPr sz="1250" b="0" i="0">
-                <a:solidFill>
-                  <a:srgbClr val="212529"/>
-                </a:solidFill>
-                <a:latin typeface="Garamond"/>
-              </a:rPr>
-              <a:t>No</a:t>
-            </a:r>
-          </a:p>
-        </p:txBody>
-      </p:sp>
-      <p:sp>
-        <p:nvSpPr>
-          <p:cNvPr id="68" name="TextBox 67"/>
-          <p:cNvSpPr txBox="1"/>
-          <p:nvPr/>
-        </p:nvSpPr>
-        <p:spPr>
-          <a:xfrm>
-            <a:off x="8778240" y="5733288"/>
-            <a:ext cx="1691640" cy="274320"/>
-          </a:xfrm>
-          <a:prstGeom prst="rect">
-            <a:avLst/>
-          </a:prstGeom>
-          <a:noFill/>
-        </p:spPr>
-        <p:txBody>
-          <a:bodyPr wrap="square" lIns="0" rIns="0" tIns="0" bIns="0">
-            <a:spAutoFit/>
-          </a:bodyPr>
-          <a:lstStyle/>
-          <a:p>
-            <a:pPr algn="r">
-              <a:lnSpc>
-                <a:spcPts val="1600"/>
-              </a:lnSpc>
-              <a:spcAft>
-                <a:spcPts val="0"/>
-              </a:spcAft>
-            </a:pPr>
-            <a:r>
-              <a:rPr sz="1250" b="0" i="0">
-                <a:solidFill>
-                  <a:srgbClr val="212529"/>
-                </a:solidFill>
-                <a:latin typeface="Garamond"/>
-              </a:rPr>
-              <a:t>Yes</a:t>
-            </a:r>
-          </a:p>
-        </p:txBody>
-      </p:sp>
-      <p:sp>
-        <p:nvSpPr>
-          <p:cNvPr id="69" name="TextBox 68"/>
-          <p:cNvSpPr txBox="1"/>
-          <p:nvPr/>
-        </p:nvSpPr>
-        <p:spPr>
-          <a:xfrm>
-            <a:off x="1005840" y="5989320"/>
-            <a:ext cx="3840480" cy="274320"/>
-          </a:xfrm>
-          <a:prstGeom prst="rect">
-            <a:avLst/>
-          </a:prstGeom>
-          <a:noFill/>
-        </p:spPr>
-        <p:txBody>
-          <a:bodyPr wrap="square" lIns="0" rIns="0" tIns="0" bIns="0">
-            <a:spAutoFit/>
-          </a:bodyPr>
-          <a:lstStyle/>
-          <a:p>
-            <a:pPr algn="l">
-              <a:lnSpc>
-                <a:spcPts val="1600"/>
-              </a:lnSpc>
-              <a:spcAft>
-                <a:spcPts val="0"/>
-              </a:spcAft>
-            </a:pPr>
-            <a:r>
-              <a:rPr sz="1250" b="0" i="0">
-                <a:solidFill>
-                  <a:srgbClr val="212529"/>
-                </a:solidFill>
-                <a:latin typeface="Garamond"/>
-              </a:rPr>
-              <a:t>Observations</a:t>
-            </a:r>
-          </a:p>
-        </p:txBody>
-      </p:sp>
-      <p:sp>
-        <p:nvSpPr>
-          <p:cNvPr id="70" name="TextBox 69"/>
-          <p:cNvSpPr txBox="1"/>
-          <p:nvPr/>
-        </p:nvSpPr>
-        <p:spPr>
-          <a:xfrm>
-            <a:off x="5029200" y="5989320"/>
-            <a:ext cx="1691640" cy="274320"/>
-          </a:xfrm>
-          <a:prstGeom prst="rect">
-            <a:avLst/>
-          </a:prstGeom>
-          <a:noFill/>
-        </p:spPr>
-        <p:txBody>
-          <a:bodyPr wrap="square" lIns="0" rIns="0" tIns="0" bIns="0">
-            <a:spAutoFit/>
-          </a:bodyPr>
-          <a:lstStyle/>
-          <a:p>
-            <a:pPr algn="r">
-              <a:lnSpc>
-                <a:spcPts val="1600"/>
-              </a:lnSpc>
-              <a:spcAft>
-                <a:spcPts val="0"/>
-              </a:spcAft>
-            </a:pPr>
-            <a:r>
-              <a:rPr sz="1250" b="0" i="0">
-                <a:solidFill>
-                  <a:srgbClr val="212529"/>
-                </a:solidFill>
-                <a:latin typeface="Garamond"/>
-              </a:rPr>
-              <a:t>18,571</a:t>
-            </a:r>
-          </a:p>
-        </p:txBody>
-      </p:sp>
-      <p:sp>
-        <p:nvSpPr>
-          <p:cNvPr id="71" name="TextBox 70"/>
-          <p:cNvSpPr txBox="1"/>
-          <p:nvPr/>
-        </p:nvSpPr>
-        <p:spPr>
-          <a:xfrm>
-            <a:off x="6903720" y="5989320"/>
-            <a:ext cx="1691640" cy="274320"/>
-          </a:xfrm>
-          <a:prstGeom prst="rect">
-            <a:avLst/>
-          </a:prstGeom>
-          <a:noFill/>
-        </p:spPr>
-        <p:txBody>
-          <a:bodyPr wrap="square" lIns="0" rIns="0" tIns="0" bIns="0">
-            <a:spAutoFit/>
-          </a:bodyPr>
-          <a:lstStyle/>
-          <a:p>
-            <a:pPr algn="r">
-              <a:lnSpc>
-                <a:spcPts val="1600"/>
-              </a:lnSpc>
-              <a:spcAft>
-                <a:spcPts val="0"/>
-              </a:spcAft>
-            </a:pPr>
-            <a:r>
-              <a:rPr sz="1250" b="0" i="0">
-                <a:solidFill>
-                  <a:srgbClr val="212529"/>
-                </a:solidFill>
-                <a:latin typeface="Garamond"/>
-              </a:rPr>
-              <a:t>18,571</a:t>
-            </a:r>
-          </a:p>
-        </p:txBody>
-      </p:sp>
-      <p:sp>
-        <p:nvSpPr>
-          <p:cNvPr id="72" name="TextBox 71"/>
-          <p:cNvSpPr txBox="1"/>
-          <p:nvPr/>
-        </p:nvSpPr>
-        <p:spPr>
-          <a:xfrm>
-            <a:off x="8778240" y="5989320"/>
-            <a:ext cx="1691640" cy="274320"/>
-          </a:xfrm>
-          <a:prstGeom prst="rect">
-            <a:avLst/>
-          </a:prstGeom>
-          <a:noFill/>
-        </p:spPr>
-        <p:txBody>
-          <a:bodyPr wrap="square" lIns="0" rIns="0" tIns="0" bIns="0">
-            <a:spAutoFit/>
-          </a:bodyPr>
-          <a:lstStyle/>
-          <a:p>
-            <a:pPr algn="r">
-              <a:lnSpc>
-                <a:spcPts val="1600"/>
-              </a:lnSpc>
-              <a:spcAft>
-                <a:spcPts val="0"/>
-              </a:spcAft>
-            </a:pPr>
-            <a:r>
-              <a:rPr sz="1250" b="0" i="0">
-                <a:solidFill>
-                  <a:srgbClr val="212529"/>
-                </a:solidFill>
-                <a:latin typeface="Garamond"/>
-              </a:rPr>
-              <a:t>18,571</a:t>
-            </a:r>
-          </a:p>
-        </p:txBody>
-      </p:sp>
-      <p:cxnSp>
-        <p:nvCxnSpPr>
-          <p:cNvPr id="73" name="Connector 72"/>
-          <p:cNvCxnSpPr/>
-          <p:nvPr/>
-        </p:nvCxnSpPr>
-        <p:spPr>
-          <a:xfrm>
-            <a:off x="1005840" y="6263640"/>
-            <a:ext cx="9509760" cy="0"/>
-          </a:xfrm>
-          <a:prstGeom prst="line">
-            <a:avLst/>
-          </a:prstGeom>
-          <a:ln w="16510">
-            <a:solidFill>
-              <a:srgbClr val="212529"/>
-            </a:solidFill>
-          </a:ln>
-          <a:effectLst/>
-        </p:spPr>
-        <p:style>
-          <a:lnRef idx="2">
-            <a:schemeClr val="accent1"/>
-          </a:lnRef>
-          <a:fillRef idx="0">
-            <a:schemeClr val="accent1"/>
-          </a:fillRef>
-          <a:effectRef idx="1">
-            <a:schemeClr val="accent1"/>
-          </a:effectRef>
-          <a:fontRef idx="minor">
-            <a:schemeClr val="tx1"/>
-          </a:fontRef>
-        </p:style>
-      </p:cxnSp>
-      <p:sp>
-        <p:nvSpPr>
-          <p:cNvPr id="74" name="TextBox 73"/>
-          <p:cNvSpPr txBox="1"/>
-          <p:nvPr/>
-        </p:nvSpPr>
-        <p:spPr>
-          <a:xfrm>
-            <a:off x="1005840" y="6391656"/>
-            <a:ext cx="9509760" cy="548640"/>
-          </a:xfrm>
-          <a:prstGeom prst="rect">
-            <a:avLst/>
-          </a:prstGeom>
-          <a:noFill/>
-        </p:spPr>
-        <p:txBody>
-          <a:bodyPr wrap="square" lIns="0" rIns="0" tIns="0" bIns="0">
-            <a:spAutoFit/>
-          </a:bodyPr>
-          <a:lstStyle/>
-          <a:p>
-            <a:pPr algn="l">
-              <a:lnSpc>
-                <a:spcPts val="1344"/>
-              </a:lnSpc>
-              <a:spcAft>
-                <a:spcPts val="0"/>
-              </a:spcAft>
-            </a:pPr>
-            <a:r>
-              <a:rPr sz="1050" b="0" i="1">
-                <a:solidFill>
-                  <a:srgbClr val="6B7480"/>
-                </a:solidFill>
-                <a:latin typeface="Garamond"/>
-              </a:rPr>
-              <a:t>Robust standard errors in parentheses. * p&lt;0.10, ** p&lt;0.05, *** p&lt;0.01. Weighted. Full set of controls as in the main specification.</a:t>
-            </a:r>
-          </a:p>
-        </p:txBody>
-      </p:sp>
-      <p:sp>
-        <p:nvSpPr>
-          <p:cNvPr id="75" name="Rounded Rectangle 74">
-            <a:hlinkClick action="ppaction://hlinksldjump" r:id="rId2"/>
+              <a:t>Recomputing the whole series on the narrow core moves the pooled rate by 0.1 points. The 2003 and 2020 reclassifications leave no visible break.</a:t>
+            </a:r>
+          </a:p>
+        </p:txBody>
+      </p:sp>
+      <p:sp>
+        <p:nvSpPr>
+          <p:cNvPr id="6" name="Rounded Rectangle 5">
+            <a:hlinkClick action="ppaction://hlinksldjump" r:id="rId3"/>
           </p:cNvPr>
           <p:cNvSpPr/>
           <p:nvPr/>
@@ -23278,7 +20457,7 @@
                 </a:solidFill>
                 <a:latin typeface="Garamond"/>
               </a:rPr>
-              <a:t>LPM vs logit vs probit</a:t>
+              <a:t>Linear probability model, fixed-effects variants</a:t>
             </a:r>
           </a:p>
         </p:txBody>
@@ -23391,7 +20570,7 @@
                 </a:solidFill>
                 <a:latin typeface="Garamond"/>
               </a:rPr>
-              <a:t>Average marginal effect on leaving (×100)</a:t>
+              <a:t>Dependent variable: left teaching (×100)</a:t>
             </a:r>
           </a:p>
         </p:txBody>
@@ -23469,7 +20648,7 @@
                 </a:solidFill>
                 <a:latin typeface="Garamond"/>
               </a:rPr>
-              <a:t>LPM</a:t>
+              <a:t>(1)</a:t>
             </a:r>
           </a:p>
         </p:txBody>
@@ -23511,7 +20690,7 @@
                 </a:solidFill>
                 <a:latin typeface="Garamond"/>
               </a:rPr>
-              <a:t>Logit</a:t>
+              <a:t>(2)</a:t>
             </a:r>
           </a:p>
         </p:txBody>
@@ -23553,7 +20732,7 @@
                 </a:solidFill>
                 <a:latin typeface="Garamond"/>
               </a:rPr>
-              <a:t>Probit</a:t>
+              <a:t>(3)</a:t>
             </a:r>
           </a:p>
         </p:txBody>
@@ -23673,7 +20852,7 @@
                 </a:solidFill>
                 <a:latin typeface="Garamond"/>
               </a:rPr>
-              <a:t>−11.13***</a:t>
+              <a:t>−11.54***</a:t>
             </a:r>
           </a:p>
         </p:txBody>
@@ -23715,7 +20894,7 @@
                 </a:solidFill>
                 <a:latin typeface="Garamond"/>
               </a:rPr>
-              <a:t>−8.78***</a:t>
+              <a:t>−11.55***</a:t>
             </a:r>
           </a:p>
         </p:txBody>
@@ -23757,7 +20936,7 @@
                 </a:solidFill>
                 <a:latin typeface="Garamond"/>
               </a:rPr>
-              <a:t>−8.49***</a:t>
+              <a:t>−11.65***</a:t>
             </a:r>
           </a:p>
         </p:txBody>
@@ -23799,7 +20978,7 @@
                 </a:solidFill>
                 <a:latin typeface="Garamond"/>
               </a:rPr>
-              <a:t>(0.55)</a:t>
+              <a:t>(0.67)</a:t>
             </a:r>
           </a:p>
         </p:txBody>
@@ -23841,7 +21020,7 @@
                 </a:solidFill>
                 <a:latin typeface="Garamond"/>
               </a:rPr>
-              <a:t>(0.40)</a:t>
+              <a:t>(0.66)</a:t>
             </a:r>
           </a:p>
         </p:txBody>
@@ -23883,7 +21062,7 @@
                 </a:solidFill>
                 <a:latin typeface="Garamond"/>
               </a:rPr>
-              <a:t>(0.39)</a:t>
+              <a:t>(0.67)</a:t>
             </a:r>
           </a:p>
         </p:txBody>
@@ -23967,7 +21146,7 @@
                 </a:solidFill>
                 <a:latin typeface="Garamond"/>
               </a:rPr>
-              <a:t>+8.77***</a:t>
+              <a:t>+8.67***</a:t>
             </a:r>
           </a:p>
         </p:txBody>
@@ -24009,7 +21188,7 @@
                 </a:solidFill>
                 <a:latin typeface="Garamond"/>
               </a:rPr>
-              <a:t>+3.86***</a:t>
+              <a:t>+8.67***</a:t>
             </a:r>
           </a:p>
         </p:txBody>
@@ -24051,7 +21230,7 @@
                 </a:solidFill>
                 <a:latin typeface="Garamond"/>
               </a:rPr>
-              <a:t>+4.32***</a:t>
+              <a:t>+8.63***</a:t>
             </a:r>
           </a:p>
         </p:txBody>
@@ -24093,7 +21272,7 @@
                 </a:solidFill>
                 <a:latin typeface="Garamond"/>
               </a:rPr>
-              <a:t>(0.92)</a:t>
+              <a:t>(1.09)</a:t>
             </a:r>
           </a:p>
         </p:txBody>
@@ -24135,7 +21314,7 @@
                 </a:solidFill>
                 <a:latin typeface="Garamond"/>
               </a:rPr>
-              <a:t>(0.44)</a:t>
+              <a:t>(1.09)</a:t>
             </a:r>
           </a:p>
         </p:txBody>
@@ -24177,7 +21356,7 @@
                 </a:solidFill>
                 <a:latin typeface="Garamond"/>
               </a:rPr>
-              <a:t>(0.47)</a:t>
+              <a:t>(1.10)</a:t>
             </a:r>
           </a:p>
         </p:txBody>
@@ -24261,7 +21440,7 @@
                 </a:solidFill>
                 <a:latin typeface="Garamond"/>
               </a:rPr>
-              <a:t>−2.55***</a:t>
+              <a:t>−2.35***</a:t>
             </a:r>
           </a:p>
         </p:txBody>
@@ -24303,7 +21482,7 @@
                 </a:solidFill>
                 <a:latin typeface="Garamond"/>
               </a:rPr>
-              <a:t>−2.38***</a:t>
+              <a:t>−2.33***</a:t>
             </a:r>
           </a:p>
         </p:txBody>
@@ -24345,7 +21524,7 @@
                 </a:solidFill>
                 <a:latin typeface="Garamond"/>
               </a:rPr>
-              <a:t>−2.41***</a:t>
+              <a:t>−2.33***</a:t>
             </a:r>
           </a:p>
         </p:txBody>
@@ -24387,7 +21566,7 @@
                 </a:solidFill>
                 <a:latin typeface="Garamond"/>
               </a:rPr>
-              <a:t>(0.44)</a:t>
+              <a:t>(0.52)</a:t>
             </a:r>
           </a:p>
         </p:txBody>
@@ -24429,7 +21608,7 @@
                 </a:solidFill>
                 <a:latin typeface="Garamond"/>
               </a:rPr>
-              <a:t>(0.39)</a:t>
+              <a:t>(0.52)</a:t>
             </a:r>
           </a:p>
         </p:txBody>
@@ -24471,7 +21650,7 @@
                 </a:solidFill>
                 <a:latin typeface="Garamond"/>
               </a:rPr>
-              <a:t>(0.38)</a:t>
+              <a:t>(0.52)</a:t>
             </a:r>
           </a:p>
         </p:txBody>
@@ -24555,7 +21734,7 @@
                 </a:solidFill>
                 <a:latin typeface="Garamond"/>
               </a:rPr>
-              <a:t>−2.17***</a:t>
+              <a:t>−2.35***</a:t>
             </a:r>
           </a:p>
         </p:txBody>
@@ -24597,7 +21776,7 @@
                 </a:solidFill>
                 <a:latin typeface="Garamond"/>
               </a:rPr>
-              <a:t>−2.24***</a:t>
+              <a:t>−2.38***</a:t>
             </a:r>
           </a:p>
         </p:txBody>
@@ -24639,7 +21818,7 @@
                 </a:solidFill>
                 <a:latin typeface="Garamond"/>
               </a:rPr>
-              <a:t>−2.27***</a:t>
+              <a:t>−2.39***</a:t>
             </a:r>
           </a:p>
         </p:txBody>
@@ -24681,7 +21860,7 @@
                 </a:solidFill>
                 <a:latin typeface="Garamond"/>
               </a:rPr>
-              <a:t>(0.47)</a:t>
+              <a:t>(0.56)</a:t>
             </a:r>
           </a:p>
         </p:txBody>
@@ -24723,7 +21902,7 @@
                 </a:solidFill>
                 <a:latin typeface="Garamond"/>
               </a:rPr>
-              <a:t>(0.39)</a:t>
+              <a:t>(0.56)</a:t>
             </a:r>
           </a:p>
         </p:txBody>
@@ -24765,7 +21944,7 @@
                 </a:solidFill>
                 <a:latin typeface="Garamond"/>
               </a:rPr>
-              <a:t>(0.39)</a:t>
+              <a:t>(0.56)</a:t>
             </a:r>
           </a:p>
         </p:txBody>
@@ -24849,7 +22028,7 @@
                 </a:solidFill>
                 <a:latin typeface="Garamond"/>
               </a:rPr>
-              <a:t>+5.65***</a:t>
+              <a:t>+5.72***</a:t>
             </a:r>
           </a:p>
         </p:txBody>
@@ -24891,7 +22070,7 @@
                 </a:solidFill>
                 <a:latin typeface="Garamond"/>
               </a:rPr>
-              <a:t>+4.74***</a:t>
+              <a:t>+5.63***</a:t>
             </a:r>
           </a:p>
         </p:txBody>
@@ -24933,7 +22112,7 @@
                 </a:solidFill>
                 <a:latin typeface="Garamond"/>
               </a:rPr>
-              <a:t>+4.59***</a:t>
+              <a:t>+5.71***</a:t>
             </a:r>
           </a:p>
         </p:txBody>
@@ -24975,7 +22154,7 @@
                 </a:solidFill>
                 <a:latin typeface="Garamond"/>
               </a:rPr>
-              <a:t>(1.33)</a:t>
+              <a:t>(1.56)</a:t>
             </a:r>
           </a:p>
         </p:txBody>
@@ -25017,7 +22196,7 @@
                 </a:solidFill>
                 <a:latin typeface="Garamond"/>
               </a:rPr>
-              <a:t>(0.90)</a:t>
+              <a:t>(1.56)</a:t>
             </a:r>
           </a:p>
         </p:txBody>
@@ -25059,7 +22238,7 @@
                 </a:solidFill>
                 <a:latin typeface="Garamond"/>
               </a:rPr>
-              <a:t>(0.91)</a:t>
+              <a:t>(1.56)</a:t>
             </a:r>
           </a:p>
         </p:txBody>
@@ -25143,7 +22322,7 @@
                 </a:solidFill>
                 <a:latin typeface="Garamond"/>
               </a:rPr>
-              <a:t>+8.31***</a:t>
+              <a:t>+8.85***</a:t>
             </a:r>
           </a:p>
         </p:txBody>
@@ -25185,7 +22364,7 @@
                 </a:solidFill>
                 <a:latin typeface="Garamond"/>
               </a:rPr>
-              <a:t>+3.78***</a:t>
+              <a:t>+8.94***</a:t>
             </a:r>
           </a:p>
         </p:txBody>
@@ -25227,7 +22406,7 @@
                 </a:solidFill>
                 <a:latin typeface="Garamond"/>
               </a:rPr>
-              <a:t>+4.19***</a:t>
+              <a:t>+8.94***</a:t>
             </a:r>
           </a:p>
         </p:txBody>
@@ -25269,7 +22448,7 @@
                 </a:solidFill>
                 <a:latin typeface="Garamond"/>
               </a:rPr>
-              <a:t>(1.84)</a:t>
+              <a:t>(2.14)</a:t>
             </a:r>
           </a:p>
         </p:txBody>
@@ -25311,7 +22490,7 @@
                 </a:solidFill>
                 <a:latin typeface="Garamond"/>
               </a:rPr>
-              <a:t>(0.80)</a:t>
+              <a:t>(2.14)</a:t>
             </a:r>
           </a:p>
         </p:txBody>
@@ -25353,7 +22532,7 @@
                 </a:solidFill>
                 <a:latin typeface="Garamond"/>
               </a:rPr>
-              <a:t>(0.88)</a:t>
+              <a:t>(2.14)</a:t>
             </a:r>
           </a:p>
         </p:txBody>
@@ -25437,7 +22616,7 @@
                 </a:solidFill>
                 <a:latin typeface="Garamond"/>
               </a:rPr>
-              <a:t>+4.67***</a:t>
+              <a:t>+4.17***</a:t>
             </a:r>
           </a:p>
         </p:txBody>
@@ -25479,7 +22658,7 @@
                 </a:solidFill>
                 <a:latin typeface="Garamond"/>
               </a:rPr>
-              <a:t>+2.24***</a:t>
+              <a:t>+4.13***</a:t>
             </a:r>
           </a:p>
         </p:txBody>
@@ -25521,7 +22700,7 @@
                 </a:solidFill>
                 <a:latin typeface="Garamond"/>
               </a:rPr>
-              <a:t>+2.50***</a:t>
+              <a:t>+4.01***</a:t>
             </a:r>
           </a:p>
         </p:txBody>
@@ -25563,7 +22742,7 @@
                 </a:solidFill>
                 <a:latin typeface="Garamond"/>
               </a:rPr>
-              <a:t>(1.10)</a:t>
+              <a:t>(1.24)</a:t>
             </a:r>
           </a:p>
         </p:txBody>
@@ -25605,7 +22784,7 @@
                 </a:solidFill>
                 <a:latin typeface="Garamond"/>
               </a:rPr>
-              <a:t>(0.58)</a:t>
+              <a:t>(1.24)</a:t>
             </a:r>
           </a:p>
         </p:txBody>
@@ -25647,7 +22826,7 @@
                 </a:solidFill>
                 <a:latin typeface="Garamond"/>
               </a:rPr>
-              <a:t>(0.62)</a:t>
+              <a:t>(1.25)</a:t>
             </a:r>
           </a:p>
         </p:txBody>
@@ -25767,7 +22946,7 @@
                 </a:solidFill>
                 <a:latin typeface="Garamond"/>
               </a:rPr>
-              <a:t>Yes</a:t>
+              <a:t>No</a:t>
             </a:r>
           </a:p>
         </p:txBody>
@@ -25893,7 +23072,7 @@
                 </a:solidFill>
                 <a:latin typeface="Garamond"/>
               </a:rPr>
-              <a:t>Observations</a:t>
+              <a:t>State fixed effects</a:t>
             </a:r>
           </a:p>
         </p:txBody>
@@ -25935,7 +23114,7 @@
                 </a:solidFill>
                 <a:latin typeface="Garamond"/>
               </a:rPr>
-              <a:t>18,571</a:t>
+              <a:t>No</a:t>
             </a:r>
           </a:p>
         </p:txBody>
@@ -25977,7 +23156,7 @@
                 </a:solidFill>
                 <a:latin typeface="Garamond"/>
               </a:rPr>
-              <a:t>18,571</a:t>
+              <a:t>No</a:t>
             </a:r>
           </a:p>
         </p:txBody>
@@ -26019,6 +23198,174 @@
                 </a:solidFill>
                 <a:latin typeface="Garamond"/>
               </a:rPr>
+              <a:t>Yes</a:t>
+            </a:r>
+          </a:p>
+        </p:txBody>
+      </p:sp>
+      <p:sp>
+        <p:nvSpPr>
+          <p:cNvPr id="69" name="TextBox 68"/>
+          <p:cNvSpPr txBox="1"/>
+          <p:nvPr/>
+        </p:nvSpPr>
+        <p:spPr>
+          <a:xfrm>
+            <a:off x="1005840" y="5989320"/>
+            <a:ext cx="3840480" cy="274320"/>
+          </a:xfrm>
+          <a:prstGeom prst="rect">
+            <a:avLst/>
+          </a:prstGeom>
+          <a:noFill/>
+        </p:spPr>
+        <p:txBody>
+          <a:bodyPr wrap="square" lIns="0" rIns="0" tIns="0" bIns="0">
+            <a:spAutoFit/>
+          </a:bodyPr>
+          <a:lstStyle/>
+          <a:p>
+            <a:pPr algn="l">
+              <a:lnSpc>
+                <a:spcPts val="1600"/>
+              </a:lnSpc>
+              <a:spcAft>
+                <a:spcPts val="0"/>
+              </a:spcAft>
+            </a:pPr>
+            <a:r>
+              <a:rPr sz="1250" b="0" i="0">
+                <a:solidFill>
+                  <a:srgbClr val="212529"/>
+                </a:solidFill>
+                <a:latin typeface="Garamond"/>
+              </a:rPr>
+              <a:t>Observations</a:t>
+            </a:r>
+          </a:p>
+        </p:txBody>
+      </p:sp>
+      <p:sp>
+        <p:nvSpPr>
+          <p:cNvPr id="70" name="TextBox 69"/>
+          <p:cNvSpPr txBox="1"/>
+          <p:nvPr/>
+        </p:nvSpPr>
+        <p:spPr>
+          <a:xfrm>
+            <a:off x="5029200" y="5989320"/>
+            <a:ext cx="1691640" cy="274320"/>
+          </a:xfrm>
+          <a:prstGeom prst="rect">
+            <a:avLst/>
+          </a:prstGeom>
+          <a:noFill/>
+        </p:spPr>
+        <p:txBody>
+          <a:bodyPr wrap="square" lIns="0" rIns="0" tIns="0" bIns="0">
+            <a:spAutoFit/>
+          </a:bodyPr>
+          <a:lstStyle/>
+          <a:p>
+            <a:pPr algn="r">
+              <a:lnSpc>
+                <a:spcPts val="1600"/>
+              </a:lnSpc>
+              <a:spcAft>
+                <a:spcPts val="0"/>
+              </a:spcAft>
+            </a:pPr>
+            <a:r>
+              <a:rPr sz="1250" b="0" i="0">
+                <a:solidFill>
+                  <a:srgbClr val="212529"/>
+                </a:solidFill>
+                <a:latin typeface="Garamond"/>
+              </a:rPr>
+              <a:t>18,571</a:t>
+            </a:r>
+          </a:p>
+        </p:txBody>
+      </p:sp>
+      <p:sp>
+        <p:nvSpPr>
+          <p:cNvPr id="71" name="TextBox 70"/>
+          <p:cNvSpPr txBox="1"/>
+          <p:nvPr/>
+        </p:nvSpPr>
+        <p:spPr>
+          <a:xfrm>
+            <a:off x="6903720" y="5989320"/>
+            <a:ext cx="1691640" cy="274320"/>
+          </a:xfrm>
+          <a:prstGeom prst="rect">
+            <a:avLst/>
+          </a:prstGeom>
+          <a:noFill/>
+        </p:spPr>
+        <p:txBody>
+          <a:bodyPr wrap="square" lIns="0" rIns="0" tIns="0" bIns="0">
+            <a:spAutoFit/>
+          </a:bodyPr>
+          <a:lstStyle/>
+          <a:p>
+            <a:pPr algn="r">
+              <a:lnSpc>
+                <a:spcPts val="1600"/>
+              </a:lnSpc>
+              <a:spcAft>
+                <a:spcPts val="0"/>
+              </a:spcAft>
+            </a:pPr>
+            <a:r>
+              <a:rPr sz="1250" b="0" i="0">
+                <a:solidFill>
+                  <a:srgbClr val="212529"/>
+                </a:solidFill>
+                <a:latin typeface="Garamond"/>
+              </a:rPr>
+              <a:t>18,571</a:t>
+            </a:r>
+          </a:p>
+        </p:txBody>
+      </p:sp>
+      <p:sp>
+        <p:nvSpPr>
+          <p:cNvPr id="72" name="TextBox 71"/>
+          <p:cNvSpPr txBox="1"/>
+          <p:nvPr/>
+        </p:nvSpPr>
+        <p:spPr>
+          <a:xfrm>
+            <a:off x="8778240" y="5989320"/>
+            <a:ext cx="1691640" cy="274320"/>
+          </a:xfrm>
+          <a:prstGeom prst="rect">
+            <a:avLst/>
+          </a:prstGeom>
+          <a:noFill/>
+        </p:spPr>
+        <p:txBody>
+          <a:bodyPr wrap="square" lIns="0" rIns="0" tIns="0" bIns="0">
+            <a:spAutoFit/>
+          </a:bodyPr>
+          <a:lstStyle/>
+          <a:p>
+            <a:pPr algn="r">
+              <a:lnSpc>
+                <a:spcPts val="1600"/>
+              </a:lnSpc>
+              <a:spcAft>
+                <a:spcPts val="0"/>
+              </a:spcAft>
+            </a:pPr>
+            <a:r>
+              <a:rPr sz="1250" b="0" i="0">
+                <a:solidFill>
+                  <a:srgbClr val="212529"/>
+                </a:solidFill>
+                <a:latin typeface="Garamond"/>
+              </a:rPr>
               <a:t>18,571</a:t>
             </a:r>
           </a:p>
@@ -26026,13 +23373,13 @@
       </p:sp>
       <p:cxnSp>
         <p:nvCxnSpPr>
-          <p:cNvPr id="69" name="Connector 68"/>
+          <p:cNvPr id="73" name="Connector 72"/>
           <p:cNvCxnSpPr/>
           <p:nvPr/>
         </p:nvCxnSpPr>
         <p:spPr>
           <a:xfrm>
-            <a:off x="1005840" y="6007608"/>
+            <a:off x="1005840" y="6263640"/>
             <a:ext cx="9509760" cy="0"/>
           </a:xfrm>
           <a:prstGeom prst="line">
@@ -26062,13 +23409,13 @@
       </p:cxnSp>
       <p:sp>
         <p:nvSpPr>
-          <p:cNvPr id="70" name="TextBox 69"/>
-          <p:cNvSpPr txBox="1"/>
-          <p:nvPr/>
-        </p:nvSpPr>
-        <p:spPr>
-          <a:xfrm>
-            <a:off x="1005840" y="6135624"/>
+          <p:cNvPr id="74" name="TextBox 73"/>
+          <p:cNvSpPr txBox="1"/>
+          <p:nvPr/>
+        </p:nvSpPr>
+        <p:spPr>
+          <a:xfrm>
+            <a:off x="1005840" y="6391656"/>
             <a:ext cx="9509760" cy="548640"/>
           </a:xfrm>
           <a:prstGeom prst="rect">
@@ -26097,14 +23444,14 @@
                 </a:solidFill>
                 <a:latin typeface="Garamond"/>
               </a:rPr>
-              <a:t>Standard errors in parentheses, delta method for the logit and probit marginal effects. * p&lt;0.10, ** p&lt;0.05, *** p&lt;0.01. The probit column is the main specification of the coefficient plot.</a:t>
-            </a:r>
-          </a:p>
-        </p:txBody>
-      </p:sp>
-      <p:sp>
-        <p:nvSpPr>
-          <p:cNvPr id="71" name="Rounded Rectangle 70">
+              <a:t>Robust standard errors in parentheses. * p&lt;0.10, ** p&lt;0.05, *** p&lt;0.01. Weighted. Full set of controls as in the main specification.</a:t>
+            </a:r>
+          </a:p>
+        </p:txBody>
+      </p:sp>
+      <p:sp>
+        <p:nvSpPr>
+          <p:cNvPr id="75" name="Rounded Rectangle 74">
             <a:hlinkClick action="ppaction://hlinksldjump" r:id="rId2"/>
           </p:cNvPr>
           <p:cNvSpPr/>
@@ -26211,7 +23558,7 @@
                 </a:solidFill>
                 <a:latin typeface="Garamond"/>
               </a:rPr>
-              <a:t>Is the LPM bounded between 0 and 1?</a:t>
+              <a:t>LPM vs logit vs probit</a:t>
             </a:r>
           </a:p>
         </p:txBody>
@@ -26251,30 +23598,42 @@
           </a:p>
         </p:txBody>
       </p:sp>
-      <p:pic>
-        <p:nvPicPr>
-          <p:cNvPr id="4" name="Picture 3" descr="lpm_check.png"/>
-          <p:cNvPicPr>
-            <a:picLocks noChangeAspect="1"/>
-          </p:cNvPicPr>
-          <p:nvPr/>
-        </p:nvPicPr>
-        <p:blipFill>
-          <a:blip r:embed="rId2"/>
-          <a:stretch>
-            <a:fillRect/>
-          </a:stretch>
-        </p:blipFill>
-        <p:spPr>
-          <a:xfrm>
-            <a:off x="1557117" y="1024128"/>
-            <a:ext cx="9047284" cy="4480560"/>
-          </a:xfrm>
-          <a:prstGeom prst="rect">
-            <a:avLst/>
-          </a:prstGeom>
-        </p:spPr>
-      </p:pic>
+      <p:cxnSp>
+        <p:nvCxnSpPr>
+          <p:cNvPr id="4" name="Connector 3"/>
+          <p:cNvCxnSpPr/>
+          <p:nvPr/>
+        </p:nvCxnSpPr>
+        <p:spPr>
+          <a:xfrm>
+            <a:off x="1005840" y="1298448"/>
+            <a:ext cx="9509760" cy="0"/>
+          </a:xfrm>
+          <a:prstGeom prst="line">
+            <a:avLst/>
+          </a:prstGeom>
+          <a:ln w="16510">
+            <a:solidFill>
+              <a:srgbClr val="212529"/>
+            </a:solidFill>
+          </a:ln>
+          <a:effectLst/>
+        </p:spPr>
+        <p:style>
+          <a:lnRef idx="2">
+            <a:schemeClr val="accent1"/>
+          </a:lnRef>
+          <a:fillRef idx="0">
+            <a:schemeClr val="accent1"/>
+          </a:fillRef>
+          <a:effectRef idx="1">
+            <a:schemeClr val="accent1"/>
+          </a:effectRef>
+          <a:fontRef idx="minor">
+            <a:schemeClr val="tx1"/>
+          </a:fontRef>
+        </p:style>
+      </p:cxnSp>
       <p:sp>
         <p:nvSpPr>
           <p:cNvPr id="5" name="TextBox 4"/>
@@ -26283,8 +23642,248 @@
         </p:nvSpPr>
         <p:spPr>
           <a:xfrm>
-            <a:off x="822960" y="5760720"/>
-            <a:ext cx="10789920" cy="822960"/>
+            <a:off x="5029200" y="1371600"/>
+            <a:ext cx="5486400" cy="274320"/>
+          </a:xfrm>
+          <a:prstGeom prst="rect">
+            <a:avLst/>
+          </a:prstGeom>
+          <a:noFill/>
+        </p:spPr>
+        <p:txBody>
+          <a:bodyPr wrap="square" lIns="0" rIns="0" tIns="0" bIns="0">
+            <a:spAutoFit/>
+          </a:bodyPr>
+          <a:lstStyle/>
+          <a:p>
+            <a:pPr algn="ctr">
+              <a:lnSpc>
+                <a:spcPts val="1600"/>
+              </a:lnSpc>
+              <a:spcAft>
+                <a:spcPts val="0"/>
+              </a:spcAft>
+            </a:pPr>
+            <a:r>
+              <a:rPr sz="1250" b="0" i="0">
+                <a:solidFill>
+                  <a:srgbClr val="212529"/>
+                </a:solidFill>
+                <a:latin typeface="Garamond"/>
+              </a:rPr>
+              <a:t>Average marginal effect on leaving (×100)</a:t>
+            </a:r>
+          </a:p>
+        </p:txBody>
+      </p:sp>
+      <p:cxnSp>
+        <p:nvCxnSpPr>
+          <p:cNvPr id="6" name="Connector 5"/>
+          <p:cNvCxnSpPr/>
+          <p:nvPr/>
+        </p:nvCxnSpPr>
+        <p:spPr>
+          <a:xfrm>
+            <a:off x="5029200" y="1700784"/>
+            <a:ext cx="5486400" cy="0"/>
+          </a:xfrm>
+          <a:prstGeom prst="line">
+            <a:avLst/>
+          </a:prstGeom>
+          <a:ln w="8890">
+            <a:solidFill>
+              <a:srgbClr val="212529"/>
+            </a:solidFill>
+          </a:ln>
+          <a:effectLst/>
+        </p:spPr>
+        <p:style>
+          <a:lnRef idx="2">
+            <a:schemeClr val="accent1"/>
+          </a:lnRef>
+          <a:fillRef idx="0">
+            <a:schemeClr val="accent1"/>
+          </a:fillRef>
+          <a:effectRef idx="1">
+            <a:schemeClr val="accent1"/>
+          </a:effectRef>
+          <a:fontRef idx="minor">
+            <a:schemeClr val="tx1"/>
+          </a:fontRef>
+        </p:style>
+      </p:cxnSp>
+      <p:sp>
+        <p:nvSpPr>
+          <p:cNvPr id="7" name="TextBox 6"/>
+          <p:cNvSpPr txBox="1"/>
+          <p:nvPr/>
+        </p:nvSpPr>
+        <p:spPr>
+          <a:xfrm>
+            <a:off x="5029200" y="1764792"/>
+            <a:ext cx="1691640" cy="274320"/>
+          </a:xfrm>
+          <a:prstGeom prst="rect">
+            <a:avLst/>
+          </a:prstGeom>
+          <a:noFill/>
+        </p:spPr>
+        <p:txBody>
+          <a:bodyPr wrap="square" lIns="0" rIns="0" tIns="0" bIns="0">
+            <a:spAutoFit/>
+          </a:bodyPr>
+          <a:lstStyle/>
+          <a:p>
+            <a:pPr algn="r">
+              <a:lnSpc>
+                <a:spcPts val="1600"/>
+              </a:lnSpc>
+              <a:spcAft>
+                <a:spcPts val="0"/>
+              </a:spcAft>
+            </a:pPr>
+            <a:r>
+              <a:rPr sz="1250" b="1" i="0">
+                <a:solidFill>
+                  <a:srgbClr val="212529"/>
+                </a:solidFill>
+                <a:latin typeface="Garamond"/>
+              </a:rPr>
+              <a:t>LPM</a:t>
+            </a:r>
+          </a:p>
+        </p:txBody>
+      </p:sp>
+      <p:sp>
+        <p:nvSpPr>
+          <p:cNvPr id="8" name="TextBox 7"/>
+          <p:cNvSpPr txBox="1"/>
+          <p:nvPr/>
+        </p:nvSpPr>
+        <p:spPr>
+          <a:xfrm>
+            <a:off x="6903720" y="1764792"/>
+            <a:ext cx="1691640" cy="274320"/>
+          </a:xfrm>
+          <a:prstGeom prst="rect">
+            <a:avLst/>
+          </a:prstGeom>
+          <a:noFill/>
+        </p:spPr>
+        <p:txBody>
+          <a:bodyPr wrap="square" lIns="0" rIns="0" tIns="0" bIns="0">
+            <a:spAutoFit/>
+          </a:bodyPr>
+          <a:lstStyle/>
+          <a:p>
+            <a:pPr algn="r">
+              <a:lnSpc>
+                <a:spcPts val="1600"/>
+              </a:lnSpc>
+              <a:spcAft>
+                <a:spcPts val="0"/>
+              </a:spcAft>
+            </a:pPr>
+            <a:r>
+              <a:rPr sz="1250" b="1" i="0">
+                <a:solidFill>
+                  <a:srgbClr val="212529"/>
+                </a:solidFill>
+                <a:latin typeface="Garamond"/>
+              </a:rPr>
+              <a:t>Logit</a:t>
+            </a:r>
+          </a:p>
+        </p:txBody>
+      </p:sp>
+      <p:sp>
+        <p:nvSpPr>
+          <p:cNvPr id="9" name="TextBox 8"/>
+          <p:cNvSpPr txBox="1"/>
+          <p:nvPr/>
+        </p:nvSpPr>
+        <p:spPr>
+          <a:xfrm>
+            <a:off x="8778240" y="1764792"/>
+            <a:ext cx="1691640" cy="274320"/>
+          </a:xfrm>
+          <a:prstGeom prst="rect">
+            <a:avLst/>
+          </a:prstGeom>
+          <a:noFill/>
+        </p:spPr>
+        <p:txBody>
+          <a:bodyPr wrap="square" lIns="0" rIns="0" tIns="0" bIns="0">
+            <a:spAutoFit/>
+          </a:bodyPr>
+          <a:lstStyle/>
+          <a:p>
+            <a:pPr algn="r">
+              <a:lnSpc>
+                <a:spcPts val="1600"/>
+              </a:lnSpc>
+              <a:spcAft>
+                <a:spcPts val="0"/>
+              </a:spcAft>
+            </a:pPr>
+            <a:r>
+              <a:rPr sz="1250" b="1" i="0">
+                <a:solidFill>
+                  <a:srgbClr val="212529"/>
+                </a:solidFill>
+                <a:latin typeface="Garamond"/>
+              </a:rPr>
+              <a:t>Probit</a:t>
+            </a:r>
+          </a:p>
+        </p:txBody>
+      </p:sp>
+      <p:cxnSp>
+        <p:nvCxnSpPr>
+          <p:cNvPr id="10" name="Connector 9"/>
+          <p:cNvCxnSpPr/>
+          <p:nvPr/>
+        </p:nvCxnSpPr>
+        <p:spPr>
+          <a:xfrm>
+            <a:off x="1005840" y="2093976"/>
+            <a:ext cx="9509760" cy="0"/>
+          </a:xfrm>
+          <a:prstGeom prst="line">
+            <a:avLst/>
+          </a:prstGeom>
+          <a:ln w="8890">
+            <a:solidFill>
+              <a:srgbClr val="212529"/>
+            </a:solidFill>
+          </a:ln>
+          <a:effectLst/>
+        </p:spPr>
+        <p:style>
+          <a:lnRef idx="2">
+            <a:schemeClr val="accent1"/>
+          </a:lnRef>
+          <a:fillRef idx="0">
+            <a:schemeClr val="accent1"/>
+          </a:fillRef>
+          <a:effectRef idx="1">
+            <a:schemeClr val="accent1"/>
+          </a:effectRef>
+          <a:fontRef idx="minor">
+            <a:schemeClr val="tx1"/>
+          </a:fontRef>
+        </p:style>
+      </p:cxnSp>
+      <p:sp>
+        <p:nvSpPr>
+          <p:cNvPr id="11" name="TextBox 10"/>
+          <p:cNvSpPr txBox="1"/>
+          <p:nvPr/>
+        </p:nvSpPr>
+        <p:spPr>
+          <a:xfrm>
+            <a:off x="1005840" y="2176272"/>
+            <a:ext cx="3840480" cy="274320"/>
           </a:xfrm>
           <a:prstGeom prst="rect">
             <a:avLst/>
@@ -26299,37 +23898,2494 @@
           <a:p>
             <a:pPr algn="l">
               <a:lnSpc>
-                <a:spcPts val="1855"/>
-              </a:lnSpc>
-              <a:spcAft>
-                <a:spcPts val="0"/>
-              </a:spcAft>
-            </a:pPr>
-            <a:r>
-              <a:rPr sz="1450" b="1" i="0">
-                <a:solidFill>
-                  <a:srgbClr val="102D5E"/>
-                </a:solidFill>
-                <a:latin typeface="Garamond"/>
-              </a:rPr>
-              <a:t>Key message.  </a:t>
-            </a:r>
-            <a:r>
-              <a:rPr sz="1450" b="0" i="0">
+                <a:spcPts val="1600"/>
+              </a:lnSpc>
+              <a:spcAft>
+                <a:spcPts val="0"/>
+              </a:spcAft>
+            </a:pPr>
+            <a:r>
+              <a:rPr sz="1250" b="0" i="0">
                 <a:solidFill>
                   <a:srgbClr val="212529"/>
                 </a:solidFill>
                 <a:latin typeface="Garamond"/>
               </a:rPr>
-              <a:t>No. 22% of fitted values fall below zero, so the probit is the main specification and the LPM a robustness variant.</a:t>
-            </a:r>
-          </a:p>
-        </p:txBody>
-      </p:sp>
-      <p:sp>
-        <p:nvSpPr>
-          <p:cNvPr id="6" name="Rounded Rectangle 5">
-            <a:hlinkClick action="ppaction://hlinksldjump" r:id="rId3"/>
+              <a:t>Full-year contract</a:t>
+            </a:r>
+          </a:p>
+        </p:txBody>
+      </p:sp>
+      <p:sp>
+        <p:nvSpPr>
+          <p:cNvPr id="12" name="TextBox 11"/>
+          <p:cNvSpPr txBox="1"/>
+          <p:nvPr/>
+        </p:nvSpPr>
+        <p:spPr>
+          <a:xfrm>
+            <a:off x="5029200" y="2176272"/>
+            <a:ext cx="1691640" cy="274320"/>
+          </a:xfrm>
+          <a:prstGeom prst="rect">
+            <a:avLst/>
+          </a:prstGeom>
+          <a:noFill/>
+        </p:spPr>
+        <p:txBody>
+          <a:bodyPr wrap="square" lIns="0" rIns="0" tIns="0" bIns="0">
+            <a:spAutoFit/>
+          </a:bodyPr>
+          <a:lstStyle/>
+          <a:p>
+            <a:pPr algn="r">
+              <a:lnSpc>
+                <a:spcPts val="1600"/>
+              </a:lnSpc>
+              <a:spcAft>
+                <a:spcPts val="0"/>
+              </a:spcAft>
+            </a:pPr>
+            <a:r>
+              <a:rPr sz="1250" b="0" i="0">
+                <a:solidFill>
+                  <a:srgbClr val="212529"/>
+                </a:solidFill>
+                <a:latin typeface="Garamond"/>
+              </a:rPr>
+              <a:t>−11.13***</a:t>
+            </a:r>
+          </a:p>
+        </p:txBody>
+      </p:sp>
+      <p:sp>
+        <p:nvSpPr>
+          <p:cNvPr id="13" name="TextBox 12"/>
+          <p:cNvSpPr txBox="1"/>
+          <p:nvPr/>
+        </p:nvSpPr>
+        <p:spPr>
+          <a:xfrm>
+            <a:off x="6903720" y="2176272"/>
+            <a:ext cx="1691640" cy="274320"/>
+          </a:xfrm>
+          <a:prstGeom prst="rect">
+            <a:avLst/>
+          </a:prstGeom>
+          <a:noFill/>
+        </p:spPr>
+        <p:txBody>
+          <a:bodyPr wrap="square" lIns="0" rIns="0" tIns="0" bIns="0">
+            <a:spAutoFit/>
+          </a:bodyPr>
+          <a:lstStyle/>
+          <a:p>
+            <a:pPr algn="r">
+              <a:lnSpc>
+                <a:spcPts val="1600"/>
+              </a:lnSpc>
+              <a:spcAft>
+                <a:spcPts val="0"/>
+              </a:spcAft>
+            </a:pPr>
+            <a:r>
+              <a:rPr sz="1250" b="0" i="0">
+                <a:solidFill>
+                  <a:srgbClr val="212529"/>
+                </a:solidFill>
+                <a:latin typeface="Garamond"/>
+              </a:rPr>
+              <a:t>−8.78***</a:t>
+            </a:r>
+          </a:p>
+        </p:txBody>
+      </p:sp>
+      <p:sp>
+        <p:nvSpPr>
+          <p:cNvPr id="14" name="TextBox 13"/>
+          <p:cNvSpPr txBox="1"/>
+          <p:nvPr/>
+        </p:nvSpPr>
+        <p:spPr>
+          <a:xfrm>
+            <a:off x="8778240" y="2176272"/>
+            <a:ext cx="1691640" cy="274320"/>
+          </a:xfrm>
+          <a:prstGeom prst="rect">
+            <a:avLst/>
+          </a:prstGeom>
+          <a:noFill/>
+        </p:spPr>
+        <p:txBody>
+          <a:bodyPr wrap="square" lIns="0" rIns="0" tIns="0" bIns="0">
+            <a:spAutoFit/>
+          </a:bodyPr>
+          <a:lstStyle/>
+          <a:p>
+            <a:pPr algn="r">
+              <a:lnSpc>
+                <a:spcPts val="1600"/>
+              </a:lnSpc>
+              <a:spcAft>
+                <a:spcPts val="0"/>
+              </a:spcAft>
+            </a:pPr>
+            <a:r>
+              <a:rPr sz="1250" b="0" i="0">
+                <a:solidFill>
+                  <a:srgbClr val="212529"/>
+                </a:solidFill>
+                <a:latin typeface="Garamond"/>
+              </a:rPr>
+              <a:t>−8.49***</a:t>
+            </a:r>
+          </a:p>
+        </p:txBody>
+      </p:sp>
+      <p:sp>
+        <p:nvSpPr>
+          <p:cNvPr id="15" name="TextBox 14"/>
+          <p:cNvSpPr txBox="1"/>
+          <p:nvPr/>
+        </p:nvSpPr>
+        <p:spPr>
+          <a:xfrm>
+            <a:off x="5029200" y="2400300"/>
+            <a:ext cx="1691640" cy="274320"/>
+          </a:xfrm>
+          <a:prstGeom prst="rect">
+            <a:avLst/>
+          </a:prstGeom>
+          <a:noFill/>
+        </p:spPr>
+        <p:txBody>
+          <a:bodyPr wrap="square" lIns="0" rIns="0" tIns="0" bIns="0">
+            <a:spAutoFit/>
+          </a:bodyPr>
+          <a:lstStyle/>
+          <a:p>
+            <a:pPr algn="r">
+              <a:lnSpc>
+                <a:spcPts val="1408"/>
+              </a:lnSpc>
+              <a:spcAft>
+                <a:spcPts val="0"/>
+              </a:spcAft>
+            </a:pPr>
+            <a:r>
+              <a:rPr sz="1100" b="0" i="0">
+                <a:solidFill>
+                  <a:srgbClr val="6B7480"/>
+                </a:solidFill>
+                <a:latin typeface="Garamond"/>
+              </a:rPr>
+              <a:t>(0.55)</a:t>
+            </a:r>
+          </a:p>
+        </p:txBody>
+      </p:sp>
+      <p:sp>
+        <p:nvSpPr>
+          <p:cNvPr id="16" name="TextBox 15"/>
+          <p:cNvSpPr txBox="1"/>
+          <p:nvPr/>
+        </p:nvSpPr>
+        <p:spPr>
+          <a:xfrm>
+            <a:off x="6903720" y="2400300"/>
+            <a:ext cx="1691640" cy="274320"/>
+          </a:xfrm>
+          <a:prstGeom prst="rect">
+            <a:avLst/>
+          </a:prstGeom>
+          <a:noFill/>
+        </p:spPr>
+        <p:txBody>
+          <a:bodyPr wrap="square" lIns="0" rIns="0" tIns="0" bIns="0">
+            <a:spAutoFit/>
+          </a:bodyPr>
+          <a:lstStyle/>
+          <a:p>
+            <a:pPr algn="r">
+              <a:lnSpc>
+                <a:spcPts val="1408"/>
+              </a:lnSpc>
+              <a:spcAft>
+                <a:spcPts val="0"/>
+              </a:spcAft>
+            </a:pPr>
+            <a:r>
+              <a:rPr sz="1100" b="0" i="0">
+                <a:solidFill>
+                  <a:srgbClr val="6B7480"/>
+                </a:solidFill>
+                <a:latin typeface="Garamond"/>
+              </a:rPr>
+              <a:t>(0.40)</a:t>
+            </a:r>
+          </a:p>
+        </p:txBody>
+      </p:sp>
+      <p:sp>
+        <p:nvSpPr>
+          <p:cNvPr id="17" name="TextBox 16"/>
+          <p:cNvSpPr txBox="1"/>
+          <p:nvPr/>
+        </p:nvSpPr>
+        <p:spPr>
+          <a:xfrm>
+            <a:off x="8778240" y="2400300"/>
+            <a:ext cx="1691640" cy="274320"/>
+          </a:xfrm>
+          <a:prstGeom prst="rect">
+            <a:avLst/>
+          </a:prstGeom>
+          <a:noFill/>
+        </p:spPr>
+        <p:txBody>
+          <a:bodyPr wrap="square" lIns="0" rIns="0" tIns="0" bIns="0">
+            <a:spAutoFit/>
+          </a:bodyPr>
+          <a:lstStyle/>
+          <a:p>
+            <a:pPr algn="r">
+              <a:lnSpc>
+                <a:spcPts val="1408"/>
+              </a:lnSpc>
+              <a:spcAft>
+                <a:spcPts val="0"/>
+              </a:spcAft>
+            </a:pPr>
+            <a:r>
+              <a:rPr sz="1100" b="0" i="0">
+                <a:solidFill>
+                  <a:srgbClr val="6B7480"/>
+                </a:solidFill>
+                <a:latin typeface="Garamond"/>
+              </a:rPr>
+              <a:t>(0.39)</a:t>
+            </a:r>
+          </a:p>
+        </p:txBody>
+      </p:sp>
+      <p:sp>
+        <p:nvSpPr>
+          <p:cNvPr id="18" name="TextBox 17"/>
+          <p:cNvSpPr txBox="1"/>
+          <p:nvPr/>
+        </p:nvSpPr>
+        <p:spPr>
+          <a:xfrm>
+            <a:off x="1005840" y="2633472"/>
+            <a:ext cx="3840480" cy="274320"/>
+          </a:xfrm>
+          <a:prstGeom prst="rect">
+            <a:avLst/>
+          </a:prstGeom>
+          <a:noFill/>
+        </p:spPr>
+        <p:txBody>
+          <a:bodyPr wrap="square" lIns="0" rIns="0" tIns="0" bIns="0">
+            <a:spAutoFit/>
+          </a:bodyPr>
+          <a:lstStyle/>
+          <a:p>
+            <a:pPr algn="l">
+              <a:lnSpc>
+                <a:spcPts val="1600"/>
+              </a:lnSpc>
+              <a:spcAft>
+                <a:spcPts val="0"/>
+              </a:spcAft>
+            </a:pPr>
+            <a:r>
+              <a:rPr sz="1250" b="0" i="0">
+                <a:solidFill>
+                  <a:srgbClr val="212529"/>
+                </a:solidFill>
+                <a:latin typeface="Garamond"/>
+              </a:rPr>
+              <a:t>Part-time contract</a:t>
+            </a:r>
+          </a:p>
+        </p:txBody>
+      </p:sp>
+      <p:sp>
+        <p:nvSpPr>
+          <p:cNvPr id="19" name="TextBox 18"/>
+          <p:cNvSpPr txBox="1"/>
+          <p:nvPr/>
+        </p:nvSpPr>
+        <p:spPr>
+          <a:xfrm>
+            <a:off x="5029200" y="2633472"/>
+            <a:ext cx="1691640" cy="274320"/>
+          </a:xfrm>
+          <a:prstGeom prst="rect">
+            <a:avLst/>
+          </a:prstGeom>
+          <a:noFill/>
+        </p:spPr>
+        <p:txBody>
+          <a:bodyPr wrap="square" lIns="0" rIns="0" tIns="0" bIns="0">
+            <a:spAutoFit/>
+          </a:bodyPr>
+          <a:lstStyle/>
+          <a:p>
+            <a:pPr algn="r">
+              <a:lnSpc>
+                <a:spcPts val="1600"/>
+              </a:lnSpc>
+              <a:spcAft>
+                <a:spcPts val="0"/>
+              </a:spcAft>
+            </a:pPr>
+            <a:r>
+              <a:rPr sz="1250" b="0" i="0">
+                <a:solidFill>
+                  <a:srgbClr val="212529"/>
+                </a:solidFill>
+                <a:latin typeface="Garamond"/>
+              </a:rPr>
+              <a:t>+8.77***</a:t>
+            </a:r>
+          </a:p>
+        </p:txBody>
+      </p:sp>
+      <p:sp>
+        <p:nvSpPr>
+          <p:cNvPr id="20" name="TextBox 19"/>
+          <p:cNvSpPr txBox="1"/>
+          <p:nvPr/>
+        </p:nvSpPr>
+        <p:spPr>
+          <a:xfrm>
+            <a:off x="6903720" y="2633472"/>
+            <a:ext cx="1691640" cy="274320"/>
+          </a:xfrm>
+          <a:prstGeom prst="rect">
+            <a:avLst/>
+          </a:prstGeom>
+          <a:noFill/>
+        </p:spPr>
+        <p:txBody>
+          <a:bodyPr wrap="square" lIns="0" rIns="0" tIns="0" bIns="0">
+            <a:spAutoFit/>
+          </a:bodyPr>
+          <a:lstStyle/>
+          <a:p>
+            <a:pPr algn="r">
+              <a:lnSpc>
+                <a:spcPts val="1600"/>
+              </a:lnSpc>
+              <a:spcAft>
+                <a:spcPts val="0"/>
+              </a:spcAft>
+            </a:pPr>
+            <a:r>
+              <a:rPr sz="1250" b="0" i="0">
+                <a:solidFill>
+                  <a:srgbClr val="212529"/>
+                </a:solidFill>
+                <a:latin typeface="Garamond"/>
+              </a:rPr>
+              <a:t>+3.86***</a:t>
+            </a:r>
+          </a:p>
+        </p:txBody>
+      </p:sp>
+      <p:sp>
+        <p:nvSpPr>
+          <p:cNvPr id="21" name="TextBox 20"/>
+          <p:cNvSpPr txBox="1"/>
+          <p:nvPr/>
+        </p:nvSpPr>
+        <p:spPr>
+          <a:xfrm>
+            <a:off x="8778240" y="2633472"/>
+            <a:ext cx="1691640" cy="274320"/>
+          </a:xfrm>
+          <a:prstGeom prst="rect">
+            <a:avLst/>
+          </a:prstGeom>
+          <a:noFill/>
+        </p:spPr>
+        <p:txBody>
+          <a:bodyPr wrap="square" lIns="0" rIns="0" tIns="0" bIns="0">
+            <a:spAutoFit/>
+          </a:bodyPr>
+          <a:lstStyle/>
+          <a:p>
+            <a:pPr algn="r">
+              <a:lnSpc>
+                <a:spcPts val="1600"/>
+              </a:lnSpc>
+              <a:spcAft>
+                <a:spcPts val="0"/>
+              </a:spcAft>
+            </a:pPr>
+            <a:r>
+              <a:rPr sz="1250" b="0" i="0">
+                <a:solidFill>
+                  <a:srgbClr val="212529"/>
+                </a:solidFill>
+                <a:latin typeface="Garamond"/>
+              </a:rPr>
+              <a:t>+4.32***</a:t>
+            </a:r>
+          </a:p>
+        </p:txBody>
+      </p:sp>
+      <p:sp>
+        <p:nvSpPr>
+          <p:cNvPr id="22" name="TextBox 21"/>
+          <p:cNvSpPr txBox="1"/>
+          <p:nvPr/>
+        </p:nvSpPr>
+        <p:spPr>
+          <a:xfrm>
+            <a:off x="5029200" y="2857500"/>
+            <a:ext cx="1691640" cy="274320"/>
+          </a:xfrm>
+          <a:prstGeom prst="rect">
+            <a:avLst/>
+          </a:prstGeom>
+          <a:noFill/>
+        </p:spPr>
+        <p:txBody>
+          <a:bodyPr wrap="square" lIns="0" rIns="0" tIns="0" bIns="0">
+            <a:spAutoFit/>
+          </a:bodyPr>
+          <a:lstStyle/>
+          <a:p>
+            <a:pPr algn="r">
+              <a:lnSpc>
+                <a:spcPts val="1408"/>
+              </a:lnSpc>
+              <a:spcAft>
+                <a:spcPts val="0"/>
+              </a:spcAft>
+            </a:pPr>
+            <a:r>
+              <a:rPr sz="1100" b="0" i="0">
+                <a:solidFill>
+                  <a:srgbClr val="6B7480"/>
+                </a:solidFill>
+                <a:latin typeface="Garamond"/>
+              </a:rPr>
+              <a:t>(0.92)</a:t>
+            </a:r>
+          </a:p>
+        </p:txBody>
+      </p:sp>
+      <p:sp>
+        <p:nvSpPr>
+          <p:cNvPr id="23" name="TextBox 22"/>
+          <p:cNvSpPr txBox="1"/>
+          <p:nvPr/>
+        </p:nvSpPr>
+        <p:spPr>
+          <a:xfrm>
+            <a:off x="6903720" y="2857500"/>
+            <a:ext cx="1691640" cy="274320"/>
+          </a:xfrm>
+          <a:prstGeom prst="rect">
+            <a:avLst/>
+          </a:prstGeom>
+          <a:noFill/>
+        </p:spPr>
+        <p:txBody>
+          <a:bodyPr wrap="square" lIns="0" rIns="0" tIns="0" bIns="0">
+            <a:spAutoFit/>
+          </a:bodyPr>
+          <a:lstStyle/>
+          <a:p>
+            <a:pPr algn="r">
+              <a:lnSpc>
+                <a:spcPts val="1408"/>
+              </a:lnSpc>
+              <a:spcAft>
+                <a:spcPts val="0"/>
+              </a:spcAft>
+            </a:pPr>
+            <a:r>
+              <a:rPr sz="1100" b="0" i="0">
+                <a:solidFill>
+                  <a:srgbClr val="6B7480"/>
+                </a:solidFill>
+                <a:latin typeface="Garamond"/>
+              </a:rPr>
+              <a:t>(0.44)</a:t>
+            </a:r>
+          </a:p>
+        </p:txBody>
+      </p:sp>
+      <p:sp>
+        <p:nvSpPr>
+          <p:cNvPr id="24" name="TextBox 23"/>
+          <p:cNvSpPr txBox="1"/>
+          <p:nvPr/>
+        </p:nvSpPr>
+        <p:spPr>
+          <a:xfrm>
+            <a:off x="8778240" y="2857500"/>
+            <a:ext cx="1691640" cy="274320"/>
+          </a:xfrm>
+          <a:prstGeom prst="rect">
+            <a:avLst/>
+          </a:prstGeom>
+          <a:noFill/>
+        </p:spPr>
+        <p:txBody>
+          <a:bodyPr wrap="square" lIns="0" rIns="0" tIns="0" bIns="0">
+            <a:spAutoFit/>
+          </a:bodyPr>
+          <a:lstStyle/>
+          <a:p>
+            <a:pPr algn="r">
+              <a:lnSpc>
+                <a:spcPts val="1408"/>
+              </a:lnSpc>
+              <a:spcAft>
+                <a:spcPts val="0"/>
+              </a:spcAft>
+            </a:pPr>
+            <a:r>
+              <a:rPr sz="1100" b="0" i="0">
+                <a:solidFill>
+                  <a:srgbClr val="6B7480"/>
+                </a:solidFill>
+                <a:latin typeface="Garamond"/>
+              </a:rPr>
+              <a:t>(0.47)</a:t>
+            </a:r>
+          </a:p>
+        </p:txBody>
+      </p:sp>
+      <p:sp>
+        <p:nvSpPr>
+          <p:cNvPr id="25" name="TextBox 24"/>
+          <p:cNvSpPr txBox="1"/>
+          <p:nvPr/>
+        </p:nvSpPr>
+        <p:spPr>
+          <a:xfrm>
+            <a:off x="1005840" y="3090672"/>
+            <a:ext cx="3840480" cy="274320"/>
+          </a:xfrm>
+          <a:prstGeom prst="rect">
+            <a:avLst/>
+          </a:prstGeom>
+          <a:noFill/>
+        </p:spPr>
+        <p:txBody>
+          <a:bodyPr wrap="square" lIns="0" rIns="0" tIns="0" bIns="0">
+            <a:spAutoFit/>
+          </a:bodyPr>
+          <a:lstStyle/>
+          <a:p>
+            <a:pPr algn="l">
+              <a:lnSpc>
+                <a:spcPts val="1600"/>
+              </a:lnSpc>
+              <a:spcAft>
+                <a:spcPts val="0"/>
+              </a:spcAft>
+            </a:pPr>
+            <a:r>
+              <a:rPr sz="1250" b="0" i="0">
+                <a:solidFill>
+                  <a:srgbClr val="212529"/>
+                </a:solidFill>
+                <a:latin typeface="Garamond"/>
+              </a:rPr>
+              <a:t>Employer pension plan</a:t>
+            </a:r>
+          </a:p>
+        </p:txBody>
+      </p:sp>
+      <p:sp>
+        <p:nvSpPr>
+          <p:cNvPr id="26" name="TextBox 25"/>
+          <p:cNvSpPr txBox="1"/>
+          <p:nvPr/>
+        </p:nvSpPr>
+        <p:spPr>
+          <a:xfrm>
+            <a:off x="5029200" y="3090672"/>
+            <a:ext cx="1691640" cy="274320"/>
+          </a:xfrm>
+          <a:prstGeom prst="rect">
+            <a:avLst/>
+          </a:prstGeom>
+          <a:noFill/>
+        </p:spPr>
+        <p:txBody>
+          <a:bodyPr wrap="square" lIns="0" rIns="0" tIns="0" bIns="0">
+            <a:spAutoFit/>
+          </a:bodyPr>
+          <a:lstStyle/>
+          <a:p>
+            <a:pPr algn="r">
+              <a:lnSpc>
+                <a:spcPts val="1600"/>
+              </a:lnSpc>
+              <a:spcAft>
+                <a:spcPts val="0"/>
+              </a:spcAft>
+            </a:pPr>
+            <a:r>
+              <a:rPr sz="1250" b="0" i="0">
+                <a:solidFill>
+                  <a:srgbClr val="212529"/>
+                </a:solidFill>
+                <a:latin typeface="Garamond"/>
+              </a:rPr>
+              <a:t>−2.55***</a:t>
+            </a:r>
+          </a:p>
+        </p:txBody>
+      </p:sp>
+      <p:sp>
+        <p:nvSpPr>
+          <p:cNvPr id="27" name="TextBox 26"/>
+          <p:cNvSpPr txBox="1"/>
+          <p:nvPr/>
+        </p:nvSpPr>
+        <p:spPr>
+          <a:xfrm>
+            <a:off x="6903720" y="3090672"/>
+            <a:ext cx="1691640" cy="274320"/>
+          </a:xfrm>
+          <a:prstGeom prst="rect">
+            <a:avLst/>
+          </a:prstGeom>
+          <a:noFill/>
+        </p:spPr>
+        <p:txBody>
+          <a:bodyPr wrap="square" lIns="0" rIns="0" tIns="0" bIns="0">
+            <a:spAutoFit/>
+          </a:bodyPr>
+          <a:lstStyle/>
+          <a:p>
+            <a:pPr algn="r">
+              <a:lnSpc>
+                <a:spcPts val="1600"/>
+              </a:lnSpc>
+              <a:spcAft>
+                <a:spcPts val="0"/>
+              </a:spcAft>
+            </a:pPr>
+            <a:r>
+              <a:rPr sz="1250" b="0" i="0">
+                <a:solidFill>
+                  <a:srgbClr val="212529"/>
+                </a:solidFill>
+                <a:latin typeface="Garamond"/>
+              </a:rPr>
+              <a:t>−2.38***</a:t>
+            </a:r>
+          </a:p>
+        </p:txBody>
+      </p:sp>
+      <p:sp>
+        <p:nvSpPr>
+          <p:cNvPr id="28" name="TextBox 27"/>
+          <p:cNvSpPr txBox="1"/>
+          <p:nvPr/>
+        </p:nvSpPr>
+        <p:spPr>
+          <a:xfrm>
+            <a:off x="8778240" y="3090672"/>
+            <a:ext cx="1691640" cy="274320"/>
+          </a:xfrm>
+          <a:prstGeom prst="rect">
+            <a:avLst/>
+          </a:prstGeom>
+          <a:noFill/>
+        </p:spPr>
+        <p:txBody>
+          <a:bodyPr wrap="square" lIns="0" rIns="0" tIns="0" bIns="0">
+            <a:spAutoFit/>
+          </a:bodyPr>
+          <a:lstStyle/>
+          <a:p>
+            <a:pPr algn="r">
+              <a:lnSpc>
+                <a:spcPts val="1600"/>
+              </a:lnSpc>
+              <a:spcAft>
+                <a:spcPts val="0"/>
+              </a:spcAft>
+            </a:pPr>
+            <a:r>
+              <a:rPr sz="1250" b="0" i="0">
+                <a:solidFill>
+                  <a:srgbClr val="212529"/>
+                </a:solidFill>
+                <a:latin typeface="Garamond"/>
+              </a:rPr>
+              <a:t>−2.41***</a:t>
+            </a:r>
+          </a:p>
+        </p:txBody>
+      </p:sp>
+      <p:sp>
+        <p:nvSpPr>
+          <p:cNvPr id="29" name="TextBox 28"/>
+          <p:cNvSpPr txBox="1"/>
+          <p:nvPr/>
+        </p:nvSpPr>
+        <p:spPr>
+          <a:xfrm>
+            <a:off x="5029200" y="3314700"/>
+            <a:ext cx="1691640" cy="274320"/>
+          </a:xfrm>
+          <a:prstGeom prst="rect">
+            <a:avLst/>
+          </a:prstGeom>
+          <a:noFill/>
+        </p:spPr>
+        <p:txBody>
+          <a:bodyPr wrap="square" lIns="0" rIns="0" tIns="0" bIns="0">
+            <a:spAutoFit/>
+          </a:bodyPr>
+          <a:lstStyle/>
+          <a:p>
+            <a:pPr algn="r">
+              <a:lnSpc>
+                <a:spcPts val="1408"/>
+              </a:lnSpc>
+              <a:spcAft>
+                <a:spcPts val="0"/>
+              </a:spcAft>
+            </a:pPr>
+            <a:r>
+              <a:rPr sz="1100" b="0" i="0">
+                <a:solidFill>
+                  <a:srgbClr val="6B7480"/>
+                </a:solidFill>
+                <a:latin typeface="Garamond"/>
+              </a:rPr>
+              <a:t>(0.44)</a:t>
+            </a:r>
+          </a:p>
+        </p:txBody>
+      </p:sp>
+      <p:sp>
+        <p:nvSpPr>
+          <p:cNvPr id="30" name="TextBox 29"/>
+          <p:cNvSpPr txBox="1"/>
+          <p:nvPr/>
+        </p:nvSpPr>
+        <p:spPr>
+          <a:xfrm>
+            <a:off x="6903720" y="3314700"/>
+            <a:ext cx="1691640" cy="274320"/>
+          </a:xfrm>
+          <a:prstGeom prst="rect">
+            <a:avLst/>
+          </a:prstGeom>
+          <a:noFill/>
+        </p:spPr>
+        <p:txBody>
+          <a:bodyPr wrap="square" lIns="0" rIns="0" tIns="0" bIns="0">
+            <a:spAutoFit/>
+          </a:bodyPr>
+          <a:lstStyle/>
+          <a:p>
+            <a:pPr algn="r">
+              <a:lnSpc>
+                <a:spcPts val="1408"/>
+              </a:lnSpc>
+              <a:spcAft>
+                <a:spcPts val="0"/>
+              </a:spcAft>
+            </a:pPr>
+            <a:r>
+              <a:rPr sz="1100" b="0" i="0">
+                <a:solidFill>
+                  <a:srgbClr val="6B7480"/>
+                </a:solidFill>
+                <a:latin typeface="Garamond"/>
+              </a:rPr>
+              <a:t>(0.39)</a:t>
+            </a:r>
+          </a:p>
+        </p:txBody>
+      </p:sp>
+      <p:sp>
+        <p:nvSpPr>
+          <p:cNvPr id="31" name="TextBox 30"/>
+          <p:cNvSpPr txBox="1"/>
+          <p:nvPr/>
+        </p:nvSpPr>
+        <p:spPr>
+          <a:xfrm>
+            <a:off x="8778240" y="3314700"/>
+            <a:ext cx="1691640" cy="274320"/>
+          </a:xfrm>
+          <a:prstGeom prst="rect">
+            <a:avLst/>
+          </a:prstGeom>
+          <a:noFill/>
+        </p:spPr>
+        <p:txBody>
+          <a:bodyPr wrap="square" lIns="0" rIns="0" tIns="0" bIns="0">
+            <a:spAutoFit/>
+          </a:bodyPr>
+          <a:lstStyle/>
+          <a:p>
+            <a:pPr algn="r">
+              <a:lnSpc>
+                <a:spcPts val="1408"/>
+              </a:lnSpc>
+              <a:spcAft>
+                <a:spcPts val="0"/>
+              </a:spcAft>
+            </a:pPr>
+            <a:r>
+              <a:rPr sz="1100" b="0" i="0">
+                <a:solidFill>
+                  <a:srgbClr val="6B7480"/>
+                </a:solidFill>
+                <a:latin typeface="Garamond"/>
+              </a:rPr>
+              <a:t>(0.38)</a:t>
+            </a:r>
+          </a:p>
+        </p:txBody>
+      </p:sp>
+      <p:sp>
+        <p:nvSpPr>
+          <p:cNvPr id="32" name="TextBox 31"/>
+          <p:cNvSpPr txBox="1"/>
+          <p:nvPr/>
+        </p:nvSpPr>
+        <p:spPr>
+          <a:xfrm>
+            <a:off x="1005840" y="3547872"/>
+            <a:ext cx="3840480" cy="274320"/>
+          </a:xfrm>
+          <a:prstGeom prst="rect">
+            <a:avLst/>
+          </a:prstGeom>
+          <a:noFill/>
+        </p:spPr>
+        <p:txBody>
+          <a:bodyPr wrap="square" lIns="0" rIns="0" tIns="0" bIns="0">
+            <a:spAutoFit/>
+          </a:bodyPr>
+          <a:lstStyle/>
+          <a:p>
+            <a:pPr algn="l">
+              <a:lnSpc>
+                <a:spcPts val="1600"/>
+              </a:lnSpc>
+              <a:spcAft>
+                <a:spcPts val="0"/>
+              </a:spcAft>
+            </a:pPr>
+            <a:r>
+              <a:rPr sz="1250" b="0" i="0">
+                <a:solidFill>
+                  <a:srgbClr val="212529"/>
+                </a:solidFill>
+                <a:latin typeface="Garamond"/>
+              </a:rPr>
+              <a:t>Public sector</a:t>
+            </a:r>
+          </a:p>
+        </p:txBody>
+      </p:sp>
+      <p:sp>
+        <p:nvSpPr>
+          <p:cNvPr id="33" name="TextBox 32"/>
+          <p:cNvSpPr txBox="1"/>
+          <p:nvPr/>
+        </p:nvSpPr>
+        <p:spPr>
+          <a:xfrm>
+            <a:off x="5029200" y="3547872"/>
+            <a:ext cx="1691640" cy="274320"/>
+          </a:xfrm>
+          <a:prstGeom prst="rect">
+            <a:avLst/>
+          </a:prstGeom>
+          <a:noFill/>
+        </p:spPr>
+        <p:txBody>
+          <a:bodyPr wrap="square" lIns="0" rIns="0" tIns="0" bIns="0">
+            <a:spAutoFit/>
+          </a:bodyPr>
+          <a:lstStyle/>
+          <a:p>
+            <a:pPr algn="r">
+              <a:lnSpc>
+                <a:spcPts val="1600"/>
+              </a:lnSpc>
+              <a:spcAft>
+                <a:spcPts val="0"/>
+              </a:spcAft>
+            </a:pPr>
+            <a:r>
+              <a:rPr sz="1250" b="0" i="0">
+                <a:solidFill>
+                  <a:srgbClr val="212529"/>
+                </a:solidFill>
+                <a:latin typeface="Garamond"/>
+              </a:rPr>
+              <a:t>−2.17***</a:t>
+            </a:r>
+          </a:p>
+        </p:txBody>
+      </p:sp>
+      <p:sp>
+        <p:nvSpPr>
+          <p:cNvPr id="34" name="TextBox 33"/>
+          <p:cNvSpPr txBox="1"/>
+          <p:nvPr/>
+        </p:nvSpPr>
+        <p:spPr>
+          <a:xfrm>
+            <a:off x="6903720" y="3547872"/>
+            <a:ext cx="1691640" cy="274320"/>
+          </a:xfrm>
+          <a:prstGeom prst="rect">
+            <a:avLst/>
+          </a:prstGeom>
+          <a:noFill/>
+        </p:spPr>
+        <p:txBody>
+          <a:bodyPr wrap="square" lIns="0" rIns="0" tIns="0" bIns="0">
+            <a:spAutoFit/>
+          </a:bodyPr>
+          <a:lstStyle/>
+          <a:p>
+            <a:pPr algn="r">
+              <a:lnSpc>
+                <a:spcPts val="1600"/>
+              </a:lnSpc>
+              <a:spcAft>
+                <a:spcPts val="0"/>
+              </a:spcAft>
+            </a:pPr>
+            <a:r>
+              <a:rPr sz="1250" b="0" i="0">
+                <a:solidFill>
+                  <a:srgbClr val="212529"/>
+                </a:solidFill>
+                <a:latin typeface="Garamond"/>
+              </a:rPr>
+              <a:t>−2.24***</a:t>
+            </a:r>
+          </a:p>
+        </p:txBody>
+      </p:sp>
+      <p:sp>
+        <p:nvSpPr>
+          <p:cNvPr id="35" name="TextBox 34"/>
+          <p:cNvSpPr txBox="1"/>
+          <p:nvPr/>
+        </p:nvSpPr>
+        <p:spPr>
+          <a:xfrm>
+            <a:off x="8778240" y="3547872"/>
+            <a:ext cx="1691640" cy="274320"/>
+          </a:xfrm>
+          <a:prstGeom prst="rect">
+            <a:avLst/>
+          </a:prstGeom>
+          <a:noFill/>
+        </p:spPr>
+        <p:txBody>
+          <a:bodyPr wrap="square" lIns="0" rIns="0" tIns="0" bIns="0">
+            <a:spAutoFit/>
+          </a:bodyPr>
+          <a:lstStyle/>
+          <a:p>
+            <a:pPr algn="r">
+              <a:lnSpc>
+                <a:spcPts val="1600"/>
+              </a:lnSpc>
+              <a:spcAft>
+                <a:spcPts val="0"/>
+              </a:spcAft>
+            </a:pPr>
+            <a:r>
+              <a:rPr sz="1250" b="0" i="0">
+                <a:solidFill>
+                  <a:srgbClr val="212529"/>
+                </a:solidFill>
+                <a:latin typeface="Garamond"/>
+              </a:rPr>
+              <a:t>−2.27***</a:t>
+            </a:r>
+          </a:p>
+        </p:txBody>
+      </p:sp>
+      <p:sp>
+        <p:nvSpPr>
+          <p:cNvPr id="36" name="TextBox 35"/>
+          <p:cNvSpPr txBox="1"/>
+          <p:nvPr/>
+        </p:nvSpPr>
+        <p:spPr>
+          <a:xfrm>
+            <a:off x="5029200" y="3771900"/>
+            <a:ext cx="1691640" cy="274320"/>
+          </a:xfrm>
+          <a:prstGeom prst="rect">
+            <a:avLst/>
+          </a:prstGeom>
+          <a:noFill/>
+        </p:spPr>
+        <p:txBody>
+          <a:bodyPr wrap="square" lIns="0" rIns="0" tIns="0" bIns="0">
+            <a:spAutoFit/>
+          </a:bodyPr>
+          <a:lstStyle/>
+          <a:p>
+            <a:pPr algn="r">
+              <a:lnSpc>
+                <a:spcPts val="1408"/>
+              </a:lnSpc>
+              <a:spcAft>
+                <a:spcPts val="0"/>
+              </a:spcAft>
+            </a:pPr>
+            <a:r>
+              <a:rPr sz="1100" b="0" i="0">
+                <a:solidFill>
+                  <a:srgbClr val="6B7480"/>
+                </a:solidFill>
+                <a:latin typeface="Garamond"/>
+              </a:rPr>
+              <a:t>(0.47)</a:t>
+            </a:r>
+          </a:p>
+        </p:txBody>
+      </p:sp>
+      <p:sp>
+        <p:nvSpPr>
+          <p:cNvPr id="37" name="TextBox 36"/>
+          <p:cNvSpPr txBox="1"/>
+          <p:nvPr/>
+        </p:nvSpPr>
+        <p:spPr>
+          <a:xfrm>
+            <a:off x="6903720" y="3771900"/>
+            <a:ext cx="1691640" cy="274320"/>
+          </a:xfrm>
+          <a:prstGeom prst="rect">
+            <a:avLst/>
+          </a:prstGeom>
+          <a:noFill/>
+        </p:spPr>
+        <p:txBody>
+          <a:bodyPr wrap="square" lIns="0" rIns="0" tIns="0" bIns="0">
+            <a:spAutoFit/>
+          </a:bodyPr>
+          <a:lstStyle/>
+          <a:p>
+            <a:pPr algn="r">
+              <a:lnSpc>
+                <a:spcPts val="1408"/>
+              </a:lnSpc>
+              <a:spcAft>
+                <a:spcPts val="0"/>
+              </a:spcAft>
+            </a:pPr>
+            <a:r>
+              <a:rPr sz="1100" b="0" i="0">
+                <a:solidFill>
+                  <a:srgbClr val="6B7480"/>
+                </a:solidFill>
+                <a:latin typeface="Garamond"/>
+              </a:rPr>
+              <a:t>(0.39)</a:t>
+            </a:r>
+          </a:p>
+        </p:txBody>
+      </p:sp>
+      <p:sp>
+        <p:nvSpPr>
+          <p:cNvPr id="38" name="TextBox 37"/>
+          <p:cNvSpPr txBox="1"/>
+          <p:nvPr/>
+        </p:nvSpPr>
+        <p:spPr>
+          <a:xfrm>
+            <a:off x="8778240" y="3771900"/>
+            <a:ext cx="1691640" cy="274320"/>
+          </a:xfrm>
+          <a:prstGeom prst="rect">
+            <a:avLst/>
+          </a:prstGeom>
+          <a:noFill/>
+        </p:spPr>
+        <p:txBody>
+          <a:bodyPr wrap="square" lIns="0" rIns="0" tIns="0" bIns="0">
+            <a:spAutoFit/>
+          </a:bodyPr>
+          <a:lstStyle/>
+          <a:p>
+            <a:pPr algn="r">
+              <a:lnSpc>
+                <a:spcPts val="1408"/>
+              </a:lnSpc>
+              <a:spcAft>
+                <a:spcPts val="0"/>
+              </a:spcAft>
+            </a:pPr>
+            <a:r>
+              <a:rPr sz="1100" b="0" i="0">
+                <a:solidFill>
+                  <a:srgbClr val="6B7480"/>
+                </a:solidFill>
+                <a:latin typeface="Garamond"/>
+              </a:rPr>
+              <a:t>(0.39)</a:t>
+            </a:r>
+          </a:p>
+        </p:txBody>
+      </p:sp>
+      <p:sp>
+        <p:nvSpPr>
+          <p:cNvPr id="39" name="TextBox 38"/>
+          <p:cNvSpPr txBox="1"/>
+          <p:nvPr/>
+        </p:nvSpPr>
+        <p:spPr>
+          <a:xfrm>
+            <a:off x="1005840" y="4005072"/>
+            <a:ext cx="3840480" cy="274320"/>
+          </a:xfrm>
+          <a:prstGeom prst="rect">
+            <a:avLst/>
+          </a:prstGeom>
+          <a:noFill/>
+        </p:spPr>
+        <p:txBody>
+          <a:bodyPr wrap="square" lIns="0" rIns="0" tIns="0" bIns="0">
+            <a:spAutoFit/>
+          </a:bodyPr>
+          <a:lstStyle/>
+          <a:p>
+            <a:pPr algn="l">
+              <a:lnSpc>
+                <a:spcPts val="1600"/>
+              </a:lnSpc>
+              <a:spcAft>
+                <a:spcPts val="0"/>
+              </a:spcAft>
+            </a:pPr>
+            <a:r>
+              <a:rPr sz="1250" b="0" i="0">
+                <a:solidFill>
+                  <a:srgbClr val="212529"/>
+                </a:solidFill>
+                <a:latin typeface="Garamond"/>
+              </a:rPr>
+              <a:t>New baby during the year</a:t>
+            </a:r>
+          </a:p>
+        </p:txBody>
+      </p:sp>
+      <p:sp>
+        <p:nvSpPr>
+          <p:cNvPr id="40" name="TextBox 39"/>
+          <p:cNvSpPr txBox="1"/>
+          <p:nvPr/>
+        </p:nvSpPr>
+        <p:spPr>
+          <a:xfrm>
+            <a:off x="5029200" y="4005072"/>
+            <a:ext cx="1691640" cy="274320"/>
+          </a:xfrm>
+          <a:prstGeom prst="rect">
+            <a:avLst/>
+          </a:prstGeom>
+          <a:noFill/>
+        </p:spPr>
+        <p:txBody>
+          <a:bodyPr wrap="square" lIns="0" rIns="0" tIns="0" bIns="0">
+            <a:spAutoFit/>
+          </a:bodyPr>
+          <a:lstStyle/>
+          <a:p>
+            <a:pPr algn="r">
+              <a:lnSpc>
+                <a:spcPts val="1600"/>
+              </a:lnSpc>
+              <a:spcAft>
+                <a:spcPts val="0"/>
+              </a:spcAft>
+            </a:pPr>
+            <a:r>
+              <a:rPr sz="1250" b="0" i="0">
+                <a:solidFill>
+                  <a:srgbClr val="212529"/>
+                </a:solidFill>
+                <a:latin typeface="Garamond"/>
+              </a:rPr>
+              <a:t>+5.65***</a:t>
+            </a:r>
+          </a:p>
+        </p:txBody>
+      </p:sp>
+      <p:sp>
+        <p:nvSpPr>
+          <p:cNvPr id="41" name="TextBox 40"/>
+          <p:cNvSpPr txBox="1"/>
+          <p:nvPr/>
+        </p:nvSpPr>
+        <p:spPr>
+          <a:xfrm>
+            <a:off x="6903720" y="4005072"/>
+            <a:ext cx="1691640" cy="274320"/>
+          </a:xfrm>
+          <a:prstGeom prst="rect">
+            <a:avLst/>
+          </a:prstGeom>
+          <a:noFill/>
+        </p:spPr>
+        <p:txBody>
+          <a:bodyPr wrap="square" lIns="0" rIns="0" tIns="0" bIns="0">
+            <a:spAutoFit/>
+          </a:bodyPr>
+          <a:lstStyle/>
+          <a:p>
+            <a:pPr algn="r">
+              <a:lnSpc>
+                <a:spcPts val="1600"/>
+              </a:lnSpc>
+              <a:spcAft>
+                <a:spcPts val="0"/>
+              </a:spcAft>
+            </a:pPr>
+            <a:r>
+              <a:rPr sz="1250" b="0" i="0">
+                <a:solidFill>
+                  <a:srgbClr val="212529"/>
+                </a:solidFill>
+                <a:latin typeface="Garamond"/>
+              </a:rPr>
+              <a:t>+4.74***</a:t>
+            </a:r>
+          </a:p>
+        </p:txBody>
+      </p:sp>
+      <p:sp>
+        <p:nvSpPr>
+          <p:cNvPr id="42" name="TextBox 41"/>
+          <p:cNvSpPr txBox="1"/>
+          <p:nvPr/>
+        </p:nvSpPr>
+        <p:spPr>
+          <a:xfrm>
+            <a:off x="8778240" y="4005072"/>
+            <a:ext cx="1691640" cy="274320"/>
+          </a:xfrm>
+          <a:prstGeom prst="rect">
+            <a:avLst/>
+          </a:prstGeom>
+          <a:noFill/>
+        </p:spPr>
+        <p:txBody>
+          <a:bodyPr wrap="square" lIns="0" rIns="0" tIns="0" bIns="0">
+            <a:spAutoFit/>
+          </a:bodyPr>
+          <a:lstStyle/>
+          <a:p>
+            <a:pPr algn="r">
+              <a:lnSpc>
+                <a:spcPts val="1600"/>
+              </a:lnSpc>
+              <a:spcAft>
+                <a:spcPts val="0"/>
+              </a:spcAft>
+            </a:pPr>
+            <a:r>
+              <a:rPr sz="1250" b="0" i="0">
+                <a:solidFill>
+                  <a:srgbClr val="212529"/>
+                </a:solidFill>
+                <a:latin typeface="Garamond"/>
+              </a:rPr>
+              <a:t>+4.59***</a:t>
+            </a:r>
+          </a:p>
+        </p:txBody>
+      </p:sp>
+      <p:sp>
+        <p:nvSpPr>
+          <p:cNvPr id="43" name="TextBox 42"/>
+          <p:cNvSpPr txBox="1"/>
+          <p:nvPr/>
+        </p:nvSpPr>
+        <p:spPr>
+          <a:xfrm>
+            <a:off x="5029200" y="4229100"/>
+            <a:ext cx="1691640" cy="274320"/>
+          </a:xfrm>
+          <a:prstGeom prst="rect">
+            <a:avLst/>
+          </a:prstGeom>
+          <a:noFill/>
+        </p:spPr>
+        <p:txBody>
+          <a:bodyPr wrap="square" lIns="0" rIns="0" tIns="0" bIns="0">
+            <a:spAutoFit/>
+          </a:bodyPr>
+          <a:lstStyle/>
+          <a:p>
+            <a:pPr algn="r">
+              <a:lnSpc>
+                <a:spcPts val="1408"/>
+              </a:lnSpc>
+              <a:spcAft>
+                <a:spcPts val="0"/>
+              </a:spcAft>
+            </a:pPr>
+            <a:r>
+              <a:rPr sz="1100" b="0" i="0">
+                <a:solidFill>
+                  <a:srgbClr val="6B7480"/>
+                </a:solidFill>
+                <a:latin typeface="Garamond"/>
+              </a:rPr>
+              <a:t>(1.33)</a:t>
+            </a:r>
+          </a:p>
+        </p:txBody>
+      </p:sp>
+      <p:sp>
+        <p:nvSpPr>
+          <p:cNvPr id="44" name="TextBox 43"/>
+          <p:cNvSpPr txBox="1"/>
+          <p:nvPr/>
+        </p:nvSpPr>
+        <p:spPr>
+          <a:xfrm>
+            <a:off x="6903720" y="4229100"/>
+            <a:ext cx="1691640" cy="274320"/>
+          </a:xfrm>
+          <a:prstGeom prst="rect">
+            <a:avLst/>
+          </a:prstGeom>
+          <a:noFill/>
+        </p:spPr>
+        <p:txBody>
+          <a:bodyPr wrap="square" lIns="0" rIns="0" tIns="0" bIns="0">
+            <a:spAutoFit/>
+          </a:bodyPr>
+          <a:lstStyle/>
+          <a:p>
+            <a:pPr algn="r">
+              <a:lnSpc>
+                <a:spcPts val="1408"/>
+              </a:lnSpc>
+              <a:spcAft>
+                <a:spcPts val="0"/>
+              </a:spcAft>
+            </a:pPr>
+            <a:r>
+              <a:rPr sz="1100" b="0" i="0">
+                <a:solidFill>
+                  <a:srgbClr val="6B7480"/>
+                </a:solidFill>
+                <a:latin typeface="Garamond"/>
+              </a:rPr>
+              <a:t>(0.90)</a:t>
+            </a:r>
+          </a:p>
+        </p:txBody>
+      </p:sp>
+      <p:sp>
+        <p:nvSpPr>
+          <p:cNvPr id="45" name="TextBox 44"/>
+          <p:cNvSpPr txBox="1"/>
+          <p:nvPr/>
+        </p:nvSpPr>
+        <p:spPr>
+          <a:xfrm>
+            <a:off x="8778240" y="4229100"/>
+            <a:ext cx="1691640" cy="274320"/>
+          </a:xfrm>
+          <a:prstGeom prst="rect">
+            <a:avLst/>
+          </a:prstGeom>
+          <a:noFill/>
+        </p:spPr>
+        <p:txBody>
+          <a:bodyPr wrap="square" lIns="0" rIns="0" tIns="0" bIns="0">
+            <a:spAutoFit/>
+          </a:bodyPr>
+          <a:lstStyle/>
+          <a:p>
+            <a:pPr algn="r">
+              <a:lnSpc>
+                <a:spcPts val="1408"/>
+              </a:lnSpc>
+              <a:spcAft>
+                <a:spcPts val="0"/>
+              </a:spcAft>
+            </a:pPr>
+            <a:r>
+              <a:rPr sz="1100" b="0" i="0">
+                <a:solidFill>
+                  <a:srgbClr val="6B7480"/>
+                </a:solidFill>
+                <a:latin typeface="Garamond"/>
+              </a:rPr>
+              <a:t>(0.91)</a:t>
+            </a:r>
+          </a:p>
+        </p:txBody>
+      </p:sp>
+      <p:sp>
+        <p:nvSpPr>
+          <p:cNvPr id="46" name="TextBox 45"/>
+          <p:cNvSpPr txBox="1"/>
+          <p:nvPr/>
+        </p:nvSpPr>
+        <p:spPr>
+          <a:xfrm>
+            <a:off x="1005840" y="4462272"/>
+            <a:ext cx="3840480" cy="274320"/>
+          </a:xfrm>
+          <a:prstGeom prst="rect">
+            <a:avLst/>
+          </a:prstGeom>
+          <a:noFill/>
+        </p:spPr>
+        <p:txBody>
+          <a:bodyPr wrap="square" lIns="0" rIns="0" tIns="0" bIns="0">
+            <a:spAutoFit/>
+          </a:bodyPr>
+          <a:lstStyle/>
+          <a:p>
+            <a:pPr algn="l">
+              <a:lnSpc>
+                <a:spcPts val="1600"/>
+              </a:lnSpc>
+              <a:spcAft>
+                <a:spcPts val="0"/>
+              </a:spcAft>
+            </a:pPr>
+            <a:r>
+              <a:rPr sz="1250" b="0" i="0">
+                <a:solidFill>
+                  <a:srgbClr val="212529"/>
+                </a:solidFill>
+                <a:latin typeface="Garamond"/>
+              </a:rPr>
+              <a:t>With a disability</a:t>
+            </a:r>
+          </a:p>
+        </p:txBody>
+      </p:sp>
+      <p:sp>
+        <p:nvSpPr>
+          <p:cNvPr id="47" name="TextBox 46"/>
+          <p:cNvSpPr txBox="1"/>
+          <p:nvPr/>
+        </p:nvSpPr>
+        <p:spPr>
+          <a:xfrm>
+            <a:off x="5029200" y="4462272"/>
+            <a:ext cx="1691640" cy="274320"/>
+          </a:xfrm>
+          <a:prstGeom prst="rect">
+            <a:avLst/>
+          </a:prstGeom>
+          <a:noFill/>
+        </p:spPr>
+        <p:txBody>
+          <a:bodyPr wrap="square" lIns="0" rIns="0" tIns="0" bIns="0">
+            <a:spAutoFit/>
+          </a:bodyPr>
+          <a:lstStyle/>
+          <a:p>
+            <a:pPr algn="r">
+              <a:lnSpc>
+                <a:spcPts val="1600"/>
+              </a:lnSpc>
+              <a:spcAft>
+                <a:spcPts val="0"/>
+              </a:spcAft>
+            </a:pPr>
+            <a:r>
+              <a:rPr sz="1250" b="0" i="0">
+                <a:solidFill>
+                  <a:srgbClr val="212529"/>
+                </a:solidFill>
+                <a:latin typeface="Garamond"/>
+              </a:rPr>
+              <a:t>+8.31***</a:t>
+            </a:r>
+          </a:p>
+        </p:txBody>
+      </p:sp>
+      <p:sp>
+        <p:nvSpPr>
+          <p:cNvPr id="48" name="TextBox 47"/>
+          <p:cNvSpPr txBox="1"/>
+          <p:nvPr/>
+        </p:nvSpPr>
+        <p:spPr>
+          <a:xfrm>
+            <a:off x="6903720" y="4462272"/>
+            <a:ext cx="1691640" cy="274320"/>
+          </a:xfrm>
+          <a:prstGeom prst="rect">
+            <a:avLst/>
+          </a:prstGeom>
+          <a:noFill/>
+        </p:spPr>
+        <p:txBody>
+          <a:bodyPr wrap="square" lIns="0" rIns="0" tIns="0" bIns="0">
+            <a:spAutoFit/>
+          </a:bodyPr>
+          <a:lstStyle/>
+          <a:p>
+            <a:pPr algn="r">
+              <a:lnSpc>
+                <a:spcPts val="1600"/>
+              </a:lnSpc>
+              <a:spcAft>
+                <a:spcPts val="0"/>
+              </a:spcAft>
+            </a:pPr>
+            <a:r>
+              <a:rPr sz="1250" b="0" i="0">
+                <a:solidFill>
+                  <a:srgbClr val="212529"/>
+                </a:solidFill>
+                <a:latin typeface="Garamond"/>
+              </a:rPr>
+              <a:t>+3.78***</a:t>
+            </a:r>
+          </a:p>
+        </p:txBody>
+      </p:sp>
+      <p:sp>
+        <p:nvSpPr>
+          <p:cNvPr id="49" name="TextBox 48"/>
+          <p:cNvSpPr txBox="1"/>
+          <p:nvPr/>
+        </p:nvSpPr>
+        <p:spPr>
+          <a:xfrm>
+            <a:off x="8778240" y="4462272"/>
+            <a:ext cx="1691640" cy="274320"/>
+          </a:xfrm>
+          <a:prstGeom prst="rect">
+            <a:avLst/>
+          </a:prstGeom>
+          <a:noFill/>
+        </p:spPr>
+        <p:txBody>
+          <a:bodyPr wrap="square" lIns="0" rIns="0" tIns="0" bIns="0">
+            <a:spAutoFit/>
+          </a:bodyPr>
+          <a:lstStyle/>
+          <a:p>
+            <a:pPr algn="r">
+              <a:lnSpc>
+                <a:spcPts val="1600"/>
+              </a:lnSpc>
+              <a:spcAft>
+                <a:spcPts val="0"/>
+              </a:spcAft>
+            </a:pPr>
+            <a:r>
+              <a:rPr sz="1250" b="0" i="0">
+                <a:solidFill>
+                  <a:srgbClr val="212529"/>
+                </a:solidFill>
+                <a:latin typeface="Garamond"/>
+              </a:rPr>
+              <a:t>+4.19***</a:t>
+            </a:r>
+          </a:p>
+        </p:txBody>
+      </p:sp>
+      <p:sp>
+        <p:nvSpPr>
+          <p:cNvPr id="50" name="TextBox 49"/>
+          <p:cNvSpPr txBox="1"/>
+          <p:nvPr/>
+        </p:nvSpPr>
+        <p:spPr>
+          <a:xfrm>
+            <a:off x="5029200" y="4686300"/>
+            <a:ext cx="1691640" cy="274320"/>
+          </a:xfrm>
+          <a:prstGeom prst="rect">
+            <a:avLst/>
+          </a:prstGeom>
+          <a:noFill/>
+        </p:spPr>
+        <p:txBody>
+          <a:bodyPr wrap="square" lIns="0" rIns="0" tIns="0" bIns="0">
+            <a:spAutoFit/>
+          </a:bodyPr>
+          <a:lstStyle/>
+          <a:p>
+            <a:pPr algn="r">
+              <a:lnSpc>
+                <a:spcPts val="1408"/>
+              </a:lnSpc>
+              <a:spcAft>
+                <a:spcPts val="0"/>
+              </a:spcAft>
+            </a:pPr>
+            <a:r>
+              <a:rPr sz="1100" b="0" i="0">
+                <a:solidFill>
+                  <a:srgbClr val="6B7480"/>
+                </a:solidFill>
+                <a:latin typeface="Garamond"/>
+              </a:rPr>
+              <a:t>(1.84)</a:t>
+            </a:r>
+          </a:p>
+        </p:txBody>
+      </p:sp>
+      <p:sp>
+        <p:nvSpPr>
+          <p:cNvPr id="51" name="TextBox 50"/>
+          <p:cNvSpPr txBox="1"/>
+          <p:nvPr/>
+        </p:nvSpPr>
+        <p:spPr>
+          <a:xfrm>
+            <a:off x="6903720" y="4686300"/>
+            <a:ext cx="1691640" cy="274320"/>
+          </a:xfrm>
+          <a:prstGeom prst="rect">
+            <a:avLst/>
+          </a:prstGeom>
+          <a:noFill/>
+        </p:spPr>
+        <p:txBody>
+          <a:bodyPr wrap="square" lIns="0" rIns="0" tIns="0" bIns="0">
+            <a:spAutoFit/>
+          </a:bodyPr>
+          <a:lstStyle/>
+          <a:p>
+            <a:pPr algn="r">
+              <a:lnSpc>
+                <a:spcPts val="1408"/>
+              </a:lnSpc>
+              <a:spcAft>
+                <a:spcPts val="0"/>
+              </a:spcAft>
+            </a:pPr>
+            <a:r>
+              <a:rPr sz="1100" b="0" i="0">
+                <a:solidFill>
+                  <a:srgbClr val="6B7480"/>
+                </a:solidFill>
+                <a:latin typeface="Garamond"/>
+              </a:rPr>
+              <a:t>(0.80)</a:t>
+            </a:r>
+          </a:p>
+        </p:txBody>
+      </p:sp>
+      <p:sp>
+        <p:nvSpPr>
+          <p:cNvPr id="52" name="TextBox 51"/>
+          <p:cNvSpPr txBox="1"/>
+          <p:nvPr/>
+        </p:nvSpPr>
+        <p:spPr>
+          <a:xfrm>
+            <a:off x="8778240" y="4686300"/>
+            <a:ext cx="1691640" cy="274320"/>
+          </a:xfrm>
+          <a:prstGeom prst="rect">
+            <a:avLst/>
+          </a:prstGeom>
+          <a:noFill/>
+        </p:spPr>
+        <p:txBody>
+          <a:bodyPr wrap="square" lIns="0" rIns="0" tIns="0" bIns="0">
+            <a:spAutoFit/>
+          </a:bodyPr>
+          <a:lstStyle/>
+          <a:p>
+            <a:pPr algn="r">
+              <a:lnSpc>
+                <a:spcPts val="1408"/>
+              </a:lnSpc>
+              <a:spcAft>
+                <a:spcPts val="0"/>
+              </a:spcAft>
+            </a:pPr>
+            <a:r>
+              <a:rPr sz="1100" b="0" i="0">
+                <a:solidFill>
+                  <a:srgbClr val="6B7480"/>
+                </a:solidFill>
+                <a:latin typeface="Garamond"/>
+              </a:rPr>
+              <a:t>(0.88)</a:t>
+            </a:r>
+          </a:p>
+        </p:txBody>
+      </p:sp>
+      <p:sp>
+        <p:nvSpPr>
+          <p:cNvPr id="53" name="TextBox 52"/>
+          <p:cNvSpPr txBox="1"/>
+          <p:nvPr/>
+        </p:nvSpPr>
+        <p:spPr>
+          <a:xfrm>
+            <a:off x="1005840" y="4919472"/>
+            <a:ext cx="3840480" cy="274320"/>
+          </a:xfrm>
+          <a:prstGeom prst="rect">
+            <a:avLst/>
+          </a:prstGeom>
+          <a:noFill/>
+        </p:spPr>
+        <p:txBody>
+          <a:bodyPr wrap="square" lIns="0" rIns="0" tIns="0" bIns="0">
+            <a:spAutoFit/>
+          </a:bodyPr>
+          <a:lstStyle/>
+          <a:p>
+            <a:pPr algn="l">
+              <a:lnSpc>
+                <a:spcPts val="1600"/>
+              </a:lnSpc>
+              <a:spcAft>
+                <a:spcPts val="0"/>
+              </a:spcAft>
+            </a:pPr>
+            <a:r>
+              <a:rPr sz="1250" b="0" i="0">
+                <a:solidFill>
+                  <a:srgbClr val="212529"/>
+                </a:solidFill>
+                <a:latin typeface="Garamond"/>
+              </a:rPr>
+              <a:t>Bottom-quartile household income</a:t>
+            </a:r>
+          </a:p>
+        </p:txBody>
+      </p:sp>
+      <p:sp>
+        <p:nvSpPr>
+          <p:cNvPr id="54" name="TextBox 53"/>
+          <p:cNvSpPr txBox="1"/>
+          <p:nvPr/>
+        </p:nvSpPr>
+        <p:spPr>
+          <a:xfrm>
+            <a:off x="5029200" y="4919472"/>
+            <a:ext cx="1691640" cy="274320"/>
+          </a:xfrm>
+          <a:prstGeom prst="rect">
+            <a:avLst/>
+          </a:prstGeom>
+          <a:noFill/>
+        </p:spPr>
+        <p:txBody>
+          <a:bodyPr wrap="square" lIns="0" rIns="0" tIns="0" bIns="0">
+            <a:spAutoFit/>
+          </a:bodyPr>
+          <a:lstStyle/>
+          <a:p>
+            <a:pPr algn="r">
+              <a:lnSpc>
+                <a:spcPts val="1600"/>
+              </a:lnSpc>
+              <a:spcAft>
+                <a:spcPts val="0"/>
+              </a:spcAft>
+            </a:pPr>
+            <a:r>
+              <a:rPr sz="1250" b="0" i="0">
+                <a:solidFill>
+                  <a:srgbClr val="212529"/>
+                </a:solidFill>
+                <a:latin typeface="Garamond"/>
+              </a:rPr>
+              <a:t>+4.67***</a:t>
+            </a:r>
+          </a:p>
+        </p:txBody>
+      </p:sp>
+      <p:sp>
+        <p:nvSpPr>
+          <p:cNvPr id="55" name="TextBox 54"/>
+          <p:cNvSpPr txBox="1"/>
+          <p:nvPr/>
+        </p:nvSpPr>
+        <p:spPr>
+          <a:xfrm>
+            <a:off x="6903720" y="4919472"/>
+            <a:ext cx="1691640" cy="274320"/>
+          </a:xfrm>
+          <a:prstGeom prst="rect">
+            <a:avLst/>
+          </a:prstGeom>
+          <a:noFill/>
+        </p:spPr>
+        <p:txBody>
+          <a:bodyPr wrap="square" lIns="0" rIns="0" tIns="0" bIns="0">
+            <a:spAutoFit/>
+          </a:bodyPr>
+          <a:lstStyle/>
+          <a:p>
+            <a:pPr algn="r">
+              <a:lnSpc>
+                <a:spcPts val="1600"/>
+              </a:lnSpc>
+              <a:spcAft>
+                <a:spcPts val="0"/>
+              </a:spcAft>
+            </a:pPr>
+            <a:r>
+              <a:rPr sz="1250" b="0" i="0">
+                <a:solidFill>
+                  <a:srgbClr val="212529"/>
+                </a:solidFill>
+                <a:latin typeface="Garamond"/>
+              </a:rPr>
+              <a:t>+2.24***</a:t>
+            </a:r>
+          </a:p>
+        </p:txBody>
+      </p:sp>
+      <p:sp>
+        <p:nvSpPr>
+          <p:cNvPr id="56" name="TextBox 55"/>
+          <p:cNvSpPr txBox="1"/>
+          <p:nvPr/>
+        </p:nvSpPr>
+        <p:spPr>
+          <a:xfrm>
+            <a:off x="8778240" y="4919472"/>
+            <a:ext cx="1691640" cy="274320"/>
+          </a:xfrm>
+          <a:prstGeom prst="rect">
+            <a:avLst/>
+          </a:prstGeom>
+          <a:noFill/>
+        </p:spPr>
+        <p:txBody>
+          <a:bodyPr wrap="square" lIns="0" rIns="0" tIns="0" bIns="0">
+            <a:spAutoFit/>
+          </a:bodyPr>
+          <a:lstStyle/>
+          <a:p>
+            <a:pPr algn="r">
+              <a:lnSpc>
+                <a:spcPts val="1600"/>
+              </a:lnSpc>
+              <a:spcAft>
+                <a:spcPts val="0"/>
+              </a:spcAft>
+            </a:pPr>
+            <a:r>
+              <a:rPr sz="1250" b="0" i="0">
+                <a:solidFill>
+                  <a:srgbClr val="212529"/>
+                </a:solidFill>
+                <a:latin typeface="Garamond"/>
+              </a:rPr>
+              <a:t>+2.50***</a:t>
+            </a:r>
+          </a:p>
+        </p:txBody>
+      </p:sp>
+      <p:sp>
+        <p:nvSpPr>
+          <p:cNvPr id="57" name="TextBox 56"/>
+          <p:cNvSpPr txBox="1"/>
+          <p:nvPr/>
+        </p:nvSpPr>
+        <p:spPr>
+          <a:xfrm>
+            <a:off x="5029200" y="5143500"/>
+            <a:ext cx="1691640" cy="274320"/>
+          </a:xfrm>
+          <a:prstGeom prst="rect">
+            <a:avLst/>
+          </a:prstGeom>
+          <a:noFill/>
+        </p:spPr>
+        <p:txBody>
+          <a:bodyPr wrap="square" lIns="0" rIns="0" tIns="0" bIns="0">
+            <a:spAutoFit/>
+          </a:bodyPr>
+          <a:lstStyle/>
+          <a:p>
+            <a:pPr algn="r">
+              <a:lnSpc>
+                <a:spcPts val="1408"/>
+              </a:lnSpc>
+              <a:spcAft>
+                <a:spcPts val="0"/>
+              </a:spcAft>
+            </a:pPr>
+            <a:r>
+              <a:rPr sz="1100" b="0" i="0">
+                <a:solidFill>
+                  <a:srgbClr val="6B7480"/>
+                </a:solidFill>
+                <a:latin typeface="Garamond"/>
+              </a:rPr>
+              <a:t>(1.10)</a:t>
+            </a:r>
+          </a:p>
+        </p:txBody>
+      </p:sp>
+      <p:sp>
+        <p:nvSpPr>
+          <p:cNvPr id="58" name="TextBox 57"/>
+          <p:cNvSpPr txBox="1"/>
+          <p:nvPr/>
+        </p:nvSpPr>
+        <p:spPr>
+          <a:xfrm>
+            <a:off x="6903720" y="5143500"/>
+            <a:ext cx="1691640" cy="274320"/>
+          </a:xfrm>
+          <a:prstGeom prst="rect">
+            <a:avLst/>
+          </a:prstGeom>
+          <a:noFill/>
+        </p:spPr>
+        <p:txBody>
+          <a:bodyPr wrap="square" lIns="0" rIns="0" tIns="0" bIns="0">
+            <a:spAutoFit/>
+          </a:bodyPr>
+          <a:lstStyle/>
+          <a:p>
+            <a:pPr algn="r">
+              <a:lnSpc>
+                <a:spcPts val="1408"/>
+              </a:lnSpc>
+              <a:spcAft>
+                <a:spcPts val="0"/>
+              </a:spcAft>
+            </a:pPr>
+            <a:r>
+              <a:rPr sz="1100" b="0" i="0">
+                <a:solidFill>
+                  <a:srgbClr val="6B7480"/>
+                </a:solidFill>
+                <a:latin typeface="Garamond"/>
+              </a:rPr>
+              <a:t>(0.58)</a:t>
+            </a:r>
+          </a:p>
+        </p:txBody>
+      </p:sp>
+      <p:sp>
+        <p:nvSpPr>
+          <p:cNvPr id="59" name="TextBox 58"/>
+          <p:cNvSpPr txBox="1"/>
+          <p:nvPr/>
+        </p:nvSpPr>
+        <p:spPr>
+          <a:xfrm>
+            <a:off x="8778240" y="5143500"/>
+            <a:ext cx="1691640" cy="274320"/>
+          </a:xfrm>
+          <a:prstGeom prst="rect">
+            <a:avLst/>
+          </a:prstGeom>
+          <a:noFill/>
+        </p:spPr>
+        <p:txBody>
+          <a:bodyPr wrap="square" lIns="0" rIns="0" tIns="0" bIns="0">
+            <a:spAutoFit/>
+          </a:bodyPr>
+          <a:lstStyle/>
+          <a:p>
+            <a:pPr algn="r">
+              <a:lnSpc>
+                <a:spcPts val="1408"/>
+              </a:lnSpc>
+              <a:spcAft>
+                <a:spcPts val="0"/>
+              </a:spcAft>
+            </a:pPr>
+            <a:r>
+              <a:rPr sz="1100" b="0" i="0">
+                <a:solidFill>
+                  <a:srgbClr val="6B7480"/>
+                </a:solidFill>
+                <a:latin typeface="Garamond"/>
+              </a:rPr>
+              <a:t>(0.62)</a:t>
+            </a:r>
+          </a:p>
+        </p:txBody>
+      </p:sp>
+      <p:cxnSp>
+        <p:nvCxnSpPr>
+          <p:cNvPr id="60" name="Connector 59"/>
+          <p:cNvCxnSpPr/>
+          <p:nvPr/>
+        </p:nvCxnSpPr>
+        <p:spPr>
+          <a:xfrm>
+            <a:off x="1005840" y="5394959"/>
+            <a:ext cx="9509760" cy="0"/>
+          </a:xfrm>
+          <a:prstGeom prst="line">
+            <a:avLst/>
+          </a:prstGeom>
+          <a:ln w="8890">
+            <a:solidFill>
+              <a:srgbClr val="212529"/>
+            </a:solidFill>
+          </a:ln>
+          <a:effectLst/>
+        </p:spPr>
+        <p:style>
+          <a:lnRef idx="2">
+            <a:schemeClr val="accent1"/>
+          </a:lnRef>
+          <a:fillRef idx="0">
+            <a:schemeClr val="accent1"/>
+          </a:fillRef>
+          <a:effectRef idx="1">
+            <a:schemeClr val="accent1"/>
+          </a:effectRef>
+          <a:fontRef idx="minor">
+            <a:schemeClr val="tx1"/>
+          </a:fontRef>
+        </p:style>
+      </p:cxnSp>
+      <p:sp>
+        <p:nvSpPr>
+          <p:cNvPr id="61" name="TextBox 60"/>
+          <p:cNvSpPr txBox="1"/>
+          <p:nvPr/>
+        </p:nvSpPr>
+        <p:spPr>
+          <a:xfrm>
+            <a:off x="1005840" y="5477256"/>
+            <a:ext cx="3840480" cy="274320"/>
+          </a:xfrm>
+          <a:prstGeom prst="rect">
+            <a:avLst/>
+          </a:prstGeom>
+          <a:noFill/>
+        </p:spPr>
+        <p:txBody>
+          <a:bodyPr wrap="square" lIns="0" rIns="0" tIns="0" bIns="0">
+            <a:spAutoFit/>
+          </a:bodyPr>
+          <a:lstStyle/>
+          <a:p>
+            <a:pPr algn="l">
+              <a:lnSpc>
+                <a:spcPts val="1600"/>
+              </a:lnSpc>
+              <a:spcAft>
+                <a:spcPts val="0"/>
+              </a:spcAft>
+            </a:pPr>
+            <a:r>
+              <a:rPr sz="1250" b="0" i="0">
+                <a:solidFill>
+                  <a:srgbClr val="212529"/>
+                </a:solidFill>
+                <a:latin typeface="Garamond"/>
+              </a:rPr>
+              <a:t>Year fixed effects</a:t>
+            </a:r>
+          </a:p>
+        </p:txBody>
+      </p:sp>
+      <p:sp>
+        <p:nvSpPr>
+          <p:cNvPr id="62" name="TextBox 61"/>
+          <p:cNvSpPr txBox="1"/>
+          <p:nvPr/>
+        </p:nvSpPr>
+        <p:spPr>
+          <a:xfrm>
+            <a:off x="5029200" y="5477256"/>
+            <a:ext cx="1691640" cy="274320"/>
+          </a:xfrm>
+          <a:prstGeom prst="rect">
+            <a:avLst/>
+          </a:prstGeom>
+          <a:noFill/>
+        </p:spPr>
+        <p:txBody>
+          <a:bodyPr wrap="square" lIns="0" rIns="0" tIns="0" bIns="0">
+            <a:spAutoFit/>
+          </a:bodyPr>
+          <a:lstStyle/>
+          <a:p>
+            <a:pPr algn="r">
+              <a:lnSpc>
+                <a:spcPts val="1600"/>
+              </a:lnSpc>
+              <a:spcAft>
+                <a:spcPts val="0"/>
+              </a:spcAft>
+            </a:pPr>
+            <a:r>
+              <a:rPr sz="1250" b="0" i="0">
+                <a:solidFill>
+                  <a:srgbClr val="212529"/>
+                </a:solidFill>
+                <a:latin typeface="Garamond"/>
+              </a:rPr>
+              <a:t>Yes</a:t>
+            </a:r>
+          </a:p>
+        </p:txBody>
+      </p:sp>
+      <p:sp>
+        <p:nvSpPr>
+          <p:cNvPr id="63" name="TextBox 62"/>
+          <p:cNvSpPr txBox="1"/>
+          <p:nvPr/>
+        </p:nvSpPr>
+        <p:spPr>
+          <a:xfrm>
+            <a:off x="6903720" y="5477256"/>
+            <a:ext cx="1691640" cy="274320"/>
+          </a:xfrm>
+          <a:prstGeom prst="rect">
+            <a:avLst/>
+          </a:prstGeom>
+          <a:noFill/>
+        </p:spPr>
+        <p:txBody>
+          <a:bodyPr wrap="square" lIns="0" rIns="0" tIns="0" bIns="0">
+            <a:spAutoFit/>
+          </a:bodyPr>
+          <a:lstStyle/>
+          <a:p>
+            <a:pPr algn="r">
+              <a:lnSpc>
+                <a:spcPts val="1600"/>
+              </a:lnSpc>
+              <a:spcAft>
+                <a:spcPts val="0"/>
+              </a:spcAft>
+            </a:pPr>
+            <a:r>
+              <a:rPr sz="1250" b="0" i="0">
+                <a:solidFill>
+                  <a:srgbClr val="212529"/>
+                </a:solidFill>
+                <a:latin typeface="Garamond"/>
+              </a:rPr>
+              <a:t>Yes</a:t>
+            </a:r>
+          </a:p>
+        </p:txBody>
+      </p:sp>
+      <p:sp>
+        <p:nvSpPr>
+          <p:cNvPr id="64" name="TextBox 63"/>
+          <p:cNvSpPr txBox="1"/>
+          <p:nvPr/>
+        </p:nvSpPr>
+        <p:spPr>
+          <a:xfrm>
+            <a:off x="8778240" y="5477256"/>
+            <a:ext cx="1691640" cy="274320"/>
+          </a:xfrm>
+          <a:prstGeom prst="rect">
+            <a:avLst/>
+          </a:prstGeom>
+          <a:noFill/>
+        </p:spPr>
+        <p:txBody>
+          <a:bodyPr wrap="square" lIns="0" rIns="0" tIns="0" bIns="0">
+            <a:spAutoFit/>
+          </a:bodyPr>
+          <a:lstStyle/>
+          <a:p>
+            <a:pPr algn="r">
+              <a:lnSpc>
+                <a:spcPts val="1600"/>
+              </a:lnSpc>
+              <a:spcAft>
+                <a:spcPts val="0"/>
+              </a:spcAft>
+            </a:pPr>
+            <a:r>
+              <a:rPr sz="1250" b="0" i="0">
+                <a:solidFill>
+                  <a:srgbClr val="212529"/>
+                </a:solidFill>
+                <a:latin typeface="Garamond"/>
+              </a:rPr>
+              <a:t>Yes</a:t>
+            </a:r>
+          </a:p>
+        </p:txBody>
+      </p:sp>
+      <p:sp>
+        <p:nvSpPr>
+          <p:cNvPr id="65" name="TextBox 64"/>
+          <p:cNvSpPr txBox="1"/>
+          <p:nvPr/>
+        </p:nvSpPr>
+        <p:spPr>
+          <a:xfrm>
+            <a:off x="1005840" y="5733288"/>
+            <a:ext cx="3840480" cy="274320"/>
+          </a:xfrm>
+          <a:prstGeom prst="rect">
+            <a:avLst/>
+          </a:prstGeom>
+          <a:noFill/>
+        </p:spPr>
+        <p:txBody>
+          <a:bodyPr wrap="square" lIns="0" rIns="0" tIns="0" bIns="0">
+            <a:spAutoFit/>
+          </a:bodyPr>
+          <a:lstStyle/>
+          <a:p>
+            <a:pPr algn="l">
+              <a:lnSpc>
+                <a:spcPts val="1600"/>
+              </a:lnSpc>
+              <a:spcAft>
+                <a:spcPts val="0"/>
+              </a:spcAft>
+            </a:pPr>
+            <a:r>
+              <a:rPr sz="1250" b="0" i="0">
+                <a:solidFill>
+                  <a:srgbClr val="212529"/>
+                </a:solidFill>
+                <a:latin typeface="Garamond"/>
+              </a:rPr>
+              <a:t>Observations</a:t>
+            </a:r>
+          </a:p>
+        </p:txBody>
+      </p:sp>
+      <p:sp>
+        <p:nvSpPr>
+          <p:cNvPr id="66" name="TextBox 65"/>
+          <p:cNvSpPr txBox="1"/>
+          <p:nvPr/>
+        </p:nvSpPr>
+        <p:spPr>
+          <a:xfrm>
+            <a:off x="5029200" y="5733288"/>
+            <a:ext cx="1691640" cy="274320"/>
+          </a:xfrm>
+          <a:prstGeom prst="rect">
+            <a:avLst/>
+          </a:prstGeom>
+          <a:noFill/>
+        </p:spPr>
+        <p:txBody>
+          <a:bodyPr wrap="square" lIns="0" rIns="0" tIns="0" bIns="0">
+            <a:spAutoFit/>
+          </a:bodyPr>
+          <a:lstStyle/>
+          <a:p>
+            <a:pPr algn="r">
+              <a:lnSpc>
+                <a:spcPts val="1600"/>
+              </a:lnSpc>
+              <a:spcAft>
+                <a:spcPts val="0"/>
+              </a:spcAft>
+            </a:pPr>
+            <a:r>
+              <a:rPr sz="1250" b="0" i="0">
+                <a:solidFill>
+                  <a:srgbClr val="212529"/>
+                </a:solidFill>
+                <a:latin typeface="Garamond"/>
+              </a:rPr>
+              <a:t>18,571</a:t>
+            </a:r>
+          </a:p>
+        </p:txBody>
+      </p:sp>
+      <p:sp>
+        <p:nvSpPr>
+          <p:cNvPr id="67" name="TextBox 66"/>
+          <p:cNvSpPr txBox="1"/>
+          <p:nvPr/>
+        </p:nvSpPr>
+        <p:spPr>
+          <a:xfrm>
+            <a:off x="6903720" y="5733288"/>
+            <a:ext cx="1691640" cy="274320"/>
+          </a:xfrm>
+          <a:prstGeom prst="rect">
+            <a:avLst/>
+          </a:prstGeom>
+          <a:noFill/>
+        </p:spPr>
+        <p:txBody>
+          <a:bodyPr wrap="square" lIns="0" rIns="0" tIns="0" bIns="0">
+            <a:spAutoFit/>
+          </a:bodyPr>
+          <a:lstStyle/>
+          <a:p>
+            <a:pPr algn="r">
+              <a:lnSpc>
+                <a:spcPts val="1600"/>
+              </a:lnSpc>
+              <a:spcAft>
+                <a:spcPts val="0"/>
+              </a:spcAft>
+            </a:pPr>
+            <a:r>
+              <a:rPr sz="1250" b="0" i="0">
+                <a:solidFill>
+                  <a:srgbClr val="212529"/>
+                </a:solidFill>
+                <a:latin typeface="Garamond"/>
+              </a:rPr>
+              <a:t>18,571</a:t>
+            </a:r>
+          </a:p>
+        </p:txBody>
+      </p:sp>
+      <p:sp>
+        <p:nvSpPr>
+          <p:cNvPr id="68" name="TextBox 67"/>
+          <p:cNvSpPr txBox="1"/>
+          <p:nvPr/>
+        </p:nvSpPr>
+        <p:spPr>
+          <a:xfrm>
+            <a:off x="8778240" y="5733288"/>
+            <a:ext cx="1691640" cy="274320"/>
+          </a:xfrm>
+          <a:prstGeom prst="rect">
+            <a:avLst/>
+          </a:prstGeom>
+          <a:noFill/>
+        </p:spPr>
+        <p:txBody>
+          <a:bodyPr wrap="square" lIns="0" rIns="0" tIns="0" bIns="0">
+            <a:spAutoFit/>
+          </a:bodyPr>
+          <a:lstStyle/>
+          <a:p>
+            <a:pPr algn="r">
+              <a:lnSpc>
+                <a:spcPts val="1600"/>
+              </a:lnSpc>
+              <a:spcAft>
+                <a:spcPts val="0"/>
+              </a:spcAft>
+            </a:pPr>
+            <a:r>
+              <a:rPr sz="1250" b="0" i="0">
+                <a:solidFill>
+                  <a:srgbClr val="212529"/>
+                </a:solidFill>
+                <a:latin typeface="Garamond"/>
+              </a:rPr>
+              <a:t>18,571</a:t>
+            </a:r>
+          </a:p>
+        </p:txBody>
+      </p:sp>
+      <p:cxnSp>
+        <p:nvCxnSpPr>
+          <p:cNvPr id="69" name="Connector 68"/>
+          <p:cNvCxnSpPr/>
+          <p:nvPr/>
+        </p:nvCxnSpPr>
+        <p:spPr>
+          <a:xfrm>
+            <a:off x="1005840" y="6007608"/>
+            <a:ext cx="9509760" cy="0"/>
+          </a:xfrm>
+          <a:prstGeom prst="line">
+            <a:avLst/>
+          </a:prstGeom>
+          <a:ln w="16510">
+            <a:solidFill>
+              <a:srgbClr val="212529"/>
+            </a:solidFill>
+          </a:ln>
+          <a:effectLst/>
+        </p:spPr>
+        <p:style>
+          <a:lnRef idx="2">
+            <a:schemeClr val="accent1"/>
+          </a:lnRef>
+          <a:fillRef idx="0">
+            <a:schemeClr val="accent1"/>
+          </a:fillRef>
+          <a:effectRef idx="1">
+            <a:schemeClr val="accent1"/>
+          </a:effectRef>
+          <a:fontRef idx="minor">
+            <a:schemeClr val="tx1"/>
+          </a:fontRef>
+        </p:style>
+      </p:cxnSp>
+      <p:sp>
+        <p:nvSpPr>
+          <p:cNvPr id="70" name="TextBox 69"/>
+          <p:cNvSpPr txBox="1"/>
+          <p:nvPr/>
+        </p:nvSpPr>
+        <p:spPr>
+          <a:xfrm>
+            <a:off x="1005840" y="6135624"/>
+            <a:ext cx="9509760" cy="548640"/>
+          </a:xfrm>
+          <a:prstGeom prst="rect">
+            <a:avLst/>
+          </a:prstGeom>
+          <a:noFill/>
+        </p:spPr>
+        <p:txBody>
+          <a:bodyPr wrap="square" lIns="0" rIns="0" tIns="0" bIns="0">
+            <a:spAutoFit/>
+          </a:bodyPr>
+          <a:lstStyle/>
+          <a:p>
+            <a:pPr algn="l">
+              <a:lnSpc>
+                <a:spcPts val="1344"/>
+              </a:lnSpc>
+              <a:spcAft>
+                <a:spcPts val="0"/>
+              </a:spcAft>
+            </a:pPr>
+            <a:r>
+              <a:rPr sz="1050" b="0" i="1">
+                <a:solidFill>
+                  <a:srgbClr val="6B7480"/>
+                </a:solidFill>
+                <a:latin typeface="Garamond"/>
+              </a:rPr>
+              <a:t>Standard errors in parentheses, delta method for the logit and probit marginal effects. * p&lt;0.10, ** p&lt;0.05, *** p&lt;0.01. The probit column is the main specification of the coefficient plot.</a:t>
+            </a:r>
+          </a:p>
+        </p:txBody>
+      </p:sp>
+      <p:sp>
+        <p:nvSpPr>
+          <p:cNvPr id="71" name="Rounded Rectangle 70">
+            <a:hlinkClick action="ppaction://hlinksldjump" r:id="rId2"/>
           </p:cNvPr>
           <p:cNvSpPr/>
           <p:nvPr/>
@@ -26435,7 +26491,7 @@
                 </a:solidFill>
                 <a:latin typeface="Garamond"/>
               </a:rPr>
-              <a:t>What the CPS observes, of why teachers leave</a:t>
+              <a:t>Is the LPM bounded between 0 and 1?</a:t>
             </a:r>
           </a:p>
         </p:txBody>
@@ -26475,42 +26531,30 @@
           </a:p>
         </p:txBody>
       </p:sp>
-      <p:cxnSp>
-        <p:nvCxnSpPr>
-          <p:cNvPr id="4" name="Connector 3"/>
-          <p:cNvCxnSpPr/>
-          <p:nvPr/>
-        </p:nvCxnSpPr>
-        <p:spPr>
-          <a:xfrm>
-            <a:off x="822960" y="1645920"/>
-            <a:ext cx="10241280" cy="0"/>
-          </a:xfrm>
-          <a:prstGeom prst="line">
-            <a:avLst/>
-          </a:prstGeom>
-          <a:ln w="16510">
-            <a:solidFill>
-              <a:srgbClr val="212529"/>
-            </a:solidFill>
-          </a:ln>
-          <a:effectLst/>
-        </p:spPr>
-        <p:style>
-          <a:lnRef idx="2">
-            <a:schemeClr val="accent1"/>
-          </a:lnRef>
-          <a:fillRef idx="0">
-            <a:schemeClr val="accent1"/>
-          </a:fillRef>
-          <a:effectRef idx="1">
-            <a:schemeClr val="accent1"/>
-          </a:effectRef>
-          <a:fontRef idx="minor">
-            <a:schemeClr val="tx1"/>
-          </a:fontRef>
-        </p:style>
-      </p:cxnSp>
+      <p:pic>
+        <p:nvPicPr>
+          <p:cNvPr id="4" name="Picture 3" descr="lpm_check.png"/>
+          <p:cNvPicPr>
+            <a:picLocks noChangeAspect="1"/>
+          </p:cNvPicPr>
+          <p:nvPr/>
+        </p:nvPicPr>
+        <p:blipFill>
+          <a:blip r:embed="rId2"/>
+          <a:stretch>
+            <a:fillRect/>
+          </a:stretch>
+        </p:blipFill>
+        <p:spPr>
+          <a:xfrm>
+            <a:off x="1557117" y="1024128"/>
+            <a:ext cx="9047284" cy="4480560"/>
+          </a:xfrm>
+          <a:prstGeom prst="rect">
+            <a:avLst/>
+          </a:prstGeom>
+        </p:spPr>
+      </p:pic>
       <p:sp>
         <p:nvSpPr>
           <p:cNvPr id="5" name="TextBox 4"/>
@@ -26519,8 +26563,8 @@
         </p:nvSpPr>
         <p:spPr>
           <a:xfrm>
-            <a:off x="822960" y="1755648"/>
-            <a:ext cx="6949440" cy="420624"/>
+            <a:off x="822960" y="5760720"/>
+            <a:ext cx="10789920" cy="822960"/>
           </a:xfrm>
           <a:prstGeom prst="rect">
             <a:avLst/>
@@ -26535,682 +26579,37 @@
           <a:p>
             <a:pPr algn="l">
               <a:lnSpc>
-                <a:spcPts val="2048"/>
-              </a:lnSpc>
-              <a:spcAft>
-                <a:spcPts val="0"/>
-              </a:spcAft>
-            </a:pPr>
-            <a:r>
-              <a:rPr sz="1600" b="1" i="0">
+                <a:spcPts val="1855"/>
+              </a:lnSpc>
+              <a:spcAft>
+                <a:spcPts val="0"/>
+              </a:spcAft>
+            </a:pPr>
+            <a:r>
+              <a:rPr sz="1450" b="1" i="0">
+                <a:solidFill>
+                  <a:srgbClr val="102D5E"/>
+                </a:solidFill>
+                <a:latin typeface="Garamond"/>
+              </a:rPr>
+              <a:t>Key message.  </a:t>
+            </a:r>
+            <a:r>
+              <a:rPr sz="1450" b="0" i="0">
                 <a:solidFill>
                   <a:srgbClr val="212529"/>
                 </a:solidFill>
                 <a:latin typeface="Garamond"/>
               </a:rPr>
-              <a:t>Reasons in the literature</a:t>
-            </a:r>
-          </a:p>
-        </p:txBody>
-      </p:sp>
-      <p:sp>
-        <p:nvSpPr>
-          <p:cNvPr id="6" name="TextBox 5"/>
-          <p:cNvSpPr txBox="1"/>
-          <p:nvPr/>
-        </p:nvSpPr>
-        <p:spPr>
-          <a:xfrm>
-            <a:off x="7955279" y="1755648"/>
-            <a:ext cx="3108960" cy="420624"/>
-          </a:xfrm>
-          <a:prstGeom prst="rect">
-            <a:avLst/>
-          </a:prstGeom>
-          <a:noFill/>
-        </p:spPr>
-        <p:txBody>
-          <a:bodyPr wrap="square" lIns="0" rIns="0" tIns="0" bIns="0">
-            <a:spAutoFit/>
-          </a:bodyPr>
-          <a:lstStyle/>
-          <a:p>
-            <a:pPr algn="l">
-              <a:lnSpc>
-                <a:spcPts val="2048"/>
-              </a:lnSpc>
-              <a:spcAft>
-                <a:spcPts val="0"/>
-              </a:spcAft>
-            </a:pPr>
-            <a:r>
-              <a:rPr sz="1600" b="1" i="0">
-                <a:solidFill>
-                  <a:srgbClr val="212529"/>
-                </a:solidFill>
-                <a:latin typeface="Garamond"/>
-              </a:rPr>
-              <a:t>In the CPS?</a:t>
-            </a:r>
-          </a:p>
-        </p:txBody>
-      </p:sp>
-      <p:cxnSp>
-        <p:nvCxnSpPr>
-          <p:cNvPr id="7" name="Connector 6"/>
-          <p:cNvCxnSpPr/>
-          <p:nvPr/>
-        </p:nvCxnSpPr>
-        <p:spPr>
-          <a:xfrm>
-            <a:off x="822960" y="2194560"/>
-            <a:ext cx="10241280" cy="0"/>
-          </a:xfrm>
-          <a:prstGeom prst="line">
-            <a:avLst/>
-          </a:prstGeom>
-          <a:ln w="8890">
-            <a:solidFill>
-              <a:srgbClr val="212529"/>
-            </a:solidFill>
-          </a:ln>
-          <a:effectLst/>
-        </p:spPr>
-        <p:style>
-          <a:lnRef idx="2">
-            <a:schemeClr val="accent1"/>
-          </a:lnRef>
-          <a:fillRef idx="0">
-            <a:schemeClr val="accent1"/>
-          </a:fillRef>
-          <a:effectRef idx="1">
-            <a:schemeClr val="accent1"/>
-          </a:effectRef>
-          <a:fontRef idx="minor">
-            <a:schemeClr val="tx1"/>
-          </a:fontRef>
-        </p:style>
-      </p:cxnSp>
-      <p:sp>
-        <p:nvSpPr>
-          <p:cNvPr id="8" name="TextBox 7"/>
-          <p:cNvSpPr txBox="1"/>
-          <p:nvPr/>
-        </p:nvSpPr>
-        <p:spPr>
-          <a:xfrm>
-            <a:off x="822960" y="2304288"/>
-            <a:ext cx="6949440" cy="420624"/>
-          </a:xfrm>
-          <a:prstGeom prst="rect">
-            <a:avLst/>
-          </a:prstGeom>
-          <a:noFill/>
-        </p:spPr>
-        <p:txBody>
-          <a:bodyPr wrap="square" lIns="0" rIns="0" tIns="0" bIns="0">
-            <a:spAutoFit/>
-          </a:bodyPr>
-          <a:lstStyle/>
-          <a:p>
-            <a:pPr algn="l">
-              <a:lnSpc>
-                <a:spcPts val="2048"/>
-              </a:lnSpc>
-              <a:spcAft>
-                <a:spcPts val="0"/>
-              </a:spcAft>
-            </a:pPr>
-            <a:r>
-              <a:rPr sz="1600" b="0" i="0">
-                <a:solidFill>
-                  <a:srgbClr val="212529"/>
-                </a:solidFill>
-                <a:latin typeface="Garamond"/>
-              </a:rPr>
-              <a:t>Working conditions</a:t>
-            </a:r>
-          </a:p>
-        </p:txBody>
-      </p:sp>
-      <p:sp>
-        <p:nvSpPr>
-          <p:cNvPr id="9" name="TextBox 8"/>
-          <p:cNvSpPr txBox="1"/>
-          <p:nvPr/>
-        </p:nvSpPr>
-        <p:spPr>
-          <a:xfrm>
-            <a:off x="7955279" y="2304288"/>
-            <a:ext cx="3108960" cy="420624"/>
-          </a:xfrm>
-          <a:prstGeom prst="rect">
-            <a:avLst/>
-          </a:prstGeom>
-          <a:noFill/>
-        </p:spPr>
-        <p:txBody>
-          <a:bodyPr wrap="square" lIns="0" rIns="0" tIns="0" bIns="0">
-            <a:spAutoFit/>
-          </a:bodyPr>
-          <a:lstStyle/>
-          <a:p>
-            <a:pPr algn="l">
-              <a:lnSpc>
-                <a:spcPts val="2048"/>
-              </a:lnSpc>
-              <a:spcAft>
-                <a:spcPts val="0"/>
-              </a:spcAft>
-            </a:pPr>
-            <a:r>
-              <a:rPr sz="1600" b="0" i="0">
-                <a:solidFill>
-                  <a:srgbClr val="6B7480"/>
-                </a:solidFill>
-                <a:latin typeface="Garamond"/>
-              </a:rPr>
-              <a:t>no</a:t>
-            </a:r>
-          </a:p>
-        </p:txBody>
-      </p:sp>
-      <p:sp>
-        <p:nvSpPr>
-          <p:cNvPr id="10" name="TextBox 9"/>
-          <p:cNvSpPr txBox="1"/>
-          <p:nvPr/>
-        </p:nvSpPr>
-        <p:spPr>
-          <a:xfrm>
-            <a:off x="822960" y="2724912"/>
-            <a:ext cx="6949440" cy="420624"/>
-          </a:xfrm>
-          <a:prstGeom prst="rect">
-            <a:avLst/>
-          </a:prstGeom>
-          <a:noFill/>
-        </p:spPr>
-        <p:txBody>
-          <a:bodyPr wrap="square" lIns="0" rIns="0" tIns="0" bIns="0">
-            <a:spAutoFit/>
-          </a:bodyPr>
-          <a:lstStyle/>
-          <a:p>
-            <a:pPr algn="l">
-              <a:lnSpc>
-                <a:spcPts val="2048"/>
-              </a:lnSpc>
-              <a:spcAft>
-                <a:spcPts val="0"/>
-              </a:spcAft>
-            </a:pPr>
-            <a:r>
-              <a:rPr sz="1600" b="0" i="0">
-                <a:solidFill>
-                  <a:srgbClr val="212529"/>
-                </a:solidFill>
-                <a:latin typeface="Garamond"/>
-              </a:rPr>
-              <a:t>Organizational support</a:t>
-            </a:r>
-          </a:p>
-        </p:txBody>
-      </p:sp>
-      <p:sp>
-        <p:nvSpPr>
-          <p:cNvPr id="11" name="TextBox 10"/>
-          <p:cNvSpPr txBox="1"/>
-          <p:nvPr/>
-        </p:nvSpPr>
-        <p:spPr>
-          <a:xfrm>
-            <a:off x="7955279" y="2724912"/>
-            <a:ext cx="3108960" cy="420624"/>
-          </a:xfrm>
-          <a:prstGeom prst="rect">
-            <a:avLst/>
-          </a:prstGeom>
-          <a:noFill/>
-        </p:spPr>
-        <p:txBody>
-          <a:bodyPr wrap="square" lIns="0" rIns="0" tIns="0" bIns="0">
-            <a:spAutoFit/>
-          </a:bodyPr>
-          <a:lstStyle/>
-          <a:p>
-            <a:pPr algn="l">
-              <a:lnSpc>
-                <a:spcPts val="2048"/>
-              </a:lnSpc>
-              <a:spcAft>
-                <a:spcPts val="0"/>
-              </a:spcAft>
-            </a:pPr>
-            <a:r>
-              <a:rPr sz="1600" b="0" i="0">
-                <a:solidFill>
-                  <a:srgbClr val="6B7480"/>
-                </a:solidFill>
-                <a:latin typeface="Garamond"/>
-              </a:rPr>
-              <a:t>no</a:t>
-            </a:r>
-          </a:p>
-        </p:txBody>
-      </p:sp>
-      <p:sp>
-        <p:nvSpPr>
-          <p:cNvPr id="12" name="TextBox 11"/>
-          <p:cNvSpPr txBox="1"/>
-          <p:nvPr/>
-        </p:nvSpPr>
-        <p:spPr>
-          <a:xfrm>
-            <a:off x="822960" y="3145536"/>
-            <a:ext cx="6949440" cy="420624"/>
-          </a:xfrm>
-          <a:prstGeom prst="rect">
-            <a:avLst/>
-          </a:prstGeom>
-          <a:noFill/>
-        </p:spPr>
-        <p:txBody>
-          <a:bodyPr wrap="square" lIns="0" rIns="0" tIns="0" bIns="0">
-            <a:spAutoFit/>
-          </a:bodyPr>
-          <a:lstStyle/>
-          <a:p>
-            <a:pPr algn="l">
-              <a:lnSpc>
-                <a:spcPts val="2048"/>
-              </a:lnSpc>
-              <a:spcAft>
-                <a:spcPts val="0"/>
-              </a:spcAft>
-            </a:pPr>
-            <a:r>
-              <a:rPr sz="1600" b="0" i="0">
-                <a:solidFill>
-                  <a:srgbClr val="212529"/>
-                </a:solidFill>
-                <a:latin typeface="Garamond"/>
-              </a:rPr>
-              <a:t>Autonomy and intrinsic motives</a:t>
-            </a:r>
-          </a:p>
-        </p:txBody>
-      </p:sp>
-      <p:sp>
-        <p:nvSpPr>
-          <p:cNvPr id="13" name="TextBox 12"/>
-          <p:cNvSpPr txBox="1"/>
-          <p:nvPr/>
-        </p:nvSpPr>
-        <p:spPr>
-          <a:xfrm>
-            <a:off x="7955279" y="3145536"/>
-            <a:ext cx="3108960" cy="420624"/>
-          </a:xfrm>
-          <a:prstGeom prst="rect">
-            <a:avLst/>
-          </a:prstGeom>
-          <a:noFill/>
-        </p:spPr>
-        <p:txBody>
-          <a:bodyPr wrap="square" lIns="0" rIns="0" tIns="0" bIns="0">
-            <a:spAutoFit/>
-          </a:bodyPr>
-          <a:lstStyle/>
-          <a:p>
-            <a:pPr algn="l">
-              <a:lnSpc>
-                <a:spcPts val="2048"/>
-              </a:lnSpc>
-              <a:spcAft>
-                <a:spcPts val="0"/>
-              </a:spcAft>
-            </a:pPr>
-            <a:r>
-              <a:rPr sz="1600" b="0" i="0">
-                <a:solidFill>
-                  <a:srgbClr val="6B7480"/>
-                </a:solidFill>
-                <a:latin typeface="Garamond"/>
-              </a:rPr>
-              <a:t>no</a:t>
-            </a:r>
-          </a:p>
-        </p:txBody>
-      </p:sp>
-      <p:sp>
-        <p:nvSpPr>
-          <p:cNvPr id="14" name="TextBox 13"/>
-          <p:cNvSpPr txBox="1"/>
-          <p:nvPr/>
-        </p:nvSpPr>
-        <p:spPr>
-          <a:xfrm>
-            <a:off x="822960" y="3566160"/>
-            <a:ext cx="6949440" cy="420624"/>
-          </a:xfrm>
-          <a:prstGeom prst="rect">
-            <a:avLst/>
-          </a:prstGeom>
-          <a:noFill/>
-        </p:spPr>
-        <p:txBody>
-          <a:bodyPr wrap="square" lIns="0" rIns="0" tIns="0" bIns="0">
-            <a:spAutoFit/>
-          </a:bodyPr>
-          <a:lstStyle/>
-          <a:p>
-            <a:pPr algn="l">
-              <a:lnSpc>
-                <a:spcPts val="2048"/>
-              </a:lnSpc>
-              <a:spcAft>
-                <a:spcPts val="0"/>
-              </a:spcAft>
-            </a:pPr>
-            <a:r>
-              <a:rPr sz="1600" b="0" i="0">
-                <a:solidFill>
-                  <a:srgbClr val="212529"/>
-                </a:solidFill>
-                <a:latin typeface="Garamond"/>
-              </a:rPr>
-              <a:t>Financial factors</a:t>
-            </a:r>
-          </a:p>
-        </p:txBody>
-      </p:sp>
-      <p:sp>
-        <p:nvSpPr>
-          <p:cNvPr id="15" name="TextBox 14"/>
-          <p:cNvSpPr txBox="1"/>
-          <p:nvPr/>
-        </p:nvSpPr>
-        <p:spPr>
-          <a:xfrm>
-            <a:off x="7955279" y="3566160"/>
-            <a:ext cx="3108960" cy="420624"/>
-          </a:xfrm>
-          <a:prstGeom prst="rect">
-            <a:avLst/>
-          </a:prstGeom>
-          <a:noFill/>
-        </p:spPr>
-        <p:txBody>
-          <a:bodyPr wrap="square" lIns="0" rIns="0" tIns="0" bIns="0">
-            <a:spAutoFit/>
-          </a:bodyPr>
-          <a:lstStyle/>
-          <a:p>
-            <a:pPr algn="l">
-              <a:lnSpc>
-                <a:spcPts val="2048"/>
-              </a:lnSpc>
-              <a:spcAft>
-                <a:spcPts val="0"/>
-              </a:spcAft>
-            </a:pPr>
-            <a:r>
-              <a:rPr sz="1600" b="1" i="0">
-                <a:solidFill>
-                  <a:srgbClr val="102D5E"/>
-                </a:solidFill>
-                <a:latin typeface="Garamond"/>
-              </a:rPr>
-              <a:t>yes</a:t>
-            </a:r>
-          </a:p>
-        </p:txBody>
-      </p:sp>
-      <p:sp>
-        <p:nvSpPr>
-          <p:cNvPr id="16" name="TextBox 15"/>
-          <p:cNvSpPr txBox="1"/>
-          <p:nvPr/>
-        </p:nvSpPr>
-        <p:spPr>
-          <a:xfrm>
-            <a:off x="822960" y="3986784"/>
-            <a:ext cx="6949440" cy="420624"/>
-          </a:xfrm>
-          <a:prstGeom prst="rect">
-            <a:avLst/>
-          </a:prstGeom>
-          <a:noFill/>
-        </p:spPr>
-        <p:txBody>
-          <a:bodyPr wrap="square" lIns="0" rIns="0" tIns="0" bIns="0">
-            <a:spAutoFit/>
-          </a:bodyPr>
-          <a:lstStyle/>
-          <a:p>
-            <a:pPr algn="l">
-              <a:lnSpc>
-                <a:spcPts val="2048"/>
-              </a:lnSpc>
-              <a:spcAft>
-                <a:spcPts val="0"/>
-              </a:spcAft>
-            </a:pPr>
-            <a:r>
-              <a:rPr sz="1600" b="0" i="0">
-                <a:solidFill>
-                  <a:srgbClr val="212529"/>
-                </a:solidFill>
-                <a:latin typeface="Garamond"/>
-              </a:rPr>
-              <a:t>Personal life-cycle motives</a:t>
-            </a:r>
-          </a:p>
-        </p:txBody>
-      </p:sp>
-      <p:sp>
-        <p:nvSpPr>
-          <p:cNvPr id="17" name="TextBox 16"/>
-          <p:cNvSpPr txBox="1"/>
-          <p:nvPr/>
-        </p:nvSpPr>
-        <p:spPr>
-          <a:xfrm>
-            <a:off x="7955279" y="3986784"/>
-            <a:ext cx="3108960" cy="420624"/>
-          </a:xfrm>
-          <a:prstGeom prst="rect">
-            <a:avLst/>
-          </a:prstGeom>
-          <a:noFill/>
-        </p:spPr>
-        <p:txBody>
-          <a:bodyPr wrap="square" lIns="0" rIns="0" tIns="0" bIns="0">
-            <a:spAutoFit/>
-          </a:bodyPr>
-          <a:lstStyle/>
-          <a:p>
-            <a:pPr algn="l">
-              <a:lnSpc>
-                <a:spcPts val="2048"/>
-              </a:lnSpc>
-              <a:spcAft>
-                <a:spcPts val="0"/>
-              </a:spcAft>
-            </a:pPr>
-            <a:r>
-              <a:rPr sz="1600" b="1" i="0">
-                <a:solidFill>
-                  <a:srgbClr val="102D5E"/>
-                </a:solidFill>
-                <a:latin typeface="Garamond"/>
-              </a:rPr>
-              <a:t>yes</a:t>
-            </a:r>
-          </a:p>
-        </p:txBody>
-      </p:sp>
-      <p:cxnSp>
-        <p:nvCxnSpPr>
-          <p:cNvPr id="18" name="Connector 17"/>
-          <p:cNvCxnSpPr/>
-          <p:nvPr/>
-        </p:nvCxnSpPr>
-        <p:spPr>
-          <a:xfrm>
-            <a:off x="822960" y="4425696"/>
-            <a:ext cx="10241280" cy="0"/>
-          </a:xfrm>
-          <a:prstGeom prst="line">
-            <a:avLst/>
-          </a:prstGeom>
-          <a:ln w="8890">
-            <a:solidFill>
-              <a:srgbClr val="212529"/>
-            </a:solidFill>
-          </a:ln>
-          <a:effectLst/>
-        </p:spPr>
-        <p:style>
-          <a:lnRef idx="2">
-            <a:schemeClr val="accent1"/>
-          </a:lnRef>
-          <a:fillRef idx="0">
-            <a:schemeClr val="accent1"/>
-          </a:fillRef>
-          <a:effectRef idx="1">
-            <a:schemeClr val="accent1"/>
-          </a:effectRef>
-          <a:fontRef idx="minor">
-            <a:schemeClr val="tx1"/>
-          </a:fontRef>
-        </p:style>
-      </p:cxnSp>
-      <p:sp>
-        <p:nvSpPr>
-          <p:cNvPr id="19" name="TextBox 18"/>
-          <p:cNvSpPr txBox="1"/>
-          <p:nvPr/>
-        </p:nvSpPr>
-        <p:spPr>
-          <a:xfrm>
-            <a:off x="822960" y="4535424"/>
-            <a:ext cx="6949440" cy="420624"/>
-          </a:xfrm>
-          <a:prstGeom prst="rect">
-            <a:avLst/>
-          </a:prstGeom>
-          <a:noFill/>
-        </p:spPr>
-        <p:txBody>
-          <a:bodyPr wrap="square" lIns="0" rIns="0" tIns="0" bIns="0">
-            <a:spAutoFit/>
-          </a:bodyPr>
-          <a:lstStyle/>
-          <a:p>
-            <a:pPr algn="l">
-              <a:lnSpc>
-                <a:spcPts val="2048"/>
-              </a:lnSpc>
-              <a:spcAft>
-                <a:spcPts val="0"/>
-              </a:spcAft>
-            </a:pPr>
-            <a:r>
-              <a:rPr sz="1600" b="0" i="0">
-                <a:solidFill>
-                  <a:srgbClr val="212529"/>
-                </a:solidFill>
-                <a:latin typeface="Garamond"/>
-              </a:rPr>
-              <a:t>Sociodemographics</a:t>
-            </a:r>
-          </a:p>
-        </p:txBody>
-      </p:sp>
-      <p:sp>
-        <p:nvSpPr>
-          <p:cNvPr id="20" name="TextBox 19"/>
-          <p:cNvSpPr txBox="1"/>
-          <p:nvPr/>
-        </p:nvSpPr>
-        <p:spPr>
-          <a:xfrm>
-            <a:off x="7955279" y="4535424"/>
-            <a:ext cx="3108960" cy="420624"/>
-          </a:xfrm>
-          <a:prstGeom prst="rect">
-            <a:avLst/>
-          </a:prstGeom>
-          <a:noFill/>
-        </p:spPr>
-        <p:txBody>
-          <a:bodyPr wrap="square" lIns="0" rIns="0" tIns="0" bIns="0">
-            <a:spAutoFit/>
-          </a:bodyPr>
-          <a:lstStyle/>
-          <a:p>
-            <a:pPr algn="l">
-              <a:lnSpc>
-                <a:spcPts val="2048"/>
-              </a:lnSpc>
-              <a:spcAft>
-                <a:spcPts val="0"/>
-              </a:spcAft>
-            </a:pPr>
-            <a:r>
-              <a:rPr sz="1600" b="1" i="0">
-                <a:solidFill>
-                  <a:srgbClr val="102D5E"/>
-                </a:solidFill>
-                <a:latin typeface="Garamond"/>
-              </a:rPr>
-              <a:t>yes</a:t>
-            </a:r>
-          </a:p>
-        </p:txBody>
-      </p:sp>
-      <p:cxnSp>
-        <p:nvCxnSpPr>
-          <p:cNvPr id="21" name="Connector 20"/>
-          <p:cNvCxnSpPr/>
-          <p:nvPr/>
-        </p:nvCxnSpPr>
-        <p:spPr>
-          <a:xfrm>
-            <a:off x="822960" y="4992624"/>
-            <a:ext cx="10241280" cy="0"/>
-          </a:xfrm>
-          <a:prstGeom prst="line">
-            <a:avLst/>
-          </a:prstGeom>
-          <a:ln w="16510">
-            <a:solidFill>
-              <a:srgbClr val="212529"/>
-            </a:solidFill>
-          </a:ln>
-          <a:effectLst/>
-        </p:spPr>
-        <p:style>
-          <a:lnRef idx="2">
-            <a:schemeClr val="accent1"/>
-          </a:lnRef>
-          <a:fillRef idx="0">
-            <a:schemeClr val="accent1"/>
-          </a:fillRef>
-          <a:effectRef idx="1">
-            <a:schemeClr val="accent1"/>
-          </a:effectRef>
-          <a:fontRef idx="minor">
-            <a:schemeClr val="tx1"/>
-          </a:fontRef>
-        </p:style>
-      </p:cxnSp>
-      <p:sp>
-        <p:nvSpPr>
-          <p:cNvPr id="22" name="Rounded Rectangle 21">
-            <a:hlinkClick action="ppaction://hlinksldjump" r:id="rId2"/>
+              <a:t>No. 22% of fitted values fall below zero, so the probit is the main specification and the LPM a robustness variant.</a:t>
+            </a:r>
+          </a:p>
+        </p:txBody>
+      </p:sp>
+      <p:sp>
+        <p:nvSpPr>
+          <p:cNvPr id="6" name="Rounded Rectangle 5">
+            <a:hlinkClick action="ppaction://hlinksldjump" r:id="rId3"/>
           </p:cNvPr>
           <p:cNvSpPr/>
           <p:nvPr/>
@@ -27715,6 +27114,887 @@
                 <a:latin typeface="Garamond"/>
               </a:rPr>
               <a:t>Identity</a:t>
+            </a:r>
+          </a:p>
+        </p:txBody>
+      </p:sp>
+    </p:spTree>
+  </p:cSld>
+  <p:clrMapOvr>
+    <a:masterClrMapping/>
+  </p:clrMapOvr>
+</p:sld>
+</file>
+
+<file path=ppt/slides/slide50.xml><?xml version="1.0" encoding="utf-8"?>
+<p:sld xmlns:a="http://schemas.openxmlformats.org/drawingml/2006/main" xmlns:p="http://schemas.openxmlformats.org/presentationml/2006/main" xmlns:r="http://schemas.openxmlformats.org/officeDocument/2006/relationships">
+  <p:cSld>
+    <p:spTree>
+      <p:nvGrpSpPr>
+        <p:cNvPr id="1" name=""/>
+        <p:cNvGrpSpPr/>
+        <p:nvPr/>
+      </p:nvGrpSpPr>
+      <p:grpSpPr/>
+      <p:sp>
+        <p:nvSpPr>
+          <p:cNvPr id="2" name="TextBox 1"/>
+          <p:cNvSpPr txBox="1"/>
+          <p:nvPr/>
+        </p:nvSpPr>
+        <p:spPr>
+          <a:xfrm>
+            <a:off x="502920" y="219456"/>
+            <a:ext cx="11247120" cy="566928"/>
+          </a:xfrm>
+          <a:prstGeom prst="rect">
+            <a:avLst/>
+          </a:prstGeom>
+          <a:noFill/>
+        </p:spPr>
+        <p:txBody>
+          <a:bodyPr wrap="square" lIns="0" rIns="0" tIns="0" bIns="0"/>
+          <a:lstStyle/>
+          <a:p>
+            <a:r>
+              <a:rPr sz="2800" b="1">
+                <a:solidFill>
+                  <a:srgbClr val="102D5E"/>
+                </a:solidFill>
+                <a:latin typeface="Garamond"/>
+              </a:rPr>
+              <a:t>What the CPS observes, of why teachers leave</a:t>
+            </a:r>
+          </a:p>
+        </p:txBody>
+      </p:sp>
+      <p:sp>
+        <p:nvSpPr>
+          <p:cNvPr id="3" name="TextBox 2"/>
+          <p:cNvSpPr txBox="1"/>
+          <p:nvPr/>
+        </p:nvSpPr>
+        <p:spPr>
+          <a:xfrm>
+            <a:off x="11384280" y="6446520"/>
+            <a:ext cx="640080" cy="292608"/>
+          </a:xfrm>
+          <a:prstGeom prst="rect">
+            <a:avLst/>
+          </a:prstGeom>
+          <a:noFill/>
+        </p:spPr>
+        <p:txBody>
+          <a:bodyPr wrap="none" lIns="0" rIns="0" tIns="0" bIns="0">
+            <a:spAutoFit/>
+          </a:bodyPr>
+          <a:lstStyle/>
+          <a:p>
+            <a:pPr algn="r"/>
+            <a:r>
+              <a:rPr sz="1100">
+                <a:solidFill>
+                  <a:srgbClr val="6B7480"/>
+                </a:solidFill>
+                <a:latin typeface="Garamond"/>
+              </a:rPr>
+              <a:t>50</a:t>
+            </a:r>
+          </a:p>
+        </p:txBody>
+      </p:sp>
+      <p:cxnSp>
+        <p:nvCxnSpPr>
+          <p:cNvPr id="4" name="Connector 3"/>
+          <p:cNvCxnSpPr/>
+          <p:nvPr/>
+        </p:nvCxnSpPr>
+        <p:spPr>
+          <a:xfrm>
+            <a:off x="822960" y="1645920"/>
+            <a:ext cx="10241280" cy="0"/>
+          </a:xfrm>
+          <a:prstGeom prst="line">
+            <a:avLst/>
+          </a:prstGeom>
+          <a:ln w="16510">
+            <a:solidFill>
+              <a:srgbClr val="212529"/>
+            </a:solidFill>
+          </a:ln>
+          <a:effectLst/>
+        </p:spPr>
+        <p:style>
+          <a:lnRef idx="2">
+            <a:schemeClr val="accent1"/>
+          </a:lnRef>
+          <a:fillRef idx="0">
+            <a:schemeClr val="accent1"/>
+          </a:fillRef>
+          <a:effectRef idx="1">
+            <a:schemeClr val="accent1"/>
+          </a:effectRef>
+          <a:fontRef idx="minor">
+            <a:schemeClr val="tx1"/>
+          </a:fontRef>
+        </p:style>
+      </p:cxnSp>
+      <p:sp>
+        <p:nvSpPr>
+          <p:cNvPr id="5" name="TextBox 4"/>
+          <p:cNvSpPr txBox="1"/>
+          <p:nvPr/>
+        </p:nvSpPr>
+        <p:spPr>
+          <a:xfrm>
+            <a:off x="822960" y="1755648"/>
+            <a:ext cx="6949440" cy="420624"/>
+          </a:xfrm>
+          <a:prstGeom prst="rect">
+            <a:avLst/>
+          </a:prstGeom>
+          <a:noFill/>
+        </p:spPr>
+        <p:txBody>
+          <a:bodyPr wrap="square" lIns="0" rIns="0" tIns="0" bIns="0">
+            <a:spAutoFit/>
+          </a:bodyPr>
+          <a:lstStyle/>
+          <a:p>
+            <a:pPr algn="l">
+              <a:lnSpc>
+                <a:spcPts val="2048"/>
+              </a:lnSpc>
+              <a:spcAft>
+                <a:spcPts val="0"/>
+              </a:spcAft>
+            </a:pPr>
+            <a:r>
+              <a:rPr sz="1600" b="1" i="0">
+                <a:solidFill>
+                  <a:srgbClr val="212529"/>
+                </a:solidFill>
+                <a:latin typeface="Garamond"/>
+              </a:rPr>
+              <a:t>Reasons in the literature</a:t>
+            </a:r>
+          </a:p>
+        </p:txBody>
+      </p:sp>
+      <p:sp>
+        <p:nvSpPr>
+          <p:cNvPr id="6" name="TextBox 5"/>
+          <p:cNvSpPr txBox="1"/>
+          <p:nvPr/>
+        </p:nvSpPr>
+        <p:spPr>
+          <a:xfrm>
+            <a:off x="7955279" y="1755648"/>
+            <a:ext cx="3108960" cy="420624"/>
+          </a:xfrm>
+          <a:prstGeom prst="rect">
+            <a:avLst/>
+          </a:prstGeom>
+          <a:noFill/>
+        </p:spPr>
+        <p:txBody>
+          <a:bodyPr wrap="square" lIns="0" rIns="0" tIns="0" bIns="0">
+            <a:spAutoFit/>
+          </a:bodyPr>
+          <a:lstStyle/>
+          <a:p>
+            <a:pPr algn="l">
+              <a:lnSpc>
+                <a:spcPts val="2048"/>
+              </a:lnSpc>
+              <a:spcAft>
+                <a:spcPts val="0"/>
+              </a:spcAft>
+            </a:pPr>
+            <a:r>
+              <a:rPr sz="1600" b="1" i="0">
+                <a:solidFill>
+                  <a:srgbClr val="212529"/>
+                </a:solidFill>
+                <a:latin typeface="Garamond"/>
+              </a:rPr>
+              <a:t>In the CPS?</a:t>
+            </a:r>
+          </a:p>
+        </p:txBody>
+      </p:sp>
+      <p:cxnSp>
+        <p:nvCxnSpPr>
+          <p:cNvPr id="7" name="Connector 6"/>
+          <p:cNvCxnSpPr/>
+          <p:nvPr/>
+        </p:nvCxnSpPr>
+        <p:spPr>
+          <a:xfrm>
+            <a:off x="822960" y="2194560"/>
+            <a:ext cx="10241280" cy="0"/>
+          </a:xfrm>
+          <a:prstGeom prst="line">
+            <a:avLst/>
+          </a:prstGeom>
+          <a:ln w="8890">
+            <a:solidFill>
+              <a:srgbClr val="212529"/>
+            </a:solidFill>
+          </a:ln>
+          <a:effectLst/>
+        </p:spPr>
+        <p:style>
+          <a:lnRef idx="2">
+            <a:schemeClr val="accent1"/>
+          </a:lnRef>
+          <a:fillRef idx="0">
+            <a:schemeClr val="accent1"/>
+          </a:fillRef>
+          <a:effectRef idx="1">
+            <a:schemeClr val="accent1"/>
+          </a:effectRef>
+          <a:fontRef idx="minor">
+            <a:schemeClr val="tx1"/>
+          </a:fontRef>
+        </p:style>
+      </p:cxnSp>
+      <p:sp>
+        <p:nvSpPr>
+          <p:cNvPr id="8" name="TextBox 7"/>
+          <p:cNvSpPr txBox="1"/>
+          <p:nvPr/>
+        </p:nvSpPr>
+        <p:spPr>
+          <a:xfrm>
+            <a:off x="822960" y="2304288"/>
+            <a:ext cx="6949440" cy="420624"/>
+          </a:xfrm>
+          <a:prstGeom prst="rect">
+            <a:avLst/>
+          </a:prstGeom>
+          <a:noFill/>
+        </p:spPr>
+        <p:txBody>
+          <a:bodyPr wrap="square" lIns="0" rIns="0" tIns="0" bIns="0">
+            <a:spAutoFit/>
+          </a:bodyPr>
+          <a:lstStyle/>
+          <a:p>
+            <a:pPr algn="l">
+              <a:lnSpc>
+                <a:spcPts val="2048"/>
+              </a:lnSpc>
+              <a:spcAft>
+                <a:spcPts val="0"/>
+              </a:spcAft>
+            </a:pPr>
+            <a:r>
+              <a:rPr sz="1600" b="0" i="0">
+                <a:solidFill>
+                  <a:srgbClr val="212529"/>
+                </a:solidFill>
+                <a:latin typeface="Garamond"/>
+              </a:rPr>
+              <a:t>Working conditions</a:t>
+            </a:r>
+          </a:p>
+        </p:txBody>
+      </p:sp>
+      <p:sp>
+        <p:nvSpPr>
+          <p:cNvPr id="9" name="TextBox 8"/>
+          <p:cNvSpPr txBox="1"/>
+          <p:nvPr/>
+        </p:nvSpPr>
+        <p:spPr>
+          <a:xfrm>
+            <a:off x="7955279" y="2304288"/>
+            <a:ext cx="3108960" cy="420624"/>
+          </a:xfrm>
+          <a:prstGeom prst="rect">
+            <a:avLst/>
+          </a:prstGeom>
+          <a:noFill/>
+        </p:spPr>
+        <p:txBody>
+          <a:bodyPr wrap="square" lIns="0" rIns="0" tIns="0" bIns="0">
+            <a:spAutoFit/>
+          </a:bodyPr>
+          <a:lstStyle/>
+          <a:p>
+            <a:pPr algn="l">
+              <a:lnSpc>
+                <a:spcPts val="2048"/>
+              </a:lnSpc>
+              <a:spcAft>
+                <a:spcPts val="0"/>
+              </a:spcAft>
+            </a:pPr>
+            <a:r>
+              <a:rPr sz="1600" b="0" i="0">
+                <a:solidFill>
+                  <a:srgbClr val="6B7480"/>
+                </a:solidFill>
+                <a:latin typeface="Garamond"/>
+              </a:rPr>
+              <a:t>no</a:t>
+            </a:r>
+          </a:p>
+        </p:txBody>
+      </p:sp>
+      <p:sp>
+        <p:nvSpPr>
+          <p:cNvPr id="10" name="TextBox 9"/>
+          <p:cNvSpPr txBox="1"/>
+          <p:nvPr/>
+        </p:nvSpPr>
+        <p:spPr>
+          <a:xfrm>
+            <a:off x="822960" y="2724912"/>
+            <a:ext cx="6949440" cy="420624"/>
+          </a:xfrm>
+          <a:prstGeom prst="rect">
+            <a:avLst/>
+          </a:prstGeom>
+          <a:noFill/>
+        </p:spPr>
+        <p:txBody>
+          <a:bodyPr wrap="square" lIns="0" rIns="0" tIns="0" bIns="0">
+            <a:spAutoFit/>
+          </a:bodyPr>
+          <a:lstStyle/>
+          <a:p>
+            <a:pPr algn="l">
+              <a:lnSpc>
+                <a:spcPts val="2048"/>
+              </a:lnSpc>
+              <a:spcAft>
+                <a:spcPts val="0"/>
+              </a:spcAft>
+            </a:pPr>
+            <a:r>
+              <a:rPr sz="1600" b="0" i="0">
+                <a:solidFill>
+                  <a:srgbClr val="212529"/>
+                </a:solidFill>
+                <a:latin typeface="Garamond"/>
+              </a:rPr>
+              <a:t>Organizational support</a:t>
+            </a:r>
+          </a:p>
+        </p:txBody>
+      </p:sp>
+      <p:sp>
+        <p:nvSpPr>
+          <p:cNvPr id="11" name="TextBox 10"/>
+          <p:cNvSpPr txBox="1"/>
+          <p:nvPr/>
+        </p:nvSpPr>
+        <p:spPr>
+          <a:xfrm>
+            <a:off x="7955279" y="2724912"/>
+            <a:ext cx="3108960" cy="420624"/>
+          </a:xfrm>
+          <a:prstGeom prst="rect">
+            <a:avLst/>
+          </a:prstGeom>
+          <a:noFill/>
+        </p:spPr>
+        <p:txBody>
+          <a:bodyPr wrap="square" lIns="0" rIns="0" tIns="0" bIns="0">
+            <a:spAutoFit/>
+          </a:bodyPr>
+          <a:lstStyle/>
+          <a:p>
+            <a:pPr algn="l">
+              <a:lnSpc>
+                <a:spcPts val="2048"/>
+              </a:lnSpc>
+              <a:spcAft>
+                <a:spcPts val="0"/>
+              </a:spcAft>
+            </a:pPr>
+            <a:r>
+              <a:rPr sz="1600" b="0" i="0">
+                <a:solidFill>
+                  <a:srgbClr val="6B7480"/>
+                </a:solidFill>
+                <a:latin typeface="Garamond"/>
+              </a:rPr>
+              <a:t>no</a:t>
+            </a:r>
+          </a:p>
+        </p:txBody>
+      </p:sp>
+      <p:sp>
+        <p:nvSpPr>
+          <p:cNvPr id="12" name="TextBox 11"/>
+          <p:cNvSpPr txBox="1"/>
+          <p:nvPr/>
+        </p:nvSpPr>
+        <p:spPr>
+          <a:xfrm>
+            <a:off x="822960" y="3145536"/>
+            <a:ext cx="6949440" cy="420624"/>
+          </a:xfrm>
+          <a:prstGeom prst="rect">
+            <a:avLst/>
+          </a:prstGeom>
+          <a:noFill/>
+        </p:spPr>
+        <p:txBody>
+          <a:bodyPr wrap="square" lIns="0" rIns="0" tIns="0" bIns="0">
+            <a:spAutoFit/>
+          </a:bodyPr>
+          <a:lstStyle/>
+          <a:p>
+            <a:pPr algn="l">
+              <a:lnSpc>
+                <a:spcPts val="2048"/>
+              </a:lnSpc>
+              <a:spcAft>
+                <a:spcPts val="0"/>
+              </a:spcAft>
+            </a:pPr>
+            <a:r>
+              <a:rPr sz="1600" b="0" i="0">
+                <a:solidFill>
+                  <a:srgbClr val="212529"/>
+                </a:solidFill>
+                <a:latin typeface="Garamond"/>
+              </a:rPr>
+              <a:t>Autonomy and intrinsic motives</a:t>
+            </a:r>
+          </a:p>
+        </p:txBody>
+      </p:sp>
+      <p:sp>
+        <p:nvSpPr>
+          <p:cNvPr id="13" name="TextBox 12"/>
+          <p:cNvSpPr txBox="1"/>
+          <p:nvPr/>
+        </p:nvSpPr>
+        <p:spPr>
+          <a:xfrm>
+            <a:off x="7955279" y="3145536"/>
+            <a:ext cx="3108960" cy="420624"/>
+          </a:xfrm>
+          <a:prstGeom prst="rect">
+            <a:avLst/>
+          </a:prstGeom>
+          <a:noFill/>
+        </p:spPr>
+        <p:txBody>
+          <a:bodyPr wrap="square" lIns="0" rIns="0" tIns="0" bIns="0">
+            <a:spAutoFit/>
+          </a:bodyPr>
+          <a:lstStyle/>
+          <a:p>
+            <a:pPr algn="l">
+              <a:lnSpc>
+                <a:spcPts val="2048"/>
+              </a:lnSpc>
+              <a:spcAft>
+                <a:spcPts val="0"/>
+              </a:spcAft>
+            </a:pPr>
+            <a:r>
+              <a:rPr sz="1600" b="0" i="0">
+                <a:solidFill>
+                  <a:srgbClr val="6B7480"/>
+                </a:solidFill>
+                <a:latin typeface="Garamond"/>
+              </a:rPr>
+              <a:t>no</a:t>
+            </a:r>
+          </a:p>
+        </p:txBody>
+      </p:sp>
+      <p:sp>
+        <p:nvSpPr>
+          <p:cNvPr id="14" name="TextBox 13"/>
+          <p:cNvSpPr txBox="1"/>
+          <p:nvPr/>
+        </p:nvSpPr>
+        <p:spPr>
+          <a:xfrm>
+            <a:off x="822960" y="3566160"/>
+            <a:ext cx="6949440" cy="420624"/>
+          </a:xfrm>
+          <a:prstGeom prst="rect">
+            <a:avLst/>
+          </a:prstGeom>
+          <a:noFill/>
+        </p:spPr>
+        <p:txBody>
+          <a:bodyPr wrap="square" lIns="0" rIns="0" tIns="0" bIns="0">
+            <a:spAutoFit/>
+          </a:bodyPr>
+          <a:lstStyle/>
+          <a:p>
+            <a:pPr algn="l">
+              <a:lnSpc>
+                <a:spcPts val="2048"/>
+              </a:lnSpc>
+              <a:spcAft>
+                <a:spcPts val="0"/>
+              </a:spcAft>
+            </a:pPr>
+            <a:r>
+              <a:rPr sz="1600" b="0" i="0">
+                <a:solidFill>
+                  <a:srgbClr val="212529"/>
+                </a:solidFill>
+                <a:latin typeface="Garamond"/>
+              </a:rPr>
+              <a:t>Financial factors</a:t>
+            </a:r>
+          </a:p>
+        </p:txBody>
+      </p:sp>
+      <p:sp>
+        <p:nvSpPr>
+          <p:cNvPr id="15" name="TextBox 14"/>
+          <p:cNvSpPr txBox="1"/>
+          <p:nvPr/>
+        </p:nvSpPr>
+        <p:spPr>
+          <a:xfrm>
+            <a:off x="7955279" y="3566160"/>
+            <a:ext cx="3108960" cy="420624"/>
+          </a:xfrm>
+          <a:prstGeom prst="rect">
+            <a:avLst/>
+          </a:prstGeom>
+          <a:noFill/>
+        </p:spPr>
+        <p:txBody>
+          <a:bodyPr wrap="square" lIns="0" rIns="0" tIns="0" bIns="0">
+            <a:spAutoFit/>
+          </a:bodyPr>
+          <a:lstStyle/>
+          <a:p>
+            <a:pPr algn="l">
+              <a:lnSpc>
+                <a:spcPts val="2048"/>
+              </a:lnSpc>
+              <a:spcAft>
+                <a:spcPts val="0"/>
+              </a:spcAft>
+            </a:pPr>
+            <a:r>
+              <a:rPr sz="1600" b="1" i="0">
+                <a:solidFill>
+                  <a:srgbClr val="102D5E"/>
+                </a:solidFill>
+                <a:latin typeface="Garamond"/>
+              </a:rPr>
+              <a:t>yes</a:t>
+            </a:r>
+          </a:p>
+        </p:txBody>
+      </p:sp>
+      <p:sp>
+        <p:nvSpPr>
+          <p:cNvPr id="16" name="TextBox 15"/>
+          <p:cNvSpPr txBox="1"/>
+          <p:nvPr/>
+        </p:nvSpPr>
+        <p:spPr>
+          <a:xfrm>
+            <a:off x="822960" y="3986784"/>
+            <a:ext cx="6949440" cy="420624"/>
+          </a:xfrm>
+          <a:prstGeom prst="rect">
+            <a:avLst/>
+          </a:prstGeom>
+          <a:noFill/>
+        </p:spPr>
+        <p:txBody>
+          <a:bodyPr wrap="square" lIns="0" rIns="0" tIns="0" bIns="0">
+            <a:spAutoFit/>
+          </a:bodyPr>
+          <a:lstStyle/>
+          <a:p>
+            <a:pPr algn="l">
+              <a:lnSpc>
+                <a:spcPts val="2048"/>
+              </a:lnSpc>
+              <a:spcAft>
+                <a:spcPts val="0"/>
+              </a:spcAft>
+            </a:pPr>
+            <a:r>
+              <a:rPr sz="1600" b="0" i="0">
+                <a:solidFill>
+                  <a:srgbClr val="212529"/>
+                </a:solidFill>
+                <a:latin typeface="Garamond"/>
+              </a:rPr>
+              <a:t>Personal life-cycle motives</a:t>
+            </a:r>
+          </a:p>
+        </p:txBody>
+      </p:sp>
+      <p:sp>
+        <p:nvSpPr>
+          <p:cNvPr id="17" name="TextBox 16"/>
+          <p:cNvSpPr txBox="1"/>
+          <p:nvPr/>
+        </p:nvSpPr>
+        <p:spPr>
+          <a:xfrm>
+            <a:off x="7955279" y="3986784"/>
+            <a:ext cx="3108960" cy="420624"/>
+          </a:xfrm>
+          <a:prstGeom prst="rect">
+            <a:avLst/>
+          </a:prstGeom>
+          <a:noFill/>
+        </p:spPr>
+        <p:txBody>
+          <a:bodyPr wrap="square" lIns="0" rIns="0" tIns="0" bIns="0">
+            <a:spAutoFit/>
+          </a:bodyPr>
+          <a:lstStyle/>
+          <a:p>
+            <a:pPr algn="l">
+              <a:lnSpc>
+                <a:spcPts val="2048"/>
+              </a:lnSpc>
+              <a:spcAft>
+                <a:spcPts val="0"/>
+              </a:spcAft>
+            </a:pPr>
+            <a:r>
+              <a:rPr sz="1600" b="1" i="0">
+                <a:solidFill>
+                  <a:srgbClr val="102D5E"/>
+                </a:solidFill>
+                <a:latin typeface="Garamond"/>
+              </a:rPr>
+              <a:t>yes</a:t>
+            </a:r>
+          </a:p>
+        </p:txBody>
+      </p:sp>
+      <p:cxnSp>
+        <p:nvCxnSpPr>
+          <p:cNvPr id="18" name="Connector 17"/>
+          <p:cNvCxnSpPr/>
+          <p:nvPr/>
+        </p:nvCxnSpPr>
+        <p:spPr>
+          <a:xfrm>
+            <a:off x="822960" y="4425696"/>
+            <a:ext cx="10241280" cy="0"/>
+          </a:xfrm>
+          <a:prstGeom prst="line">
+            <a:avLst/>
+          </a:prstGeom>
+          <a:ln w="8890">
+            <a:solidFill>
+              <a:srgbClr val="212529"/>
+            </a:solidFill>
+          </a:ln>
+          <a:effectLst/>
+        </p:spPr>
+        <p:style>
+          <a:lnRef idx="2">
+            <a:schemeClr val="accent1"/>
+          </a:lnRef>
+          <a:fillRef idx="0">
+            <a:schemeClr val="accent1"/>
+          </a:fillRef>
+          <a:effectRef idx="1">
+            <a:schemeClr val="accent1"/>
+          </a:effectRef>
+          <a:fontRef idx="minor">
+            <a:schemeClr val="tx1"/>
+          </a:fontRef>
+        </p:style>
+      </p:cxnSp>
+      <p:sp>
+        <p:nvSpPr>
+          <p:cNvPr id="19" name="TextBox 18"/>
+          <p:cNvSpPr txBox="1"/>
+          <p:nvPr/>
+        </p:nvSpPr>
+        <p:spPr>
+          <a:xfrm>
+            <a:off x="822960" y="4535424"/>
+            <a:ext cx="6949440" cy="420624"/>
+          </a:xfrm>
+          <a:prstGeom prst="rect">
+            <a:avLst/>
+          </a:prstGeom>
+          <a:noFill/>
+        </p:spPr>
+        <p:txBody>
+          <a:bodyPr wrap="square" lIns="0" rIns="0" tIns="0" bIns="0">
+            <a:spAutoFit/>
+          </a:bodyPr>
+          <a:lstStyle/>
+          <a:p>
+            <a:pPr algn="l">
+              <a:lnSpc>
+                <a:spcPts val="2048"/>
+              </a:lnSpc>
+              <a:spcAft>
+                <a:spcPts val="0"/>
+              </a:spcAft>
+            </a:pPr>
+            <a:r>
+              <a:rPr sz="1600" b="0" i="0">
+                <a:solidFill>
+                  <a:srgbClr val="212529"/>
+                </a:solidFill>
+                <a:latin typeface="Garamond"/>
+              </a:rPr>
+              <a:t>Sociodemographics</a:t>
+            </a:r>
+          </a:p>
+        </p:txBody>
+      </p:sp>
+      <p:sp>
+        <p:nvSpPr>
+          <p:cNvPr id="20" name="TextBox 19"/>
+          <p:cNvSpPr txBox="1"/>
+          <p:nvPr/>
+        </p:nvSpPr>
+        <p:spPr>
+          <a:xfrm>
+            <a:off x="7955279" y="4535424"/>
+            <a:ext cx="3108960" cy="420624"/>
+          </a:xfrm>
+          <a:prstGeom prst="rect">
+            <a:avLst/>
+          </a:prstGeom>
+          <a:noFill/>
+        </p:spPr>
+        <p:txBody>
+          <a:bodyPr wrap="square" lIns="0" rIns="0" tIns="0" bIns="0">
+            <a:spAutoFit/>
+          </a:bodyPr>
+          <a:lstStyle/>
+          <a:p>
+            <a:pPr algn="l">
+              <a:lnSpc>
+                <a:spcPts val="2048"/>
+              </a:lnSpc>
+              <a:spcAft>
+                <a:spcPts val="0"/>
+              </a:spcAft>
+            </a:pPr>
+            <a:r>
+              <a:rPr sz="1600" b="1" i="0">
+                <a:solidFill>
+                  <a:srgbClr val="102D5E"/>
+                </a:solidFill>
+                <a:latin typeface="Garamond"/>
+              </a:rPr>
+              <a:t>yes</a:t>
+            </a:r>
+          </a:p>
+        </p:txBody>
+      </p:sp>
+      <p:cxnSp>
+        <p:nvCxnSpPr>
+          <p:cNvPr id="21" name="Connector 20"/>
+          <p:cNvCxnSpPr/>
+          <p:nvPr/>
+        </p:nvCxnSpPr>
+        <p:spPr>
+          <a:xfrm>
+            <a:off x="822960" y="4992624"/>
+            <a:ext cx="10241280" cy="0"/>
+          </a:xfrm>
+          <a:prstGeom prst="line">
+            <a:avLst/>
+          </a:prstGeom>
+          <a:ln w="16510">
+            <a:solidFill>
+              <a:srgbClr val="212529"/>
+            </a:solidFill>
+          </a:ln>
+          <a:effectLst/>
+        </p:spPr>
+        <p:style>
+          <a:lnRef idx="2">
+            <a:schemeClr val="accent1"/>
+          </a:lnRef>
+          <a:fillRef idx="0">
+            <a:schemeClr val="accent1"/>
+          </a:fillRef>
+          <a:effectRef idx="1">
+            <a:schemeClr val="accent1"/>
+          </a:effectRef>
+          <a:fontRef idx="minor">
+            <a:schemeClr val="tx1"/>
+          </a:fontRef>
+        </p:style>
+      </p:cxnSp>
+      <p:sp>
+        <p:nvSpPr>
+          <p:cNvPr id="22" name="Rounded Rectangle 21">
+            <a:hlinkClick action="ppaction://hlinksldjump" r:id="rId2"/>
+          </p:cNvPr>
+          <p:cNvSpPr/>
+          <p:nvPr/>
+        </p:nvSpPr>
+        <p:spPr>
+          <a:xfrm>
+            <a:off x="10469880" y="6327648"/>
+            <a:ext cx="994867" cy="365760"/>
+          </a:xfrm>
+          <a:prstGeom prst="roundRect">
+            <a:avLst/>
+          </a:prstGeom>
+          <a:solidFill>
+            <a:srgbClr val="BED3EE"/>
+          </a:solidFill>
+          <a:ln>
+            <a:noFill/>
+          </a:ln>
+          <a:effectLst/>
+        </p:spPr>
+        <p:style>
+          <a:lnRef idx="1">
+            <a:schemeClr val="accent1"/>
+          </a:lnRef>
+          <a:fillRef idx="3">
+            <a:schemeClr val="accent1"/>
+          </a:fillRef>
+          <a:effectRef idx="2">
+            <a:schemeClr val="accent1"/>
+          </a:effectRef>
+          <a:fontRef idx="minor">
+            <a:schemeClr val="lt1"/>
+          </a:fontRef>
+        </p:style>
+        <p:txBody>
+          <a:bodyPr rtlCol="0" anchor="ctr" wrap="none" lIns="36576" rIns="36576" tIns="0" bIns="0"/>
+          <a:lstStyle/>
+          <a:p>
+            <a:pPr algn="ctr"/>
+            <a:r>
+              <a:rPr sz="1800" b="1">
+                <a:solidFill>
+                  <a:srgbClr val="102D5E"/>
+                </a:solidFill>
+                <a:latin typeface="Garamond"/>
+              </a:rPr>
+              <a:t>☞ </a:t>
+            </a:r>
+            <a:r>
+              <a:rPr sz="1400">
+                <a:solidFill>
+                  <a:srgbClr val="102D5E"/>
+                </a:solidFill>
+                <a:latin typeface="Garamond"/>
+              </a:rPr>
+              <a:t>Back</a:t>
             </a:r>
           </a:p>
         </p:txBody>

--- a/report/data_cluster/Proyect_US_cluster.pptx
+++ b/report/data_cluster/Proyect_US_cluster.pptx
@@ -6764,7 +6764,7 @@
                 </a:solidFill>
                 <a:latin typeface="Garamond"/>
               </a:rPr>
-              <a:t>Accountants</a:t>
+              <a:t>Counselors</a:t>
             </a:r>
           </a:p>
         </p:txBody>
@@ -7010,7 +7010,7 @@
                 </a:solidFill>
                 <a:latin typeface="Garamond"/>
               </a:rPr>
-              <a:t>57.0</a:t>
+              <a:t>76.2</a:t>
             </a:r>
           </a:p>
         </p:txBody>
@@ -7220,7 +7220,7 @@
                 </a:solidFill>
                 <a:latin typeface="Garamond"/>
               </a:rPr>
-              <a:t>44.1</a:t>
+              <a:t>43.2</a:t>
             </a:r>
           </a:p>
         </p:txBody>
@@ -7430,7 +7430,7 @@
                 </a:solidFill>
                 <a:latin typeface="Garamond"/>
               </a:rPr>
-              <a:t>31.3</a:t>
+              <a:t>67.8</a:t>
             </a:r>
           </a:p>
         </p:txBody>
@@ -7640,7 +7640,7 @@
                 </a:solidFill>
                 <a:latin typeface="Garamond"/>
               </a:rPr>
-              <a:t>11.0</a:t>
+              <a:t>36.7</a:t>
             </a:r>
           </a:p>
         </p:txBody>
@@ -7850,7 +7850,7 @@
                 </a:solidFill>
                 <a:latin typeface="Garamond"/>
               </a:rPr>
-              <a:t>49.5</a:t>
+              <a:t>48.5</a:t>
             </a:r>
           </a:p>
         </p:txBody>
@@ -8060,7 +8060,7 @@
                 </a:solidFill>
                 <a:latin typeface="Garamond"/>
               </a:rPr>
-              <a:t>77,000</a:t>
+              <a:t>55,000</a:t>
             </a:r>
           </a:p>
         </p:txBody>
@@ -8306,7 +8306,7 @@
                 </a:solidFill>
                 <a:latin typeface="Garamond"/>
               </a:rPr>
-              <a:t>6,897</a:t>
+              <a:t>3,962</a:t>
             </a:r>
           </a:p>
         </p:txBody>
@@ -8435,7 +8435,7 @@
                 </a:solidFill>
                 <a:latin typeface="Garamond"/>
               </a:rPr>
-              <a:t>Teaching is similar to nursing and social work in age and gender, and to social work in education. It differs in pay, weeks worked and the public sector.</a:t>
+              <a:t>Teaching is similar to counseling in gender and pay, and to social work in age and education. What sets teaching apart is the public sector and the shorter work year.</a:t>
             </a:r>
           </a:p>
         </p:txBody>
@@ -8595,7 +8595,7 @@
                 </a:solidFill>
                 <a:latin typeface="Garamond"/>
               </a:rPr>
-              <a:t>Teachers leave at about the same rate as comparable professions. The distinctive part of teaching is who leaves and where they go, not how many.</a:t>
+              <a:t>Teachers leave at rates similar to or below the comparable professions. The distinctive part of teaching is who leaves and where they go, not how many.</a:t>
             </a:r>
           </a:p>
         </p:txBody>
@@ -11439,7 +11439,7 @@
                 </a:solidFill>
                 <a:latin typeface="Garamond"/>
               </a:rPr>
-              <a:t>Teacher pay has not grown in 25 years. Teachers sit 4% below their 1997 level, while comparable professions grew by about 12% on average.</a:t>
+              <a:t>Teacher pay has not grown in 25 years, and neither has it in the closest helping professions. The typical graduate now out-earns a teacher by $30,000 a year.</a:t>
             </a:r>
           </a:p>
         </p:txBody>

--- a/report/data_cluster/Proyect_US_cluster.pptx
+++ b/report/data_cluster/Proyect_US_cluster.pptx
@@ -9910,8 +9910,8 @@
         </p:blipFill>
         <p:spPr>
           <a:xfrm>
-            <a:off x="1357685" y="1051560"/>
-            <a:ext cx="9446149" cy="4526280"/>
+            <a:off x="1184987" y="1051560"/>
+            <a:ext cx="9791544" cy="4526280"/>
           </a:xfrm>
           <a:prstGeom prst="rect">
             <a:avLst/>
@@ -9964,7 +9964,7 @@
                 </a:solidFill>
                 <a:latin typeface="Garamond"/>
               </a:rPr>
-              <a:t>Studying is the exit of the young and the childless, not of the mothers. Among leavers under 30, almost half are enrolled in school.</a:t>
+              <a:t>Leaving to study follows age, and teacher leavers mirror the typical graduate out of the labor force: 45% of those under 30 are enrolled in school, next to 60% among all graduates. After 40, almost none study.</a:t>
             </a:r>
           </a:p>
         </p:txBody>

--- a/report/data_cluster/Proyect_US_cluster.pptx
+++ b/report/data_cluster/Proyect_US_cluster.pptx
@@ -55,6 +55,7 @@
     <p:sldId id="303" r:id="rId54"/>
     <p:sldId id="304" r:id="rId55"/>
     <p:sldId id="305" r:id="rId56"/>
+    <p:sldId id="306" r:id="rId57"/>
   </p:sldIdLst>
   <p:sldSz cx="12191695" cy="6858000" type="screen4x3"/>
   <p:notesSz cx="6858000" cy="9144000"/>
@@ -9034,6 +9035,70 @@
           </a:p>
         </p:txBody>
       </p:sp>
+      <p:sp>
+        <p:nvSpPr>
+          <p:cNvPr id="7" name="Rounded Rectangle 6">
+            <a:hlinkClick action="ppaction://hlinksldjump" r:id="rId4"/>
+          </p:cNvPr>
+          <p:cNvSpPr/>
+          <p:nvPr/>
+        </p:nvSpPr>
+        <p:spPr>
+          <a:xfrm>
+            <a:off x="3236061" y="6327648"/>
+            <a:ext cx="1973275" cy="365760"/>
+          </a:xfrm>
+          <a:prstGeom prst="roundRect">
+            <a:avLst/>
+          </a:prstGeom>
+          <a:solidFill>
+            <a:srgbClr val="BED3EE"/>
+          </a:solidFill>
+          <a:ln>
+            <a:noFill/>
+          </a:ln>
+          <a:effectLst/>
+        </p:spPr>
+        <p:style>
+          <a:lnRef idx="1">
+            <a:schemeClr val="accent1"/>
+          </a:lnRef>
+          <a:fillRef idx="3">
+            <a:schemeClr val="accent1"/>
+          </a:fillRef>
+          <a:effectRef idx="2">
+            <a:schemeClr val="accent1"/>
+          </a:effectRef>
+          <a:fontRef idx="minor">
+            <a:schemeClr val="lt1"/>
+          </a:fontRef>
+        </p:style>
+        <p:txBody>
+          <a:bodyPr rtlCol="0" anchor="ctr" wrap="none" lIns="36576" rIns="36576" tIns="0" bIns="0"/>
+          <a:lstStyle/>
+          <a:p>
+            <a:pPr algn="ctr"/>
+            <a:r>
+              <a:rPr sz="1800" b="1">
+                <a:solidFill>
+                  <a:srgbClr val="102D5E"/>
+                </a:solidFill>
+                <a:latin typeface="Garamond"/>
+              </a:rPr>
+              <a:t>☞ </a:t>
+            </a:r>
+            <a:r>
+              <a:rPr sz="1400">
+                <a:solidFill>
+                  <a:srgbClr val="102D5E"/>
+                </a:solidFill>
+                <a:latin typeface="Garamond"/>
+              </a:rPr>
+              <a:t>Pooled 2002–24</a:t>
+            </a:r>
+          </a:p>
+        </p:txBody>
+      </p:sp>
     </p:spTree>
   </p:cSld>
   <p:clrMapOvr>
@@ -19179,7 +19244,7 @@
                 </a:solidFill>
                 <a:latin typeface="Garamond"/>
               </a:rPr>
-              <a:t>Do switchers earn more?</a:t>
+              <a:t>The same flow, pooled 2002–2024</a:t>
             </a:r>
           </a:p>
         </p:txBody>
@@ -19221,7 +19286,7 @@
       </p:sp>
       <p:pic>
         <p:nvPicPr>
-          <p:cNvPr id="4" name="Picture 3" descr="pay7_destinations_deck.png"/>
+          <p:cNvPr id="4" name="Picture 3" descr="flow_employed_pooled.png"/>
           <p:cNvPicPr>
             <a:picLocks noChangeAspect="1"/>
           </p:cNvPicPr>
@@ -19235,8 +19300,8 @@
         </p:blipFill>
         <p:spPr>
           <a:xfrm>
-            <a:off x="1600199" y="1051560"/>
-            <a:ext cx="8961120" cy="4480560"/>
+            <a:off x="1357685" y="1051560"/>
+            <a:ext cx="9446149" cy="4526280"/>
           </a:xfrm>
           <a:prstGeom prst="rect">
             <a:avLst/>
@@ -19280,7 +19345,7 @@
                 </a:solidFill>
                 <a:latin typeface="Garamond"/>
               </a:rPr>
-              <a:t>Same person observed in two consecutive March supplements. Moves into education jobs or care pay no more than staying; only the minority moving to other professional occupations clearly gains. Half of all switchers land in occupations whose median pay is below the teacher median.</a:t>
+              <a:t>Over the whole comparable-codes period (5,791 leavers) the composition barely moves: 26 to another job, 35 retired, 27 out of the labor force before 55 and 12 unemployed; the employed split is 22 / 9 / 30 / 39 percent. The five-year window is not driving the picture.</a:t>
             </a:r>
           </a:p>
         </p:txBody>
@@ -19394,7 +19459,7 @@
                 </a:solidFill>
                 <a:latin typeface="Garamond"/>
               </a:rPr>
-              <a:t>The proportions behind the destinations chart</a:t>
+              <a:t>Do switchers earn more?</a:t>
             </a:r>
           </a:p>
         </p:txBody>
@@ -19434,42 +19499,30 @@
           </a:p>
         </p:txBody>
       </p:sp>
-      <p:cxnSp>
-        <p:nvCxnSpPr>
-          <p:cNvPr id="4" name="Connector 3"/>
-          <p:cNvCxnSpPr/>
-          <p:nvPr/>
-        </p:nvCxnSpPr>
-        <p:spPr>
-          <a:xfrm>
-            <a:off x="822960" y="1554480"/>
-            <a:ext cx="9143999" cy="0"/>
-          </a:xfrm>
-          <a:prstGeom prst="line">
-            <a:avLst/>
-          </a:prstGeom>
-          <a:ln w="16510">
-            <a:solidFill>
-              <a:srgbClr val="212529"/>
-            </a:solidFill>
-          </a:ln>
-          <a:effectLst/>
-        </p:spPr>
-        <p:style>
-          <a:lnRef idx="2">
-            <a:schemeClr val="accent1"/>
-          </a:lnRef>
-          <a:fillRef idx="0">
-            <a:schemeClr val="accent1"/>
-          </a:fillRef>
-          <a:effectRef idx="1">
-            <a:schemeClr val="accent1"/>
-          </a:effectRef>
-          <a:fontRef idx="minor">
-            <a:schemeClr val="tx1"/>
-          </a:fontRef>
-        </p:style>
-      </p:cxnSp>
+      <p:pic>
+        <p:nvPicPr>
+          <p:cNvPr id="4" name="Picture 3" descr="pay7_destinations_deck.png"/>
+          <p:cNvPicPr>
+            <a:picLocks noChangeAspect="1"/>
+          </p:cNvPicPr>
+          <p:nvPr/>
+        </p:nvPicPr>
+        <p:blipFill>
+          <a:blip r:embed="rId2"/>
+          <a:stretch>
+            <a:fillRect/>
+          </a:stretch>
+        </p:blipFill>
+        <p:spPr>
+          <a:xfrm>
+            <a:off x="1600199" y="1051560"/>
+            <a:ext cx="8961120" cy="4480560"/>
+          </a:xfrm>
+          <a:prstGeom prst="rect">
+            <a:avLst/>
+          </a:prstGeom>
+        </p:spPr>
+      </p:pic>
       <p:sp>
         <p:nvSpPr>
           <p:cNvPr id="5" name="TextBox 4"/>
@@ -19478,8 +19531,8 @@
         </p:nvSpPr>
         <p:spPr>
           <a:xfrm>
-            <a:off x="822960" y="1664207"/>
-            <a:ext cx="6949440" cy="384048"/>
+            <a:off x="822960" y="5715000"/>
+            <a:ext cx="10789920" cy="914400"/>
           </a:xfrm>
           <a:prstGeom prst="rect">
             <a:avLst/>
@@ -19494,640 +19547,28 @@
           <a:p>
             <a:pPr algn="l">
               <a:lnSpc>
-                <a:spcPts val="1920"/>
-              </a:lnSpc>
-              <a:spcAft>
-                <a:spcPts val="0"/>
-              </a:spcAft>
-            </a:pPr>
-            <a:r>
-              <a:rPr sz="1500" b="1" i="0">
+                <a:spcPts val="1728"/>
+              </a:lnSpc>
+              <a:spcAft>
+                <a:spcPts val="0"/>
+              </a:spcAft>
+            </a:pPr>
+            <a:r>
+              <a:rPr sz="1350" b="0" i="0">
                 <a:solidFill>
                   <a:srgbClr val="212529"/>
                 </a:solidFill>
                 <a:latin typeface="Garamond"/>
               </a:rPr>
-              <a:t>Of every 100 employed leavers…</a:t>
-            </a:r>
-          </a:p>
-        </p:txBody>
-      </p:sp>
-      <p:sp>
-        <p:nvSpPr>
-          <p:cNvPr id="6" name="TextBox 5"/>
-          <p:cNvSpPr txBox="1"/>
-          <p:nvPr/>
-        </p:nvSpPr>
-        <p:spPr>
-          <a:xfrm>
-            <a:off x="7955279" y="1664207"/>
-            <a:ext cx="2011680" cy="384048"/>
-          </a:xfrm>
-          <a:prstGeom prst="rect">
-            <a:avLst/>
-          </a:prstGeom>
-          <a:noFill/>
-        </p:spPr>
-        <p:txBody>
-          <a:bodyPr wrap="square" lIns="0" rIns="0" tIns="0" bIns="0">
-            <a:spAutoFit/>
-          </a:bodyPr>
-          <a:lstStyle/>
-          <a:p>
-            <a:pPr algn="r">
-              <a:lnSpc>
-                <a:spcPts val="1920"/>
-              </a:lnSpc>
-              <a:spcAft>
-                <a:spcPts val="0"/>
-              </a:spcAft>
-            </a:pPr>
-            <a:r>
-              <a:rPr sz="1500" b="1" i="0">
-                <a:solidFill>
-                  <a:srgbClr val="212529"/>
-                </a:solidFill>
-                <a:latin typeface="Garamond"/>
-              </a:rPr>
-              <a:t>share</a:t>
-            </a:r>
-          </a:p>
-        </p:txBody>
-      </p:sp>
-      <p:cxnSp>
-        <p:nvCxnSpPr>
-          <p:cNvPr id="7" name="Connector 6"/>
-          <p:cNvCxnSpPr/>
-          <p:nvPr/>
-        </p:nvCxnSpPr>
-        <p:spPr>
-          <a:xfrm>
-            <a:off x="822960" y="2066543"/>
-            <a:ext cx="9143999" cy="0"/>
-          </a:xfrm>
-          <a:prstGeom prst="line">
-            <a:avLst/>
-          </a:prstGeom>
-          <a:ln w="8890">
-            <a:solidFill>
-              <a:srgbClr val="212529"/>
-            </a:solidFill>
-          </a:ln>
-          <a:effectLst/>
-        </p:spPr>
-        <p:style>
-          <a:lnRef idx="2">
-            <a:schemeClr val="accent1"/>
-          </a:lnRef>
-          <a:fillRef idx="0">
-            <a:schemeClr val="accent1"/>
-          </a:fillRef>
-          <a:effectRef idx="1">
-            <a:schemeClr val="accent1"/>
-          </a:effectRef>
-          <a:fontRef idx="minor">
-            <a:schemeClr val="tx1"/>
-          </a:fontRef>
-        </p:style>
-      </p:cxnSp>
-      <p:sp>
-        <p:nvSpPr>
-          <p:cNvPr id="8" name="TextBox 7"/>
-          <p:cNvSpPr txBox="1"/>
-          <p:nvPr/>
-        </p:nvSpPr>
-        <p:spPr>
-          <a:xfrm>
-            <a:off x="822960" y="2176272"/>
-            <a:ext cx="6949440" cy="384048"/>
-          </a:xfrm>
-          <a:prstGeom prst="rect">
-            <a:avLst/>
-          </a:prstGeom>
-          <a:noFill/>
-        </p:spPr>
-        <p:txBody>
-          <a:bodyPr wrap="square" lIns="0" rIns="0" tIns="0" bIns="0">
-            <a:spAutoFit/>
-          </a:bodyPr>
-          <a:lstStyle/>
-          <a:p>
-            <a:pPr algn="l">
-              <a:lnSpc>
-                <a:spcPts val="1920"/>
-              </a:lnSpc>
-              <a:spcAft>
-                <a:spcPts val="0"/>
-              </a:spcAft>
-            </a:pPr>
-            <a:r>
-              <a:rPr sz="1500" b="0" i="0">
-                <a:solidFill>
-                  <a:srgbClr val="212529"/>
-                </a:solidFill>
-                <a:latin typeface="Garamond"/>
-              </a:rPr>
-              <a:t>Education, non-teaching</a:t>
-            </a:r>
-          </a:p>
-        </p:txBody>
-      </p:sp>
-      <p:sp>
-        <p:nvSpPr>
-          <p:cNvPr id="9" name="TextBox 8"/>
-          <p:cNvSpPr txBox="1"/>
-          <p:nvPr/>
-        </p:nvSpPr>
-        <p:spPr>
-          <a:xfrm>
-            <a:off x="7955279" y="2176272"/>
-            <a:ext cx="2011680" cy="384048"/>
-          </a:xfrm>
-          <a:prstGeom prst="rect">
-            <a:avLst/>
-          </a:prstGeom>
-          <a:noFill/>
-        </p:spPr>
-        <p:txBody>
-          <a:bodyPr wrap="square" lIns="0" rIns="0" tIns="0" bIns="0">
-            <a:spAutoFit/>
-          </a:bodyPr>
-          <a:lstStyle/>
-          <a:p>
-            <a:pPr algn="r">
-              <a:lnSpc>
-                <a:spcPts val="1920"/>
-              </a:lnSpc>
-              <a:spcAft>
-                <a:spcPts val="0"/>
-              </a:spcAft>
-            </a:pPr>
-            <a:r>
-              <a:rPr sz="1500" b="0" i="0">
-                <a:solidFill>
-                  <a:srgbClr val="212529"/>
-                </a:solidFill>
-                <a:latin typeface="Garamond"/>
-              </a:rPr>
-              <a:t>22.6</a:t>
-            </a:r>
-          </a:p>
-        </p:txBody>
-      </p:sp>
-      <p:sp>
-        <p:nvSpPr>
-          <p:cNvPr id="10" name="TextBox 9"/>
-          <p:cNvSpPr txBox="1"/>
-          <p:nvPr/>
-        </p:nvSpPr>
-        <p:spPr>
-          <a:xfrm>
-            <a:off x="822960" y="2560320"/>
-            <a:ext cx="6949440" cy="384048"/>
-          </a:xfrm>
-          <a:prstGeom prst="rect">
-            <a:avLst/>
-          </a:prstGeom>
-          <a:noFill/>
-        </p:spPr>
-        <p:txBody>
-          <a:bodyPr wrap="square" lIns="0" rIns="0" tIns="0" bIns="0">
-            <a:spAutoFit/>
-          </a:bodyPr>
-          <a:lstStyle/>
-          <a:p>
-            <a:pPr algn="l">
-              <a:lnSpc>
-                <a:spcPts val="1920"/>
-              </a:lnSpc>
-              <a:spcAft>
-                <a:spcPts val="0"/>
-              </a:spcAft>
-            </a:pPr>
-            <a:r>
-              <a:rPr sz="1500" b="0" i="0">
-                <a:solidFill>
-                  <a:srgbClr val="212529"/>
-                </a:solidFill>
-                <a:latin typeface="Garamond"/>
-              </a:rPr>
-              <a:t>Care</a:t>
-            </a:r>
-          </a:p>
-        </p:txBody>
-      </p:sp>
-      <p:sp>
-        <p:nvSpPr>
-          <p:cNvPr id="11" name="TextBox 10"/>
-          <p:cNvSpPr txBox="1"/>
-          <p:nvPr/>
-        </p:nvSpPr>
-        <p:spPr>
-          <a:xfrm>
-            <a:off x="7955279" y="2560320"/>
-            <a:ext cx="2011680" cy="384048"/>
-          </a:xfrm>
-          <a:prstGeom prst="rect">
-            <a:avLst/>
-          </a:prstGeom>
-          <a:noFill/>
-        </p:spPr>
-        <p:txBody>
-          <a:bodyPr wrap="square" lIns="0" rIns="0" tIns="0" bIns="0">
-            <a:spAutoFit/>
-          </a:bodyPr>
-          <a:lstStyle/>
-          <a:p>
-            <a:pPr algn="r">
-              <a:lnSpc>
-                <a:spcPts val="1920"/>
-              </a:lnSpc>
-              <a:spcAft>
-                <a:spcPts val="0"/>
-              </a:spcAft>
-            </a:pPr>
-            <a:r>
-              <a:rPr sz="1500" b="0" i="0">
-                <a:solidFill>
-                  <a:srgbClr val="212529"/>
-                </a:solidFill>
-                <a:latin typeface="Garamond"/>
-              </a:rPr>
-              <a:t>8.5</a:t>
-            </a:r>
-          </a:p>
-        </p:txBody>
-      </p:sp>
-      <p:sp>
-        <p:nvSpPr>
-          <p:cNvPr id="12" name="TextBox 11"/>
-          <p:cNvSpPr txBox="1"/>
-          <p:nvPr/>
-        </p:nvSpPr>
-        <p:spPr>
-          <a:xfrm>
-            <a:off x="822960" y="2944368"/>
-            <a:ext cx="6949440" cy="384048"/>
-          </a:xfrm>
-          <a:prstGeom prst="rect">
-            <a:avLst/>
-          </a:prstGeom>
-          <a:noFill/>
-        </p:spPr>
-        <p:txBody>
-          <a:bodyPr wrap="square" lIns="0" rIns="0" tIns="0" bIns="0">
-            <a:spAutoFit/>
-          </a:bodyPr>
-          <a:lstStyle/>
-          <a:p>
-            <a:pPr algn="l">
-              <a:lnSpc>
-                <a:spcPts val="1920"/>
-              </a:lnSpc>
-              <a:spcAft>
-                <a:spcPts val="0"/>
-              </a:spcAft>
-            </a:pPr>
-            <a:r>
-              <a:rPr sz="1500" b="0" i="0">
-                <a:solidFill>
-                  <a:srgbClr val="212529"/>
-                </a:solidFill>
-                <a:latin typeface="Garamond"/>
-              </a:rPr>
-              <a:t>Professional and managerial</a:t>
-            </a:r>
-          </a:p>
-        </p:txBody>
-      </p:sp>
-      <p:sp>
-        <p:nvSpPr>
-          <p:cNvPr id="13" name="TextBox 12"/>
-          <p:cNvSpPr txBox="1"/>
-          <p:nvPr/>
-        </p:nvSpPr>
-        <p:spPr>
-          <a:xfrm>
-            <a:off x="7955279" y="2944368"/>
-            <a:ext cx="2011680" cy="384048"/>
-          </a:xfrm>
-          <a:prstGeom prst="rect">
-            <a:avLst/>
-          </a:prstGeom>
-          <a:noFill/>
-        </p:spPr>
-        <p:txBody>
-          <a:bodyPr wrap="square" lIns="0" rIns="0" tIns="0" bIns="0">
-            <a:spAutoFit/>
-          </a:bodyPr>
-          <a:lstStyle/>
-          <a:p>
-            <a:pPr algn="r">
-              <a:lnSpc>
-                <a:spcPts val="1920"/>
-              </a:lnSpc>
-              <a:spcAft>
-                <a:spcPts val="0"/>
-              </a:spcAft>
-            </a:pPr>
-            <a:r>
-              <a:rPr sz="1500" b="0" i="0">
-                <a:solidFill>
-                  <a:srgbClr val="212529"/>
-                </a:solidFill>
-                <a:latin typeface="Garamond"/>
-              </a:rPr>
-              <a:t>32.4</a:t>
-            </a:r>
-          </a:p>
-        </p:txBody>
-      </p:sp>
-      <p:sp>
-        <p:nvSpPr>
-          <p:cNvPr id="14" name="TextBox 13"/>
-          <p:cNvSpPr txBox="1"/>
-          <p:nvPr/>
-        </p:nvSpPr>
-        <p:spPr>
-          <a:xfrm>
-            <a:off x="822960" y="3328415"/>
-            <a:ext cx="6949440" cy="384048"/>
-          </a:xfrm>
-          <a:prstGeom prst="rect">
-            <a:avLst/>
-          </a:prstGeom>
-          <a:noFill/>
-        </p:spPr>
-        <p:txBody>
-          <a:bodyPr wrap="square" lIns="0" rIns="0" tIns="0" bIns="0">
-            <a:spAutoFit/>
-          </a:bodyPr>
-          <a:lstStyle/>
-          <a:p>
-            <a:pPr algn="l">
-              <a:lnSpc>
-                <a:spcPts val="1920"/>
-              </a:lnSpc>
-              <a:spcAft>
-                <a:spcPts val="0"/>
-              </a:spcAft>
-            </a:pPr>
-            <a:r>
-              <a:rPr sz="1500" b="0" i="0">
-                <a:solidFill>
-                  <a:srgbClr val="212529"/>
-                </a:solidFill>
-                <a:latin typeface="Garamond"/>
-              </a:rPr>
-              <a:t>Sales, office and manual</a:t>
-            </a:r>
-          </a:p>
-        </p:txBody>
-      </p:sp>
-      <p:sp>
-        <p:nvSpPr>
-          <p:cNvPr id="15" name="TextBox 14"/>
-          <p:cNvSpPr txBox="1"/>
-          <p:nvPr/>
-        </p:nvSpPr>
-        <p:spPr>
-          <a:xfrm>
-            <a:off x="7955279" y="3328415"/>
-            <a:ext cx="2011680" cy="384048"/>
-          </a:xfrm>
-          <a:prstGeom prst="rect">
-            <a:avLst/>
-          </a:prstGeom>
-          <a:noFill/>
-        </p:spPr>
-        <p:txBody>
-          <a:bodyPr wrap="square" lIns="0" rIns="0" tIns="0" bIns="0">
-            <a:spAutoFit/>
-          </a:bodyPr>
-          <a:lstStyle/>
-          <a:p>
-            <a:pPr algn="r">
-              <a:lnSpc>
-                <a:spcPts val="1920"/>
-              </a:lnSpc>
-              <a:spcAft>
-                <a:spcPts val="0"/>
-              </a:spcAft>
-            </a:pPr>
-            <a:r>
-              <a:rPr sz="1500" b="0" i="0">
-                <a:solidFill>
-                  <a:srgbClr val="212529"/>
-                </a:solidFill>
-                <a:latin typeface="Garamond"/>
-              </a:rPr>
-              <a:t>36.5</a:t>
-            </a:r>
-          </a:p>
-        </p:txBody>
-      </p:sp>
-      <p:cxnSp>
-        <p:nvCxnSpPr>
-          <p:cNvPr id="16" name="Connector 15"/>
-          <p:cNvCxnSpPr/>
-          <p:nvPr/>
-        </p:nvCxnSpPr>
-        <p:spPr>
-          <a:xfrm>
-            <a:off x="822960" y="3730751"/>
-            <a:ext cx="9143999" cy="0"/>
-          </a:xfrm>
-          <a:prstGeom prst="line">
-            <a:avLst/>
-          </a:prstGeom>
-          <a:ln w="8890">
-            <a:solidFill>
-              <a:srgbClr val="212529"/>
-            </a:solidFill>
-          </a:ln>
-          <a:effectLst/>
-        </p:spPr>
-        <p:style>
-          <a:lnRef idx="2">
-            <a:schemeClr val="accent1"/>
-          </a:lnRef>
-          <a:fillRef idx="0">
-            <a:schemeClr val="accent1"/>
-          </a:fillRef>
-          <a:effectRef idx="1">
-            <a:schemeClr val="accent1"/>
-          </a:effectRef>
-          <a:fontRef idx="minor">
-            <a:schemeClr val="tx1"/>
-          </a:fontRef>
-        </p:style>
-      </p:cxnSp>
-      <p:sp>
-        <p:nvSpPr>
-          <p:cNvPr id="17" name="TextBox 16"/>
-          <p:cNvSpPr txBox="1"/>
-          <p:nvPr/>
-        </p:nvSpPr>
-        <p:spPr>
-          <a:xfrm>
-            <a:off x="822960" y="3840479"/>
-            <a:ext cx="6949440" cy="384048"/>
-          </a:xfrm>
-          <a:prstGeom prst="rect">
-            <a:avLst/>
-          </a:prstGeom>
-          <a:noFill/>
-        </p:spPr>
-        <p:txBody>
-          <a:bodyPr wrap="square" lIns="0" rIns="0" tIns="0" bIns="0">
-            <a:spAutoFit/>
-          </a:bodyPr>
-          <a:lstStyle/>
-          <a:p>
-            <a:pPr algn="l">
-              <a:lnSpc>
-                <a:spcPts val="1920"/>
-              </a:lnSpc>
-              <a:spcAft>
-                <a:spcPts val="0"/>
-              </a:spcAft>
-            </a:pPr>
-            <a:r>
-              <a:rPr sz="1500" b="0" i="0">
-                <a:solidFill>
-                  <a:srgbClr val="8F2B36"/>
-                </a:solidFill>
-                <a:latin typeface="Garamond"/>
-              </a:rPr>
-              <a:t>Memo: occupations where fewer than half of US workers hold a college degree (in red)</a:t>
-            </a:r>
-          </a:p>
-        </p:txBody>
-      </p:sp>
-      <p:sp>
-        <p:nvSpPr>
-          <p:cNvPr id="18" name="TextBox 17"/>
-          <p:cNvSpPr txBox="1"/>
-          <p:nvPr/>
-        </p:nvSpPr>
-        <p:spPr>
-          <a:xfrm>
-            <a:off x="7955279" y="3840479"/>
-            <a:ext cx="2011680" cy="384048"/>
-          </a:xfrm>
-          <a:prstGeom prst="rect">
-            <a:avLst/>
-          </a:prstGeom>
-          <a:noFill/>
-        </p:spPr>
-        <p:txBody>
-          <a:bodyPr wrap="square" lIns="0" rIns="0" tIns="0" bIns="0">
-            <a:spAutoFit/>
-          </a:bodyPr>
-          <a:lstStyle/>
-          <a:p>
-            <a:pPr algn="r">
-              <a:lnSpc>
-                <a:spcPts val="1920"/>
-              </a:lnSpc>
-              <a:spcAft>
-                <a:spcPts val="0"/>
-              </a:spcAft>
-            </a:pPr>
-            <a:r>
-              <a:rPr sz="1500" b="1" i="0">
-                <a:solidFill>
-                  <a:srgbClr val="8F2B36"/>
-                </a:solidFill>
-                <a:latin typeface="Garamond"/>
-              </a:rPr>
-              <a:t>36.3</a:t>
-            </a:r>
-          </a:p>
-        </p:txBody>
-      </p:sp>
-      <p:cxnSp>
-        <p:nvCxnSpPr>
-          <p:cNvPr id="19" name="Connector 18"/>
-          <p:cNvCxnSpPr/>
-          <p:nvPr/>
-        </p:nvCxnSpPr>
-        <p:spPr>
-          <a:xfrm>
-            <a:off x="822960" y="4261103"/>
-            <a:ext cx="9143999" cy="0"/>
-          </a:xfrm>
-          <a:prstGeom prst="line">
-            <a:avLst/>
-          </a:prstGeom>
-          <a:ln w="16510">
-            <a:solidFill>
-              <a:srgbClr val="212529"/>
-            </a:solidFill>
-          </a:ln>
-          <a:effectLst/>
-        </p:spPr>
-        <p:style>
-          <a:lnRef idx="2">
-            <a:schemeClr val="accent1"/>
-          </a:lnRef>
-          <a:fillRef idx="0">
-            <a:schemeClr val="accent1"/>
-          </a:fillRef>
-          <a:effectRef idx="1">
-            <a:schemeClr val="accent1"/>
-          </a:effectRef>
-          <a:fontRef idx="minor">
-            <a:schemeClr val="tx1"/>
-          </a:fontRef>
-        </p:style>
-      </p:cxnSp>
-      <p:sp>
-        <p:nvSpPr>
-          <p:cNvPr id="20" name="TextBox 19"/>
-          <p:cNvSpPr txBox="1"/>
-          <p:nvPr/>
-        </p:nvSpPr>
-        <p:spPr>
-          <a:xfrm>
-            <a:off x="822960" y="4498847"/>
-            <a:ext cx="10789920" cy="1097280"/>
-          </a:xfrm>
-          <a:prstGeom prst="rect">
-            <a:avLst/>
-          </a:prstGeom>
-          <a:noFill/>
-        </p:spPr>
-        <p:txBody>
-          <a:bodyPr wrap="square" lIns="0" rIns="0" tIns="0" bIns="0">
-            <a:spAutoFit/>
-          </a:bodyPr>
-          <a:lstStyle/>
-          <a:p>
-            <a:pPr algn="l">
-              <a:lnSpc>
-                <a:spcPts val="1664"/>
-              </a:lnSpc>
-              <a:spcAft>
-                <a:spcPts val="0"/>
-              </a:spcAft>
-            </a:pPr>
-            <a:r>
-              <a:rPr sz="1300" b="0" i="0">
-                <a:solidFill>
-                  <a:srgbClr val="6B7480"/>
-                </a:solidFill>
-                <a:latin typeface="Garamond"/>
-              </a:rPr>
-              <a:t>Calendar 2020–2024; 344 employed leavers. The college-degree share of each destination occupation is computed among all employed US workers aged 25–64 in the same ASEC files, 2021–2025. 31.2 of the 36.3 red points sit in the sales, office and manual group; 5.1 in professional occupations.</a:t>
-            </a:r>
-          </a:p>
-        </p:txBody>
-      </p:sp>
-      <p:sp>
-        <p:nvSpPr>
-          <p:cNvPr id="21" name="Rounded Rectangle 20">
-            <a:hlinkClick action="ppaction://hlinksldjump" r:id="rId2"/>
+              <a:t>Same person observed in two consecutive March supplements. Moves into education jobs or care pay no more than staying; only the minority moving to other professional occupations clearly gains. Half of all switchers land in occupations whose median pay is below the teacher median.</a:t>
+            </a:r>
+          </a:p>
+        </p:txBody>
+      </p:sp>
+      <p:sp>
+        <p:nvSpPr>
+          <p:cNvPr id="6" name="Rounded Rectangle 5">
+            <a:hlinkClick action="ppaction://hlinksldjump" r:id="rId3"/>
           </p:cNvPr>
           <p:cNvSpPr/>
           <p:nvPr/>
@@ -20233,7 +19674,7 @@
                 </a:solidFill>
                 <a:latin typeface="Garamond"/>
               </a:rPr>
-              <a:t>Is the teacher group constant across code changes?</a:t>
+              <a:t>The proportions behind the destinations chart</a:t>
             </a:r>
           </a:p>
         </p:txBody>
@@ -20273,30 +19714,42 @@
           </a:p>
         </p:txBody>
       </p:sp>
-      <p:pic>
-        <p:nvPicPr>
-          <p:cNvPr id="4" name="Picture 3" descr="codes_narrow.png"/>
-          <p:cNvPicPr>
-            <a:picLocks noChangeAspect="1"/>
-          </p:cNvPicPr>
-          <p:nvPr/>
-        </p:nvPicPr>
-        <p:blipFill>
-          <a:blip r:embed="rId2"/>
-          <a:stretch>
-            <a:fillRect/>
-          </a:stretch>
-        </p:blipFill>
-        <p:spPr>
-          <a:xfrm>
-            <a:off x="1119260" y="1051560"/>
-            <a:ext cx="9922998" cy="4526280"/>
-          </a:xfrm>
-          <a:prstGeom prst="rect">
-            <a:avLst/>
-          </a:prstGeom>
-        </p:spPr>
-      </p:pic>
+      <p:cxnSp>
+        <p:nvCxnSpPr>
+          <p:cNvPr id="4" name="Connector 3"/>
+          <p:cNvCxnSpPr/>
+          <p:nvPr/>
+        </p:nvCxnSpPr>
+        <p:spPr>
+          <a:xfrm>
+            <a:off x="822960" y="1554480"/>
+            <a:ext cx="9143999" cy="0"/>
+          </a:xfrm>
+          <a:prstGeom prst="line">
+            <a:avLst/>
+          </a:prstGeom>
+          <a:ln w="16510">
+            <a:solidFill>
+              <a:srgbClr val="212529"/>
+            </a:solidFill>
+          </a:ln>
+          <a:effectLst/>
+        </p:spPr>
+        <p:style>
+          <a:lnRef idx="2">
+            <a:schemeClr val="accent1"/>
+          </a:lnRef>
+          <a:fillRef idx="0">
+            <a:schemeClr val="accent1"/>
+          </a:fillRef>
+          <a:effectRef idx="1">
+            <a:schemeClr val="accent1"/>
+          </a:effectRef>
+          <a:fontRef idx="minor">
+            <a:schemeClr val="tx1"/>
+          </a:fontRef>
+        </p:style>
+      </p:cxnSp>
       <p:sp>
         <p:nvSpPr>
           <p:cNvPr id="5" name="TextBox 4"/>
@@ -20305,8 +19758,8 @@
         </p:nvSpPr>
         <p:spPr>
           <a:xfrm>
-            <a:off x="822960" y="5806440"/>
-            <a:ext cx="10789920" cy="822960"/>
+            <a:off x="822960" y="1664207"/>
+            <a:ext cx="6949440" cy="384048"/>
           </a:xfrm>
           <a:prstGeom prst="rect">
             <a:avLst/>
@@ -20321,37 +19774,640 @@
           <a:p>
             <a:pPr algn="l">
               <a:lnSpc>
-                <a:spcPts val="1855"/>
-              </a:lnSpc>
-              <a:spcAft>
-                <a:spcPts val="0"/>
-              </a:spcAft>
-            </a:pPr>
-            <a:r>
-              <a:rPr sz="1450" b="1" i="0">
-                <a:solidFill>
-                  <a:srgbClr val="102D5E"/>
-                </a:solidFill>
-                <a:latin typeface="Garamond"/>
-              </a:rPr>
-              <a:t>Key message.  </a:t>
-            </a:r>
-            <a:r>
-              <a:rPr sz="1450" b="0" i="0">
+                <a:spcPts val="1920"/>
+              </a:lnSpc>
+              <a:spcAft>
+                <a:spcPts val="0"/>
+              </a:spcAft>
+            </a:pPr>
+            <a:r>
+              <a:rPr sz="1500" b="1" i="0">
                 <a:solidFill>
                   <a:srgbClr val="212529"/>
                 </a:solidFill>
                 <a:latin typeface="Garamond"/>
               </a:rPr>
-              <a:t>Recomputing the whole series on the narrow core moves the pooled rate by 0.1 points. The 2003 and 2020 reclassifications leave no visible break.</a:t>
-            </a:r>
-          </a:p>
-        </p:txBody>
-      </p:sp>
-      <p:sp>
-        <p:nvSpPr>
-          <p:cNvPr id="6" name="Rounded Rectangle 5">
-            <a:hlinkClick action="ppaction://hlinksldjump" r:id="rId3"/>
+              <a:t>Of every 100 employed leavers…</a:t>
+            </a:r>
+          </a:p>
+        </p:txBody>
+      </p:sp>
+      <p:sp>
+        <p:nvSpPr>
+          <p:cNvPr id="6" name="TextBox 5"/>
+          <p:cNvSpPr txBox="1"/>
+          <p:nvPr/>
+        </p:nvSpPr>
+        <p:spPr>
+          <a:xfrm>
+            <a:off x="7955279" y="1664207"/>
+            <a:ext cx="2011680" cy="384048"/>
+          </a:xfrm>
+          <a:prstGeom prst="rect">
+            <a:avLst/>
+          </a:prstGeom>
+          <a:noFill/>
+        </p:spPr>
+        <p:txBody>
+          <a:bodyPr wrap="square" lIns="0" rIns="0" tIns="0" bIns="0">
+            <a:spAutoFit/>
+          </a:bodyPr>
+          <a:lstStyle/>
+          <a:p>
+            <a:pPr algn="r">
+              <a:lnSpc>
+                <a:spcPts val="1920"/>
+              </a:lnSpc>
+              <a:spcAft>
+                <a:spcPts val="0"/>
+              </a:spcAft>
+            </a:pPr>
+            <a:r>
+              <a:rPr sz="1500" b="1" i="0">
+                <a:solidFill>
+                  <a:srgbClr val="212529"/>
+                </a:solidFill>
+                <a:latin typeface="Garamond"/>
+              </a:rPr>
+              <a:t>share</a:t>
+            </a:r>
+          </a:p>
+        </p:txBody>
+      </p:sp>
+      <p:cxnSp>
+        <p:nvCxnSpPr>
+          <p:cNvPr id="7" name="Connector 6"/>
+          <p:cNvCxnSpPr/>
+          <p:nvPr/>
+        </p:nvCxnSpPr>
+        <p:spPr>
+          <a:xfrm>
+            <a:off x="822960" y="2066543"/>
+            <a:ext cx="9143999" cy="0"/>
+          </a:xfrm>
+          <a:prstGeom prst="line">
+            <a:avLst/>
+          </a:prstGeom>
+          <a:ln w="8890">
+            <a:solidFill>
+              <a:srgbClr val="212529"/>
+            </a:solidFill>
+          </a:ln>
+          <a:effectLst/>
+        </p:spPr>
+        <p:style>
+          <a:lnRef idx="2">
+            <a:schemeClr val="accent1"/>
+          </a:lnRef>
+          <a:fillRef idx="0">
+            <a:schemeClr val="accent1"/>
+          </a:fillRef>
+          <a:effectRef idx="1">
+            <a:schemeClr val="accent1"/>
+          </a:effectRef>
+          <a:fontRef idx="minor">
+            <a:schemeClr val="tx1"/>
+          </a:fontRef>
+        </p:style>
+      </p:cxnSp>
+      <p:sp>
+        <p:nvSpPr>
+          <p:cNvPr id="8" name="TextBox 7"/>
+          <p:cNvSpPr txBox="1"/>
+          <p:nvPr/>
+        </p:nvSpPr>
+        <p:spPr>
+          <a:xfrm>
+            <a:off x="822960" y="2176272"/>
+            <a:ext cx="6949440" cy="384048"/>
+          </a:xfrm>
+          <a:prstGeom prst="rect">
+            <a:avLst/>
+          </a:prstGeom>
+          <a:noFill/>
+        </p:spPr>
+        <p:txBody>
+          <a:bodyPr wrap="square" lIns="0" rIns="0" tIns="0" bIns="0">
+            <a:spAutoFit/>
+          </a:bodyPr>
+          <a:lstStyle/>
+          <a:p>
+            <a:pPr algn="l">
+              <a:lnSpc>
+                <a:spcPts val="1920"/>
+              </a:lnSpc>
+              <a:spcAft>
+                <a:spcPts val="0"/>
+              </a:spcAft>
+            </a:pPr>
+            <a:r>
+              <a:rPr sz="1500" b="0" i="0">
+                <a:solidFill>
+                  <a:srgbClr val="212529"/>
+                </a:solidFill>
+                <a:latin typeface="Garamond"/>
+              </a:rPr>
+              <a:t>Education, non-teaching</a:t>
+            </a:r>
+          </a:p>
+        </p:txBody>
+      </p:sp>
+      <p:sp>
+        <p:nvSpPr>
+          <p:cNvPr id="9" name="TextBox 8"/>
+          <p:cNvSpPr txBox="1"/>
+          <p:nvPr/>
+        </p:nvSpPr>
+        <p:spPr>
+          <a:xfrm>
+            <a:off x="7955279" y="2176272"/>
+            <a:ext cx="2011680" cy="384048"/>
+          </a:xfrm>
+          <a:prstGeom prst="rect">
+            <a:avLst/>
+          </a:prstGeom>
+          <a:noFill/>
+        </p:spPr>
+        <p:txBody>
+          <a:bodyPr wrap="square" lIns="0" rIns="0" tIns="0" bIns="0">
+            <a:spAutoFit/>
+          </a:bodyPr>
+          <a:lstStyle/>
+          <a:p>
+            <a:pPr algn="r">
+              <a:lnSpc>
+                <a:spcPts val="1920"/>
+              </a:lnSpc>
+              <a:spcAft>
+                <a:spcPts val="0"/>
+              </a:spcAft>
+            </a:pPr>
+            <a:r>
+              <a:rPr sz="1500" b="0" i="0">
+                <a:solidFill>
+                  <a:srgbClr val="212529"/>
+                </a:solidFill>
+                <a:latin typeface="Garamond"/>
+              </a:rPr>
+              <a:t>22.6</a:t>
+            </a:r>
+          </a:p>
+        </p:txBody>
+      </p:sp>
+      <p:sp>
+        <p:nvSpPr>
+          <p:cNvPr id="10" name="TextBox 9"/>
+          <p:cNvSpPr txBox="1"/>
+          <p:nvPr/>
+        </p:nvSpPr>
+        <p:spPr>
+          <a:xfrm>
+            <a:off x="822960" y="2560320"/>
+            <a:ext cx="6949440" cy="384048"/>
+          </a:xfrm>
+          <a:prstGeom prst="rect">
+            <a:avLst/>
+          </a:prstGeom>
+          <a:noFill/>
+        </p:spPr>
+        <p:txBody>
+          <a:bodyPr wrap="square" lIns="0" rIns="0" tIns="0" bIns="0">
+            <a:spAutoFit/>
+          </a:bodyPr>
+          <a:lstStyle/>
+          <a:p>
+            <a:pPr algn="l">
+              <a:lnSpc>
+                <a:spcPts val="1920"/>
+              </a:lnSpc>
+              <a:spcAft>
+                <a:spcPts val="0"/>
+              </a:spcAft>
+            </a:pPr>
+            <a:r>
+              <a:rPr sz="1500" b="0" i="0">
+                <a:solidFill>
+                  <a:srgbClr val="212529"/>
+                </a:solidFill>
+                <a:latin typeface="Garamond"/>
+              </a:rPr>
+              <a:t>Care</a:t>
+            </a:r>
+          </a:p>
+        </p:txBody>
+      </p:sp>
+      <p:sp>
+        <p:nvSpPr>
+          <p:cNvPr id="11" name="TextBox 10"/>
+          <p:cNvSpPr txBox="1"/>
+          <p:nvPr/>
+        </p:nvSpPr>
+        <p:spPr>
+          <a:xfrm>
+            <a:off x="7955279" y="2560320"/>
+            <a:ext cx="2011680" cy="384048"/>
+          </a:xfrm>
+          <a:prstGeom prst="rect">
+            <a:avLst/>
+          </a:prstGeom>
+          <a:noFill/>
+        </p:spPr>
+        <p:txBody>
+          <a:bodyPr wrap="square" lIns="0" rIns="0" tIns="0" bIns="0">
+            <a:spAutoFit/>
+          </a:bodyPr>
+          <a:lstStyle/>
+          <a:p>
+            <a:pPr algn="r">
+              <a:lnSpc>
+                <a:spcPts val="1920"/>
+              </a:lnSpc>
+              <a:spcAft>
+                <a:spcPts val="0"/>
+              </a:spcAft>
+            </a:pPr>
+            <a:r>
+              <a:rPr sz="1500" b="0" i="0">
+                <a:solidFill>
+                  <a:srgbClr val="212529"/>
+                </a:solidFill>
+                <a:latin typeface="Garamond"/>
+              </a:rPr>
+              <a:t>8.5</a:t>
+            </a:r>
+          </a:p>
+        </p:txBody>
+      </p:sp>
+      <p:sp>
+        <p:nvSpPr>
+          <p:cNvPr id="12" name="TextBox 11"/>
+          <p:cNvSpPr txBox="1"/>
+          <p:nvPr/>
+        </p:nvSpPr>
+        <p:spPr>
+          <a:xfrm>
+            <a:off x="822960" y="2944368"/>
+            <a:ext cx="6949440" cy="384048"/>
+          </a:xfrm>
+          <a:prstGeom prst="rect">
+            <a:avLst/>
+          </a:prstGeom>
+          <a:noFill/>
+        </p:spPr>
+        <p:txBody>
+          <a:bodyPr wrap="square" lIns="0" rIns="0" tIns="0" bIns="0">
+            <a:spAutoFit/>
+          </a:bodyPr>
+          <a:lstStyle/>
+          <a:p>
+            <a:pPr algn="l">
+              <a:lnSpc>
+                <a:spcPts val="1920"/>
+              </a:lnSpc>
+              <a:spcAft>
+                <a:spcPts val="0"/>
+              </a:spcAft>
+            </a:pPr>
+            <a:r>
+              <a:rPr sz="1500" b="0" i="0">
+                <a:solidFill>
+                  <a:srgbClr val="212529"/>
+                </a:solidFill>
+                <a:latin typeface="Garamond"/>
+              </a:rPr>
+              <a:t>Professional and managerial</a:t>
+            </a:r>
+          </a:p>
+        </p:txBody>
+      </p:sp>
+      <p:sp>
+        <p:nvSpPr>
+          <p:cNvPr id="13" name="TextBox 12"/>
+          <p:cNvSpPr txBox="1"/>
+          <p:nvPr/>
+        </p:nvSpPr>
+        <p:spPr>
+          <a:xfrm>
+            <a:off x="7955279" y="2944368"/>
+            <a:ext cx="2011680" cy="384048"/>
+          </a:xfrm>
+          <a:prstGeom prst="rect">
+            <a:avLst/>
+          </a:prstGeom>
+          <a:noFill/>
+        </p:spPr>
+        <p:txBody>
+          <a:bodyPr wrap="square" lIns="0" rIns="0" tIns="0" bIns="0">
+            <a:spAutoFit/>
+          </a:bodyPr>
+          <a:lstStyle/>
+          <a:p>
+            <a:pPr algn="r">
+              <a:lnSpc>
+                <a:spcPts val="1920"/>
+              </a:lnSpc>
+              <a:spcAft>
+                <a:spcPts val="0"/>
+              </a:spcAft>
+            </a:pPr>
+            <a:r>
+              <a:rPr sz="1500" b="0" i="0">
+                <a:solidFill>
+                  <a:srgbClr val="212529"/>
+                </a:solidFill>
+                <a:latin typeface="Garamond"/>
+              </a:rPr>
+              <a:t>32.4</a:t>
+            </a:r>
+          </a:p>
+        </p:txBody>
+      </p:sp>
+      <p:sp>
+        <p:nvSpPr>
+          <p:cNvPr id="14" name="TextBox 13"/>
+          <p:cNvSpPr txBox="1"/>
+          <p:nvPr/>
+        </p:nvSpPr>
+        <p:spPr>
+          <a:xfrm>
+            <a:off x="822960" y="3328415"/>
+            <a:ext cx="6949440" cy="384048"/>
+          </a:xfrm>
+          <a:prstGeom prst="rect">
+            <a:avLst/>
+          </a:prstGeom>
+          <a:noFill/>
+        </p:spPr>
+        <p:txBody>
+          <a:bodyPr wrap="square" lIns="0" rIns="0" tIns="0" bIns="0">
+            <a:spAutoFit/>
+          </a:bodyPr>
+          <a:lstStyle/>
+          <a:p>
+            <a:pPr algn="l">
+              <a:lnSpc>
+                <a:spcPts val="1920"/>
+              </a:lnSpc>
+              <a:spcAft>
+                <a:spcPts val="0"/>
+              </a:spcAft>
+            </a:pPr>
+            <a:r>
+              <a:rPr sz="1500" b="0" i="0">
+                <a:solidFill>
+                  <a:srgbClr val="212529"/>
+                </a:solidFill>
+                <a:latin typeface="Garamond"/>
+              </a:rPr>
+              <a:t>Sales, office and manual</a:t>
+            </a:r>
+          </a:p>
+        </p:txBody>
+      </p:sp>
+      <p:sp>
+        <p:nvSpPr>
+          <p:cNvPr id="15" name="TextBox 14"/>
+          <p:cNvSpPr txBox="1"/>
+          <p:nvPr/>
+        </p:nvSpPr>
+        <p:spPr>
+          <a:xfrm>
+            <a:off x="7955279" y="3328415"/>
+            <a:ext cx="2011680" cy="384048"/>
+          </a:xfrm>
+          <a:prstGeom prst="rect">
+            <a:avLst/>
+          </a:prstGeom>
+          <a:noFill/>
+        </p:spPr>
+        <p:txBody>
+          <a:bodyPr wrap="square" lIns="0" rIns="0" tIns="0" bIns="0">
+            <a:spAutoFit/>
+          </a:bodyPr>
+          <a:lstStyle/>
+          <a:p>
+            <a:pPr algn="r">
+              <a:lnSpc>
+                <a:spcPts val="1920"/>
+              </a:lnSpc>
+              <a:spcAft>
+                <a:spcPts val="0"/>
+              </a:spcAft>
+            </a:pPr>
+            <a:r>
+              <a:rPr sz="1500" b="0" i="0">
+                <a:solidFill>
+                  <a:srgbClr val="212529"/>
+                </a:solidFill>
+                <a:latin typeface="Garamond"/>
+              </a:rPr>
+              <a:t>36.5</a:t>
+            </a:r>
+          </a:p>
+        </p:txBody>
+      </p:sp>
+      <p:cxnSp>
+        <p:nvCxnSpPr>
+          <p:cNvPr id="16" name="Connector 15"/>
+          <p:cNvCxnSpPr/>
+          <p:nvPr/>
+        </p:nvCxnSpPr>
+        <p:spPr>
+          <a:xfrm>
+            <a:off x="822960" y="3730751"/>
+            <a:ext cx="9143999" cy="0"/>
+          </a:xfrm>
+          <a:prstGeom prst="line">
+            <a:avLst/>
+          </a:prstGeom>
+          <a:ln w="8890">
+            <a:solidFill>
+              <a:srgbClr val="212529"/>
+            </a:solidFill>
+          </a:ln>
+          <a:effectLst/>
+        </p:spPr>
+        <p:style>
+          <a:lnRef idx="2">
+            <a:schemeClr val="accent1"/>
+          </a:lnRef>
+          <a:fillRef idx="0">
+            <a:schemeClr val="accent1"/>
+          </a:fillRef>
+          <a:effectRef idx="1">
+            <a:schemeClr val="accent1"/>
+          </a:effectRef>
+          <a:fontRef idx="minor">
+            <a:schemeClr val="tx1"/>
+          </a:fontRef>
+        </p:style>
+      </p:cxnSp>
+      <p:sp>
+        <p:nvSpPr>
+          <p:cNvPr id="17" name="TextBox 16"/>
+          <p:cNvSpPr txBox="1"/>
+          <p:nvPr/>
+        </p:nvSpPr>
+        <p:spPr>
+          <a:xfrm>
+            <a:off x="822960" y="3840479"/>
+            <a:ext cx="6949440" cy="384048"/>
+          </a:xfrm>
+          <a:prstGeom prst="rect">
+            <a:avLst/>
+          </a:prstGeom>
+          <a:noFill/>
+        </p:spPr>
+        <p:txBody>
+          <a:bodyPr wrap="square" lIns="0" rIns="0" tIns="0" bIns="0">
+            <a:spAutoFit/>
+          </a:bodyPr>
+          <a:lstStyle/>
+          <a:p>
+            <a:pPr algn="l">
+              <a:lnSpc>
+                <a:spcPts val="1920"/>
+              </a:lnSpc>
+              <a:spcAft>
+                <a:spcPts val="0"/>
+              </a:spcAft>
+            </a:pPr>
+            <a:r>
+              <a:rPr sz="1500" b="0" i="0">
+                <a:solidFill>
+                  <a:srgbClr val="8F2B36"/>
+                </a:solidFill>
+                <a:latin typeface="Garamond"/>
+              </a:rPr>
+              <a:t>Memo: occupations where fewer than half of US workers hold a college degree (in red)</a:t>
+            </a:r>
+          </a:p>
+        </p:txBody>
+      </p:sp>
+      <p:sp>
+        <p:nvSpPr>
+          <p:cNvPr id="18" name="TextBox 17"/>
+          <p:cNvSpPr txBox="1"/>
+          <p:nvPr/>
+        </p:nvSpPr>
+        <p:spPr>
+          <a:xfrm>
+            <a:off x="7955279" y="3840479"/>
+            <a:ext cx="2011680" cy="384048"/>
+          </a:xfrm>
+          <a:prstGeom prst="rect">
+            <a:avLst/>
+          </a:prstGeom>
+          <a:noFill/>
+        </p:spPr>
+        <p:txBody>
+          <a:bodyPr wrap="square" lIns="0" rIns="0" tIns="0" bIns="0">
+            <a:spAutoFit/>
+          </a:bodyPr>
+          <a:lstStyle/>
+          <a:p>
+            <a:pPr algn="r">
+              <a:lnSpc>
+                <a:spcPts val="1920"/>
+              </a:lnSpc>
+              <a:spcAft>
+                <a:spcPts val="0"/>
+              </a:spcAft>
+            </a:pPr>
+            <a:r>
+              <a:rPr sz="1500" b="1" i="0">
+                <a:solidFill>
+                  <a:srgbClr val="8F2B36"/>
+                </a:solidFill>
+                <a:latin typeface="Garamond"/>
+              </a:rPr>
+              <a:t>36.3</a:t>
+            </a:r>
+          </a:p>
+        </p:txBody>
+      </p:sp>
+      <p:cxnSp>
+        <p:nvCxnSpPr>
+          <p:cNvPr id="19" name="Connector 18"/>
+          <p:cNvCxnSpPr/>
+          <p:nvPr/>
+        </p:nvCxnSpPr>
+        <p:spPr>
+          <a:xfrm>
+            <a:off x="822960" y="4261103"/>
+            <a:ext cx="9143999" cy="0"/>
+          </a:xfrm>
+          <a:prstGeom prst="line">
+            <a:avLst/>
+          </a:prstGeom>
+          <a:ln w="16510">
+            <a:solidFill>
+              <a:srgbClr val="212529"/>
+            </a:solidFill>
+          </a:ln>
+          <a:effectLst/>
+        </p:spPr>
+        <p:style>
+          <a:lnRef idx="2">
+            <a:schemeClr val="accent1"/>
+          </a:lnRef>
+          <a:fillRef idx="0">
+            <a:schemeClr val="accent1"/>
+          </a:fillRef>
+          <a:effectRef idx="1">
+            <a:schemeClr val="accent1"/>
+          </a:effectRef>
+          <a:fontRef idx="minor">
+            <a:schemeClr val="tx1"/>
+          </a:fontRef>
+        </p:style>
+      </p:cxnSp>
+      <p:sp>
+        <p:nvSpPr>
+          <p:cNvPr id="20" name="TextBox 19"/>
+          <p:cNvSpPr txBox="1"/>
+          <p:nvPr/>
+        </p:nvSpPr>
+        <p:spPr>
+          <a:xfrm>
+            <a:off x="822960" y="4498847"/>
+            <a:ext cx="10789920" cy="1097280"/>
+          </a:xfrm>
+          <a:prstGeom prst="rect">
+            <a:avLst/>
+          </a:prstGeom>
+          <a:noFill/>
+        </p:spPr>
+        <p:txBody>
+          <a:bodyPr wrap="square" lIns="0" rIns="0" tIns="0" bIns="0">
+            <a:spAutoFit/>
+          </a:bodyPr>
+          <a:lstStyle/>
+          <a:p>
+            <a:pPr algn="l">
+              <a:lnSpc>
+                <a:spcPts val="1664"/>
+              </a:lnSpc>
+              <a:spcAft>
+                <a:spcPts val="0"/>
+              </a:spcAft>
+            </a:pPr>
+            <a:r>
+              <a:rPr sz="1300" b="0" i="0">
+                <a:solidFill>
+                  <a:srgbClr val="6B7480"/>
+                </a:solidFill>
+                <a:latin typeface="Garamond"/>
+              </a:rPr>
+              <a:t>Calendar 2020–2024; 344 employed leavers. The college-degree share of each destination occupation is computed among all employed US workers aged 25–64 in the same ASEC files, 2021–2025. 31.2 of the 36.3 red points sit in the sales, office and manual group; 5.1 in professional occupations.</a:t>
+            </a:r>
+          </a:p>
+        </p:txBody>
+      </p:sp>
+      <p:sp>
+        <p:nvSpPr>
+          <p:cNvPr id="21" name="Rounded Rectangle 20">
+            <a:hlinkClick action="ppaction://hlinksldjump" r:id="rId2"/>
           </p:cNvPr>
           <p:cNvSpPr/>
           <p:nvPr/>
@@ -20457,7 +20513,7 @@
                 </a:solidFill>
                 <a:latin typeface="Garamond"/>
               </a:rPr>
-              <a:t>Linear probability model, fixed-effects variants</a:t>
+              <a:t>Is the teacher group constant across code changes?</a:t>
             </a:r>
           </a:p>
         </p:txBody>
@@ -20497,42 +20553,30 @@
           </a:p>
         </p:txBody>
       </p:sp>
-      <p:cxnSp>
-        <p:nvCxnSpPr>
-          <p:cNvPr id="4" name="Connector 3"/>
-          <p:cNvCxnSpPr/>
-          <p:nvPr/>
-        </p:nvCxnSpPr>
-        <p:spPr>
-          <a:xfrm>
-            <a:off x="1005840" y="1298448"/>
-            <a:ext cx="9509760" cy="0"/>
-          </a:xfrm>
-          <a:prstGeom prst="line">
-            <a:avLst/>
-          </a:prstGeom>
-          <a:ln w="16510">
-            <a:solidFill>
-              <a:srgbClr val="212529"/>
-            </a:solidFill>
-          </a:ln>
-          <a:effectLst/>
-        </p:spPr>
-        <p:style>
-          <a:lnRef idx="2">
-            <a:schemeClr val="accent1"/>
-          </a:lnRef>
-          <a:fillRef idx="0">
-            <a:schemeClr val="accent1"/>
-          </a:fillRef>
-          <a:effectRef idx="1">
-            <a:schemeClr val="accent1"/>
-          </a:effectRef>
-          <a:fontRef idx="minor">
-            <a:schemeClr val="tx1"/>
-          </a:fontRef>
-        </p:style>
-      </p:cxnSp>
+      <p:pic>
+        <p:nvPicPr>
+          <p:cNvPr id="4" name="Picture 3" descr="codes_narrow.png"/>
+          <p:cNvPicPr>
+            <a:picLocks noChangeAspect="1"/>
+          </p:cNvPicPr>
+          <p:nvPr/>
+        </p:nvPicPr>
+        <p:blipFill>
+          <a:blip r:embed="rId2"/>
+          <a:stretch>
+            <a:fillRect/>
+          </a:stretch>
+        </p:blipFill>
+        <p:spPr>
+          <a:xfrm>
+            <a:off x="1119260" y="1051560"/>
+            <a:ext cx="9922998" cy="4526280"/>
+          </a:xfrm>
+          <a:prstGeom prst="rect">
+            <a:avLst/>
+          </a:prstGeom>
+        </p:spPr>
+      </p:pic>
       <p:sp>
         <p:nvSpPr>
           <p:cNvPr id="5" name="TextBox 4"/>
@@ -20541,2918 +20585,53 @@
         </p:nvSpPr>
         <p:spPr>
           <a:xfrm>
-            <a:off x="5029200" y="1371600"/>
-            <a:ext cx="5486400" cy="274320"/>
-          </a:xfrm>
-          <a:prstGeom prst="rect">
-            <a:avLst/>
-          </a:prstGeom>
-          <a:noFill/>
-        </p:spPr>
-        <p:txBody>
-          <a:bodyPr wrap="square" lIns="0" rIns="0" tIns="0" bIns="0">
-            <a:spAutoFit/>
-          </a:bodyPr>
-          <a:lstStyle/>
-          <a:p>
-            <a:pPr algn="ctr">
-              <a:lnSpc>
-                <a:spcPts val="1600"/>
-              </a:lnSpc>
-              <a:spcAft>
-                <a:spcPts val="0"/>
-              </a:spcAft>
-            </a:pPr>
-            <a:r>
-              <a:rPr sz="1250" b="0" i="0">
+            <a:off x="822960" y="5806440"/>
+            <a:ext cx="10789920" cy="822960"/>
+          </a:xfrm>
+          <a:prstGeom prst="rect">
+            <a:avLst/>
+          </a:prstGeom>
+          <a:noFill/>
+        </p:spPr>
+        <p:txBody>
+          <a:bodyPr wrap="square" lIns="0" rIns="0" tIns="0" bIns="0">
+            <a:spAutoFit/>
+          </a:bodyPr>
+          <a:lstStyle/>
+          <a:p>
+            <a:pPr algn="l">
+              <a:lnSpc>
+                <a:spcPts val="1855"/>
+              </a:lnSpc>
+              <a:spcAft>
+                <a:spcPts val="0"/>
+              </a:spcAft>
+            </a:pPr>
+            <a:r>
+              <a:rPr sz="1450" b="1" i="0">
+                <a:solidFill>
+                  <a:srgbClr val="102D5E"/>
+                </a:solidFill>
+                <a:latin typeface="Garamond"/>
+              </a:rPr>
+              <a:t>Key message.  </a:t>
+            </a:r>
+            <a:r>
+              <a:rPr sz="1450" b="0" i="0">
                 <a:solidFill>
                   <a:srgbClr val="212529"/>
                 </a:solidFill>
                 <a:latin typeface="Garamond"/>
               </a:rPr>
-              <a:t>Dependent variable: left teaching (×100)</a:t>
-            </a:r>
-          </a:p>
-        </p:txBody>
-      </p:sp>
-      <p:cxnSp>
-        <p:nvCxnSpPr>
-          <p:cNvPr id="6" name="Connector 5"/>
-          <p:cNvCxnSpPr/>
-          <p:nvPr/>
-        </p:nvCxnSpPr>
-        <p:spPr>
-          <a:xfrm>
-            <a:off x="5029200" y="1700784"/>
-            <a:ext cx="5486400" cy="0"/>
-          </a:xfrm>
-          <a:prstGeom prst="line">
-            <a:avLst/>
-          </a:prstGeom>
-          <a:ln w="8890">
-            <a:solidFill>
-              <a:srgbClr val="212529"/>
-            </a:solidFill>
-          </a:ln>
-          <a:effectLst/>
-        </p:spPr>
-        <p:style>
-          <a:lnRef idx="2">
-            <a:schemeClr val="accent1"/>
-          </a:lnRef>
-          <a:fillRef idx="0">
-            <a:schemeClr val="accent1"/>
-          </a:fillRef>
-          <a:effectRef idx="1">
-            <a:schemeClr val="accent1"/>
-          </a:effectRef>
-          <a:fontRef idx="minor">
-            <a:schemeClr val="tx1"/>
-          </a:fontRef>
-        </p:style>
-      </p:cxnSp>
-      <p:sp>
-        <p:nvSpPr>
-          <p:cNvPr id="7" name="TextBox 6"/>
-          <p:cNvSpPr txBox="1"/>
-          <p:nvPr/>
-        </p:nvSpPr>
-        <p:spPr>
-          <a:xfrm>
-            <a:off x="5029200" y="1764792"/>
-            <a:ext cx="1691640" cy="274320"/>
-          </a:xfrm>
-          <a:prstGeom prst="rect">
-            <a:avLst/>
-          </a:prstGeom>
-          <a:noFill/>
-        </p:spPr>
-        <p:txBody>
-          <a:bodyPr wrap="square" lIns="0" rIns="0" tIns="0" bIns="0">
-            <a:spAutoFit/>
-          </a:bodyPr>
-          <a:lstStyle/>
-          <a:p>
-            <a:pPr algn="r">
-              <a:lnSpc>
-                <a:spcPts val="1600"/>
-              </a:lnSpc>
-              <a:spcAft>
-                <a:spcPts val="0"/>
-              </a:spcAft>
-            </a:pPr>
-            <a:r>
-              <a:rPr sz="1250" b="1" i="0">
-                <a:solidFill>
-                  <a:srgbClr val="212529"/>
-                </a:solidFill>
-                <a:latin typeface="Garamond"/>
-              </a:rPr>
-              <a:t>(1)</a:t>
-            </a:r>
-          </a:p>
-        </p:txBody>
-      </p:sp>
-      <p:sp>
-        <p:nvSpPr>
-          <p:cNvPr id="8" name="TextBox 7"/>
-          <p:cNvSpPr txBox="1"/>
-          <p:nvPr/>
-        </p:nvSpPr>
-        <p:spPr>
-          <a:xfrm>
-            <a:off x="6903720" y="1764792"/>
-            <a:ext cx="1691640" cy="274320"/>
-          </a:xfrm>
-          <a:prstGeom prst="rect">
-            <a:avLst/>
-          </a:prstGeom>
-          <a:noFill/>
-        </p:spPr>
-        <p:txBody>
-          <a:bodyPr wrap="square" lIns="0" rIns="0" tIns="0" bIns="0">
-            <a:spAutoFit/>
-          </a:bodyPr>
-          <a:lstStyle/>
-          <a:p>
-            <a:pPr algn="r">
-              <a:lnSpc>
-                <a:spcPts val="1600"/>
-              </a:lnSpc>
-              <a:spcAft>
-                <a:spcPts val="0"/>
-              </a:spcAft>
-            </a:pPr>
-            <a:r>
-              <a:rPr sz="1250" b="1" i="0">
-                <a:solidFill>
-                  <a:srgbClr val="212529"/>
-                </a:solidFill>
-                <a:latin typeface="Garamond"/>
-              </a:rPr>
-              <a:t>(2)</a:t>
-            </a:r>
-          </a:p>
-        </p:txBody>
-      </p:sp>
-      <p:sp>
-        <p:nvSpPr>
-          <p:cNvPr id="9" name="TextBox 8"/>
-          <p:cNvSpPr txBox="1"/>
-          <p:nvPr/>
-        </p:nvSpPr>
-        <p:spPr>
-          <a:xfrm>
-            <a:off x="8778240" y="1764792"/>
-            <a:ext cx="1691640" cy="274320"/>
-          </a:xfrm>
-          <a:prstGeom prst="rect">
-            <a:avLst/>
-          </a:prstGeom>
-          <a:noFill/>
-        </p:spPr>
-        <p:txBody>
-          <a:bodyPr wrap="square" lIns="0" rIns="0" tIns="0" bIns="0">
-            <a:spAutoFit/>
-          </a:bodyPr>
-          <a:lstStyle/>
-          <a:p>
-            <a:pPr algn="r">
-              <a:lnSpc>
-                <a:spcPts val="1600"/>
-              </a:lnSpc>
-              <a:spcAft>
-                <a:spcPts val="0"/>
-              </a:spcAft>
-            </a:pPr>
-            <a:r>
-              <a:rPr sz="1250" b="1" i="0">
-                <a:solidFill>
-                  <a:srgbClr val="212529"/>
-                </a:solidFill>
-                <a:latin typeface="Garamond"/>
-              </a:rPr>
-              <a:t>(3)</a:t>
-            </a:r>
-          </a:p>
-        </p:txBody>
-      </p:sp>
-      <p:cxnSp>
-        <p:nvCxnSpPr>
-          <p:cNvPr id="10" name="Connector 9"/>
-          <p:cNvCxnSpPr/>
-          <p:nvPr/>
-        </p:nvCxnSpPr>
-        <p:spPr>
-          <a:xfrm>
-            <a:off x="1005840" y="2093976"/>
-            <a:ext cx="9509760" cy="0"/>
-          </a:xfrm>
-          <a:prstGeom prst="line">
-            <a:avLst/>
-          </a:prstGeom>
-          <a:ln w="8890">
-            <a:solidFill>
-              <a:srgbClr val="212529"/>
-            </a:solidFill>
-          </a:ln>
-          <a:effectLst/>
-        </p:spPr>
-        <p:style>
-          <a:lnRef idx="2">
-            <a:schemeClr val="accent1"/>
-          </a:lnRef>
-          <a:fillRef idx="0">
-            <a:schemeClr val="accent1"/>
-          </a:fillRef>
-          <a:effectRef idx="1">
-            <a:schemeClr val="accent1"/>
-          </a:effectRef>
-          <a:fontRef idx="minor">
-            <a:schemeClr val="tx1"/>
-          </a:fontRef>
-        </p:style>
-      </p:cxnSp>
-      <p:sp>
-        <p:nvSpPr>
-          <p:cNvPr id="11" name="TextBox 10"/>
-          <p:cNvSpPr txBox="1"/>
-          <p:nvPr/>
-        </p:nvSpPr>
-        <p:spPr>
-          <a:xfrm>
-            <a:off x="1005840" y="2176272"/>
-            <a:ext cx="3840480" cy="274320"/>
-          </a:xfrm>
-          <a:prstGeom prst="rect">
-            <a:avLst/>
-          </a:prstGeom>
-          <a:noFill/>
-        </p:spPr>
-        <p:txBody>
-          <a:bodyPr wrap="square" lIns="0" rIns="0" tIns="0" bIns="0">
-            <a:spAutoFit/>
-          </a:bodyPr>
-          <a:lstStyle/>
-          <a:p>
-            <a:pPr algn="l">
-              <a:lnSpc>
-                <a:spcPts val="1600"/>
-              </a:lnSpc>
-              <a:spcAft>
-                <a:spcPts val="0"/>
-              </a:spcAft>
-            </a:pPr>
-            <a:r>
-              <a:rPr sz="1250" b="0" i="0">
-                <a:solidFill>
-                  <a:srgbClr val="212529"/>
-                </a:solidFill>
-                <a:latin typeface="Garamond"/>
-              </a:rPr>
-              <a:t>Full-year contract</a:t>
-            </a:r>
-          </a:p>
-        </p:txBody>
-      </p:sp>
-      <p:sp>
-        <p:nvSpPr>
-          <p:cNvPr id="12" name="TextBox 11"/>
-          <p:cNvSpPr txBox="1"/>
-          <p:nvPr/>
-        </p:nvSpPr>
-        <p:spPr>
-          <a:xfrm>
-            <a:off x="5029200" y="2176272"/>
-            <a:ext cx="1691640" cy="274320"/>
-          </a:xfrm>
-          <a:prstGeom prst="rect">
-            <a:avLst/>
-          </a:prstGeom>
-          <a:noFill/>
-        </p:spPr>
-        <p:txBody>
-          <a:bodyPr wrap="square" lIns="0" rIns="0" tIns="0" bIns="0">
-            <a:spAutoFit/>
-          </a:bodyPr>
-          <a:lstStyle/>
-          <a:p>
-            <a:pPr algn="r">
-              <a:lnSpc>
-                <a:spcPts val="1600"/>
-              </a:lnSpc>
-              <a:spcAft>
-                <a:spcPts val="0"/>
-              </a:spcAft>
-            </a:pPr>
-            <a:r>
-              <a:rPr sz="1250" b="0" i="0">
-                <a:solidFill>
-                  <a:srgbClr val="212529"/>
-                </a:solidFill>
-                <a:latin typeface="Garamond"/>
-              </a:rPr>
-              <a:t>−11.54***</a:t>
-            </a:r>
-          </a:p>
-        </p:txBody>
-      </p:sp>
-      <p:sp>
-        <p:nvSpPr>
-          <p:cNvPr id="13" name="TextBox 12"/>
-          <p:cNvSpPr txBox="1"/>
-          <p:nvPr/>
-        </p:nvSpPr>
-        <p:spPr>
-          <a:xfrm>
-            <a:off x="6903720" y="2176272"/>
-            <a:ext cx="1691640" cy="274320"/>
-          </a:xfrm>
-          <a:prstGeom prst="rect">
-            <a:avLst/>
-          </a:prstGeom>
-          <a:noFill/>
-        </p:spPr>
-        <p:txBody>
-          <a:bodyPr wrap="square" lIns="0" rIns="0" tIns="0" bIns="0">
-            <a:spAutoFit/>
-          </a:bodyPr>
-          <a:lstStyle/>
-          <a:p>
-            <a:pPr algn="r">
-              <a:lnSpc>
-                <a:spcPts val="1600"/>
-              </a:lnSpc>
-              <a:spcAft>
-                <a:spcPts val="0"/>
-              </a:spcAft>
-            </a:pPr>
-            <a:r>
-              <a:rPr sz="1250" b="0" i="0">
-                <a:solidFill>
-                  <a:srgbClr val="212529"/>
-                </a:solidFill>
-                <a:latin typeface="Garamond"/>
-              </a:rPr>
-              <a:t>−11.55***</a:t>
-            </a:r>
-          </a:p>
-        </p:txBody>
-      </p:sp>
-      <p:sp>
-        <p:nvSpPr>
-          <p:cNvPr id="14" name="TextBox 13"/>
-          <p:cNvSpPr txBox="1"/>
-          <p:nvPr/>
-        </p:nvSpPr>
-        <p:spPr>
-          <a:xfrm>
-            <a:off x="8778240" y="2176272"/>
-            <a:ext cx="1691640" cy="274320"/>
-          </a:xfrm>
-          <a:prstGeom prst="rect">
-            <a:avLst/>
-          </a:prstGeom>
-          <a:noFill/>
-        </p:spPr>
-        <p:txBody>
-          <a:bodyPr wrap="square" lIns="0" rIns="0" tIns="0" bIns="0">
-            <a:spAutoFit/>
-          </a:bodyPr>
-          <a:lstStyle/>
-          <a:p>
-            <a:pPr algn="r">
-              <a:lnSpc>
-                <a:spcPts val="1600"/>
-              </a:lnSpc>
-              <a:spcAft>
-                <a:spcPts val="0"/>
-              </a:spcAft>
-            </a:pPr>
-            <a:r>
-              <a:rPr sz="1250" b="0" i="0">
-                <a:solidFill>
-                  <a:srgbClr val="212529"/>
-                </a:solidFill>
-                <a:latin typeface="Garamond"/>
-              </a:rPr>
-              <a:t>−11.65***</a:t>
-            </a:r>
-          </a:p>
-        </p:txBody>
-      </p:sp>
-      <p:sp>
-        <p:nvSpPr>
-          <p:cNvPr id="15" name="TextBox 14"/>
-          <p:cNvSpPr txBox="1"/>
-          <p:nvPr/>
-        </p:nvSpPr>
-        <p:spPr>
-          <a:xfrm>
-            <a:off x="5029200" y="2400300"/>
-            <a:ext cx="1691640" cy="274320"/>
-          </a:xfrm>
-          <a:prstGeom prst="rect">
-            <a:avLst/>
-          </a:prstGeom>
-          <a:noFill/>
-        </p:spPr>
-        <p:txBody>
-          <a:bodyPr wrap="square" lIns="0" rIns="0" tIns="0" bIns="0">
-            <a:spAutoFit/>
-          </a:bodyPr>
-          <a:lstStyle/>
-          <a:p>
-            <a:pPr algn="r">
-              <a:lnSpc>
-                <a:spcPts val="1408"/>
-              </a:lnSpc>
-              <a:spcAft>
-                <a:spcPts val="0"/>
-              </a:spcAft>
-            </a:pPr>
-            <a:r>
-              <a:rPr sz="1100" b="0" i="0">
-                <a:solidFill>
-                  <a:srgbClr val="6B7480"/>
-                </a:solidFill>
-                <a:latin typeface="Garamond"/>
-              </a:rPr>
-              <a:t>(0.67)</a:t>
-            </a:r>
-          </a:p>
-        </p:txBody>
-      </p:sp>
-      <p:sp>
-        <p:nvSpPr>
-          <p:cNvPr id="16" name="TextBox 15"/>
-          <p:cNvSpPr txBox="1"/>
-          <p:nvPr/>
-        </p:nvSpPr>
-        <p:spPr>
-          <a:xfrm>
-            <a:off x="6903720" y="2400300"/>
-            <a:ext cx="1691640" cy="274320"/>
-          </a:xfrm>
-          <a:prstGeom prst="rect">
-            <a:avLst/>
-          </a:prstGeom>
-          <a:noFill/>
-        </p:spPr>
-        <p:txBody>
-          <a:bodyPr wrap="square" lIns="0" rIns="0" tIns="0" bIns="0">
-            <a:spAutoFit/>
-          </a:bodyPr>
-          <a:lstStyle/>
-          <a:p>
-            <a:pPr algn="r">
-              <a:lnSpc>
-                <a:spcPts val="1408"/>
-              </a:lnSpc>
-              <a:spcAft>
-                <a:spcPts val="0"/>
-              </a:spcAft>
-            </a:pPr>
-            <a:r>
-              <a:rPr sz="1100" b="0" i="0">
-                <a:solidFill>
-                  <a:srgbClr val="6B7480"/>
-                </a:solidFill>
-                <a:latin typeface="Garamond"/>
-              </a:rPr>
-              <a:t>(0.66)</a:t>
-            </a:r>
-          </a:p>
-        </p:txBody>
-      </p:sp>
-      <p:sp>
-        <p:nvSpPr>
-          <p:cNvPr id="17" name="TextBox 16"/>
-          <p:cNvSpPr txBox="1"/>
-          <p:nvPr/>
-        </p:nvSpPr>
-        <p:spPr>
-          <a:xfrm>
-            <a:off x="8778240" y="2400300"/>
-            <a:ext cx="1691640" cy="274320"/>
-          </a:xfrm>
-          <a:prstGeom prst="rect">
-            <a:avLst/>
-          </a:prstGeom>
-          <a:noFill/>
-        </p:spPr>
-        <p:txBody>
-          <a:bodyPr wrap="square" lIns="0" rIns="0" tIns="0" bIns="0">
-            <a:spAutoFit/>
-          </a:bodyPr>
-          <a:lstStyle/>
-          <a:p>
-            <a:pPr algn="r">
-              <a:lnSpc>
-                <a:spcPts val="1408"/>
-              </a:lnSpc>
-              <a:spcAft>
-                <a:spcPts val="0"/>
-              </a:spcAft>
-            </a:pPr>
-            <a:r>
-              <a:rPr sz="1100" b="0" i="0">
-                <a:solidFill>
-                  <a:srgbClr val="6B7480"/>
-                </a:solidFill>
-                <a:latin typeface="Garamond"/>
-              </a:rPr>
-              <a:t>(0.67)</a:t>
-            </a:r>
-          </a:p>
-        </p:txBody>
-      </p:sp>
-      <p:sp>
-        <p:nvSpPr>
-          <p:cNvPr id="18" name="TextBox 17"/>
-          <p:cNvSpPr txBox="1"/>
-          <p:nvPr/>
-        </p:nvSpPr>
-        <p:spPr>
-          <a:xfrm>
-            <a:off x="1005840" y="2633472"/>
-            <a:ext cx="3840480" cy="274320"/>
-          </a:xfrm>
-          <a:prstGeom prst="rect">
-            <a:avLst/>
-          </a:prstGeom>
-          <a:noFill/>
-        </p:spPr>
-        <p:txBody>
-          <a:bodyPr wrap="square" lIns="0" rIns="0" tIns="0" bIns="0">
-            <a:spAutoFit/>
-          </a:bodyPr>
-          <a:lstStyle/>
-          <a:p>
-            <a:pPr algn="l">
-              <a:lnSpc>
-                <a:spcPts val="1600"/>
-              </a:lnSpc>
-              <a:spcAft>
-                <a:spcPts val="0"/>
-              </a:spcAft>
-            </a:pPr>
-            <a:r>
-              <a:rPr sz="1250" b="0" i="0">
-                <a:solidFill>
-                  <a:srgbClr val="212529"/>
-                </a:solidFill>
-                <a:latin typeface="Garamond"/>
-              </a:rPr>
-              <a:t>Part-time contract</a:t>
-            </a:r>
-          </a:p>
-        </p:txBody>
-      </p:sp>
-      <p:sp>
-        <p:nvSpPr>
-          <p:cNvPr id="19" name="TextBox 18"/>
-          <p:cNvSpPr txBox="1"/>
-          <p:nvPr/>
-        </p:nvSpPr>
-        <p:spPr>
-          <a:xfrm>
-            <a:off x="5029200" y="2633472"/>
-            <a:ext cx="1691640" cy="274320"/>
-          </a:xfrm>
-          <a:prstGeom prst="rect">
-            <a:avLst/>
-          </a:prstGeom>
-          <a:noFill/>
-        </p:spPr>
-        <p:txBody>
-          <a:bodyPr wrap="square" lIns="0" rIns="0" tIns="0" bIns="0">
-            <a:spAutoFit/>
-          </a:bodyPr>
-          <a:lstStyle/>
-          <a:p>
-            <a:pPr algn="r">
-              <a:lnSpc>
-                <a:spcPts val="1600"/>
-              </a:lnSpc>
-              <a:spcAft>
-                <a:spcPts val="0"/>
-              </a:spcAft>
-            </a:pPr>
-            <a:r>
-              <a:rPr sz="1250" b="0" i="0">
-                <a:solidFill>
-                  <a:srgbClr val="212529"/>
-                </a:solidFill>
-                <a:latin typeface="Garamond"/>
-              </a:rPr>
-              <a:t>+8.67***</a:t>
-            </a:r>
-          </a:p>
-        </p:txBody>
-      </p:sp>
-      <p:sp>
-        <p:nvSpPr>
-          <p:cNvPr id="20" name="TextBox 19"/>
-          <p:cNvSpPr txBox="1"/>
-          <p:nvPr/>
-        </p:nvSpPr>
-        <p:spPr>
-          <a:xfrm>
-            <a:off x="6903720" y="2633472"/>
-            <a:ext cx="1691640" cy="274320"/>
-          </a:xfrm>
-          <a:prstGeom prst="rect">
-            <a:avLst/>
-          </a:prstGeom>
-          <a:noFill/>
-        </p:spPr>
-        <p:txBody>
-          <a:bodyPr wrap="square" lIns="0" rIns="0" tIns="0" bIns="0">
-            <a:spAutoFit/>
-          </a:bodyPr>
-          <a:lstStyle/>
-          <a:p>
-            <a:pPr algn="r">
-              <a:lnSpc>
-                <a:spcPts val="1600"/>
-              </a:lnSpc>
-              <a:spcAft>
-                <a:spcPts val="0"/>
-              </a:spcAft>
-            </a:pPr>
-            <a:r>
-              <a:rPr sz="1250" b="0" i="0">
-                <a:solidFill>
-                  <a:srgbClr val="212529"/>
-                </a:solidFill>
-                <a:latin typeface="Garamond"/>
-              </a:rPr>
-              <a:t>+8.67***</a:t>
-            </a:r>
-          </a:p>
-        </p:txBody>
-      </p:sp>
-      <p:sp>
-        <p:nvSpPr>
-          <p:cNvPr id="21" name="TextBox 20"/>
-          <p:cNvSpPr txBox="1"/>
-          <p:nvPr/>
-        </p:nvSpPr>
-        <p:spPr>
-          <a:xfrm>
-            <a:off x="8778240" y="2633472"/>
-            <a:ext cx="1691640" cy="274320"/>
-          </a:xfrm>
-          <a:prstGeom prst="rect">
-            <a:avLst/>
-          </a:prstGeom>
-          <a:noFill/>
-        </p:spPr>
-        <p:txBody>
-          <a:bodyPr wrap="square" lIns="0" rIns="0" tIns="0" bIns="0">
-            <a:spAutoFit/>
-          </a:bodyPr>
-          <a:lstStyle/>
-          <a:p>
-            <a:pPr algn="r">
-              <a:lnSpc>
-                <a:spcPts val="1600"/>
-              </a:lnSpc>
-              <a:spcAft>
-                <a:spcPts val="0"/>
-              </a:spcAft>
-            </a:pPr>
-            <a:r>
-              <a:rPr sz="1250" b="0" i="0">
-                <a:solidFill>
-                  <a:srgbClr val="212529"/>
-                </a:solidFill>
-                <a:latin typeface="Garamond"/>
-              </a:rPr>
-              <a:t>+8.63***</a:t>
-            </a:r>
-          </a:p>
-        </p:txBody>
-      </p:sp>
-      <p:sp>
-        <p:nvSpPr>
-          <p:cNvPr id="22" name="TextBox 21"/>
-          <p:cNvSpPr txBox="1"/>
-          <p:nvPr/>
-        </p:nvSpPr>
-        <p:spPr>
-          <a:xfrm>
-            <a:off x="5029200" y="2857500"/>
-            <a:ext cx="1691640" cy="274320"/>
-          </a:xfrm>
-          <a:prstGeom prst="rect">
-            <a:avLst/>
-          </a:prstGeom>
-          <a:noFill/>
-        </p:spPr>
-        <p:txBody>
-          <a:bodyPr wrap="square" lIns="0" rIns="0" tIns="0" bIns="0">
-            <a:spAutoFit/>
-          </a:bodyPr>
-          <a:lstStyle/>
-          <a:p>
-            <a:pPr algn="r">
-              <a:lnSpc>
-                <a:spcPts val="1408"/>
-              </a:lnSpc>
-              <a:spcAft>
-                <a:spcPts val="0"/>
-              </a:spcAft>
-            </a:pPr>
-            <a:r>
-              <a:rPr sz="1100" b="0" i="0">
-                <a:solidFill>
-                  <a:srgbClr val="6B7480"/>
-                </a:solidFill>
-                <a:latin typeface="Garamond"/>
-              </a:rPr>
-              <a:t>(1.09)</a:t>
-            </a:r>
-          </a:p>
-        </p:txBody>
-      </p:sp>
-      <p:sp>
-        <p:nvSpPr>
-          <p:cNvPr id="23" name="TextBox 22"/>
-          <p:cNvSpPr txBox="1"/>
-          <p:nvPr/>
-        </p:nvSpPr>
-        <p:spPr>
-          <a:xfrm>
-            <a:off x="6903720" y="2857500"/>
-            <a:ext cx="1691640" cy="274320"/>
-          </a:xfrm>
-          <a:prstGeom prst="rect">
-            <a:avLst/>
-          </a:prstGeom>
-          <a:noFill/>
-        </p:spPr>
-        <p:txBody>
-          <a:bodyPr wrap="square" lIns="0" rIns="0" tIns="0" bIns="0">
-            <a:spAutoFit/>
-          </a:bodyPr>
-          <a:lstStyle/>
-          <a:p>
-            <a:pPr algn="r">
-              <a:lnSpc>
-                <a:spcPts val="1408"/>
-              </a:lnSpc>
-              <a:spcAft>
-                <a:spcPts val="0"/>
-              </a:spcAft>
-            </a:pPr>
-            <a:r>
-              <a:rPr sz="1100" b="0" i="0">
-                <a:solidFill>
-                  <a:srgbClr val="6B7480"/>
-                </a:solidFill>
-                <a:latin typeface="Garamond"/>
-              </a:rPr>
-              <a:t>(1.09)</a:t>
-            </a:r>
-          </a:p>
-        </p:txBody>
-      </p:sp>
-      <p:sp>
-        <p:nvSpPr>
-          <p:cNvPr id="24" name="TextBox 23"/>
-          <p:cNvSpPr txBox="1"/>
-          <p:nvPr/>
-        </p:nvSpPr>
-        <p:spPr>
-          <a:xfrm>
-            <a:off x="8778240" y="2857500"/>
-            <a:ext cx="1691640" cy="274320"/>
-          </a:xfrm>
-          <a:prstGeom prst="rect">
-            <a:avLst/>
-          </a:prstGeom>
-          <a:noFill/>
-        </p:spPr>
-        <p:txBody>
-          <a:bodyPr wrap="square" lIns="0" rIns="0" tIns="0" bIns="0">
-            <a:spAutoFit/>
-          </a:bodyPr>
-          <a:lstStyle/>
-          <a:p>
-            <a:pPr algn="r">
-              <a:lnSpc>
-                <a:spcPts val="1408"/>
-              </a:lnSpc>
-              <a:spcAft>
-                <a:spcPts val="0"/>
-              </a:spcAft>
-            </a:pPr>
-            <a:r>
-              <a:rPr sz="1100" b="0" i="0">
-                <a:solidFill>
-                  <a:srgbClr val="6B7480"/>
-                </a:solidFill>
-                <a:latin typeface="Garamond"/>
-              </a:rPr>
-              <a:t>(1.10)</a:t>
-            </a:r>
-          </a:p>
-        </p:txBody>
-      </p:sp>
-      <p:sp>
-        <p:nvSpPr>
-          <p:cNvPr id="25" name="TextBox 24"/>
-          <p:cNvSpPr txBox="1"/>
-          <p:nvPr/>
-        </p:nvSpPr>
-        <p:spPr>
-          <a:xfrm>
-            <a:off x="1005840" y="3090672"/>
-            <a:ext cx="3840480" cy="274320"/>
-          </a:xfrm>
-          <a:prstGeom prst="rect">
-            <a:avLst/>
-          </a:prstGeom>
-          <a:noFill/>
-        </p:spPr>
-        <p:txBody>
-          <a:bodyPr wrap="square" lIns="0" rIns="0" tIns="0" bIns="0">
-            <a:spAutoFit/>
-          </a:bodyPr>
-          <a:lstStyle/>
-          <a:p>
-            <a:pPr algn="l">
-              <a:lnSpc>
-                <a:spcPts val="1600"/>
-              </a:lnSpc>
-              <a:spcAft>
-                <a:spcPts val="0"/>
-              </a:spcAft>
-            </a:pPr>
-            <a:r>
-              <a:rPr sz="1250" b="0" i="0">
-                <a:solidFill>
-                  <a:srgbClr val="212529"/>
-                </a:solidFill>
-                <a:latin typeface="Garamond"/>
-              </a:rPr>
-              <a:t>Employer pension plan</a:t>
-            </a:r>
-          </a:p>
-        </p:txBody>
-      </p:sp>
-      <p:sp>
-        <p:nvSpPr>
-          <p:cNvPr id="26" name="TextBox 25"/>
-          <p:cNvSpPr txBox="1"/>
-          <p:nvPr/>
-        </p:nvSpPr>
-        <p:spPr>
-          <a:xfrm>
-            <a:off x="5029200" y="3090672"/>
-            <a:ext cx="1691640" cy="274320"/>
-          </a:xfrm>
-          <a:prstGeom prst="rect">
-            <a:avLst/>
-          </a:prstGeom>
-          <a:noFill/>
-        </p:spPr>
-        <p:txBody>
-          <a:bodyPr wrap="square" lIns="0" rIns="0" tIns="0" bIns="0">
-            <a:spAutoFit/>
-          </a:bodyPr>
-          <a:lstStyle/>
-          <a:p>
-            <a:pPr algn="r">
-              <a:lnSpc>
-                <a:spcPts val="1600"/>
-              </a:lnSpc>
-              <a:spcAft>
-                <a:spcPts val="0"/>
-              </a:spcAft>
-            </a:pPr>
-            <a:r>
-              <a:rPr sz="1250" b="0" i="0">
-                <a:solidFill>
-                  <a:srgbClr val="212529"/>
-                </a:solidFill>
-                <a:latin typeface="Garamond"/>
-              </a:rPr>
-              <a:t>−2.35***</a:t>
-            </a:r>
-          </a:p>
-        </p:txBody>
-      </p:sp>
-      <p:sp>
-        <p:nvSpPr>
-          <p:cNvPr id="27" name="TextBox 26"/>
-          <p:cNvSpPr txBox="1"/>
-          <p:nvPr/>
-        </p:nvSpPr>
-        <p:spPr>
-          <a:xfrm>
-            <a:off x="6903720" y="3090672"/>
-            <a:ext cx="1691640" cy="274320"/>
-          </a:xfrm>
-          <a:prstGeom prst="rect">
-            <a:avLst/>
-          </a:prstGeom>
-          <a:noFill/>
-        </p:spPr>
-        <p:txBody>
-          <a:bodyPr wrap="square" lIns="0" rIns="0" tIns="0" bIns="0">
-            <a:spAutoFit/>
-          </a:bodyPr>
-          <a:lstStyle/>
-          <a:p>
-            <a:pPr algn="r">
-              <a:lnSpc>
-                <a:spcPts val="1600"/>
-              </a:lnSpc>
-              <a:spcAft>
-                <a:spcPts val="0"/>
-              </a:spcAft>
-            </a:pPr>
-            <a:r>
-              <a:rPr sz="1250" b="0" i="0">
-                <a:solidFill>
-                  <a:srgbClr val="212529"/>
-                </a:solidFill>
-                <a:latin typeface="Garamond"/>
-              </a:rPr>
-              <a:t>−2.33***</a:t>
-            </a:r>
-          </a:p>
-        </p:txBody>
-      </p:sp>
-      <p:sp>
-        <p:nvSpPr>
-          <p:cNvPr id="28" name="TextBox 27"/>
-          <p:cNvSpPr txBox="1"/>
-          <p:nvPr/>
-        </p:nvSpPr>
-        <p:spPr>
-          <a:xfrm>
-            <a:off x="8778240" y="3090672"/>
-            <a:ext cx="1691640" cy="274320"/>
-          </a:xfrm>
-          <a:prstGeom prst="rect">
-            <a:avLst/>
-          </a:prstGeom>
-          <a:noFill/>
-        </p:spPr>
-        <p:txBody>
-          <a:bodyPr wrap="square" lIns="0" rIns="0" tIns="0" bIns="0">
-            <a:spAutoFit/>
-          </a:bodyPr>
-          <a:lstStyle/>
-          <a:p>
-            <a:pPr algn="r">
-              <a:lnSpc>
-                <a:spcPts val="1600"/>
-              </a:lnSpc>
-              <a:spcAft>
-                <a:spcPts val="0"/>
-              </a:spcAft>
-            </a:pPr>
-            <a:r>
-              <a:rPr sz="1250" b="0" i="0">
-                <a:solidFill>
-                  <a:srgbClr val="212529"/>
-                </a:solidFill>
-                <a:latin typeface="Garamond"/>
-              </a:rPr>
-              <a:t>−2.33***</a:t>
-            </a:r>
-          </a:p>
-        </p:txBody>
-      </p:sp>
-      <p:sp>
-        <p:nvSpPr>
-          <p:cNvPr id="29" name="TextBox 28"/>
-          <p:cNvSpPr txBox="1"/>
-          <p:nvPr/>
-        </p:nvSpPr>
-        <p:spPr>
-          <a:xfrm>
-            <a:off x="5029200" y="3314700"/>
-            <a:ext cx="1691640" cy="274320"/>
-          </a:xfrm>
-          <a:prstGeom prst="rect">
-            <a:avLst/>
-          </a:prstGeom>
-          <a:noFill/>
-        </p:spPr>
-        <p:txBody>
-          <a:bodyPr wrap="square" lIns="0" rIns="0" tIns="0" bIns="0">
-            <a:spAutoFit/>
-          </a:bodyPr>
-          <a:lstStyle/>
-          <a:p>
-            <a:pPr algn="r">
-              <a:lnSpc>
-                <a:spcPts val="1408"/>
-              </a:lnSpc>
-              <a:spcAft>
-                <a:spcPts val="0"/>
-              </a:spcAft>
-            </a:pPr>
-            <a:r>
-              <a:rPr sz="1100" b="0" i="0">
-                <a:solidFill>
-                  <a:srgbClr val="6B7480"/>
-                </a:solidFill>
-                <a:latin typeface="Garamond"/>
-              </a:rPr>
-              <a:t>(0.52)</a:t>
-            </a:r>
-          </a:p>
-        </p:txBody>
-      </p:sp>
-      <p:sp>
-        <p:nvSpPr>
-          <p:cNvPr id="30" name="TextBox 29"/>
-          <p:cNvSpPr txBox="1"/>
-          <p:nvPr/>
-        </p:nvSpPr>
-        <p:spPr>
-          <a:xfrm>
-            <a:off x="6903720" y="3314700"/>
-            <a:ext cx="1691640" cy="274320"/>
-          </a:xfrm>
-          <a:prstGeom prst="rect">
-            <a:avLst/>
-          </a:prstGeom>
-          <a:noFill/>
-        </p:spPr>
-        <p:txBody>
-          <a:bodyPr wrap="square" lIns="0" rIns="0" tIns="0" bIns="0">
-            <a:spAutoFit/>
-          </a:bodyPr>
-          <a:lstStyle/>
-          <a:p>
-            <a:pPr algn="r">
-              <a:lnSpc>
-                <a:spcPts val="1408"/>
-              </a:lnSpc>
-              <a:spcAft>
-                <a:spcPts val="0"/>
-              </a:spcAft>
-            </a:pPr>
-            <a:r>
-              <a:rPr sz="1100" b="0" i="0">
-                <a:solidFill>
-                  <a:srgbClr val="6B7480"/>
-                </a:solidFill>
-                <a:latin typeface="Garamond"/>
-              </a:rPr>
-              <a:t>(0.52)</a:t>
-            </a:r>
-          </a:p>
-        </p:txBody>
-      </p:sp>
-      <p:sp>
-        <p:nvSpPr>
-          <p:cNvPr id="31" name="TextBox 30"/>
-          <p:cNvSpPr txBox="1"/>
-          <p:nvPr/>
-        </p:nvSpPr>
-        <p:spPr>
-          <a:xfrm>
-            <a:off x="8778240" y="3314700"/>
-            <a:ext cx="1691640" cy="274320"/>
-          </a:xfrm>
-          <a:prstGeom prst="rect">
-            <a:avLst/>
-          </a:prstGeom>
-          <a:noFill/>
-        </p:spPr>
-        <p:txBody>
-          <a:bodyPr wrap="square" lIns="0" rIns="0" tIns="0" bIns="0">
-            <a:spAutoFit/>
-          </a:bodyPr>
-          <a:lstStyle/>
-          <a:p>
-            <a:pPr algn="r">
-              <a:lnSpc>
-                <a:spcPts val="1408"/>
-              </a:lnSpc>
-              <a:spcAft>
-                <a:spcPts val="0"/>
-              </a:spcAft>
-            </a:pPr>
-            <a:r>
-              <a:rPr sz="1100" b="0" i="0">
-                <a:solidFill>
-                  <a:srgbClr val="6B7480"/>
-                </a:solidFill>
-                <a:latin typeface="Garamond"/>
-              </a:rPr>
-              <a:t>(0.52)</a:t>
-            </a:r>
-          </a:p>
-        </p:txBody>
-      </p:sp>
-      <p:sp>
-        <p:nvSpPr>
-          <p:cNvPr id="32" name="TextBox 31"/>
-          <p:cNvSpPr txBox="1"/>
-          <p:nvPr/>
-        </p:nvSpPr>
-        <p:spPr>
-          <a:xfrm>
-            <a:off x="1005840" y="3547872"/>
-            <a:ext cx="3840480" cy="274320"/>
-          </a:xfrm>
-          <a:prstGeom prst="rect">
-            <a:avLst/>
-          </a:prstGeom>
-          <a:noFill/>
-        </p:spPr>
-        <p:txBody>
-          <a:bodyPr wrap="square" lIns="0" rIns="0" tIns="0" bIns="0">
-            <a:spAutoFit/>
-          </a:bodyPr>
-          <a:lstStyle/>
-          <a:p>
-            <a:pPr algn="l">
-              <a:lnSpc>
-                <a:spcPts val="1600"/>
-              </a:lnSpc>
-              <a:spcAft>
-                <a:spcPts val="0"/>
-              </a:spcAft>
-            </a:pPr>
-            <a:r>
-              <a:rPr sz="1250" b="0" i="0">
-                <a:solidFill>
-                  <a:srgbClr val="212529"/>
-                </a:solidFill>
-                <a:latin typeface="Garamond"/>
-              </a:rPr>
-              <a:t>Public sector</a:t>
-            </a:r>
-          </a:p>
-        </p:txBody>
-      </p:sp>
-      <p:sp>
-        <p:nvSpPr>
-          <p:cNvPr id="33" name="TextBox 32"/>
-          <p:cNvSpPr txBox="1"/>
-          <p:nvPr/>
-        </p:nvSpPr>
-        <p:spPr>
-          <a:xfrm>
-            <a:off x="5029200" y="3547872"/>
-            <a:ext cx="1691640" cy="274320"/>
-          </a:xfrm>
-          <a:prstGeom prst="rect">
-            <a:avLst/>
-          </a:prstGeom>
-          <a:noFill/>
-        </p:spPr>
-        <p:txBody>
-          <a:bodyPr wrap="square" lIns="0" rIns="0" tIns="0" bIns="0">
-            <a:spAutoFit/>
-          </a:bodyPr>
-          <a:lstStyle/>
-          <a:p>
-            <a:pPr algn="r">
-              <a:lnSpc>
-                <a:spcPts val="1600"/>
-              </a:lnSpc>
-              <a:spcAft>
-                <a:spcPts val="0"/>
-              </a:spcAft>
-            </a:pPr>
-            <a:r>
-              <a:rPr sz="1250" b="0" i="0">
-                <a:solidFill>
-                  <a:srgbClr val="212529"/>
-                </a:solidFill>
-                <a:latin typeface="Garamond"/>
-              </a:rPr>
-              <a:t>−2.35***</a:t>
-            </a:r>
-          </a:p>
-        </p:txBody>
-      </p:sp>
-      <p:sp>
-        <p:nvSpPr>
-          <p:cNvPr id="34" name="TextBox 33"/>
-          <p:cNvSpPr txBox="1"/>
-          <p:nvPr/>
-        </p:nvSpPr>
-        <p:spPr>
-          <a:xfrm>
-            <a:off x="6903720" y="3547872"/>
-            <a:ext cx="1691640" cy="274320"/>
-          </a:xfrm>
-          <a:prstGeom prst="rect">
-            <a:avLst/>
-          </a:prstGeom>
-          <a:noFill/>
-        </p:spPr>
-        <p:txBody>
-          <a:bodyPr wrap="square" lIns="0" rIns="0" tIns="0" bIns="0">
-            <a:spAutoFit/>
-          </a:bodyPr>
-          <a:lstStyle/>
-          <a:p>
-            <a:pPr algn="r">
-              <a:lnSpc>
-                <a:spcPts val="1600"/>
-              </a:lnSpc>
-              <a:spcAft>
-                <a:spcPts val="0"/>
-              </a:spcAft>
-            </a:pPr>
-            <a:r>
-              <a:rPr sz="1250" b="0" i="0">
-                <a:solidFill>
-                  <a:srgbClr val="212529"/>
-                </a:solidFill>
-                <a:latin typeface="Garamond"/>
-              </a:rPr>
-              <a:t>−2.38***</a:t>
-            </a:r>
-          </a:p>
-        </p:txBody>
-      </p:sp>
-      <p:sp>
-        <p:nvSpPr>
-          <p:cNvPr id="35" name="TextBox 34"/>
-          <p:cNvSpPr txBox="1"/>
-          <p:nvPr/>
-        </p:nvSpPr>
-        <p:spPr>
-          <a:xfrm>
-            <a:off x="8778240" y="3547872"/>
-            <a:ext cx="1691640" cy="274320"/>
-          </a:xfrm>
-          <a:prstGeom prst="rect">
-            <a:avLst/>
-          </a:prstGeom>
-          <a:noFill/>
-        </p:spPr>
-        <p:txBody>
-          <a:bodyPr wrap="square" lIns="0" rIns="0" tIns="0" bIns="0">
-            <a:spAutoFit/>
-          </a:bodyPr>
-          <a:lstStyle/>
-          <a:p>
-            <a:pPr algn="r">
-              <a:lnSpc>
-                <a:spcPts val="1600"/>
-              </a:lnSpc>
-              <a:spcAft>
-                <a:spcPts val="0"/>
-              </a:spcAft>
-            </a:pPr>
-            <a:r>
-              <a:rPr sz="1250" b="0" i="0">
-                <a:solidFill>
-                  <a:srgbClr val="212529"/>
-                </a:solidFill>
-                <a:latin typeface="Garamond"/>
-              </a:rPr>
-              <a:t>−2.39***</a:t>
-            </a:r>
-          </a:p>
-        </p:txBody>
-      </p:sp>
-      <p:sp>
-        <p:nvSpPr>
-          <p:cNvPr id="36" name="TextBox 35"/>
-          <p:cNvSpPr txBox="1"/>
-          <p:nvPr/>
-        </p:nvSpPr>
-        <p:spPr>
-          <a:xfrm>
-            <a:off x="5029200" y="3771900"/>
-            <a:ext cx="1691640" cy="274320"/>
-          </a:xfrm>
-          <a:prstGeom prst="rect">
-            <a:avLst/>
-          </a:prstGeom>
-          <a:noFill/>
-        </p:spPr>
-        <p:txBody>
-          <a:bodyPr wrap="square" lIns="0" rIns="0" tIns="0" bIns="0">
-            <a:spAutoFit/>
-          </a:bodyPr>
-          <a:lstStyle/>
-          <a:p>
-            <a:pPr algn="r">
-              <a:lnSpc>
-                <a:spcPts val="1408"/>
-              </a:lnSpc>
-              <a:spcAft>
-                <a:spcPts val="0"/>
-              </a:spcAft>
-            </a:pPr>
-            <a:r>
-              <a:rPr sz="1100" b="0" i="0">
-                <a:solidFill>
-                  <a:srgbClr val="6B7480"/>
-                </a:solidFill>
-                <a:latin typeface="Garamond"/>
-              </a:rPr>
-              <a:t>(0.56)</a:t>
-            </a:r>
-          </a:p>
-        </p:txBody>
-      </p:sp>
-      <p:sp>
-        <p:nvSpPr>
-          <p:cNvPr id="37" name="TextBox 36"/>
-          <p:cNvSpPr txBox="1"/>
-          <p:nvPr/>
-        </p:nvSpPr>
-        <p:spPr>
-          <a:xfrm>
-            <a:off x="6903720" y="3771900"/>
-            <a:ext cx="1691640" cy="274320"/>
-          </a:xfrm>
-          <a:prstGeom prst="rect">
-            <a:avLst/>
-          </a:prstGeom>
-          <a:noFill/>
-        </p:spPr>
-        <p:txBody>
-          <a:bodyPr wrap="square" lIns="0" rIns="0" tIns="0" bIns="0">
-            <a:spAutoFit/>
-          </a:bodyPr>
-          <a:lstStyle/>
-          <a:p>
-            <a:pPr algn="r">
-              <a:lnSpc>
-                <a:spcPts val="1408"/>
-              </a:lnSpc>
-              <a:spcAft>
-                <a:spcPts val="0"/>
-              </a:spcAft>
-            </a:pPr>
-            <a:r>
-              <a:rPr sz="1100" b="0" i="0">
-                <a:solidFill>
-                  <a:srgbClr val="6B7480"/>
-                </a:solidFill>
-                <a:latin typeface="Garamond"/>
-              </a:rPr>
-              <a:t>(0.56)</a:t>
-            </a:r>
-          </a:p>
-        </p:txBody>
-      </p:sp>
-      <p:sp>
-        <p:nvSpPr>
-          <p:cNvPr id="38" name="TextBox 37"/>
-          <p:cNvSpPr txBox="1"/>
-          <p:nvPr/>
-        </p:nvSpPr>
-        <p:spPr>
-          <a:xfrm>
-            <a:off x="8778240" y="3771900"/>
-            <a:ext cx="1691640" cy="274320"/>
-          </a:xfrm>
-          <a:prstGeom prst="rect">
-            <a:avLst/>
-          </a:prstGeom>
-          <a:noFill/>
-        </p:spPr>
-        <p:txBody>
-          <a:bodyPr wrap="square" lIns="0" rIns="0" tIns="0" bIns="0">
-            <a:spAutoFit/>
-          </a:bodyPr>
-          <a:lstStyle/>
-          <a:p>
-            <a:pPr algn="r">
-              <a:lnSpc>
-                <a:spcPts val="1408"/>
-              </a:lnSpc>
-              <a:spcAft>
-                <a:spcPts val="0"/>
-              </a:spcAft>
-            </a:pPr>
-            <a:r>
-              <a:rPr sz="1100" b="0" i="0">
-                <a:solidFill>
-                  <a:srgbClr val="6B7480"/>
-                </a:solidFill>
-                <a:latin typeface="Garamond"/>
-              </a:rPr>
-              <a:t>(0.56)</a:t>
-            </a:r>
-          </a:p>
-        </p:txBody>
-      </p:sp>
-      <p:sp>
-        <p:nvSpPr>
-          <p:cNvPr id="39" name="TextBox 38"/>
-          <p:cNvSpPr txBox="1"/>
-          <p:nvPr/>
-        </p:nvSpPr>
-        <p:spPr>
-          <a:xfrm>
-            <a:off x="1005840" y="4005072"/>
-            <a:ext cx="3840480" cy="274320"/>
-          </a:xfrm>
-          <a:prstGeom prst="rect">
-            <a:avLst/>
-          </a:prstGeom>
-          <a:noFill/>
-        </p:spPr>
-        <p:txBody>
-          <a:bodyPr wrap="square" lIns="0" rIns="0" tIns="0" bIns="0">
-            <a:spAutoFit/>
-          </a:bodyPr>
-          <a:lstStyle/>
-          <a:p>
-            <a:pPr algn="l">
-              <a:lnSpc>
-                <a:spcPts val="1600"/>
-              </a:lnSpc>
-              <a:spcAft>
-                <a:spcPts val="0"/>
-              </a:spcAft>
-            </a:pPr>
-            <a:r>
-              <a:rPr sz="1250" b="0" i="0">
-                <a:solidFill>
-                  <a:srgbClr val="212529"/>
-                </a:solidFill>
-                <a:latin typeface="Garamond"/>
-              </a:rPr>
-              <a:t>New baby during the year</a:t>
-            </a:r>
-          </a:p>
-        </p:txBody>
-      </p:sp>
-      <p:sp>
-        <p:nvSpPr>
-          <p:cNvPr id="40" name="TextBox 39"/>
-          <p:cNvSpPr txBox="1"/>
-          <p:nvPr/>
-        </p:nvSpPr>
-        <p:spPr>
-          <a:xfrm>
-            <a:off x="5029200" y="4005072"/>
-            <a:ext cx="1691640" cy="274320"/>
-          </a:xfrm>
-          <a:prstGeom prst="rect">
-            <a:avLst/>
-          </a:prstGeom>
-          <a:noFill/>
-        </p:spPr>
-        <p:txBody>
-          <a:bodyPr wrap="square" lIns="0" rIns="0" tIns="0" bIns="0">
-            <a:spAutoFit/>
-          </a:bodyPr>
-          <a:lstStyle/>
-          <a:p>
-            <a:pPr algn="r">
-              <a:lnSpc>
-                <a:spcPts val="1600"/>
-              </a:lnSpc>
-              <a:spcAft>
-                <a:spcPts val="0"/>
-              </a:spcAft>
-            </a:pPr>
-            <a:r>
-              <a:rPr sz="1250" b="0" i="0">
-                <a:solidFill>
-                  <a:srgbClr val="212529"/>
-                </a:solidFill>
-                <a:latin typeface="Garamond"/>
-              </a:rPr>
-              <a:t>+5.72***</a:t>
-            </a:r>
-          </a:p>
-        </p:txBody>
-      </p:sp>
-      <p:sp>
-        <p:nvSpPr>
-          <p:cNvPr id="41" name="TextBox 40"/>
-          <p:cNvSpPr txBox="1"/>
-          <p:nvPr/>
-        </p:nvSpPr>
-        <p:spPr>
-          <a:xfrm>
-            <a:off x="6903720" y="4005072"/>
-            <a:ext cx="1691640" cy="274320"/>
-          </a:xfrm>
-          <a:prstGeom prst="rect">
-            <a:avLst/>
-          </a:prstGeom>
-          <a:noFill/>
-        </p:spPr>
-        <p:txBody>
-          <a:bodyPr wrap="square" lIns="0" rIns="0" tIns="0" bIns="0">
-            <a:spAutoFit/>
-          </a:bodyPr>
-          <a:lstStyle/>
-          <a:p>
-            <a:pPr algn="r">
-              <a:lnSpc>
-                <a:spcPts val="1600"/>
-              </a:lnSpc>
-              <a:spcAft>
-                <a:spcPts val="0"/>
-              </a:spcAft>
-            </a:pPr>
-            <a:r>
-              <a:rPr sz="1250" b="0" i="0">
-                <a:solidFill>
-                  <a:srgbClr val="212529"/>
-                </a:solidFill>
-                <a:latin typeface="Garamond"/>
-              </a:rPr>
-              <a:t>+5.63***</a:t>
-            </a:r>
-          </a:p>
-        </p:txBody>
-      </p:sp>
-      <p:sp>
-        <p:nvSpPr>
-          <p:cNvPr id="42" name="TextBox 41"/>
-          <p:cNvSpPr txBox="1"/>
-          <p:nvPr/>
-        </p:nvSpPr>
-        <p:spPr>
-          <a:xfrm>
-            <a:off x="8778240" y="4005072"/>
-            <a:ext cx="1691640" cy="274320"/>
-          </a:xfrm>
-          <a:prstGeom prst="rect">
-            <a:avLst/>
-          </a:prstGeom>
-          <a:noFill/>
-        </p:spPr>
-        <p:txBody>
-          <a:bodyPr wrap="square" lIns="0" rIns="0" tIns="0" bIns="0">
-            <a:spAutoFit/>
-          </a:bodyPr>
-          <a:lstStyle/>
-          <a:p>
-            <a:pPr algn="r">
-              <a:lnSpc>
-                <a:spcPts val="1600"/>
-              </a:lnSpc>
-              <a:spcAft>
-                <a:spcPts val="0"/>
-              </a:spcAft>
-            </a:pPr>
-            <a:r>
-              <a:rPr sz="1250" b="0" i="0">
-                <a:solidFill>
-                  <a:srgbClr val="212529"/>
-                </a:solidFill>
-                <a:latin typeface="Garamond"/>
-              </a:rPr>
-              <a:t>+5.71***</a:t>
-            </a:r>
-          </a:p>
-        </p:txBody>
-      </p:sp>
-      <p:sp>
-        <p:nvSpPr>
-          <p:cNvPr id="43" name="TextBox 42"/>
-          <p:cNvSpPr txBox="1"/>
-          <p:nvPr/>
-        </p:nvSpPr>
-        <p:spPr>
-          <a:xfrm>
-            <a:off x="5029200" y="4229100"/>
-            <a:ext cx="1691640" cy="274320"/>
-          </a:xfrm>
-          <a:prstGeom prst="rect">
-            <a:avLst/>
-          </a:prstGeom>
-          <a:noFill/>
-        </p:spPr>
-        <p:txBody>
-          <a:bodyPr wrap="square" lIns="0" rIns="0" tIns="0" bIns="0">
-            <a:spAutoFit/>
-          </a:bodyPr>
-          <a:lstStyle/>
-          <a:p>
-            <a:pPr algn="r">
-              <a:lnSpc>
-                <a:spcPts val="1408"/>
-              </a:lnSpc>
-              <a:spcAft>
-                <a:spcPts val="0"/>
-              </a:spcAft>
-            </a:pPr>
-            <a:r>
-              <a:rPr sz="1100" b="0" i="0">
-                <a:solidFill>
-                  <a:srgbClr val="6B7480"/>
-                </a:solidFill>
-                <a:latin typeface="Garamond"/>
-              </a:rPr>
-              <a:t>(1.56)</a:t>
-            </a:r>
-          </a:p>
-        </p:txBody>
-      </p:sp>
-      <p:sp>
-        <p:nvSpPr>
-          <p:cNvPr id="44" name="TextBox 43"/>
-          <p:cNvSpPr txBox="1"/>
-          <p:nvPr/>
-        </p:nvSpPr>
-        <p:spPr>
-          <a:xfrm>
-            <a:off x="6903720" y="4229100"/>
-            <a:ext cx="1691640" cy="274320"/>
-          </a:xfrm>
-          <a:prstGeom prst="rect">
-            <a:avLst/>
-          </a:prstGeom>
-          <a:noFill/>
-        </p:spPr>
-        <p:txBody>
-          <a:bodyPr wrap="square" lIns="0" rIns="0" tIns="0" bIns="0">
-            <a:spAutoFit/>
-          </a:bodyPr>
-          <a:lstStyle/>
-          <a:p>
-            <a:pPr algn="r">
-              <a:lnSpc>
-                <a:spcPts val="1408"/>
-              </a:lnSpc>
-              <a:spcAft>
-                <a:spcPts val="0"/>
-              </a:spcAft>
-            </a:pPr>
-            <a:r>
-              <a:rPr sz="1100" b="0" i="0">
-                <a:solidFill>
-                  <a:srgbClr val="6B7480"/>
-                </a:solidFill>
-                <a:latin typeface="Garamond"/>
-              </a:rPr>
-              <a:t>(1.56)</a:t>
-            </a:r>
-          </a:p>
-        </p:txBody>
-      </p:sp>
-      <p:sp>
-        <p:nvSpPr>
-          <p:cNvPr id="45" name="TextBox 44"/>
-          <p:cNvSpPr txBox="1"/>
-          <p:nvPr/>
-        </p:nvSpPr>
-        <p:spPr>
-          <a:xfrm>
-            <a:off x="8778240" y="4229100"/>
-            <a:ext cx="1691640" cy="274320"/>
-          </a:xfrm>
-          <a:prstGeom prst="rect">
-            <a:avLst/>
-          </a:prstGeom>
-          <a:noFill/>
-        </p:spPr>
-        <p:txBody>
-          <a:bodyPr wrap="square" lIns="0" rIns="0" tIns="0" bIns="0">
-            <a:spAutoFit/>
-          </a:bodyPr>
-          <a:lstStyle/>
-          <a:p>
-            <a:pPr algn="r">
-              <a:lnSpc>
-                <a:spcPts val="1408"/>
-              </a:lnSpc>
-              <a:spcAft>
-                <a:spcPts val="0"/>
-              </a:spcAft>
-            </a:pPr>
-            <a:r>
-              <a:rPr sz="1100" b="0" i="0">
-                <a:solidFill>
-                  <a:srgbClr val="6B7480"/>
-                </a:solidFill>
-                <a:latin typeface="Garamond"/>
-              </a:rPr>
-              <a:t>(1.56)</a:t>
-            </a:r>
-          </a:p>
-        </p:txBody>
-      </p:sp>
-      <p:sp>
-        <p:nvSpPr>
-          <p:cNvPr id="46" name="TextBox 45"/>
-          <p:cNvSpPr txBox="1"/>
-          <p:nvPr/>
-        </p:nvSpPr>
-        <p:spPr>
-          <a:xfrm>
-            <a:off x="1005840" y="4462272"/>
-            <a:ext cx="3840480" cy="274320"/>
-          </a:xfrm>
-          <a:prstGeom prst="rect">
-            <a:avLst/>
-          </a:prstGeom>
-          <a:noFill/>
-        </p:spPr>
-        <p:txBody>
-          <a:bodyPr wrap="square" lIns="0" rIns="0" tIns="0" bIns="0">
-            <a:spAutoFit/>
-          </a:bodyPr>
-          <a:lstStyle/>
-          <a:p>
-            <a:pPr algn="l">
-              <a:lnSpc>
-                <a:spcPts val="1600"/>
-              </a:lnSpc>
-              <a:spcAft>
-                <a:spcPts val="0"/>
-              </a:spcAft>
-            </a:pPr>
-            <a:r>
-              <a:rPr sz="1250" b="0" i="0">
-                <a:solidFill>
-                  <a:srgbClr val="212529"/>
-                </a:solidFill>
-                <a:latin typeface="Garamond"/>
-              </a:rPr>
-              <a:t>With a disability</a:t>
-            </a:r>
-          </a:p>
-        </p:txBody>
-      </p:sp>
-      <p:sp>
-        <p:nvSpPr>
-          <p:cNvPr id="47" name="TextBox 46"/>
-          <p:cNvSpPr txBox="1"/>
-          <p:nvPr/>
-        </p:nvSpPr>
-        <p:spPr>
-          <a:xfrm>
-            <a:off x="5029200" y="4462272"/>
-            <a:ext cx="1691640" cy="274320"/>
-          </a:xfrm>
-          <a:prstGeom prst="rect">
-            <a:avLst/>
-          </a:prstGeom>
-          <a:noFill/>
-        </p:spPr>
-        <p:txBody>
-          <a:bodyPr wrap="square" lIns="0" rIns="0" tIns="0" bIns="0">
-            <a:spAutoFit/>
-          </a:bodyPr>
-          <a:lstStyle/>
-          <a:p>
-            <a:pPr algn="r">
-              <a:lnSpc>
-                <a:spcPts val="1600"/>
-              </a:lnSpc>
-              <a:spcAft>
-                <a:spcPts val="0"/>
-              </a:spcAft>
-            </a:pPr>
-            <a:r>
-              <a:rPr sz="1250" b="0" i="0">
-                <a:solidFill>
-                  <a:srgbClr val="212529"/>
-                </a:solidFill>
-                <a:latin typeface="Garamond"/>
-              </a:rPr>
-              <a:t>+8.85***</a:t>
-            </a:r>
-          </a:p>
-        </p:txBody>
-      </p:sp>
-      <p:sp>
-        <p:nvSpPr>
-          <p:cNvPr id="48" name="TextBox 47"/>
-          <p:cNvSpPr txBox="1"/>
-          <p:nvPr/>
-        </p:nvSpPr>
-        <p:spPr>
-          <a:xfrm>
-            <a:off x="6903720" y="4462272"/>
-            <a:ext cx="1691640" cy="274320"/>
-          </a:xfrm>
-          <a:prstGeom prst="rect">
-            <a:avLst/>
-          </a:prstGeom>
-          <a:noFill/>
-        </p:spPr>
-        <p:txBody>
-          <a:bodyPr wrap="square" lIns="0" rIns="0" tIns="0" bIns="0">
-            <a:spAutoFit/>
-          </a:bodyPr>
-          <a:lstStyle/>
-          <a:p>
-            <a:pPr algn="r">
-              <a:lnSpc>
-                <a:spcPts val="1600"/>
-              </a:lnSpc>
-              <a:spcAft>
-                <a:spcPts val="0"/>
-              </a:spcAft>
-            </a:pPr>
-            <a:r>
-              <a:rPr sz="1250" b="0" i="0">
-                <a:solidFill>
-                  <a:srgbClr val="212529"/>
-                </a:solidFill>
-                <a:latin typeface="Garamond"/>
-              </a:rPr>
-              <a:t>+8.94***</a:t>
-            </a:r>
-          </a:p>
-        </p:txBody>
-      </p:sp>
-      <p:sp>
-        <p:nvSpPr>
-          <p:cNvPr id="49" name="TextBox 48"/>
-          <p:cNvSpPr txBox="1"/>
-          <p:nvPr/>
-        </p:nvSpPr>
-        <p:spPr>
-          <a:xfrm>
-            <a:off x="8778240" y="4462272"/>
-            <a:ext cx="1691640" cy="274320"/>
-          </a:xfrm>
-          <a:prstGeom prst="rect">
-            <a:avLst/>
-          </a:prstGeom>
-          <a:noFill/>
-        </p:spPr>
-        <p:txBody>
-          <a:bodyPr wrap="square" lIns="0" rIns="0" tIns="0" bIns="0">
-            <a:spAutoFit/>
-          </a:bodyPr>
-          <a:lstStyle/>
-          <a:p>
-            <a:pPr algn="r">
-              <a:lnSpc>
-                <a:spcPts val="1600"/>
-              </a:lnSpc>
-              <a:spcAft>
-                <a:spcPts val="0"/>
-              </a:spcAft>
-            </a:pPr>
-            <a:r>
-              <a:rPr sz="1250" b="0" i="0">
-                <a:solidFill>
-                  <a:srgbClr val="212529"/>
-                </a:solidFill>
-                <a:latin typeface="Garamond"/>
-              </a:rPr>
-              <a:t>+8.94***</a:t>
-            </a:r>
-          </a:p>
-        </p:txBody>
-      </p:sp>
-      <p:sp>
-        <p:nvSpPr>
-          <p:cNvPr id="50" name="TextBox 49"/>
-          <p:cNvSpPr txBox="1"/>
-          <p:nvPr/>
-        </p:nvSpPr>
-        <p:spPr>
-          <a:xfrm>
-            <a:off x="5029200" y="4686300"/>
-            <a:ext cx="1691640" cy="274320"/>
-          </a:xfrm>
-          <a:prstGeom prst="rect">
-            <a:avLst/>
-          </a:prstGeom>
-          <a:noFill/>
-        </p:spPr>
-        <p:txBody>
-          <a:bodyPr wrap="square" lIns="0" rIns="0" tIns="0" bIns="0">
-            <a:spAutoFit/>
-          </a:bodyPr>
-          <a:lstStyle/>
-          <a:p>
-            <a:pPr algn="r">
-              <a:lnSpc>
-                <a:spcPts val="1408"/>
-              </a:lnSpc>
-              <a:spcAft>
-                <a:spcPts val="0"/>
-              </a:spcAft>
-            </a:pPr>
-            <a:r>
-              <a:rPr sz="1100" b="0" i="0">
-                <a:solidFill>
-                  <a:srgbClr val="6B7480"/>
-                </a:solidFill>
-                <a:latin typeface="Garamond"/>
-              </a:rPr>
-              <a:t>(2.14)</a:t>
-            </a:r>
-          </a:p>
-        </p:txBody>
-      </p:sp>
-      <p:sp>
-        <p:nvSpPr>
-          <p:cNvPr id="51" name="TextBox 50"/>
-          <p:cNvSpPr txBox="1"/>
-          <p:nvPr/>
-        </p:nvSpPr>
-        <p:spPr>
-          <a:xfrm>
-            <a:off x="6903720" y="4686300"/>
-            <a:ext cx="1691640" cy="274320"/>
-          </a:xfrm>
-          <a:prstGeom prst="rect">
-            <a:avLst/>
-          </a:prstGeom>
-          <a:noFill/>
-        </p:spPr>
-        <p:txBody>
-          <a:bodyPr wrap="square" lIns="0" rIns="0" tIns="0" bIns="0">
-            <a:spAutoFit/>
-          </a:bodyPr>
-          <a:lstStyle/>
-          <a:p>
-            <a:pPr algn="r">
-              <a:lnSpc>
-                <a:spcPts val="1408"/>
-              </a:lnSpc>
-              <a:spcAft>
-                <a:spcPts val="0"/>
-              </a:spcAft>
-            </a:pPr>
-            <a:r>
-              <a:rPr sz="1100" b="0" i="0">
-                <a:solidFill>
-                  <a:srgbClr val="6B7480"/>
-                </a:solidFill>
-                <a:latin typeface="Garamond"/>
-              </a:rPr>
-              <a:t>(2.14)</a:t>
-            </a:r>
-          </a:p>
-        </p:txBody>
-      </p:sp>
-      <p:sp>
-        <p:nvSpPr>
-          <p:cNvPr id="52" name="TextBox 51"/>
-          <p:cNvSpPr txBox="1"/>
-          <p:nvPr/>
-        </p:nvSpPr>
-        <p:spPr>
-          <a:xfrm>
-            <a:off x="8778240" y="4686300"/>
-            <a:ext cx="1691640" cy="274320"/>
-          </a:xfrm>
-          <a:prstGeom prst="rect">
-            <a:avLst/>
-          </a:prstGeom>
-          <a:noFill/>
-        </p:spPr>
-        <p:txBody>
-          <a:bodyPr wrap="square" lIns="0" rIns="0" tIns="0" bIns="0">
-            <a:spAutoFit/>
-          </a:bodyPr>
-          <a:lstStyle/>
-          <a:p>
-            <a:pPr algn="r">
-              <a:lnSpc>
-                <a:spcPts val="1408"/>
-              </a:lnSpc>
-              <a:spcAft>
-                <a:spcPts val="0"/>
-              </a:spcAft>
-            </a:pPr>
-            <a:r>
-              <a:rPr sz="1100" b="0" i="0">
-                <a:solidFill>
-                  <a:srgbClr val="6B7480"/>
-                </a:solidFill>
-                <a:latin typeface="Garamond"/>
-              </a:rPr>
-              <a:t>(2.14)</a:t>
-            </a:r>
-          </a:p>
-        </p:txBody>
-      </p:sp>
-      <p:sp>
-        <p:nvSpPr>
-          <p:cNvPr id="53" name="TextBox 52"/>
-          <p:cNvSpPr txBox="1"/>
-          <p:nvPr/>
-        </p:nvSpPr>
-        <p:spPr>
-          <a:xfrm>
-            <a:off x="1005840" y="4919472"/>
-            <a:ext cx="3840480" cy="274320"/>
-          </a:xfrm>
-          <a:prstGeom prst="rect">
-            <a:avLst/>
-          </a:prstGeom>
-          <a:noFill/>
-        </p:spPr>
-        <p:txBody>
-          <a:bodyPr wrap="square" lIns="0" rIns="0" tIns="0" bIns="0">
-            <a:spAutoFit/>
-          </a:bodyPr>
-          <a:lstStyle/>
-          <a:p>
-            <a:pPr algn="l">
-              <a:lnSpc>
-                <a:spcPts val="1600"/>
-              </a:lnSpc>
-              <a:spcAft>
-                <a:spcPts val="0"/>
-              </a:spcAft>
-            </a:pPr>
-            <a:r>
-              <a:rPr sz="1250" b="0" i="0">
-                <a:solidFill>
-                  <a:srgbClr val="212529"/>
-                </a:solidFill>
-                <a:latin typeface="Garamond"/>
-              </a:rPr>
-              <a:t>Bottom-quartile household income</a:t>
-            </a:r>
-          </a:p>
-        </p:txBody>
-      </p:sp>
-      <p:sp>
-        <p:nvSpPr>
-          <p:cNvPr id="54" name="TextBox 53"/>
-          <p:cNvSpPr txBox="1"/>
-          <p:nvPr/>
-        </p:nvSpPr>
-        <p:spPr>
-          <a:xfrm>
-            <a:off x="5029200" y="4919472"/>
-            <a:ext cx="1691640" cy="274320"/>
-          </a:xfrm>
-          <a:prstGeom prst="rect">
-            <a:avLst/>
-          </a:prstGeom>
-          <a:noFill/>
-        </p:spPr>
-        <p:txBody>
-          <a:bodyPr wrap="square" lIns="0" rIns="0" tIns="0" bIns="0">
-            <a:spAutoFit/>
-          </a:bodyPr>
-          <a:lstStyle/>
-          <a:p>
-            <a:pPr algn="r">
-              <a:lnSpc>
-                <a:spcPts val="1600"/>
-              </a:lnSpc>
-              <a:spcAft>
-                <a:spcPts val="0"/>
-              </a:spcAft>
-            </a:pPr>
-            <a:r>
-              <a:rPr sz="1250" b="0" i="0">
-                <a:solidFill>
-                  <a:srgbClr val="212529"/>
-                </a:solidFill>
-                <a:latin typeface="Garamond"/>
-              </a:rPr>
-              <a:t>+4.17***</a:t>
-            </a:r>
-          </a:p>
-        </p:txBody>
-      </p:sp>
-      <p:sp>
-        <p:nvSpPr>
-          <p:cNvPr id="55" name="TextBox 54"/>
-          <p:cNvSpPr txBox="1"/>
-          <p:nvPr/>
-        </p:nvSpPr>
-        <p:spPr>
-          <a:xfrm>
-            <a:off x="6903720" y="4919472"/>
-            <a:ext cx="1691640" cy="274320"/>
-          </a:xfrm>
-          <a:prstGeom prst="rect">
-            <a:avLst/>
-          </a:prstGeom>
-          <a:noFill/>
-        </p:spPr>
-        <p:txBody>
-          <a:bodyPr wrap="square" lIns="0" rIns="0" tIns="0" bIns="0">
-            <a:spAutoFit/>
-          </a:bodyPr>
-          <a:lstStyle/>
-          <a:p>
-            <a:pPr algn="r">
-              <a:lnSpc>
-                <a:spcPts val="1600"/>
-              </a:lnSpc>
-              <a:spcAft>
-                <a:spcPts val="0"/>
-              </a:spcAft>
-            </a:pPr>
-            <a:r>
-              <a:rPr sz="1250" b="0" i="0">
-                <a:solidFill>
-                  <a:srgbClr val="212529"/>
-                </a:solidFill>
-                <a:latin typeface="Garamond"/>
-              </a:rPr>
-              <a:t>+4.13***</a:t>
-            </a:r>
-          </a:p>
-        </p:txBody>
-      </p:sp>
-      <p:sp>
-        <p:nvSpPr>
-          <p:cNvPr id="56" name="TextBox 55"/>
-          <p:cNvSpPr txBox="1"/>
-          <p:nvPr/>
-        </p:nvSpPr>
-        <p:spPr>
-          <a:xfrm>
-            <a:off x="8778240" y="4919472"/>
-            <a:ext cx="1691640" cy="274320"/>
-          </a:xfrm>
-          <a:prstGeom prst="rect">
-            <a:avLst/>
-          </a:prstGeom>
-          <a:noFill/>
-        </p:spPr>
-        <p:txBody>
-          <a:bodyPr wrap="square" lIns="0" rIns="0" tIns="0" bIns="0">
-            <a:spAutoFit/>
-          </a:bodyPr>
-          <a:lstStyle/>
-          <a:p>
-            <a:pPr algn="r">
-              <a:lnSpc>
-                <a:spcPts val="1600"/>
-              </a:lnSpc>
-              <a:spcAft>
-                <a:spcPts val="0"/>
-              </a:spcAft>
-            </a:pPr>
-            <a:r>
-              <a:rPr sz="1250" b="0" i="0">
-                <a:solidFill>
-                  <a:srgbClr val="212529"/>
-                </a:solidFill>
-                <a:latin typeface="Garamond"/>
-              </a:rPr>
-              <a:t>+4.01***</a:t>
-            </a:r>
-          </a:p>
-        </p:txBody>
-      </p:sp>
-      <p:sp>
-        <p:nvSpPr>
-          <p:cNvPr id="57" name="TextBox 56"/>
-          <p:cNvSpPr txBox="1"/>
-          <p:nvPr/>
-        </p:nvSpPr>
-        <p:spPr>
-          <a:xfrm>
-            <a:off x="5029200" y="5143500"/>
-            <a:ext cx="1691640" cy="274320"/>
-          </a:xfrm>
-          <a:prstGeom prst="rect">
-            <a:avLst/>
-          </a:prstGeom>
-          <a:noFill/>
-        </p:spPr>
-        <p:txBody>
-          <a:bodyPr wrap="square" lIns="0" rIns="0" tIns="0" bIns="0">
-            <a:spAutoFit/>
-          </a:bodyPr>
-          <a:lstStyle/>
-          <a:p>
-            <a:pPr algn="r">
-              <a:lnSpc>
-                <a:spcPts val="1408"/>
-              </a:lnSpc>
-              <a:spcAft>
-                <a:spcPts val="0"/>
-              </a:spcAft>
-            </a:pPr>
-            <a:r>
-              <a:rPr sz="1100" b="0" i="0">
-                <a:solidFill>
-                  <a:srgbClr val="6B7480"/>
-                </a:solidFill>
-                <a:latin typeface="Garamond"/>
-              </a:rPr>
-              <a:t>(1.24)</a:t>
-            </a:r>
-          </a:p>
-        </p:txBody>
-      </p:sp>
-      <p:sp>
-        <p:nvSpPr>
-          <p:cNvPr id="58" name="TextBox 57"/>
-          <p:cNvSpPr txBox="1"/>
-          <p:nvPr/>
-        </p:nvSpPr>
-        <p:spPr>
-          <a:xfrm>
-            <a:off x="6903720" y="5143500"/>
-            <a:ext cx="1691640" cy="274320"/>
-          </a:xfrm>
-          <a:prstGeom prst="rect">
-            <a:avLst/>
-          </a:prstGeom>
-          <a:noFill/>
-        </p:spPr>
-        <p:txBody>
-          <a:bodyPr wrap="square" lIns="0" rIns="0" tIns="0" bIns="0">
-            <a:spAutoFit/>
-          </a:bodyPr>
-          <a:lstStyle/>
-          <a:p>
-            <a:pPr algn="r">
-              <a:lnSpc>
-                <a:spcPts val="1408"/>
-              </a:lnSpc>
-              <a:spcAft>
-                <a:spcPts val="0"/>
-              </a:spcAft>
-            </a:pPr>
-            <a:r>
-              <a:rPr sz="1100" b="0" i="0">
-                <a:solidFill>
-                  <a:srgbClr val="6B7480"/>
-                </a:solidFill>
-                <a:latin typeface="Garamond"/>
-              </a:rPr>
-              <a:t>(1.24)</a:t>
-            </a:r>
-          </a:p>
-        </p:txBody>
-      </p:sp>
-      <p:sp>
-        <p:nvSpPr>
-          <p:cNvPr id="59" name="TextBox 58"/>
-          <p:cNvSpPr txBox="1"/>
-          <p:nvPr/>
-        </p:nvSpPr>
-        <p:spPr>
-          <a:xfrm>
-            <a:off x="8778240" y="5143500"/>
-            <a:ext cx="1691640" cy="274320"/>
-          </a:xfrm>
-          <a:prstGeom prst="rect">
-            <a:avLst/>
-          </a:prstGeom>
-          <a:noFill/>
-        </p:spPr>
-        <p:txBody>
-          <a:bodyPr wrap="square" lIns="0" rIns="0" tIns="0" bIns="0">
-            <a:spAutoFit/>
-          </a:bodyPr>
-          <a:lstStyle/>
-          <a:p>
-            <a:pPr algn="r">
-              <a:lnSpc>
-                <a:spcPts val="1408"/>
-              </a:lnSpc>
-              <a:spcAft>
-                <a:spcPts val="0"/>
-              </a:spcAft>
-            </a:pPr>
-            <a:r>
-              <a:rPr sz="1100" b="0" i="0">
-                <a:solidFill>
-                  <a:srgbClr val="6B7480"/>
-                </a:solidFill>
-                <a:latin typeface="Garamond"/>
-              </a:rPr>
-              <a:t>(1.25)</a:t>
-            </a:r>
-          </a:p>
-        </p:txBody>
-      </p:sp>
-      <p:cxnSp>
-        <p:nvCxnSpPr>
-          <p:cNvPr id="60" name="Connector 59"/>
-          <p:cNvCxnSpPr/>
-          <p:nvPr/>
-        </p:nvCxnSpPr>
-        <p:spPr>
-          <a:xfrm>
-            <a:off x="1005840" y="5394959"/>
-            <a:ext cx="9509760" cy="0"/>
-          </a:xfrm>
-          <a:prstGeom prst="line">
-            <a:avLst/>
-          </a:prstGeom>
-          <a:ln w="8890">
-            <a:solidFill>
-              <a:srgbClr val="212529"/>
-            </a:solidFill>
-          </a:ln>
-          <a:effectLst/>
-        </p:spPr>
-        <p:style>
-          <a:lnRef idx="2">
-            <a:schemeClr val="accent1"/>
-          </a:lnRef>
-          <a:fillRef idx="0">
-            <a:schemeClr val="accent1"/>
-          </a:fillRef>
-          <a:effectRef idx="1">
-            <a:schemeClr val="accent1"/>
-          </a:effectRef>
-          <a:fontRef idx="minor">
-            <a:schemeClr val="tx1"/>
-          </a:fontRef>
-        </p:style>
-      </p:cxnSp>
-      <p:sp>
-        <p:nvSpPr>
-          <p:cNvPr id="61" name="TextBox 60"/>
-          <p:cNvSpPr txBox="1"/>
-          <p:nvPr/>
-        </p:nvSpPr>
-        <p:spPr>
-          <a:xfrm>
-            <a:off x="1005840" y="5477256"/>
-            <a:ext cx="3840480" cy="274320"/>
-          </a:xfrm>
-          <a:prstGeom prst="rect">
-            <a:avLst/>
-          </a:prstGeom>
-          <a:noFill/>
-        </p:spPr>
-        <p:txBody>
-          <a:bodyPr wrap="square" lIns="0" rIns="0" tIns="0" bIns="0">
-            <a:spAutoFit/>
-          </a:bodyPr>
-          <a:lstStyle/>
-          <a:p>
-            <a:pPr algn="l">
-              <a:lnSpc>
-                <a:spcPts val="1600"/>
-              </a:lnSpc>
-              <a:spcAft>
-                <a:spcPts val="0"/>
-              </a:spcAft>
-            </a:pPr>
-            <a:r>
-              <a:rPr sz="1250" b="0" i="0">
-                <a:solidFill>
-                  <a:srgbClr val="212529"/>
-                </a:solidFill>
-                <a:latin typeface="Garamond"/>
-              </a:rPr>
-              <a:t>Year fixed effects</a:t>
-            </a:r>
-          </a:p>
-        </p:txBody>
-      </p:sp>
-      <p:sp>
-        <p:nvSpPr>
-          <p:cNvPr id="62" name="TextBox 61"/>
-          <p:cNvSpPr txBox="1"/>
-          <p:nvPr/>
-        </p:nvSpPr>
-        <p:spPr>
-          <a:xfrm>
-            <a:off x="5029200" y="5477256"/>
-            <a:ext cx="1691640" cy="274320"/>
-          </a:xfrm>
-          <a:prstGeom prst="rect">
-            <a:avLst/>
-          </a:prstGeom>
-          <a:noFill/>
-        </p:spPr>
-        <p:txBody>
-          <a:bodyPr wrap="square" lIns="0" rIns="0" tIns="0" bIns="0">
-            <a:spAutoFit/>
-          </a:bodyPr>
-          <a:lstStyle/>
-          <a:p>
-            <a:pPr algn="r">
-              <a:lnSpc>
-                <a:spcPts val="1600"/>
-              </a:lnSpc>
-              <a:spcAft>
-                <a:spcPts val="0"/>
-              </a:spcAft>
-            </a:pPr>
-            <a:r>
-              <a:rPr sz="1250" b="0" i="0">
-                <a:solidFill>
-                  <a:srgbClr val="212529"/>
-                </a:solidFill>
-                <a:latin typeface="Garamond"/>
-              </a:rPr>
-              <a:t>No</a:t>
-            </a:r>
-          </a:p>
-        </p:txBody>
-      </p:sp>
-      <p:sp>
-        <p:nvSpPr>
-          <p:cNvPr id="63" name="TextBox 62"/>
-          <p:cNvSpPr txBox="1"/>
-          <p:nvPr/>
-        </p:nvSpPr>
-        <p:spPr>
-          <a:xfrm>
-            <a:off x="6903720" y="5477256"/>
-            <a:ext cx="1691640" cy="274320"/>
-          </a:xfrm>
-          <a:prstGeom prst="rect">
-            <a:avLst/>
-          </a:prstGeom>
-          <a:noFill/>
-        </p:spPr>
-        <p:txBody>
-          <a:bodyPr wrap="square" lIns="0" rIns="0" tIns="0" bIns="0">
-            <a:spAutoFit/>
-          </a:bodyPr>
-          <a:lstStyle/>
-          <a:p>
-            <a:pPr algn="r">
-              <a:lnSpc>
-                <a:spcPts val="1600"/>
-              </a:lnSpc>
-              <a:spcAft>
-                <a:spcPts val="0"/>
-              </a:spcAft>
-            </a:pPr>
-            <a:r>
-              <a:rPr sz="1250" b="0" i="0">
-                <a:solidFill>
-                  <a:srgbClr val="212529"/>
-                </a:solidFill>
-                <a:latin typeface="Garamond"/>
-              </a:rPr>
-              <a:t>Yes</a:t>
-            </a:r>
-          </a:p>
-        </p:txBody>
-      </p:sp>
-      <p:sp>
-        <p:nvSpPr>
-          <p:cNvPr id="64" name="TextBox 63"/>
-          <p:cNvSpPr txBox="1"/>
-          <p:nvPr/>
-        </p:nvSpPr>
-        <p:spPr>
-          <a:xfrm>
-            <a:off x="8778240" y="5477256"/>
-            <a:ext cx="1691640" cy="274320"/>
-          </a:xfrm>
-          <a:prstGeom prst="rect">
-            <a:avLst/>
-          </a:prstGeom>
-          <a:noFill/>
-        </p:spPr>
-        <p:txBody>
-          <a:bodyPr wrap="square" lIns="0" rIns="0" tIns="0" bIns="0">
-            <a:spAutoFit/>
-          </a:bodyPr>
-          <a:lstStyle/>
-          <a:p>
-            <a:pPr algn="r">
-              <a:lnSpc>
-                <a:spcPts val="1600"/>
-              </a:lnSpc>
-              <a:spcAft>
-                <a:spcPts val="0"/>
-              </a:spcAft>
-            </a:pPr>
-            <a:r>
-              <a:rPr sz="1250" b="0" i="0">
-                <a:solidFill>
-                  <a:srgbClr val="212529"/>
-                </a:solidFill>
-                <a:latin typeface="Garamond"/>
-              </a:rPr>
-              <a:t>Yes</a:t>
-            </a:r>
-          </a:p>
-        </p:txBody>
-      </p:sp>
-      <p:sp>
-        <p:nvSpPr>
-          <p:cNvPr id="65" name="TextBox 64"/>
-          <p:cNvSpPr txBox="1"/>
-          <p:nvPr/>
-        </p:nvSpPr>
-        <p:spPr>
-          <a:xfrm>
-            <a:off x="1005840" y="5733288"/>
-            <a:ext cx="3840480" cy="274320"/>
-          </a:xfrm>
-          <a:prstGeom prst="rect">
-            <a:avLst/>
-          </a:prstGeom>
-          <a:noFill/>
-        </p:spPr>
-        <p:txBody>
-          <a:bodyPr wrap="square" lIns="0" rIns="0" tIns="0" bIns="0">
-            <a:spAutoFit/>
-          </a:bodyPr>
-          <a:lstStyle/>
-          <a:p>
-            <a:pPr algn="l">
-              <a:lnSpc>
-                <a:spcPts val="1600"/>
-              </a:lnSpc>
-              <a:spcAft>
-                <a:spcPts val="0"/>
-              </a:spcAft>
-            </a:pPr>
-            <a:r>
-              <a:rPr sz="1250" b="0" i="0">
-                <a:solidFill>
-                  <a:srgbClr val="212529"/>
-                </a:solidFill>
-                <a:latin typeface="Garamond"/>
-              </a:rPr>
-              <a:t>State fixed effects</a:t>
-            </a:r>
-          </a:p>
-        </p:txBody>
-      </p:sp>
-      <p:sp>
-        <p:nvSpPr>
-          <p:cNvPr id="66" name="TextBox 65"/>
-          <p:cNvSpPr txBox="1"/>
-          <p:nvPr/>
-        </p:nvSpPr>
-        <p:spPr>
-          <a:xfrm>
-            <a:off x="5029200" y="5733288"/>
-            <a:ext cx="1691640" cy="274320"/>
-          </a:xfrm>
-          <a:prstGeom prst="rect">
-            <a:avLst/>
-          </a:prstGeom>
-          <a:noFill/>
-        </p:spPr>
-        <p:txBody>
-          <a:bodyPr wrap="square" lIns="0" rIns="0" tIns="0" bIns="0">
-            <a:spAutoFit/>
-          </a:bodyPr>
-          <a:lstStyle/>
-          <a:p>
-            <a:pPr algn="r">
-              <a:lnSpc>
-                <a:spcPts val="1600"/>
-              </a:lnSpc>
-              <a:spcAft>
-                <a:spcPts val="0"/>
-              </a:spcAft>
-            </a:pPr>
-            <a:r>
-              <a:rPr sz="1250" b="0" i="0">
-                <a:solidFill>
-                  <a:srgbClr val="212529"/>
-                </a:solidFill>
-                <a:latin typeface="Garamond"/>
-              </a:rPr>
-              <a:t>No</a:t>
-            </a:r>
-          </a:p>
-        </p:txBody>
-      </p:sp>
-      <p:sp>
-        <p:nvSpPr>
-          <p:cNvPr id="67" name="TextBox 66"/>
-          <p:cNvSpPr txBox="1"/>
-          <p:nvPr/>
-        </p:nvSpPr>
-        <p:spPr>
-          <a:xfrm>
-            <a:off x="6903720" y="5733288"/>
-            <a:ext cx="1691640" cy="274320"/>
-          </a:xfrm>
-          <a:prstGeom prst="rect">
-            <a:avLst/>
-          </a:prstGeom>
-          <a:noFill/>
-        </p:spPr>
-        <p:txBody>
-          <a:bodyPr wrap="square" lIns="0" rIns="0" tIns="0" bIns="0">
-            <a:spAutoFit/>
-          </a:bodyPr>
-          <a:lstStyle/>
-          <a:p>
-            <a:pPr algn="r">
-              <a:lnSpc>
-                <a:spcPts val="1600"/>
-              </a:lnSpc>
-              <a:spcAft>
-                <a:spcPts val="0"/>
-              </a:spcAft>
-            </a:pPr>
-            <a:r>
-              <a:rPr sz="1250" b="0" i="0">
-                <a:solidFill>
-                  <a:srgbClr val="212529"/>
-                </a:solidFill>
-                <a:latin typeface="Garamond"/>
-              </a:rPr>
-              <a:t>No</a:t>
-            </a:r>
-          </a:p>
-        </p:txBody>
-      </p:sp>
-      <p:sp>
-        <p:nvSpPr>
-          <p:cNvPr id="68" name="TextBox 67"/>
-          <p:cNvSpPr txBox="1"/>
-          <p:nvPr/>
-        </p:nvSpPr>
-        <p:spPr>
-          <a:xfrm>
-            <a:off x="8778240" y="5733288"/>
-            <a:ext cx="1691640" cy="274320"/>
-          </a:xfrm>
-          <a:prstGeom prst="rect">
-            <a:avLst/>
-          </a:prstGeom>
-          <a:noFill/>
-        </p:spPr>
-        <p:txBody>
-          <a:bodyPr wrap="square" lIns="0" rIns="0" tIns="0" bIns="0">
-            <a:spAutoFit/>
-          </a:bodyPr>
-          <a:lstStyle/>
-          <a:p>
-            <a:pPr algn="r">
-              <a:lnSpc>
-                <a:spcPts val="1600"/>
-              </a:lnSpc>
-              <a:spcAft>
-                <a:spcPts val="0"/>
-              </a:spcAft>
-            </a:pPr>
-            <a:r>
-              <a:rPr sz="1250" b="0" i="0">
-                <a:solidFill>
-                  <a:srgbClr val="212529"/>
-                </a:solidFill>
-                <a:latin typeface="Garamond"/>
-              </a:rPr>
-              <a:t>Yes</a:t>
-            </a:r>
-          </a:p>
-        </p:txBody>
-      </p:sp>
-      <p:sp>
-        <p:nvSpPr>
-          <p:cNvPr id="69" name="TextBox 68"/>
-          <p:cNvSpPr txBox="1"/>
-          <p:nvPr/>
-        </p:nvSpPr>
-        <p:spPr>
-          <a:xfrm>
-            <a:off x="1005840" y="5989320"/>
-            <a:ext cx="3840480" cy="274320"/>
-          </a:xfrm>
-          <a:prstGeom prst="rect">
-            <a:avLst/>
-          </a:prstGeom>
-          <a:noFill/>
-        </p:spPr>
-        <p:txBody>
-          <a:bodyPr wrap="square" lIns="0" rIns="0" tIns="0" bIns="0">
-            <a:spAutoFit/>
-          </a:bodyPr>
-          <a:lstStyle/>
-          <a:p>
-            <a:pPr algn="l">
-              <a:lnSpc>
-                <a:spcPts val="1600"/>
-              </a:lnSpc>
-              <a:spcAft>
-                <a:spcPts val="0"/>
-              </a:spcAft>
-            </a:pPr>
-            <a:r>
-              <a:rPr sz="1250" b="0" i="0">
-                <a:solidFill>
-                  <a:srgbClr val="212529"/>
-                </a:solidFill>
-                <a:latin typeface="Garamond"/>
-              </a:rPr>
-              <a:t>Observations</a:t>
-            </a:r>
-          </a:p>
-        </p:txBody>
-      </p:sp>
-      <p:sp>
-        <p:nvSpPr>
-          <p:cNvPr id="70" name="TextBox 69"/>
-          <p:cNvSpPr txBox="1"/>
-          <p:nvPr/>
-        </p:nvSpPr>
-        <p:spPr>
-          <a:xfrm>
-            <a:off x="5029200" y="5989320"/>
-            <a:ext cx="1691640" cy="274320"/>
-          </a:xfrm>
-          <a:prstGeom prst="rect">
-            <a:avLst/>
-          </a:prstGeom>
-          <a:noFill/>
-        </p:spPr>
-        <p:txBody>
-          <a:bodyPr wrap="square" lIns="0" rIns="0" tIns="0" bIns="0">
-            <a:spAutoFit/>
-          </a:bodyPr>
-          <a:lstStyle/>
-          <a:p>
-            <a:pPr algn="r">
-              <a:lnSpc>
-                <a:spcPts val="1600"/>
-              </a:lnSpc>
-              <a:spcAft>
-                <a:spcPts val="0"/>
-              </a:spcAft>
-            </a:pPr>
-            <a:r>
-              <a:rPr sz="1250" b="0" i="0">
-                <a:solidFill>
-                  <a:srgbClr val="212529"/>
-                </a:solidFill>
-                <a:latin typeface="Garamond"/>
-              </a:rPr>
-              <a:t>18,571</a:t>
-            </a:r>
-          </a:p>
-        </p:txBody>
-      </p:sp>
-      <p:sp>
-        <p:nvSpPr>
-          <p:cNvPr id="71" name="TextBox 70"/>
-          <p:cNvSpPr txBox="1"/>
-          <p:nvPr/>
-        </p:nvSpPr>
-        <p:spPr>
-          <a:xfrm>
-            <a:off x="6903720" y="5989320"/>
-            <a:ext cx="1691640" cy="274320"/>
-          </a:xfrm>
-          <a:prstGeom prst="rect">
-            <a:avLst/>
-          </a:prstGeom>
-          <a:noFill/>
-        </p:spPr>
-        <p:txBody>
-          <a:bodyPr wrap="square" lIns="0" rIns="0" tIns="0" bIns="0">
-            <a:spAutoFit/>
-          </a:bodyPr>
-          <a:lstStyle/>
-          <a:p>
-            <a:pPr algn="r">
-              <a:lnSpc>
-                <a:spcPts val="1600"/>
-              </a:lnSpc>
-              <a:spcAft>
-                <a:spcPts val="0"/>
-              </a:spcAft>
-            </a:pPr>
-            <a:r>
-              <a:rPr sz="1250" b="0" i="0">
-                <a:solidFill>
-                  <a:srgbClr val="212529"/>
-                </a:solidFill>
-                <a:latin typeface="Garamond"/>
-              </a:rPr>
-              <a:t>18,571</a:t>
-            </a:r>
-          </a:p>
-        </p:txBody>
-      </p:sp>
-      <p:sp>
-        <p:nvSpPr>
-          <p:cNvPr id="72" name="TextBox 71"/>
-          <p:cNvSpPr txBox="1"/>
-          <p:nvPr/>
-        </p:nvSpPr>
-        <p:spPr>
-          <a:xfrm>
-            <a:off x="8778240" y="5989320"/>
-            <a:ext cx="1691640" cy="274320"/>
-          </a:xfrm>
-          <a:prstGeom prst="rect">
-            <a:avLst/>
-          </a:prstGeom>
-          <a:noFill/>
-        </p:spPr>
-        <p:txBody>
-          <a:bodyPr wrap="square" lIns="0" rIns="0" tIns="0" bIns="0">
-            <a:spAutoFit/>
-          </a:bodyPr>
-          <a:lstStyle/>
-          <a:p>
-            <a:pPr algn="r">
-              <a:lnSpc>
-                <a:spcPts val="1600"/>
-              </a:lnSpc>
-              <a:spcAft>
-                <a:spcPts val="0"/>
-              </a:spcAft>
-            </a:pPr>
-            <a:r>
-              <a:rPr sz="1250" b="0" i="0">
-                <a:solidFill>
-                  <a:srgbClr val="212529"/>
-                </a:solidFill>
-                <a:latin typeface="Garamond"/>
-              </a:rPr>
-              <a:t>18,571</a:t>
-            </a:r>
-          </a:p>
-        </p:txBody>
-      </p:sp>
-      <p:cxnSp>
-        <p:nvCxnSpPr>
-          <p:cNvPr id="73" name="Connector 72"/>
-          <p:cNvCxnSpPr/>
-          <p:nvPr/>
-        </p:nvCxnSpPr>
-        <p:spPr>
-          <a:xfrm>
-            <a:off x="1005840" y="6263640"/>
-            <a:ext cx="9509760" cy="0"/>
-          </a:xfrm>
-          <a:prstGeom prst="line">
-            <a:avLst/>
-          </a:prstGeom>
-          <a:ln w="16510">
-            <a:solidFill>
-              <a:srgbClr val="212529"/>
-            </a:solidFill>
-          </a:ln>
-          <a:effectLst/>
-        </p:spPr>
-        <p:style>
-          <a:lnRef idx="2">
-            <a:schemeClr val="accent1"/>
-          </a:lnRef>
-          <a:fillRef idx="0">
-            <a:schemeClr val="accent1"/>
-          </a:fillRef>
-          <a:effectRef idx="1">
-            <a:schemeClr val="accent1"/>
-          </a:effectRef>
-          <a:fontRef idx="minor">
-            <a:schemeClr val="tx1"/>
-          </a:fontRef>
-        </p:style>
-      </p:cxnSp>
-      <p:sp>
-        <p:nvSpPr>
-          <p:cNvPr id="74" name="TextBox 73"/>
-          <p:cNvSpPr txBox="1"/>
-          <p:nvPr/>
-        </p:nvSpPr>
-        <p:spPr>
-          <a:xfrm>
-            <a:off x="1005840" y="6391656"/>
-            <a:ext cx="9509760" cy="548640"/>
-          </a:xfrm>
-          <a:prstGeom prst="rect">
-            <a:avLst/>
-          </a:prstGeom>
-          <a:noFill/>
-        </p:spPr>
-        <p:txBody>
-          <a:bodyPr wrap="square" lIns="0" rIns="0" tIns="0" bIns="0">
-            <a:spAutoFit/>
-          </a:bodyPr>
-          <a:lstStyle/>
-          <a:p>
-            <a:pPr algn="l">
-              <a:lnSpc>
-                <a:spcPts val="1344"/>
-              </a:lnSpc>
-              <a:spcAft>
-                <a:spcPts val="0"/>
-              </a:spcAft>
-            </a:pPr>
-            <a:r>
-              <a:rPr sz="1050" b="0" i="1">
-                <a:solidFill>
-                  <a:srgbClr val="6B7480"/>
-                </a:solidFill>
-                <a:latin typeface="Garamond"/>
-              </a:rPr>
-              <a:t>Robust standard errors in parentheses. * p&lt;0.10, ** p&lt;0.05, *** p&lt;0.01. Weighted. Full set of controls as in the main specification.</a:t>
-            </a:r>
-          </a:p>
-        </p:txBody>
-      </p:sp>
-      <p:sp>
-        <p:nvSpPr>
-          <p:cNvPr id="75" name="Rounded Rectangle 74">
-            <a:hlinkClick action="ppaction://hlinksldjump" r:id="rId2"/>
+              <a:t>Recomputing the whole series on the narrow core moves the pooled rate by 0.1 points. The 2003 and 2020 reclassifications leave no visible break.</a:t>
+            </a:r>
+          </a:p>
+        </p:txBody>
+      </p:sp>
+      <p:sp>
+        <p:nvSpPr>
+          <p:cNvPr id="6" name="Rounded Rectangle 5">
+            <a:hlinkClick action="ppaction://hlinksldjump" r:id="rId3"/>
           </p:cNvPr>
           <p:cNvSpPr/>
           <p:nvPr/>
@@ -23558,7 +20737,7 @@
                 </a:solidFill>
                 <a:latin typeface="Garamond"/>
               </a:rPr>
-              <a:t>LPM vs logit vs probit</a:t>
+              <a:t>Linear probability model, fixed-effects variants</a:t>
             </a:r>
           </a:p>
         </p:txBody>
@@ -23671,7 +20850,7 @@
                 </a:solidFill>
                 <a:latin typeface="Garamond"/>
               </a:rPr>
-              <a:t>Average marginal effect on leaving (×100)</a:t>
+              <a:t>Dependent variable: left teaching (×100)</a:t>
             </a:r>
           </a:p>
         </p:txBody>
@@ -23749,7 +20928,7 @@
                 </a:solidFill>
                 <a:latin typeface="Garamond"/>
               </a:rPr>
-              <a:t>LPM</a:t>
+              <a:t>(1)</a:t>
             </a:r>
           </a:p>
         </p:txBody>
@@ -23791,7 +20970,7 @@
                 </a:solidFill>
                 <a:latin typeface="Garamond"/>
               </a:rPr>
-              <a:t>Logit</a:t>
+              <a:t>(2)</a:t>
             </a:r>
           </a:p>
         </p:txBody>
@@ -23833,7 +21012,7 @@
                 </a:solidFill>
                 <a:latin typeface="Garamond"/>
               </a:rPr>
-              <a:t>Probit</a:t>
+              <a:t>(3)</a:t>
             </a:r>
           </a:p>
         </p:txBody>
@@ -23953,7 +21132,7 @@
                 </a:solidFill>
                 <a:latin typeface="Garamond"/>
               </a:rPr>
-              <a:t>−11.13***</a:t>
+              <a:t>−11.54***</a:t>
             </a:r>
           </a:p>
         </p:txBody>
@@ -23995,7 +21174,7 @@
                 </a:solidFill>
                 <a:latin typeface="Garamond"/>
               </a:rPr>
-              <a:t>−8.78***</a:t>
+              <a:t>−11.55***</a:t>
             </a:r>
           </a:p>
         </p:txBody>
@@ -24037,7 +21216,7 @@
                 </a:solidFill>
                 <a:latin typeface="Garamond"/>
               </a:rPr>
-              <a:t>−8.49***</a:t>
+              <a:t>−11.65***</a:t>
             </a:r>
           </a:p>
         </p:txBody>
@@ -24079,7 +21258,7 @@
                 </a:solidFill>
                 <a:latin typeface="Garamond"/>
               </a:rPr>
-              <a:t>(0.55)</a:t>
+              <a:t>(0.67)</a:t>
             </a:r>
           </a:p>
         </p:txBody>
@@ -24121,7 +21300,7 @@
                 </a:solidFill>
                 <a:latin typeface="Garamond"/>
               </a:rPr>
-              <a:t>(0.40)</a:t>
+              <a:t>(0.66)</a:t>
             </a:r>
           </a:p>
         </p:txBody>
@@ -24163,7 +21342,7 @@
                 </a:solidFill>
                 <a:latin typeface="Garamond"/>
               </a:rPr>
-              <a:t>(0.39)</a:t>
+              <a:t>(0.67)</a:t>
             </a:r>
           </a:p>
         </p:txBody>
@@ -24247,7 +21426,7 @@
                 </a:solidFill>
                 <a:latin typeface="Garamond"/>
               </a:rPr>
-              <a:t>+8.77***</a:t>
+              <a:t>+8.67***</a:t>
             </a:r>
           </a:p>
         </p:txBody>
@@ -24289,7 +21468,7 @@
                 </a:solidFill>
                 <a:latin typeface="Garamond"/>
               </a:rPr>
-              <a:t>+3.86***</a:t>
+              <a:t>+8.67***</a:t>
             </a:r>
           </a:p>
         </p:txBody>
@@ -24331,7 +21510,7 @@
                 </a:solidFill>
                 <a:latin typeface="Garamond"/>
               </a:rPr>
-              <a:t>+4.32***</a:t>
+              <a:t>+8.63***</a:t>
             </a:r>
           </a:p>
         </p:txBody>
@@ -24373,7 +21552,7 @@
                 </a:solidFill>
                 <a:latin typeface="Garamond"/>
               </a:rPr>
-              <a:t>(0.92)</a:t>
+              <a:t>(1.09)</a:t>
             </a:r>
           </a:p>
         </p:txBody>
@@ -24415,7 +21594,7 @@
                 </a:solidFill>
                 <a:latin typeface="Garamond"/>
               </a:rPr>
-              <a:t>(0.44)</a:t>
+              <a:t>(1.09)</a:t>
             </a:r>
           </a:p>
         </p:txBody>
@@ -24457,7 +21636,7 @@
                 </a:solidFill>
                 <a:latin typeface="Garamond"/>
               </a:rPr>
-              <a:t>(0.47)</a:t>
+              <a:t>(1.10)</a:t>
             </a:r>
           </a:p>
         </p:txBody>
@@ -24541,7 +21720,7 @@
                 </a:solidFill>
                 <a:latin typeface="Garamond"/>
               </a:rPr>
-              <a:t>−2.55***</a:t>
+              <a:t>−2.35***</a:t>
             </a:r>
           </a:p>
         </p:txBody>
@@ -24583,7 +21762,7 @@
                 </a:solidFill>
                 <a:latin typeface="Garamond"/>
               </a:rPr>
-              <a:t>−2.38***</a:t>
+              <a:t>−2.33***</a:t>
             </a:r>
           </a:p>
         </p:txBody>
@@ -24625,7 +21804,7 @@
                 </a:solidFill>
                 <a:latin typeface="Garamond"/>
               </a:rPr>
-              <a:t>−2.41***</a:t>
+              <a:t>−2.33***</a:t>
             </a:r>
           </a:p>
         </p:txBody>
@@ -24667,7 +21846,7 @@
                 </a:solidFill>
                 <a:latin typeface="Garamond"/>
               </a:rPr>
-              <a:t>(0.44)</a:t>
+              <a:t>(0.52)</a:t>
             </a:r>
           </a:p>
         </p:txBody>
@@ -24709,7 +21888,7 @@
                 </a:solidFill>
                 <a:latin typeface="Garamond"/>
               </a:rPr>
-              <a:t>(0.39)</a:t>
+              <a:t>(0.52)</a:t>
             </a:r>
           </a:p>
         </p:txBody>
@@ -24751,7 +21930,7 @@
                 </a:solidFill>
                 <a:latin typeface="Garamond"/>
               </a:rPr>
-              <a:t>(0.38)</a:t>
+              <a:t>(0.52)</a:t>
             </a:r>
           </a:p>
         </p:txBody>
@@ -24835,7 +22014,7 @@
                 </a:solidFill>
                 <a:latin typeface="Garamond"/>
               </a:rPr>
-              <a:t>−2.17***</a:t>
+              <a:t>−2.35***</a:t>
             </a:r>
           </a:p>
         </p:txBody>
@@ -24877,7 +22056,7 @@
                 </a:solidFill>
                 <a:latin typeface="Garamond"/>
               </a:rPr>
-              <a:t>−2.24***</a:t>
+              <a:t>−2.38***</a:t>
             </a:r>
           </a:p>
         </p:txBody>
@@ -24919,7 +22098,7 @@
                 </a:solidFill>
                 <a:latin typeface="Garamond"/>
               </a:rPr>
-              <a:t>−2.27***</a:t>
+              <a:t>−2.39***</a:t>
             </a:r>
           </a:p>
         </p:txBody>
@@ -24961,7 +22140,7 @@
                 </a:solidFill>
                 <a:latin typeface="Garamond"/>
               </a:rPr>
-              <a:t>(0.47)</a:t>
+              <a:t>(0.56)</a:t>
             </a:r>
           </a:p>
         </p:txBody>
@@ -25003,7 +22182,7 @@
                 </a:solidFill>
                 <a:latin typeface="Garamond"/>
               </a:rPr>
-              <a:t>(0.39)</a:t>
+              <a:t>(0.56)</a:t>
             </a:r>
           </a:p>
         </p:txBody>
@@ -25045,7 +22224,7 @@
                 </a:solidFill>
                 <a:latin typeface="Garamond"/>
               </a:rPr>
-              <a:t>(0.39)</a:t>
+              <a:t>(0.56)</a:t>
             </a:r>
           </a:p>
         </p:txBody>
@@ -25129,7 +22308,7 @@
                 </a:solidFill>
                 <a:latin typeface="Garamond"/>
               </a:rPr>
-              <a:t>+5.65***</a:t>
+              <a:t>+5.72***</a:t>
             </a:r>
           </a:p>
         </p:txBody>
@@ -25171,7 +22350,7 @@
                 </a:solidFill>
                 <a:latin typeface="Garamond"/>
               </a:rPr>
-              <a:t>+4.74***</a:t>
+              <a:t>+5.63***</a:t>
             </a:r>
           </a:p>
         </p:txBody>
@@ -25213,7 +22392,7 @@
                 </a:solidFill>
                 <a:latin typeface="Garamond"/>
               </a:rPr>
-              <a:t>+4.59***</a:t>
+              <a:t>+5.71***</a:t>
             </a:r>
           </a:p>
         </p:txBody>
@@ -25255,7 +22434,7 @@
                 </a:solidFill>
                 <a:latin typeface="Garamond"/>
               </a:rPr>
-              <a:t>(1.33)</a:t>
+              <a:t>(1.56)</a:t>
             </a:r>
           </a:p>
         </p:txBody>
@@ -25297,7 +22476,7 @@
                 </a:solidFill>
                 <a:latin typeface="Garamond"/>
               </a:rPr>
-              <a:t>(0.90)</a:t>
+              <a:t>(1.56)</a:t>
             </a:r>
           </a:p>
         </p:txBody>
@@ -25339,7 +22518,7 @@
                 </a:solidFill>
                 <a:latin typeface="Garamond"/>
               </a:rPr>
-              <a:t>(0.91)</a:t>
+              <a:t>(1.56)</a:t>
             </a:r>
           </a:p>
         </p:txBody>
@@ -25423,7 +22602,7 @@
                 </a:solidFill>
                 <a:latin typeface="Garamond"/>
               </a:rPr>
-              <a:t>+8.31***</a:t>
+              <a:t>+8.85***</a:t>
             </a:r>
           </a:p>
         </p:txBody>
@@ -25465,7 +22644,7 @@
                 </a:solidFill>
                 <a:latin typeface="Garamond"/>
               </a:rPr>
-              <a:t>+3.78***</a:t>
+              <a:t>+8.94***</a:t>
             </a:r>
           </a:p>
         </p:txBody>
@@ -25507,7 +22686,7 @@
                 </a:solidFill>
                 <a:latin typeface="Garamond"/>
               </a:rPr>
-              <a:t>+4.19***</a:t>
+              <a:t>+8.94***</a:t>
             </a:r>
           </a:p>
         </p:txBody>
@@ -25549,7 +22728,7 @@
                 </a:solidFill>
                 <a:latin typeface="Garamond"/>
               </a:rPr>
-              <a:t>(1.84)</a:t>
+              <a:t>(2.14)</a:t>
             </a:r>
           </a:p>
         </p:txBody>
@@ -25591,7 +22770,7 @@
                 </a:solidFill>
                 <a:latin typeface="Garamond"/>
               </a:rPr>
-              <a:t>(0.80)</a:t>
+              <a:t>(2.14)</a:t>
             </a:r>
           </a:p>
         </p:txBody>
@@ -25633,7 +22812,7 @@
                 </a:solidFill>
                 <a:latin typeface="Garamond"/>
               </a:rPr>
-              <a:t>(0.88)</a:t>
+              <a:t>(2.14)</a:t>
             </a:r>
           </a:p>
         </p:txBody>
@@ -25717,7 +22896,7 @@
                 </a:solidFill>
                 <a:latin typeface="Garamond"/>
               </a:rPr>
-              <a:t>+4.67***</a:t>
+              <a:t>+4.17***</a:t>
             </a:r>
           </a:p>
         </p:txBody>
@@ -25759,7 +22938,7 @@
                 </a:solidFill>
                 <a:latin typeface="Garamond"/>
               </a:rPr>
-              <a:t>+2.24***</a:t>
+              <a:t>+4.13***</a:t>
             </a:r>
           </a:p>
         </p:txBody>
@@ -25801,7 +22980,7 @@
                 </a:solidFill>
                 <a:latin typeface="Garamond"/>
               </a:rPr>
-              <a:t>+2.50***</a:t>
+              <a:t>+4.01***</a:t>
             </a:r>
           </a:p>
         </p:txBody>
@@ -25843,7 +23022,7 @@
                 </a:solidFill>
                 <a:latin typeface="Garamond"/>
               </a:rPr>
-              <a:t>(1.10)</a:t>
+              <a:t>(1.24)</a:t>
             </a:r>
           </a:p>
         </p:txBody>
@@ -25885,7 +23064,7 @@
                 </a:solidFill>
                 <a:latin typeface="Garamond"/>
               </a:rPr>
-              <a:t>(0.58)</a:t>
+              <a:t>(1.24)</a:t>
             </a:r>
           </a:p>
         </p:txBody>
@@ -25927,7 +23106,7 @@
                 </a:solidFill>
                 <a:latin typeface="Garamond"/>
               </a:rPr>
-              <a:t>(0.62)</a:t>
+              <a:t>(1.25)</a:t>
             </a:r>
           </a:p>
         </p:txBody>
@@ -26047,7 +23226,7 @@
                 </a:solidFill>
                 <a:latin typeface="Garamond"/>
               </a:rPr>
-              <a:t>Yes</a:t>
+              <a:t>No</a:t>
             </a:r>
           </a:p>
         </p:txBody>
@@ -26173,7 +23352,7 @@
                 </a:solidFill>
                 <a:latin typeface="Garamond"/>
               </a:rPr>
-              <a:t>Observations</a:t>
+              <a:t>State fixed effects</a:t>
             </a:r>
           </a:p>
         </p:txBody>
@@ -26215,7 +23394,7 @@
                 </a:solidFill>
                 <a:latin typeface="Garamond"/>
               </a:rPr>
-              <a:t>18,571</a:t>
+              <a:t>No</a:t>
             </a:r>
           </a:p>
         </p:txBody>
@@ -26257,7 +23436,7 @@
                 </a:solidFill>
                 <a:latin typeface="Garamond"/>
               </a:rPr>
-              <a:t>18,571</a:t>
+              <a:t>No</a:t>
             </a:r>
           </a:p>
         </p:txBody>
@@ -26299,6 +23478,174 @@
                 </a:solidFill>
                 <a:latin typeface="Garamond"/>
               </a:rPr>
+              <a:t>Yes</a:t>
+            </a:r>
+          </a:p>
+        </p:txBody>
+      </p:sp>
+      <p:sp>
+        <p:nvSpPr>
+          <p:cNvPr id="69" name="TextBox 68"/>
+          <p:cNvSpPr txBox="1"/>
+          <p:nvPr/>
+        </p:nvSpPr>
+        <p:spPr>
+          <a:xfrm>
+            <a:off x="1005840" y="5989320"/>
+            <a:ext cx="3840480" cy="274320"/>
+          </a:xfrm>
+          <a:prstGeom prst="rect">
+            <a:avLst/>
+          </a:prstGeom>
+          <a:noFill/>
+        </p:spPr>
+        <p:txBody>
+          <a:bodyPr wrap="square" lIns="0" rIns="0" tIns="0" bIns="0">
+            <a:spAutoFit/>
+          </a:bodyPr>
+          <a:lstStyle/>
+          <a:p>
+            <a:pPr algn="l">
+              <a:lnSpc>
+                <a:spcPts val="1600"/>
+              </a:lnSpc>
+              <a:spcAft>
+                <a:spcPts val="0"/>
+              </a:spcAft>
+            </a:pPr>
+            <a:r>
+              <a:rPr sz="1250" b="0" i="0">
+                <a:solidFill>
+                  <a:srgbClr val="212529"/>
+                </a:solidFill>
+                <a:latin typeface="Garamond"/>
+              </a:rPr>
+              <a:t>Observations</a:t>
+            </a:r>
+          </a:p>
+        </p:txBody>
+      </p:sp>
+      <p:sp>
+        <p:nvSpPr>
+          <p:cNvPr id="70" name="TextBox 69"/>
+          <p:cNvSpPr txBox="1"/>
+          <p:nvPr/>
+        </p:nvSpPr>
+        <p:spPr>
+          <a:xfrm>
+            <a:off x="5029200" y="5989320"/>
+            <a:ext cx="1691640" cy="274320"/>
+          </a:xfrm>
+          <a:prstGeom prst="rect">
+            <a:avLst/>
+          </a:prstGeom>
+          <a:noFill/>
+        </p:spPr>
+        <p:txBody>
+          <a:bodyPr wrap="square" lIns="0" rIns="0" tIns="0" bIns="0">
+            <a:spAutoFit/>
+          </a:bodyPr>
+          <a:lstStyle/>
+          <a:p>
+            <a:pPr algn="r">
+              <a:lnSpc>
+                <a:spcPts val="1600"/>
+              </a:lnSpc>
+              <a:spcAft>
+                <a:spcPts val="0"/>
+              </a:spcAft>
+            </a:pPr>
+            <a:r>
+              <a:rPr sz="1250" b="0" i="0">
+                <a:solidFill>
+                  <a:srgbClr val="212529"/>
+                </a:solidFill>
+                <a:latin typeface="Garamond"/>
+              </a:rPr>
+              <a:t>18,571</a:t>
+            </a:r>
+          </a:p>
+        </p:txBody>
+      </p:sp>
+      <p:sp>
+        <p:nvSpPr>
+          <p:cNvPr id="71" name="TextBox 70"/>
+          <p:cNvSpPr txBox="1"/>
+          <p:nvPr/>
+        </p:nvSpPr>
+        <p:spPr>
+          <a:xfrm>
+            <a:off x="6903720" y="5989320"/>
+            <a:ext cx="1691640" cy="274320"/>
+          </a:xfrm>
+          <a:prstGeom prst="rect">
+            <a:avLst/>
+          </a:prstGeom>
+          <a:noFill/>
+        </p:spPr>
+        <p:txBody>
+          <a:bodyPr wrap="square" lIns="0" rIns="0" tIns="0" bIns="0">
+            <a:spAutoFit/>
+          </a:bodyPr>
+          <a:lstStyle/>
+          <a:p>
+            <a:pPr algn="r">
+              <a:lnSpc>
+                <a:spcPts val="1600"/>
+              </a:lnSpc>
+              <a:spcAft>
+                <a:spcPts val="0"/>
+              </a:spcAft>
+            </a:pPr>
+            <a:r>
+              <a:rPr sz="1250" b="0" i="0">
+                <a:solidFill>
+                  <a:srgbClr val="212529"/>
+                </a:solidFill>
+                <a:latin typeface="Garamond"/>
+              </a:rPr>
+              <a:t>18,571</a:t>
+            </a:r>
+          </a:p>
+        </p:txBody>
+      </p:sp>
+      <p:sp>
+        <p:nvSpPr>
+          <p:cNvPr id="72" name="TextBox 71"/>
+          <p:cNvSpPr txBox="1"/>
+          <p:nvPr/>
+        </p:nvSpPr>
+        <p:spPr>
+          <a:xfrm>
+            <a:off x="8778240" y="5989320"/>
+            <a:ext cx="1691640" cy="274320"/>
+          </a:xfrm>
+          <a:prstGeom prst="rect">
+            <a:avLst/>
+          </a:prstGeom>
+          <a:noFill/>
+        </p:spPr>
+        <p:txBody>
+          <a:bodyPr wrap="square" lIns="0" rIns="0" tIns="0" bIns="0">
+            <a:spAutoFit/>
+          </a:bodyPr>
+          <a:lstStyle/>
+          <a:p>
+            <a:pPr algn="r">
+              <a:lnSpc>
+                <a:spcPts val="1600"/>
+              </a:lnSpc>
+              <a:spcAft>
+                <a:spcPts val="0"/>
+              </a:spcAft>
+            </a:pPr>
+            <a:r>
+              <a:rPr sz="1250" b="0" i="0">
+                <a:solidFill>
+                  <a:srgbClr val="212529"/>
+                </a:solidFill>
+                <a:latin typeface="Garamond"/>
+              </a:rPr>
               <a:t>18,571</a:t>
             </a:r>
           </a:p>
@@ -26306,13 +23653,13 @@
       </p:sp>
       <p:cxnSp>
         <p:nvCxnSpPr>
-          <p:cNvPr id="69" name="Connector 68"/>
+          <p:cNvPr id="73" name="Connector 72"/>
           <p:cNvCxnSpPr/>
           <p:nvPr/>
         </p:nvCxnSpPr>
         <p:spPr>
           <a:xfrm>
-            <a:off x="1005840" y="6007608"/>
+            <a:off x="1005840" y="6263640"/>
             <a:ext cx="9509760" cy="0"/>
           </a:xfrm>
           <a:prstGeom prst="line">
@@ -26342,13 +23689,13 @@
       </p:cxnSp>
       <p:sp>
         <p:nvSpPr>
-          <p:cNvPr id="70" name="TextBox 69"/>
-          <p:cNvSpPr txBox="1"/>
-          <p:nvPr/>
-        </p:nvSpPr>
-        <p:spPr>
-          <a:xfrm>
-            <a:off x="1005840" y="6135624"/>
+          <p:cNvPr id="74" name="TextBox 73"/>
+          <p:cNvSpPr txBox="1"/>
+          <p:nvPr/>
+        </p:nvSpPr>
+        <p:spPr>
+          <a:xfrm>
+            <a:off x="1005840" y="6391656"/>
             <a:ext cx="9509760" cy="548640"/>
           </a:xfrm>
           <a:prstGeom prst="rect">
@@ -26377,14 +23724,14 @@
                 </a:solidFill>
                 <a:latin typeface="Garamond"/>
               </a:rPr>
-              <a:t>Standard errors in parentheses, delta method for the logit and probit marginal effects. * p&lt;0.10, ** p&lt;0.05, *** p&lt;0.01. The probit column is the main specification of the coefficient plot.</a:t>
-            </a:r>
-          </a:p>
-        </p:txBody>
-      </p:sp>
-      <p:sp>
-        <p:nvSpPr>
-          <p:cNvPr id="71" name="Rounded Rectangle 70">
+              <a:t>Robust standard errors in parentheses. * p&lt;0.10, ** p&lt;0.05, *** p&lt;0.01. Weighted. Full set of controls as in the main specification.</a:t>
+            </a:r>
+          </a:p>
+        </p:txBody>
+      </p:sp>
+      <p:sp>
+        <p:nvSpPr>
+          <p:cNvPr id="75" name="Rounded Rectangle 74">
             <a:hlinkClick action="ppaction://hlinksldjump" r:id="rId2"/>
           </p:cNvPr>
           <p:cNvSpPr/>
@@ -26491,7 +23838,7 @@
                 </a:solidFill>
                 <a:latin typeface="Garamond"/>
               </a:rPr>
-              <a:t>Is the LPM bounded between 0 and 1?</a:t>
+              <a:t>LPM vs logit vs probit</a:t>
             </a:r>
           </a:p>
         </p:txBody>
@@ -26531,30 +23878,42 @@
           </a:p>
         </p:txBody>
       </p:sp>
-      <p:pic>
-        <p:nvPicPr>
-          <p:cNvPr id="4" name="Picture 3" descr="lpm_check.png"/>
-          <p:cNvPicPr>
-            <a:picLocks noChangeAspect="1"/>
-          </p:cNvPicPr>
-          <p:nvPr/>
-        </p:nvPicPr>
-        <p:blipFill>
-          <a:blip r:embed="rId2"/>
-          <a:stretch>
-            <a:fillRect/>
-          </a:stretch>
-        </p:blipFill>
-        <p:spPr>
-          <a:xfrm>
-            <a:off x="1557117" y="1024128"/>
-            <a:ext cx="9047284" cy="4480560"/>
-          </a:xfrm>
-          <a:prstGeom prst="rect">
-            <a:avLst/>
-          </a:prstGeom>
-        </p:spPr>
-      </p:pic>
+      <p:cxnSp>
+        <p:nvCxnSpPr>
+          <p:cNvPr id="4" name="Connector 3"/>
+          <p:cNvCxnSpPr/>
+          <p:nvPr/>
+        </p:nvCxnSpPr>
+        <p:spPr>
+          <a:xfrm>
+            <a:off x="1005840" y="1298448"/>
+            <a:ext cx="9509760" cy="0"/>
+          </a:xfrm>
+          <a:prstGeom prst="line">
+            <a:avLst/>
+          </a:prstGeom>
+          <a:ln w="16510">
+            <a:solidFill>
+              <a:srgbClr val="212529"/>
+            </a:solidFill>
+          </a:ln>
+          <a:effectLst/>
+        </p:spPr>
+        <p:style>
+          <a:lnRef idx="2">
+            <a:schemeClr val="accent1"/>
+          </a:lnRef>
+          <a:fillRef idx="0">
+            <a:schemeClr val="accent1"/>
+          </a:fillRef>
+          <a:effectRef idx="1">
+            <a:schemeClr val="accent1"/>
+          </a:effectRef>
+          <a:fontRef idx="minor">
+            <a:schemeClr val="tx1"/>
+          </a:fontRef>
+        </p:style>
+      </p:cxnSp>
       <p:sp>
         <p:nvSpPr>
           <p:cNvPr id="5" name="TextBox 4"/>
@@ -26563,8 +23922,248 @@
         </p:nvSpPr>
         <p:spPr>
           <a:xfrm>
-            <a:off x="822960" y="5760720"/>
-            <a:ext cx="10789920" cy="822960"/>
+            <a:off x="5029200" y="1371600"/>
+            <a:ext cx="5486400" cy="274320"/>
+          </a:xfrm>
+          <a:prstGeom prst="rect">
+            <a:avLst/>
+          </a:prstGeom>
+          <a:noFill/>
+        </p:spPr>
+        <p:txBody>
+          <a:bodyPr wrap="square" lIns="0" rIns="0" tIns="0" bIns="0">
+            <a:spAutoFit/>
+          </a:bodyPr>
+          <a:lstStyle/>
+          <a:p>
+            <a:pPr algn="ctr">
+              <a:lnSpc>
+                <a:spcPts val="1600"/>
+              </a:lnSpc>
+              <a:spcAft>
+                <a:spcPts val="0"/>
+              </a:spcAft>
+            </a:pPr>
+            <a:r>
+              <a:rPr sz="1250" b="0" i="0">
+                <a:solidFill>
+                  <a:srgbClr val="212529"/>
+                </a:solidFill>
+                <a:latin typeface="Garamond"/>
+              </a:rPr>
+              <a:t>Average marginal effect on leaving (×100)</a:t>
+            </a:r>
+          </a:p>
+        </p:txBody>
+      </p:sp>
+      <p:cxnSp>
+        <p:nvCxnSpPr>
+          <p:cNvPr id="6" name="Connector 5"/>
+          <p:cNvCxnSpPr/>
+          <p:nvPr/>
+        </p:nvCxnSpPr>
+        <p:spPr>
+          <a:xfrm>
+            <a:off x="5029200" y="1700784"/>
+            <a:ext cx="5486400" cy="0"/>
+          </a:xfrm>
+          <a:prstGeom prst="line">
+            <a:avLst/>
+          </a:prstGeom>
+          <a:ln w="8890">
+            <a:solidFill>
+              <a:srgbClr val="212529"/>
+            </a:solidFill>
+          </a:ln>
+          <a:effectLst/>
+        </p:spPr>
+        <p:style>
+          <a:lnRef idx="2">
+            <a:schemeClr val="accent1"/>
+          </a:lnRef>
+          <a:fillRef idx="0">
+            <a:schemeClr val="accent1"/>
+          </a:fillRef>
+          <a:effectRef idx="1">
+            <a:schemeClr val="accent1"/>
+          </a:effectRef>
+          <a:fontRef idx="minor">
+            <a:schemeClr val="tx1"/>
+          </a:fontRef>
+        </p:style>
+      </p:cxnSp>
+      <p:sp>
+        <p:nvSpPr>
+          <p:cNvPr id="7" name="TextBox 6"/>
+          <p:cNvSpPr txBox="1"/>
+          <p:nvPr/>
+        </p:nvSpPr>
+        <p:spPr>
+          <a:xfrm>
+            <a:off x="5029200" y="1764792"/>
+            <a:ext cx="1691640" cy="274320"/>
+          </a:xfrm>
+          <a:prstGeom prst="rect">
+            <a:avLst/>
+          </a:prstGeom>
+          <a:noFill/>
+        </p:spPr>
+        <p:txBody>
+          <a:bodyPr wrap="square" lIns="0" rIns="0" tIns="0" bIns="0">
+            <a:spAutoFit/>
+          </a:bodyPr>
+          <a:lstStyle/>
+          <a:p>
+            <a:pPr algn="r">
+              <a:lnSpc>
+                <a:spcPts val="1600"/>
+              </a:lnSpc>
+              <a:spcAft>
+                <a:spcPts val="0"/>
+              </a:spcAft>
+            </a:pPr>
+            <a:r>
+              <a:rPr sz="1250" b="1" i="0">
+                <a:solidFill>
+                  <a:srgbClr val="212529"/>
+                </a:solidFill>
+                <a:latin typeface="Garamond"/>
+              </a:rPr>
+              <a:t>LPM</a:t>
+            </a:r>
+          </a:p>
+        </p:txBody>
+      </p:sp>
+      <p:sp>
+        <p:nvSpPr>
+          <p:cNvPr id="8" name="TextBox 7"/>
+          <p:cNvSpPr txBox="1"/>
+          <p:nvPr/>
+        </p:nvSpPr>
+        <p:spPr>
+          <a:xfrm>
+            <a:off x="6903720" y="1764792"/>
+            <a:ext cx="1691640" cy="274320"/>
+          </a:xfrm>
+          <a:prstGeom prst="rect">
+            <a:avLst/>
+          </a:prstGeom>
+          <a:noFill/>
+        </p:spPr>
+        <p:txBody>
+          <a:bodyPr wrap="square" lIns="0" rIns="0" tIns="0" bIns="0">
+            <a:spAutoFit/>
+          </a:bodyPr>
+          <a:lstStyle/>
+          <a:p>
+            <a:pPr algn="r">
+              <a:lnSpc>
+                <a:spcPts val="1600"/>
+              </a:lnSpc>
+              <a:spcAft>
+                <a:spcPts val="0"/>
+              </a:spcAft>
+            </a:pPr>
+            <a:r>
+              <a:rPr sz="1250" b="1" i="0">
+                <a:solidFill>
+                  <a:srgbClr val="212529"/>
+                </a:solidFill>
+                <a:latin typeface="Garamond"/>
+              </a:rPr>
+              <a:t>Logit</a:t>
+            </a:r>
+          </a:p>
+        </p:txBody>
+      </p:sp>
+      <p:sp>
+        <p:nvSpPr>
+          <p:cNvPr id="9" name="TextBox 8"/>
+          <p:cNvSpPr txBox="1"/>
+          <p:nvPr/>
+        </p:nvSpPr>
+        <p:spPr>
+          <a:xfrm>
+            <a:off x="8778240" y="1764792"/>
+            <a:ext cx="1691640" cy="274320"/>
+          </a:xfrm>
+          <a:prstGeom prst="rect">
+            <a:avLst/>
+          </a:prstGeom>
+          <a:noFill/>
+        </p:spPr>
+        <p:txBody>
+          <a:bodyPr wrap="square" lIns="0" rIns="0" tIns="0" bIns="0">
+            <a:spAutoFit/>
+          </a:bodyPr>
+          <a:lstStyle/>
+          <a:p>
+            <a:pPr algn="r">
+              <a:lnSpc>
+                <a:spcPts val="1600"/>
+              </a:lnSpc>
+              <a:spcAft>
+                <a:spcPts val="0"/>
+              </a:spcAft>
+            </a:pPr>
+            <a:r>
+              <a:rPr sz="1250" b="1" i="0">
+                <a:solidFill>
+                  <a:srgbClr val="212529"/>
+                </a:solidFill>
+                <a:latin typeface="Garamond"/>
+              </a:rPr>
+              <a:t>Probit</a:t>
+            </a:r>
+          </a:p>
+        </p:txBody>
+      </p:sp>
+      <p:cxnSp>
+        <p:nvCxnSpPr>
+          <p:cNvPr id="10" name="Connector 9"/>
+          <p:cNvCxnSpPr/>
+          <p:nvPr/>
+        </p:nvCxnSpPr>
+        <p:spPr>
+          <a:xfrm>
+            <a:off x="1005840" y="2093976"/>
+            <a:ext cx="9509760" cy="0"/>
+          </a:xfrm>
+          <a:prstGeom prst="line">
+            <a:avLst/>
+          </a:prstGeom>
+          <a:ln w="8890">
+            <a:solidFill>
+              <a:srgbClr val="212529"/>
+            </a:solidFill>
+          </a:ln>
+          <a:effectLst/>
+        </p:spPr>
+        <p:style>
+          <a:lnRef idx="2">
+            <a:schemeClr val="accent1"/>
+          </a:lnRef>
+          <a:fillRef idx="0">
+            <a:schemeClr val="accent1"/>
+          </a:fillRef>
+          <a:effectRef idx="1">
+            <a:schemeClr val="accent1"/>
+          </a:effectRef>
+          <a:fontRef idx="minor">
+            <a:schemeClr val="tx1"/>
+          </a:fontRef>
+        </p:style>
+      </p:cxnSp>
+      <p:sp>
+        <p:nvSpPr>
+          <p:cNvPr id="11" name="TextBox 10"/>
+          <p:cNvSpPr txBox="1"/>
+          <p:nvPr/>
+        </p:nvSpPr>
+        <p:spPr>
+          <a:xfrm>
+            <a:off x="1005840" y="2176272"/>
+            <a:ext cx="3840480" cy="274320"/>
           </a:xfrm>
           <a:prstGeom prst="rect">
             <a:avLst/>
@@ -26579,37 +24178,2494 @@
           <a:p>
             <a:pPr algn="l">
               <a:lnSpc>
-                <a:spcPts val="1855"/>
-              </a:lnSpc>
-              <a:spcAft>
-                <a:spcPts val="0"/>
-              </a:spcAft>
-            </a:pPr>
-            <a:r>
-              <a:rPr sz="1450" b="1" i="0">
-                <a:solidFill>
-                  <a:srgbClr val="102D5E"/>
-                </a:solidFill>
-                <a:latin typeface="Garamond"/>
-              </a:rPr>
-              <a:t>Key message.  </a:t>
-            </a:r>
-            <a:r>
-              <a:rPr sz="1450" b="0" i="0">
+                <a:spcPts val="1600"/>
+              </a:lnSpc>
+              <a:spcAft>
+                <a:spcPts val="0"/>
+              </a:spcAft>
+            </a:pPr>
+            <a:r>
+              <a:rPr sz="1250" b="0" i="0">
                 <a:solidFill>
                   <a:srgbClr val="212529"/>
                 </a:solidFill>
                 <a:latin typeface="Garamond"/>
               </a:rPr>
-              <a:t>No. 22% of fitted values fall below zero, so the probit is the main specification and the LPM a robustness variant.</a:t>
-            </a:r>
-          </a:p>
-        </p:txBody>
-      </p:sp>
-      <p:sp>
-        <p:nvSpPr>
-          <p:cNvPr id="6" name="Rounded Rectangle 5">
-            <a:hlinkClick action="ppaction://hlinksldjump" r:id="rId3"/>
+              <a:t>Full-year contract</a:t>
+            </a:r>
+          </a:p>
+        </p:txBody>
+      </p:sp>
+      <p:sp>
+        <p:nvSpPr>
+          <p:cNvPr id="12" name="TextBox 11"/>
+          <p:cNvSpPr txBox="1"/>
+          <p:nvPr/>
+        </p:nvSpPr>
+        <p:spPr>
+          <a:xfrm>
+            <a:off x="5029200" y="2176272"/>
+            <a:ext cx="1691640" cy="274320"/>
+          </a:xfrm>
+          <a:prstGeom prst="rect">
+            <a:avLst/>
+          </a:prstGeom>
+          <a:noFill/>
+        </p:spPr>
+        <p:txBody>
+          <a:bodyPr wrap="square" lIns="0" rIns="0" tIns="0" bIns="0">
+            <a:spAutoFit/>
+          </a:bodyPr>
+          <a:lstStyle/>
+          <a:p>
+            <a:pPr algn="r">
+              <a:lnSpc>
+                <a:spcPts val="1600"/>
+              </a:lnSpc>
+              <a:spcAft>
+                <a:spcPts val="0"/>
+              </a:spcAft>
+            </a:pPr>
+            <a:r>
+              <a:rPr sz="1250" b="0" i="0">
+                <a:solidFill>
+                  <a:srgbClr val="212529"/>
+                </a:solidFill>
+                <a:latin typeface="Garamond"/>
+              </a:rPr>
+              <a:t>−11.13***</a:t>
+            </a:r>
+          </a:p>
+        </p:txBody>
+      </p:sp>
+      <p:sp>
+        <p:nvSpPr>
+          <p:cNvPr id="13" name="TextBox 12"/>
+          <p:cNvSpPr txBox="1"/>
+          <p:nvPr/>
+        </p:nvSpPr>
+        <p:spPr>
+          <a:xfrm>
+            <a:off x="6903720" y="2176272"/>
+            <a:ext cx="1691640" cy="274320"/>
+          </a:xfrm>
+          <a:prstGeom prst="rect">
+            <a:avLst/>
+          </a:prstGeom>
+          <a:noFill/>
+        </p:spPr>
+        <p:txBody>
+          <a:bodyPr wrap="square" lIns="0" rIns="0" tIns="0" bIns="0">
+            <a:spAutoFit/>
+          </a:bodyPr>
+          <a:lstStyle/>
+          <a:p>
+            <a:pPr algn="r">
+              <a:lnSpc>
+                <a:spcPts val="1600"/>
+              </a:lnSpc>
+              <a:spcAft>
+                <a:spcPts val="0"/>
+              </a:spcAft>
+            </a:pPr>
+            <a:r>
+              <a:rPr sz="1250" b="0" i="0">
+                <a:solidFill>
+                  <a:srgbClr val="212529"/>
+                </a:solidFill>
+                <a:latin typeface="Garamond"/>
+              </a:rPr>
+              <a:t>−8.78***</a:t>
+            </a:r>
+          </a:p>
+        </p:txBody>
+      </p:sp>
+      <p:sp>
+        <p:nvSpPr>
+          <p:cNvPr id="14" name="TextBox 13"/>
+          <p:cNvSpPr txBox="1"/>
+          <p:nvPr/>
+        </p:nvSpPr>
+        <p:spPr>
+          <a:xfrm>
+            <a:off x="8778240" y="2176272"/>
+            <a:ext cx="1691640" cy="274320"/>
+          </a:xfrm>
+          <a:prstGeom prst="rect">
+            <a:avLst/>
+          </a:prstGeom>
+          <a:noFill/>
+        </p:spPr>
+        <p:txBody>
+          <a:bodyPr wrap="square" lIns="0" rIns="0" tIns="0" bIns="0">
+            <a:spAutoFit/>
+          </a:bodyPr>
+          <a:lstStyle/>
+          <a:p>
+            <a:pPr algn="r">
+              <a:lnSpc>
+                <a:spcPts val="1600"/>
+              </a:lnSpc>
+              <a:spcAft>
+                <a:spcPts val="0"/>
+              </a:spcAft>
+            </a:pPr>
+            <a:r>
+              <a:rPr sz="1250" b="0" i="0">
+                <a:solidFill>
+                  <a:srgbClr val="212529"/>
+                </a:solidFill>
+                <a:latin typeface="Garamond"/>
+              </a:rPr>
+              <a:t>−8.49***</a:t>
+            </a:r>
+          </a:p>
+        </p:txBody>
+      </p:sp>
+      <p:sp>
+        <p:nvSpPr>
+          <p:cNvPr id="15" name="TextBox 14"/>
+          <p:cNvSpPr txBox="1"/>
+          <p:nvPr/>
+        </p:nvSpPr>
+        <p:spPr>
+          <a:xfrm>
+            <a:off x="5029200" y="2400300"/>
+            <a:ext cx="1691640" cy="274320"/>
+          </a:xfrm>
+          <a:prstGeom prst="rect">
+            <a:avLst/>
+          </a:prstGeom>
+          <a:noFill/>
+        </p:spPr>
+        <p:txBody>
+          <a:bodyPr wrap="square" lIns="0" rIns="0" tIns="0" bIns="0">
+            <a:spAutoFit/>
+          </a:bodyPr>
+          <a:lstStyle/>
+          <a:p>
+            <a:pPr algn="r">
+              <a:lnSpc>
+                <a:spcPts val="1408"/>
+              </a:lnSpc>
+              <a:spcAft>
+                <a:spcPts val="0"/>
+              </a:spcAft>
+            </a:pPr>
+            <a:r>
+              <a:rPr sz="1100" b="0" i="0">
+                <a:solidFill>
+                  <a:srgbClr val="6B7480"/>
+                </a:solidFill>
+                <a:latin typeface="Garamond"/>
+              </a:rPr>
+              <a:t>(0.55)</a:t>
+            </a:r>
+          </a:p>
+        </p:txBody>
+      </p:sp>
+      <p:sp>
+        <p:nvSpPr>
+          <p:cNvPr id="16" name="TextBox 15"/>
+          <p:cNvSpPr txBox="1"/>
+          <p:nvPr/>
+        </p:nvSpPr>
+        <p:spPr>
+          <a:xfrm>
+            <a:off x="6903720" y="2400300"/>
+            <a:ext cx="1691640" cy="274320"/>
+          </a:xfrm>
+          <a:prstGeom prst="rect">
+            <a:avLst/>
+          </a:prstGeom>
+          <a:noFill/>
+        </p:spPr>
+        <p:txBody>
+          <a:bodyPr wrap="square" lIns="0" rIns="0" tIns="0" bIns="0">
+            <a:spAutoFit/>
+          </a:bodyPr>
+          <a:lstStyle/>
+          <a:p>
+            <a:pPr algn="r">
+              <a:lnSpc>
+                <a:spcPts val="1408"/>
+              </a:lnSpc>
+              <a:spcAft>
+                <a:spcPts val="0"/>
+              </a:spcAft>
+            </a:pPr>
+            <a:r>
+              <a:rPr sz="1100" b="0" i="0">
+                <a:solidFill>
+                  <a:srgbClr val="6B7480"/>
+                </a:solidFill>
+                <a:latin typeface="Garamond"/>
+              </a:rPr>
+              <a:t>(0.40)</a:t>
+            </a:r>
+          </a:p>
+        </p:txBody>
+      </p:sp>
+      <p:sp>
+        <p:nvSpPr>
+          <p:cNvPr id="17" name="TextBox 16"/>
+          <p:cNvSpPr txBox="1"/>
+          <p:nvPr/>
+        </p:nvSpPr>
+        <p:spPr>
+          <a:xfrm>
+            <a:off x="8778240" y="2400300"/>
+            <a:ext cx="1691640" cy="274320"/>
+          </a:xfrm>
+          <a:prstGeom prst="rect">
+            <a:avLst/>
+          </a:prstGeom>
+          <a:noFill/>
+        </p:spPr>
+        <p:txBody>
+          <a:bodyPr wrap="square" lIns="0" rIns="0" tIns="0" bIns="0">
+            <a:spAutoFit/>
+          </a:bodyPr>
+          <a:lstStyle/>
+          <a:p>
+            <a:pPr algn="r">
+              <a:lnSpc>
+                <a:spcPts val="1408"/>
+              </a:lnSpc>
+              <a:spcAft>
+                <a:spcPts val="0"/>
+              </a:spcAft>
+            </a:pPr>
+            <a:r>
+              <a:rPr sz="1100" b="0" i="0">
+                <a:solidFill>
+                  <a:srgbClr val="6B7480"/>
+                </a:solidFill>
+                <a:latin typeface="Garamond"/>
+              </a:rPr>
+              <a:t>(0.39)</a:t>
+            </a:r>
+          </a:p>
+        </p:txBody>
+      </p:sp>
+      <p:sp>
+        <p:nvSpPr>
+          <p:cNvPr id="18" name="TextBox 17"/>
+          <p:cNvSpPr txBox="1"/>
+          <p:nvPr/>
+        </p:nvSpPr>
+        <p:spPr>
+          <a:xfrm>
+            <a:off x="1005840" y="2633472"/>
+            <a:ext cx="3840480" cy="274320"/>
+          </a:xfrm>
+          <a:prstGeom prst="rect">
+            <a:avLst/>
+          </a:prstGeom>
+          <a:noFill/>
+        </p:spPr>
+        <p:txBody>
+          <a:bodyPr wrap="square" lIns="0" rIns="0" tIns="0" bIns="0">
+            <a:spAutoFit/>
+          </a:bodyPr>
+          <a:lstStyle/>
+          <a:p>
+            <a:pPr algn="l">
+              <a:lnSpc>
+                <a:spcPts val="1600"/>
+              </a:lnSpc>
+              <a:spcAft>
+                <a:spcPts val="0"/>
+              </a:spcAft>
+            </a:pPr>
+            <a:r>
+              <a:rPr sz="1250" b="0" i="0">
+                <a:solidFill>
+                  <a:srgbClr val="212529"/>
+                </a:solidFill>
+                <a:latin typeface="Garamond"/>
+              </a:rPr>
+              <a:t>Part-time contract</a:t>
+            </a:r>
+          </a:p>
+        </p:txBody>
+      </p:sp>
+      <p:sp>
+        <p:nvSpPr>
+          <p:cNvPr id="19" name="TextBox 18"/>
+          <p:cNvSpPr txBox="1"/>
+          <p:nvPr/>
+        </p:nvSpPr>
+        <p:spPr>
+          <a:xfrm>
+            <a:off x="5029200" y="2633472"/>
+            <a:ext cx="1691640" cy="274320"/>
+          </a:xfrm>
+          <a:prstGeom prst="rect">
+            <a:avLst/>
+          </a:prstGeom>
+          <a:noFill/>
+        </p:spPr>
+        <p:txBody>
+          <a:bodyPr wrap="square" lIns="0" rIns="0" tIns="0" bIns="0">
+            <a:spAutoFit/>
+          </a:bodyPr>
+          <a:lstStyle/>
+          <a:p>
+            <a:pPr algn="r">
+              <a:lnSpc>
+                <a:spcPts val="1600"/>
+              </a:lnSpc>
+              <a:spcAft>
+                <a:spcPts val="0"/>
+              </a:spcAft>
+            </a:pPr>
+            <a:r>
+              <a:rPr sz="1250" b="0" i="0">
+                <a:solidFill>
+                  <a:srgbClr val="212529"/>
+                </a:solidFill>
+                <a:latin typeface="Garamond"/>
+              </a:rPr>
+              <a:t>+8.77***</a:t>
+            </a:r>
+          </a:p>
+        </p:txBody>
+      </p:sp>
+      <p:sp>
+        <p:nvSpPr>
+          <p:cNvPr id="20" name="TextBox 19"/>
+          <p:cNvSpPr txBox="1"/>
+          <p:nvPr/>
+        </p:nvSpPr>
+        <p:spPr>
+          <a:xfrm>
+            <a:off x="6903720" y="2633472"/>
+            <a:ext cx="1691640" cy="274320"/>
+          </a:xfrm>
+          <a:prstGeom prst="rect">
+            <a:avLst/>
+          </a:prstGeom>
+          <a:noFill/>
+        </p:spPr>
+        <p:txBody>
+          <a:bodyPr wrap="square" lIns="0" rIns="0" tIns="0" bIns="0">
+            <a:spAutoFit/>
+          </a:bodyPr>
+          <a:lstStyle/>
+          <a:p>
+            <a:pPr algn="r">
+              <a:lnSpc>
+                <a:spcPts val="1600"/>
+              </a:lnSpc>
+              <a:spcAft>
+                <a:spcPts val="0"/>
+              </a:spcAft>
+            </a:pPr>
+            <a:r>
+              <a:rPr sz="1250" b="0" i="0">
+                <a:solidFill>
+                  <a:srgbClr val="212529"/>
+                </a:solidFill>
+                <a:latin typeface="Garamond"/>
+              </a:rPr>
+              <a:t>+3.86***</a:t>
+            </a:r>
+          </a:p>
+        </p:txBody>
+      </p:sp>
+      <p:sp>
+        <p:nvSpPr>
+          <p:cNvPr id="21" name="TextBox 20"/>
+          <p:cNvSpPr txBox="1"/>
+          <p:nvPr/>
+        </p:nvSpPr>
+        <p:spPr>
+          <a:xfrm>
+            <a:off x="8778240" y="2633472"/>
+            <a:ext cx="1691640" cy="274320"/>
+          </a:xfrm>
+          <a:prstGeom prst="rect">
+            <a:avLst/>
+          </a:prstGeom>
+          <a:noFill/>
+        </p:spPr>
+        <p:txBody>
+          <a:bodyPr wrap="square" lIns="0" rIns="0" tIns="0" bIns="0">
+            <a:spAutoFit/>
+          </a:bodyPr>
+          <a:lstStyle/>
+          <a:p>
+            <a:pPr algn="r">
+              <a:lnSpc>
+                <a:spcPts val="1600"/>
+              </a:lnSpc>
+              <a:spcAft>
+                <a:spcPts val="0"/>
+              </a:spcAft>
+            </a:pPr>
+            <a:r>
+              <a:rPr sz="1250" b="0" i="0">
+                <a:solidFill>
+                  <a:srgbClr val="212529"/>
+                </a:solidFill>
+                <a:latin typeface="Garamond"/>
+              </a:rPr>
+              <a:t>+4.32***</a:t>
+            </a:r>
+          </a:p>
+        </p:txBody>
+      </p:sp>
+      <p:sp>
+        <p:nvSpPr>
+          <p:cNvPr id="22" name="TextBox 21"/>
+          <p:cNvSpPr txBox="1"/>
+          <p:nvPr/>
+        </p:nvSpPr>
+        <p:spPr>
+          <a:xfrm>
+            <a:off x="5029200" y="2857500"/>
+            <a:ext cx="1691640" cy="274320"/>
+          </a:xfrm>
+          <a:prstGeom prst="rect">
+            <a:avLst/>
+          </a:prstGeom>
+          <a:noFill/>
+        </p:spPr>
+        <p:txBody>
+          <a:bodyPr wrap="square" lIns="0" rIns="0" tIns="0" bIns="0">
+            <a:spAutoFit/>
+          </a:bodyPr>
+          <a:lstStyle/>
+          <a:p>
+            <a:pPr algn="r">
+              <a:lnSpc>
+                <a:spcPts val="1408"/>
+              </a:lnSpc>
+              <a:spcAft>
+                <a:spcPts val="0"/>
+              </a:spcAft>
+            </a:pPr>
+            <a:r>
+              <a:rPr sz="1100" b="0" i="0">
+                <a:solidFill>
+                  <a:srgbClr val="6B7480"/>
+                </a:solidFill>
+                <a:latin typeface="Garamond"/>
+              </a:rPr>
+              <a:t>(0.92)</a:t>
+            </a:r>
+          </a:p>
+        </p:txBody>
+      </p:sp>
+      <p:sp>
+        <p:nvSpPr>
+          <p:cNvPr id="23" name="TextBox 22"/>
+          <p:cNvSpPr txBox="1"/>
+          <p:nvPr/>
+        </p:nvSpPr>
+        <p:spPr>
+          <a:xfrm>
+            <a:off x="6903720" y="2857500"/>
+            <a:ext cx="1691640" cy="274320"/>
+          </a:xfrm>
+          <a:prstGeom prst="rect">
+            <a:avLst/>
+          </a:prstGeom>
+          <a:noFill/>
+        </p:spPr>
+        <p:txBody>
+          <a:bodyPr wrap="square" lIns="0" rIns="0" tIns="0" bIns="0">
+            <a:spAutoFit/>
+          </a:bodyPr>
+          <a:lstStyle/>
+          <a:p>
+            <a:pPr algn="r">
+              <a:lnSpc>
+                <a:spcPts val="1408"/>
+              </a:lnSpc>
+              <a:spcAft>
+                <a:spcPts val="0"/>
+              </a:spcAft>
+            </a:pPr>
+            <a:r>
+              <a:rPr sz="1100" b="0" i="0">
+                <a:solidFill>
+                  <a:srgbClr val="6B7480"/>
+                </a:solidFill>
+                <a:latin typeface="Garamond"/>
+              </a:rPr>
+              <a:t>(0.44)</a:t>
+            </a:r>
+          </a:p>
+        </p:txBody>
+      </p:sp>
+      <p:sp>
+        <p:nvSpPr>
+          <p:cNvPr id="24" name="TextBox 23"/>
+          <p:cNvSpPr txBox="1"/>
+          <p:nvPr/>
+        </p:nvSpPr>
+        <p:spPr>
+          <a:xfrm>
+            <a:off x="8778240" y="2857500"/>
+            <a:ext cx="1691640" cy="274320"/>
+          </a:xfrm>
+          <a:prstGeom prst="rect">
+            <a:avLst/>
+          </a:prstGeom>
+          <a:noFill/>
+        </p:spPr>
+        <p:txBody>
+          <a:bodyPr wrap="square" lIns="0" rIns="0" tIns="0" bIns="0">
+            <a:spAutoFit/>
+          </a:bodyPr>
+          <a:lstStyle/>
+          <a:p>
+            <a:pPr algn="r">
+              <a:lnSpc>
+                <a:spcPts val="1408"/>
+              </a:lnSpc>
+              <a:spcAft>
+                <a:spcPts val="0"/>
+              </a:spcAft>
+            </a:pPr>
+            <a:r>
+              <a:rPr sz="1100" b="0" i="0">
+                <a:solidFill>
+                  <a:srgbClr val="6B7480"/>
+                </a:solidFill>
+                <a:latin typeface="Garamond"/>
+              </a:rPr>
+              <a:t>(0.47)</a:t>
+            </a:r>
+          </a:p>
+        </p:txBody>
+      </p:sp>
+      <p:sp>
+        <p:nvSpPr>
+          <p:cNvPr id="25" name="TextBox 24"/>
+          <p:cNvSpPr txBox="1"/>
+          <p:nvPr/>
+        </p:nvSpPr>
+        <p:spPr>
+          <a:xfrm>
+            <a:off x="1005840" y="3090672"/>
+            <a:ext cx="3840480" cy="274320"/>
+          </a:xfrm>
+          <a:prstGeom prst="rect">
+            <a:avLst/>
+          </a:prstGeom>
+          <a:noFill/>
+        </p:spPr>
+        <p:txBody>
+          <a:bodyPr wrap="square" lIns="0" rIns="0" tIns="0" bIns="0">
+            <a:spAutoFit/>
+          </a:bodyPr>
+          <a:lstStyle/>
+          <a:p>
+            <a:pPr algn="l">
+              <a:lnSpc>
+                <a:spcPts val="1600"/>
+              </a:lnSpc>
+              <a:spcAft>
+                <a:spcPts val="0"/>
+              </a:spcAft>
+            </a:pPr>
+            <a:r>
+              <a:rPr sz="1250" b="0" i="0">
+                <a:solidFill>
+                  <a:srgbClr val="212529"/>
+                </a:solidFill>
+                <a:latin typeface="Garamond"/>
+              </a:rPr>
+              <a:t>Employer pension plan</a:t>
+            </a:r>
+          </a:p>
+        </p:txBody>
+      </p:sp>
+      <p:sp>
+        <p:nvSpPr>
+          <p:cNvPr id="26" name="TextBox 25"/>
+          <p:cNvSpPr txBox="1"/>
+          <p:nvPr/>
+        </p:nvSpPr>
+        <p:spPr>
+          <a:xfrm>
+            <a:off x="5029200" y="3090672"/>
+            <a:ext cx="1691640" cy="274320"/>
+          </a:xfrm>
+          <a:prstGeom prst="rect">
+            <a:avLst/>
+          </a:prstGeom>
+          <a:noFill/>
+        </p:spPr>
+        <p:txBody>
+          <a:bodyPr wrap="square" lIns="0" rIns="0" tIns="0" bIns="0">
+            <a:spAutoFit/>
+          </a:bodyPr>
+          <a:lstStyle/>
+          <a:p>
+            <a:pPr algn="r">
+              <a:lnSpc>
+                <a:spcPts val="1600"/>
+              </a:lnSpc>
+              <a:spcAft>
+                <a:spcPts val="0"/>
+              </a:spcAft>
+            </a:pPr>
+            <a:r>
+              <a:rPr sz="1250" b="0" i="0">
+                <a:solidFill>
+                  <a:srgbClr val="212529"/>
+                </a:solidFill>
+                <a:latin typeface="Garamond"/>
+              </a:rPr>
+              <a:t>−2.55***</a:t>
+            </a:r>
+          </a:p>
+        </p:txBody>
+      </p:sp>
+      <p:sp>
+        <p:nvSpPr>
+          <p:cNvPr id="27" name="TextBox 26"/>
+          <p:cNvSpPr txBox="1"/>
+          <p:nvPr/>
+        </p:nvSpPr>
+        <p:spPr>
+          <a:xfrm>
+            <a:off x="6903720" y="3090672"/>
+            <a:ext cx="1691640" cy="274320"/>
+          </a:xfrm>
+          <a:prstGeom prst="rect">
+            <a:avLst/>
+          </a:prstGeom>
+          <a:noFill/>
+        </p:spPr>
+        <p:txBody>
+          <a:bodyPr wrap="square" lIns="0" rIns="0" tIns="0" bIns="0">
+            <a:spAutoFit/>
+          </a:bodyPr>
+          <a:lstStyle/>
+          <a:p>
+            <a:pPr algn="r">
+              <a:lnSpc>
+                <a:spcPts val="1600"/>
+              </a:lnSpc>
+              <a:spcAft>
+                <a:spcPts val="0"/>
+              </a:spcAft>
+            </a:pPr>
+            <a:r>
+              <a:rPr sz="1250" b="0" i="0">
+                <a:solidFill>
+                  <a:srgbClr val="212529"/>
+                </a:solidFill>
+                <a:latin typeface="Garamond"/>
+              </a:rPr>
+              <a:t>−2.38***</a:t>
+            </a:r>
+          </a:p>
+        </p:txBody>
+      </p:sp>
+      <p:sp>
+        <p:nvSpPr>
+          <p:cNvPr id="28" name="TextBox 27"/>
+          <p:cNvSpPr txBox="1"/>
+          <p:nvPr/>
+        </p:nvSpPr>
+        <p:spPr>
+          <a:xfrm>
+            <a:off x="8778240" y="3090672"/>
+            <a:ext cx="1691640" cy="274320"/>
+          </a:xfrm>
+          <a:prstGeom prst="rect">
+            <a:avLst/>
+          </a:prstGeom>
+          <a:noFill/>
+        </p:spPr>
+        <p:txBody>
+          <a:bodyPr wrap="square" lIns="0" rIns="0" tIns="0" bIns="0">
+            <a:spAutoFit/>
+          </a:bodyPr>
+          <a:lstStyle/>
+          <a:p>
+            <a:pPr algn="r">
+              <a:lnSpc>
+                <a:spcPts val="1600"/>
+              </a:lnSpc>
+              <a:spcAft>
+                <a:spcPts val="0"/>
+              </a:spcAft>
+            </a:pPr>
+            <a:r>
+              <a:rPr sz="1250" b="0" i="0">
+                <a:solidFill>
+                  <a:srgbClr val="212529"/>
+                </a:solidFill>
+                <a:latin typeface="Garamond"/>
+              </a:rPr>
+              <a:t>−2.41***</a:t>
+            </a:r>
+          </a:p>
+        </p:txBody>
+      </p:sp>
+      <p:sp>
+        <p:nvSpPr>
+          <p:cNvPr id="29" name="TextBox 28"/>
+          <p:cNvSpPr txBox="1"/>
+          <p:nvPr/>
+        </p:nvSpPr>
+        <p:spPr>
+          <a:xfrm>
+            <a:off x="5029200" y="3314700"/>
+            <a:ext cx="1691640" cy="274320"/>
+          </a:xfrm>
+          <a:prstGeom prst="rect">
+            <a:avLst/>
+          </a:prstGeom>
+          <a:noFill/>
+        </p:spPr>
+        <p:txBody>
+          <a:bodyPr wrap="square" lIns="0" rIns="0" tIns="0" bIns="0">
+            <a:spAutoFit/>
+          </a:bodyPr>
+          <a:lstStyle/>
+          <a:p>
+            <a:pPr algn="r">
+              <a:lnSpc>
+                <a:spcPts val="1408"/>
+              </a:lnSpc>
+              <a:spcAft>
+                <a:spcPts val="0"/>
+              </a:spcAft>
+            </a:pPr>
+            <a:r>
+              <a:rPr sz="1100" b="0" i="0">
+                <a:solidFill>
+                  <a:srgbClr val="6B7480"/>
+                </a:solidFill>
+                <a:latin typeface="Garamond"/>
+              </a:rPr>
+              <a:t>(0.44)</a:t>
+            </a:r>
+          </a:p>
+        </p:txBody>
+      </p:sp>
+      <p:sp>
+        <p:nvSpPr>
+          <p:cNvPr id="30" name="TextBox 29"/>
+          <p:cNvSpPr txBox="1"/>
+          <p:nvPr/>
+        </p:nvSpPr>
+        <p:spPr>
+          <a:xfrm>
+            <a:off x="6903720" y="3314700"/>
+            <a:ext cx="1691640" cy="274320"/>
+          </a:xfrm>
+          <a:prstGeom prst="rect">
+            <a:avLst/>
+          </a:prstGeom>
+          <a:noFill/>
+        </p:spPr>
+        <p:txBody>
+          <a:bodyPr wrap="square" lIns="0" rIns="0" tIns="0" bIns="0">
+            <a:spAutoFit/>
+          </a:bodyPr>
+          <a:lstStyle/>
+          <a:p>
+            <a:pPr algn="r">
+              <a:lnSpc>
+                <a:spcPts val="1408"/>
+              </a:lnSpc>
+              <a:spcAft>
+                <a:spcPts val="0"/>
+              </a:spcAft>
+            </a:pPr>
+            <a:r>
+              <a:rPr sz="1100" b="0" i="0">
+                <a:solidFill>
+                  <a:srgbClr val="6B7480"/>
+                </a:solidFill>
+                <a:latin typeface="Garamond"/>
+              </a:rPr>
+              <a:t>(0.39)</a:t>
+            </a:r>
+          </a:p>
+        </p:txBody>
+      </p:sp>
+      <p:sp>
+        <p:nvSpPr>
+          <p:cNvPr id="31" name="TextBox 30"/>
+          <p:cNvSpPr txBox="1"/>
+          <p:nvPr/>
+        </p:nvSpPr>
+        <p:spPr>
+          <a:xfrm>
+            <a:off x="8778240" y="3314700"/>
+            <a:ext cx="1691640" cy="274320"/>
+          </a:xfrm>
+          <a:prstGeom prst="rect">
+            <a:avLst/>
+          </a:prstGeom>
+          <a:noFill/>
+        </p:spPr>
+        <p:txBody>
+          <a:bodyPr wrap="square" lIns="0" rIns="0" tIns="0" bIns="0">
+            <a:spAutoFit/>
+          </a:bodyPr>
+          <a:lstStyle/>
+          <a:p>
+            <a:pPr algn="r">
+              <a:lnSpc>
+                <a:spcPts val="1408"/>
+              </a:lnSpc>
+              <a:spcAft>
+                <a:spcPts val="0"/>
+              </a:spcAft>
+            </a:pPr>
+            <a:r>
+              <a:rPr sz="1100" b="0" i="0">
+                <a:solidFill>
+                  <a:srgbClr val="6B7480"/>
+                </a:solidFill>
+                <a:latin typeface="Garamond"/>
+              </a:rPr>
+              <a:t>(0.38)</a:t>
+            </a:r>
+          </a:p>
+        </p:txBody>
+      </p:sp>
+      <p:sp>
+        <p:nvSpPr>
+          <p:cNvPr id="32" name="TextBox 31"/>
+          <p:cNvSpPr txBox="1"/>
+          <p:nvPr/>
+        </p:nvSpPr>
+        <p:spPr>
+          <a:xfrm>
+            <a:off x="1005840" y="3547872"/>
+            <a:ext cx="3840480" cy="274320"/>
+          </a:xfrm>
+          <a:prstGeom prst="rect">
+            <a:avLst/>
+          </a:prstGeom>
+          <a:noFill/>
+        </p:spPr>
+        <p:txBody>
+          <a:bodyPr wrap="square" lIns="0" rIns="0" tIns="0" bIns="0">
+            <a:spAutoFit/>
+          </a:bodyPr>
+          <a:lstStyle/>
+          <a:p>
+            <a:pPr algn="l">
+              <a:lnSpc>
+                <a:spcPts val="1600"/>
+              </a:lnSpc>
+              <a:spcAft>
+                <a:spcPts val="0"/>
+              </a:spcAft>
+            </a:pPr>
+            <a:r>
+              <a:rPr sz="1250" b="0" i="0">
+                <a:solidFill>
+                  <a:srgbClr val="212529"/>
+                </a:solidFill>
+                <a:latin typeface="Garamond"/>
+              </a:rPr>
+              <a:t>Public sector</a:t>
+            </a:r>
+          </a:p>
+        </p:txBody>
+      </p:sp>
+      <p:sp>
+        <p:nvSpPr>
+          <p:cNvPr id="33" name="TextBox 32"/>
+          <p:cNvSpPr txBox="1"/>
+          <p:nvPr/>
+        </p:nvSpPr>
+        <p:spPr>
+          <a:xfrm>
+            <a:off x="5029200" y="3547872"/>
+            <a:ext cx="1691640" cy="274320"/>
+          </a:xfrm>
+          <a:prstGeom prst="rect">
+            <a:avLst/>
+          </a:prstGeom>
+          <a:noFill/>
+        </p:spPr>
+        <p:txBody>
+          <a:bodyPr wrap="square" lIns="0" rIns="0" tIns="0" bIns="0">
+            <a:spAutoFit/>
+          </a:bodyPr>
+          <a:lstStyle/>
+          <a:p>
+            <a:pPr algn="r">
+              <a:lnSpc>
+                <a:spcPts val="1600"/>
+              </a:lnSpc>
+              <a:spcAft>
+                <a:spcPts val="0"/>
+              </a:spcAft>
+            </a:pPr>
+            <a:r>
+              <a:rPr sz="1250" b="0" i="0">
+                <a:solidFill>
+                  <a:srgbClr val="212529"/>
+                </a:solidFill>
+                <a:latin typeface="Garamond"/>
+              </a:rPr>
+              <a:t>−2.17***</a:t>
+            </a:r>
+          </a:p>
+        </p:txBody>
+      </p:sp>
+      <p:sp>
+        <p:nvSpPr>
+          <p:cNvPr id="34" name="TextBox 33"/>
+          <p:cNvSpPr txBox="1"/>
+          <p:nvPr/>
+        </p:nvSpPr>
+        <p:spPr>
+          <a:xfrm>
+            <a:off x="6903720" y="3547872"/>
+            <a:ext cx="1691640" cy="274320"/>
+          </a:xfrm>
+          <a:prstGeom prst="rect">
+            <a:avLst/>
+          </a:prstGeom>
+          <a:noFill/>
+        </p:spPr>
+        <p:txBody>
+          <a:bodyPr wrap="square" lIns="0" rIns="0" tIns="0" bIns="0">
+            <a:spAutoFit/>
+          </a:bodyPr>
+          <a:lstStyle/>
+          <a:p>
+            <a:pPr algn="r">
+              <a:lnSpc>
+                <a:spcPts val="1600"/>
+              </a:lnSpc>
+              <a:spcAft>
+                <a:spcPts val="0"/>
+              </a:spcAft>
+            </a:pPr>
+            <a:r>
+              <a:rPr sz="1250" b="0" i="0">
+                <a:solidFill>
+                  <a:srgbClr val="212529"/>
+                </a:solidFill>
+                <a:latin typeface="Garamond"/>
+              </a:rPr>
+              <a:t>−2.24***</a:t>
+            </a:r>
+          </a:p>
+        </p:txBody>
+      </p:sp>
+      <p:sp>
+        <p:nvSpPr>
+          <p:cNvPr id="35" name="TextBox 34"/>
+          <p:cNvSpPr txBox="1"/>
+          <p:nvPr/>
+        </p:nvSpPr>
+        <p:spPr>
+          <a:xfrm>
+            <a:off x="8778240" y="3547872"/>
+            <a:ext cx="1691640" cy="274320"/>
+          </a:xfrm>
+          <a:prstGeom prst="rect">
+            <a:avLst/>
+          </a:prstGeom>
+          <a:noFill/>
+        </p:spPr>
+        <p:txBody>
+          <a:bodyPr wrap="square" lIns="0" rIns="0" tIns="0" bIns="0">
+            <a:spAutoFit/>
+          </a:bodyPr>
+          <a:lstStyle/>
+          <a:p>
+            <a:pPr algn="r">
+              <a:lnSpc>
+                <a:spcPts val="1600"/>
+              </a:lnSpc>
+              <a:spcAft>
+                <a:spcPts val="0"/>
+              </a:spcAft>
+            </a:pPr>
+            <a:r>
+              <a:rPr sz="1250" b="0" i="0">
+                <a:solidFill>
+                  <a:srgbClr val="212529"/>
+                </a:solidFill>
+                <a:latin typeface="Garamond"/>
+              </a:rPr>
+              <a:t>−2.27***</a:t>
+            </a:r>
+          </a:p>
+        </p:txBody>
+      </p:sp>
+      <p:sp>
+        <p:nvSpPr>
+          <p:cNvPr id="36" name="TextBox 35"/>
+          <p:cNvSpPr txBox="1"/>
+          <p:nvPr/>
+        </p:nvSpPr>
+        <p:spPr>
+          <a:xfrm>
+            <a:off x="5029200" y="3771900"/>
+            <a:ext cx="1691640" cy="274320"/>
+          </a:xfrm>
+          <a:prstGeom prst="rect">
+            <a:avLst/>
+          </a:prstGeom>
+          <a:noFill/>
+        </p:spPr>
+        <p:txBody>
+          <a:bodyPr wrap="square" lIns="0" rIns="0" tIns="0" bIns="0">
+            <a:spAutoFit/>
+          </a:bodyPr>
+          <a:lstStyle/>
+          <a:p>
+            <a:pPr algn="r">
+              <a:lnSpc>
+                <a:spcPts val="1408"/>
+              </a:lnSpc>
+              <a:spcAft>
+                <a:spcPts val="0"/>
+              </a:spcAft>
+            </a:pPr>
+            <a:r>
+              <a:rPr sz="1100" b="0" i="0">
+                <a:solidFill>
+                  <a:srgbClr val="6B7480"/>
+                </a:solidFill>
+                <a:latin typeface="Garamond"/>
+              </a:rPr>
+              <a:t>(0.47)</a:t>
+            </a:r>
+          </a:p>
+        </p:txBody>
+      </p:sp>
+      <p:sp>
+        <p:nvSpPr>
+          <p:cNvPr id="37" name="TextBox 36"/>
+          <p:cNvSpPr txBox="1"/>
+          <p:nvPr/>
+        </p:nvSpPr>
+        <p:spPr>
+          <a:xfrm>
+            <a:off x="6903720" y="3771900"/>
+            <a:ext cx="1691640" cy="274320"/>
+          </a:xfrm>
+          <a:prstGeom prst="rect">
+            <a:avLst/>
+          </a:prstGeom>
+          <a:noFill/>
+        </p:spPr>
+        <p:txBody>
+          <a:bodyPr wrap="square" lIns="0" rIns="0" tIns="0" bIns="0">
+            <a:spAutoFit/>
+          </a:bodyPr>
+          <a:lstStyle/>
+          <a:p>
+            <a:pPr algn="r">
+              <a:lnSpc>
+                <a:spcPts val="1408"/>
+              </a:lnSpc>
+              <a:spcAft>
+                <a:spcPts val="0"/>
+              </a:spcAft>
+            </a:pPr>
+            <a:r>
+              <a:rPr sz="1100" b="0" i="0">
+                <a:solidFill>
+                  <a:srgbClr val="6B7480"/>
+                </a:solidFill>
+                <a:latin typeface="Garamond"/>
+              </a:rPr>
+              <a:t>(0.39)</a:t>
+            </a:r>
+          </a:p>
+        </p:txBody>
+      </p:sp>
+      <p:sp>
+        <p:nvSpPr>
+          <p:cNvPr id="38" name="TextBox 37"/>
+          <p:cNvSpPr txBox="1"/>
+          <p:nvPr/>
+        </p:nvSpPr>
+        <p:spPr>
+          <a:xfrm>
+            <a:off x="8778240" y="3771900"/>
+            <a:ext cx="1691640" cy="274320"/>
+          </a:xfrm>
+          <a:prstGeom prst="rect">
+            <a:avLst/>
+          </a:prstGeom>
+          <a:noFill/>
+        </p:spPr>
+        <p:txBody>
+          <a:bodyPr wrap="square" lIns="0" rIns="0" tIns="0" bIns="0">
+            <a:spAutoFit/>
+          </a:bodyPr>
+          <a:lstStyle/>
+          <a:p>
+            <a:pPr algn="r">
+              <a:lnSpc>
+                <a:spcPts val="1408"/>
+              </a:lnSpc>
+              <a:spcAft>
+                <a:spcPts val="0"/>
+              </a:spcAft>
+            </a:pPr>
+            <a:r>
+              <a:rPr sz="1100" b="0" i="0">
+                <a:solidFill>
+                  <a:srgbClr val="6B7480"/>
+                </a:solidFill>
+                <a:latin typeface="Garamond"/>
+              </a:rPr>
+              <a:t>(0.39)</a:t>
+            </a:r>
+          </a:p>
+        </p:txBody>
+      </p:sp>
+      <p:sp>
+        <p:nvSpPr>
+          <p:cNvPr id="39" name="TextBox 38"/>
+          <p:cNvSpPr txBox="1"/>
+          <p:nvPr/>
+        </p:nvSpPr>
+        <p:spPr>
+          <a:xfrm>
+            <a:off x="1005840" y="4005072"/>
+            <a:ext cx="3840480" cy="274320"/>
+          </a:xfrm>
+          <a:prstGeom prst="rect">
+            <a:avLst/>
+          </a:prstGeom>
+          <a:noFill/>
+        </p:spPr>
+        <p:txBody>
+          <a:bodyPr wrap="square" lIns="0" rIns="0" tIns="0" bIns="0">
+            <a:spAutoFit/>
+          </a:bodyPr>
+          <a:lstStyle/>
+          <a:p>
+            <a:pPr algn="l">
+              <a:lnSpc>
+                <a:spcPts val="1600"/>
+              </a:lnSpc>
+              <a:spcAft>
+                <a:spcPts val="0"/>
+              </a:spcAft>
+            </a:pPr>
+            <a:r>
+              <a:rPr sz="1250" b="0" i="0">
+                <a:solidFill>
+                  <a:srgbClr val="212529"/>
+                </a:solidFill>
+                <a:latin typeface="Garamond"/>
+              </a:rPr>
+              <a:t>New baby during the year</a:t>
+            </a:r>
+          </a:p>
+        </p:txBody>
+      </p:sp>
+      <p:sp>
+        <p:nvSpPr>
+          <p:cNvPr id="40" name="TextBox 39"/>
+          <p:cNvSpPr txBox="1"/>
+          <p:nvPr/>
+        </p:nvSpPr>
+        <p:spPr>
+          <a:xfrm>
+            <a:off x="5029200" y="4005072"/>
+            <a:ext cx="1691640" cy="274320"/>
+          </a:xfrm>
+          <a:prstGeom prst="rect">
+            <a:avLst/>
+          </a:prstGeom>
+          <a:noFill/>
+        </p:spPr>
+        <p:txBody>
+          <a:bodyPr wrap="square" lIns="0" rIns="0" tIns="0" bIns="0">
+            <a:spAutoFit/>
+          </a:bodyPr>
+          <a:lstStyle/>
+          <a:p>
+            <a:pPr algn="r">
+              <a:lnSpc>
+                <a:spcPts val="1600"/>
+              </a:lnSpc>
+              <a:spcAft>
+                <a:spcPts val="0"/>
+              </a:spcAft>
+            </a:pPr>
+            <a:r>
+              <a:rPr sz="1250" b="0" i="0">
+                <a:solidFill>
+                  <a:srgbClr val="212529"/>
+                </a:solidFill>
+                <a:latin typeface="Garamond"/>
+              </a:rPr>
+              <a:t>+5.65***</a:t>
+            </a:r>
+          </a:p>
+        </p:txBody>
+      </p:sp>
+      <p:sp>
+        <p:nvSpPr>
+          <p:cNvPr id="41" name="TextBox 40"/>
+          <p:cNvSpPr txBox="1"/>
+          <p:nvPr/>
+        </p:nvSpPr>
+        <p:spPr>
+          <a:xfrm>
+            <a:off x="6903720" y="4005072"/>
+            <a:ext cx="1691640" cy="274320"/>
+          </a:xfrm>
+          <a:prstGeom prst="rect">
+            <a:avLst/>
+          </a:prstGeom>
+          <a:noFill/>
+        </p:spPr>
+        <p:txBody>
+          <a:bodyPr wrap="square" lIns="0" rIns="0" tIns="0" bIns="0">
+            <a:spAutoFit/>
+          </a:bodyPr>
+          <a:lstStyle/>
+          <a:p>
+            <a:pPr algn="r">
+              <a:lnSpc>
+                <a:spcPts val="1600"/>
+              </a:lnSpc>
+              <a:spcAft>
+                <a:spcPts val="0"/>
+              </a:spcAft>
+            </a:pPr>
+            <a:r>
+              <a:rPr sz="1250" b="0" i="0">
+                <a:solidFill>
+                  <a:srgbClr val="212529"/>
+                </a:solidFill>
+                <a:latin typeface="Garamond"/>
+              </a:rPr>
+              <a:t>+4.74***</a:t>
+            </a:r>
+          </a:p>
+        </p:txBody>
+      </p:sp>
+      <p:sp>
+        <p:nvSpPr>
+          <p:cNvPr id="42" name="TextBox 41"/>
+          <p:cNvSpPr txBox="1"/>
+          <p:nvPr/>
+        </p:nvSpPr>
+        <p:spPr>
+          <a:xfrm>
+            <a:off x="8778240" y="4005072"/>
+            <a:ext cx="1691640" cy="274320"/>
+          </a:xfrm>
+          <a:prstGeom prst="rect">
+            <a:avLst/>
+          </a:prstGeom>
+          <a:noFill/>
+        </p:spPr>
+        <p:txBody>
+          <a:bodyPr wrap="square" lIns="0" rIns="0" tIns="0" bIns="0">
+            <a:spAutoFit/>
+          </a:bodyPr>
+          <a:lstStyle/>
+          <a:p>
+            <a:pPr algn="r">
+              <a:lnSpc>
+                <a:spcPts val="1600"/>
+              </a:lnSpc>
+              <a:spcAft>
+                <a:spcPts val="0"/>
+              </a:spcAft>
+            </a:pPr>
+            <a:r>
+              <a:rPr sz="1250" b="0" i="0">
+                <a:solidFill>
+                  <a:srgbClr val="212529"/>
+                </a:solidFill>
+                <a:latin typeface="Garamond"/>
+              </a:rPr>
+              <a:t>+4.59***</a:t>
+            </a:r>
+          </a:p>
+        </p:txBody>
+      </p:sp>
+      <p:sp>
+        <p:nvSpPr>
+          <p:cNvPr id="43" name="TextBox 42"/>
+          <p:cNvSpPr txBox="1"/>
+          <p:nvPr/>
+        </p:nvSpPr>
+        <p:spPr>
+          <a:xfrm>
+            <a:off x="5029200" y="4229100"/>
+            <a:ext cx="1691640" cy="274320"/>
+          </a:xfrm>
+          <a:prstGeom prst="rect">
+            <a:avLst/>
+          </a:prstGeom>
+          <a:noFill/>
+        </p:spPr>
+        <p:txBody>
+          <a:bodyPr wrap="square" lIns="0" rIns="0" tIns="0" bIns="0">
+            <a:spAutoFit/>
+          </a:bodyPr>
+          <a:lstStyle/>
+          <a:p>
+            <a:pPr algn="r">
+              <a:lnSpc>
+                <a:spcPts val="1408"/>
+              </a:lnSpc>
+              <a:spcAft>
+                <a:spcPts val="0"/>
+              </a:spcAft>
+            </a:pPr>
+            <a:r>
+              <a:rPr sz="1100" b="0" i="0">
+                <a:solidFill>
+                  <a:srgbClr val="6B7480"/>
+                </a:solidFill>
+                <a:latin typeface="Garamond"/>
+              </a:rPr>
+              <a:t>(1.33)</a:t>
+            </a:r>
+          </a:p>
+        </p:txBody>
+      </p:sp>
+      <p:sp>
+        <p:nvSpPr>
+          <p:cNvPr id="44" name="TextBox 43"/>
+          <p:cNvSpPr txBox="1"/>
+          <p:nvPr/>
+        </p:nvSpPr>
+        <p:spPr>
+          <a:xfrm>
+            <a:off x="6903720" y="4229100"/>
+            <a:ext cx="1691640" cy="274320"/>
+          </a:xfrm>
+          <a:prstGeom prst="rect">
+            <a:avLst/>
+          </a:prstGeom>
+          <a:noFill/>
+        </p:spPr>
+        <p:txBody>
+          <a:bodyPr wrap="square" lIns="0" rIns="0" tIns="0" bIns="0">
+            <a:spAutoFit/>
+          </a:bodyPr>
+          <a:lstStyle/>
+          <a:p>
+            <a:pPr algn="r">
+              <a:lnSpc>
+                <a:spcPts val="1408"/>
+              </a:lnSpc>
+              <a:spcAft>
+                <a:spcPts val="0"/>
+              </a:spcAft>
+            </a:pPr>
+            <a:r>
+              <a:rPr sz="1100" b="0" i="0">
+                <a:solidFill>
+                  <a:srgbClr val="6B7480"/>
+                </a:solidFill>
+                <a:latin typeface="Garamond"/>
+              </a:rPr>
+              <a:t>(0.90)</a:t>
+            </a:r>
+          </a:p>
+        </p:txBody>
+      </p:sp>
+      <p:sp>
+        <p:nvSpPr>
+          <p:cNvPr id="45" name="TextBox 44"/>
+          <p:cNvSpPr txBox="1"/>
+          <p:nvPr/>
+        </p:nvSpPr>
+        <p:spPr>
+          <a:xfrm>
+            <a:off x="8778240" y="4229100"/>
+            <a:ext cx="1691640" cy="274320"/>
+          </a:xfrm>
+          <a:prstGeom prst="rect">
+            <a:avLst/>
+          </a:prstGeom>
+          <a:noFill/>
+        </p:spPr>
+        <p:txBody>
+          <a:bodyPr wrap="square" lIns="0" rIns="0" tIns="0" bIns="0">
+            <a:spAutoFit/>
+          </a:bodyPr>
+          <a:lstStyle/>
+          <a:p>
+            <a:pPr algn="r">
+              <a:lnSpc>
+                <a:spcPts val="1408"/>
+              </a:lnSpc>
+              <a:spcAft>
+                <a:spcPts val="0"/>
+              </a:spcAft>
+            </a:pPr>
+            <a:r>
+              <a:rPr sz="1100" b="0" i="0">
+                <a:solidFill>
+                  <a:srgbClr val="6B7480"/>
+                </a:solidFill>
+                <a:latin typeface="Garamond"/>
+              </a:rPr>
+              <a:t>(0.91)</a:t>
+            </a:r>
+          </a:p>
+        </p:txBody>
+      </p:sp>
+      <p:sp>
+        <p:nvSpPr>
+          <p:cNvPr id="46" name="TextBox 45"/>
+          <p:cNvSpPr txBox="1"/>
+          <p:nvPr/>
+        </p:nvSpPr>
+        <p:spPr>
+          <a:xfrm>
+            <a:off x="1005840" y="4462272"/>
+            <a:ext cx="3840480" cy="274320"/>
+          </a:xfrm>
+          <a:prstGeom prst="rect">
+            <a:avLst/>
+          </a:prstGeom>
+          <a:noFill/>
+        </p:spPr>
+        <p:txBody>
+          <a:bodyPr wrap="square" lIns="0" rIns="0" tIns="0" bIns="0">
+            <a:spAutoFit/>
+          </a:bodyPr>
+          <a:lstStyle/>
+          <a:p>
+            <a:pPr algn="l">
+              <a:lnSpc>
+                <a:spcPts val="1600"/>
+              </a:lnSpc>
+              <a:spcAft>
+                <a:spcPts val="0"/>
+              </a:spcAft>
+            </a:pPr>
+            <a:r>
+              <a:rPr sz="1250" b="0" i="0">
+                <a:solidFill>
+                  <a:srgbClr val="212529"/>
+                </a:solidFill>
+                <a:latin typeface="Garamond"/>
+              </a:rPr>
+              <a:t>With a disability</a:t>
+            </a:r>
+          </a:p>
+        </p:txBody>
+      </p:sp>
+      <p:sp>
+        <p:nvSpPr>
+          <p:cNvPr id="47" name="TextBox 46"/>
+          <p:cNvSpPr txBox="1"/>
+          <p:nvPr/>
+        </p:nvSpPr>
+        <p:spPr>
+          <a:xfrm>
+            <a:off x="5029200" y="4462272"/>
+            <a:ext cx="1691640" cy="274320"/>
+          </a:xfrm>
+          <a:prstGeom prst="rect">
+            <a:avLst/>
+          </a:prstGeom>
+          <a:noFill/>
+        </p:spPr>
+        <p:txBody>
+          <a:bodyPr wrap="square" lIns="0" rIns="0" tIns="0" bIns="0">
+            <a:spAutoFit/>
+          </a:bodyPr>
+          <a:lstStyle/>
+          <a:p>
+            <a:pPr algn="r">
+              <a:lnSpc>
+                <a:spcPts val="1600"/>
+              </a:lnSpc>
+              <a:spcAft>
+                <a:spcPts val="0"/>
+              </a:spcAft>
+            </a:pPr>
+            <a:r>
+              <a:rPr sz="1250" b="0" i="0">
+                <a:solidFill>
+                  <a:srgbClr val="212529"/>
+                </a:solidFill>
+                <a:latin typeface="Garamond"/>
+              </a:rPr>
+              <a:t>+8.31***</a:t>
+            </a:r>
+          </a:p>
+        </p:txBody>
+      </p:sp>
+      <p:sp>
+        <p:nvSpPr>
+          <p:cNvPr id="48" name="TextBox 47"/>
+          <p:cNvSpPr txBox="1"/>
+          <p:nvPr/>
+        </p:nvSpPr>
+        <p:spPr>
+          <a:xfrm>
+            <a:off x="6903720" y="4462272"/>
+            <a:ext cx="1691640" cy="274320"/>
+          </a:xfrm>
+          <a:prstGeom prst="rect">
+            <a:avLst/>
+          </a:prstGeom>
+          <a:noFill/>
+        </p:spPr>
+        <p:txBody>
+          <a:bodyPr wrap="square" lIns="0" rIns="0" tIns="0" bIns="0">
+            <a:spAutoFit/>
+          </a:bodyPr>
+          <a:lstStyle/>
+          <a:p>
+            <a:pPr algn="r">
+              <a:lnSpc>
+                <a:spcPts val="1600"/>
+              </a:lnSpc>
+              <a:spcAft>
+                <a:spcPts val="0"/>
+              </a:spcAft>
+            </a:pPr>
+            <a:r>
+              <a:rPr sz="1250" b="0" i="0">
+                <a:solidFill>
+                  <a:srgbClr val="212529"/>
+                </a:solidFill>
+                <a:latin typeface="Garamond"/>
+              </a:rPr>
+              <a:t>+3.78***</a:t>
+            </a:r>
+          </a:p>
+        </p:txBody>
+      </p:sp>
+      <p:sp>
+        <p:nvSpPr>
+          <p:cNvPr id="49" name="TextBox 48"/>
+          <p:cNvSpPr txBox="1"/>
+          <p:nvPr/>
+        </p:nvSpPr>
+        <p:spPr>
+          <a:xfrm>
+            <a:off x="8778240" y="4462272"/>
+            <a:ext cx="1691640" cy="274320"/>
+          </a:xfrm>
+          <a:prstGeom prst="rect">
+            <a:avLst/>
+          </a:prstGeom>
+          <a:noFill/>
+        </p:spPr>
+        <p:txBody>
+          <a:bodyPr wrap="square" lIns="0" rIns="0" tIns="0" bIns="0">
+            <a:spAutoFit/>
+          </a:bodyPr>
+          <a:lstStyle/>
+          <a:p>
+            <a:pPr algn="r">
+              <a:lnSpc>
+                <a:spcPts val="1600"/>
+              </a:lnSpc>
+              <a:spcAft>
+                <a:spcPts val="0"/>
+              </a:spcAft>
+            </a:pPr>
+            <a:r>
+              <a:rPr sz="1250" b="0" i="0">
+                <a:solidFill>
+                  <a:srgbClr val="212529"/>
+                </a:solidFill>
+                <a:latin typeface="Garamond"/>
+              </a:rPr>
+              <a:t>+4.19***</a:t>
+            </a:r>
+          </a:p>
+        </p:txBody>
+      </p:sp>
+      <p:sp>
+        <p:nvSpPr>
+          <p:cNvPr id="50" name="TextBox 49"/>
+          <p:cNvSpPr txBox="1"/>
+          <p:nvPr/>
+        </p:nvSpPr>
+        <p:spPr>
+          <a:xfrm>
+            <a:off x="5029200" y="4686300"/>
+            <a:ext cx="1691640" cy="274320"/>
+          </a:xfrm>
+          <a:prstGeom prst="rect">
+            <a:avLst/>
+          </a:prstGeom>
+          <a:noFill/>
+        </p:spPr>
+        <p:txBody>
+          <a:bodyPr wrap="square" lIns="0" rIns="0" tIns="0" bIns="0">
+            <a:spAutoFit/>
+          </a:bodyPr>
+          <a:lstStyle/>
+          <a:p>
+            <a:pPr algn="r">
+              <a:lnSpc>
+                <a:spcPts val="1408"/>
+              </a:lnSpc>
+              <a:spcAft>
+                <a:spcPts val="0"/>
+              </a:spcAft>
+            </a:pPr>
+            <a:r>
+              <a:rPr sz="1100" b="0" i="0">
+                <a:solidFill>
+                  <a:srgbClr val="6B7480"/>
+                </a:solidFill>
+                <a:latin typeface="Garamond"/>
+              </a:rPr>
+              <a:t>(1.84)</a:t>
+            </a:r>
+          </a:p>
+        </p:txBody>
+      </p:sp>
+      <p:sp>
+        <p:nvSpPr>
+          <p:cNvPr id="51" name="TextBox 50"/>
+          <p:cNvSpPr txBox="1"/>
+          <p:nvPr/>
+        </p:nvSpPr>
+        <p:spPr>
+          <a:xfrm>
+            <a:off x="6903720" y="4686300"/>
+            <a:ext cx="1691640" cy="274320"/>
+          </a:xfrm>
+          <a:prstGeom prst="rect">
+            <a:avLst/>
+          </a:prstGeom>
+          <a:noFill/>
+        </p:spPr>
+        <p:txBody>
+          <a:bodyPr wrap="square" lIns="0" rIns="0" tIns="0" bIns="0">
+            <a:spAutoFit/>
+          </a:bodyPr>
+          <a:lstStyle/>
+          <a:p>
+            <a:pPr algn="r">
+              <a:lnSpc>
+                <a:spcPts val="1408"/>
+              </a:lnSpc>
+              <a:spcAft>
+                <a:spcPts val="0"/>
+              </a:spcAft>
+            </a:pPr>
+            <a:r>
+              <a:rPr sz="1100" b="0" i="0">
+                <a:solidFill>
+                  <a:srgbClr val="6B7480"/>
+                </a:solidFill>
+                <a:latin typeface="Garamond"/>
+              </a:rPr>
+              <a:t>(0.80)</a:t>
+            </a:r>
+          </a:p>
+        </p:txBody>
+      </p:sp>
+      <p:sp>
+        <p:nvSpPr>
+          <p:cNvPr id="52" name="TextBox 51"/>
+          <p:cNvSpPr txBox="1"/>
+          <p:nvPr/>
+        </p:nvSpPr>
+        <p:spPr>
+          <a:xfrm>
+            <a:off x="8778240" y="4686300"/>
+            <a:ext cx="1691640" cy="274320"/>
+          </a:xfrm>
+          <a:prstGeom prst="rect">
+            <a:avLst/>
+          </a:prstGeom>
+          <a:noFill/>
+        </p:spPr>
+        <p:txBody>
+          <a:bodyPr wrap="square" lIns="0" rIns="0" tIns="0" bIns="0">
+            <a:spAutoFit/>
+          </a:bodyPr>
+          <a:lstStyle/>
+          <a:p>
+            <a:pPr algn="r">
+              <a:lnSpc>
+                <a:spcPts val="1408"/>
+              </a:lnSpc>
+              <a:spcAft>
+                <a:spcPts val="0"/>
+              </a:spcAft>
+            </a:pPr>
+            <a:r>
+              <a:rPr sz="1100" b="0" i="0">
+                <a:solidFill>
+                  <a:srgbClr val="6B7480"/>
+                </a:solidFill>
+                <a:latin typeface="Garamond"/>
+              </a:rPr>
+              <a:t>(0.88)</a:t>
+            </a:r>
+          </a:p>
+        </p:txBody>
+      </p:sp>
+      <p:sp>
+        <p:nvSpPr>
+          <p:cNvPr id="53" name="TextBox 52"/>
+          <p:cNvSpPr txBox="1"/>
+          <p:nvPr/>
+        </p:nvSpPr>
+        <p:spPr>
+          <a:xfrm>
+            <a:off x="1005840" y="4919472"/>
+            <a:ext cx="3840480" cy="274320"/>
+          </a:xfrm>
+          <a:prstGeom prst="rect">
+            <a:avLst/>
+          </a:prstGeom>
+          <a:noFill/>
+        </p:spPr>
+        <p:txBody>
+          <a:bodyPr wrap="square" lIns="0" rIns="0" tIns="0" bIns="0">
+            <a:spAutoFit/>
+          </a:bodyPr>
+          <a:lstStyle/>
+          <a:p>
+            <a:pPr algn="l">
+              <a:lnSpc>
+                <a:spcPts val="1600"/>
+              </a:lnSpc>
+              <a:spcAft>
+                <a:spcPts val="0"/>
+              </a:spcAft>
+            </a:pPr>
+            <a:r>
+              <a:rPr sz="1250" b="0" i="0">
+                <a:solidFill>
+                  <a:srgbClr val="212529"/>
+                </a:solidFill>
+                <a:latin typeface="Garamond"/>
+              </a:rPr>
+              <a:t>Bottom-quartile household income</a:t>
+            </a:r>
+          </a:p>
+        </p:txBody>
+      </p:sp>
+      <p:sp>
+        <p:nvSpPr>
+          <p:cNvPr id="54" name="TextBox 53"/>
+          <p:cNvSpPr txBox="1"/>
+          <p:nvPr/>
+        </p:nvSpPr>
+        <p:spPr>
+          <a:xfrm>
+            <a:off x="5029200" y="4919472"/>
+            <a:ext cx="1691640" cy="274320"/>
+          </a:xfrm>
+          <a:prstGeom prst="rect">
+            <a:avLst/>
+          </a:prstGeom>
+          <a:noFill/>
+        </p:spPr>
+        <p:txBody>
+          <a:bodyPr wrap="square" lIns="0" rIns="0" tIns="0" bIns="0">
+            <a:spAutoFit/>
+          </a:bodyPr>
+          <a:lstStyle/>
+          <a:p>
+            <a:pPr algn="r">
+              <a:lnSpc>
+                <a:spcPts val="1600"/>
+              </a:lnSpc>
+              <a:spcAft>
+                <a:spcPts val="0"/>
+              </a:spcAft>
+            </a:pPr>
+            <a:r>
+              <a:rPr sz="1250" b="0" i="0">
+                <a:solidFill>
+                  <a:srgbClr val="212529"/>
+                </a:solidFill>
+                <a:latin typeface="Garamond"/>
+              </a:rPr>
+              <a:t>+4.67***</a:t>
+            </a:r>
+          </a:p>
+        </p:txBody>
+      </p:sp>
+      <p:sp>
+        <p:nvSpPr>
+          <p:cNvPr id="55" name="TextBox 54"/>
+          <p:cNvSpPr txBox="1"/>
+          <p:nvPr/>
+        </p:nvSpPr>
+        <p:spPr>
+          <a:xfrm>
+            <a:off x="6903720" y="4919472"/>
+            <a:ext cx="1691640" cy="274320"/>
+          </a:xfrm>
+          <a:prstGeom prst="rect">
+            <a:avLst/>
+          </a:prstGeom>
+          <a:noFill/>
+        </p:spPr>
+        <p:txBody>
+          <a:bodyPr wrap="square" lIns="0" rIns="0" tIns="0" bIns="0">
+            <a:spAutoFit/>
+          </a:bodyPr>
+          <a:lstStyle/>
+          <a:p>
+            <a:pPr algn="r">
+              <a:lnSpc>
+                <a:spcPts val="1600"/>
+              </a:lnSpc>
+              <a:spcAft>
+                <a:spcPts val="0"/>
+              </a:spcAft>
+            </a:pPr>
+            <a:r>
+              <a:rPr sz="1250" b="0" i="0">
+                <a:solidFill>
+                  <a:srgbClr val="212529"/>
+                </a:solidFill>
+                <a:latin typeface="Garamond"/>
+              </a:rPr>
+              <a:t>+2.24***</a:t>
+            </a:r>
+          </a:p>
+        </p:txBody>
+      </p:sp>
+      <p:sp>
+        <p:nvSpPr>
+          <p:cNvPr id="56" name="TextBox 55"/>
+          <p:cNvSpPr txBox="1"/>
+          <p:nvPr/>
+        </p:nvSpPr>
+        <p:spPr>
+          <a:xfrm>
+            <a:off x="8778240" y="4919472"/>
+            <a:ext cx="1691640" cy="274320"/>
+          </a:xfrm>
+          <a:prstGeom prst="rect">
+            <a:avLst/>
+          </a:prstGeom>
+          <a:noFill/>
+        </p:spPr>
+        <p:txBody>
+          <a:bodyPr wrap="square" lIns="0" rIns="0" tIns="0" bIns="0">
+            <a:spAutoFit/>
+          </a:bodyPr>
+          <a:lstStyle/>
+          <a:p>
+            <a:pPr algn="r">
+              <a:lnSpc>
+                <a:spcPts val="1600"/>
+              </a:lnSpc>
+              <a:spcAft>
+                <a:spcPts val="0"/>
+              </a:spcAft>
+            </a:pPr>
+            <a:r>
+              <a:rPr sz="1250" b="0" i="0">
+                <a:solidFill>
+                  <a:srgbClr val="212529"/>
+                </a:solidFill>
+                <a:latin typeface="Garamond"/>
+              </a:rPr>
+              <a:t>+2.50***</a:t>
+            </a:r>
+          </a:p>
+        </p:txBody>
+      </p:sp>
+      <p:sp>
+        <p:nvSpPr>
+          <p:cNvPr id="57" name="TextBox 56"/>
+          <p:cNvSpPr txBox="1"/>
+          <p:nvPr/>
+        </p:nvSpPr>
+        <p:spPr>
+          <a:xfrm>
+            <a:off x="5029200" y="5143500"/>
+            <a:ext cx="1691640" cy="274320"/>
+          </a:xfrm>
+          <a:prstGeom prst="rect">
+            <a:avLst/>
+          </a:prstGeom>
+          <a:noFill/>
+        </p:spPr>
+        <p:txBody>
+          <a:bodyPr wrap="square" lIns="0" rIns="0" tIns="0" bIns="0">
+            <a:spAutoFit/>
+          </a:bodyPr>
+          <a:lstStyle/>
+          <a:p>
+            <a:pPr algn="r">
+              <a:lnSpc>
+                <a:spcPts val="1408"/>
+              </a:lnSpc>
+              <a:spcAft>
+                <a:spcPts val="0"/>
+              </a:spcAft>
+            </a:pPr>
+            <a:r>
+              <a:rPr sz="1100" b="0" i="0">
+                <a:solidFill>
+                  <a:srgbClr val="6B7480"/>
+                </a:solidFill>
+                <a:latin typeface="Garamond"/>
+              </a:rPr>
+              <a:t>(1.10)</a:t>
+            </a:r>
+          </a:p>
+        </p:txBody>
+      </p:sp>
+      <p:sp>
+        <p:nvSpPr>
+          <p:cNvPr id="58" name="TextBox 57"/>
+          <p:cNvSpPr txBox="1"/>
+          <p:nvPr/>
+        </p:nvSpPr>
+        <p:spPr>
+          <a:xfrm>
+            <a:off x="6903720" y="5143500"/>
+            <a:ext cx="1691640" cy="274320"/>
+          </a:xfrm>
+          <a:prstGeom prst="rect">
+            <a:avLst/>
+          </a:prstGeom>
+          <a:noFill/>
+        </p:spPr>
+        <p:txBody>
+          <a:bodyPr wrap="square" lIns="0" rIns="0" tIns="0" bIns="0">
+            <a:spAutoFit/>
+          </a:bodyPr>
+          <a:lstStyle/>
+          <a:p>
+            <a:pPr algn="r">
+              <a:lnSpc>
+                <a:spcPts val="1408"/>
+              </a:lnSpc>
+              <a:spcAft>
+                <a:spcPts val="0"/>
+              </a:spcAft>
+            </a:pPr>
+            <a:r>
+              <a:rPr sz="1100" b="0" i="0">
+                <a:solidFill>
+                  <a:srgbClr val="6B7480"/>
+                </a:solidFill>
+                <a:latin typeface="Garamond"/>
+              </a:rPr>
+              <a:t>(0.58)</a:t>
+            </a:r>
+          </a:p>
+        </p:txBody>
+      </p:sp>
+      <p:sp>
+        <p:nvSpPr>
+          <p:cNvPr id="59" name="TextBox 58"/>
+          <p:cNvSpPr txBox="1"/>
+          <p:nvPr/>
+        </p:nvSpPr>
+        <p:spPr>
+          <a:xfrm>
+            <a:off x="8778240" y="5143500"/>
+            <a:ext cx="1691640" cy="274320"/>
+          </a:xfrm>
+          <a:prstGeom prst="rect">
+            <a:avLst/>
+          </a:prstGeom>
+          <a:noFill/>
+        </p:spPr>
+        <p:txBody>
+          <a:bodyPr wrap="square" lIns="0" rIns="0" tIns="0" bIns="0">
+            <a:spAutoFit/>
+          </a:bodyPr>
+          <a:lstStyle/>
+          <a:p>
+            <a:pPr algn="r">
+              <a:lnSpc>
+                <a:spcPts val="1408"/>
+              </a:lnSpc>
+              <a:spcAft>
+                <a:spcPts val="0"/>
+              </a:spcAft>
+            </a:pPr>
+            <a:r>
+              <a:rPr sz="1100" b="0" i="0">
+                <a:solidFill>
+                  <a:srgbClr val="6B7480"/>
+                </a:solidFill>
+                <a:latin typeface="Garamond"/>
+              </a:rPr>
+              <a:t>(0.62)</a:t>
+            </a:r>
+          </a:p>
+        </p:txBody>
+      </p:sp>
+      <p:cxnSp>
+        <p:nvCxnSpPr>
+          <p:cNvPr id="60" name="Connector 59"/>
+          <p:cNvCxnSpPr/>
+          <p:nvPr/>
+        </p:nvCxnSpPr>
+        <p:spPr>
+          <a:xfrm>
+            <a:off x="1005840" y="5394959"/>
+            <a:ext cx="9509760" cy="0"/>
+          </a:xfrm>
+          <a:prstGeom prst="line">
+            <a:avLst/>
+          </a:prstGeom>
+          <a:ln w="8890">
+            <a:solidFill>
+              <a:srgbClr val="212529"/>
+            </a:solidFill>
+          </a:ln>
+          <a:effectLst/>
+        </p:spPr>
+        <p:style>
+          <a:lnRef idx="2">
+            <a:schemeClr val="accent1"/>
+          </a:lnRef>
+          <a:fillRef idx="0">
+            <a:schemeClr val="accent1"/>
+          </a:fillRef>
+          <a:effectRef idx="1">
+            <a:schemeClr val="accent1"/>
+          </a:effectRef>
+          <a:fontRef idx="minor">
+            <a:schemeClr val="tx1"/>
+          </a:fontRef>
+        </p:style>
+      </p:cxnSp>
+      <p:sp>
+        <p:nvSpPr>
+          <p:cNvPr id="61" name="TextBox 60"/>
+          <p:cNvSpPr txBox="1"/>
+          <p:nvPr/>
+        </p:nvSpPr>
+        <p:spPr>
+          <a:xfrm>
+            <a:off x="1005840" y="5477256"/>
+            <a:ext cx="3840480" cy="274320"/>
+          </a:xfrm>
+          <a:prstGeom prst="rect">
+            <a:avLst/>
+          </a:prstGeom>
+          <a:noFill/>
+        </p:spPr>
+        <p:txBody>
+          <a:bodyPr wrap="square" lIns="0" rIns="0" tIns="0" bIns="0">
+            <a:spAutoFit/>
+          </a:bodyPr>
+          <a:lstStyle/>
+          <a:p>
+            <a:pPr algn="l">
+              <a:lnSpc>
+                <a:spcPts val="1600"/>
+              </a:lnSpc>
+              <a:spcAft>
+                <a:spcPts val="0"/>
+              </a:spcAft>
+            </a:pPr>
+            <a:r>
+              <a:rPr sz="1250" b="0" i="0">
+                <a:solidFill>
+                  <a:srgbClr val="212529"/>
+                </a:solidFill>
+                <a:latin typeface="Garamond"/>
+              </a:rPr>
+              <a:t>Year fixed effects</a:t>
+            </a:r>
+          </a:p>
+        </p:txBody>
+      </p:sp>
+      <p:sp>
+        <p:nvSpPr>
+          <p:cNvPr id="62" name="TextBox 61"/>
+          <p:cNvSpPr txBox="1"/>
+          <p:nvPr/>
+        </p:nvSpPr>
+        <p:spPr>
+          <a:xfrm>
+            <a:off x="5029200" y="5477256"/>
+            <a:ext cx="1691640" cy="274320"/>
+          </a:xfrm>
+          <a:prstGeom prst="rect">
+            <a:avLst/>
+          </a:prstGeom>
+          <a:noFill/>
+        </p:spPr>
+        <p:txBody>
+          <a:bodyPr wrap="square" lIns="0" rIns="0" tIns="0" bIns="0">
+            <a:spAutoFit/>
+          </a:bodyPr>
+          <a:lstStyle/>
+          <a:p>
+            <a:pPr algn="r">
+              <a:lnSpc>
+                <a:spcPts val="1600"/>
+              </a:lnSpc>
+              <a:spcAft>
+                <a:spcPts val="0"/>
+              </a:spcAft>
+            </a:pPr>
+            <a:r>
+              <a:rPr sz="1250" b="0" i="0">
+                <a:solidFill>
+                  <a:srgbClr val="212529"/>
+                </a:solidFill>
+                <a:latin typeface="Garamond"/>
+              </a:rPr>
+              <a:t>Yes</a:t>
+            </a:r>
+          </a:p>
+        </p:txBody>
+      </p:sp>
+      <p:sp>
+        <p:nvSpPr>
+          <p:cNvPr id="63" name="TextBox 62"/>
+          <p:cNvSpPr txBox="1"/>
+          <p:nvPr/>
+        </p:nvSpPr>
+        <p:spPr>
+          <a:xfrm>
+            <a:off x="6903720" y="5477256"/>
+            <a:ext cx="1691640" cy="274320"/>
+          </a:xfrm>
+          <a:prstGeom prst="rect">
+            <a:avLst/>
+          </a:prstGeom>
+          <a:noFill/>
+        </p:spPr>
+        <p:txBody>
+          <a:bodyPr wrap="square" lIns="0" rIns="0" tIns="0" bIns="0">
+            <a:spAutoFit/>
+          </a:bodyPr>
+          <a:lstStyle/>
+          <a:p>
+            <a:pPr algn="r">
+              <a:lnSpc>
+                <a:spcPts val="1600"/>
+              </a:lnSpc>
+              <a:spcAft>
+                <a:spcPts val="0"/>
+              </a:spcAft>
+            </a:pPr>
+            <a:r>
+              <a:rPr sz="1250" b="0" i="0">
+                <a:solidFill>
+                  <a:srgbClr val="212529"/>
+                </a:solidFill>
+                <a:latin typeface="Garamond"/>
+              </a:rPr>
+              <a:t>Yes</a:t>
+            </a:r>
+          </a:p>
+        </p:txBody>
+      </p:sp>
+      <p:sp>
+        <p:nvSpPr>
+          <p:cNvPr id="64" name="TextBox 63"/>
+          <p:cNvSpPr txBox="1"/>
+          <p:nvPr/>
+        </p:nvSpPr>
+        <p:spPr>
+          <a:xfrm>
+            <a:off x="8778240" y="5477256"/>
+            <a:ext cx="1691640" cy="274320"/>
+          </a:xfrm>
+          <a:prstGeom prst="rect">
+            <a:avLst/>
+          </a:prstGeom>
+          <a:noFill/>
+        </p:spPr>
+        <p:txBody>
+          <a:bodyPr wrap="square" lIns="0" rIns="0" tIns="0" bIns="0">
+            <a:spAutoFit/>
+          </a:bodyPr>
+          <a:lstStyle/>
+          <a:p>
+            <a:pPr algn="r">
+              <a:lnSpc>
+                <a:spcPts val="1600"/>
+              </a:lnSpc>
+              <a:spcAft>
+                <a:spcPts val="0"/>
+              </a:spcAft>
+            </a:pPr>
+            <a:r>
+              <a:rPr sz="1250" b="0" i="0">
+                <a:solidFill>
+                  <a:srgbClr val="212529"/>
+                </a:solidFill>
+                <a:latin typeface="Garamond"/>
+              </a:rPr>
+              <a:t>Yes</a:t>
+            </a:r>
+          </a:p>
+        </p:txBody>
+      </p:sp>
+      <p:sp>
+        <p:nvSpPr>
+          <p:cNvPr id="65" name="TextBox 64"/>
+          <p:cNvSpPr txBox="1"/>
+          <p:nvPr/>
+        </p:nvSpPr>
+        <p:spPr>
+          <a:xfrm>
+            <a:off x="1005840" y="5733288"/>
+            <a:ext cx="3840480" cy="274320"/>
+          </a:xfrm>
+          <a:prstGeom prst="rect">
+            <a:avLst/>
+          </a:prstGeom>
+          <a:noFill/>
+        </p:spPr>
+        <p:txBody>
+          <a:bodyPr wrap="square" lIns="0" rIns="0" tIns="0" bIns="0">
+            <a:spAutoFit/>
+          </a:bodyPr>
+          <a:lstStyle/>
+          <a:p>
+            <a:pPr algn="l">
+              <a:lnSpc>
+                <a:spcPts val="1600"/>
+              </a:lnSpc>
+              <a:spcAft>
+                <a:spcPts val="0"/>
+              </a:spcAft>
+            </a:pPr>
+            <a:r>
+              <a:rPr sz="1250" b="0" i="0">
+                <a:solidFill>
+                  <a:srgbClr val="212529"/>
+                </a:solidFill>
+                <a:latin typeface="Garamond"/>
+              </a:rPr>
+              <a:t>Observations</a:t>
+            </a:r>
+          </a:p>
+        </p:txBody>
+      </p:sp>
+      <p:sp>
+        <p:nvSpPr>
+          <p:cNvPr id="66" name="TextBox 65"/>
+          <p:cNvSpPr txBox="1"/>
+          <p:nvPr/>
+        </p:nvSpPr>
+        <p:spPr>
+          <a:xfrm>
+            <a:off x="5029200" y="5733288"/>
+            <a:ext cx="1691640" cy="274320"/>
+          </a:xfrm>
+          <a:prstGeom prst="rect">
+            <a:avLst/>
+          </a:prstGeom>
+          <a:noFill/>
+        </p:spPr>
+        <p:txBody>
+          <a:bodyPr wrap="square" lIns="0" rIns="0" tIns="0" bIns="0">
+            <a:spAutoFit/>
+          </a:bodyPr>
+          <a:lstStyle/>
+          <a:p>
+            <a:pPr algn="r">
+              <a:lnSpc>
+                <a:spcPts val="1600"/>
+              </a:lnSpc>
+              <a:spcAft>
+                <a:spcPts val="0"/>
+              </a:spcAft>
+            </a:pPr>
+            <a:r>
+              <a:rPr sz="1250" b="0" i="0">
+                <a:solidFill>
+                  <a:srgbClr val="212529"/>
+                </a:solidFill>
+                <a:latin typeface="Garamond"/>
+              </a:rPr>
+              <a:t>18,571</a:t>
+            </a:r>
+          </a:p>
+        </p:txBody>
+      </p:sp>
+      <p:sp>
+        <p:nvSpPr>
+          <p:cNvPr id="67" name="TextBox 66"/>
+          <p:cNvSpPr txBox="1"/>
+          <p:nvPr/>
+        </p:nvSpPr>
+        <p:spPr>
+          <a:xfrm>
+            <a:off x="6903720" y="5733288"/>
+            <a:ext cx="1691640" cy="274320"/>
+          </a:xfrm>
+          <a:prstGeom prst="rect">
+            <a:avLst/>
+          </a:prstGeom>
+          <a:noFill/>
+        </p:spPr>
+        <p:txBody>
+          <a:bodyPr wrap="square" lIns="0" rIns="0" tIns="0" bIns="0">
+            <a:spAutoFit/>
+          </a:bodyPr>
+          <a:lstStyle/>
+          <a:p>
+            <a:pPr algn="r">
+              <a:lnSpc>
+                <a:spcPts val="1600"/>
+              </a:lnSpc>
+              <a:spcAft>
+                <a:spcPts val="0"/>
+              </a:spcAft>
+            </a:pPr>
+            <a:r>
+              <a:rPr sz="1250" b="0" i="0">
+                <a:solidFill>
+                  <a:srgbClr val="212529"/>
+                </a:solidFill>
+                <a:latin typeface="Garamond"/>
+              </a:rPr>
+              <a:t>18,571</a:t>
+            </a:r>
+          </a:p>
+        </p:txBody>
+      </p:sp>
+      <p:sp>
+        <p:nvSpPr>
+          <p:cNvPr id="68" name="TextBox 67"/>
+          <p:cNvSpPr txBox="1"/>
+          <p:nvPr/>
+        </p:nvSpPr>
+        <p:spPr>
+          <a:xfrm>
+            <a:off x="8778240" y="5733288"/>
+            <a:ext cx="1691640" cy="274320"/>
+          </a:xfrm>
+          <a:prstGeom prst="rect">
+            <a:avLst/>
+          </a:prstGeom>
+          <a:noFill/>
+        </p:spPr>
+        <p:txBody>
+          <a:bodyPr wrap="square" lIns="0" rIns="0" tIns="0" bIns="0">
+            <a:spAutoFit/>
+          </a:bodyPr>
+          <a:lstStyle/>
+          <a:p>
+            <a:pPr algn="r">
+              <a:lnSpc>
+                <a:spcPts val="1600"/>
+              </a:lnSpc>
+              <a:spcAft>
+                <a:spcPts val="0"/>
+              </a:spcAft>
+            </a:pPr>
+            <a:r>
+              <a:rPr sz="1250" b="0" i="0">
+                <a:solidFill>
+                  <a:srgbClr val="212529"/>
+                </a:solidFill>
+                <a:latin typeface="Garamond"/>
+              </a:rPr>
+              <a:t>18,571</a:t>
+            </a:r>
+          </a:p>
+        </p:txBody>
+      </p:sp>
+      <p:cxnSp>
+        <p:nvCxnSpPr>
+          <p:cNvPr id="69" name="Connector 68"/>
+          <p:cNvCxnSpPr/>
+          <p:nvPr/>
+        </p:nvCxnSpPr>
+        <p:spPr>
+          <a:xfrm>
+            <a:off x="1005840" y="6007608"/>
+            <a:ext cx="9509760" cy="0"/>
+          </a:xfrm>
+          <a:prstGeom prst="line">
+            <a:avLst/>
+          </a:prstGeom>
+          <a:ln w="16510">
+            <a:solidFill>
+              <a:srgbClr val="212529"/>
+            </a:solidFill>
+          </a:ln>
+          <a:effectLst/>
+        </p:spPr>
+        <p:style>
+          <a:lnRef idx="2">
+            <a:schemeClr val="accent1"/>
+          </a:lnRef>
+          <a:fillRef idx="0">
+            <a:schemeClr val="accent1"/>
+          </a:fillRef>
+          <a:effectRef idx="1">
+            <a:schemeClr val="accent1"/>
+          </a:effectRef>
+          <a:fontRef idx="minor">
+            <a:schemeClr val="tx1"/>
+          </a:fontRef>
+        </p:style>
+      </p:cxnSp>
+      <p:sp>
+        <p:nvSpPr>
+          <p:cNvPr id="70" name="TextBox 69"/>
+          <p:cNvSpPr txBox="1"/>
+          <p:nvPr/>
+        </p:nvSpPr>
+        <p:spPr>
+          <a:xfrm>
+            <a:off x="1005840" y="6135624"/>
+            <a:ext cx="9509760" cy="548640"/>
+          </a:xfrm>
+          <a:prstGeom prst="rect">
+            <a:avLst/>
+          </a:prstGeom>
+          <a:noFill/>
+        </p:spPr>
+        <p:txBody>
+          <a:bodyPr wrap="square" lIns="0" rIns="0" tIns="0" bIns="0">
+            <a:spAutoFit/>
+          </a:bodyPr>
+          <a:lstStyle/>
+          <a:p>
+            <a:pPr algn="l">
+              <a:lnSpc>
+                <a:spcPts val="1344"/>
+              </a:lnSpc>
+              <a:spcAft>
+                <a:spcPts val="0"/>
+              </a:spcAft>
+            </a:pPr>
+            <a:r>
+              <a:rPr sz="1050" b="0" i="1">
+                <a:solidFill>
+                  <a:srgbClr val="6B7480"/>
+                </a:solidFill>
+                <a:latin typeface="Garamond"/>
+              </a:rPr>
+              <a:t>Standard errors in parentheses, delta method for the logit and probit marginal effects. * p&lt;0.10, ** p&lt;0.05, *** p&lt;0.01. The probit column is the main specification of the coefficient plot.</a:t>
+            </a:r>
+          </a:p>
+        </p:txBody>
+      </p:sp>
+      <p:sp>
+        <p:nvSpPr>
+          <p:cNvPr id="71" name="Rounded Rectangle 70">
+            <a:hlinkClick action="ppaction://hlinksldjump" r:id="rId2"/>
           </p:cNvPr>
           <p:cNvSpPr/>
           <p:nvPr/>
@@ -27163,7 +27219,7 @@
                 </a:solidFill>
                 <a:latin typeface="Garamond"/>
               </a:rPr>
-              <a:t>What the CPS observes, of why teachers leave</a:t>
+              <a:t>Is the LPM bounded between 0 and 1?</a:t>
             </a:r>
           </a:p>
         </p:txBody>
@@ -27199,6 +27255,230 @@
                 <a:latin typeface="Garamond"/>
               </a:rPr>
               <a:t>50</a:t>
+            </a:r>
+          </a:p>
+        </p:txBody>
+      </p:sp>
+      <p:pic>
+        <p:nvPicPr>
+          <p:cNvPr id="4" name="Picture 3" descr="lpm_check.png"/>
+          <p:cNvPicPr>
+            <a:picLocks noChangeAspect="1"/>
+          </p:cNvPicPr>
+          <p:nvPr/>
+        </p:nvPicPr>
+        <p:blipFill>
+          <a:blip r:embed="rId2"/>
+          <a:stretch>
+            <a:fillRect/>
+          </a:stretch>
+        </p:blipFill>
+        <p:spPr>
+          <a:xfrm>
+            <a:off x="1557117" y="1024128"/>
+            <a:ext cx="9047284" cy="4480560"/>
+          </a:xfrm>
+          <a:prstGeom prst="rect">
+            <a:avLst/>
+          </a:prstGeom>
+        </p:spPr>
+      </p:pic>
+      <p:sp>
+        <p:nvSpPr>
+          <p:cNvPr id="5" name="TextBox 4"/>
+          <p:cNvSpPr txBox="1"/>
+          <p:nvPr/>
+        </p:nvSpPr>
+        <p:spPr>
+          <a:xfrm>
+            <a:off x="822960" y="5760720"/>
+            <a:ext cx="10789920" cy="822960"/>
+          </a:xfrm>
+          <a:prstGeom prst="rect">
+            <a:avLst/>
+          </a:prstGeom>
+          <a:noFill/>
+        </p:spPr>
+        <p:txBody>
+          <a:bodyPr wrap="square" lIns="0" rIns="0" tIns="0" bIns="0">
+            <a:spAutoFit/>
+          </a:bodyPr>
+          <a:lstStyle/>
+          <a:p>
+            <a:pPr algn="l">
+              <a:lnSpc>
+                <a:spcPts val="1855"/>
+              </a:lnSpc>
+              <a:spcAft>
+                <a:spcPts val="0"/>
+              </a:spcAft>
+            </a:pPr>
+            <a:r>
+              <a:rPr sz="1450" b="1" i="0">
+                <a:solidFill>
+                  <a:srgbClr val="102D5E"/>
+                </a:solidFill>
+                <a:latin typeface="Garamond"/>
+              </a:rPr>
+              <a:t>Key message.  </a:t>
+            </a:r>
+            <a:r>
+              <a:rPr sz="1450" b="0" i="0">
+                <a:solidFill>
+                  <a:srgbClr val="212529"/>
+                </a:solidFill>
+                <a:latin typeface="Garamond"/>
+              </a:rPr>
+              <a:t>No. 22% of fitted values fall below zero, so the probit is the main specification and the LPM a robustness variant.</a:t>
+            </a:r>
+          </a:p>
+        </p:txBody>
+      </p:sp>
+      <p:sp>
+        <p:nvSpPr>
+          <p:cNvPr id="6" name="Rounded Rectangle 5">
+            <a:hlinkClick action="ppaction://hlinksldjump" r:id="rId3"/>
+          </p:cNvPr>
+          <p:cNvSpPr/>
+          <p:nvPr/>
+        </p:nvSpPr>
+        <p:spPr>
+          <a:xfrm>
+            <a:off x="10469880" y="6327648"/>
+            <a:ext cx="994867" cy="365760"/>
+          </a:xfrm>
+          <a:prstGeom prst="roundRect">
+            <a:avLst/>
+          </a:prstGeom>
+          <a:solidFill>
+            <a:srgbClr val="BED3EE"/>
+          </a:solidFill>
+          <a:ln>
+            <a:noFill/>
+          </a:ln>
+          <a:effectLst/>
+        </p:spPr>
+        <p:style>
+          <a:lnRef idx="1">
+            <a:schemeClr val="accent1"/>
+          </a:lnRef>
+          <a:fillRef idx="3">
+            <a:schemeClr val="accent1"/>
+          </a:fillRef>
+          <a:effectRef idx="2">
+            <a:schemeClr val="accent1"/>
+          </a:effectRef>
+          <a:fontRef idx="minor">
+            <a:schemeClr val="lt1"/>
+          </a:fontRef>
+        </p:style>
+        <p:txBody>
+          <a:bodyPr rtlCol="0" anchor="ctr" wrap="none" lIns="36576" rIns="36576" tIns="0" bIns="0"/>
+          <a:lstStyle/>
+          <a:p>
+            <a:pPr algn="ctr"/>
+            <a:r>
+              <a:rPr sz="1800" b="1">
+                <a:solidFill>
+                  <a:srgbClr val="102D5E"/>
+                </a:solidFill>
+                <a:latin typeface="Garamond"/>
+              </a:rPr>
+              <a:t>☞ </a:t>
+            </a:r>
+            <a:r>
+              <a:rPr sz="1400">
+                <a:solidFill>
+                  <a:srgbClr val="102D5E"/>
+                </a:solidFill>
+                <a:latin typeface="Garamond"/>
+              </a:rPr>
+              <a:t>Back</a:t>
+            </a:r>
+          </a:p>
+        </p:txBody>
+      </p:sp>
+    </p:spTree>
+  </p:cSld>
+  <p:clrMapOvr>
+    <a:masterClrMapping/>
+  </p:clrMapOvr>
+</p:sld>
+</file>
+
+<file path=ppt/slides/slide51.xml><?xml version="1.0" encoding="utf-8"?>
+<p:sld xmlns:a="http://schemas.openxmlformats.org/drawingml/2006/main" xmlns:p="http://schemas.openxmlformats.org/presentationml/2006/main" xmlns:r="http://schemas.openxmlformats.org/officeDocument/2006/relationships">
+  <p:cSld>
+    <p:spTree>
+      <p:nvGrpSpPr>
+        <p:cNvPr id="1" name=""/>
+        <p:cNvGrpSpPr/>
+        <p:nvPr/>
+      </p:nvGrpSpPr>
+      <p:grpSpPr/>
+      <p:sp>
+        <p:nvSpPr>
+          <p:cNvPr id="2" name="TextBox 1"/>
+          <p:cNvSpPr txBox="1"/>
+          <p:nvPr/>
+        </p:nvSpPr>
+        <p:spPr>
+          <a:xfrm>
+            <a:off x="502920" y="219456"/>
+            <a:ext cx="11247120" cy="566928"/>
+          </a:xfrm>
+          <a:prstGeom prst="rect">
+            <a:avLst/>
+          </a:prstGeom>
+          <a:noFill/>
+        </p:spPr>
+        <p:txBody>
+          <a:bodyPr wrap="square" lIns="0" rIns="0" tIns="0" bIns="0"/>
+          <a:lstStyle/>
+          <a:p>
+            <a:r>
+              <a:rPr sz="2800" b="1">
+                <a:solidFill>
+                  <a:srgbClr val="102D5E"/>
+                </a:solidFill>
+                <a:latin typeface="Garamond"/>
+              </a:rPr>
+              <a:t>What the CPS observes, of why teachers leave</a:t>
+            </a:r>
+          </a:p>
+        </p:txBody>
+      </p:sp>
+      <p:sp>
+        <p:nvSpPr>
+          <p:cNvPr id="3" name="TextBox 2"/>
+          <p:cNvSpPr txBox="1"/>
+          <p:nvPr/>
+        </p:nvSpPr>
+        <p:spPr>
+          <a:xfrm>
+            <a:off x="11384280" y="6446520"/>
+            <a:ext cx="640080" cy="292608"/>
+          </a:xfrm>
+          <a:prstGeom prst="rect">
+            <a:avLst/>
+          </a:prstGeom>
+          <a:noFill/>
+        </p:spPr>
+        <p:txBody>
+          <a:bodyPr wrap="none" lIns="0" rIns="0" tIns="0" bIns="0">
+            <a:spAutoFit/>
+          </a:bodyPr>
+          <a:lstStyle/>
+          <a:p>
+            <a:pPr algn="r"/>
+            <a:r>
+              <a:rPr sz="1100">
+                <a:solidFill>
+                  <a:srgbClr val="6B7480"/>
+                </a:solidFill>
+                <a:latin typeface="Garamond"/>
+              </a:rPr>
+              <a:t>51</a:t>
             </a:r>
           </a:p>
         </p:txBody>

--- a/report/data_cluster/Proyect_US_cluster.pptx
+++ b/report/data_cluster/Proyect_US_cluster.pptx
@@ -9094,7 +9094,7 @@
                 </a:solidFill>
                 <a:latin typeface="Garamond"/>
               </a:rPr>
-              <a:t>Pooled 2002–24</a:t>
+              <a:t>Pooled 1997–24</a:t>
             </a:r>
           </a:p>
         </p:txBody>
@@ -19244,7 +19244,7 @@
                 </a:solidFill>
                 <a:latin typeface="Garamond"/>
               </a:rPr>
-              <a:t>The same flow, pooled 2002–2024</a:t>
+              <a:t>The same flow, pooled 1997–2024</a:t>
             </a:r>
           </a:p>
         </p:txBody>
@@ -19345,7 +19345,7 @@
                 </a:solidFill>
                 <a:latin typeface="Garamond"/>
               </a:rPr>
-              <a:t>Over the whole comparable-codes period (5,791 leavers) the composition barely moves: 26 to another job, 35 retired, 27 out of the labor force before 55 and 12 unemployed; the employed split is 22 / 9 / 30 / 39 percent. The five-year window is not driving the picture.</a:t>
+              <a:t>Over the whole period 1997–2024 (6,866 leavers, destination groups mapped across the 1990 and 2002/2010/2018 classifications) the composition barely moves: 27 to another job, 33 retired, 28 out of the labor force before 55 and 12 unemployed; the employed split is 22 / 8 / 30 / 40 percent. The five-year window is not driving the picture.</a:t>
             </a:r>
           </a:p>
         </p:txBody>

--- a/report/data_cluster/Proyect_US_cluster.pptx
+++ b/report/data_cluster/Proyect_US_cluster.pptx
@@ -9869,7 +9869,7 @@
                 </a:solidFill>
                 <a:latin typeface="Garamond"/>
               </a:rPr>
-              <a:t>Early labor-force exit is mostly a family story. More than half of this group are mothers with a child at home.</a:t>
+              <a:t>Early labor-force exit is mostly a parenting story. 64% of this group are parents with a child at home, most of them mothers.</a:t>
             </a:r>
           </a:p>
         </p:txBody>

--- a/report/data_cluster/Proyect_US_cluster.pptx
+++ b/report/data_cluster/Proyect_US_cluster.pptx
@@ -56,6 +56,7 @@
     <p:sldId id="304" r:id="rId55"/>
     <p:sldId id="305" r:id="rId56"/>
     <p:sldId id="306" r:id="rId57"/>
+    <p:sldId id="307" r:id="rId58"/>
   </p:sldIdLst>
   <p:sldSz cx="12191695" cy="6858000" type="screen4x3"/>
   <p:notesSz cx="6858000" cy="9144000"/>
@@ -9869,7 +9870,71 @@
                 </a:solidFill>
                 <a:latin typeface="Garamond"/>
               </a:rPr>
-              <a:t>Early labor-force exit is mostly a parenting story. 64% of this group are parents with a child at home, most of them mothers.</a:t>
+              <a:t>Early labor-force exit is mostly a family story. More than half of this group are mothers with a child at home.</a:t>
+            </a:r>
+          </a:p>
+        </p:txBody>
+      </p:sp>
+      <p:sp>
+        <p:nvSpPr>
+          <p:cNvPr id="6" name="Rounded Rectangle 5">
+            <a:hlinkClick action="ppaction://hlinksldjump" r:id="rId3"/>
+          </p:cNvPr>
+          <p:cNvSpPr/>
+          <p:nvPr/>
+        </p:nvSpPr>
+        <p:spPr>
+          <a:xfrm>
+            <a:off x="822960" y="6327648"/>
+            <a:ext cx="1973275" cy="365760"/>
+          </a:xfrm>
+          <a:prstGeom prst="roundRect">
+            <a:avLst/>
+          </a:prstGeom>
+          <a:solidFill>
+            <a:srgbClr val="BED3EE"/>
+          </a:solidFill>
+          <a:ln>
+            <a:noFill/>
+          </a:ln>
+          <a:effectLst/>
+        </p:spPr>
+        <p:style>
+          <a:lnRef idx="1">
+            <a:schemeClr val="accent1"/>
+          </a:lnRef>
+          <a:fillRef idx="3">
+            <a:schemeClr val="accent1"/>
+          </a:fillRef>
+          <a:effectRef idx="2">
+            <a:schemeClr val="accent1"/>
+          </a:effectRef>
+          <a:fontRef idx="minor">
+            <a:schemeClr val="lt1"/>
+          </a:fontRef>
+        </p:style>
+        <p:txBody>
+          <a:bodyPr rtlCol="0" anchor="ctr" wrap="none" lIns="36576" rIns="36576" tIns="0" bIns="0"/>
+          <a:lstStyle/>
+          <a:p>
+            <a:pPr algn="ctr"/>
+            <a:r>
+              <a:rPr sz="1800" b="1">
+                <a:solidFill>
+                  <a:srgbClr val="102D5E"/>
+                </a:solidFill>
+                <a:latin typeface="Garamond"/>
+              </a:rPr>
+              <a:t>☞ </a:t>
+            </a:r>
+            <a:r>
+              <a:rPr sz="1400">
+                <a:solidFill>
+                  <a:srgbClr val="102D5E"/>
+                </a:solidFill>
+                <a:latin typeface="Garamond"/>
+              </a:rPr>
+              <a:t>Pooled 1997–24</a:t>
             </a:r>
           </a:p>
         </p:txBody>
@@ -19244,7 +19309,7 @@
                 </a:solidFill>
                 <a:latin typeface="Garamond"/>
               </a:rPr>
-              <a:t>The same flow, pooled 1997–2024</a:t>
+              <a:t>The same cascade, pooled 1997–2024</a:t>
             </a:r>
           </a:p>
         </p:txBody>
@@ -19286,7 +19351,7 @@
       </p:sp>
       <p:pic>
         <p:nvPicPr>
-          <p:cNvPr id="4" name="Picture 3" descr="flow_employed_pooled.png"/>
+          <p:cNvPr id="4" name="Picture 3" descr="flow_olf55_pooled.png"/>
           <p:cNvPicPr>
             <a:picLocks noChangeAspect="1"/>
           </p:cNvPicPr>
@@ -19345,7 +19410,7 @@
                 </a:solidFill>
                 <a:latin typeface="Garamond"/>
               </a:rPr>
-              <a:t>Over the whole period 1997–2024 (6,866 leavers, destination groups mapped across the 1990 and 2002/2010/2018 classifications) the composition barely moves: 27 to another job, 33 retired, 28 out of the labor force before 55 and 12 unemployed; the employed split is 22 / 8 / 30 / 40 percent. The five-year window is not driving the picture.</a:t>
+              <a:t>Over the whole period (6,931 leavers) the picture is the same: 29 of every 100 leavers exit the labor force before 55, and 53% of them are mothers with a child at home (15 of the 29). The five-year window is not driving the composition.</a:t>
             </a:r>
           </a:p>
         </p:txBody>
@@ -19459,7 +19524,7 @@
                 </a:solidFill>
                 <a:latin typeface="Garamond"/>
               </a:rPr>
-              <a:t>Do switchers earn more?</a:t>
+              <a:t>The same flow, pooled 1997–2024</a:t>
             </a:r>
           </a:p>
         </p:txBody>
@@ -19501,7 +19566,7 @@
       </p:sp>
       <p:pic>
         <p:nvPicPr>
-          <p:cNvPr id="4" name="Picture 3" descr="pay7_destinations_deck.png"/>
+          <p:cNvPr id="4" name="Picture 3" descr="flow_employed_pooled.png"/>
           <p:cNvPicPr>
             <a:picLocks noChangeAspect="1"/>
           </p:cNvPicPr>
@@ -19515,8 +19580,8 @@
         </p:blipFill>
         <p:spPr>
           <a:xfrm>
-            <a:off x="1600199" y="1051560"/>
-            <a:ext cx="8961120" cy="4480560"/>
+            <a:off x="1357685" y="1051560"/>
+            <a:ext cx="9446149" cy="4526280"/>
           </a:xfrm>
           <a:prstGeom prst="rect">
             <a:avLst/>
@@ -19560,7 +19625,7 @@
                 </a:solidFill>
                 <a:latin typeface="Garamond"/>
               </a:rPr>
-              <a:t>Same person observed in two consecutive March supplements. Moves into education jobs or care pay no more than staying; only the minority moving to other professional occupations clearly gains. Half of all switchers land in occupations whose median pay is below the teacher median.</a:t>
+              <a:t>Over the whole period 1997–2024 (6,866 leavers, destination groups mapped across the 1990 and 2002/2010/2018 classifications) the composition barely moves: 27 to another job, 33 retired, 28 out of the labor force before 55 and 12 unemployed; the employed split is 22 / 8 / 30 / 40 percent. The five-year window is not driving the picture.</a:t>
             </a:r>
           </a:p>
         </p:txBody>
@@ -19674,7 +19739,7 @@
                 </a:solidFill>
                 <a:latin typeface="Garamond"/>
               </a:rPr>
-              <a:t>The proportions behind the destinations chart</a:t>
+              <a:t>Do switchers earn more?</a:t>
             </a:r>
           </a:p>
         </p:txBody>
@@ -19714,42 +19779,30 @@
           </a:p>
         </p:txBody>
       </p:sp>
-      <p:cxnSp>
-        <p:nvCxnSpPr>
-          <p:cNvPr id="4" name="Connector 3"/>
-          <p:cNvCxnSpPr/>
-          <p:nvPr/>
-        </p:nvCxnSpPr>
-        <p:spPr>
-          <a:xfrm>
-            <a:off x="822960" y="1554480"/>
-            <a:ext cx="9143999" cy="0"/>
-          </a:xfrm>
-          <a:prstGeom prst="line">
-            <a:avLst/>
-          </a:prstGeom>
-          <a:ln w="16510">
-            <a:solidFill>
-              <a:srgbClr val="212529"/>
-            </a:solidFill>
-          </a:ln>
-          <a:effectLst/>
-        </p:spPr>
-        <p:style>
-          <a:lnRef idx="2">
-            <a:schemeClr val="accent1"/>
-          </a:lnRef>
-          <a:fillRef idx="0">
-            <a:schemeClr val="accent1"/>
-          </a:fillRef>
-          <a:effectRef idx="1">
-            <a:schemeClr val="accent1"/>
-          </a:effectRef>
-          <a:fontRef idx="minor">
-            <a:schemeClr val="tx1"/>
-          </a:fontRef>
-        </p:style>
-      </p:cxnSp>
+      <p:pic>
+        <p:nvPicPr>
+          <p:cNvPr id="4" name="Picture 3" descr="pay7_destinations_deck.png"/>
+          <p:cNvPicPr>
+            <a:picLocks noChangeAspect="1"/>
+          </p:cNvPicPr>
+          <p:nvPr/>
+        </p:nvPicPr>
+        <p:blipFill>
+          <a:blip r:embed="rId2"/>
+          <a:stretch>
+            <a:fillRect/>
+          </a:stretch>
+        </p:blipFill>
+        <p:spPr>
+          <a:xfrm>
+            <a:off x="1600199" y="1051560"/>
+            <a:ext cx="8961120" cy="4480560"/>
+          </a:xfrm>
+          <a:prstGeom prst="rect">
+            <a:avLst/>
+          </a:prstGeom>
+        </p:spPr>
+      </p:pic>
       <p:sp>
         <p:nvSpPr>
           <p:cNvPr id="5" name="TextBox 4"/>
@@ -19758,8 +19811,8 @@
         </p:nvSpPr>
         <p:spPr>
           <a:xfrm>
-            <a:off x="822960" y="1664207"/>
-            <a:ext cx="6949440" cy="384048"/>
+            <a:off x="822960" y="5715000"/>
+            <a:ext cx="10789920" cy="914400"/>
           </a:xfrm>
           <a:prstGeom prst="rect">
             <a:avLst/>
@@ -19774,640 +19827,28 @@
           <a:p>
             <a:pPr algn="l">
               <a:lnSpc>
-                <a:spcPts val="1920"/>
-              </a:lnSpc>
-              <a:spcAft>
-                <a:spcPts val="0"/>
-              </a:spcAft>
-            </a:pPr>
-            <a:r>
-              <a:rPr sz="1500" b="1" i="0">
+                <a:spcPts val="1728"/>
+              </a:lnSpc>
+              <a:spcAft>
+                <a:spcPts val="0"/>
+              </a:spcAft>
+            </a:pPr>
+            <a:r>
+              <a:rPr sz="1350" b="0" i="0">
                 <a:solidFill>
                   <a:srgbClr val="212529"/>
                 </a:solidFill>
                 <a:latin typeface="Garamond"/>
               </a:rPr>
-              <a:t>Of every 100 employed leavers…</a:t>
-            </a:r>
-          </a:p>
-        </p:txBody>
-      </p:sp>
-      <p:sp>
-        <p:nvSpPr>
-          <p:cNvPr id="6" name="TextBox 5"/>
-          <p:cNvSpPr txBox="1"/>
-          <p:nvPr/>
-        </p:nvSpPr>
-        <p:spPr>
-          <a:xfrm>
-            <a:off x="7955279" y="1664207"/>
-            <a:ext cx="2011680" cy="384048"/>
-          </a:xfrm>
-          <a:prstGeom prst="rect">
-            <a:avLst/>
-          </a:prstGeom>
-          <a:noFill/>
-        </p:spPr>
-        <p:txBody>
-          <a:bodyPr wrap="square" lIns="0" rIns="0" tIns="0" bIns="0">
-            <a:spAutoFit/>
-          </a:bodyPr>
-          <a:lstStyle/>
-          <a:p>
-            <a:pPr algn="r">
-              <a:lnSpc>
-                <a:spcPts val="1920"/>
-              </a:lnSpc>
-              <a:spcAft>
-                <a:spcPts val="0"/>
-              </a:spcAft>
-            </a:pPr>
-            <a:r>
-              <a:rPr sz="1500" b="1" i="0">
-                <a:solidFill>
-                  <a:srgbClr val="212529"/>
-                </a:solidFill>
-                <a:latin typeface="Garamond"/>
-              </a:rPr>
-              <a:t>share</a:t>
-            </a:r>
-          </a:p>
-        </p:txBody>
-      </p:sp>
-      <p:cxnSp>
-        <p:nvCxnSpPr>
-          <p:cNvPr id="7" name="Connector 6"/>
-          <p:cNvCxnSpPr/>
-          <p:nvPr/>
-        </p:nvCxnSpPr>
-        <p:spPr>
-          <a:xfrm>
-            <a:off x="822960" y="2066543"/>
-            <a:ext cx="9143999" cy="0"/>
-          </a:xfrm>
-          <a:prstGeom prst="line">
-            <a:avLst/>
-          </a:prstGeom>
-          <a:ln w="8890">
-            <a:solidFill>
-              <a:srgbClr val="212529"/>
-            </a:solidFill>
-          </a:ln>
-          <a:effectLst/>
-        </p:spPr>
-        <p:style>
-          <a:lnRef idx="2">
-            <a:schemeClr val="accent1"/>
-          </a:lnRef>
-          <a:fillRef idx="0">
-            <a:schemeClr val="accent1"/>
-          </a:fillRef>
-          <a:effectRef idx="1">
-            <a:schemeClr val="accent1"/>
-          </a:effectRef>
-          <a:fontRef idx="minor">
-            <a:schemeClr val="tx1"/>
-          </a:fontRef>
-        </p:style>
-      </p:cxnSp>
-      <p:sp>
-        <p:nvSpPr>
-          <p:cNvPr id="8" name="TextBox 7"/>
-          <p:cNvSpPr txBox="1"/>
-          <p:nvPr/>
-        </p:nvSpPr>
-        <p:spPr>
-          <a:xfrm>
-            <a:off x="822960" y="2176272"/>
-            <a:ext cx="6949440" cy="384048"/>
-          </a:xfrm>
-          <a:prstGeom prst="rect">
-            <a:avLst/>
-          </a:prstGeom>
-          <a:noFill/>
-        </p:spPr>
-        <p:txBody>
-          <a:bodyPr wrap="square" lIns="0" rIns="0" tIns="0" bIns="0">
-            <a:spAutoFit/>
-          </a:bodyPr>
-          <a:lstStyle/>
-          <a:p>
-            <a:pPr algn="l">
-              <a:lnSpc>
-                <a:spcPts val="1920"/>
-              </a:lnSpc>
-              <a:spcAft>
-                <a:spcPts val="0"/>
-              </a:spcAft>
-            </a:pPr>
-            <a:r>
-              <a:rPr sz="1500" b="0" i="0">
-                <a:solidFill>
-                  <a:srgbClr val="212529"/>
-                </a:solidFill>
-                <a:latin typeface="Garamond"/>
-              </a:rPr>
-              <a:t>Education, non-teaching</a:t>
-            </a:r>
-          </a:p>
-        </p:txBody>
-      </p:sp>
-      <p:sp>
-        <p:nvSpPr>
-          <p:cNvPr id="9" name="TextBox 8"/>
-          <p:cNvSpPr txBox="1"/>
-          <p:nvPr/>
-        </p:nvSpPr>
-        <p:spPr>
-          <a:xfrm>
-            <a:off x="7955279" y="2176272"/>
-            <a:ext cx="2011680" cy="384048"/>
-          </a:xfrm>
-          <a:prstGeom prst="rect">
-            <a:avLst/>
-          </a:prstGeom>
-          <a:noFill/>
-        </p:spPr>
-        <p:txBody>
-          <a:bodyPr wrap="square" lIns="0" rIns="0" tIns="0" bIns="0">
-            <a:spAutoFit/>
-          </a:bodyPr>
-          <a:lstStyle/>
-          <a:p>
-            <a:pPr algn="r">
-              <a:lnSpc>
-                <a:spcPts val="1920"/>
-              </a:lnSpc>
-              <a:spcAft>
-                <a:spcPts val="0"/>
-              </a:spcAft>
-            </a:pPr>
-            <a:r>
-              <a:rPr sz="1500" b="0" i="0">
-                <a:solidFill>
-                  <a:srgbClr val="212529"/>
-                </a:solidFill>
-                <a:latin typeface="Garamond"/>
-              </a:rPr>
-              <a:t>22.6</a:t>
-            </a:r>
-          </a:p>
-        </p:txBody>
-      </p:sp>
-      <p:sp>
-        <p:nvSpPr>
-          <p:cNvPr id="10" name="TextBox 9"/>
-          <p:cNvSpPr txBox="1"/>
-          <p:nvPr/>
-        </p:nvSpPr>
-        <p:spPr>
-          <a:xfrm>
-            <a:off x="822960" y="2560320"/>
-            <a:ext cx="6949440" cy="384048"/>
-          </a:xfrm>
-          <a:prstGeom prst="rect">
-            <a:avLst/>
-          </a:prstGeom>
-          <a:noFill/>
-        </p:spPr>
-        <p:txBody>
-          <a:bodyPr wrap="square" lIns="0" rIns="0" tIns="0" bIns="0">
-            <a:spAutoFit/>
-          </a:bodyPr>
-          <a:lstStyle/>
-          <a:p>
-            <a:pPr algn="l">
-              <a:lnSpc>
-                <a:spcPts val="1920"/>
-              </a:lnSpc>
-              <a:spcAft>
-                <a:spcPts val="0"/>
-              </a:spcAft>
-            </a:pPr>
-            <a:r>
-              <a:rPr sz="1500" b="0" i="0">
-                <a:solidFill>
-                  <a:srgbClr val="212529"/>
-                </a:solidFill>
-                <a:latin typeface="Garamond"/>
-              </a:rPr>
-              <a:t>Care</a:t>
-            </a:r>
-          </a:p>
-        </p:txBody>
-      </p:sp>
-      <p:sp>
-        <p:nvSpPr>
-          <p:cNvPr id="11" name="TextBox 10"/>
-          <p:cNvSpPr txBox="1"/>
-          <p:nvPr/>
-        </p:nvSpPr>
-        <p:spPr>
-          <a:xfrm>
-            <a:off x="7955279" y="2560320"/>
-            <a:ext cx="2011680" cy="384048"/>
-          </a:xfrm>
-          <a:prstGeom prst="rect">
-            <a:avLst/>
-          </a:prstGeom>
-          <a:noFill/>
-        </p:spPr>
-        <p:txBody>
-          <a:bodyPr wrap="square" lIns="0" rIns="0" tIns="0" bIns="0">
-            <a:spAutoFit/>
-          </a:bodyPr>
-          <a:lstStyle/>
-          <a:p>
-            <a:pPr algn="r">
-              <a:lnSpc>
-                <a:spcPts val="1920"/>
-              </a:lnSpc>
-              <a:spcAft>
-                <a:spcPts val="0"/>
-              </a:spcAft>
-            </a:pPr>
-            <a:r>
-              <a:rPr sz="1500" b="0" i="0">
-                <a:solidFill>
-                  <a:srgbClr val="212529"/>
-                </a:solidFill>
-                <a:latin typeface="Garamond"/>
-              </a:rPr>
-              <a:t>8.5</a:t>
-            </a:r>
-          </a:p>
-        </p:txBody>
-      </p:sp>
-      <p:sp>
-        <p:nvSpPr>
-          <p:cNvPr id="12" name="TextBox 11"/>
-          <p:cNvSpPr txBox="1"/>
-          <p:nvPr/>
-        </p:nvSpPr>
-        <p:spPr>
-          <a:xfrm>
-            <a:off x="822960" y="2944368"/>
-            <a:ext cx="6949440" cy="384048"/>
-          </a:xfrm>
-          <a:prstGeom prst="rect">
-            <a:avLst/>
-          </a:prstGeom>
-          <a:noFill/>
-        </p:spPr>
-        <p:txBody>
-          <a:bodyPr wrap="square" lIns="0" rIns="0" tIns="0" bIns="0">
-            <a:spAutoFit/>
-          </a:bodyPr>
-          <a:lstStyle/>
-          <a:p>
-            <a:pPr algn="l">
-              <a:lnSpc>
-                <a:spcPts val="1920"/>
-              </a:lnSpc>
-              <a:spcAft>
-                <a:spcPts val="0"/>
-              </a:spcAft>
-            </a:pPr>
-            <a:r>
-              <a:rPr sz="1500" b="0" i="0">
-                <a:solidFill>
-                  <a:srgbClr val="212529"/>
-                </a:solidFill>
-                <a:latin typeface="Garamond"/>
-              </a:rPr>
-              <a:t>Professional and managerial</a:t>
-            </a:r>
-          </a:p>
-        </p:txBody>
-      </p:sp>
-      <p:sp>
-        <p:nvSpPr>
-          <p:cNvPr id="13" name="TextBox 12"/>
-          <p:cNvSpPr txBox="1"/>
-          <p:nvPr/>
-        </p:nvSpPr>
-        <p:spPr>
-          <a:xfrm>
-            <a:off x="7955279" y="2944368"/>
-            <a:ext cx="2011680" cy="384048"/>
-          </a:xfrm>
-          <a:prstGeom prst="rect">
-            <a:avLst/>
-          </a:prstGeom>
-          <a:noFill/>
-        </p:spPr>
-        <p:txBody>
-          <a:bodyPr wrap="square" lIns="0" rIns="0" tIns="0" bIns="0">
-            <a:spAutoFit/>
-          </a:bodyPr>
-          <a:lstStyle/>
-          <a:p>
-            <a:pPr algn="r">
-              <a:lnSpc>
-                <a:spcPts val="1920"/>
-              </a:lnSpc>
-              <a:spcAft>
-                <a:spcPts val="0"/>
-              </a:spcAft>
-            </a:pPr>
-            <a:r>
-              <a:rPr sz="1500" b="0" i="0">
-                <a:solidFill>
-                  <a:srgbClr val="212529"/>
-                </a:solidFill>
-                <a:latin typeface="Garamond"/>
-              </a:rPr>
-              <a:t>32.4</a:t>
-            </a:r>
-          </a:p>
-        </p:txBody>
-      </p:sp>
-      <p:sp>
-        <p:nvSpPr>
-          <p:cNvPr id="14" name="TextBox 13"/>
-          <p:cNvSpPr txBox="1"/>
-          <p:nvPr/>
-        </p:nvSpPr>
-        <p:spPr>
-          <a:xfrm>
-            <a:off x="822960" y="3328415"/>
-            <a:ext cx="6949440" cy="384048"/>
-          </a:xfrm>
-          <a:prstGeom prst="rect">
-            <a:avLst/>
-          </a:prstGeom>
-          <a:noFill/>
-        </p:spPr>
-        <p:txBody>
-          <a:bodyPr wrap="square" lIns="0" rIns="0" tIns="0" bIns="0">
-            <a:spAutoFit/>
-          </a:bodyPr>
-          <a:lstStyle/>
-          <a:p>
-            <a:pPr algn="l">
-              <a:lnSpc>
-                <a:spcPts val="1920"/>
-              </a:lnSpc>
-              <a:spcAft>
-                <a:spcPts val="0"/>
-              </a:spcAft>
-            </a:pPr>
-            <a:r>
-              <a:rPr sz="1500" b="0" i="0">
-                <a:solidFill>
-                  <a:srgbClr val="212529"/>
-                </a:solidFill>
-                <a:latin typeface="Garamond"/>
-              </a:rPr>
-              <a:t>Sales, office and manual</a:t>
-            </a:r>
-          </a:p>
-        </p:txBody>
-      </p:sp>
-      <p:sp>
-        <p:nvSpPr>
-          <p:cNvPr id="15" name="TextBox 14"/>
-          <p:cNvSpPr txBox="1"/>
-          <p:nvPr/>
-        </p:nvSpPr>
-        <p:spPr>
-          <a:xfrm>
-            <a:off x="7955279" y="3328415"/>
-            <a:ext cx="2011680" cy="384048"/>
-          </a:xfrm>
-          <a:prstGeom prst="rect">
-            <a:avLst/>
-          </a:prstGeom>
-          <a:noFill/>
-        </p:spPr>
-        <p:txBody>
-          <a:bodyPr wrap="square" lIns="0" rIns="0" tIns="0" bIns="0">
-            <a:spAutoFit/>
-          </a:bodyPr>
-          <a:lstStyle/>
-          <a:p>
-            <a:pPr algn="r">
-              <a:lnSpc>
-                <a:spcPts val="1920"/>
-              </a:lnSpc>
-              <a:spcAft>
-                <a:spcPts val="0"/>
-              </a:spcAft>
-            </a:pPr>
-            <a:r>
-              <a:rPr sz="1500" b="0" i="0">
-                <a:solidFill>
-                  <a:srgbClr val="212529"/>
-                </a:solidFill>
-                <a:latin typeface="Garamond"/>
-              </a:rPr>
-              <a:t>36.5</a:t>
-            </a:r>
-          </a:p>
-        </p:txBody>
-      </p:sp>
-      <p:cxnSp>
-        <p:nvCxnSpPr>
-          <p:cNvPr id="16" name="Connector 15"/>
-          <p:cNvCxnSpPr/>
-          <p:nvPr/>
-        </p:nvCxnSpPr>
-        <p:spPr>
-          <a:xfrm>
-            <a:off x="822960" y="3730751"/>
-            <a:ext cx="9143999" cy="0"/>
-          </a:xfrm>
-          <a:prstGeom prst="line">
-            <a:avLst/>
-          </a:prstGeom>
-          <a:ln w="8890">
-            <a:solidFill>
-              <a:srgbClr val="212529"/>
-            </a:solidFill>
-          </a:ln>
-          <a:effectLst/>
-        </p:spPr>
-        <p:style>
-          <a:lnRef idx="2">
-            <a:schemeClr val="accent1"/>
-          </a:lnRef>
-          <a:fillRef idx="0">
-            <a:schemeClr val="accent1"/>
-          </a:fillRef>
-          <a:effectRef idx="1">
-            <a:schemeClr val="accent1"/>
-          </a:effectRef>
-          <a:fontRef idx="minor">
-            <a:schemeClr val="tx1"/>
-          </a:fontRef>
-        </p:style>
-      </p:cxnSp>
-      <p:sp>
-        <p:nvSpPr>
-          <p:cNvPr id="17" name="TextBox 16"/>
-          <p:cNvSpPr txBox="1"/>
-          <p:nvPr/>
-        </p:nvSpPr>
-        <p:spPr>
-          <a:xfrm>
-            <a:off x="822960" y="3840479"/>
-            <a:ext cx="6949440" cy="384048"/>
-          </a:xfrm>
-          <a:prstGeom prst="rect">
-            <a:avLst/>
-          </a:prstGeom>
-          <a:noFill/>
-        </p:spPr>
-        <p:txBody>
-          <a:bodyPr wrap="square" lIns="0" rIns="0" tIns="0" bIns="0">
-            <a:spAutoFit/>
-          </a:bodyPr>
-          <a:lstStyle/>
-          <a:p>
-            <a:pPr algn="l">
-              <a:lnSpc>
-                <a:spcPts val="1920"/>
-              </a:lnSpc>
-              <a:spcAft>
-                <a:spcPts val="0"/>
-              </a:spcAft>
-            </a:pPr>
-            <a:r>
-              <a:rPr sz="1500" b="0" i="0">
-                <a:solidFill>
-                  <a:srgbClr val="8F2B36"/>
-                </a:solidFill>
-                <a:latin typeface="Garamond"/>
-              </a:rPr>
-              <a:t>Memo: occupations where fewer than half of US workers hold a college degree (in red)</a:t>
-            </a:r>
-          </a:p>
-        </p:txBody>
-      </p:sp>
-      <p:sp>
-        <p:nvSpPr>
-          <p:cNvPr id="18" name="TextBox 17"/>
-          <p:cNvSpPr txBox="1"/>
-          <p:nvPr/>
-        </p:nvSpPr>
-        <p:spPr>
-          <a:xfrm>
-            <a:off x="7955279" y="3840479"/>
-            <a:ext cx="2011680" cy="384048"/>
-          </a:xfrm>
-          <a:prstGeom prst="rect">
-            <a:avLst/>
-          </a:prstGeom>
-          <a:noFill/>
-        </p:spPr>
-        <p:txBody>
-          <a:bodyPr wrap="square" lIns="0" rIns="0" tIns="0" bIns="0">
-            <a:spAutoFit/>
-          </a:bodyPr>
-          <a:lstStyle/>
-          <a:p>
-            <a:pPr algn="r">
-              <a:lnSpc>
-                <a:spcPts val="1920"/>
-              </a:lnSpc>
-              <a:spcAft>
-                <a:spcPts val="0"/>
-              </a:spcAft>
-            </a:pPr>
-            <a:r>
-              <a:rPr sz="1500" b="1" i="0">
-                <a:solidFill>
-                  <a:srgbClr val="8F2B36"/>
-                </a:solidFill>
-                <a:latin typeface="Garamond"/>
-              </a:rPr>
-              <a:t>36.3</a:t>
-            </a:r>
-          </a:p>
-        </p:txBody>
-      </p:sp>
-      <p:cxnSp>
-        <p:nvCxnSpPr>
-          <p:cNvPr id="19" name="Connector 18"/>
-          <p:cNvCxnSpPr/>
-          <p:nvPr/>
-        </p:nvCxnSpPr>
-        <p:spPr>
-          <a:xfrm>
-            <a:off x="822960" y="4261103"/>
-            <a:ext cx="9143999" cy="0"/>
-          </a:xfrm>
-          <a:prstGeom prst="line">
-            <a:avLst/>
-          </a:prstGeom>
-          <a:ln w="16510">
-            <a:solidFill>
-              <a:srgbClr val="212529"/>
-            </a:solidFill>
-          </a:ln>
-          <a:effectLst/>
-        </p:spPr>
-        <p:style>
-          <a:lnRef idx="2">
-            <a:schemeClr val="accent1"/>
-          </a:lnRef>
-          <a:fillRef idx="0">
-            <a:schemeClr val="accent1"/>
-          </a:fillRef>
-          <a:effectRef idx="1">
-            <a:schemeClr val="accent1"/>
-          </a:effectRef>
-          <a:fontRef idx="minor">
-            <a:schemeClr val="tx1"/>
-          </a:fontRef>
-        </p:style>
-      </p:cxnSp>
-      <p:sp>
-        <p:nvSpPr>
-          <p:cNvPr id="20" name="TextBox 19"/>
-          <p:cNvSpPr txBox="1"/>
-          <p:nvPr/>
-        </p:nvSpPr>
-        <p:spPr>
-          <a:xfrm>
-            <a:off x="822960" y="4498847"/>
-            <a:ext cx="10789920" cy="1097280"/>
-          </a:xfrm>
-          <a:prstGeom prst="rect">
-            <a:avLst/>
-          </a:prstGeom>
-          <a:noFill/>
-        </p:spPr>
-        <p:txBody>
-          <a:bodyPr wrap="square" lIns="0" rIns="0" tIns="0" bIns="0">
-            <a:spAutoFit/>
-          </a:bodyPr>
-          <a:lstStyle/>
-          <a:p>
-            <a:pPr algn="l">
-              <a:lnSpc>
-                <a:spcPts val="1664"/>
-              </a:lnSpc>
-              <a:spcAft>
-                <a:spcPts val="0"/>
-              </a:spcAft>
-            </a:pPr>
-            <a:r>
-              <a:rPr sz="1300" b="0" i="0">
-                <a:solidFill>
-                  <a:srgbClr val="6B7480"/>
-                </a:solidFill>
-                <a:latin typeface="Garamond"/>
-              </a:rPr>
-              <a:t>Calendar 2020–2024; 344 employed leavers. The college-degree share of each destination occupation is computed among all employed US workers aged 25–64 in the same ASEC files, 2021–2025. 31.2 of the 36.3 red points sit in the sales, office and manual group; 5.1 in professional occupations.</a:t>
-            </a:r>
-          </a:p>
-        </p:txBody>
-      </p:sp>
-      <p:sp>
-        <p:nvSpPr>
-          <p:cNvPr id="21" name="Rounded Rectangle 20">
-            <a:hlinkClick action="ppaction://hlinksldjump" r:id="rId2"/>
+              <a:t>Same person observed in two consecutive March supplements. Moves into education jobs or care pay no more than staying; only the minority moving to other professional occupations clearly gains. Half of all switchers land in occupations whose median pay is below the teacher median.</a:t>
+            </a:r>
+          </a:p>
+        </p:txBody>
+      </p:sp>
+      <p:sp>
+        <p:nvSpPr>
+          <p:cNvPr id="6" name="Rounded Rectangle 5">
+            <a:hlinkClick action="ppaction://hlinksldjump" r:id="rId3"/>
           </p:cNvPr>
           <p:cNvSpPr/>
           <p:nvPr/>
@@ -20513,7 +19954,7 @@
                 </a:solidFill>
                 <a:latin typeface="Garamond"/>
               </a:rPr>
-              <a:t>Is the teacher group constant across code changes?</a:t>
+              <a:t>The proportions behind the destinations chart</a:t>
             </a:r>
           </a:p>
         </p:txBody>
@@ -20553,30 +19994,42 @@
           </a:p>
         </p:txBody>
       </p:sp>
-      <p:pic>
-        <p:nvPicPr>
-          <p:cNvPr id="4" name="Picture 3" descr="codes_narrow.png"/>
-          <p:cNvPicPr>
-            <a:picLocks noChangeAspect="1"/>
-          </p:cNvPicPr>
-          <p:nvPr/>
-        </p:nvPicPr>
-        <p:blipFill>
-          <a:blip r:embed="rId2"/>
-          <a:stretch>
-            <a:fillRect/>
-          </a:stretch>
-        </p:blipFill>
-        <p:spPr>
-          <a:xfrm>
-            <a:off x="1119260" y="1051560"/>
-            <a:ext cx="9922998" cy="4526280"/>
-          </a:xfrm>
-          <a:prstGeom prst="rect">
-            <a:avLst/>
-          </a:prstGeom>
-        </p:spPr>
-      </p:pic>
+      <p:cxnSp>
+        <p:nvCxnSpPr>
+          <p:cNvPr id="4" name="Connector 3"/>
+          <p:cNvCxnSpPr/>
+          <p:nvPr/>
+        </p:nvCxnSpPr>
+        <p:spPr>
+          <a:xfrm>
+            <a:off x="822960" y="1554480"/>
+            <a:ext cx="9143999" cy="0"/>
+          </a:xfrm>
+          <a:prstGeom prst="line">
+            <a:avLst/>
+          </a:prstGeom>
+          <a:ln w="16510">
+            <a:solidFill>
+              <a:srgbClr val="212529"/>
+            </a:solidFill>
+          </a:ln>
+          <a:effectLst/>
+        </p:spPr>
+        <p:style>
+          <a:lnRef idx="2">
+            <a:schemeClr val="accent1"/>
+          </a:lnRef>
+          <a:fillRef idx="0">
+            <a:schemeClr val="accent1"/>
+          </a:fillRef>
+          <a:effectRef idx="1">
+            <a:schemeClr val="accent1"/>
+          </a:effectRef>
+          <a:fontRef idx="minor">
+            <a:schemeClr val="tx1"/>
+          </a:fontRef>
+        </p:style>
+      </p:cxnSp>
       <p:sp>
         <p:nvSpPr>
           <p:cNvPr id="5" name="TextBox 4"/>
@@ -20585,8 +20038,8 @@
         </p:nvSpPr>
         <p:spPr>
           <a:xfrm>
-            <a:off x="822960" y="5806440"/>
-            <a:ext cx="10789920" cy="822960"/>
+            <a:off x="822960" y="1664207"/>
+            <a:ext cx="6949440" cy="384048"/>
           </a:xfrm>
           <a:prstGeom prst="rect">
             <a:avLst/>
@@ -20601,37 +20054,640 @@
           <a:p>
             <a:pPr algn="l">
               <a:lnSpc>
-                <a:spcPts val="1855"/>
-              </a:lnSpc>
-              <a:spcAft>
-                <a:spcPts val="0"/>
-              </a:spcAft>
-            </a:pPr>
-            <a:r>
-              <a:rPr sz="1450" b="1" i="0">
-                <a:solidFill>
-                  <a:srgbClr val="102D5E"/>
-                </a:solidFill>
-                <a:latin typeface="Garamond"/>
-              </a:rPr>
-              <a:t>Key message.  </a:t>
-            </a:r>
-            <a:r>
-              <a:rPr sz="1450" b="0" i="0">
+                <a:spcPts val="1920"/>
+              </a:lnSpc>
+              <a:spcAft>
+                <a:spcPts val="0"/>
+              </a:spcAft>
+            </a:pPr>
+            <a:r>
+              <a:rPr sz="1500" b="1" i="0">
                 <a:solidFill>
                   <a:srgbClr val="212529"/>
                 </a:solidFill>
                 <a:latin typeface="Garamond"/>
               </a:rPr>
-              <a:t>Recomputing the whole series on the narrow core moves the pooled rate by 0.1 points. The 2003 and 2020 reclassifications leave no visible break.</a:t>
-            </a:r>
-          </a:p>
-        </p:txBody>
-      </p:sp>
-      <p:sp>
-        <p:nvSpPr>
-          <p:cNvPr id="6" name="Rounded Rectangle 5">
-            <a:hlinkClick action="ppaction://hlinksldjump" r:id="rId3"/>
+              <a:t>Of every 100 employed leavers…</a:t>
+            </a:r>
+          </a:p>
+        </p:txBody>
+      </p:sp>
+      <p:sp>
+        <p:nvSpPr>
+          <p:cNvPr id="6" name="TextBox 5"/>
+          <p:cNvSpPr txBox="1"/>
+          <p:nvPr/>
+        </p:nvSpPr>
+        <p:spPr>
+          <a:xfrm>
+            <a:off x="7955279" y="1664207"/>
+            <a:ext cx="2011680" cy="384048"/>
+          </a:xfrm>
+          <a:prstGeom prst="rect">
+            <a:avLst/>
+          </a:prstGeom>
+          <a:noFill/>
+        </p:spPr>
+        <p:txBody>
+          <a:bodyPr wrap="square" lIns="0" rIns="0" tIns="0" bIns="0">
+            <a:spAutoFit/>
+          </a:bodyPr>
+          <a:lstStyle/>
+          <a:p>
+            <a:pPr algn="r">
+              <a:lnSpc>
+                <a:spcPts val="1920"/>
+              </a:lnSpc>
+              <a:spcAft>
+                <a:spcPts val="0"/>
+              </a:spcAft>
+            </a:pPr>
+            <a:r>
+              <a:rPr sz="1500" b="1" i="0">
+                <a:solidFill>
+                  <a:srgbClr val="212529"/>
+                </a:solidFill>
+                <a:latin typeface="Garamond"/>
+              </a:rPr>
+              <a:t>share</a:t>
+            </a:r>
+          </a:p>
+        </p:txBody>
+      </p:sp>
+      <p:cxnSp>
+        <p:nvCxnSpPr>
+          <p:cNvPr id="7" name="Connector 6"/>
+          <p:cNvCxnSpPr/>
+          <p:nvPr/>
+        </p:nvCxnSpPr>
+        <p:spPr>
+          <a:xfrm>
+            <a:off x="822960" y="2066543"/>
+            <a:ext cx="9143999" cy="0"/>
+          </a:xfrm>
+          <a:prstGeom prst="line">
+            <a:avLst/>
+          </a:prstGeom>
+          <a:ln w="8890">
+            <a:solidFill>
+              <a:srgbClr val="212529"/>
+            </a:solidFill>
+          </a:ln>
+          <a:effectLst/>
+        </p:spPr>
+        <p:style>
+          <a:lnRef idx="2">
+            <a:schemeClr val="accent1"/>
+          </a:lnRef>
+          <a:fillRef idx="0">
+            <a:schemeClr val="accent1"/>
+          </a:fillRef>
+          <a:effectRef idx="1">
+            <a:schemeClr val="accent1"/>
+          </a:effectRef>
+          <a:fontRef idx="minor">
+            <a:schemeClr val="tx1"/>
+          </a:fontRef>
+        </p:style>
+      </p:cxnSp>
+      <p:sp>
+        <p:nvSpPr>
+          <p:cNvPr id="8" name="TextBox 7"/>
+          <p:cNvSpPr txBox="1"/>
+          <p:nvPr/>
+        </p:nvSpPr>
+        <p:spPr>
+          <a:xfrm>
+            <a:off x="822960" y="2176272"/>
+            <a:ext cx="6949440" cy="384048"/>
+          </a:xfrm>
+          <a:prstGeom prst="rect">
+            <a:avLst/>
+          </a:prstGeom>
+          <a:noFill/>
+        </p:spPr>
+        <p:txBody>
+          <a:bodyPr wrap="square" lIns="0" rIns="0" tIns="0" bIns="0">
+            <a:spAutoFit/>
+          </a:bodyPr>
+          <a:lstStyle/>
+          <a:p>
+            <a:pPr algn="l">
+              <a:lnSpc>
+                <a:spcPts val="1920"/>
+              </a:lnSpc>
+              <a:spcAft>
+                <a:spcPts val="0"/>
+              </a:spcAft>
+            </a:pPr>
+            <a:r>
+              <a:rPr sz="1500" b="0" i="0">
+                <a:solidFill>
+                  <a:srgbClr val="212529"/>
+                </a:solidFill>
+                <a:latin typeface="Garamond"/>
+              </a:rPr>
+              <a:t>Education, non-teaching</a:t>
+            </a:r>
+          </a:p>
+        </p:txBody>
+      </p:sp>
+      <p:sp>
+        <p:nvSpPr>
+          <p:cNvPr id="9" name="TextBox 8"/>
+          <p:cNvSpPr txBox="1"/>
+          <p:nvPr/>
+        </p:nvSpPr>
+        <p:spPr>
+          <a:xfrm>
+            <a:off x="7955279" y="2176272"/>
+            <a:ext cx="2011680" cy="384048"/>
+          </a:xfrm>
+          <a:prstGeom prst="rect">
+            <a:avLst/>
+          </a:prstGeom>
+          <a:noFill/>
+        </p:spPr>
+        <p:txBody>
+          <a:bodyPr wrap="square" lIns="0" rIns="0" tIns="0" bIns="0">
+            <a:spAutoFit/>
+          </a:bodyPr>
+          <a:lstStyle/>
+          <a:p>
+            <a:pPr algn="r">
+              <a:lnSpc>
+                <a:spcPts val="1920"/>
+              </a:lnSpc>
+              <a:spcAft>
+                <a:spcPts val="0"/>
+              </a:spcAft>
+            </a:pPr>
+            <a:r>
+              <a:rPr sz="1500" b="0" i="0">
+                <a:solidFill>
+                  <a:srgbClr val="212529"/>
+                </a:solidFill>
+                <a:latin typeface="Garamond"/>
+              </a:rPr>
+              <a:t>22.6</a:t>
+            </a:r>
+          </a:p>
+        </p:txBody>
+      </p:sp>
+      <p:sp>
+        <p:nvSpPr>
+          <p:cNvPr id="10" name="TextBox 9"/>
+          <p:cNvSpPr txBox="1"/>
+          <p:nvPr/>
+        </p:nvSpPr>
+        <p:spPr>
+          <a:xfrm>
+            <a:off x="822960" y="2560320"/>
+            <a:ext cx="6949440" cy="384048"/>
+          </a:xfrm>
+          <a:prstGeom prst="rect">
+            <a:avLst/>
+          </a:prstGeom>
+          <a:noFill/>
+        </p:spPr>
+        <p:txBody>
+          <a:bodyPr wrap="square" lIns="0" rIns="0" tIns="0" bIns="0">
+            <a:spAutoFit/>
+          </a:bodyPr>
+          <a:lstStyle/>
+          <a:p>
+            <a:pPr algn="l">
+              <a:lnSpc>
+                <a:spcPts val="1920"/>
+              </a:lnSpc>
+              <a:spcAft>
+                <a:spcPts val="0"/>
+              </a:spcAft>
+            </a:pPr>
+            <a:r>
+              <a:rPr sz="1500" b="0" i="0">
+                <a:solidFill>
+                  <a:srgbClr val="212529"/>
+                </a:solidFill>
+                <a:latin typeface="Garamond"/>
+              </a:rPr>
+              <a:t>Care</a:t>
+            </a:r>
+          </a:p>
+        </p:txBody>
+      </p:sp>
+      <p:sp>
+        <p:nvSpPr>
+          <p:cNvPr id="11" name="TextBox 10"/>
+          <p:cNvSpPr txBox="1"/>
+          <p:nvPr/>
+        </p:nvSpPr>
+        <p:spPr>
+          <a:xfrm>
+            <a:off x="7955279" y="2560320"/>
+            <a:ext cx="2011680" cy="384048"/>
+          </a:xfrm>
+          <a:prstGeom prst="rect">
+            <a:avLst/>
+          </a:prstGeom>
+          <a:noFill/>
+        </p:spPr>
+        <p:txBody>
+          <a:bodyPr wrap="square" lIns="0" rIns="0" tIns="0" bIns="0">
+            <a:spAutoFit/>
+          </a:bodyPr>
+          <a:lstStyle/>
+          <a:p>
+            <a:pPr algn="r">
+              <a:lnSpc>
+                <a:spcPts val="1920"/>
+              </a:lnSpc>
+              <a:spcAft>
+                <a:spcPts val="0"/>
+              </a:spcAft>
+            </a:pPr>
+            <a:r>
+              <a:rPr sz="1500" b="0" i="0">
+                <a:solidFill>
+                  <a:srgbClr val="212529"/>
+                </a:solidFill>
+                <a:latin typeface="Garamond"/>
+              </a:rPr>
+              <a:t>8.5</a:t>
+            </a:r>
+          </a:p>
+        </p:txBody>
+      </p:sp>
+      <p:sp>
+        <p:nvSpPr>
+          <p:cNvPr id="12" name="TextBox 11"/>
+          <p:cNvSpPr txBox="1"/>
+          <p:nvPr/>
+        </p:nvSpPr>
+        <p:spPr>
+          <a:xfrm>
+            <a:off x="822960" y="2944368"/>
+            <a:ext cx="6949440" cy="384048"/>
+          </a:xfrm>
+          <a:prstGeom prst="rect">
+            <a:avLst/>
+          </a:prstGeom>
+          <a:noFill/>
+        </p:spPr>
+        <p:txBody>
+          <a:bodyPr wrap="square" lIns="0" rIns="0" tIns="0" bIns="0">
+            <a:spAutoFit/>
+          </a:bodyPr>
+          <a:lstStyle/>
+          <a:p>
+            <a:pPr algn="l">
+              <a:lnSpc>
+                <a:spcPts val="1920"/>
+              </a:lnSpc>
+              <a:spcAft>
+                <a:spcPts val="0"/>
+              </a:spcAft>
+            </a:pPr>
+            <a:r>
+              <a:rPr sz="1500" b="0" i="0">
+                <a:solidFill>
+                  <a:srgbClr val="212529"/>
+                </a:solidFill>
+                <a:latin typeface="Garamond"/>
+              </a:rPr>
+              <a:t>Professional and managerial</a:t>
+            </a:r>
+          </a:p>
+        </p:txBody>
+      </p:sp>
+      <p:sp>
+        <p:nvSpPr>
+          <p:cNvPr id="13" name="TextBox 12"/>
+          <p:cNvSpPr txBox="1"/>
+          <p:nvPr/>
+        </p:nvSpPr>
+        <p:spPr>
+          <a:xfrm>
+            <a:off x="7955279" y="2944368"/>
+            <a:ext cx="2011680" cy="384048"/>
+          </a:xfrm>
+          <a:prstGeom prst="rect">
+            <a:avLst/>
+          </a:prstGeom>
+          <a:noFill/>
+        </p:spPr>
+        <p:txBody>
+          <a:bodyPr wrap="square" lIns="0" rIns="0" tIns="0" bIns="0">
+            <a:spAutoFit/>
+          </a:bodyPr>
+          <a:lstStyle/>
+          <a:p>
+            <a:pPr algn="r">
+              <a:lnSpc>
+                <a:spcPts val="1920"/>
+              </a:lnSpc>
+              <a:spcAft>
+                <a:spcPts val="0"/>
+              </a:spcAft>
+            </a:pPr>
+            <a:r>
+              <a:rPr sz="1500" b="0" i="0">
+                <a:solidFill>
+                  <a:srgbClr val="212529"/>
+                </a:solidFill>
+                <a:latin typeface="Garamond"/>
+              </a:rPr>
+              <a:t>32.4</a:t>
+            </a:r>
+          </a:p>
+        </p:txBody>
+      </p:sp>
+      <p:sp>
+        <p:nvSpPr>
+          <p:cNvPr id="14" name="TextBox 13"/>
+          <p:cNvSpPr txBox="1"/>
+          <p:nvPr/>
+        </p:nvSpPr>
+        <p:spPr>
+          <a:xfrm>
+            <a:off x="822960" y="3328415"/>
+            <a:ext cx="6949440" cy="384048"/>
+          </a:xfrm>
+          <a:prstGeom prst="rect">
+            <a:avLst/>
+          </a:prstGeom>
+          <a:noFill/>
+        </p:spPr>
+        <p:txBody>
+          <a:bodyPr wrap="square" lIns="0" rIns="0" tIns="0" bIns="0">
+            <a:spAutoFit/>
+          </a:bodyPr>
+          <a:lstStyle/>
+          <a:p>
+            <a:pPr algn="l">
+              <a:lnSpc>
+                <a:spcPts val="1920"/>
+              </a:lnSpc>
+              <a:spcAft>
+                <a:spcPts val="0"/>
+              </a:spcAft>
+            </a:pPr>
+            <a:r>
+              <a:rPr sz="1500" b="0" i="0">
+                <a:solidFill>
+                  <a:srgbClr val="212529"/>
+                </a:solidFill>
+                <a:latin typeface="Garamond"/>
+              </a:rPr>
+              <a:t>Sales, office and manual</a:t>
+            </a:r>
+          </a:p>
+        </p:txBody>
+      </p:sp>
+      <p:sp>
+        <p:nvSpPr>
+          <p:cNvPr id="15" name="TextBox 14"/>
+          <p:cNvSpPr txBox="1"/>
+          <p:nvPr/>
+        </p:nvSpPr>
+        <p:spPr>
+          <a:xfrm>
+            <a:off x="7955279" y="3328415"/>
+            <a:ext cx="2011680" cy="384048"/>
+          </a:xfrm>
+          <a:prstGeom prst="rect">
+            <a:avLst/>
+          </a:prstGeom>
+          <a:noFill/>
+        </p:spPr>
+        <p:txBody>
+          <a:bodyPr wrap="square" lIns="0" rIns="0" tIns="0" bIns="0">
+            <a:spAutoFit/>
+          </a:bodyPr>
+          <a:lstStyle/>
+          <a:p>
+            <a:pPr algn="r">
+              <a:lnSpc>
+                <a:spcPts val="1920"/>
+              </a:lnSpc>
+              <a:spcAft>
+                <a:spcPts val="0"/>
+              </a:spcAft>
+            </a:pPr>
+            <a:r>
+              <a:rPr sz="1500" b="0" i="0">
+                <a:solidFill>
+                  <a:srgbClr val="212529"/>
+                </a:solidFill>
+                <a:latin typeface="Garamond"/>
+              </a:rPr>
+              <a:t>36.5</a:t>
+            </a:r>
+          </a:p>
+        </p:txBody>
+      </p:sp>
+      <p:cxnSp>
+        <p:nvCxnSpPr>
+          <p:cNvPr id="16" name="Connector 15"/>
+          <p:cNvCxnSpPr/>
+          <p:nvPr/>
+        </p:nvCxnSpPr>
+        <p:spPr>
+          <a:xfrm>
+            <a:off x="822960" y="3730751"/>
+            <a:ext cx="9143999" cy="0"/>
+          </a:xfrm>
+          <a:prstGeom prst="line">
+            <a:avLst/>
+          </a:prstGeom>
+          <a:ln w="8890">
+            <a:solidFill>
+              <a:srgbClr val="212529"/>
+            </a:solidFill>
+          </a:ln>
+          <a:effectLst/>
+        </p:spPr>
+        <p:style>
+          <a:lnRef idx="2">
+            <a:schemeClr val="accent1"/>
+          </a:lnRef>
+          <a:fillRef idx="0">
+            <a:schemeClr val="accent1"/>
+          </a:fillRef>
+          <a:effectRef idx="1">
+            <a:schemeClr val="accent1"/>
+          </a:effectRef>
+          <a:fontRef idx="minor">
+            <a:schemeClr val="tx1"/>
+          </a:fontRef>
+        </p:style>
+      </p:cxnSp>
+      <p:sp>
+        <p:nvSpPr>
+          <p:cNvPr id="17" name="TextBox 16"/>
+          <p:cNvSpPr txBox="1"/>
+          <p:nvPr/>
+        </p:nvSpPr>
+        <p:spPr>
+          <a:xfrm>
+            <a:off x="822960" y="3840479"/>
+            <a:ext cx="6949440" cy="384048"/>
+          </a:xfrm>
+          <a:prstGeom prst="rect">
+            <a:avLst/>
+          </a:prstGeom>
+          <a:noFill/>
+        </p:spPr>
+        <p:txBody>
+          <a:bodyPr wrap="square" lIns="0" rIns="0" tIns="0" bIns="0">
+            <a:spAutoFit/>
+          </a:bodyPr>
+          <a:lstStyle/>
+          <a:p>
+            <a:pPr algn="l">
+              <a:lnSpc>
+                <a:spcPts val="1920"/>
+              </a:lnSpc>
+              <a:spcAft>
+                <a:spcPts val="0"/>
+              </a:spcAft>
+            </a:pPr>
+            <a:r>
+              <a:rPr sz="1500" b="0" i="0">
+                <a:solidFill>
+                  <a:srgbClr val="8F2B36"/>
+                </a:solidFill>
+                <a:latin typeface="Garamond"/>
+              </a:rPr>
+              <a:t>Memo: occupations where fewer than half of US workers hold a college degree (in red)</a:t>
+            </a:r>
+          </a:p>
+        </p:txBody>
+      </p:sp>
+      <p:sp>
+        <p:nvSpPr>
+          <p:cNvPr id="18" name="TextBox 17"/>
+          <p:cNvSpPr txBox="1"/>
+          <p:nvPr/>
+        </p:nvSpPr>
+        <p:spPr>
+          <a:xfrm>
+            <a:off x="7955279" y="3840479"/>
+            <a:ext cx="2011680" cy="384048"/>
+          </a:xfrm>
+          <a:prstGeom prst="rect">
+            <a:avLst/>
+          </a:prstGeom>
+          <a:noFill/>
+        </p:spPr>
+        <p:txBody>
+          <a:bodyPr wrap="square" lIns="0" rIns="0" tIns="0" bIns="0">
+            <a:spAutoFit/>
+          </a:bodyPr>
+          <a:lstStyle/>
+          <a:p>
+            <a:pPr algn="r">
+              <a:lnSpc>
+                <a:spcPts val="1920"/>
+              </a:lnSpc>
+              <a:spcAft>
+                <a:spcPts val="0"/>
+              </a:spcAft>
+            </a:pPr>
+            <a:r>
+              <a:rPr sz="1500" b="1" i="0">
+                <a:solidFill>
+                  <a:srgbClr val="8F2B36"/>
+                </a:solidFill>
+                <a:latin typeface="Garamond"/>
+              </a:rPr>
+              <a:t>36.3</a:t>
+            </a:r>
+          </a:p>
+        </p:txBody>
+      </p:sp>
+      <p:cxnSp>
+        <p:nvCxnSpPr>
+          <p:cNvPr id="19" name="Connector 18"/>
+          <p:cNvCxnSpPr/>
+          <p:nvPr/>
+        </p:nvCxnSpPr>
+        <p:spPr>
+          <a:xfrm>
+            <a:off x="822960" y="4261103"/>
+            <a:ext cx="9143999" cy="0"/>
+          </a:xfrm>
+          <a:prstGeom prst="line">
+            <a:avLst/>
+          </a:prstGeom>
+          <a:ln w="16510">
+            <a:solidFill>
+              <a:srgbClr val="212529"/>
+            </a:solidFill>
+          </a:ln>
+          <a:effectLst/>
+        </p:spPr>
+        <p:style>
+          <a:lnRef idx="2">
+            <a:schemeClr val="accent1"/>
+          </a:lnRef>
+          <a:fillRef idx="0">
+            <a:schemeClr val="accent1"/>
+          </a:fillRef>
+          <a:effectRef idx="1">
+            <a:schemeClr val="accent1"/>
+          </a:effectRef>
+          <a:fontRef idx="minor">
+            <a:schemeClr val="tx1"/>
+          </a:fontRef>
+        </p:style>
+      </p:cxnSp>
+      <p:sp>
+        <p:nvSpPr>
+          <p:cNvPr id="20" name="TextBox 19"/>
+          <p:cNvSpPr txBox="1"/>
+          <p:nvPr/>
+        </p:nvSpPr>
+        <p:spPr>
+          <a:xfrm>
+            <a:off x="822960" y="4498847"/>
+            <a:ext cx="10789920" cy="1097280"/>
+          </a:xfrm>
+          <a:prstGeom prst="rect">
+            <a:avLst/>
+          </a:prstGeom>
+          <a:noFill/>
+        </p:spPr>
+        <p:txBody>
+          <a:bodyPr wrap="square" lIns="0" rIns="0" tIns="0" bIns="0">
+            <a:spAutoFit/>
+          </a:bodyPr>
+          <a:lstStyle/>
+          <a:p>
+            <a:pPr algn="l">
+              <a:lnSpc>
+                <a:spcPts val="1664"/>
+              </a:lnSpc>
+              <a:spcAft>
+                <a:spcPts val="0"/>
+              </a:spcAft>
+            </a:pPr>
+            <a:r>
+              <a:rPr sz="1300" b="0" i="0">
+                <a:solidFill>
+                  <a:srgbClr val="6B7480"/>
+                </a:solidFill>
+                <a:latin typeface="Garamond"/>
+              </a:rPr>
+              <a:t>Calendar 2020–2024; 344 employed leavers. The college-degree share of each destination occupation is computed among all employed US workers aged 25–64 in the same ASEC files, 2021–2025. 31.2 of the 36.3 red points sit in the sales, office and manual group; 5.1 in professional occupations.</a:t>
+            </a:r>
+          </a:p>
+        </p:txBody>
+      </p:sp>
+      <p:sp>
+        <p:nvSpPr>
+          <p:cNvPr id="21" name="Rounded Rectangle 20">
+            <a:hlinkClick action="ppaction://hlinksldjump" r:id="rId2"/>
           </p:cNvPr>
           <p:cNvSpPr/>
           <p:nvPr/>
@@ -20737,7 +20793,7 @@
                 </a:solidFill>
                 <a:latin typeface="Garamond"/>
               </a:rPr>
-              <a:t>Linear probability model, fixed-effects variants</a:t>
+              <a:t>Is the teacher group constant across code changes?</a:t>
             </a:r>
           </a:p>
         </p:txBody>
@@ -20777,42 +20833,30 @@
           </a:p>
         </p:txBody>
       </p:sp>
-      <p:cxnSp>
-        <p:nvCxnSpPr>
-          <p:cNvPr id="4" name="Connector 3"/>
-          <p:cNvCxnSpPr/>
-          <p:nvPr/>
-        </p:nvCxnSpPr>
-        <p:spPr>
-          <a:xfrm>
-            <a:off x="1005840" y="1298448"/>
-            <a:ext cx="9509760" cy="0"/>
-          </a:xfrm>
-          <a:prstGeom prst="line">
-            <a:avLst/>
-          </a:prstGeom>
-          <a:ln w="16510">
-            <a:solidFill>
-              <a:srgbClr val="212529"/>
-            </a:solidFill>
-          </a:ln>
-          <a:effectLst/>
-        </p:spPr>
-        <p:style>
-          <a:lnRef idx="2">
-            <a:schemeClr val="accent1"/>
-          </a:lnRef>
-          <a:fillRef idx="0">
-            <a:schemeClr val="accent1"/>
-          </a:fillRef>
-          <a:effectRef idx="1">
-            <a:schemeClr val="accent1"/>
-          </a:effectRef>
-          <a:fontRef idx="minor">
-            <a:schemeClr val="tx1"/>
-          </a:fontRef>
-        </p:style>
-      </p:cxnSp>
+      <p:pic>
+        <p:nvPicPr>
+          <p:cNvPr id="4" name="Picture 3" descr="codes_narrow.png"/>
+          <p:cNvPicPr>
+            <a:picLocks noChangeAspect="1"/>
+          </p:cNvPicPr>
+          <p:nvPr/>
+        </p:nvPicPr>
+        <p:blipFill>
+          <a:blip r:embed="rId2"/>
+          <a:stretch>
+            <a:fillRect/>
+          </a:stretch>
+        </p:blipFill>
+        <p:spPr>
+          <a:xfrm>
+            <a:off x="1119260" y="1051560"/>
+            <a:ext cx="9922998" cy="4526280"/>
+          </a:xfrm>
+          <a:prstGeom prst="rect">
+            <a:avLst/>
+          </a:prstGeom>
+        </p:spPr>
+      </p:pic>
       <p:sp>
         <p:nvSpPr>
           <p:cNvPr id="5" name="TextBox 4"/>
@@ -20821,2918 +20865,53 @@
         </p:nvSpPr>
         <p:spPr>
           <a:xfrm>
-            <a:off x="5029200" y="1371600"/>
-            <a:ext cx="5486400" cy="274320"/>
-          </a:xfrm>
-          <a:prstGeom prst="rect">
-            <a:avLst/>
-          </a:prstGeom>
-          <a:noFill/>
-        </p:spPr>
-        <p:txBody>
-          <a:bodyPr wrap="square" lIns="0" rIns="0" tIns="0" bIns="0">
-            <a:spAutoFit/>
-          </a:bodyPr>
-          <a:lstStyle/>
-          <a:p>
-            <a:pPr algn="ctr">
-              <a:lnSpc>
-                <a:spcPts val="1600"/>
-              </a:lnSpc>
-              <a:spcAft>
-                <a:spcPts val="0"/>
-              </a:spcAft>
-            </a:pPr>
-            <a:r>
-              <a:rPr sz="1250" b="0" i="0">
+            <a:off x="822960" y="5806440"/>
+            <a:ext cx="10789920" cy="822960"/>
+          </a:xfrm>
+          <a:prstGeom prst="rect">
+            <a:avLst/>
+          </a:prstGeom>
+          <a:noFill/>
+        </p:spPr>
+        <p:txBody>
+          <a:bodyPr wrap="square" lIns="0" rIns="0" tIns="0" bIns="0">
+            <a:spAutoFit/>
+          </a:bodyPr>
+          <a:lstStyle/>
+          <a:p>
+            <a:pPr algn="l">
+              <a:lnSpc>
+                <a:spcPts val="1855"/>
+              </a:lnSpc>
+              <a:spcAft>
+                <a:spcPts val="0"/>
+              </a:spcAft>
+            </a:pPr>
+            <a:r>
+              <a:rPr sz="1450" b="1" i="0">
+                <a:solidFill>
+                  <a:srgbClr val="102D5E"/>
+                </a:solidFill>
+                <a:latin typeface="Garamond"/>
+              </a:rPr>
+              <a:t>Key message.  </a:t>
+            </a:r>
+            <a:r>
+              <a:rPr sz="1450" b="0" i="0">
                 <a:solidFill>
                   <a:srgbClr val="212529"/>
                 </a:solidFill>
                 <a:latin typeface="Garamond"/>
               </a:rPr>
-              <a:t>Dependent variable: left teaching (×100)</a:t>
-            </a:r>
-          </a:p>
-        </p:txBody>
-      </p:sp>
-      <p:cxnSp>
-        <p:nvCxnSpPr>
-          <p:cNvPr id="6" name="Connector 5"/>
-          <p:cNvCxnSpPr/>
-          <p:nvPr/>
-        </p:nvCxnSpPr>
-        <p:spPr>
-          <a:xfrm>
-            <a:off x="5029200" y="1700784"/>
-            <a:ext cx="5486400" cy="0"/>
-          </a:xfrm>
-          <a:prstGeom prst="line">
-            <a:avLst/>
-          </a:prstGeom>
-          <a:ln w="8890">
-            <a:solidFill>
-              <a:srgbClr val="212529"/>
-            </a:solidFill>
-          </a:ln>
-          <a:effectLst/>
-        </p:spPr>
-        <p:style>
-          <a:lnRef idx="2">
-            <a:schemeClr val="accent1"/>
-          </a:lnRef>
-          <a:fillRef idx="0">
-            <a:schemeClr val="accent1"/>
-          </a:fillRef>
-          <a:effectRef idx="1">
-            <a:schemeClr val="accent1"/>
-          </a:effectRef>
-          <a:fontRef idx="minor">
-            <a:schemeClr val="tx1"/>
-          </a:fontRef>
-        </p:style>
-      </p:cxnSp>
-      <p:sp>
-        <p:nvSpPr>
-          <p:cNvPr id="7" name="TextBox 6"/>
-          <p:cNvSpPr txBox="1"/>
-          <p:nvPr/>
-        </p:nvSpPr>
-        <p:spPr>
-          <a:xfrm>
-            <a:off x="5029200" y="1764792"/>
-            <a:ext cx="1691640" cy="274320"/>
-          </a:xfrm>
-          <a:prstGeom prst="rect">
-            <a:avLst/>
-          </a:prstGeom>
-          <a:noFill/>
-        </p:spPr>
-        <p:txBody>
-          <a:bodyPr wrap="square" lIns="0" rIns="0" tIns="0" bIns="0">
-            <a:spAutoFit/>
-          </a:bodyPr>
-          <a:lstStyle/>
-          <a:p>
-            <a:pPr algn="r">
-              <a:lnSpc>
-                <a:spcPts val="1600"/>
-              </a:lnSpc>
-              <a:spcAft>
-                <a:spcPts val="0"/>
-              </a:spcAft>
-            </a:pPr>
-            <a:r>
-              <a:rPr sz="1250" b="1" i="0">
-                <a:solidFill>
-                  <a:srgbClr val="212529"/>
-                </a:solidFill>
-                <a:latin typeface="Garamond"/>
-              </a:rPr>
-              <a:t>(1)</a:t>
-            </a:r>
-          </a:p>
-        </p:txBody>
-      </p:sp>
-      <p:sp>
-        <p:nvSpPr>
-          <p:cNvPr id="8" name="TextBox 7"/>
-          <p:cNvSpPr txBox="1"/>
-          <p:nvPr/>
-        </p:nvSpPr>
-        <p:spPr>
-          <a:xfrm>
-            <a:off x="6903720" y="1764792"/>
-            <a:ext cx="1691640" cy="274320"/>
-          </a:xfrm>
-          <a:prstGeom prst="rect">
-            <a:avLst/>
-          </a:prstGeom>
-          <a:noFill/>
-        </p:spPr>
-        <p:txBody>
-          <a:bodyPr wrap="square" lIns="0" rIns="0" tIns="0" bIns="0">
-            <a:spAutoFit/>
-          </a:bodyPr>
-          <a:lstStyle/>
-          <a:p>
-            <a:pPr algn="r">
-              <a:lnSpc>
-                <a:spcPts val="1600"/>
-              </a:lnSpc>
-              <a:spcAft>
-                <a:spcPts val="0"/>
-              </a:spcAft>
-            </a:pPr>
-            <a:r>
-              <a:rPr sz="1250" b="1" i="0">
-                <a:solidFill>
-                  <a:srgbClr val="212529"/>
-                </a:solidFill>
-                <a:latin typeface="Garamond"/>
-              </a:rPr>
-              <a:t>(2)</a:t>
-            </a:r>
-          </a:p>
-        </p:txBody>
-      </p:sp>
-      <p:sp>
-        <p:nvSpPr>
-          <p:cNvPr id="9" name="TextBox 8"/>
-          <p:cNvSpPr txBox="1"/>
-          <p:nvPr/>
-        </p:nvSpPr>
-        <p:spPr>
-          <a:xfrm>
-            <a:off x="8778240" y="1764792"/>
-            <a:ext cx="1691640" cy="274320"/>
-          </a:xfrm>
-          <a:prstGeom prst="rect">
-            <a:avLst/>
-          </a:prstGeom>
-          <a:noFill/>
-        </p:spPr>
-        <p:txBody>
-          <a:bodyPr wrap="square" lIns="0" rIns="0" tIns="0" bIns="0">
-            <a:spAutoFit/>
-          </a:bodyPr>
-          <a:lstStyle/>
-          <a:p>
-            <a:pPr algn="r">
-              <a:lnSpc>
-                <a:spcPts val="1600"/>
-              </a:lnSpc>
-              <a:spcAft>
-                <a:spcPts val="0"/>
-              </a:spcAft>
-            </a:pPr>
-            <a:r>
-              <a:rPr sz="1250" b="1" i="0">
-                <a:solidFill>
-                  <a:srgbClr val="212529"/>
-                </a:solidFill>
-                <a:latin typeface="Garamond"/>
-              </a:rPr>
-              <a:t>(3)</a:t>
-            </a:r>
-          </a:p>
-        </p:txBody>
-      </p:sp>
-      <p:cxnSp>
-        <p:nvCxnSpPr>
-          <p:cNvPr id="10" name="Connector 9"/>
-          <p:cNvCxnSpPr/>
-          <p:nvPr/>
-        </p:nvCxnSpPr>
-        <p:spPr>
-          <a:xfrm>
-            <a:off x="1005840" y="2093976"/>
-            <a:ext cx="9509760" cy="0"/>
-          </a:xfrm>
-          <a:prstGeom prst="line">
-            <a:avLst/>
-          </a:prstGeom>
-          <a:ln w="8890">
-            <a:solidFill>
-              <a:srgbClr val="212529"/>
-            </a:solidFill>
-          </a:ln>
-          <a:effectLst/>
-        </p:spPr>
-        <p:style>
-          <a:lnRef idx="2">
-            <a:schemeClr val="accent1"/>
-          </a:lnRef>
-          <a:fillRef idx="0">
-            <a:schemeClr val="accent1"/>
-          </a:fillRef>
-          <a:effectRef idx="1">
-            <a:schemeClr val="accent1"/>
-          </a:effectRef>
-          <a:fontRef idx="minor">
-            <a:schemeClr val="tx1"/>
-          </a:fontRef>
-        </p:style>
-      </p:cxnSp>
-      <p:sp>
-        <p:nvSpPr>
-          <p:cNvPr id="11" name="TextBox 10"/>
-          <p:cNvSpPr txBox="1"/>
-          <p:nvPr/>
-        </p:nvSpPr>
-        <p:spPr>
-          <a:xfrm>
-            <a:off x="1005840" y="2176272"/>
-            <a:ext cx="3840480" cy="274320"/>
-          </a:xfrm>
-          <a:prstGeom prst="rect">
-            <a:avLst/>
-          </a:prstGeom>
-          <a:noFill/>
-        </p:spPr>
-        <p:txBody>
-          <a:bodyPr wrap="square" lIns="0" rIns="0" tIns="0" bIns="0">
-            <a:spAutoFit/>
-          </a:bodyPr>
-          <a:lstStyle/>
-          <a:p>
-            <a:pPr algn="l">
-              <a:lnSpc>
-                <a:spcPts val="1600"/>
-              </a:lnSpc>
-              <a:spcAft>
-                <a:spcPts val="0"/>
-              </a:spcAft>
-            </a:pPr>
-            <a:r>
-              <a:rPr sz="1250" b="0" i="0">
-                <a:solidFill>
-                  <a:srgbClr val="212529"/>
-                </a:solidFill>
-                <a:latin typeface="Garamond"/>
-              </a:rPr>
-              <a:t>Full-year contract</a:t>
-            </a:r>
-          </a:p>
-        </p:txBody>
-      </p:sp>
-      <p:sp>
-        <p:nvSpPr>
-          <p:cNvPr id="12" name="TextBox 11"/>
-          <p:cNvSpPr txBox="1"/>
-          <p:nvPr/>
-        </p:nvSpPr>
-        <p:spPr>
-          <a:xfrm>
-            <a:off x="5029200" y="2176272"/>
-            <a:ext cx="1691640" cy="274320"/>
-          </a:xfrm>
-          <a:prstGeom prst="rect">
-            <a:avLst/>
-          </a:prstGeom>
-          <a:noFill/>
-        </p:spPr>
-        <p:txBody>
-          <a:bodyPr wrap="square" lIns="0" rIns="0" tIns="0" bIns="0">
-            <a:spAutoFit/>
-          </a:bodyPr>
-          <a:lstStyle/>
-          <a:p>
-            <a:pPr algn="r">
-              <a:lnSpc>
-                <a:spcPts val="1600"/>
-              </a:lnSpc>
-              <a:spcAft>
-                <a:spcPts val="0"/>
-              </a:spcAft>
-            </a:pPr>
-            <a:r>
-              <a:rPr sz="1250" b="0" i="0">
-                <a:solidFill>
-                  <a:srgbClr val="212529"/>
-                </a:solidFill>
-                <a:latin typeface="Garamond"/>
-              </a:rPr>
-              <a:t>−11.54***</a:t>
-            </a:r>
-          </a:p>
-        </p:txBody>
-      </p:sp>
-      <p:sp>
-        <p:nvSpPr>
-          <p:cNvPr id="13" name="TextBox 12"/>
-          <p:cNvSpPr txBox="1"/>
-          <p:nvPr/>
-        </p:nvSpPr>
-        <p:spPr>
-          <a:xfrm>
-            <a:off x="6903720" y="2176272"/>
-            <a:ext cx="1691640" cy="274320"/>
-          </a:xfrm>
-          <a:prstGeom prst="rect">
-            <a:avLst/>
-          </a:prstGeom>
-          <a:noFill/>
-        </p:spPr>
-        <p:txBody>
-          <a:bodyPr wrap="square" lIns="0" rIns="0" tIns="0" bIns="0">
-            <a:spAutoFit/>
-          </a:bodyPr>
-          <a:lstStyle/>
-          <a:p>
-            <a:pPr algn="r">
-              <a:lnSpc>
-                <a:spcPts val="1600"/>
-              </a:lnSpc>
-              <a:spcAft>
-                <a:spcPts val="0"/>
-              </a:spcAft>
-            </a:pPr>
-            <a:r>
-              <a:rPr sz="1250" b="0" i="0">
-                <a:solidFill>
-                  <a:srgbClr val="212529"/>
-                </a:solidFill>
-                <a:latin typeface="Garamond"/>
-              </a:rPr>
-              <a:t>−11.55***</a:t>
-            </a:r>
-          </a:p>
-        </p:txBody>
-      </p:sp>
-      <p:sp>
-        <p:nvSpPr>
-          <p:cNvPr id="14" name="TextBox 13"/>
-          <p:cNvSpPr txBox="1"/>
-          <p:nvPr/>
-        </p:nvSpPr>
-        <p:spPr>
-          <a:xfrm>
-            <a:off x="8778240" y="2176272"/>
-            <a:ext cx="1691640" cy="274320"/>
-          </a:xfrm>
-          <a:prstGeom prst="rect">
-            <a:avLst/>
-          </a:prstGeom>
-          <a:noFill/>
-        </p:spPr>
-        <p:txBody>
-          <a:bodyPr wrap="square" lIns="0" rIns="0" tIns="0" bIns="0">
-            <a:spAutoFit/>
-          </a:bodyPr>
-          <a:lstStyle/>
-          <a:p>
-            <a:pPr algn="r">
-              <a:lnSpc>
-                <a:spcPts val="1600"/>
-              </a:lnSpc>
-              <a:spcAft>
-                <a:spcPts val="0"/>
-              </a:spcAft>
-            </a:pPr>
-            <a:r>
-              <a:rPr sz="1250" b="0" i="0">
-                <a:solidFill>
-                  <a:srgbClr val="212529"/>
-                </a:solidFill>
-                <a:latin typeface="Garamond"/>
-              </a:rPr>
-              <a:t>−11.65***</a:t>
-            </a:r>
-          </a:p>
-        </p:txBody>
-      </p:sp>
-      <p:sp>
-        <p:nvSpPr>
-          <p:cNvPr id="15" name="TextBox 14"/>
-          <p:cNvSpPr txBox="1"/>
-          <p:nvPr/>
-        </p:nvSpPr>
-        <p:spPr>
-          <a:xfrm>
-            <a:off x="5029200" y="2400300"/>
-            <a:ext cx="1691640" cy="274320"/>
-          </a:xfrm>
-          <a:prstGeom prst="rect">
-            <a:avLst/>
-          </a:prstGeom>
-          <a:noFill/>
-        </p:spPr>
-        <p:txBody>
-          <a:bodyPr wrap="square" lIns="0" rIns="0" tIns="0" bIns="0">
-            <a:spAutoFit/>
-          </a:bodyPr>
-          <a:lstStyle/>
-          <a:p>
-            <a:pPr algn="r">
-              <a:lnSpc>
-                <a:spcPts val="1408"/>
-              </a:lnSpc>
-              <a:spcAft>
-                <a:spcPts val="0"/>
-              </a:spcAft>
-            </a:pPr>
-            <a:r>
-              <a:rPr sz="1100" b="0" i="0">
-                <a:solidFill>
-                  <a:srgbClr val="6B7480"/>
-                </a:solidFill>
-                <a:latin typeface="Garamond"/>
-              </a:rPr>
-              <a:t>(0.67)</a:t>
-            </a:r>
-          </a:p>
-        </p:txBody>
-      </p:sp>
-      <p:sp>
-        <p:nvSpPr>
-          <p:cNvPr id="16" name="TextBox 15"/>
-          <p:cNvSpPr txBox="1"/>
-          <p:nvPr/>
-        </p:nvSpPr>
-        <p:spPr>
-          <a:xfrm>
-            <a:off x="6903720" y="2400300"/>
-            <a:ext cx="1691640" cy="274320"/>
-          </a:xfrm>
-          <a:prstGeom prst="rect">
-            <a:avLst/>
-          </a:prstGeom>
-          <a:noFill/>
-        </p:spPr>
-        <p:txBody>
-          <a:bodyPr wrap="square" lIns="0" rIns="0" tIns="0" bIns="0">
-            <a:spAutoFit/>
-          </a:bodyPr>
-          <a:lstStyle/>
-          <a:p>
-            <a:pPr algn="r">
-              <a:lnSpc>
-                <a:spcPts val="1408"/>
-              </a:lnSpc>
-              <a:spcAft>
-                <a:spcPts val="0"/>
-              </a:spcAft>
-            </a:pPr>
-            <a:r>
-              <a:rPr sz="1100" b="0" i="0">
-                <a:solidFill>
-                  <a:srgbClr val="6B7480"/>
-                </a:solidFill>
-                <a:latin typeface="Garamond"/>
-              </a:rPr>
-              <a:t>(0.66)</a:t>
-            </a:r>
-          </a:p>
-        </p:txBody>
-      </p:sp>
-      <p:sp>
-        <p:nvSpPr>
-          <p:cNvPr id="17" name="TextBox 16"/>
-          <p:cNvSpPr txBox="1"/>
-          <p:nvPr/>
-        </p:nvSpPr>
-        <p:spPr>
-          <a:xfrm>
-            <a:off x="8778240" y="2400300"/>
-            <a:ext cx="1691640" cy="274320"/>
-          </a:xfrm>
-          <a:prstGeom prst="rect">
-            <a:avLst/>
-          </a:prstGeom>
-          <a:noFill/>
-        </p:spPr>
-        <p:txBody>
-          <a:bodyPr wrap="square" lIns="0" rIns="0" tIns="0" bIns="0">
-            <a:spAutoFit/>
-          </a:bodyPr>
-          <a:lstStyle/>
-          <a:p>
-            <a:pPr algn="r">
-              <a:lnSpc>
-                <a:spcPts val="1408"/>
-              </a:lnSpc>
-              <a:spcAft>
-                <a:spcPts val="0"/>
-              </a:spcAft>
-            </a:pPr>
-            <a:r>
-              <a:rPr sz="1100" b="0" i="0">
-                <a:solidFill>
-                  <a:srgbClr val="6B7480"/>
-                </a:solidFill>
-                <a:latin typeface="Garamond"/>
-              </a:rPr>
-              <a:t>(0.67)</a:t>
-            </a:r>
-          </a:p>
-        </p:txBody>
-      </p:sp>
-      <p:sp>
-        <p:nvSpPr>
-          <p:cNvPr id="18" name="TextBox 17"/>
-          <p:cNvSpPr txBox="1"/>
-          <p:nvPr/>
-        </p:nvSpPr>
-        <p:spPr>
-          <a:xfrm>
-            <a:off x="1005840" y="2633472"/>
-            <a:ext cx="3840480" cy="274320"/>
-          </a:xfrm>
-          <a:prstGeom prst="rect">
-            <a:avLst/>
-          </a:prstGeom>
-          <a:noFill/>
-        </p:spPr>
-        <p:txBody>
-          <a:bodyPr wrap="square" lIns="0" rIns="0" tIns="0" bIns="0">
-            <a:spAutoFit/>
-          </a:bodyPr>
-          <a:lstStyle/>
-          <a:p>
-            <a:pPr algn="l">
-              <a:lnSpc>
-                <a:spcPts val="1600"/>
-              </a:lnSpc>
-              <a:spcAft>
-                <a:spcPts val="0"/>
-              </a:spcAft>
-            </a:pPr>
-            <a:r>
-              <a:rPr sz="1250" b="0" i="0">
-                <a:solidFill>
-                  <a:srgbClr val="212529"/>
-                </a:solidFill>
-                <a:latin typeface="Garamond"/>
-              </a:rPr>
-              <a:t>Part-time contract</a:t>
-            </a:r>
-          </a:p>
-        </p:txBody>
-      </p:sp>
-      <p:sp>
-        <p:nvSpPr>
-          <p:cNvPr id="19" name="TextBox 18"/>
-          <p:cNvSpPr txBox="1"/>
-          <p:nvPr/>
-        </p:nvSpPr>
-        <p:spPr>
-          <a:xfrm>
-            <a:off x="5029200" y="2633472"/>
-            <a:ext cx="1691640" cy="274320"/>
-          </a:xfrm>
-          <a:prstGeom prst="rect">
-            <a:avLst/>
-          </a:prstGeom>
-          <a:noFill/>
-        </p:spPr>
-        <p:txBody>
-          <a:bodyPr wrap="square" lIns="0" rIns="0" tIns="0" bIns="0">
-            <a:spAutoFit/>
-          </a:bodyPr>
-          <a:lstStyle/>
-          <a:p>
-            <a:pPr algn="r">
-              <a:lnSpc>
-                <a:spcPts val="1600"/>
-              </a:lnSpc>
-              <a:spcAft>
-                <a:spcPts val="0"/>
-              </a:spcAft>
-            </a:pPr>
-            <a:r>
-              <a:rPr sz="1250" b="0" i="0">
-                <a:solidFill>
-                  <a:srgbClr val="212529"/>
-                </a:solidFill>
-                <a:latin typeface="Garamond"/>
-              </a:rPr>
-              <a:t>+8.67***</a:t>
-            </a:r>
-          </a:p>
-        </p:txBody>
-      </p:sp>
-      <p:sp>
-        <p:nvSpPr>
-          <p:cNvPr id="20" name="TextBox 19"/>
-          <p:cNvSpPr txBox="1"/>
-          <p:nvPr/>
-        </p:nvSpPr>
-        <p:spPr>
-          <a:xfrm>
-            <a:off x="6903720" y="2633472"/>
-            <a:ext cx="1691640" cy="274320"/>
-          </a:xfrm>
-          <a:prstGeom prst="rect">
-            <a:avLst/>
-          </a:prstGeom>
-          <a:noFill/>
-        </p:spPr>
-        <p:txBody>
-          <a:bodyPr wrap="square" lIns="0" rIns="0" tIns="0" bIns="0">
-            <a:spAutoFit/>
-          </a:bodyPr>
-          <a:lstStyle/>
-          <a:p>
-            <a:pPr algn="r">
-              <a:lnSpc>
-                <a:spcPts val="1600"/>
-              </a:lnSpc>
-              <a:spcAft>
-                <a:spcPts val="0"/>
-              </a:spcAft>
-            </a:pPr>
-            <a:r>
-              <a:rPr sz="1250" b="0" i="0">
-                <a:solidFill>
-                  <a:srgbClr val="212529"/>
-                </a:solidFill>
-                <a:latin typeface="Garamond"/>
-              </a:rPr>
-              <a:t>+8.67***</a:t>
-            </a:r>
-          </a:p>
-        </p:txBody>
-      </p:sp>
-      <p:sp>
-        <p:nvSpPr>
-          <p:cNvPr id="21" name="TextBox 20"/>
-          <p:cNvSpPr txBox="1"/>
-          <p:nvPr/>
-        </p:nvSpPr>
-        <p:spPr>
-          <a:xfrm>
-            <a:off x="8778240" y="2633472"/>
-            <a:ext cx="1691640" cy="274320"/>
-          </a:xfrm>
-          <a:prstGeom prst="rect">
-            <a:avLst/>
-          </a:prstGeom>
-          <a:noFill/>
-        </p:spPr>
-        <p:txBody>
-          <a:bodyPr wrap="square" lIns="0" rIns="0" tIns="0" bIns="0">
-            <a:spAutoFit/>
-          </a:bodyPr>
-          <a:lstStyle/>
-          <a:p>
-            <a:pPr algn="r">
-              <a:lnSpc>
-                <a:spcPts val="1600"/>
-              </a:lnSpc>
-              <a:spcAft>
-                <a:spcPts val="0"/>
-              </a:spcAft>
-            </a:pPr>
-            <a:r>
-              <a:rPr sz="1250" b="0" i="0">
-                <a:solidFill>
-                  <a:srgbClr val="212529"/>
-                </a:solidFill>
-                <a:latin typeface="Garamond"/>
-              </a:rPr>
-              <a:t>+8.63***</a:t>
-            </a:r>
-          </a:p>
-        </p:txBody>
-      </p:sp>
-      <p:sp>
-        <p:nvSpPr>
-          <p:cNvPr id="22" name="TextBox 21"/>
-          <p:cNvSpPr txBox="1"/>
-          <p:nvPr/>
-        </p:nvSpPr>
-        <p:spPr>
-          <a:xfrm>
-            <a:off x="5029200" y="2857500"/>
-            <a:ext cx="1691640" cy="274320"/>
-          </a:xfrm>
-          <a:prstGeom prst="rect">
-            <a:avLst/>
-          </a:prstGeom>
-          <a:noFill/>
-        </p:spPr>
-        <p:txBody>
-          <a:bodyPr wrap="square" lIns="0" rIns="0" tIns="0" bIns="0">
-            <a:spAutoFit/>
-          </a:bodyPr>
-          <a:lstStyle/>
-          <a:p>
-            <a:pPr algn="r">
-              <a:lnSpc>
-                <a:spcPts val="1408"/>
-              </a:lnSpc>
-              <a:spcAft>
-                <a:spcPts val="0"/>
-              </a:spcAft>
-            </a:pPr>
-            <a:r>
-              <a:rPr sz="1100" b="0" i="0">
-                <a:solidFill>
-                  <a:srgbClr val="6B7480"/>
-                </a:solidFill>
-                <a:latin typeface="Garamond"/>
-              </a:rPr>
-              <a:t>(1.09)</a:t>
-            </a:r>
-          </a:p>
-        </p:txBody>
-      </p:sp>
-      <p:sp>
-        <p:nvSpPr>
-          <p:cNvPr id="23" name="TextBox 22"/>
-          <p:cNvSpPr txBox="1"/>
-          <p:nvPr/>
-        </p:nvSpPr>
-        <p:spPr>
-          <a:xfrm>
-            <a:off x="6903720" y="2857500"/>
-            <a:ext cx="1691640" cy="274320"/>
-          </a:xfrm>
-          <a:prstGeom prst="rect">
-            <a:avLst/>
-          </a:prstGeom>
-          <a:noFill/>
-        </p:spPr>
-        <p:txBody>
-          <a:bodyPr wrap="square" lIns="0" rIns="0" tIns="0" bIns="0">
-            <a:spAutoFit/>
-          </a:bodyPr>
-          <a:lstStyle/>
-          <a:p>
-            <a:pPr algn="r">
-              <a:lnSpc>
-                <a:spcPts val="1408"/>
-              </a:lnSpc>
-              <a:spcAft>
-                <a:spcPts val="0"/>
-              </a:spcAft>
-            </a:pPr>
-            <a:r>
-              <a:rPr sz="1100" b="0" i="0">
-                <a:solidFill>
-                  <a:srgbClr val="6B7480"/>
-                </a:solidFill>
-                <a:latin typeface="Garamond"/>
-              </a:rPr>
-              <a:t>(1.09)</a:t>
-            </a:r>
-          </a:p>
-        </p:txBody>
-      </p:sp>
-      <p:sp>
-        <p:nvSpPr>
-          <p:cNvPr id="24" name="TextBox 23"/>
-          <p:cNvSpPr txBox="1"/>
-          <p:nvPr/>
-        </p:nvSpPr>
-        <p:spPr>
-          <a:xfrm>
-            <a:off x="8778240" y="2857500"/>
-            <a:ext cx="1691640" cy="274320"/>
-          </a:xfrm>
-          <a:prstGeom prst="rect">
-            <a:avLst/>
-          </a:prstGeom>
-          <a:noFill/>
-        </p:spPr>
-        <p:txBody>
-          <a:bodyPr wrap="square" lIns="0" rIns="0" tIns="0" bIns="0">
-            <a:spAutoFit/>
-          </a:bodyPr>
-          <a:lstStyle/>
-          <a:p>
-            <a:pPr algn="r">
-              <a:lnSpc>
-                <a:spcPts val="1408"/>
-              </a:lnSpc>
-              <a:spcAft>
-                <a:spcPts val="0"/>
-              </a:spcAft>
-            </a:pPr>
-            <a:r>
-              <a:rPr sz="1100" b="0" i="0">
-                <a:solidFill>
-                  <a:srgbClr val="6B7480"/>
-                </a:solidFill>
-                <a:latin typeface="Garamond"/>
-              </a:rPr>
-              <a:t>(1.10)</a:t>
-            </a:r>
-          </a:p>
-        </p:txBody>
-      </p:sp>
-      <p:sp>
-        <p:nvSpPr>
-          <p:cNvPr id="25" name="TextBox 24"/>
-          <p:cNvSpPr txBox="1"/>
-          <p:nvPr/>
-        </p:nvSpPr>
-        <p:spPr>
-          <a:xfrm>
-            <a:off x="1005840" y="3090672"/>
-            <a:ext cx="3840480" cy="274320"/>
-          </a:xfrm>
-          <a:prstGeom prst="rect">
-            <a:avLst/>
-          </a:prstGeom>
-          <a:noFill/>
-        </p:spPr>
-        <p:txBody>
-          <a:bodyPr wrap="square" lIns="0" rIns="0" tIns="0" bIns="0">
-            <a:spAutoFit/>
-          </a:bodyPr>
-          <a:lstStyle/>
-          <a:p>
-            <a:pPr algn="l">
-              <a:lnSpc>
-                <a:spcPts val="1600"/>
-              </a:lnSpc>
-              <a:spcAft>
-                <a:spcPts val="0"/>
-              </a:spcAft>
-            </a:pPr>
-            <a:r>
-              <a:rPr sz="1250" b="0" i="0">
-                <a:solidFill>
-                  <a:srgbClr val="212529"/>
-                </a:solidFill>
-                <a:latin typeface="Garamond"/>
-              </a:rPr>
-              <a:t>Employer pension plan</a:t>
-            </a:r>
-          </a:p>
-        </p:txBody>
-      </p:sp>
-      <p:sp>
-        <p:nvSpPr>
-          <p:cNvPr id="26" name="TextBox 25"/>
-          <p:cNvSpPr txBox="1"/>
-          <p:nvPr/>
-        </p:nvSpPr>
-        <p:spPr>
-          <a:xfrm>
-            <a:off x="5029200" y="3090672"/>
-            <a:ext cx="1691640" cy="274320"/>
-          </a:xfrm>
-          <a:prstGeom prst="rect">
-            <a:avLst/>
-          </a:prstGeom>
-          <a:noFill/>
-        </p:spPr>
-        <p:txBody>
-          <a:bodyPr wrap="square" lIns="0" rIns="0" tIns="0" bIns="0">
-            <a:spAutoFit/>
-          </a:bodyPr>
-          <a:lstStyle/>
-          <a:p>
-            <a:pPr algn="r">
-              <a:lnSpc>
-                <a:spcPts val="1600"/>
-              </a:lnSpc>
-              <a:spcAft>
-                <a:spcPts val="0"/>
-              </a:spcAft>
-            </a:pPr>
-            <a:r>
-              <a:rPr sz="1250" b="0" i="0">
-                <a:solidFill>
-                  <a:srgbClr val="212529"/>
-                </a:solidFill>
-                <a:latin typeface="Garamond"/>
-              </a:rPr>
-              <a:t>−2.35***</a:t>
-            </a:r>
-          </a:p>
-        </p:txBody>
-      </p:sp>
-      <p:sp>
-        <p:nvSpPr>
-          <p:cNvPr id="27" name="TextBox 26"/>
-          <p:cNvSpPr txBox="1"/>
-          <p:nvPr/>
-        </p:nvSpPr>
-        <p:spPr>
-          <a:xfrm>
-            <a:off x="6903720" y="3090672"/>
-            <a:ext cx="1691640" cy="274320"/>
-          </a:xfrm>
-          <a:prstGeom prst="rect">
-            <a:avLst/>
-          </a:prstGeom>
-          <a:noFill/>
-        </p:spPr>
-        <p:txBody>
-          <a:bodyPr wrap="square" lIns="0" rIns="0" tIns="0" bIns="0">
-            <a:spAutoFit/>
-          </a:bodyPr>
-          <a:lstStyle/>
-          <a:p>
-            <a:pPr algn="r">
-              <a:lnSpc>
-                <a:spcPts val="1600"/>
-              </a:lnSpc>
-              <a:spcAft>
-                <a:spcPts val="0"/>
-              </a:spcAft>
-            </a:pPr>
-            <a:r>
-              <a:rPr sz="1250" b="0" i="0">
-                <a:solidFill>
-                  <a:srgbClr val="212529"/>
-                </a:solidFill>
-                <a:latin typeface="Garamond"/>
-              </a:rPr>
-              <a:t>−2.33***</a:t>
-            </a:r>
-          </a:p>
-        </p:txBody>
-      </p:sp>
-      <p:sp>
-        <p:nvSpPr>
-          <p:cNvPr id="28" name="TextBox 27"/>
-          <p:cNvSpPr txBox="1"/>
-          <p:nvPr/>
-        </p:nvSpPr>
-        <p:spPr>
-          <a:xfrm>
-            <a:off x="8778240" y="3090672"/>
-            <a:ext cx="1691640" cy="274320"/>
-          </a:xfrm>
-          <a:prstGeom prst="rect">
-            <a:avLst/>
-          </a:prstGeom>
-          <a:noFill/>
-        </p:spPr>
-        <p:txBody>
-          <a:bodyPr wrap="square" lIns="0" rIns="0" tIns="0" bIns="0">
-            <a:spAutoFit/>
-          </a:bodyPr>
-          <a:lstStyle/>
-          <a:p>
-            <a:pPr algn="r">
-              <a:lnSpc>
-                <a:spcPts val="1600"/>
-              </a:lnSpc>
-              <a:spcAft>
-                <a:spcPts val="0"/>
-              </a:spcAft>
-            </a:pPr>
-            <a:r>
-              <a:rPr sz="1250" b="0" i="0">
-                <a:solidFill>
-                  <a:srgbClr val="212529"/>
-                </a:solidFill>
-                <a:latin typeface="Garamond"/>
-              </a:rPr>
-              <a:t>−2.33***</a:t>
-            </a:r>
-          </a:p>
-        </p:txBody>
-      </p:sp>
-      <p:sp>
-        <p:nvSpPr>
-          <p:cNvPr id="29" name="TextBox 28"/>
-          <p:cNvSpPr txBox="1"/>
-          <p:nvPr/>
-        </p:nvSpPr>
-        <p:spPr>
-          <a:xfrm>
-            <a:off x="5029200" y="3314700"/>
-            <a:ext cx="1691640" cy="274320"/>
-          </a:xfrm>
-          <a:prstGeom prst="rect">
-            <a:avLst/>
-          </a:prstGeom>
-          <a:noFill/>
-        </p:spPr>
-        <p:txBody>
-          <a:bodyPr wrap="square" lIns="0" rIns="0" tIns="0" bIns="0">
-            <a:spAutoFit/>
-          </a:bodyPr>
-          <a:lstStyle/>
-          <a:p>
-            <a:pPr algn="r">
-              <a:lnSpc>
-                <a:spcPts val="1408"/>
-              </a:lnSpc>
-              <a:spcAft>
-                <a:spcPts val="0"/>
-              </a:spcAft>
-            </a:pPr>
-            <a:r>
-              <a:rPr sz="1100" b="0" i="0">
-                <a:solidFill>
-                  <a:srgbClr val="6B7480"/>
-                </a:solidFill>
-                <a:latin typeface="Garamond"/>
-              </a:rPr>
-              <a:t>(0.52)</a:t>
-            </a:r>
-          </a:p>
-        </p:txBody>
-      </p:sp>
-      <p:sp>
-        <p:nvSpPr>
-          <p:cNvPr id="30" name="TextBox 29"/>
-          <p:cNvSpPr txBox="1"/>
-          <p:nvPr/>
-        </p:nvSpPr>
-        <p:spPr>
-          <a:xfrm>
-            <a:off x="6903720" y="3314700"/>
-            <a:ext cx="1691640" cy="274320"/>
-          </a:xfrm>
-          <a:prstGeom prst="rect">
-            <a:avLst/>
-          </a:prstGeom>
-          <a:noFill/>
-        </p:spPr>
-        <p:txBody>
-          <a:bodyPr wrap="square" lIns="0" rIns="0" tIns="0" bIns="0">
-            <a:spAutoFit/>
-          </a:bodyPr>
-          <a:lstStyle/>
-          <a:p>
-            <a:pPr algn="r">
-              <a:lnSpc>
-                <a:spcPts val="1408"/>
-              </a:lnSpc>
-              <a:spcAft>
-                <a:spcPts val="0"/>
-              </a:spcAft>
-            </a:pPr>
-            <a:r>
-              <a:rPr sz="1100" b="0" i="0">
-                <a:solidFill>
-                  <a:srgbClr val="6B7480"/>
-                </a:solidFill>
-                <a:latin typeface="Garamond"/>
-              </a:rPr>
-              <a:t>(0.52)</a:t>
-            </a:r>
-          </a:p>
-        </p:txBody>
-      </p:sp>
-      <p:sp>
-        <p:nvSpPr>
-          <p:cNvPr id="31" name="TextBox 30"/>
-          <p:cNvSpPr txBox="1"/>
-          <p:nvPr/>
-        </p:nvSpPr>
-        <p:spPr>
-          <a:xfrm>
-            <a:off x="8778240" y="3314700"/>
-            <a:ext cx="1691640" cy="274320"/>
-          </a:xfrm>
-          <a:prstGeom prst="rect">
-            <a:avLst/>
-          </a:prstGeom>
-          <a:noFill/>
-        </p:spPr>
-        <p:txBody>
-          <a:bodyPr wrap="square" lIns="0" rIns="0" tIns="0" bIns="0">
-            <a:spAutoFit/>
-          </a:bodyPr>
-          <a:lstStyle/>
-          <a:p>
-            <a:pPr algn="r">
-              <a:lnSpc>
-                <a:spcPts val="1408"/>
-              </a:lnSpc>
-              <a:spcAft>
-                <a:spcPts val="0"/>
-              </a:spcAft>
-            </a:pPr>
-            <a:r>
-              <a:rPr sz="1100" b="0" i="0">
-                <a:solidFill>
-                  <a:srgbClr val="6B7480"/>
-                </a:solidFill>
-                <a:latin typeface="Garamond"/>
-              </a:rPr>
-              <a:t>(0.52)</a:t>
-            </a:r>
-          </a:p>
-        </p:txBody>
-      </p:sp>
-      <p:sp>
-        <p:nvSpPr>
-          <p:cNvPr id="32" name="TextBox 31"/>
-          <p:cNvSpPr txBox="1"/>
-          <p:nvPr/>
-        </p:nvSpPr>
-        <p:spPr>
-          <a:xfrm>
-            <a:off x="1005840" y="3547872"/>
-            <a:ext cx="3840480" cy="274320"/>
-          </a:xfrm>
-          <a:prstGeom prst="rect">
-            <a:avLst/>
-          </a:prstGeom>
-          <a:noFill/>
-        </p:spPr>
-        <p:txBody>
-          <a:bodyPr wrap="square" lIns="0" rIns="0" tIns="0" bIns="0">
-            <a:spAutoFit/>
-          </a:bodyPr>
-          <a:lstStyle/>
-          <a:p>
-            <a:pPr algn="l">
-              <a:lnSpc>
-                <a:spcPts val="1600"/>
-              </a:lnSpc>
-              <a:spcAft>
-                <a:spcPts val="0"/>
-              </a:spcAft>
-            </a:pPr>
-            <a:r>
-              <a:rPr sz="1250" b="0" i="0">
-                <a:solidFill>
-                  <a:srgbClr val="212529"/>
-                </a:solidFill>
-                <a:latin typeface="Garamond"/>
-              </a:rPr>
-              <a:t>Public sector</a:t>
-            </a:r>
-          </a:p>
-        </p:txBody>
-      </p:sp>
-      <p:sp>
-        <p:nvSpPr>
-          <p:cNvPr id="33" name="TextBox 32"/>
-          <p:cNvSpPr txBox="1"/>
-          <p:nvPr/>
-        </p:nvSpPr>
-        <p:spPr>
-          <a:xfrm>
-            <a:off x="5029200" y="3547872"/>
-            <a:ext cx="1691640" cy="274320"/>
-          </a:xfrm>
-          <a:prstGeom prst="rect">
-            <a:avLst/>
-          </a:prstGeom>
-          <a:noFill/>
-        </p:spPr>
-        <p:txBody>
-          <a:bodyPr wrap="square" lIns="0" rIns="0" tIns="0" bIns="0">
-            <a:spAutoFit/>
-          </a:bodyPr>
-          <a:lstStyle/>
-          <a:p>
-            <a:pPr algn="r">
-              <a:lnSpc>
-                <a:spcPts val="1600"/>
-              </a:lnSpc>
-              <a:spcAft>
-                <a:spcPts val="0"/>
-              </a:spcAft>
-            </a:pPr>
-            <a:r>
-              <a:rPr sz="1250" b="0" i="0">
-                <a:solidFill>
-                  <a:srgbClr val="212529"/>
-                </a:solidFill>
-                <a:latin typeface="Garamond"/>
-              </a:rPr>
-              <a:t>−2.35***</a:t>
-            </a:r>
-          </a:p>
-        </p:txBody>
-      </p:sp>
-      <p:sp>
-        <p:nvSpPr>
-          <p:cNvPr id="34" name="TextBox 33"/>
-          <p:cNvSpPr txBox="1"/>
-          <p:nvPr/>
-        </p:nvSpPr>
-        <p:spPr>
-          <a:xfrm>
-            <a:off x="6903720" y="3547872"/>
-            <a:ext cx="1691640" cy="274320"/>
-          </a:xfrm>
-          <a:prstGeom prst="rect">
-            <a:avLst/>
-          </a:prstGeom>
-          <a:noFill/>
-        </p:spPr>
-        <p:txBody>
-          <a:bodyPr wrap="square" lIns="0" rIns="0" tIns="0" bIns="0">
-            <a:spAutoFit/>
-          </a:bodyPr>
-          <a:lstStyle/>
-          <a:p>
-            <a:pPr algn="r">
-              <a:lnSpc>
-                <a:spcPts val="1600"/>
-              </a:lnSpc>
-              <a:spcAft>
-                <a:spcPts val="0"/>
-              </a:spcAft>
-            </a:pPr>
-            <a:r>
-              <a:rPr sz="1250" b="0" i="0">
-                <a:solidFill>
-                  <a:srgbClr val="212529"/>
-                </a:solidFill>
-                <a:latin typeface="Garamond"/>
-              </a:rPr>
-              <a:t>−2.38***</a:t>
-            </a:r>
-          </a:p>
-        </p:txBody>
-      </p:sp>
-      <p:sp>
-        <p:nvSpPr>
-          <p:cNvPr id="35" name="TextBox 34"/>
-          <p:cNvSpPr txBox="1"/>
-          <p:nvPr/>
-        </p:nvSpPr>
-        <p:spPr>
-          <a:xfrm>
-            <a:off x="8778240" y="3547872"/>
-            <a:ext cx="1691640" cy="274320"/>
-          </a:xfrm>
-          <a:prstGeom prst="rect">
-            <a:avLst/>
-          </a:prstGeom>
-          <a:noFill/>
-        </p:spPr>
-        <p:txBody>
-          <a:bodyPr wrap="square" lIns="0" rIns="0" tIns="0" bIns="0">
-            <a:spAutoFit/>
-          </a:bodyPr>
-          <a:lstStyle/>
-          <a:p>
-            <a:pPr algn="r">
-              <a:lnSpc>
-                <a:spcPts val="1600"/>
-              </a:lnSpc>
-              <a:spcAft>
-                <a:spcPts val="0"/>
-              </a:spcAft>
-            </a:pPr>
-            <a:r>
-              <a:rPr sz="1250" b="0" i="0">
-                <a:solidFill>
-                  <a:srgbClr val="212529"/>
-                </a:solidFill>
-                <a:latin typeface="Garamond"/>
-              </a:rPr>
-              <a:t>−2.39***</a:t>
-            </a:r>
-          </a:p>
-        </p:txBody>
-      </p:sp>
-      <p:sp>
-        <p:nvSpPr>
-          <p:cNvPr id="36" name="TextBox 35"/>
-          <p:cNvSpPr txBox="1"/>
-          <p:nvPr/>
-        </p:nvSpPr>
-        <p:spPr>
-          <a:xfrm>
-            <a:off x="5029200" y="3771900"/>
-            <a:ext cx="1691640" cy="274320"/>
-          </a:xfrm>
-          <a:prstGeom prst="rect">
-            <a:avLst/>
-          </a:prstGeom>
-          <a:noFill/>
-        </p:spPr>
-        <p:txBody>
-          <a:bodyPr wrap="square" lIns="0" rIns="0" tIns="0" bIns="0">
-            <a:spAutoFit/>
-          </a:bodyPr>
-          <a:lstStyle/>
-          <a:p>
-            <a:pPr algn="r">
-              <a:lnSpc>
-                <a:spcPts val="1408"/>
-              </a:lnSpc>
-              <a:spcAft>
-                <a:spcPts val="0"/>
-              </a:spcAft>
-            </a:pPr>
-            <a:r>
-              <a:rPr sz="1100" b="0" i="0">
-                <a:solidFill>
-                  <a:srgbClr val="6B7480"/>
-                </a:solidFill>
-                <a:latin typeface="Garamond"/>
-              </a:rPr>
-              <a:t>(0.56)</a:t>
-            </a:r>
-          </a:p>
-        </p:txBody>
-      </p:sp>
-      <p:sp>
-        <p:nvSpPr>
-          <p:cNvPr id="37" name="TextBox 36"/>
-          <p:cNvSpPr txBox="1"/>
-          <p:nvPr/>
-        </p:nvSpPr>
-        <p:spPr>
-          <a:xfrm>
-            <a:off x="6903720" y="3771900"/>
-            <a:ext cx="1691640" cy="274320"/>
-          </a:xfrm>
-          <a:prstGeom prst="rect">
-            <a:avLst/>
-          </a:prstGeom>
-          <a:noFill/>
-        </p:spPr>
-        <p:txBody>
-          <a:bodyPr wrap="square" lIns="0" rIns="0" tIns="0" bIns="0">
-            <a:spAutoFit/>
-          </a:bodyPr>
-          <a:lstStyle/>
-          <a:p>
-            <a:pPr algn="r">
-              <a:lnSpc>
-                <a:spcPts val="1408"/>
-              </a:lnSpc>
-              <a:spcAft>
-                <a:spcPts val="0"/>
-              </a:spcAft>
-            </a:pPr>
-            <a:r>
-              <a:rPr sz="1100" b="0" i="0">
-                <a:solidFill>
-                  <a:srgbClr val="6B7480"/>
-                </a:solidFill>
-                <a:latin typeface="Garamond"/>
-              </a:rPr>
-              <a:t>(0.56)</a:t>
-            </a:r>
-          </a:p>
-        </p:txBody>
-      </p:sp>
-      <p:sp>
-        <p:nvSpPr>
-          <p:cNvPr id="38" name="TextBox 37"/>
-          <p:cNvSpPr txBox="1"/>
-          <p:nvPr/>
-        </p:nvSpPr>
-        <p:spPr>
-          <a:xfrm>
-            <a:off x="8778240" y="3771900"/>
-            <a:ext cx="1691640" cy="274320"/>
-          </a:xfrm>
-          <a:prstGeom prst="rect">
-            <a:avLst/>
-          </a:prstGeom>
-          <a:noFill/>
-        </p:spPr>
-        <p:txBody>
-          <a:bodyPr wrap="square" lIns="0" rIns="0" tIns="0" bIns="0">
-            <a:spAutoFit/>
-          </a:bodyPr>
-          <a:lstStyle/>
-          <a:p>
-            <a:pPr algn="r">
-              <a:lnSpc>
-                <a:spcPts val="1408"/>
-              </a:lnSpc>
-              <a:spcAft>
-                <a:spcPts val="0"/>
-              </a:spcAft>
-            </a:pPr>
-            <a:r>
-              <a:rPr sz="1100" b="0" i="0">
-                <a:solidFill>
-                  <a:srgbClr val="6B7480"/>
-                </a:solidFill>
-                <a:latin typeface="Garamond"/>
-              </a:rPr>
-              <a:t>(0.56)</a:t>
-            </a:r>
-          </a:p>
-        </p:txBody>
-      </p:sp>
-      <p:sp>
-        <p:nvSpPr>
-          <p:cNvPr id="39" name="TextBox 38"/>
-          <p:cNvSpPr txBox="1"/>
-          <p:nvPr/>
-        </p:nvSpPr>
-        <p:spPr>
-          <a:xfrm>
-            <a:off x="1005840" y="4005072"/>
-            <a:ext cx="3840480" cy="274320"/>
-          </a:xfrm>
-          <a:prstGeom prst="rect">
-            <a:avLst/>
-          </a:prstGeom>
-          <a:noFill/>
-        </p:spPr>
-        <p:txBody>
-          <a:bodyPr wrap="square" lIns="0" rIns="0" tIns="0" bIns="0">
-            <a:spAutoFit/>
-          </a:bodyPr>
-          <a:lstStyle/>
-          <a:p>
-            <a:pPr algn="l">
-              <a:lnSpc>
-                <a:spcPts val="1600"/>
-              </a:lnSpc>
-              <a:spcAft>
-                <a:spcPts val="0"/>
-              </a:spcAft>
-            </a:pPr>
-            <a:r>
-              <a:rPr sz="1250" b="0" i="0">
-                <a:solidFill>
-                  <a:srgbClr val="212529"/>
-                </a:solidFill>
-                <a:latin typeface="Garamond"/>
-              </a:rPr>
-              <a:t>New baby during the year</a:t>
-            </a:r>
-          </a:p>
-        </p:txBody>
-      </p:sp>
-      <p:sp>
-        <p:nvSpPr>
-          <p:cNvPr id="40" name="TextBox 39"/>
-          <p:cNvSpPr txBox="1"/>
-          <p:nvPr/>
-        </p:nvSpPr>
-        <p:spPr>
-          <a:xfrm>
-            <a:off x="5029200" y="4005072"/>
-            <a:ext cx="1691640" cy="274320"/>
-          </a:xfrm>
-          <a:prstGeom prst="rect">
-            <a:avLst/>
-          </a:prstGeom>
-          <a:noFill/>
-        </p:spPr>
-        <p:txBody>
-          <a:bodyPr wrap="square" lIns="0" rIns="0" tIns="0" bIns="0">
-            <a:spAutoFit/>
-          </a:bodyPr>
-          <a:lstStyle/>
-          <a:p>
-            <a:pPr algn="r">
-              <a:lnSpc>
-                <a:spcPts val="1600"/>
-              </a:lnSpc>
-              <a:spcAft>
-                <a:spcPts val="0"/>
-              </a:spcAft>
-            </a:pPr>
-            <a:r>
-              <a:rPr sz="1250" b="0" i="0">
-                <a:solidFill>
-                  <a:srgbClr val="212529"/>
-                </a:solidFill>
-                <a:latin typeface="Garamond"/>
-              </a:rPr>
-              <a:t>+5.72***</a:t>
-            </a:r>
-          </a:p>
-        </p:txBody>
-      </p:sp>
-      <p:sp>
-        <p:nvSpPr>
-          <p:cNvPr id="41" name="TextBox 40"/>
-          <p:cNvSpPr txBox="1"/>
-          <p:nvPr/>
-        </p:nvSpPr>
-        <p:spPr>
-          <a:xfrm>
-            <a:off x="6903720" y="4005072"/>
-            <a:ext cx="1691640" cy="274320"/>
-          </a:xfrm>
-          <a:prstGeom prst="rect">
-            <a:avLst/>
-          </a:prstGeom>
-          <a:noFill/>
-        </p:spPr>
-        <p:txBody>
-          <a:bodyPr wrap="square" lIns="0" rIns="0" tIns="0" bIns="0">
-            <a:spAutoFit/>
-          </a:bodyPr>
-          <a:lstStyle/>
-          <a:p>
-            <a:pPr algn="r">
-              <a:lnSpc>
-                <a:spcPts val="1600"/>
-              </a:lnSpc>
-              <a:spcAft>
-                <a:spcPts val="0"/>
-              </a:spcAft>
-            </a:pPr>
-            <a:r>
-              <a:rPr sz="1250" b="0" i="0">
-                <a:solidFill>
-                  <a:srgbClr val="212529"/>
-                </a:solidFill>
-                <a:latin typeface="Garamond"/>
-              </a:rPr>
-              <a:t>+5.63***</a:t>
-            </a:r>
-          </a:p>
-        </p:txBody>
-      </p:sp>
-      <p:sp>
-        <p:nvSpPr>
-          <p:cNvPr id="42" name="TextBox 41"/>
-          <p:cNvSpPr txBox="1"/>
-          <p:nvPr/>
-        </p:nvSpPr>
-        <p:spPr>
-          <a:xfrm>
-            <a:off x="8778240" y="4005072"/>
-            <a:ext cx="1691640" cy="274320"/>
-          </a:xfrm>
-          <a:prstGeom prst="rect">
-            <a:avLst/>
-          </a:prstGeom>
-          <a:noFill/>
-        </p:spPr>
-        <p:txBody>
-          <a:bodyPr wrap="square" lIns="0" rIns="0" tIns="0" bIns="0">
-            <a:spAutoFit/>
-          </a:bodyPr>
-          <a:lstStyle/>
-          <a:p>
-            <a:pPr algn="r">
-              <a:lnSpc>
-                <a:spcPts val="1600"/>
-              </a:lnSpc>
-              <a:spcAft>
-                <a:spcPts val="0"/>
-              </a:spcAft>
-            </a:pPr>
-            <a:r>
-              <a:rPr sz="1250" b="0" i="0">
-                <a:solidFill>
-                  <a:srgbClr val="212529"/>
-                </a:solidFill>
-                <a:latin typeface="Garamond"/>
-              </a:rPr>
-              <a:t>+5.71***</a:t>
-            </a:r>
-          </a:p>
-        </p:txBody>
-      </p:sp>
-      <p:sp>
-        <p:nvSpPr>
-          <p:cNvPr id="43" name="TextBox 42"/>
-          <p:cNvSpPr txBox="1"/>
-          <p:nvPr/>
-        </p:nvSpPr>
-        <p:spPr>
-          <a:xfrm>
-            <a:off x="5029200" y="4229100"/>
-            <a:ext cx="1691640" cy="274320"/>
-          </a:xfrm>
-          <a:prstGeom prst="rect">
-            <a:avLst/>
-          </a:prstGeom>
-          <a:noFill/>
-        </p:spPr>
-        <p:txBody>
-          <a:bodyPr wrap="square" lIns="0" rIns="0" tIns="0" bIns="0">
-            <a:spAutoFit/>
-          </a:bodyPr>
-          <a:lstStyle/>
-          <a:p>
-            <a:pPr algn="r">
-              <a:lnSpc>
-                <a:spcPts val="1408"/>
-              </a:lnSpc>
-              <a:spcAft>
-                <a:spcPts val="0"/>
-              </a:spcAft>
-            </a:pPr>
-            <a:r>
-              <a:rPr sz="1100" b="0" i="0">
-                <a:solidFill>
-                  <a:srgbClr val="6B7480"/>
-                </a:solidFill>
-                <a:latin typeface="Garamond"/>
-              </a:rPr>
-              <a:t>(1.56)</a:t>
-            </a:r>
-          </a:p>
-        </p:txBody>
-      </p:sp>
-      <p:sp>
-        <p:nvSpPr>
-          <p:cNvPr id="44" name="TextBox 43"/>
-          <p:cNvSpPr txBox="1"/>
-          <p:nvPr/>
-        </p:nvSpPr>
-        <p:spPr>
-          <a:xfrm>
-            <a:off x="6903720" y="4229100"/>
-            <a:ext cx="1691640" cy="274320"/>
-          </a:xfrm>
-          <a:prstGeom prst="rect">
-            <a:avLst/>
-          </a:prstGeom>
-          <a:noFill/>
-        </p:spPr>
-        <p:txBody>
-          <a:bodyPr wrap="square" lIns="0" rIns="0" tIns="0" bIns="0">
-            <a:spAutoFit/>
-          </a:bodyPr>
-          <a:lstStyle/>
-          <a:p>
-            <a:pPr algn="r">
-              <a:lnSpc>
-                <a:spcPts val="1408"/>
-              </a:lnSpc>
-              <a:spcAft>
-                <a:spcPts val="0"/>
-              </a:spcAft>
-            </a:pPr>
-            <a:r>
-              <a:rPr sz="1100" b="0" i="0">
-                <a:solidFill>
-                  <a:srgbClr val="6B7480"/>
-                </a:solidFill>
-                <a:latin typeface="Garamond"/>
-              </a:rPr>
-              <a:t>(1.56)</a:t>
-            </a:r>
-          </a:p>
-        </p:txBody>
-      </p:sp>
-      <p:sp>
-        <p:nvSpPr>
-          <p:cNvPr id="45" name="TextBox 44"/>
-          <p:cNvSpPr txBox="1"/>
-          <p:nvPr/>
-        </p:nvSpPr>
-        <p:spPr>
-          <a:xfrm>
-            <a:off x="8778240" y="4229100"/>
-            <a:ext cx="1691640" cy="274320"/>
-          </a:xfrm>
-          <a:prstGeom prst="rect">
-            <a:avLst/>
-          </a:prstGeom>
-          <a:noFill/>
-        </p:spPr>
-        <p:txBody>
-          <a:bodyPr wrap="square" lIns="0" rIns="0" tIns="0" bIns="0">
-            <a:spAutoFit/>
-          </a:bodyPr>
-          <a:lstStyle/>
-          <a:p>
-            <a:pPr algn="r">
-              <a:lnSpc>
-                <a:spcPts val="1408"/>
-              </a:lnSpc>
-              <a:spcAft>
-                <a:spcPts val="0"/>
-              </a:spcAft>
-            </a:pPr>
-            <a:r>
-              <a:rPr sz="1100" b="0" i="0">
-                <a:solidFill>
-                  <a:srgbClr val="6B7480"/>
-                </a:solidFill>
-                <a:latin typeface="Garamond"/>
-              </a:rPr>
-              <a:t>(1.56)</a:t>
-            </a:r>
-          </a:p>
-        </p:txBody>
-      </p:sp>
-      <p:sp>
-        <p:nvSpPr>
-          <p:cNvPr id="46" name="TextBox 45"/>
-          <p:cNvSpPr txBox="1"/>
-          <p:nvPr/>
-        </p:nvSpPr>
-        <p:spPr>
-          <a:xfrm>
-            <a:off x="1005840" y="4462272"/>
-            <a:ext cx="3840480" cy="274320"/>
-          </a:xfrm>
-          <a:prstGeom prst="rect">
-            <a:avLst/>
-          </a:prstGeom>
-          <a:noFill/>
-        </p:spPr>
-        <p:txBody>
-          <a:bodyPr wrap="square" lIns="0" rIns="0" tIns="0" bIns="0">
-            <a:spAutoFit/>
-          </a:bodyPr>
-          <a:lstStyle/>
-          <a:p>
-            <a:pPr algn="l">
-              <a:lnSpc>
-                <a:spcPts val="1600"/>
-              </a:lnSpc>
-              <a:spcAft>
-                <a:spcPts val="0"/>
-              </a:spcAft>
-            </a:pPr>
-            <a:r>
-              <a:rPr sz="1250" b="0" i="0">
-                <a:solidFill>
-                  <a:srgbClr val="212529"/>
-                </a:solidFill>
-                <a:latin typeface="Garamond"/>
-              </a:rPr>
-              <a:t>With a disability</a:t>
-            </a:r>
-          </a:p>
-        </p:txBody>
-      </p:sp>
-      <p:sp>
-        <p:nvSpPr>
-          <p:cNvPr id="47" name="TextBox 46"/>
-          <p:cNvSpPr txBox="1"/>
-          <p:nvPr/>
-        </p:nvSpPr>
-        <p:spPr>
-          <a:xfrm>
-            <a:off x="5029200" y="4462272"/>
-            <a:ext cx="1691640" cy="274320"/>
-          </a:xfrm>
-          <a:prstGeom prst="rect">
-            <a:avLst/>
-          </a:prstGeom>
-          <a:noFill/>
-        </p:spPr>
-        <p:txBody>
-          <a:bodyPr wrap="square" lIns="0" rIns="0" tIns="0" bIns="0">
-            <a:spAutoFit/>
-          </a:bodyPr>
-          <a:lstStyle/>
-          <a:p>
-            <a:pPr algn="r">
-              <a:lnSpc>
-                <a:spcPts val="1600"/>
-              </a:lnSpc>
-              <a:spcAft>
-                <a:spcPts val="0"/>
-              </a:spcAft>
-            </a:pPr>
-            <a:r>
-              <a:rPr sz="1250" b="0" i="0">
-                <a:solidFill>
-                  <a:srgbClr val="212529"/>
-                </a:solidFill>
-                <a:latin typeface="Garamond"/>
-              </a:rPr>
-              <a:t>+8.85***</a:t>
-            </a:r>
-          </a:p>
-        </p:txBody>
-      </p:sp>
-      <p:sp>
-        <p:nvSpPr>
-          <p:cNvPr id="48" name="TextBox 47"/>
-          <p:cNvSpPr txBox="1"/>
-          <p:nvPr/>
-        </p:nvSpPr>
-        <p:spPr>
-          <a:xfrm>
-            <a:off x="6903720" y="4462272"/>
-            <a:ext cx="1691640" cy="274320"/>
-          </a:xfrm>
-          <a:prstGeom prst="rect">
-            <a:avLst/>
-          </a:prstGeom>
-          <a:noFill/>
-        </p:spPr>
-        <p:txBody>
-          <a:bodyPr wrap="square" lIns="0" rIns="0" tIns="0" bIns="0">
-            <a:spAutoFit/>
-          </a:bodyPr>
-          <a:lstStyle/>
-          <a:p>
-            <a:pPr algn="r">
-              <a:lnSpc>
-                <a:spcPts val="1600"/>
-              </a:lnSpc>
-              <a:spcAft>
-                <a:spcPts val="0"/>
-              </a:spcAft>
-            </a:pPr>
-            <a:r>
-              <a:rPr sz="1250" b="0" i="0">
-                <a:solidFill>
-                  <a:srgbClr val="212529"/>
-                </a:solidFill>
-                <a:latin typeface="Garamond"/>
-              </a:rPr>
-              <a:t>+8.94***</a:t>
-            </a:r>
-          </a:p>
-        </p:txBody>
-      </p:sp>
-      <p:sp>
-        <p:nvSpPr>
-          <p:cNvPr id="49" name="TextBox 48"/>
-          <p:cNvSpPr txBox="1"/>
-          <p:nvPr/>
-        </p:nvSpPr>
-        <p:spPr>
-          <a:xfrm>
-            <a:off x="8778240" y="4462272"/>
-            <a:ext cx="1691640" cy="274320"/>
-          </a:xfrm>
-          <a:prstGeom prst="rect">
-            <a:avLst/>
-          </a:prstGeom>
-          <a:noFill/>
-        </p:spPr>
-        <p:txBody>
-          <a:bodyPr wrap="square" lIns="0" rIns="0" tIns="0" bIns="0">
-            <a:spAutoFit/>
-          </a:bodyPr>
-          <a:lstStyle/>
-          <a:p>
-            <a:pPr algn="r">
-              <a:lnSpc>
-                <a:spcPts val="1600"/>
-              </a:lnSpc>
-              <a:spcAft>
-                <a:spcPts val="0"/>
-              </a:spcAft>
-            </a:pPr>
-            <a:r>
-              <a:rPr sz="1250" b="0" i="0">
-                <a:solidFill>
-                  <a:srgbClr val="212529"/>
-                </a:solidFill>
-                <a:latin typeface="Garamond"/>
-              </a:rPr>
-              <a:t>+8.94***</a:t>
-            </a:r>
-          </a:p>
-        </p:txBody>
-      </p:sp>
-      <p:sp>
-        <p:nvSpPr>
-          <p:cNvPr id="50" name="TextBox 49"/>
-          <p:cNvSpPr txBox="1"/>
-          <p:nvPr/>
-        </p:nvSpPr>
-        <p:spPr>
-          <a:xfrm>
-            <a:off x="5029200" y="4686300"/>
-            <a:ext cx="1691640" cy="274320"/>
-          </a:xfrm>
-          <a:prstGeom prst="rect">
-            <a:avLst/>
-          </a:prstGeom>
-          <a:noFill/>
-        </p:spPr>
-        <p:txBody>
-          <a:bodyPr wrap="square" lIns="0" rIns="0" tIns="0" bIns="0">
-            <a:spAutoFit/>
-          </a:bodyPr>
-          <a:lstStyle/>
-          <a:p>
-            <a:pPr algn="r">
-              <a:lnSpc>
-                <a:spcPts val="1408"/>
-              </a:lnSpc>
-              <a:spcAft>
-                <a:spcPts val="0"/>
-              </a:spcAft>
-            </a:pPr>
-            <a:r>
-              <a:rPr sz="1100" b="0" i="0">
-                <a:solidFill>
-                  <a:srgbClr val="6B7480"/>
-                </a:solidFill>
-                <a:latin typeface="Garamond"/>
-              </a:rPr>
-              <a:t>(2.14)</a:t>
-            </a:r>
-          </a:p>
-        </p:txBody>
-      </p:sp>
-      <p:sp>
-        <p:nvSpPr>
-          <p:cNvPr id="51" name="TextBox 50"/>
-          <p:cNvSpPr txBox="1"/>
-          <p:nvPr/>
-        </p:nvSpPr>
-        <p:spPr>
-          <a:xfrm>
-            <a:off x="6903720" y="4686300"/>
-            <a:ext cx="1691640" cy="274320"/>
-          </a:xfrm>
-          <a:prstGeom prst="rect">
-            <a:avLst/>
-          </a:prstGeom>
-          <a:noFill/>
-        </p:spPr>
-        <p:txBody>
-          <a:bodyPr wrap="square" lIns="0" rIns="0" tIns="0" bIns="0">
-            <a:spAutoFit/>
-          </a:bodyPr>
-          <a:lstStyle/>
-          <a:p>
-            <a:pPr algn="r">
-              <a:lnSpc>
-                <a:spcPts val="1408"/>
-              </a:lnSpc>
-              <a:spcAft>
-                <a:spcPts val="0"/>
-              </a:spcAft>
-            </a:pPr>
-            <a:r>
-              <a:rPr sz="1100" b="0" i="0">
-                <a:solidFill>
-                  <a:srgbClr val="6B7480"/>
-                </a:solidFill>
-                <a:latin typeface="Garamond"/>
-              </a:rPr>
-              <a:t>(2.14)</a:t>
-            </a:r>
-          </a:p>
-        </p:txBody>
-      </p:sp>
-      <p:sp>
-        <p:nvSpPr>
-          <p:cNvPr id="52" name="TextBox 51"/>
-          <p:cNvSpPr txBox="1"/>
-          <p:nvPr/>
-        </p:nvSpPr>
-        <p:spPr>
-          <a:xfrm>
-            <a:off x="8778240" y="4686300"/>
-            <a:ext cx="1691640" cy="274320"/>
-          </a:xfrm>
-          <a:prstGeom prst="rect">
-            <a:avLst/>
-          </a:prstGeom>
-          <a:noFill/>
-        </p:spPr>
-        <p:txBody>
-          <a:bodyPr wrap="square" lIns="0" rIns="0" tIns="0" bIns="0">
-            <a:spAutoFit/>
-          </a:bodyPr>
-          <a:lstStyle/>
-          <a:p>
-            <a:pPr algn="r">
-              <a:lnSpc>
-                <a:spcPts val="1408"/>
-              </a:lnSpc>
-              <a:spcAft>
-                <a:spcPts val="0"/>
-              </a:spcAft>
-            </a:pPr>
-            <a:r>
-              <a:rPr sz="1100" b="0" i="0">
-                <a:solidFill>
-                  <a:srgbClr val="6B7480"/>
-                </a:solidFill>
-                <a:latin typeface="Garamond"/>
-              </a:rPr>
-              <a:t>(2.14)</a:t>
-            </a:r>
-          </a:p>
-        </p:txBody>
-      </p:sp>
-      <p:sp>
-        <p:nvSpPr>
-          <p:cNvPr id="53" name="TextBox 52"/>
-          <p:cNvSpPr txBox="1"/>
-          <p:nvPr/>
-        </p:nvSpPr>
-        <p:spPr>
-          <a:xfrm>
-            <a:off x="1005840" y="4919472"/>
-            <a:ext cx="3840480" cy="274320"/>
-          </a:xfrm>
-          <a:prstGeom prst="rect">
-            <a:avLst/>
-          </a:prstGeom>
-          <a:noFill/>
-        </p:spPr>
-        <p:txBody>
-          <a:bodyPr wrap="square" lIns="0" rIns="0" tIns="0" bIns="0">
-            <a:spAutoFit/>
-          </a:bodyPr>
-          <a:lstStyle/>
-          <a:p>
-            <a:pPr algn="l">
-              <a:lnSpc>
-                <a:spcPts val="1600"/>
-              </a:lnSpc>
-              <a:spcAft>
-                <a:spcPts val="0"/>
-              </a:spcAft>
-            </a:pPr>
-            <a:r>
-              <a:rPr sz="1250" b="0" i="0">
-                <a:solidFill>
-                  <a:srgbClr val="212529"/>
-                </a:solidFill>
-                <a:latin typeface="Garamond"/>
-              </a:rPr>
-              <a:t>Bottom-quartile household income</a:t>
-            </a:r>
-          </a:p>
-        </p:txBody>
-      </p:sp>
-      <p:sp>
-        <p:nvSpPr>
-          <p:cNvPr id="54" name="TextBox 53"/>
-          <p:cNvSpPr txBox="1"/>
-          <p:nvPr/>
-        </p:nvSpPr>
-        <p:spPr>
-          <a:xfrm>
-            <a:off x="5029200" y="4919472"/>
-            <a:ext cx="1691640" cy="274320"/>
-          </a:xfrm>
-          <a:prstGeom prst="rect">
-            <a:avLst/>
-          </a:prstGeom>
-          <a:noFill/>
-        </p:spPr>
-        <p:txBody>
-          <a:bodyPr wrap="square" lIns="0" rIns="0" tIns="0" bIns="0">
-            <a:spAutoFit/>
-          </a:bodyPr>
-          <a:lstStyle/>
-          <a:p>
-            <a:pPr algn="r">
-              <a:lnSpc>
-                <a:spcPts val="1600"/>
-              </a:lnSpc>
-              <a:spcAft>
-                <a:spcPts val="0"/>
-              </a:spcAft>
-            </a:pPr>
-            <a:r>
-              <a:rPr sz="1250" b="0" i="0">
-                <a:solidFill>
-                  <a:srgbClr val="212529"/>
-                </a:solidFill>
-                <a:latin typeface="Garamond"/>
-              </a:rPr>
-              <a:t>+4.17***</a:t>
-            </a:r>
-          </a:p>
-        </p:txBody>
-      </p:sp>
-      <p:sp>
-        <p:nvSpPr>
-          <p:cNvPr id="55" name="TextBox 54"/>
-          <p:cNvSpPr txBox="1"/>
-          <p:nvPr/>
-        </p:nvSpPr>
-        <p:spPr>
-          <a:xfrm>
-            <a:off x="6903720" y="4919472"/>
-            <a:ext cx="1691640" cy="274320"/>
-          </a:xfrm>
-          <a:prstGeom prst="rect">
-            <a:avLst/>
-          </a:prstGeom>
-          <a:noFill/>
-        </p:spPr>
-        <p:txBody>
-          <a:bodyPr wrap="square" lIns="0" rIns="0" tIns="0" bIns="0">
-            <a:spAutoFit/>
-          </a:bodyPr>
-          <a:lstStyle/>
-          <a:p>
-            <a:pPr algn="r">
-              <a:lnSpc>
-                <a:spcPts val="1600"/>
-              </a:lnSpc>
-              <a:spcAft>
-                <a:spcPts val="0"/>
-              </a:spcAft>
-            </a:pPr>
-            <a:r>
-              <a:rPr sz="1250" b="0" i="0">
-                <a:solidFill>
-                  <a:srgbClr val="212529"/>
-                </a:solidFill>
-                <a:latin typeface="Garamond"/>
-              </a:rPr>
-              <a:t>+4.13***</a:t>
-            </a:r>
-          </a:p>
-        </p:txBody>
-      </p:sp>
-      <p:sp>
-        <p:nvSpPr>
-          <p:cNvPr id="56" name="TextBox 55"/>
-          <p:cNvSpPr txBox="1"/>
-          <p:nvPr/>
-        </p:nvSpPr>
-        <p:spPr>
-          <a:xfrm>
-            <a:off x="8778240" y="4919472"/>
-            <a:ext cx="1691640" cy="274320"/>
-          </a:xfrm>
-          <a:prstGeom prst="rect">
-            <a:avLst/>
-          </a:prstGeom>
-          <a:noFill/>
-        </p:spPr>
-        <p:txBody>
-          <a:bodyPr wrap="square" lIns="0" rIns="0" tIns="0" bIns="0">
-            <a:spAutoFit/>
-          </a:bodyPr>
-          <a:lstStyle/>
-          <a:p>
-            <a:pPr algn="r">
-              <a:lnSpc>
-                <a:spcPts val="1600"/>
-              </a:lnSpc>
-              <a:spcAft>
-                <a:spcPts val="0"/>
-              </a:spcAft>
-            </a:pPr>
-            <a:r>
-              <a:rPr sz="1250" b="0" i="0">
-                <a:solidFill>
-                  <a:srgbClr val="212529"/>
-                </a:solidFill>
-                <a:latin typeface="Garamond"/>
-              </a:rPr>
-              <a:t>+4.01***</a:t>
-            </a:r>
-          </a:p>
-        </p:txBody>
-      </p:sp>
-      <p:sp>
-        <p:nvSpPr>
-          <p:cNvPr id="57" name="TextBox 56"/>
-          <p:cNvSpPr txBox="1"/>
-          <p:nvPr/>
-        </p:nvSpPr>
-        <p:spPr>
-          <a:xfrm>
-            <a:off x="5029200" y="5143500"/>
-            <a:ext cx="1691640" cy="274320"/>
-          </a:xfrm>
-          <a:prstGeom prst="rect">
-            <a:avLst/>
-          </a:prstGeom>
-          <a:noFill/>
-        </p:spPr>
-        <p:txBody>
-          <a:bodyPr wrap="square" lIns="0" rIns="0" tIns="0" bIns="0">
-            <a:spAutoFit/>
-          </a:bodyPr>
-          <a:lstStyle/>
-          <a:p>
-            <a:pPr algn="r">
-              <a:lnSpc>
-                <a:spcPts val="1408"/>
-              </a:lnSpc>
-              <a:spcAft>
-                <a:spcPts val="0"/>
-              </a:spcAft>
-            </a:pPr>
-            <a:r>
-              <a:rPr sz="1100" b="0" i="0">
-                <a:solidFill>
-                  <a:srgbClr val="6B7480"/>
-                </a:solidFill>
-                <a:latin typeface="Garamond"/>
-              </a:rPr>
-              <a:t>(1.24)</a:t>
-            </a:r>
-          </a:p>
-        </p:txBody>
-      </p:sp>
-      <p:sp>
-        <p:nvSpPr>
-          <p:cNvPr id="58" name="TextBox 57"/>
-          <p:cNvSpPr txBox="1"/>
-          <p:nvPr/>
-        </p:nvSpPr>
-        <p:spPr>
-          <a:xfrm>
-            <a:off x="6903720" y="5143500"/>
-            <a:ext cx="1691640" cy="274320"/>
-          </a:xfrm>
-          <a:prstGeom prst="rect">
-            <a:avLst/>
-          </a:prstGeom>
-          <a:noFill/>
-        </p:spPr>
-        <p:txBody>
-          <a:bodyPr wrap="square" lIns="0" rIns="0" tIns="0" bIns="0">
-            <a:spAutoFit/>
-          </a:bodyPr>
-          <a:lstStyle/>
-          <a:p>
-            <a:pPr algn="r">
-              <a:lnSpc>
-                <a:spcPts val="1408"/>
-              </a:lnSpc>
-              <a:spcAft>
-                <a:spcPts val="0"/>
-              </a:spcAft>
-            </a:pPr>
-            <a:r>
-              <a:rPr sz="1100" b="0" i="0">
-                <a:solidFill>
-                  <a:srgbClr val="6B7480"/>
-                </a:solidFill>
-                <a:latin typeface="Garamond"/>
-              </a:rPr>
-              <a:t>(1.24)</a:t>
-            </a:r>
-          </a:p>
-        </p:txBody>
-      </p:sp>
-      <p:sp>
-        <p:nvSpPr>
-          <p:cNvPr id="59" name="TextBox 58"/>
-          <p:cNvSpPr txBox="1"/>
-          <p:nvPr/>
-        </p:nvSpPr>
-        <p:spPr>
-          <a:xfrm>
-            <a:off x="8778240" y="5143500"/>
-            <a:ext cx="1691640" cy="274320"/>
-          </a:xfrm>
-          <a:prstGeom prst="rect">
-            <a:avLst/>
-          </a:prstGeom>
-          <a:noFill/>
-        </p:spPr>
-        <p:txBody>
-          <a:bodyPr wrap="square" lIns="0" rIns="0" tIns="0" bIns="0">
-            <a:spAutoFit/>
-          </a:bodyPr>
-          <a:lstStyle/>
-          <a:p>
-            <a:pPr algn="r">
-              <a:lnSpc>
-                <a:spcPts val="1408"/>
-              </a:lnSpc>
-              <a:spcAft>
-                <a:spcPts val="0"/>
-              </a:spcAft>
-            </a:pPr>
-            <a:r>
-              <a:rPr sz="1100" b="0" i="0">
-                <a:solidFill>
-                  <a:srgbClr val="6B7480"/>
-                </a:solidFill>
-                <a:latin typeface="Garamond"/>
-              </a:rPr>
-              <a:t>(1.25)</a:t>
-            </a:r>
-          </a:p>
-        </p:txBody>
-      </p:sp>
-      <p:cxnSp>
-        <p:nvCxnSpPr>
-          <p:cNvPr id="60" name="Connector 59"/>
-          <p:cNvCxnSpPr/>
-          <p:nvPr/>
-        </p:nvCxnSpPr>
-        <p:spPr>
-          <a:xfrm>
-            <a:off x="1005840" y="5394959"/>
-            <a:ext cx="9509760" cy="0"/>
-          </a:xfrm>
-          <a:prstGeom prst="line">
-            <a:avLst/>
-          </a:prstGeom>
-          <a:ln w="8890">
-            <a:solidFill>
-              <a:srgbClr val="212529"/>
-            </a:solidFill>
-          </a:ln>
-          <a:effectLst/>
-        </p:spPr>
-        <p:style>
-          <a:lnRef idx="2">
-            <a:schemeClr val="accent1"/>
-          </a:lnRef>
-          <a:fillRef idx="0">
-            <a:schemeClr val="accent1"/>
-          </a:fillRef>
-          <a:effectRef idx="1">
-            <a:schemeClr val="accent1"/>
-          </a:effectRef>
-          <a:fontRef idx="minor">
-            <a:schemeClr val="tx1"/>
-          </a:fontRef>
-        </p:style>
-      </p:cxnSp>
-      <p:sp>
-        <p:nvSpPr>
-          <p:cNvPr id="61" name="TextBox 60"/>
-          <p:cNvSpPr txBox="1"/>
-          <p:nvPr/>
-        </p:nvSpPr>
-        <p:spPr>
-          <a:xfrm>
-            <a:off x="1005840" y="5477256"/>
-            <a:ext cx="3840480" cy="274320"/>
-          </a:xfrm>
-          <a:prstGeom prst="rect">
-            <a:avLst/>
-          </a:prstGeom>
-          <a:noFill/>
-        </p:spPr>
-        <p:txBody>
-          <a:bodyPr wrap="square" lIns="0" rIns="0" tIns="0" bIns="0">
-            <a:spAutoFit/>
-          </a:bodyPr>
-          <a:lstStyle/>
-          <a:p>
-            <a:pPr algn="l">
-              <a:lnSpc>
-                <a:spcPts val="1600"/>
-              </a:lnSpc>
-              <a:spcAft>
-                <a:spcPts val="0"/>
-              </a:spcAft>
-            </a:pPr>
-            <a:r>
-              <a:rPr sz="1250" b="0" i="0">
-                <a:solidFill>
-                  <a:srgbClr val="212529"/>
-                </a:solidFill>
-                <a:latin typeface="Garamond"/>
-              </a:rPr>
-              <a:t>Year fixed effects</a:t>
-            </a:r>
-          </a:p>
-        </p:txBody>
-      </p:sp>
-      <p:sp>
-        <p:nvSpPr>
-          <p:cNvPr id="62" name="TextBox 61"/>
-          <p:cNvSpPr txBox="1"/>
-          <p:nvPr/>
-        </p:nvSpPr>
-        <p:spPr>
-          <a:xfrm>
-            <a:off x="5029200" y="5477256"/>
-            <a:ext cx="1691640" cy="274320"/>
-          </a:xfrm>
-          <a:prstGeom prst="rect">
-            <a:avLst/>
-          </a:prstGeom>
-          <a:noFill/>
-        </p:spPr>
-        <p:txBody>
-          <a:bodyPr wrap="square" lIns="0" rIns="0" tIns="0" bIns="0">
-            <a:spAutoFit/>
-          </a:bodyPr>
-          <a:lstStyle/>
-          <a:p>
-            <a:pPr algn="r">
-              <a:lnSpc>
-                <a:spcPts val="1600"/>
-              </a:lnSpc>
-              <a:spcAft>
-                <a:spcPts val="0"/>
-              </a:spcAft>
-            </a:pPr>
-            <a:r>
-              <a:rPr sz="1250" b="0" i="0">
-                <a:solidFill>
-                  <a:srgbClr val="212529"/>
-                </a:solidFill>
-                <a:latin typeface="Garamond"/>
-              </a:rPr>
-              <a:t>No</a:t>
-            </a:r>
-          </a:p>
-        </p:txBody>
-      </p:sp>
-      <p:sp>
-        <p:nvSpPr>
-          <p:cNvPr id="63" name="TextBox 62"/>
-          <p:cNvSpPr txBox="1"/>
-          <p:nvPr/>
-        </p:nvSpPr>
-        <p:spPr>
-          <a:xfrm>
-            <a:off x="6903720" y="5477256"/>
-            <a:ext cx="1691640" cy="274320"/>
-          </a:xfrm>
-          <a:prstGeom prst="rect">
-            <a:avLst/>
-          </a:prstGeom>
-          <a:noFill/>
-        </p:spPr>
-        <p:txBody>
-          <a:bodyPr wrap="square" lIns="0" rIns="0" tIns="0" bIns="0">
-            <a:spAutoFit/>
-          </a:bodyPr>
-          <a:lstStyle/>
-          <a:p>
-            <a:pPr algn="r">
-              <a:lnSpc>
-                <a:spcPts val="1600"/>
-              </a:lnSpc>
-              <a:spcAft>
-                <a:spcPts val="0"/>
-              </a:spcAft>
-            </a:pPr>
-            <a:r>
-              <a:rPr sz="1250" b="0" i="0">
-                <a:solidFill>
-                  <a:srgbClr val="212529"/>
-                </a:solidFill>
-                <a:latin typeface="Garamond"/>
-              </a:rPr>
-              <a:t>Yes</a:t>
-            </a:r>
-          </a:p>
-        </p:txBody>
-      </p:sp>
-      <p:sp>
-        <p:nvSpPr>
-          <p:cNvPr id="64" name="TextBox 63"/>
-          <p:cNvSpPr txBox="1"/>
-          <p:nvPr/>
-        </p:nvSpPr>
-        <p:spPr>
-          <a:xfrm>
-            <a:off x="8778240" y="5477256"/>
-            <a:ext cx="1691640" cy="274320"/>
-          </a:xfrm>
-          <a:prstGeom prst="rect">
-            <a:avLst/>
-          </a:prstGeom>
-          <a:noFill/>
-        </p:spPr>
-        <p:txBody>
-          <a:bodyPr wrap="square" lIns="0" rIns="0" tIns="0" bIns="0">
-            <a:spAutoFit/>
-          </a:bodyPr>
-          <a:lstStyle/>
-          <a:p>
-            <a:pPr algn="r">
-              <a:lnSpc>
-                <a:spcPts val="1600"/>
-              </a:lnSpc>
-              <a:spcAft>
-                <a:spcPts val="0"/>
-              </a:spcAft>
-            </a:pPr>
-            <a:r>
-              <a:rPr sz="1250" b="0" i="0">
-                <a:solidFill>
-                  <a:srgbClr val="212529"/>
-                </a:solidFill>
-                <a:latin typeface="Garamond"/>
-              </a:rPr>
-              <a:t>Yes</a:t>
-            </a:r>
-          </a:p>
-        </p:txBody>
-      </p:sp>
-      <p:sp>
-        <p:nvSpPr>
-          <p:cNvPr id="65" name="TextBox 64"/>
-          <p:cNvSpPr txBox="1"/>
-          <p:nvPr/>
-        </p:nvSpPr>
-        <p:spPr>
-          <a:xfrm>
-            <a:off x="1005840" y="5733288"/>
-            <a:ext cx="3840480" cy="274320"/>
-          </a:xfrm>
-          <a:prstGeom prst="rect">
-            <a:avLst/>
-          </a:prstGeom>
-          <a:noFill/>
-        </p:spPr>
-        <p:txBody>
-          <a:bodyPr wrap="square" lIns="0" rIns="0" tIns="0" bIns="0">
-            <a:spAutoFit/>
-          </a:bodyPr>
-          <a:lstStyle/>
-          <a:p>
-            <a:pPr algn="l">
-              <a:lnSpc>
-                <a:spcPts val="1600"/>
-              </a:lnSpc>
-              <a:spcAft>
-                <a:spcPts val="0"/>
-              </a:spcAft>
-            </a:pPr>
-            <a:r>
-              <a:rPr sz="1250" b="0" i="0">
-                <a:solidFill>
-                  <a:srgbClr val="212529"/>
-                </a:solidFill>
-                <a:latin typeface="Garamond"/>
-              </a:rPr>
-              <a:t>State fixed effects</a:t>
-            </a:r>
-          </a:p>
-        </p:txBody>
-      </p:sp>
-      <p:sp>
-        <p:nvSpPr>
-          <p:cNvPr id="66" name="TextBox 65"/>
-          <p:cNvSpPr txBox="1"/>
-          <p:nvPr/>
-        </p:nvSpPr>
-        <p:spPr>
-          <a:xfrm>
-            <a:off x="5029200" y="5733288"/>
-            <a:ext cx="1691640" cy="274320"/>
-          </a:xfrm>
-          <a:prstGeom prst="rect">
-            <a:avLst/>
-          </a:prstGeom>
-          <a:noFill/>
-        </p:spPr>
-        <p:txBody>
-          <a:bodyPr wrap="square" lIns="0" rIns="0" tIns="0" bIns="0">
-            <a:spAutoFit/>
-          </a:bodyPr>
-          <a:lstStyle/>
-          <a:p>
-            <a:pPr algn="r">
-              <a:lnSpc>
-                <a:spcPts val="1600"/>
-              </a:lnSpc>
-              <a:spcAft>
-                <a:spcPts val="0"/>
-              </a:spcAft>
-            </a:pPr>
-            <a:r>
-              <a:rPr sz="1250" b="0" i="0">
-                <a:solidFill>
-                  <a:srgbClr val="212529"/>
-                </a:solidFill>
-                <a:latin typeface="Garamond"/>
-              </a:rPr>
-              <a:t>No</a:t>
-            </a:r>
-          </a:p>
-        </p:txBody>
-      </p:sp>
-      <p:sp>
-        <p:nvSpPr>
-          <p:cNvPr id="67" name="TextBox 66"/>
-          <p:cNvSpPr txBox="1"/>
-          <p:nvPr/>
-        </p:nvSpPr>
-        <p:spPr>
-          <a:xfrm>
-            <a:off x="6903720" y="5733288"/>
-            <a:ext cx="1691640" cy="274320"/>
-          </a:xfrm>
-          <a:prstGeom prst="rect">
-            <a:avLst/>
-          </a:prstGeom>
-          <a:noFill/>
-        </p:spPr>
-        <p:txBody>
-          <a:bodyPr wrap="square" lIns="0" rIns="0" tIns="0" bIns="0">
-            <a:spAutoFit/>
-          </a:bodyPr>
-          <a:lstStyle/>
-          <a:p>
-            <a:pPr algn="r">
-              <a:lnSpc>
-                <a:spcPts val="1600"/>
-              </a:lnSpc>
-              <a:spcAft>
-                <a:spcPts val="0"/>
-              </a:spcAft>
-            </a:pPr>
-            <a:r>
-              <a:rPr sz="1250" b="0" i="0">
-                <a:solidFill>
-                  <a:srgbClr val="212529"/>
-                </a:solidFill>
-                <a:latin typeface="Garamond"/>
-              </a:rPr>
-              <a:t>No</a:t>
-            </a:r>
-          </a:p>
-        </p:txBody>
-      </p:sp>
-      <p:sp>
-        <p:nvSpPr>
-          <p:cNvPr id="68" name="TextBox 67"/>
-          <p:cNvSpPr txBox="1"/>
-          <p:nvPr/>
-        </p:nvSpPr>
-        <p:spPr>
-          <a:xfrm>
-            <a:off x="8778240" y="5733288"/>
-            <a:ext cx="1691640" cy="274320"/>
-          </a:xfrm>
-          <a:prstGeom prst="rect">
-            <a:avLst/>
-          </a:prstGeom>
-          <a:noFill/>
-        </p:spPr>
-        <p:txBody>
-          <a:bodyPr wrap="square" lIns="0" rIns="0" tIns="0" bIns="0">
-            <a:spAutoFit/>
-          </a:bodyPr>
-          <a:lstStyle/>
-          <a:p>
-            <a:pPr algn="r">
-              <a:lnSpc>
-                <a:spcPts val="1600"/>
-              </a:lnSpc>
-              <a:spcAft>
-                <a:spcPts val="0"/>
-              </a:spcAft>
-            </a:pPr>
-            <a:r>
-              <a:rPr sz="1250" b="0" i="0">
-                <a:solidFill>
-                  <a:srgbClr val="212529"/>
-                </a:solidFill>
-                <a:latin typeface="Garamond"/>
-              </a:rPr>
-              <a:t>Yes</a:t>
-            </a:r>
-          </a:p>
-        </p:txBody>
-      </p:sp>
-      <p:sp>
-        <p:nvSpPr>
-          <p:cNvPr id="69" name="TextBox 68"/>
-          <p:cNvSpPr txBox="1"/>
-          <p:nvPr/>
-        </p:nvSpPr>
-        <p:spPr>
-          <a:xfrm>
-            <a:off x="1005840" y="5989320"/>
-            <a:ext cx="3840480" cy="274320"/>
-          </a:xfrm>
-          <a:prstGeom prst="rect">
-            <a:avLst/>
-          </a:prstGeom>
-          <a:noFill/>
-        </p:spPr>
-        <p:txBody>
-          <a:bodyPr wrap="square" lIns="0" rIns="0" tIns="0" bIns="0">
-            <a:spAutoFit/>
-          </a:bodyPr>
-          <a:lstStyle/>
-          <a:p>
-            <a:pPr algn="l">
-              <a:lnSpc>
-                <a:spcPts val="1600"/>
-              </a:lnSpc>
-              <a:spcAft>
-                <a:spcPts val="0"/>
-              </a:spcAft>
-            </a:pPr>
-            <a:r>
-              <a:rPr sz="1250" b="0" i="0">
-                <a:solidFill>
-                  <a:srgbClr val="212529"/>
-                </a:solidFill>
-                <a:latin typeface="Garamond"/>
-              </a:rPr>
-              <a:t>Observations</a:t>
-            </a:r>
-          </a:p>
-        </p:txBody>
-      </p:sp>
-      <p:sp>
-        <p:nvSpPr>
-          <p:cNvPr id="70" name="TextBox 69"/>
-          <p:cNvSpPr txBox="1"/>
-          <p:nvPr/>
-        </p:nvSpPr>
-        <p:spPr>
-          <a:xfrm>
-            <a:off x="5029200" y="5989320"/>
-            <a:ext cx="1691640" cy="274320"/>
-          </a:xfrm>
-          <a:prstGeom prst="rect">
-            <a:avLst/>
-          </a:prstGeom>
-          <a:noFill/>
-        </p:spPr>
-        <p:txBody>
-          <a:bodyPr wrap="square" lIns="0" rIns="0" tIns="0" bIns="0">
-            <a:spAutoFit/>
-          </a:bodyPr>
-          <a:lstStyle/>
-          <a:p>
-            <a:pPr algn="r">
-              <a:lnSpc>
-                <a:spcPts val="1600"/>
-              </a:lnSpc>
-              <a:spcAft>
-                <a:spcPts val="0"/>
-              </a:spcAft>
-            </a:pPr>
-            <a:r>
-              <a:rPr sz="1250" b="0" i="0">
-                <a:solidFill>
-                  <a:srgbClr val="212529"/>
-                </a:solidFill>
-                <a:latin typeface="Garamond"/>
-              </a:rPr>
-              <a:t>18,571</a:t>
-            </a:r>
-          </a:p>
-        </p:txBody>
-      </p:sp>
-      <p:sp>
-        <p:nvSpPr>
-          <p:cNvPr id="71" name="TextBox 70"/>
-          <p:cNvSpPr txBox="1"/>
-          <p:nvPr/>
-        </p:nvSpPr>
-        <p:spPr>
-          <a:xfrm>
-            <a:off x="6903720" y="5989320"/>
-            <a:ext cx="1691640" cy="274320"/>
-          </a:xfrm>
-          <a:prstGeom prst="rect">
-            <a:avLst/>
-          </a:prstGeom>
-          <a:noFill/>
-        </p:spPr>
-        <p:txBody>
-          <a:bodyPr wrap="square" lIns="0" rIns="0" tIns="0" bIns="0">
-            <a:spAutoFit/>
-          </a:bodyPr>
-          <a:lstStyle/>
-          <a:p>
-            <a:pPr algn="r">
-              <a:lnSpc>
-                <a:spcPts val="1600"/>
-              </a:lnSpc>
-              <a:spcAft>
-                <a:spcPts val="0"/>
-              </a:spcAft>
-            </a:pPr>
-            <a:r>
-              <a:rPr sz="1250" b="0" i="0">
-                <a:solidFill>
-                  <a:srgbClr val="212529"/>
-                </a:solidFill>
-                <a:latin typeface="Garamond"/>
-              </a:rPr>
-              <a:t>18,571</a:t>
-            </a:r>
-          </a:p>
-        </p:txBody>
-      </p:sp>
-      <p:sp>
-        <p:nvSpPr>
-          <p:cNvPr id="72" name="TextBox 71"/>
-          <p:cNvSpPr txBox="1"/>
-          <p:nvPr/>
-        </p:nvSpPr>
-        <p:spPr>
-          <a:xfrm>
-            <a:off x="8778240" y="5989320"/>
-            <a:ext cx="1691640" cy="274320"/>
-          </a:xfrm>
-          <a:prstGeom prst="rect">
-            <a:avLst/>
-          </a:prstGeom>
-          <a:noFill/>
-        </p:spPr>
-        <p:txBody>
-          <a:bodyPr wrap="square" lIns="0" rIns="0" tIns="0" bIns="0">
-            <a:spAutoFit/>
-          </a:bodyPr>
-          <a:lstStyle/>
-          <a:p>
-            <a:pPr algn="r">
-              <a:lnSpc>
-                <a:spcPts val="1600"/>
-              </a:lnSpc>
-              <a:spcAft>
-                <a:spcPts val="0"/>
-              </a:spcAft>
-            </a:pPr>
-            <a:r>
-              <a:rPr sz="1250" b="0" i="0">
-                <a:solidFill>
-                  <a:srgbClr val="212529"/>
-                </a:solidFill>
-                <a:latin typeface="Garamond"/>
-              </a:rPr>
-              <a:t>18,571</a:t>
-            </a:r>
-          </a:p>
-        </p:txBody>
-      </p:sp>
-      <p:cxnSp>
-        <p:nvCxnSpPr>
-          <p:cNvPr id="73" name="Connector 72"/>
-          <p:cNvCxnSpPr/>
-          <p:nvPr/>
-        </p:nvCxnSpPr>
-        <p:spPr>
-          <a:xfrm>
-            <a:off x="1005840" y="6263640"/>
-            <a:ext cx="9509760" cy="0"/>
-          </a:xfrm>
-          <a:prstGeom prst="line">
-            <a:avLst/>
-          </a:prstGeom>
-          <a:ln w="16510">
-            <a:solidFill>
-              <a:srgbClr val="212529"/>
-            </a:solidFill>
-          </a:ln>
-          <a:effectLst/>
-        </p:spPr>
-        <p:style>
-          <a:lnRef idx="2">
-            <a:schemeClr val="accent1"/>
-          </a:lnRef>
-          <a:fillRef idx="0">
-            <a:schemeClr val="accent1"/>
-          </a:fillRef>
-          <a:effectRef idx="1">
-            <a:schemeClr val="accent1"/>
-          </a:effectRef>
-          <a:fontRef idx="minor">
-            <a:schemeClr val="tx1"/>
-          </a:fontRef>
-        </p:style>
-      </p:cxnSp>
-      <p:sp>
-        <p:nvSpPr>
-          <p:cNvPr id="74" name="TextBox 73"/>
-          <p:cNvSpPr txBox="1"/>
-          <p:nvPr/>
-        </p:nvSpPr>
-        <p:spPr>
-          <a:xfrm>
-            <a:off x="1005840" y="6391656"/>
-            <a:ext cx="9509760" cy="548640"/>
-          </a:xfrm>
-          <a:prstGeom prst="rect">
-            <a:avLst/>
-          </a:prstGeom>
-          <a:noFill/>
-        </p:spPr>
-        <p:txBody>
-          <a:bodyPr wrap="square" lIns="0" rIns="0" tIns="0" bIns="0">
-            <a:spAutoFit/>
-          </a:bodyPr>
-          <a:lstStyle/>
-          <a:p>
-            <a:pPr algn="l">
-              <a:lnSpc>
-                <a:spcPts val="1344"/>
-              </a:lnSpc>
-              <a:spcAft>
-                <a:spcPts val="0"/>
-              </a:spcAft>
-            </a:pPr>
-            <a:r>
-              <a:rPr sz="1050" b="0" i="1">
-                <a:solidFill>
-                  <a:srgbClr val="6B7480"/>
-                </a:solidFill>
-                <a:latin typeface="Garamond"/>
-              </a:rPr>
-              <a:t>Robust standard errors in parentheses. * p&lt;0.10, ** p&lt;0.05, *** p&lt;0.01. Weighted. Full set of controls as in the main specification.</a:t>
-            </a:r>
-          </a:p>
-        </p:txBody>
-      </p:sp>
-      <p:sp>
-        <p:nvSpPr>
-          <p:cNvPr id="75" name="Rounded Rectangle 74">
-            <a:hlinkClick action="ppaction://hlinksldjump" r:id="rId2"/>
+              <a:t>Recomputing the whole series on the narrow core moves the pooled rate by 0.1 points. The 2003 and 2020 reclassifications leave no visible break.</a:t>
+            </a:r>
+          </a:p>
+        </p:txBody>
+      </p:sp>
+      <p:sp>
+        <p:nvSpPr>
+          <p:cNvPr id="6" name="Rounded Rectangle 5">
+            <a:hlinkClick action="ppaction://hlinksldjump" r:id="rId3"/>
           </p:cNvPr>
           <p:cNvSpPr/>
           <p:nvPr/>
@@ -23838,7 +21017,7 @@
                 </a:solidFill>
                 <a:latin typeface="Garamond"/>
               </a:rPr>
-              <a:t>LPM vs logit vs probit</a:t>
+              <a:t>Linear probability model, fixed-effects variants</a:t>
             </a:r>
           </a:p>
         </p:txBody>
@@ -23951,7 +21130,7 @@
                 </a:solidFill>
                 <a:latin typeface="Garamond"/>
               </a:rPr>
-              <a:t>Average marginal effect on leaving (×100)</a:t>
+              <a:t>Dependent variable: left teaching (×100)</a:t>
             </a:r>
           </a:p>
         </p:txBody>
@@ -24029,7 +21208,7 @@
                 </a:solidFill>
                 <a:latin typeface="Garamond"/>
               </a:rPr>
-              <a:t>LPM</a:t>
+              <a:t>(1)</a:t>
             </a:r>
           </a:p>
         </p:txBody>
@@ -24071,7 +21250,7 @@
                 </a:solidFill>
                 <a:latin typeface="Garamond"/>
               </a:rPr>
-              <a:t>Logit</a:t>
+              <a:t>(2)</a:t>
             </a:r>
           </a:p>
         </p:txBody>
@@ -24113,7 +21292,7 @@
                 </a:solidFill>
                 <a:latin typeface="Garamond"/>
               </a:rPr>
-              <a:t>Probit</a:t>
+              <a:t>(3)</a:t>
             </a:r>
           </a:p>
         </p:txBody>
@@ -24233,7 +21412,7 @@
                 </a:solidFill>
                 <a:latin typeface="Garamond"/>
               </a:rPr>
-              <a:t>−11.13***</a:t>
+              <a:t>−11.54***</a:t>
             </a:r>
           </a:p>
         </p:txBody>
@@ -24275,7 +21454,7 @@
                 </a:solidFill>
                 <a:latin typeface="Garamond"/>
               </a:rPr>
-              <a:t>−8.78***</a:t>
+              <a:t>−11.55***</a:t>
             </a:r>
           </a:p>
         </p:txBody>
@@ -24317,7 +21496,7 @@
                 </a:solidFill>
                 <a:latin typeface="Garamond"/>
               </a:rPr>
-              <a:t>−8.49***</a:t>
+              <a:t>−11.65***</a:t>
             </a:r>
           </a:p>
         </p:txBody>
@@ -24359,7 +21538,7 @@
                 </a:solidFill>
                 <a:latin typeface="Garamond"/>
               </a:rPr>
-              <a:t>(0.55)</a:t>
+              <a:t>(0.67)</a:t>
             </a:r>
           </a:p>
         </p:txBody>
@@ -24401,7 +21580,7 @@
                 </a:solidFill>
                 <a:latin typeface="Garamond"/>
               </a:rPr>
-              <a:t>(0.40)</a:t>
+              <a:t>(0.66)</a:t>
             </a:r>
           </a:p>
         </p:txBody>
@@ -24443,7 +21622,7 @@
                 </a:solidFill>
                 <a:latin typeface="Garamond"/>
               </a:rPr>
-              <a:t>(0.39)</a:t>
+              <a:t>(0.67)</a:t>
             </a:r>
           </a:p>
         </p:txBody>
@@ -24527,7 +21706,7 @@
                 </a:solidFill>
                 <a:latin typeface="Garamond"/>
               </a:rPr>
-              <a:t>+8.77***</a:t>
+              <a:t>+8.67***</a:t>
             </a:r>
           </a:p>
         </p:txBody>
@@ -24569,7 +21748,7 @@
                 </a:solidFill>
                 <a:latin typeface="Garamond"/>
               </a:rPr>
-              <a:t>+3.86***</a:t>
+              <a:t>+8.67***</a:t>
             </a:r>
           </a:p>
         </p:txBody>
@@ -24611,7 +21790,7 @@
                 </a:solidFill>
                 <a:latin typeface="Garamond"/>
               </a:rPr>
-              <a:t>+4.32***</a:t>
+              <a:t>+8.63***</a:t>
             </a:r>
           </a:p>
         </p:txBody>
@@ -24653,7 +21832,7 @@
                 </a:solidFill>
                 <a:latin typeface="Garamond"/>
               </a:rPr>
-              <a:t>(0.92)</a:t>
+              <a:t>(1.09)</a:t>
             </a:r>
           </a:p>
         </p:txBody>
@@ -24695,7 +21874,7 @@
                 </a:solidFill>
                 <a:latin typeface="Garamond"/>
               </a:rPr>
-              <a:t>(0.44)</a:t>
+              <a:t>(1.09)</a:t>
             </a:r>
           </a:p>
         </p:txBody>
@@ -24737,7 +21916,7 @@
                 </a:solidFill>
                 <a:latin typeface="Garamond"/>
               </a:rPr>
-              <a:t>(0.47)</a:t>
+              <a:t>(1.10)</a:t>
             </a:r>
           </a:p>
         </p:txBody>
@@ -24821,7 +22000,7 @@
                 </a:solidFill>
                 <a:latin typeface="Garamond"/>
               </a:rPr>
-              <a:t>−2.55***</a:t>
+              <a:t>−2.35***</a:t>
             </a:r>
           </a:p>
         </p:txBody>
@@ -24863,7 +22042,7 @@
                 </a:solidFill>
                 <a:latin typeface="Garamond"/>
               </a:rPr>
-              <a:t>−2.38***</a:t>
+              <a:t>−2.33***</a:t>
             </a:r>
           </a:p>
         </p:txBody>
@@ -24905,7 +22084,7 @@
                 </a:solidFill>
                 <a:latin typeface="Garamond"/>
               </a:rPr>
-              <a:t>−2.41***</a:t>
+              <a:t>−2.33***</a:t>
             </a:r>
           </a:p>
         </p:txBody>
@@ -24947,7 +22126,7 @@
                 </a:solidFill>
                 <a:latin typeface="Garamond"/>
               </a:rPr>
-              <a:t>(0.44)</a:t>
+              <a:t>(0.52)</a:t>
             </a:r>
           </a:p>
         </p:txBody>
@@ -24989,7 +22168,7 @@
                 </a:solidFill>
                 <a:latin typeface="Garamond"/>
               </a:rPr>
-              <a:t>(0.39)</a:t>
+              <a:t>(0.52)</a:t>
             </a:r>
           </a:p>
         </p:txBody>
@@ -25031,7 +22210,7 @@
                 </a:solidFill>
                 <a:latin typeface="Garamond"/>
               </a:rPr>
-              <a:t>(0.38)</a:t>
+              <a:t>(0.52)</a:t>
             </a:r>
           </a:p>
         </p:txBody>
@@ -25115,7 +22294,7 @@
                 </a:solidFill>
                 <a:latin typeface="Garamond"/>
               </a:rPr>
-              <a:t>−2.17***</a:t>
+              <a:t>−2.35***</a:t>
             </a:r>
           </a:p>
         </p:txBody>
@@ -25157,7 +22336,7 @@
                 </a:solidFill>
                 <a:latin typeface="Garamond"/>
               </a:rPr>
-              <a:t>−2.24***</a:t>
+              <a:t>−2.38***</a:t>
             </a:r>
           </a:p>
         </p:txBody>
@@ -25199,7 +22378,7 @@
                 </a:solidFill>
                 <a:latin typeface="Garamond"/>
               </a:rPr>
-              <a:t>−2.27***</a:t>
+              <a:t>−2.39***</a:t>
             </a:r>
           </a:p>
         </p:txBody>
@@ -25241,7 +22420,7 @@
                 </a:solidFill>
                 <a:latin typeface="Garamond"/>
               </a:rPr>
-              <a:t>(0.47)</a:t>
+              <a:t>(0.56)</a:t>
             </a:r>
           </a:p>
         </p:txBody>
@@ -25283,7 +22462,7 @@
                 </a:solidFill>
                 <a:latin typeface="Garamond"/>
               </a:rPr>
-              <a:t>(0.39)</a:t>
+              <a:t>(0.56)</a:t>
             </a:r>
           </a:p>
         </p:txBody>
@@ -25325,7 +22504,7 @@
                 </a:solidFill>
                 <a:latin typeface="Garamond"/>
               </a:rPr>
-              <a:t>(0.39)</a:t>
+              <a:t>(0.56)</a:t>
             </a:r>
           </a:p>
         </p:txBody>
@@ -25409,7 +22588,7 @@
                 </a:solidFill>
                 <a:latin typeface="Garamond"/>
               </a:rPr>
-              <a:t>+5.65***</a:t>
+              <a:t>+5.72***</a:t>
             </a:r>
           </a:p>
         </p:txBody>
@@ -25451,7 +22630,7 @@
                 </a:solidFill>
                 <a:latin typeface="Garamond"/>
               </a:rPr>
-              <a:t>+4.74***</a:t>
+              <a:t>+5.63***</a:t>
             </a:r>
           </a:p>
         </p:txBody>
@@ -25493,7 +22672,7 @@
                 </a:solidFill>
                 <a:latin typeface="Garamond"/>
               </a:rPr>
-              <a:t>+4.59***</a:t>
+              <a:t>+5.71***</a:t>
             </a:r>
           </a:p>
         </p:txBody>
@@ -25535,7 +22714,7 @@
                 </a:solidFill>
                 <a:latin typeface="Garamond"/>
               </a:rPr>
-              <a:t>(1.33)</a:t>
+              <a:t>(1.56)</a:t>
             </a:r>
           </a:p>
         </p:txBody>
@@ -25577,7 +22756,7 @@
                 </a:solidFill>
                 <a:latin typeface="Garamond"/>
               </a:rPr>
-              <a:t>(0.90)</a:t>
+              <a:t>(1.56)</a:t>
             </a:r>
           </a:p>
         </p:txBody>
@@ -25619,7 +22798,7 @@
                 </a:solidFill>
                 <a:latin typeface="Garamond"/>
               </a:rPr>
-              <a:t>(0.91)</a:t>
+              <a:t>(1.56)</a:t>
             </a:r>
           </a:p>
         </p:txBody>
@@ -25703,7 +22882,7 @@
                 </a:solidFill>
                 <a:latin typeface="Garamond"/>
               </a:rPr>
-              <a:t>+8.31***</a:t>
+              <a:t>+8.85***</a:t>
             </a:r>
           </a:p>
         </p:txBody>
@@ -25745,7 +22924,7 @@
                 </a:solidFill>
                 <a:latin typeface="Garamond"/>
               </a:rPr>
-              <a:t>+3.78***</a:t>
+              <a:t>+8.94***</a:t>
             </a:r>
           </a:p>
         </p:txBody>
@@ -25787,7 +22966,7 @@
                 </a:solidFill>
                 <a:latin typeface="Garamond"/>
               </a:rPr>
-              <a:t>+4.19***</a:t>
+              <a:t>+8.94***</a:t>
             </a:r>
           </a:p>
         </p:txBody>
@@ -25829,7 +23008,7 @@
                 </a:solidFill>
                 <a:latin typeface="Garamond"/>
               </a:rPr>
-              <a:t>(1.84)</a:t>
+              <a:t>(2.14)</a:t>
             </a:r>
           </a:p>
         </p:txBody>
@@ -25871,7 +23050,7 @@
                 </a:solidFill>
                 <a:latin typeface="Garamond"/>
               </a:rPr>
-              <a:t>(0.80)</a:t>
+              <a:t>(2.14)</a:t>
             </a:r>
           </a:p>
         </p:txBody>
@@ -25913,7 +23092,7 @@
                 </a:solidFill>
                 <a:latin typeface="Garamond"/>
               </a:rPr>
-              <a:t>(0.88)</a:t>
+              <a:t>(2.14)</a:t>
             </a:r>
           </a:p>
         </p:txBody>
@@ -25997,7 +23176,7 @@
                 </a:solidFill>
                 <a:latin typeface="Garamond"/>
               </a:rPr>
-              <a:t>+4.67***</a:t>
+              <a:t>+4.17***</a:t>
             </a:r>
           </a:p>
         </p:txBody>
@@ -26039,7 +23218,7 @@
                 </a:solidFill>
                 <a:latin typeface="Garamond"/>
               </a:rPr>
-              <a:t>+2.24***</a:t>
+              <a:t>+4.13***</a:t>
             </a:r>
           </a:p>
         </p:txBody>
@@ -26081,7 +23260,7 @@
                 </a:solidFill>
                 <a:latin typeface="Garamond"/>
               </a:rPr>
-              <a:t>+2.50***</a:t>
+              <a:t>+4.01***</a:t>
             </a:r>
           </a:p>
         </p:txBody>
@@ -26123,7 +23302,7 @@
                 </a:solidFill>
                 <a:latin typeface="Garamond"/>
               </a:rPr>
-              <a:t>(1.10)</a:t>
+              <a:t>(1.24)</a:t>
             </a:r>
           </a:p>
         </p:txBody>
@@ -26165,7 +23344,7 @@
                 </a:solidFill>
                 <a:latin typeface="Garamond"/>
               </a:rPr>
-              <a:t>(0.58)</a:t>
+              <a:t>(1.24)</a:t>
             </a:r>
           </a:p>
         </p:txBody>
@@ -26207,7 +23386,7 @@
                 </a:solidFill>
                 <a:latin typeface="Garamond"/>
               </a:rPr>
-              <a:t>(0.62)</a:t>
+              <a:t>(1.25)</a:t>
             </a:r>
           </a:p>
         </p:txBody>
@@ -26327,7 +23506,7 @@
                 </a:solidFill>
                 <a:latin typeface="Garamond"/>
               </a:rPr>
-              <a:t>Yes</a:t>
+              <a:t>No</a:t>
             </a:r>
           </a:p>
         </p:txBody>
@@ -26453,7 +23632,7 @@
                 </a:solidFill>
                 <a:latin typeface="Garamond"/>
               </a:rPr>
-              <a:t>Observations</a:t>
+              <a:t>State fixed effects</a:t>
             </a:r>
           </a:p>
         </p:txBody>
@@ -26495,7 +23674,7 @@
                 </a:solidFill>
                 <a:latin typeface="Garamond"/>
               </a:rPr>
-              <a:t>18,571</a:t>
+              <a:t>No</a:t>
             </a:r>
           </a:p>
         </p:txBody>
@@ -26537,7 +23716,7 @@
                 </a:solidFill>
                 <a:latin typeface="Garamond"/>
               </a:rPr>
-              <a:t>18,571</a:t>
+              <a:t>No</a:t>
             </a:r>
           </a:p>
         </p:txBody>
@@ -26579,6 +23758,174 @@
                 </a:solidFill>
                 <a:latin typeface="Garamond"/>
               </a:rPr>
+              <a:t>Yes</a:t>
+            </a:r>
+          </a:p>
+        </p:txBody>
+      </p:sp>
+      <p:sp>
+        <p:nvSpPr>
+          <p:cNvPr id="69" name="TextBox 68"/>
+          <p:cNvSpPr txBox="1"/>
+          <p:nvPr/>
+        </p:nvSpPr>
+        <p:spPr>
+          <a:xfrm>
+            <a:off x="1005840" y="5989320"/>
+            <a:ext cx="3840480" cy="274320"/>
+          </a:xfrm>
+          <a:prstGeom prst="rect">
+            <a:avLst/>
+          </a:prstGeom>
+          <a:noFill/>
+        </p:spPr>
+        <p:txBody>
+          <a:bodyPr wrap="square" lIns="0" rIns="0" tIns="0" bIns="0">
+            <a:spAutoFit/>
+          </a:bodyPr>
+          <a:lstStyle/>
+          <a:p>
+            <a:pPr algn="l">
+              <a:lnSpc>
+                <a:spcPts val="1600"/>
+              </a:lnSpc>
+              <a:spcAft>
+                <a:spcPts val="0"/>
+              </a:spcAft>
+            </a:pPr>
+            <a:r>
+              <a:rPr sz="1250" b="0" i="0">
+                <a:solidFill>
+                  <a:srgbClr val="212529"/>
+                </a:solidFill>
+                <a:latin typeface="Garamond"/>
+              </a:rPr>
+              <a:t>Observations</a:t>
+            </a:r>
+          </a:p>
+        </p:txBody>
+      </p:sp>
+      <p:sp>
+        <p:nvSpPr>
+          <p:cNvPr id="70" name="TextBox 69"/>
+          <p:cNvSpPr txBox="1"/>
+          <p:nvPr/>
+        </p:nvSpPr>
+        <p:spPr>
+          <a:xfrm>
+            <a:off x="5029200" y="5989320"/>
+            <a:ext cx="1691640" cy="274320"/>
+          </a:xfrm>
+          <a:prstGeom prst="rect">
+            <a:avLst/>
+          </a:prstGeom>
+          <a:noFill/>
+        </p:spPr>
+        <p:txBody>
+          <a:bodyPr wrap="square" lIns="0" rIns="0" tIns="0" bIns="0">
+            <a:spAutoFit/>
+          </a:bodyPr>
+          <a:lstStyle/>
+          <a:p>
+            <a:pPr algn="r">
+              <a:lnSpc>
+                <a:spcPts val="1600"/>
+              </a:lnSpc>
+              <a:spcAft>
+                <a:spcPts val="0"/>
+              </a:spcAft>
+            </a:pPr>
+            <a:r>
+              <a:rPr sz="1250" b="0" i="0">
+                <a:solidFill>
+                  <a:srgbClr val="212529"/>
+                </a:solidFill>
+                <a:latin typeface="Garamond"/>
+              </a:rPr>
+              <a:t>18,571</a:t>
+            </a:r>
+          </a:p>
+        </p:txBody>
+      </p:sp>
+      <p:sp>
+        <p:nvSpPr>
+          <p:cNvPr id="71" name="TextBox 70"/>
+          <p:cNvSpPr txBox="1"/>
+          <p:nvPr/>
+        </p:nvSpPr>
+        <p:spPr>
+          <a:xfrm>
+            <a:off x="6903720" y="5989320"/>
+            <a:ext cx="1691640" cy="274320"/>
+          </a:xfrm>
+          <a:prstGeom prst="rect">
+            <a:avLst/>
+          </a:prstGeom>
+          <a:noFill/>
+        </p:spPr>
+        <p:txBody>
+          <a:bodyPr wrap="square" lIns="0" rIns="0" tIns="0" bIns="0">
+            <a:spAutoFit/>
+          </a:bodyPr>
+          <a:lstStyle/>
+          <a:p>
+            <a:pPr algn="r">
+              <a:lnSpc>
+                <a:spcPts val="1600"/>
+              </a:lnSpc>
+              <a:spcAft>
+                <a:spcPts val="0"/>
+              </a:spcAft>
+            </a:pPr>
+            <a:r>
+              <a:rPr sz="1250" b="0" i="0">
+                <a:solidFill>
+                  <a:srgbClr val="212529"/>
+                </a:solidFill>
+                <a:latin typeface="Garamond"/>
+              </a:rPr>
+              <a:t>18,571</a:t>
+            </a:r>
+          </a:p>
+        </p:txBody>
+      </p:sp>
+      <p:sp>
+        <p:nvSpPr>
+          <p:cNvPr id="72" name="TextBox 71"/>
+          <p:cNvSpPr txBox="1"/>
+          <p:nvPr/>
+        </p:nvSpPr>
+        <p:spPr>
+          <a:xfrm>
+            <a:off x="8778240" y="5989320"/>
+            <a:ext cx="1691640" cy="274320"/>
+          </a:xfrm>
+          <a:prstGeom prst="rect">
+            <a:avLst/>
+          </a:prstGeom>
+          <a:noFill/>
+        </p:spPr>
+        <p:txBody>
+          <a:bodyPr wrap="square" lIns="0" rIns="0" tIns="0" bIns="0">
+            <a:spAutoFit/>
+          </a:bodyPr>
+          <a:lstStyle/>
+          <a:p>
+            <a:pPr algn="r">
+              <a:lnSpc>
+                <a:spcPts val="1600"/>
+              </a:lnSpc>
+              <a:spcAft>
+                <a:spcPts val="0"/>
+              </a:spcAft>
+            </a:pPr>
+            <a:r>
+              <a:rPr sz="1250" b="0" i="0">
+                <a:solidFill>
+                  <a:srgbClr val="212529"/>
+                </a:solidFill>
+                <a:latin typeface="Garamond"/>
+              </a:rPr>
               <a:t>18,571</a:t>
             </a:r>
           </a:p>
@@ -26586,13 +23933,13 @@
       </p:sp>
       <p:cxnSp>
         <p:nvCxnSpPr>
-          <p:cNvPr id="69" name="Connector 68"/>
+          <p:cNvPr id="73" name="Connector 72"/>
           <p:cNvCxnSpPr/>
           <p:nvPr/>
         </p:nvCxnSpPr>
         <p:spPr>
           <a:xfrm>
-            <a:off x="1005840" y="6007608"/>
+            <a:off x="1005840" y="6263640"/>
             <a:ext cx="9509760" cy="0"/>
           </a:xfrm>
           <a:prstGeom prst="line">
@@ -26622,13 +23969,13 @@
       </p:cxnSp>
       <p:sp>
         <p:nvSpPr>
-          <p:cNvPr id="70" name="TextBox 69"/>
-          <p:cNvSpPr txBox="1"/>
-          <p:nvPr/>
-        </p:nvSpPr>
-        <p:spPr>
-          <a:xfrm>
-            <a:off x="1005840" y="6135624"/>
+          <p:cNvPr id="74" name="TextBox 73"/>
+          <p:cNvSpPr txBox="1"/>
+          <p:nvPr/>
+        </p:nvSpPr>
+        <p:spPr>
+          <a:xfrm>
+            <a:off x="1005840" y="6391656"/>
             <a:ext cx="9509760" cy="548640"/>
           </a:xfrm>
           <a:prstGeom prst="rect">
@@ -26657,14 +24004,14 @@
                 </a:solidFill>
                 <a:latin typeface="Garamond"/>
               </a:rPr>
-              <a:t>Standard errors in parentheses, delta method for the logit and probit marginal effects. * p&lt;0.10, ** p&lt;0.05, *** p&lt;0.01. The probit column is the main specification of the coefficient plot.</a:t>
-            </a:r>
-          </a:p>
-        </p:txBody>
-      </p:sp>
-      <p:sp>
-        <p:nvSpPr>
-          <p:cNvPr id="71" name="Rounded Rectangle 70">
+              <a:t>Robust standard errors in parentheses. * p&lt;0.10, ** p&lt;0.05, *** p&lt;0.01. Weighted. Full set of controls as in the main specification.</a:t>
+            </a:r>
+          </a:p>
+        </p:txBody>
+      </p:sp>
+      <p:sp>
+        <p:nvSpPr>
+          <p:cNvPr id="75" name="Rounded Rectangle 74">
             <a:hlinkClick action="ppaction://hlinksldjump" r:id="rId2"/>
           </p:cNvPr>
           <p:cNvSpPr/>
@@ -27219,7 +24566,7 @@
                 </a:solidFill>
                 <a:latin typeface="Garamond"/>
               </a:rPr>
-              <a:t>Is the LPM bounded between 0 and 1?</a:t>
+              <a:t>LPM vs logit vs probit</a:t>
             </a:r>
           </a:p>
         </p:txBody>
@@ -27259,30 +24606,42 @@
           </a:p>
         </p:txBody>
       </p:sp>
-      <p:pic>
-        <p:nvPicPr>
-          <p:cNvPr id="4" name="Picture 3" descr="lpm_check.png"/>
-          <p:cNvPicPr>
-            <a:picLocks noChangeAspect="1"/>
-          </p:cNvPicPr>
-          <p:nvPr/>
-        </p:nvPicPr>
-        <p:blipFill>
-          <a:blip r:embed="rId2"/>
-          <a:stretch>
-            <a:fillRect/>
-          </a:stretch>
-        </p:blipFill>
-        <p:spPr>
-          <a:xfrm>
-            <a:off x="1557117" y="1024128"/>
-            <a:ext cx="9047284" cy="4480560"/>
-          </a:xfrm>
-          <a:prstGeom prst="rect">
-            <a:avLst/>
-          </a:prstGeom>
-        </p:spPr>
-      </p:pic>
+      <p:cxnSp>
+        <p:nvCxnSpPr>
+          <p:cNvPr id="4" name="Connector 3"/>
+          <p:cNvCxnSpPr/>
+          <p:nvPr/>
+        </p:nvCxnSpPr>
+        <p:spPr>
+          <a:xfrm>
+            <a:off x="1005840" y="1298448"/>
+            <a:ext cx="9509760" cy="0"/>
+          </a:xfrm>
+          <a:prstGeom prst="line">
+            <a:avLst/>
+          </a:prstGeom>
+          <a:ln w="16510">
+            <a:solidFill>
+              <a:srgbClr val="212529"/>
+            </a:solidFill>
+          </a:ln>
+          <a:effectLst/>
+        </p:spPr>
+        <p:style>
+          <a:lnRef idx="2">
+            <a:schemeClr val="accent1"/>
+          </a:lnRef>
+          <a:fillRef idx="0">
+            <a:schemeClr val="accent1"/>
+          </a:fillRef>
+          <a:effectRef idx="1">
+            <a:schemeClr val="accent1"/>
+          </a:effectRef>
+          <a:fontRef idx="minor">
+            <a:schemeClr val="tx1"/>
+          </a:fontRef>
+        </p:style>
+      </p:cxnSp>
       <p:sp>
         <p:nvSpPr>
           <p:cNvPr id="5" name="TextBox 4"/>
@@ -27291,8 +24650,248 @@
         </p:nvSpPr>
         <p:spPr>
           <a:xfrm>
-            <a:off x="822960" y="5760720"/>
-            <a:ext cx="10789920" cy="822960"/>
+            <a:off x="5029200" y="1371600"/>
+            <a:ext cx="5486400" cy="274320"/>
+          </a:xfrm>
+          <a:prstGeom prst="rect">
+            <a:avLst/>
+          </a:prstGeom>
+          <a:noFill/>
+        </p:spPr>
+        <p:txBody>
+          <a:bodyPr wrap="square" lIns="0" rIns="0" tIns="0" bIns="0">
+            <a:spAutoFit/>
+          </a:bodyPr>
+          <a:lstStyle/>
+          <a:p>
+            <a:pPr algn="ctr">
+              <a:lnSpc>
+                <a:spcPts val="1600"/>
+              </a:lnSpc>
+              <a:spcAft>
+                <a:spcPts val="0"/>
+              </a:spcAft>
+            </a:pPr>
+            <a:r>
+              <a:rPr sz="1250" b="0" i="0">
+                <a:solidFill>
+                  <a:srgbClr val="212529"/>
+                </a:solidFill>
+                <a:latin typeface="Garamond"/>
+              </a:rPr>
+              <a:t>Average marginal effect on leaving (×100)</a:t>
+            </a:r>
+          </a:p>
+        </p:txBody>
+      </p:sp>
+      <p:cxnSp>
+        <p:nvCxnSpPr>
+          <p:cNvPr id="6" name="Connector 5"/>
+          <p:cNvCxnSpPr/>
+          <p:nvPr/>
+        </p:nvCxnSpPr>
+        <p:spPr>
+          <a:xfrm>
+            <a:off x="5029200" y="1700784"/>
+            <a:ext cx="5486400" cy="0"/>
+          </a:xfrm>
+          <a:prstGeom prst="line">
+            <a:avLst/>
+          </a:prstGeom>
+          <a:ln w="8890">
+            <a:solidFill>
+              <a:srgbClr val="212529"/>
+            </a:solidFill>
+          </a:ln>
+          <a:effectLst/>
+        </p:spPr>
+        <p:style>
+          <a:lnRef idx="2">
+            <a:schemeClr val="accent1"/>
+          </a:lnRef>
+          <a:fillRef idx="0">
+            <a:schemeClr val="accent1"/>
+          </a:fillRef>
+          <a:effectRef idx="1">
+            <a:schemeClr val="accent1"/>
+          </a:effectRef>
+          <a:fontRef idx="minor">
+            <a:schemeClr val="tx1"/>
+          </a:fontRef>
+        </p:style>
+      </p:cxnSp>
+      <p:sp>
+        <p:nvSpPr>
+          <p:cNvPr id="7" name="TextBox 6"/>
+          <p:cNvSpPr txBox="1"/>
+          <p:nvPr/>
+        </p:nvSpPr>
+        <p:spPr>
+          <a:xfrm>
+            <a:off x="5029200" y="1764792"/>
+            <a:ext cx="1691640" cy="274320"/>
+          </a:xfrm>
+          <a:prstGeom prst="rect">
+            <a:avLst/>
+          </a:prstGeom>
+          <a:noFill/>
+        </p:spPr>
+        <p:txBody>
+          <a:bodyPr wrap="square" lIns="0" rIns="0" tIns="0" bIns="0">
+            <a:spAutoFit/>
+          </a:bodyPr>
+          <a:lstStyle/>
+          <a:p>
+            <a:pPr algn="r">
+              <a:lnSpc>
+                <a:spcPts val="1600"/>
+              </a:lnSpc>
+              <a:spcAft>
+                <a:spcPts val="0"/>
+              </a:spcAft>
+            </a:pPr>
+            <a:r>
+              <a:rPr sz="1250" b="1" i="0">
+                <a:solidFill>
+                  <a:srgbClr val="212529"/>
+                </a:solidFill>
+                <a:latin typeface="Garamond"/>
+              </a:rPr>
+              <a:t>LPM</a:t>
+            </a:r>
+          </a:p>
+        </p:txBody>
+      </p:sp>
+      <p:sp>
+        <p:nvSpPr>
+          <p:cNvPr id="8" name="TextBox 7"/>
+          <p:cNvSpPr txBox="1"/>
+          <p:nvPr/>
+        </p:nvSpPr>
+        <p:spPr>
+          <a:xfrm>
+            <a:off x="6903720" y="1764792"/>
+            <a:ext cx="1691640" cy="274320"/>
+          </a:xfrm>
+          <a:prstGeom prst="rect">
+            <a:avLst/>
+          </a:prstGeom>
+          <a:noFill/>
+        </p:spPr>
+        <p:txBody>
+          <a:bodyPr wrap="square" lIns="0" rIns="0" tIns="0" bIns="0">
+            <a:spAutoFit/>
+          </a:bodyPr>
+          <a:lstStyle/>
+          <a:p>
+            <a:pPr algn="r">
+              <a:lnSpc>
+                <a:spcPts val="1600"/>
+              </a:lnSpc>
+              <a:spcAft>
+                <a:spcPts val="0"/>
+              </a:spcAft>
+            </a:pPr>
+            <a:r>
+              <a:rPr sz="1250" b="1" i="0">
+                <a:solidFill>
+                  <a:srgbClr val="212529"/>
+                </a:solidFill>
+                <a:latin typeface="Garamond"/>
+              </a:rPr>
+              <a:t>Logit</a:t>
+            </a:r>
+          </a:p>
+        </p:txBody>
+      </p:sp>
+      <p:sp>
+        <p:nvSpPr>
+          <p:cNvPr id="9" name="TextBox 8"/>
+          <p:cNvSpPr txBox="1"/>
+          <p:nvPr/>
+        </p:nvSpPr>
+        <p:spPr>
+          <a:xfrm>
+            <a:off x="8778240" y="1764792"/>
+            <a:ext cx="1691640" cy="274320"/>
+          </a:xfrm>
+          <a:prstGeom prst="rect">
+            <a:avLst/>
+          </a:prstGeom>
+          <a:noFill/>
+        </p:spPr>
+        <p:txBody>
+          <a:bodyPr wrap="square" lIns="0" rIns="0" tIns="0" bIns="0">
+            <a:spAutoFit/>
+          </a:bodyPr>
+          <a:lstStyle/>
+          <a:p>
+            <a:pPr algn="r">
+              <a:lnSpc>
+                <a:spcPts val="1600"/>
+              </a:lnSpc>
+              <a:spcAft>
+                <a:spcPts val="0"/>
+              </a:spcAft>
+            </a:pPr>
+            <a:r>
+              <a:rPr sz="1250" b="1" i="0">
+                <a:solidFill>
+                  <a:srgbClr val="212529"/>
+                </a:solidFill>
+                <a:latin typeface="Garamond"/>
+              </a:rPr>
+              <a:t>Probit</a:t>
+            </a:r>
+          </a:p>
+        </p:txBody>
+      </p:sp>
+      <p:cxnSp>
+        <p:nvCxnSpPr>
+          <p:cNvPr id="10" name="Connector 9"/>
+          <p:cNvCxnSpPr/>
+          <p:nvPr/>
+        </p:nvCxnSpPr>
+        <p:spPr>
+          <a:xfrm>
+            <a:off x="1005840" y="2093976"/>
+            <a:ext cx="9509760" cy="0"/>
+          </a:xfrm>
+          <a:prstGeom prst="line">
+            <a:avLst/>
+          </a:prstGeom>
+          <a:ln w="8890">
+            <a:solidFill>
+              <a:srgbClr val="212529"/>
+            </a:solidFill>
+          </a:ln>
+          <a:effectLst/>
+        </p:spPr>
+        <p:style>
+          <a:lnRef idx="2">
+            <a:schemeClr val="accent1"/>
+          </a:lnRef>
+          <a:fillRef idx="0">
+            <a:schemeClr val="accent1"/>
+          </a:fillRef>
+          <a:effectRef idx="1">
+            <a:schemeClr val="accent1"/>
+          </a:effectRef>
+          <a:fontRef idx="minor">
+            <a:schemeClr val="tx1"/>
+          </a:fontRef>
+        </p:style>
+      </p:cxnSp>
+      <p:sp>
+        <p:nvSpPr>
+          <p:cNvPr id="11" name="TextBox 10"/>
+          <p:cNvSpPr txBox="1"/>
+          <p:nvPr/>
+        </p:nvSpPr>
+        <p:spPr>
+          <a:xfrm>
+            <a:off x="1005840" y="2176272"/>
+            <a:ext cx="3840480" cy="274320"/>
           </a:xfrm>
           <a:prstGeom prst="rect">
             <a:avLst/>
@@ -27307,37 +24906,2494 @@
           <a:p>
             <a:pPr algn="l">
               <a:lnSpc>
-                <a:spcPts val="1855"/>
-              </a:lnSpc>
-              <a:spcAft>
-                <a:spcPts val="0"/>
-              </a:spcAft>
-            </a:pPr>
-            <a:r>
-              <a:rPr sz="1450" b="1" i="0">
-                <a:solidFill>
-                  <a:srgbClr val="102D5E"/>
-                </a:solidFill>
-                <a:latin typeface="Garamond"/>
-              </a:rPr>
-              <a:t>Key message.  </a:t>
-            </a:r>
-            <a:r>
-              <a:rPr sz="1450" b="0" i="0">
+                <a:spcPts val="1600"/>
+              </a:lnSpc>
+              <a:spcAft>
+                <a:spcPts val="0"/>
+              </a:spcAft>
+            </a:pPr>
+            <a:r>
+              <a:rPr sz="1250" b="0" i="0">
                 <a:solidFill>
                   <a:srgbClr val="212529"/>
                 </a:solidFill>
                 <a:latin typeface="Garamond"/>
               </a:rPr>
-              <a:t>No. 22% of fitted values fall below zero, so the probit is the main specification and the LPM a robustness variant.</a:t>
-            </a:r>
-          </a:p>
-        </p:txBody>
-      </p:sp>
-      <p:sp>
-        <p:nvSpPr>
-          <p:cNvPr id="6" name="Rounded Rectangle 5">
-            <a:hlinkClick action="ppaction://hlinksldjump" r:id="rId3"/>
+              <a:t>Full-year contract</a:t>
+            </a:r>
+          </a:p>
+        </p:txBody>
+      </p:sp>
+      <p:sp>
+        <p:nvSpPr>
+          <p:cNvPr id="12" name="TextBox 11"/>
+          <p:cNvSpPr txBox="1"/>
+          <p:nvPr/>
+        </p:nvSpPr>
+        <p:spPr>
+          <a:xfrm>
+            <a:off x="5029200" y="2176272"/>
+            <a:ext cx="1691640" cy="274320"/>
+          </a:xfrm>
+          <a:prstGeom prst="rect">
+            <a:avLst/>
+          </a:prstGeom>
+          <a:noFill/>
+        </p:spPr>
+        <p:txBody>
+          <a:bodyPr wrap="square" lIns="0" rIns="0" tIns="0" bIns="0">
+            <a:spAutoFit/>
+          </a:bodyPr>
+          <a:lstStyle/>
+          <a:p>
+            <a:pPr algn="r">
+              <a:lnSpc>
+                <a:spcPts val="1600"/>
+              </a:lnSpc>
+              <a:spcAft>
+                <a:spcPts val="0"/>
+              </a:spcAft>
+            </a:pPr>
+            <a:r>
+              <a:rPr sz="1250" b="0" i="0">
+                <a:solidFill>
+                  <a:srgbClr val="212529"/>
+                </a:solidFill>
+                <a:latin typeface="Garamond"/>
+              </a:rPr>
+              <a:t>−11.13***</a:t>
+            </a:r>
+          </a:p>
+        </p:txBody>
+      </p:sp>
+      <p:sp>
+        <p:nvSpPr>
+          <p:cNvPr id="13" name="TextBox 12"/>
+          <p:cNvSpPr txBox="1"/>
+          <p:nvPr/>
+        </p:nvSpPr>
+        <p:spPr>
+          <a:xfrm>
+            <a:off x="6903720" y="2176272"/>
+            <a:ext cx="1691640" cy="274320"/>
+          </a:xfrm>
+          <a:prstGeom prst="rect">
+            <a:avLst/>
+          </a:prstGeom>
+          <a:noFill/>
+        </p:spPr>
+        <p:txBody>
+          <a:bodyPr wrap="square" lIns="0" rIns="0" tIns="0" bIns="0">
+            <a:spAutoFit/>
+          </a:bodyPr>
+          <a:lstStyle/>
+          <a:p>
+            <a:pPr algn="r">
+              <a:lnSpc>
+                <a:spcPts val="1600"/>
+              </a:lnSpc>
+              <a:spcAft>
+                <a:spcPts val="0"/>
+              </a:spcAft>
+            </a:pPr>
+            <a:r>
+              <a:rPr sz="1250" b="0" i="0">
+                <a:solidFill>
+                  <a:srgbClr val="212529"/>
+                </a:solidFill>
+                <a:latin typeface="Garamond"/>
+              </a:rPr>
+              <a:t>−8.78***</a:t>
+            </a:r>
+          </a:p>
+        </p:txBody>
+      </p:sp>
+      <p:sp>
+        <p:nvSpPr>
+          <p:cNvPr id="14" name="TextBox 13"/>
+          <p:cNvSpPr txBox="1"/>
+          <p:nvPr/>
+        </p:nvSpPr>
+        <p:spPr>
+          <a:xfrm>
+            <a:off x="8778240" y="2176272"/>
+            <a:ext cx="1691640" cy="274320"/>
+          </a:xfrm>
+          <a:prstGeom prst="rect">
+            <a:avLst/>
+          </a:prstGeom>
+          <a:noFill/>
+        </p:spPr>
+        <p:txBody>
+          <a:bodyPr wrap="square" lIns="0" rIns="0" tIns="0" bIns="0">
+            <a:spAutoFit/>
+          </a:bodyPr>
+          <a:lstStyle/>
+          <a:p>
+            <a:pPr algn="r">
+              <a:lnSpc>
+                <a:spcPts val="1600"/>
+              </a:lnSpc>
+              <a:spcAft>
+                <a:spcPts val="0"/>
+              </a:spcAft>
+            </a:pPr>
+            <a:r>
+              <a:rPr sz="1250" b="0" i="0">
+                <a:solidFill>
+                  <a:srgbClr val="212529"/>
+                </a:solidFill>
+                <a:latin typeface="Garamond"/>
+              </a:rPr>
+              <a:t>−8.49***</a:t>
+            </a:r>
+          </a:p>
+        </p:txBody>
+      </p:sp>
+      <p:sp>
+        <p:nvSpPr>
+          <p:cNvPr id="15" name="TextBox 14"/>
+          <p:cNvSpPr txBox="1"/>
+          <p:nvPr/>
+        </p:nvSpPr>
+        <p:spPr>
+          <a:xfrm>
+            <a:off x="5029200" y="2400300"/>
+            <a:ext cx="1691640" cy="274320"/>
+          </a:xfrm>
+          <a:prstGeom prst="rect">
+            <a:avLst/>
+          </a:prstGeom>
+          <a:noFill/>
+        </p:spPr>
+        <p:txBody>
+          <a:bodyPr wrap="square" lIns="0" rIns="0" tIns="0" bIns="0">
+            <a:spAutoFit/>
+          </a:bodyPr>
+          <a:lstStyle/>
+          <a:p>
+            <a:pPr algn="r">
+              <a:lnSpc>
+                <a:spcPts val="1408"/>
+              </a:lnSpc>
+              <a:spcAft>
+                <a:spcPts val="0"/>
+              </a:spcAft>
+            </a:pPr>
+            <a:r>
+              <a:rPr sz="1100" b="0" i="0">
+                <a:solidFill>
+                  <a:srgbClr val="6B7480"/>
+                </a:solidFill>
+                <a:latin typeface="Garamond"/>
+              </a:rPr>
+              <a:t>(0.55)</a:t>
+            </a:r>
+          </a:p>
+        </p:txBody>
+      </p:sp>
+      <p:sp>
+        <p:nvSpPr>
+          <p:cNvPr id="16" name="TextBox 15"/>
+          <p:cNvSpPr txBox="1"/>
+          <p:nvPr/>
+        </p:nvSpPr>
+        <p:spPr>
+          <a:xfrm>
+            <a:off x="6903720" y="2400300"/>
+            <a:ext cx="1691640" cy="274320"/>
+          </a:xfrm>
+          <a:prstGeom prst="rect">
+            <a:avLst/>
+          </a:prstGeom>
+          <a:noFill/>
+        </p:spPr>
+        <p:txBody>
+          <a:bodyPr wrap="square" lIns="0" rIns="0" tIns="0" bIns="0">
+            <a:spAutoFit/>
+          </a:bodyPr>
+          <a:lstStyle/>
+          <a:p>
+            <a:pPr algn="r">
+              <a:lnSpc>
+                <a:spcPts val="1408"/>
+              </a:lnSpc>
+              <a:spcAft>
+                <a:spcPts val="0"/>
+              </a:spcAft>
+            </a:pPr>
+            <a:r>
+              <a:rPr sz="1100" b="0" i="0">
+                <a:solidFill>
+                  <a:srgbClr val="6B7480"/>
+                </a:solidFill>
+                <a:latin typeface="Garamond"/>
+              </a:rPr>
+              <a:t>(0.40)</a:t>
+            </a:r>
+          </a:p>
+        </p:txBody>
+      </p:sp>
+      <p:sp>
+        <p:nvSpPr>
+          <p:cNvPr id="17" name="TextBox 16"/>
+          <p:cNvSpPr txBox="1"/>
+          <p:nvPr/>
+        </p:nvSpPr>
+        <p:spPr>
+          <a:xfrm>
+            <a:off x="8778240" y="2400300"/>
+            <a:ext cx="1691640" cy="274320"/>
+          </a:xfrm>
+          <a:prstGeom prst="rect">
+            <a:avLst/>
+          </a:prstGeom>
+          <a:noFill/>
+        </p:spPr>
+        <p:txBody>
+          <a:bodyPr wrap="square" lIns="0" rIns="0" tIns="0" bIns="0">
+            <a:spAutoFit/>
+          </a:bodyPr>
+          <a:lstStyle/>
+          <a:p>
+            <a:pPr algn="r">
+              <a:lnSpc>
+                <a:spcPts val="1408"/>
+              </a:lnSpc>
+              <a:spcAft>
+                <a:spcPts val="0"/>
+              </a:spcAft>
+            </a:pPr>
+            <a:r>
+              <a:rPr sz="1100" b="0" i="0">
+                <a:solidFill>
+                  <a:srgbClr val="6B7480"/>
+                </a:solidFill>
+                <a:latin typeface="Garamond"/>
+              </a:rPr>
+              <a:t>(0.39)</a:t>
+            </a:r>
+          </a:p>
+        </p:txBody>
+      </p:sp>
+      <p:sp>
+        <p:nvSpPr>
+          <p:cNvPr id="18" name="TextBox 17"/>
+          <p:cNvSpPr txBox="1"/>
+          <p:nvPr/>
+        </p:nvSpPr>
+        <p:spPr>
+          <a:xfrm>
+            <a:off x="1005840" y="2633472"/>
+            <a:ext cx="3840480" cy="274320"/>
+          </a:xfrm>
+          <a:prstGeom prst="rect">
+            <a:avLst/>
+          </a:prstGeom>
+          <a:noFill/>
+        </p:spPr>
+        <p:txBody>
+          <a:bodyPr wrap="square" lIns="0" rIns="0" tIns="0" bIns="0">
+            <a:spAutoFit/>
+          </a:bodyPr>
+          <a:lstStyle/>
+          <a:p>
+            <a:pPr algn="l">
+              <a:lnSpc>
+                <a:spcPts val="1600"/>
+              </a:lnSpc>
+              <a:spcAft>
+                <a:spcPts val="0"/>
+              </a:spcAft>
+            </a:pPr>
+            <a:r>
+              <a:rPr sz="1250" b="0" i="0">
+                <a:solidFill>
+                  <a:srgbClr val="212529"/>
+                </a:solidFill>
+                <a:latin typeface="Garamond"/>
+              </a:rPr>
+              <a:t>Part-time contract</a:t>
+            </a:r>
+          </a:p>
+        </p:txBody>
+      </p:sp>
+      <p:sp>
+        <p:nvSpPr>
+          <p:cNvPr id="19" name="TextBox 18"/>
+          <p:cNvSpPr txBox="1"/>
+          <p:nvPr/>
+        </p:nvSpPr>
+        <p:spPr>
+          <a:xfrm>
+            <a:off x="5029200" y="2633472"/>
+            <a:ext cx="1691640" cy="274320"/>
+          </a:xfrm>
+          <a:prstGeom prst="rect">
+            <a:avLst/>
+          </a:prstGeom>
+          <a:noFill/>
+        </p:spPr>
+        <p:txBody>
+          <a:bodyPr wrap="square" lIns="0" rIns="0" tIns="0" bIns="0">
+            <a:spAutoFit/>
+          </a:bodyPr>
+          <a:lstStyle/>
+          <a:p>
+            <a:pPr algn="r">
+              <a:lnSpc>
+                <a:spcPts val="1600"/>
+              </a:lnSpc>
+              <a:spcAft>
+                <a:spcPts val="0"/>
+              </a:spcAft>
+            </a:pPr>
+            <a:r>
+              <a:rPr sz="1250" b="0" i="0">
+                <a:solidFill>
+                  <a:srgbClr val="212529"/>
+                </a:solidFill>
+                <a:latin typeface="Garamond"/>
+              </a:rPr>
+              <a:t>+8.77***</a:t>
+            </a:r>
+          </a:p>
+        </p:txBody>
+      </p:sp>
+      <p:sp>
+        <p:nvSpPr>
+          <p:cNvPr id="20" name="TextBox 19"/>
+          <p:cNvSpPr txBox="1"/>
+          <p:nvPr/>
+        </p:nvSpPr>
+        <p:spPr>
+          <a:xfrm>
+            <a:off x="6903720" y="2633472"/>
+            <a:ext cx="1691640" cy="274320"/>
+          </a:xfrm>
+          <a:prstGeom prst="rect">
+            <a:avLst/>
+          </a:prstGeom>
+          <a:noFill/>
+        </p:spPr>
+        <p:txBody>
+          <a:bodyPr wrap="square" lIns="0" rIns="0" tIns="0" bIns="0">
+            <a:spAutoFit/>
+          </a:bodyPr>
+          <a:lstStyle/>
+          <a:p>
+            <a:pPr algn="r">
+              <a:lnSpc>
+                <a:spcPts val="1600"/>
+              </a:lnSpc>
+              <a:spcAft>
+                <a:spcPts val="0"/>
+              </a:spcAft>
+            </a:pPr>
+            <a:r>
+              <a:rPr sz="1250" b="0" i="0">
+                <a:solidFill>
+                  <a:srgbClr val="212529"/>
+                </a:solidFill>
+                <a:latin typeface="Garamond"/>
+              </a:rPr>
+              <a:t>+3.86***</a:t>
+            </a:r>
+          </a:p>
+        </p:txBody>
+      </p:sp>
+      <p:sp>
+        <p:nvSpPr>
+          <p:cNvPr id="21" name="TextBox 20"/>
+          <p:cNvSpPr txBox="1"/>
+          <p:nvPr/>
+        </p:nvSpPr>
+        <p:spPr>
+          <a:xfrm>
+            <a:off x="8778240" y="2633472"/>
+            <a:ext cx="1691640" cy="274320"/>
+          </a:xfrm>
+          <a:prstGeom prst="rect">
+            <a:avLst/>
+          </a:prstGeom>
+          <a:noFill/>
+        </p:spPr>
+        <p:txBody>
+          <a:bodyPr wrap="square" lIns="0" rIns="0" tIns="0" bIns="0">
+            <a:spAutoFit/>
+          </a:bodyPr>
+          <a:lstStyle/>
+          <a:p>
+            <a:pPr algn="r">
+              <a:lnSpc>
+                <a:spcPts val="1600"/>
+              </a:lnSpc>
+              <a:spcAft>
+                <a:spcPts val="0"/>
+              </a:spcAft>
+            </a:pPr>
+            <a:r>
+              <a:rPr sz="1250" b="0" i="0">
+                <a:solidFill>
+                  <a:srgbClr val="212529"/>
+                </a:solidFill>
+                <a:latin typeface="Garamond"/>
+              </a:rPr>
+              <a:t>+4.32***</a:t>
+            </a:r>
+          </a:p>
+        </p:txBody>
+      </p:sp>
+      <p:sp>
+        <p:nvSpPr>
+          <p:cNvPr id="22" name="TextBox 21"/>
+          <p:cNvSpPr txBox="1"/>
+          <p:nvPr/>
+        </p:nvSpPr>
+        <p:spPr>
+          <a:xfrm>
+            <a:off x="5029200" y="2857500"/>
+            <a:ext cx="1691640" cy="274320"/>
+          </a:xfrm>
+          <a:prstGeom prst="rect">
+            <a:avLst/>
+          </a:prstGeom>
+          <a:noFill/>
+        </p:spPr>
+        <p:txBody>
+          <a:bodyPr wrap="square" lIns="0" rIns="0" tIns="0" bIns="0">
+            <a:spAutoFit/>
+          </a:bodyPr>
+          <a:lstStyle/>
+          <a:p>
+            <a:pPr algn="r">
+              <a:lnSpc>
+                <a:spcPts val="1408"/>
+              </a:lnSpc>
+              <a:spcAft>
+                <a:spcPts val="0"/>
+              </a:spcAft>
+            </a:pPr>
+            <a:r>
+              <a:rPr sz="1100" b="0" i="0">
+                <a:solidFill>
+                  <a:srgbClr val="6B7480"/>
+                </a:solidFill>
+                <a:latin typeface="Garamond"/>
+              </a:rPr>
+              <a:t>(0.92)</a:t>
+            </a:r>
+          </a:p>
+        </p:txBody>
+      </p:sp>
+      <p:sp>
+        <p:nvSpPr>
+          <p:cNvPr id="23" name="TextBox 22"/>
+          <p:cNvSpPr txBox="1"/>
+          <p:nvPr/>
+        </p:nvSpPr>
+        <p:spPr>
+          <a:xfrm>
+            <a:off x="6903720" y="2857500"/>
+            <a:ext cx="1691640" cy="274320"/>
+          </a:xfrm>
+          <a:prstGeom prst="rect">
+            <a:avLst/>
+          </a:prstGeom>
+          <a:noFill/>
+        </p:spPr>
+        <p:txBody>
+          <a:bodyPr wrap="square" lIns="0" rIns="0" tIns="0" bIns="0">
+            <a:spAutoFit/>
+          </a:bodyPr>
+          <a:lstStyle/>
+          <a:p>
+            <a:pPr algn="r">
+              <a:lnSpc>
+                <a:spcPts val="1408"/>
+              </a:lnSpc>
+              <a:spcAft>
+                <a:spcPts val="0"/>
+              </a:spcAft>
+            </a:pPr>
+            <a:r>
+              <a:rPr sz="1100" b="0" i="0">
+                <a:solidFill>
+                  <a:srgbClr val="6B7480"/>
+                </a:solidFill>
+                <a:latin typeface="Garamond"/>
+              </a:rPr>
+              <a:t>(0.44)</a:t>
+            </a:r>
+          </a:p>
+        </p:txBody>
+      </p:sp>
+      <p:sp>
+        <p:nvSpPr>
+          <p:cNvPr id="24" name="TextBox 23"/>
+          <p:cNvSpPr txBox="1"/>
+          <p:nvPr/>
+        </p:nvSpPr>
+        <p:spPr>
+          <a:xfrm>
+            <a:off x="8778240" y="2857500"/>
+            <a:ext cx="1691640" cy="274320"/>
+          </a:xfrm>
+          <a:prstGeom prst="rect">
+            <a:avLst/>
+          </a:prstGeom>
+          <a:noFill/>
+        </p:spPr>
+        <p:txBody>
+          <a:bodyPr wrap="square" lIns="0" rIns="0" tIns="0" bIns="0">
+            <a:spAutoFit/>
+          </a:bodyPr>
+          <a:lstStyle/>
+          <a:p>
+            <a:pPr algn="r">
+              <a:lnSpc>
+                <a:spcPts val="1408"/>
+              </a:lnSpc>
+              <a:spcAft>
+                <a:spcPts val="0"/>
+              </a:spcAft>
+            </a:pPr>
+            <a:r>
+              <a:rPr sz="1100" b="0" i="0">
+                <a:solidFill>
+                  <a:srgbClr val="6B7480"/>
+                </a:solidFill>
+                <a:latin typeface="Garamond"/>
+              </a:rPr>
+              <a:t>(0.47)</a:t>
+            </a:r>
+          </a:p>
+        </p:txBody>
+      </p:sp>
+      <p:sp>
+        <p:nvSpPr>
+          <p:cNvPr id="25" name="TextBox 24"/>
+          <p:cNvSpPr txBox="1"/>
+          <p:nvPr/>
+        </p:nvSpPr>
+        <p:spPr>
+          <a:xfrm>
+            <a:off x="1005840" y="3090672"/>
+            <a:ext cx="3840480" cy="274320"/>
+          </a:xfrm>
+          <a:prstGeom prst="rect">
+            <a:avLst/>
+          </a:prstGeom>
+          <a:noFill/>
+        </p:spPr>
+        <p:txBody>
+          <a:bodyPr wrap="square" lIns="0" rIns="0" tIns="0" bIns="0">
+            <a:spAutoFit/>
+          </a:bodyPr>
+          <a:lstStyle/>
+          <a:p>
+            <a:pPr algn="l">
+              <a:lnSpc>
+                <a:spcPts val="1600"/>
+              </a:lnSpc>
+              <a:spcAft>
+                <a:spcPts val="0"/>
+              </a:spcAft>
+            </a:pPr>
+            <a:r>
+              <a:rPr sz="1250" b="0" i="0">
+                <a:solidFill>
+                  <a:srgbClr val="212529"/>
+                </a:solidFill>
+                <a:latin typeface="Garamond"/>
+              </a:rPr>
+              <a:t>Employer pension plan</a:t>
+            </a:r>
+          </a:p>
+        </p:txBody>
+      </p:sp>
+      <p:sp>
+        <p:nvSpPr>
+          <p:cNvPr id="26" name="TextBox 25"/>
+          <p:cNvSpPr txBox="1"/>
+          <p:nvPr/>
+        </p:nvSpPr>
+        <p:spPr>
+          <a:xfrm>
+            <a:off x="5029200" y="3090672"/>
+            <a:ext cx="1691640" cy="274320"/>
+          </a:xfrm>
+          <a:prstGeom prst="rect">
+            <a:avLst/>
+          </a:prstGeom>
+          <a:noFill/>
+        </p:spPr>
+        <p:txBody>
+          <a:bodyPr wrap="square" lIns="0" rIns="0" tIns="0" bIns="0">
+            <a:spAutoFit/>
+          </a:bodyPr>
+          <a:lstStyle/>
+          <a:p>
+            <a:pPr algn="r">
+              <a:lnSpc>
+                <a:spcPts val="1600"/>
+              </a:lnSpc>
+              <a:spcAft>
+                <a:spcPts val="0"/>
+              </a:spcAft>
+            </a:pPr>
+            <a:r>
+              <a:rPr sz="1250" b="0" i="0">
+                <a:solidFill>
+                  <a:srgbClr val="212529"/>
+                </a:solidFill>
+                <a:latin typeface="Garamond"/>
+              </a:rPr>
+              <a:t>−2.55***</a:t>
+            </a:r>
+          </a:p>
+        </p:txBody>
+      </p:sp>
+      <p:sp>
+        <p:nvSpPr>
+          <p:cNvPr id="27" name="TextBox 26"/>
+          <p:cNvSpPr txBox="1"/>
+          <p:nvPr/>
+        </p:nvSpPr>
+        <p:spPr>
+          <a:xfrm>
+            <a:off x="6903720" y="3090672"/>
+            <a:ext cx="1691640" cy="274320"/>
+          </a:xfrm>
+          <a:prstGeom prst="rect">
+            <a:avLst/>
+          </a:prstGeom>
+          <a:noFill/>
+        </p:spPr>
+        <p:txBody>
+          <a:bodyPr wrap="square" lIns="0" rIns="0" tIns="0" bIns="0">
+            <a:spAutoFit/>
+          </a:bodyPr>
+          <a:lstStyle/>
+          <a:p>
+            <a:pPr algn="r">
+              <a:lnSpc>
+                <a:spcPts val="1600"/>
+              </a:lnSpc>
+              <a:spcAft>
+                <a:spcPts val="0"/>
+              </a:spcAft>
+            </a:pPr>
+            <a:r>
+              <a:rPr sz="1250" b="0" i="0">
+                <a:solidFill>
+                  <a:srgbClr val="212529"/>
+                </a:solidFill>
+                <a:latin typeface="Garamond"/>
+              </a:rPr>
+              <a:t>−2.38***</a:t>
+            </a:r>
+          </a:p>
+        </p:txBody>
+      </p:sp>
+      <p:sp>
+        <p:nvSpPr>
+          <p:cNvPr id="28" name="TextBox 27"/>
+          <p:cNvSpPr txBox="1"/>
+          <p:nvPr/>
+        </p:nvSpPr>
+        <p:spPr>
+          <a:xfrm>
+            <a:off x="8778240" y="3090672"/>
+            <a:ext cx="1691640" cy="274320"/>
+          </a:xfrm>
+          <a:prstGeom prst="rect">
+            <a:avLst/>
+          </a:prstGeom>
+          <a:noFill/>
+        </p:spPr>
+        <p:txBody>
+          <a:bodyPr wrap="square" lIns="0" rIns="0" tIns="0" bIns="0">
+            <a:spAutoFit/>
+          </a:bodyPr>
+          <a:lstStyle/>
+          <a:p>
+            <a:pPr algn="r">
+              <a:lnSpc>
+                <a:spcPts val="1600"/>
+              </a:lnSpc>
+              <a:spcAft>
+                <a:spcPts val="0"/>
+              </a:spcAft>
+            </a:pPr>
+            <a:r>
+              <a:rPr sz="1250" b="0" i="0">
+                <a:solidFill>
+                  <a:srgbClr val="212529"/>
+                </a:solidFill>
+                <a:latin typeface="Garamond"/>
+              </a:rPr>
+              <a:t>−2.41***</a:t>
+            </a:r>
+          </a:p>
+        </p:txBody>
+      </p:sp>
+      <p:sp>
+        <p:nvSpPr>
+          <p:cNvPr id="29" name="TextBox 28"/>
+          <p:cNvSpPr txBox="1"/>
+          <p:nvPr/>
+        </p:nvSpPr>
+        <p:spPr>
+          <a:xfrm>
+            <a:off x="5029200" y="3314700"/>
+            <a:ext cx="1691640" cy="274320"/>
+          </a:xfrm>
+          <a:prstGeom prst="rect">
+            <a:avLst/>
+          </a:prstGeom>
+          <a:noFill/>
+        </p:spPr>
+        <p:txBody>
+          <a:bodyPr wrap="square" lIns="0" rIns="0" tIns="0" bIns="0">
+            <a:spAutoFit/>
+          </a:bodyPr>
+          <a:lstStyle/>
+          <a:p>
+            <a:pPr algn="r">
+              <a:lnSpc>
+                <a:spcPts val="1408"/>
+              </a:lnSpc>
+              <a:spcAft>
+                <a:spcPts val="0"/>
+              </a:spcAft>
+            </a:pPr>
+            <a:r>
+              <a:rPr sz="1100" b="0" i="0">
+                <a:solidFill>
+                  <a:srgbClr val="6B7480"/>
+                </a:solidFill>
+                <a:latin typeface="Garamond"/>
+              </a:rPr>
+              <a:t>(0.44)</a:t>
+            </a:r>
+          </a:p>
+        </p:txBody>
+      </p:sp>
+      <p:sp>
+        <p:nvSpPr>
+          <p:cNvPr id="30" name="TextBox 29"/>
+          <p:cNvSpPr txBox="1"/>
+          <p:nvPr/>
+        </p:nvSpPr>
+        <p:spPr>
+          <a:xfrm>
+            <a:off x="6903720" y="3314700"/>
+            <a:ext cx="1691640" cy="274320"/>
+          </a:xfrm>
+          <a:prstGeom prst="rect">
+            <a:avLst/>
+          </a:prstGeom>
+          <a:noFill/>
+        </p:spPr>
+        <p:txBody>
+          <a:bodyPr wrap="square" lIns="0" rIns="0" tIns="0" bIns="0">
+            <a:spAutoFit/>
+          </a:bodyPr>
+          <a:lstStyle/>
+          <a:p>
+            <a:pPr algn="r">
+              <a:lnSpc>
+                <a:spcPts val="1408"/>
+              </a:lnSpc>
+              <a:spcAft>
+                <a:spcPts val="0"/>
+              </a:spcAft>
+            </a:pPr>
+            <a:r>
+              <a:rPr sz="1100" b="0" i="0">
+                <a:solidFill>
+                  <a:srgbClr val="6B7480"/>
+                </a:solidFill>
+                <a:latin typeface="Garamond"/>
+              </a:rPr>
+              <a:t>(0.39)</a:t>
+            </a:r>
+          </a:p>
+        </p:txBody>
+      </p:sp>
+      <p:sp>
+        <p:nvSpPr>
+          <p:cNvPr id="31" name="TextBox 30"/>
+          <p:cNvSpPr txBox="1"/>
+          <p:nvPr/>
+        </p:nvSpPr>
+        <p:spPr>
+          <a:xfrm>
+            <a:off x="8778240" y="3314700"/>
+            <a:ext cx="1691640" cy="274320"/>
+          </a:xfrm>
+          <a:prstGeom prst="rect">
+            <a:avLst/>
+          </a:prstGeom>
+          <a:noFill/>
+        </p:spPr>
+        <p:txBody>
+          <a:bodyPr wrap="square" lIns="0" rIns="0" tIns="0" bIns="0">
+            <a:spAutoFit/>
+          </a:bodyPr>
+          <a:lstStyle/>
+          <a:p>
+            <a:pPr algn="r">
+              <a:lnSpc>
+                <a:spcPts val="1408"/>
+              </a:lnSpc>
+              <a:spcAft>
+                <a:spcPts val="0"/>
+              </a:spcAft>
+            </a:pPr>
+            <a:r>
+              <a:rPr sz="1100" b="0" i="0">
+                <a:solidFill>
+                  <a:srgbClr val="6B7480"/>
+                </a:solidFill>
+                <a:latin typeface="Garamond"/>
+              </a:rPr>
+              <a:t>(0.38)</a:t>
+            </a:r>
+          </a:p>
+        </p:txBody>
+      </p:sp>
+      <p:sp>
+        <p:nvSpPr>
+          <p:cNvPr id="32" name="TextBox 31"/>
+          <p:cNvSpPr txBox="1"/>
+          <p:nvPr/>
+        </p:nvSpPr>
+        <p:spPr>
+          <a:xfrm>
+            <a:off x="1005840" y="3547872"/>
+            <a:ext cx="3840480" cy="274320"/>
+          </a:xfrm>
+          <a:prstGeom prst="rect">
+            <a:avLst/>
+          </a:prstGeom>
+          <a:noFill/>
+        </p:spPr>
+        <p:txBody>
+          <a:bodyPr wrap="square" lIns="0" rIns="0" tIns="0" bIns="0">
+            <a:spAutoFit/>
+          </a:bodyPr>
+          <a:lstStyle/>
+          <a:p>
+            <a:pPr algn="l">
+              <a:lnSpc>
+                <a:spcPts val="1600"/>
+              </a:lnSpc>
+              <a:spcAft>
+                <a:spcPts val="0"/>
+              </a:spcAft>
+            </a:pPr>
+            <a:r>
+              <a:rPr sz="1250" b="0" i="0">
+                <a:solidFill>
+                  <a:srgbClr val="212529"/>
+                </a:solidFill>
+                <a:latin typeface="Garamond"/>
+              </a:rPr>
+              <a:t>Public sector</a:t>
+            </a:r>
+          </a:p>
+        </p:txBody>
+      </p:sp>
+      <p:sp>
+        <p:nvSpPr>
+          <p:cNvPr id="33" name="TextBox 32"/>
+          <p:cNvSpPr txBox="1"/>
+          <p:nvPr/>
+        </p:nvSpPr>
+        <p:spPr>
+          <a:xfrm>
+            <a:off x="5029200" y="3547872"/>
+            <a:ext cx="1691640" cy="274320"/>
+          </a:xfrm>
+          <a:prstGeom prst="rect">
+            <a:avLst/>
+          </a:prstGeom>
+          <a:noFill/>
+        </p:spPr>
+        <p:txBody>
+          <a:bodyPr wrap="square" lIns="0" rIns="0" tIns="0" bIns="0">
+            <a:spAutoFit/>
+          </a:bodyPr>
+          <a:lstStyle/>
+          <a:p>
+            <a:pPr algn="r">
+              <a:lnSpc>
+                <a:spcPts val="1600"/>
+              </a:lnSpc>
+              <a:spcAft>
+                <a:spcPts val="0"/>
+              </a:spcAft>
+            </a:pPr>
+            <a:r>
+              <a:rPr sz="1250" b="0" i="0">
+                <a:solidFill>
+                  <a:srgbClr val="212529"/>
+                </a:solidFill>
+                <a:latin typeface="Garamond"/>
+              </a:rPr>
+              <a:t>−2.17***</a:t>
+            </a:r>
+          </a:p>
+        </p:txBody>
+      </p:sp>
+      <p:sp>
+        <p:nvSpPr>
+          <p:cNvPr id="34" name="TextBox 33"/>
+          <p:cNvSpPr txBox="1"/>
+          <p:nvPr/>
+        </p:nvSpPr>
+        <p:spPr>
+          <a:xfrm>
+            <a:off x="6903720" y="3547872"/>
+            <a:ext cx="1691640" cy="274320"/>
+          </a:xfrm>
+          <a:prstGeom prst="rect">
+            <a:avLst/>
+          </a:prstGeom>
+          <a:noFill/>
+        </p:spPr>
+        <p:txBody>
+          <a:bodyPr wrap="square" lIns="0" rIns="0" tIns="0" bIns="0">
+            <a:spAutoFit/>
+          </a:bodyPr>
+          <a:lstStyle/>
+          <a:p>
+            <a:pPr algn="r">
+              <a:lnSpc>
+                <a:spcPts val="1600"/>
+              </a:lnSpc>
+              <a:spcAft>
+                <a:spcPts val="0"/>
+              </a:spcAft>
+            </a:pPr>
+            <a:r>
+              <a:rPr sz="1250" b="0" i="0">
+                <a:solidFill>
+                  <a:srgbClr val="212529"/>
+                </a:solidFill>
+                <a:latin typeface="Garamond"/>
+              </a:rPr>
+              <a:t>−2.24***</a:t>
+            </a:r>
+          </a:p>
+        </p:txBody>
+      </p:sp>
+      <p:sp>
+        <p:nvSpPr>
+          <p:cNvPr id="35" name="TextBox 34"/>
+          <p:cNvSpPr txBox="1"/>
+          <p:nvPr/>
+        </p:nvSpPr>
+        <p:spPr>
+          <a:xfrm>
+            <a:off x="8778240" y="3547872"/>
+            <a:ext cx="1691640" cy="274320"/>
+          </a:xfrm>
+          <a:prstGeom prst="rect">
+            <a:avLst/>
+          </a:prstGeom>
+          <a:noFill/>
+        </p:spPr>
+        <p:txBody>
+          <a:bodyPr wrap="square" lIns="0" rIns="0" tIns="0" bIns="0">
+            <a:spAutoFit/>
+          </a:bodyPr>
+          <a:lstStyle/>
+          <a:p>
+            <a:pPr algn="r">
+              <a:lnSpc>
+                <a:spcPts val="1600"/>
+              </a:lnSpc>
+              <a:spcAft>
+                <a:spcPts val="0"/>
+              </a:spcAft>
+            </a:pPr>
+            <a:r>
+              <a:rPr sz="1250" b="0" i="0">
+                <a:solidFill>
+                  <a:srgbClr val="212529"/>
+                </a:solidFill>
+                <a:latin typeface="Garamond"/>
+              </a:rPr>
+              <a:t>−2.27***</a:t>
+            </a:r>
+          </a:p>
+        </p:txBody>
+      </p:sp>
+      <p:sp>
+        <p:nvSpPr>
+          <p:cNvPr id="36" name="TextBox 35"/>
+          <p:cNvSpPr txBox="1"/>
+          <p:nvPr/>
+        </p:nvSpPr>
+        <p:spPr>
+          <a:xfrm>
+            <a:off x="5029200" y="3771900"/>
+            <a:ext cx="1691640" cy="274320"/>
+          </a:xfrm>
+          <a:prstGeom prst="rect">
+            <a:avLst/>
+          </a:prstGeom>
+          <a:noFill/>
+        </p:spPr>
+        <p:txBody>
+          <a:bodyPr wrap="square" lIns="0" rIns="0" tIns="0" bIns="0">
+            <a:spAutoFit/>
+          </a:bodyPr>
+          <a:lstStyle/>
+          <a:p>
+            <a:pPr algn="r">
+              <a:lnSpc>
+                <a:spcPts val="1408"/>
+              </a:lnSpc>
+              <a:spcAft>
+                <a:spcPts val="0"/>
+              </a:spcAft>
+            </a:pPr>
+            <a:r>
+              <a:rPr sz="1100" b="0" i="0">
+                <a:solidFill>
+                  <a:srgbClr val="6B7480"/>
+                </a:solidFill>
+                <a:latin typeface="Garamond"/>
+              </a:rPr>
+              <a:t>(0.47)</a:t>
+            </a:r>
+          </a:p>
+        </p:txBody>
+      </p:sp>
+      <p:sp>
+        <p:nvSpPr>
+          <p:cNvPr id="37" name="TextBox 36"/>
+          <p:cNvSpPr txBox="1"/>
+          <p:nvPr/>
+        </p:nvSpPr>
+        <p:spPr>
+          <a:xfrm>
+            <a:off x="6903720" y="3771900"/>
+            <a:ext cx="1691640" cy="274320"/>
+          </a:xfrm>
+          <a:prstGeom prst="rect">
+            <a:avLst/>
+          </a:prstGeom>
+          <a:noFill/>
+        </p:spPr>
+        <p:txBody>
+          <a:bodyPr wrap="square" lIns="0" rIns="0" tIns="0" bIns="0">
+            <a:spAutoFit/>
+          </a:bodyPr>
+          <a:lstStyle/>
+          <a:p>
+            <a:pPr algn="r">
+              <a:lnSpc>
+                <a:spcPts val="1408"/>
+              </a:lnSpc>
+              <a:spcAft>
+                <a:spcPts val="0"/>
+              </a:spcAft>
+            </a:pPr>
+            <a:r>
+              <a:rPr sz="1100" b="0" i="0">
+                <a:solidFill>
+                  <a:srgbClr val="6B7480"/>
+                </a:solidFill>
+                <a:latin typeface="Garamond"/>
+              </a:rPr>
+              <a:t>(0.39)</a:t>
+            </a:r>
+          </a:p>
+        </p:txBody>
+      </p:sp>
+      <p:sp>
+        <p:nvSpPr>
+          <p:cNvPr id="38" name="TextBox 37"/>
+          <p:cNvSpPr txBox="1"/>
+          <p:nvPr/>
+        </p:nvSpPr>
+        <p:spPr>
+          <a:xfrm>
+            <a:off x="8778240" y="3771900"/>
+            <a:ext cx="1691640" cy="274320"/>
+          </a:xfrm>
+          <a:prstGeom prst="rect">
+            <a:avLst/>
+          </a:prstGeom>
+          <a:noFill/>
+        </p:spPr>
+        <p:txBody>
+          <a:bodyPr wrap="square" lIns="0" rIns="0" tIns="0" bIns="0">
+            <a:spAutoFit/>
+          </a:bodyPr>
+          <a:lstStyle/>
+          <a:p>
+            <a:pPr algn="r">
+              <a:lnSpc>
+                <a:spcPts val="1408"/>
+              </a:lnSpc>
+              <a:spcAft>
+                <a:spcPts val="0"/>
+              </a:spcAft>
+            </a:pPr>
+            <a:r>
+              <a:rPr sz="1100" b="0" i="0">
+                <a:solidFill>
+                  <a:srgbClr val="6B7480"/>
+                </a:solidFill>
+                <a:latin typeface="Garamond"/>
+              </a:rPr>
+              <a:t>(0.39)</a:t>
+            </a:r>
+          </a:p>
+        </p:txBody>
+      </p:sp>
+      <p:sp>
+        <p:nvSpPr>
+          <p:cNvPr id="39" name="TextBox 38"/>
+          <p:cNvSpPr txBox="1"/>
+          <p:nvPr/>
+        </p:nvSpPr>
+        <p:spPr>
+          <a:xfrm>
+            <a:off x="1005840" y="4005072"/>
+            <a:ext cx="3840480" cy="274320"/>
+          </a:xfrm>
+          <a:prstGeom prst="rect">
+            <a:avLst/>
+          </a:prstGeom>
+          <a:noFill/>
+        </p:spPr>
+        <p:txBody>
+          <a:bodyPr wrap="square" lIns="0" rIns="0" tIns="0" bIns="0">
+            <a:spAutoFit/>
+          </a:bodyPr>
+          <a:lstStyle/>
+          <a:p>
+            <a:pPr algn="l">
+              <a:lnSpc>
+                <a:spcPts val="1600"/>
+              </a:lnSpc>
+              <a:spcAft>
+                <a:spcPts val="0"/>
+              </a:spcAft>
+            </a:pPr>
+            <a:r>
+              <a:rPr sz="1250" b="0" i="0">
+                <a:solidFill>
+                  <a:srgbClr val="212529"/>
+                </a:solidFill>
+                <a:latin typeface="Garamond"/>
+              </a:rPr>
+              <a:t>New baby during the year</a:t>
+            </a:r>
+          </a:p>
+        </p:txBody>
+      </p:sp>
+      <p:sp>
+        <p:nvSpPr>
+          <p:cNvPr id="40" name="TextBox 39"/>
+          <p:cNvSpPr txBox="1"/>
+          <p:nvPr/>
+        </p:nvSpPr>
+        <p:spPr>
+          <a:xfrm>
+            <a:off x="5029200" y="4005072"/>
+            <a:ext cx="1691640" cy="274320"/>
+          </a:xfrm>
+          <a:prstGeom prst="rect">
+            <a:avLst/>
+          </a:prstGeom>
+          <a:noFill/>
+        </p:spPr>
+        <p:txBody>
+          <a:bodyPr wrap="square" lIns="0" rIns="0" tIns="0" bIns="0">
+            <a:spAutoFit/>
+          </a:bodyPr>
+          <a:lstStyle/>
+          <a:p>
+            <a:pPr algn="r">
+              <a:lnSpc>
+                <a:spcPts val="1600"/>
+              </a:lnSpc>
+              <a:spcAft>
+                <a:spcPts val="0"/>
+              </a:spcAft>
+            </a:pPr>
+            <a:r>
+              <a:rPr sz="1250" b="0" i="0">
+                <a:solidFill>
+                  <a:srgbClr val="212529"/>
+                </a:solidFill>
+                <a:latin typeface="Garamond"/>
+              </a:rPr>
+              <a:t>+5.65***</a:t>
+            </a:r>
+          </a:p>
+        </p:txBody>
+      </p:sp>
+      <p:sp>
+        <p:nvSpPr>
+          <p:cNvPr id="41" name="TextBox 40"/>
+          <p:cNvSpPr txBox="1"/>
+          <p:nvPr/>
+        </p:nvSpPr>
+        <p:spPr>
+          <a:xfrm>
+            <a:off x="6903720" y="4005072"/>
+            <a:ext cx="1691640" cy="274320"/>
+          </a:xfrm>
+          <a:prstGeom prst="rect">
+            <a:avLst/>
+          </a:prstGeom>
+          <a:noFill/>
+        </p:spPr>
+        <p:txBody>
+          <a:bodyPr wrap="square" lIns="0" rIns="0" tIns="0" bIns="0">
+            <a:spAutoFit/>
+          </a:bodyPr>
+          <a:lstStyle/>
+          <a:p>
+            <a:pPr algn="r">
+              <a:lnSpc>
+                <a:spcPts val="1600"/>
+              </a:lnSpc>
+              <a:spcAft>
+                <a:spcPts val="0"/>
+              </a:spcAft>
+            </a:pPr>
+            <a:r>
+              <a:rPr sz="1250" b="0" i="0">
+                <a:solidFill>
+                  <a:srgbClr val="212529"/>
+                </a:solidFill>
+                <a:latin typeface="Garamond"/>
+              </a:rPr>
+              <a:t>+4.74***</a:t>
+            </a:r>
+          </a:p>
+        </p:txBody>
+      </p:sp>
+      <p:sp>
+        <p:nvSpPr>
+          <p:cNvPr id="42" name="TextBox 41"/>
+          <p:cNvSpPr txBox="1"/>
+          <p:nvPr/>
+        </p:nvSpPr>
+        <p:spPr>
+          <a:xfrm>
+            <a:off x="8778240" y="4005072"/>
+            <a:ext cx="1691640" cy="274320"/>
+          </a:xfrm>
+          <a:prstGeom prst="rect">
+            <a:avLst/>
+          </a:prstGeom>
+          <a:noFill/>
+        </p:spPr>
+        <p:txBody>
+          <a:bodyPr wrap="square" lIns="0" rIns="0" tIns="0" bIns="0">
+            <a:spAutoFit/>
+          </a:bodyPr>
+          <a:lstStyle/>
+          <a:p>
+            <a:pPr algn="r">
+              <a:lnSpc>
+                <a:spcPts val="1600"/>
+              </a:lnSpc>
+              <a:spcAft>
+                <a:spcPts val="0"/>
+              </a:spcAft>
+            </a:pPr>
+            <a:r>
+              <a:rPr sz="1250" b="0" i="0">
+                <a:solidFill>
+                  <a:srgbClr val="212529"/>
+                </a:solidFill>
+                <a:latin typeface="Garamond"/>
+              </a:rPr>
+              <a:t>+4.59***</a:t>
+            </a:r>
+          </a:p>
+        </p:txBody>
+      </p:sp>
+      <p:sp>
+        <p:nvSpPr>
+          <p:cNvPr id="43" name="TextBox 42"/>
+          <p:cNvSpPr txBox="1"/>
+          <p:nvPr/>
+        </p:nvSpPr>
+        <p:spPr>
+          <a:xfrm>
+            <a:off x="5029200" y="4229100"/>
+            <a:ext cx="1691640" cy="274320"/>
+          </a:xfrm>
+          <a:prstGeom prst="rect">
+            <a:avLst/>
+          </a:prstGeom>
+          <a:noFill/>
+        </p:spPr>
+        <p:txBody>
+          <a:bodyPr wrap="square" lIns="0" rIns="0" tIns="0" bIns="0">
+            <a:spAutoFit/>
+          </a:bodyPr>
+          <a:lstStyle/>
+          <a:p>
+            <a:pPr algn="r">
+              <a:lnSpc>
+                <a:spcPts val="1408"/>
+              </a:lnSpc>
+              <a:spcAft>
+                <a:spcPts val="0"/>
+              </a:spcAft>
+            </a:pPr>
+            <a:r>
+              <a:rPr sz="1100" b="0" i="0">
+                <a:solidFill>
+                  <a:srgbClr val="6B7480"/>
+                </a:solidFill>
+                <a:latin typeface="Garamond"/>
+              </a:rPr>
+              <a:t>(1.33)</a:t>
+            </a:r>
+          </a:p>
+        </p:txBody>
+      </p:sp>
+      <p:sp>
+        <p:nvSpPr>
+          <p:cNvPr id="44" name="TextBox 43"/>
+          <p:cNvSpPr txBox="1"/>
+          <p:nvPr/>
+        </p:nvSpPr>
+        <p:spPr>
+          <a:xfrm>
+            <a:off x="6903720" y="4229100"/>
+            <a:ext cx="1691640" cy="274320"/>
+          </a:xfrm>
+          <a:prstGeom prst="rect">
+            <a:avLst/>
+          </a:prstGeom>
+          <a:noFill/>
+        </p:spPr>
+        <p:txBody>
+          <a:bodyPr wrap="square" lIns="0" rIns="0" tIns="0" bIns="0">
+            <a:spAutoFit/>
+          </a:bodyPr>
+          <a:lstStyle/>
+          <a:p>
+            <a:pPr algn="r">
+              <a:lnSpc>
+                <a:spcPts val="1408"/>
+              </a:lnSpc>
+              <a:spcAft>
+                <a:spcPts val="0"/>
+              </a:spcAft>
+            </a:pPr>
+            <a:r>
+              <a:rPr sz="1100" b="0" i="0">
+                <a:solidFill>
+                  <a:srgbClr val="6B7480"/>
+                </a:solidFill>
+                <a:latin typeface="Garamond"/>
+              </a:rPr>
+              <a:t>(0.90)</a:t>
+            </a:r>
+          </a:p>
+        </p:txBody>
+      </p:sp>
+      <p:sp>
+        <p:nvSpPr>
+          <p:cNvPr id="45" name="TextBox 44"/>
+          <p:cNvSpPr txBox="1"/>
+          <p:nvPr/>
+        </p:nvSpPr>
+        <p:spPr>
+          <a:xfrm>
+            <a:off x="8778240" y="4229100"/>
+            <a:ext cx="1691640" cy="274320"/>
+          </a:xfrm>
+          <a:prstGeom prst="rect">
+            <a:avLst/>
+          </a:prstGeom>
+          <a:noFill/>
+        </p:spPr>
+        <p:txBody>
+          <a:bodyPr wrap="square" lIns="0" rIns="0" tIns="0" bIns="0">
+            <a:spAutoFit/>
+          </a:bodyPr>
+          <a:lstStyle/>
+          <a:p>
+            <a:pPr algn="r">
+              <a:lnSpc>
+                <a:spcPts val="1408"/>
+              </a:lnSpc>
+              <a:spcAft>
+                <a:spcPts val="0"/>
+              </a:spcAft>
+            </a:pPr>
+            <a:r>
+              <a:rPr sz="1100" b="0" i="0">
+                <a:solidFill>
+                  <a:srgbClr val="6B7480"/>
+                </a:solidFill>
+                <a:latin typeface="Garamond"/>
+              </a:rPr>
+              <a:t>(0.91)</a:t>
+            </a:r>
+          </a:p>
+        </p:txBody>
+      </p:sp>
+      <p:sp>
+        <p:nvSpPr>
+          <p:cNvPr id="46" name="TextBox 45"/>
+          <p:cNvSpPr txBox="1"/>
+          <p:nvPr/>
+        </p:nvSpPr>
+        <p:spPr>
+          <a:xfrm>
+            <a:off x="1005840" y="4462272"/>
+            <a:ext cx="3840480" cy="274320"/>
+          </a:xfrm>
+          <a:prstGeom prst="rect">
+            <a:avLst/>
+          </a:prstGeom>
+          <a:noFill/>
+        </p:spPr>
+        <p:txBody>
+          <a:bodyPr wrap="square" lIns="0" rIns="0" tIns="0" bIns="0">
+            <a:spAutoFit/>
+          </a:bodyPr>
+          <a:lstStyle/>
+          <a:p>
+            <a:pPr algn="l">
+              <a:lnSpc>
+                <a:spcPts val="1600"/>
+              </a:lnSpc>
+              <a:spcAft>
+                <a:spcPts val="0"/>
+              </a:spcAft>
+            </a:pPr>
+            <a:r>
+              <a:rPr sz="1250" b="0" i="0">
+                <a:solidFill>
+                  <a:srgbClr val="212529"/>
+                </a:solidFill>
+                <a:latin typeface="Garamond"/>
+              </a:rPr>
+              <a:t>With a disability</a:t>
+            </a:r>
+          </a:p>
+        </p:txBody>
+      </p:sp>
+      <p:sp>
+        <p:nvSpPr>
+          <p:cNvPr id="47" name="TextBox 46"/>
+          <p:cNvSpPr txBox="1"/>
+          <p:nvPr/>
+        </p:nvSpPr>
+        <p:spPr>
+          <a:xfrm>
+            <a:off x="5029200" y="4462272"/>
+            <a:ext cx="1691640" cy="274320"/>
+          </a:xfrm>
+          <a:prstGeom prst="rect">
+            <a:avLst/>
+          </a:prstGeom>
+          <a:noFill/>
+        </p:spPr>
+        <p:txBody>
+          <a:bodyPr wrap="square" lIns="0" rIns="0" tIns="0" bIns="0">
+            <a:spAutoFit/>
+          </a:bodyPr>
+          <a:lstStyle/>
+          <a:p>
+            <a:pPr algn="r">
+              <a:lnSpc>
+                <a:spcPts val="1600"/>
+              </a:lnSpc>
+              <a:spcAft>
+                <a:spcPts val="0"/>
+              </a:spcAft>
+            </a:pPr>
+            <a:r>
+              <a:rPr sz="1250" b="0" i="0">
+                <a:solidFill>
+                  <a:srgbClr val="212529"/>
+                </a:solidFill>
+                <a:latin typeface="Garamond"/>
+              </a:rPr>
+              <a:t>+8.31***</a:t>
+            </a:r>
+          </a:p>
+        </p:txBody>
+      </p:sp>
+      <p:sp>
+        <p:nvSpPr>
+          <p:cNvPr id="48" name="TextBox 47"/>
+          <p:cNvSpPr txBox="1"/>
+          <p:nvPr/>
+        </p:nvSpPr>
+        <p:spPr>
+          <a:xfrm>
+            <a:off x="6903720" y="4462272"/>
+            <a:ext cx="1691640" cy="274320"/>
+          </a:xfrm>
+          <a:prstGeom prst="rect">
+            <a:avLst/>
+          </a:prstGeom>
+          <a:noFill/>
+        </p:spPr>
+        <p:txBody>
+          <a:bodyPr wrap="square" lIns="0" rIns="0" tIns="0" bIns="0">
+            <a:spAutoFit/>
+          </a:bodyPr>
+          <a:lstStyle/>
+          <a:p>
+            <a:pPr algn="r">
+              <a:lnSpc>
+                <a:spcPts val="1600"/>
+              </a:lnSpc>
+              <a:spcAft>
+                <a:spcPts val="0"/>
+              </a:spcAft>
+            </a:pPr>
+            <a:r>
+              <a:rPr sz="1250" b="0" i="0">
+                <a:solidFill>
+                  <a:srgbClr val="212529"/>
+                </a:solidFill>
+                <a:latin typeface="Garamond"/>
+              </a:rPr>
+              <a:t>+3.78***</a:t>
+            </a:r>
+          </a:p>
+        </p:txBody>
+      </p:sp>
+      <p:sp>
+        <p:nvSpPr>
+          <p:cNvPr id="49" name="TextBox 48"/>
+          <p:cNvSpPr txBox="1"/>
+          <p:nvPr/>
+        </p:nvSpPr>
+        <p:spPr>
+          <a:xfrm>
+            <a:off x="8778240" y="4462272"/>
+            <a:ext cx="1691640" cy="274320"/>
+          </a:xfrm>
+          <a:prstGeom prst="rect">
+            <a:avLst/>
+          </a:prstGeom>
+          <a:noFill/>
+        </p:spPr>
+        <p:txBody>
+          <a:bodyPr wrap="square" lIns="0" rIns="0" tIns="0" bIns="0">
+            <a:spAutoFit/>
+          </a:bodyPr>
+          <a:lstStyle/>
+          <a:p>
+            <a:pPr algn="r">
+              <a:lnSpc>
+                <a:spcPts val="1600"/>
+              </a:lnSpc>
+              <a:spcAft>
+                <a:spcPts val="0"/>
+              </a:spcAft>
+            </a:pPr>
+            <a:r>
+              <a:rPr sz="1250" b="0" i="0">
+                <a:solidFill>
+                  <a:srgbClr val="212529"/>
+                </a:solidFill>
+                <a:latin typeface="Garamond"/>
+              </a:rPr>
+              <a:t>+4.19***</a:t>
+            </a:r>
+          </a:p>
+        </p:txBody>
+      </p:sp>
+      <p:sp>
+        <p:nvSpPr>
+          <p:cNvPr id="50" name="TextBox 49"/>
+          <p:cNvSpPr txBox="1"/>
+          <p:nvPr/>
+        </p:nvSpPr>
+        <p:spPr>
+          <a:xfrm>
+            <a:off x="5029200" y="4686300"/>
+            <a:ext cx="1691640" cy="274320"/>
+          </a:xfrm>
+          <a:prstGeom prst="rect">
+            <a:avLst/>
+          </a:prstGeom>
+          <a:noFill/>
+        </p:spPr>
+        <p:txBody>
+          <a:bodyPr wrap="square" lIns="0" rIns="0" tIns="0" bIns="0">
+            <a:spAutoFit/>
+          </a:bodyPr>
+          <a:lstStyle/>
+          <a:p>
+            <a:pPr algn="r">
+              <a:lnSpc>
+                <a:spcPts val="1408"/>
+              </a:lnSpc>
+              <a:spcAft>
+                <a:spcPts val="0"/>
+              </a:spcAft>
+            </a:pPr>
+            <a:r>
+              <a:rPr sz="1100" b="0" i="0">
+                <a:solidFill>
+                  <a:srgbClr val="6B7480"/>
+                </a:solidFill>
+                <a:latin typeface="Garamond"/>
+              </a:rPr>
+              <a:t>(1.84)</a:t>
+            </a:r>
+          </a:p>
+        </p:txBody>
+      </p:sp>
+      <p:sp>
+        <p:nvSpPr>
+          <p:cNvPr id="51" name="TextBox 50"/>
+          <p:cNvSpPr txBox="1"/>
+          <p:nvPr/>
+        </p:nvSpPr>
+        <p:spPr>
+          <a:xfrm>
+            <a:off x="6903720" y="4686300"/>
+            <a:ext cx="1691640" cy="274320"/>
+          </a:xfrm>
+          <a:prstGeom prst="rect">
+            <a:avLst/>
+          </a:prstGeom>
+          <a:noFill/>
+        </p:spPr>
+        <p:txBody>
+          <a:bodyPr wrap="square" lIns="0" rIns="0" tIns="0" bIns="0">
+            <a:spAutoFit/>
+          </a:bodyPr>
+          <a:lstStyle/>
+          <a:p>
+            <a:pPr algn="r">
+              <a:lnSpc>
+                <a:spcPts val="1408"/>
+              </a:lnSpc>
+              <a:spcAft>
+                <a:spcPts val="0"/>
+              </a:spcAft>
+            </a:pPr>
+            <a:r>
+              <a:rPr sz="1100" b="0" i="0">
+                <a:solidFill>
+                  <a:srgbClr val="6B7480"/>
+                </a:solidFill>
+                <a:latin typeface="Garamond"/>
+              </a:rPr>
+              <a:t>(0.80)</a:t>
+            </a:r>
+          </a:p>
+        </p:txBody>
+      </p:sp>
+      <p:sp>
+        <p:nvSpPr>
+          <p:cNvPr id="52" name="TextBox 51"/>
+          <p:cNvSpPr txBox="1"/>
+          <p:nvPr/>
+        </p:nvSpPr>
+        <p:spPr>
+          <a:xfrm>
+            <a:off x="8778240" y="4686300"/>
+            <a:ext cx="1691640" cy="274320"/>
+          </a:xfrm>
+          <a:prstGeom prst="rect">
+            <a:avLst/>
+          </a:prstGeom>
+          <a:noFill/>
+        </p:spPr>
+        <p:txBody>
+          <a:bodyPr wrap="square" lIns="0" rIns="0" tIns="0" bIns="0">
+            <a:spAutoFit/>
+          </a:bodyPr>
+          <a:lstStyle/>
+          <a:p>
+            <a:pPr algn="r">
+              <a:lnSpc>
+                <a:spcPts val="1408"/>
+              </a:lnSpc>
+              <a:spcAft>
+                <a:spcPts val="0"/>
+              </a:spcAft>
+            </a:pPr>
+            <a:r>
+              <a:rPr sz="1100" b="0" i="0">
+                <a:solidFill>
+                  <a:srgbClr val="6B7480"/>
+                </a:solidFill>
+                <a:latin typeface="Garamond"/>
+              </a:rPr>
+              <a:t>(0.88)</a:t>
+            </a:r>
+          </a:p>
+        </p:txBody>
+      </p:sp>
+      <p:sp>
+        <p:nvSpPr>
+          <p:cNvPr id="53" name="TextBox 52"/>
+          <p:cNvSpPr txBox="1"/>
+          <p:nvPr/>
+        </p:nvSpPr>
+        <p:spPr>
+          <a:xfrm>
+            <a:off x="1005840" y="4919472"/>
+            <a:ext cx="3840480" cy="274320"/>
+          </a:xfrm>
+          <a:prstGeom prst="rect">
+            <a:avLst/>
+          </a:prstGeom>
+          <a:noFill/>
+        </p:spPr>
+        <p:txBody>
+          <a:bodyPr wrap="square" lIns="0" rIns="0" tIns="0" bIns="0">
+            <a:spAutoFit/>
+          </a:bodyPr>
+          <a:lstStyle/>
+          <a:p>
+            <a:pPr algn="l">
+              <a:lnSpc>
+                <a:spcPts val="1600"/>
+              </a:lnSpc>
+              <a:spcAft>
+                <a:spcPts val="0"/>
+              </a:spcAft>
+            </a:pPr>
+            <a:r>
+              <a:rPr sz="1250" b="0" i="0">
+                <a:solidFill>
+                  <a:srgbClr val="212529"/>
+                </a:solidFill>
+                <a:latin typeface="Garamond"/>
+              </a:rPr>
+              <a:t>Bottom-quartile household income</a:t>
+            </a:r>
+          </a:p>
+        </p:txBody>
+      </p:sp>
+      <p:sp>
+        <p:nvSpPr>
+          <p:cNvPr id="54" name="TextBox 53"/>
+          <p:cNvSpPr txBox="1"/>
+          <p:nvPr/>
+        </p:nvSpPr>
+        <p:spPr>
+          <a:xfrm>
+            <a:off x="5029200" y="4919472"/>
+            <a:ext cx="1691640" cy="274320"/>
+          </a:xfrm>
+          <a:prstGeom prst="rect">
+            <a:avLst/>
+          </a:prstGeom>
+          <a:noFill/>
+        </p:spPr>
+        <p:txBody>
+          <a:bodyPr wrap="square" lIns="0" rIns="0" tIns="0" bIns="0">
+            <a:spAutoFit/>
+          </a:bodyPr>
+          <a:lstStyle/>
+          <a:p>
+            <a:pPr algn="r">
+              <a:lnSpc>
+                <a:spcPts val="1600"/>
+              </a:lnSpc>
+              <a:spcAft>
+                <a:spcPts val="0"/>
+              </a:spcAft>
+            </a:pPr>
+            <a:r>
+              <a:rPr sz="1250" b="0" i="0">
+                <a:solidFill>
+                  <a:srgbClr val="212529"/>
+                </a:solidFill>
+                <a:latin typeface="Garamond"/>
+              </a:rPr>
+              <a:t>+4.67***</a:t>
+            </a:r>
+          </a:p>
+        </p:txBody>
+      </p:sp>
+      <p:sp>
+        <p:nvSpPr>
+          <p:cNvPr id="55" name="TextBox 54"/>
+          <p:cNvSpPr txBox="1"/>
+          <p:nvPr/>
+        </p:nvSpPr>
+        <p:spPr>
+          <a:xfrm>
+            <a:off x="6903720" y="4919472"/>
+            <a:ext cx="1691640" cy="274320"/>
+          </a:xfrm>
+          <a:prstGeom prst="rect">
+            <a:avLst/>
+          </a:prstGeom>
+          <a:noFill/>
+        </p:spPr>
+        <p:txBody>
+          <a:bodyPr wrap="square" lIns="0" rIns="0" tIns="0" bIns="0">
+            <a:spAutoFit/>
+          </a:bodyPr>
+          <a:lstStyle/>
+          <a:p>
+            <a:pPr algn="r">
+              <a:lnSpc>
+                <a:spcPts val="1600"/>
+              </a:lnSpc>
+              <a:spcAft>
+                <a:spcPts val="0"/>
+              </a:spcAft>
+            </a:pPr>
+            <a:r>
+              <a:rPr sz="1250" b="0" i="0">
+                <a:solidFill>
+                  <a:srgbClr val="212529"/>
+                </a:solidFill>
+                <a:latin typeface="Garamond"/>
+              </a:rPr>
+              <a:t>+2.24***</a:t>
+            </a:r>
+          </a:p>
+        </p:txBody>
+      </p:sp>
+      <p:sp>
+        <p:nvSpPr>
+          <p:cNvPr id="56" name="TextBox 55"/>
+          <p:cNvSpPr txBox="1"/>
+          <p:nvPr/>
+        </p:nvSpPr>
+        <p:spPr>
+          <a:xfrm>
+            <a:off x="8778240" y="4919472"/>
+            <a:ext cx="1691640" cy="274320"/>
+          </a:xfrm>
+          <a:prstGeom prst="rect">
+            <a:avLst/>
+          </a:prstGeom>
+          <a:noFill/>
+        </p:spPr>
+        <p:txBody>
+          <a:bodyPr wrap="square" lIns="0" rIns="0" tIns="0" bIns="0">
+            <a:spAutoFit/>
+          </a:bodyPr>
+          <a:lstStyle/>
+          <a:p>
+            <a:pPr algn="r">
+              <a:lnSpc>
+                <a:spcPts val="1600"/>
+              </a:lnSpc>
+              <a:spcAft>
+                <a:spcPts val="0"/>
+              </a:spcAft>
+            </a:pPr>
+            <a:r>
+              <a:rPr sz="1250" b="0" i="0">
+                <a:solidFill>
+                  <a:srgbClr val="212529"/>
+                </a:solidFill>
+                <a:latin typeface="Garamond"/>
+              </a:rPr>
+              <a:t>+2.50***</a:t>
+            </a:r>
+          </a:p>
+        </p:txBody>
+      </p:sp>
+      <p:sp>
+        <p:nvSpPr>
+          <p:cNvPr id="57" name="TextBox 56"/>
+          <p:cNvSpPr txBox="1"/>
+          <p:nvPr/>
+        </p:nvSpPr>
+        <p:spPr>
+          <a:xfrm>
+            <a:off x="5029200" y="5143500"/>
+            <a:ext cx="1691640" cy="274320"/>
+          </a:xfrm>
+          <a:prstGeom prst="rect">
+            <a:avLst/>
+          </a:prstGeom>
+          <a:noFill/>
+        </p:spPr>
+        <p:txBody>
+          <a:bodyPr wrap="square" lIns="0" rIns="0" tIns="0" bIns="0">
+            <a:spAutoFit/>
+          </a:bodyPr>
+          <a:lstStyle/>
+          <a:p>
+            <a:pPr algn="r">
+              <a:lnSpc>
+                <a:spcPts val="1408"/>
+              </a:lnSpc>
+              <a:spcAft>
+                <a:spcPts val="0"/>
+              </a:spcAft>
+            </a:pPr>
+            <a:r>
+              <a:rPr sz="1100" b="0" i="0">
+                <a:solidFill>
+                  <a:srgbClr val="6B7480"/>
+                </a:solidFill>
+                <a:latin typeface="Garamond"/>
+              </a:rPr>
+              <a:t>(1.10)</a:t>
+            </a:r>
+          </a:p>
+        </p:txBody>
+      </p:sp>
+      <p:sp>
+        <p:nvSpPr>
+          <p:cNvPr id="58" name="TextBox 57"/>
+          <p:cNvSpPr txBox="1"/>
+          <p:nvPr/>
+        </p:nvSpPr>
+        <p:spPr>
+          <a:xfrm>
+            <a:off x="6903720" y="5143500"/>
+            <a:ext cx="1691640" cy="274320"/>
+          </a:xfrm>
+          <a:prstGeom prst="rect">
+            <a:avLst/>
+          </a:prstGeom>
+          <a:noFill/>
+        </p:spPr>
+        <p:txBody>
+          <a:bodyPr wrap="square" lIns="0" rIns="0" tIns="0" bIns="0">
+            <a:spAutoFit/>
+          </a:bodyPr>
+          <a:lstStyle/>
+          <a:p>
+            <a:pPr algn="r">
+              <a:lnSpc>
+                <a:spcPts val="1408"/>
+              </a:lnSpc>
+              <a:spcAft>
+                <a:spcPts val="0"/>
+              </a:spcAft>
+            </a:pPr>
+            <a:r>
+              <a:rPr sz="1100" b="0" i="0">
+                <a:solidFill>
+                  <a:srgbClr val="6B7480"/>
+                </a:solidFill>
+                <a:latin typeface="Garamond"/>
+              </a:rPr>
+              <a:t>(0.58)</a:t>
+            </a:r>
+          </a:p>
+        </p:txBody>
+      </p:sp>
+      <p:sp>
+        <p:nvSpPr>
+          <p:cNvPr id="59" name="TextBox 58"/>
+          <p:cNvSpPr txBox="1"/>
+          <p:nvPr/>
+        </p:nvSpPr>
+        <p:spPr>
+          <a:xfrm>
+            <a:off x="8778240" y="5143500"/>
+            <a:ext cx="1691640" cy="274320"/>
+          </a:xfrm>
+          <a:prstGeom prst="rect">
+            <a:avLst/>
+          </a:prstGeom>
+          <a:noFill/>
+        </p:spPr>
+        <p:txBody>
+          <a:bodyPr wrap="square" lIns="0" rIns="0" tIns="0" bIns="0">
+            <a:spAutoFit/>
+          </a:bodyPr>
+          <a:lstStyle/>
+          <a:p>
+            <a:pPr algn="r">
+              <a:lnSpc>
+                <a:spcPts val="1408"/>
+              </a:lnSpc>
+              <a:spcAft>
+                <a:spcPts val="0"/>
+              </a:spcAft>
+            </a:pPr>
+            <a:r>
+              <a:rPr sz="1100" b="0" i="0">
+                <a:solidFill>
+                  <a:srgbClr val="6B7480"/>
+                </a:solidFill>
+                <a:latin typeface="Garamond"/>
+              </a:rPr>
+              <a:t>(0.62)</a:t>
+            </a:r>
+          </a:p>
+        </p:txBody>
+      </p:sp>
+      <p:cxnSp>
+        <p:nvCxnSpPr>
+          <p:cNvPr id="60" name="Connector 59"/>
+          <p:cNvCxnSpPr/>
+          <p:nvPr/>
+        </p:nvCxnSpPr>
+        <p:spPr>
+          <a:xfrm>
+            <a:off x="1005840" y="5394959"/>
+            <a:ext cx="9509760" cy="0"/>
+          </a:xfrm>
+          <a:prstGeom prst="line">
+            <a:avLst/>
+          </a:prstGeom>
+          <a:ln w="8890">
+            <a:solidFill>
+              <a:srgbClr val="212529"/>
+            </a:solidFill>
+          </a:ln>
+          <a:effectLst/>
+        </p:spPr>
+        <p:style>
+          <a:lnRef idx="2">
+            <a:schemeClr val="accent1"/>
+          </a:lnRef>
+          <a:fillRef idx="0">
+            <a:schemeClr val="accent1"/>
+          </a:fillRef>
+          <a:effectRef idx="1">
+            <a:schemeClr val="accent1"/>
+          </a:effectRef>
+          <a:fontRef idx="minor">
+            <a:schemeClr val="tx1"/>
+          </a:fontRef>
+        </p:style>
+      </p:cxnSp>
+      <p:sp>
+        <p:nvSpPr>
+          <p:cNvPr id="61" name="TextBox 60"/>
+          <p:cNvSpPr txBox="1"/>
+          <p:nvPr/>
+        </p:nvSpPr>
+        <p:spPr>
+          <a:xfrm>
+            <a:off x="1005840" y="5477256"/>
+            <a:ext cx="3840480" cy="274320"/>
+          </a:xfrm>
+          <a:prstGeom prst="rect">
+            <a:avLst/>
+          </a:prstGeom>
+          <a:noFill/>
+        </p:spPr>
+        <p:txBody>
+          <a:bodyPr wrap="square" lIns="0" rIns="0" tIns="0" bIns="0">
+            <a:spAutoFit/>
+          </a:bodyPr>
+          <a:lstStyle/>
+          <a:p>
+            <a:pPr algn="l">
+              <a:lnSpc>
+                <a:spcPts val="1600"/>
+              </a:lnSpc>
+              <a:spcAft>
+                <a:spcPts val="0"/>
+              </a:spcAft>
+            </a:pPr>
+            <a:r>
+              <a:rPr sz="1250" b="0" i="0">
+                <a:solidFill>
+                  <a:srgbClr val="212529"/>
+                </a:solidFill>
+                <a:latin typeface="Garamond"/>
+              </a:rPr>
+              <a:t>Year fixed effects</a:t>
+            </a:r>
+          </a:p>
+        </p:txBody>
+      </p:sp>
+      <p:sp>
+        <p:nvSpPr>
+          <p:cNvPr id="62" name="TextBox 61"/>
+          <p:cNvSpPr txBox="1"/>
+          <p:nvPr/>
+        </p:nvSpPr>
+        <p:spPr>
+          <a:xfrm>
+            <a:off x="5029200" y="5477256"/>
+            <a:ext cx="1691640" cy="274320"/>
+          </a:xfrm>
+          <a:prstGeom prst="rect">
+            <a:avLst/>
+          </a:prstGeom>
+          <a:noFill/>
+        </p:spPr>
+        <p:txBody>
+          <a:bodyPr wrap="square" lIns="0" rIns="0" tIns="0" bIns="0">
+            <a:spAutoFit/>
+          </a:bodyPr>
+          <a:lstStyle/>
+          <a:p>
+            <a:pPr algn="r">
+              <a:lnSpc>
+                <a:spcPts val="1600"/>
+              </a:lnSpc>
+              <a:spcAft>
+                <a:spcPts val="0"/>
+              </a:spcAft>
+            </a:pPr>
+            <a:r>
+              <a:rPr sz="1250" b="0" i="0">
+                <a:solidFill>
+                  <a:srgbClr val="212529"/>
+                </a:solidFill>
+                <a:latin typeface="Garamond"/>
+              </a:rPr>
+              <a:t>Yes</a:t>
+            </a:r>
+          </a:p>
+        </p:txBody>
+      </p:sp>
+      <p:sp>
+        <p:nvSpPr>
+          <p:cNvPr id="63" name="TextBox 62"/>
+          <p:cNvSpPr txBox="1"/>
+          <p:nvPr/>
+        </p:nvSpPr>
+        <p:spPr>
+          <a:xfrm>
+            <a:off x="6903720" y="5477256"/>
+            <a:ext cx="1691640" cy="274320"/>
+          </a:xfrm>
+          <a:prstGeom prst="rect">
+            <a:avLst/>
+          </a:prstGeom>
+          <a:noFill/>
+        </p:spPr>
+        <p:txBody>
+          <a:bodyPr wrap="square" lIns="0" rIns="0" tIns="0" bIns="0">
+            <a:spAutoFit/>
+          </a:bodyPr>
+          <a:lstStyle/>
+          <a:p>
+            <a:pPr algn="r">
+              <a:lnSpc>
+                <a:spcPts val="1600"/>
+              </a:lnSpc>
+              <a:spcAft>
+                <a:spcPts val="0"/>
+              </a:spcAft>
+            </a:pPr>
+            <a:r>
+              <a:rPr sz="1250" b="0" i="0">
+                <a:solidFill>
+                  <a:srgbClr val="212529"/>
+                </a:solidFill>
+                <a:latin typeface="Garamond"/>
+              </a:rPr>
+              <a:t>Yes</a:t>
+            </a:r>
+          </a:p>
+        </p:txBody>
+      </p:sp>
+      <p:sp>
+        <p:nvSpPr>
+          <p:cNvPr id="64" name="TextBox 63"/>
+          <p:cNvSpPr txBox="1"/>
+          <p:nvPr/>
+        </p:nvSpPr>
+        <p:spPr>
+          <a:xfrm>
+            <a:off x="8778240" y="5477256"/>
+            <a:ext cx="1691640" cy="274320"/>
+          </a:xfrm>
+          <a:prstGeom prst="rect">
+            <a:avLst/>
+          </a:prstGeom>
+          <a:noFill/>
+        </p:spPr>
+        <p:txBody>
+          <a:bodyPr wrap="square" lIns="0" rIns="0" tIns="0" bIns="0">
+            <a:spAutoFit/>
+          </a:bodyPr>
+          <a:lstStyle/>
+          <a:p>
+            <a:pPr algn="r">
+              <a:lnSpc>
+                <a:spcPts val="1600"/>
+              </a:lnSpc>
+              <a:spcAft>
+                <a:spcPts val="0"/>
+              </a:spcAft>
+            </a:pPr>
+            <a:r>
+              <a:rPr sz="1250" b="0" i="0">
+                <a:solidFill>
+                  <a:srgbClr val="212529"/>
+                </a:solidFill>
+                <a:latin typeface="Garamond"/>
+              </a:rPr>
+              <a:t>Yes</a:t>
+            </a:r>
+          </a:p>
+        </p:txBody>
+      </p:sp>
+      <p:sp>
+        <p:nvSpPr>
+          <p:cNvPr id="65" name="TextBox 64"/>
+          <p:cNvSpPr txBox="1"/>
+          <p:nvPr/>
+        </p:nvSpPr>
+        <p:spPr>
+          <a:xfrm>
+            <a:off x="1005840" y="5733288"/>
+            <a:ext cx="3840480" cy="274320"/>
+          </a:xfrm>
+          <a:prstGeom prst="rect">
+            <a:avLst/>
+          </a:prstGeom>
+          <a:noFill/>
+        </p:spPr>
+        <p:txBody>
+          <a:bodyPr wrap="square" lIns="0" rIns="0" tIns="0" bIns="0">
+            <a:spAutoFit/>
+          </a:bodyPr>
+          <a:lstStyle/>
+          <a:p>
+            <a:pPr algn="l">
+              <a:lnSpc>
+                <a:spcPts val="1600"/>
+              </a:lnSpc>
+              <a:spcAft>
+                <a:spcPts val="0"/>
+              </a:spcAft>
+            </a:pPr>
+            <a:r>
+              <a:rPr sz="1250" b="0" i="0">
+                <a:solidFill>
+                  <a:srgbClr val="212529"/>
+                </a:solidFill>
+                <a:latin typeface="Garamond"/>
+              </a:rPr>
+              <a:t>Observations</a:t>
+            </a:r>
+          </a:p>
+        </p:txBody>
+      </p:sp>
+      <p:sp>
+        <p:nvSpPr>
+          <p:cNvPr id="66" name="TextBox 65"/>
+          <p:cNvSpPr txBox="1"/>
+          <p:nvPr/>
+        </p:nvSpPr>
+        <p:spPr>
+          <a:xfrm>
+            <a:off x="5029200" y="5733288"/>
+            <a:ext cx="1691640" cy="274320"/>
+          </a:xfrm>
+          <a:prstGeom prst="rect">
+            <a:avLst/>
+          </a:prstGeom>
+          <a:noFill/>
+        </p:spPr>
+        <p:txBody>
+          <a:bodyPr wrap="square" lIns="0" rIns="0" tIns="0" bIns="0">
+            <a:spAutoFit/>
+          </a:bodyPr>
+          <a:lstStyle/>
+          <a:p>
+            <a:pPr algn="r">
+              <a:lnSpc>
+                <a:spcPts val="1600"/>
+              </a:lnSpc>
+              <a:spcAft>
+                <a:spcPts val="0"/>
+              </a:spcAft>
+            </a:pPr>
+            <a:r>
+              <a:rPr sz="1250" b="0" i="0">
+                <a:solidFill>
+                  <a:srgbClr val="212529"/>
+                </a:solidFill>
+                <a:latin typeface="Garamond"/>
+              </a:rPr>
+              <a:t>18,571</a:t>
+            </a:r>
+          </a:p>
+        </p:txBody>
+      </p:sp>
+      <p:sp>
+        <p:nvSpPr>
+          <p:cNvPr id="67" name="TextBox 66"/>
+          <p:cNvSpPr txBox="1"/>
+          <p:nvPr/>
+        </p:nvSpPr>
+        <p:spPr>
+          <a:xfrm>
+            <a:off x="6903720" y="5733288"/>
+            <a:ext cx="1691640" cy="274320"/>
+          </a:xfrm>
+          <a:prstGeom prst="rect">
+            <a:avLst/>
+          </a:prstGeom>
+          <a:noFill/>
+        </p:spPr>
+        <p:txBody>
+          <a:bodyPr wrap="square" lIns="0" rIns="0" tIns="0" bIns="0">
+            <a:spAutoFit/>
+          </a:bodyPr>
+          <a:lstStyle/>
+          <a:p>
+            <a:pPr algn="r">
+              <a:lnSpc>
+                <a:spcPts val="1600"/>
+              </a:lnSpc>
+              <a:spcAft>
+                <a:spcPts val="0"/>
+              </a:spcAft>
+            </a:pPr>
+            <a:r>
+              <a:rPr sz="1250" b="0" i="0">
+                <a:solidFill>
+                  <a:srgbClr val="212529"/>
+                </a:solidFill>
+                <a:latin typeface="Garamond"/>
+              </a:rPr>
+              <a:t>18,571</a:t>
+            </a:r>
+          </a:p>
+        </p:txBody>
+      </p:sp>
+      <p:sp>
+        <p:nvSpPr>
+          <p:cNvPr id="68" name="TextBox 67"/>
+          <p:cNvSpPr txBox="1"/>
+          <p:nvPr/>
+        </p:nvSpPr>
+        <p:spPr>
+          <a:xfrm>
+            <a:off x="8778240" y="5733288"/>
+            <a:ext cx="1691640" cy="274320"/>
+          </a:xfrm>
+          <a:prstGeom prst="rect">
+            <a:avLst/>
+          </a:prstGeom>
+          <a:noFill/>
+        </p:spPr>
+        <p:txBody>
+          <a:bodyPr wrap="square" lIns="0" rIns="0" tIns="0" bIns="0">
+            <a:spAutoFit/>
+          </a:bodyPr>
+          <a:lstStyle/>
+          <a:p>
+            <a:pPr algn="r">
+              <a:lnSpc>
+                <a:spcPts val="1600"/>
+              </a:lnSpc>
+              <a:spcAft>
+                <a:spcPts val="0"/>
+              </a:spcAft>
+            </a:pPr>
+            <a:r>
+              <a:rPr sz="1250" b="0" i="0">
+                <a:solidFill>
+                  <a:srgbClr val="212529"/>
+                </a:solidFill>
+                <a:latin typeface="Garamond"/>
+              </a:rPr>
+              <a:t>18,571</a:t>
+            </a:r>
+          </a:p>
+        </p:txBody>
+      </p:sp>
+      <p:cxnSp>
+        <p:nvCxnSpPr>
+          <p:cNvPr id="69" name="Connector 68"/>
+          <p:cNvCxnSpPr/>
+          <p:nvPr/>
+        </p:nvCxnSpPr>
+        <p:spPr>
+          <a:xfrm>
+            <a:off x="1005840" y="6007608"/>
+            <a:ext cx="9509760" cy="0"/>
+          </a:xfrm>
+          <a:prstGeom prst="line">
+            <a:avLst/>
+          </a:prstGeom>
+          <a:ln w="16510">
+            <a:solidFill>
+              <a:srgbClr val="212529"/>
+            </a:solidFill>
+          </a:ln>
+          <a:effectLst/>
+        </p:spPr>
+        <p:style>
+          <a:lnRef idx="2">
+            <a:schemeClr val="accent1"/>
+          </a:lnRef>
+          <a:fillRef idx="0">
+            <a:schemeClr val="accent1"/>
+          </a:fillRef>
+          <a:effectRef idx="1">
+            <a:schemeClr val="accent1"/>
+          </a:effectRef>
+          <a:fontRef idx="minor">
+            <a:schemeClr val="tx1"/>
+          </a:fontRef>
+        </p:style>
+      </p:cxnSp>
+      <p:sp>
+        <p:nvSpPr>
+          <p:cNvPr id="70" name="TextBox 69"/>
+          <p:cNvSpPr txBox="1"/>
+          <p:nvPr/>
+        </p:nvSpPr>
+        <p:spPr>
+          <a:xfrm>
+            <a:off x="1005840" y="6135624"/>
+            <a:ext cx="9509760" cy="548640"/>
+          </a:xfrm>
+          <a:prstGeom prst="rect">
+            <a:avLst/>
+          </a:prstGeom>
+          <a:noFill/>
+        </p:spPr>
+        <p:txBody>
+          <a:bodyPr wrap="square" lIns="0" rIns="0" tIns="0" bIns="0">
+            <a:spAutoFit/>
+          </a:bodyPr>
+          <a:lstStyle/>
+          <a:p>
+            <a:pPr algn="l">
+              <a:lnSpc>
+                <a:spcPts val="1344"/>
+              </a:lnSpc>
+              <a:spcAft>
+                <a:spcPts val="0"/>
+              </a:spcAft>
+            </a:pPr>
+            <a:r>
+              <a:rPr sz="1050" b="0" i="1">
+                <a:solidFill>
+                  <a:srgbClr val="6B7480"/>
+                </a:solidFill>
+                <a:latin typeface="Garamond"/>
+              </a:rPr>
+              <a:t>Standard errors in parentheses, delta method for the logit and probit marginal effects. * p&lt;0.10, ** p&lt;0.05, *** p&lt;0.01. The probit column is the main specification of the coefficient plot.</a:t>
+            </a:r>
+          </a:p>
+        </p:txBody>
+      </p:sp>
+      <p:sp>
+        <p:nvSpPr>
+          <p:cNvPr id="71" name="Rounded Rectangle 70">
+            <a:hlinkClick action="ppaction://hlinksldjump" r:id="rId2"/>
           </p:cNvPr>
           <p:cNvSpPr/>
           <p:nvPr/>
@@ -27443,7 +27499,7 @@
                 </a:solidFill>
                 <a:latin typeface="Garamond"/>
               </a:rPr>
-              <a:t>What the CPS observes, of why teachers leave</a:t>
+              <a:t>Is the LPM bounded between 0 and 1?</a:t>
             </a:r>
           </a:p>
         </p:txBody>
@@ -27479,6 +27535,230 @@
                 <a:latin typeface="Garamond"/>
               </a:rPr>
               <a:t>51</a:t>
+            </a:r>
+          </a:p>
+        </p:txBody>
+      </p:sp>
+      <p:pic>
+        <p:nvPicPr>
+          <p:cNvPr id="4" name="Picture 3" descr="lpm_check.png"/>
+          <p:cNvPicPr>
+            <a:picLocks noChangeAspect="1"/>
+          </p:cNvPicPr>
+          <p:nvPr/>
+        </p:nvPicPr>
+        <p:blipFill>
+          <a:blip r:embed="rId2"/>
+          <a:stretch>
+            <a:fillRect/>
+          </a:stretch>
+        </p:blipFill>
+        <p:spPr>
+          <a:xfrm>
+            <a:off x="1557117" y="1024128"/>
+            <a:ext cx="9047284" cy="4480560"/>
+          </a:xfrm>
+          <a:prstGeom prst="rect">
+            <a:avLst/>
+          </a:prstGeom>
+        </p:spPr>
+      </p:pic>
+      <p:sp>
+        <p:nvSpPr>
+          <p:cNvPr id="5" name="TextBox 4"/>
+          <p:cNvSpPr txBox="1"/>
+          <p:nvPr/>
+        </p:nvSpPr>
+        <p:spPr>
+          <a:xfrm>
+            <a:off x="822960" y="5760720"/>
+            <a:ext cx="10789920" cy="822960"/>
+          </a:xfrm>
+          <a:prstGeom prst="rect">
+            <a:avLst/>
+          </a:prstGeom>
+          <a:noFill/>
+        </p:spPr>
+        <p:txBody>
+          <a:bodyPr wrap="square" lIns="0" rIns="0" tIns="0" bIns="0">
+            <a:spAutoFit/>
+          </a:bodyPr>
+          <a:lstStyle/>
+          <a:p>
+            <a:pPr algn="l">
+              <a:lnSpc>
+                <a:spcPts val="1855"/>
+              </a:lnSpc>
+              <a:spcAft>
+                <a:spcPts val="0"/>
+              </a:spcAft>
+            </a:pPr>
+            <a:r>
+              <a:rPr sz="1450" b="1" i="0">
+                <a:solidFill>
+                  <a:srgbClr val="102D5E"/>
+                </a:solidFill>
+                <a:latin typeface="Garamond"/>
+              </a:rPr>
+              <a:t>Key message.  </a:t>
+            </a:r>
+            <a:r>
+              <a:rPr sz="1450" b="0" i="0">
+                <a:solidFill>
+                  <a:srgbClr val="212529"/>
+                </a:solidFill>
+                <a:latin typeface="Garamond"/>
+              </a:rPr>
+              <a:t>No. 22% of fitted values fall below zero, so the probit is the main specification and the LPM a robustness variant.</a:t>
+            </a:r>
+          </a:p>
+        </p:txBody>
+      </p:sp>
+      <p:sp>
+        <p:nvSpPr>
+          <p:cNvPr id="6" name="Rounded Rectangle 5">
+            <a:hlinkClick action="ppaction://hlinksldjump" r:id="rId3"/>
+          </p:cNvPr>
+          <p:cNvSpPr/>
+          <p:nvPr/>
+        </p:nvSpPr>
+        <p:spPr>
+          <a:xfrm>
+            <a:off x="10469880" y="6327648"/>
+            <a:ext cx="994867" cy="365760"/>
+          </a:xfrm>
+          <a:prstGeom prst="roundRect">
+            <a:avLst/>
+          </a:prstGeom>
+          <a:solidFill>
+            <a:srgbClr val="BED3EE"/>
+          </a:solidFill>
+          <a:ln>
+            <a:noFill/>
+          </a:ln>
+          <a:effectLst/>
+        </p:spPr>
+        <p:style>
+          <a:lnRef idx="1">
+            <a:schemeClr val="accent1"/>
+          </a:lnRef>
+          <a:fillRef idx="3">
+            <a:schemeClr val="accent1"/>
+          </a:fillRef>
+          <a:effectRef idx="2">
+            <a:schemeClr val="accent1"/>
+          </a:effectRef>
+          <a:fontRef idx="minor">
+            <a:schemeClr val="lt1"/>
+          </a:fontRef>
+        </p:style>
+        <p:txBody>
+          <a:bodyPr rtlCol="0" anchor="ctr" wrap="none" lIns="36576" rIns="36576" tIns="0" bIns="0"/>
+          <a:lstStyle/>
+          <a:p>
+            <a:pPr algn="ctr"/>
+            <a:r>
+              <a:rPr sz="1800" b="1">
+                <a:solidFill>
+                  <a:srgbClr val="102D5E"/>
+                </a:solidFill>
+                <a:latin typeface="Garamond"/>
+              </a:rPr>
+              <a:t>☞ </a:t>
+            </a:r>
+            <a:r>
+              <a:rPr sz="1400">
+                <a:solidFill>
+                  <a:srgbClr val="102D5E"/>
+                </a:solidFill>
+                <a:latin typeface="Garamond"/>
+              </a:rPr>
+              <a:t>Back</a:t>
+            </a:r>
+          </a:p>
+        </p:txBody>
+      </p:sp>
+    </p:spTree>
+  </p:cSld>
+  <p:clrMapOvr>
+    <a:masterClrMapping/>
+  </p:clrMapOvr>
+</p:sld>
+</file>
+
+<file path=ppt/slides/slide52.xml><?xml version="1.0" encoding="utf-8"?>
+<p:sld xmlns:a="http://schemas.openxmlformats.org/drawingml/2006/main" xmlns:p="http://schemas.openxmlformats.org/presentationml/2006/main" xmlns:r="http://schemas.openxmlformats.org/officeDocument/2006/relationships">
+  <p:cSld>
+    <p:spTree>
+      <p:nvGrpSpPr>
+        <p:cNvPr id="1" name=""/>
+        <p:cNvGrpSpPr/>
+        <p:nvPr/>
+      </p:nvGrpSpPr>
+      <p:grpSpPr/>
+      <p:sp>
+        <p:nvSpPr>
+          <p:cNvPr id="2" name="TextBox 1"/>
+          <p:cNvSpPr txBox="1"/>
+          <p:nvPr/>
+        </p:nvSpPr>
+        <p:spPr>
+          <a:xfrm>
+            <a:off x="502920" y="219456"/>
+            <a:ext cx="11247120" cy="566928"/>
+          </a:xfrm>
+          <a:prstGeom prst="rect">
+            <a:avLst/>
+          </a:prstGeom>
+          <a:noFill/>
+        </p:spPr>
+        <p:txBody>
+          <a:bodyPr wrap="square" lIns="0" rIns="0" tIns="0" bIns="0"/>
+          <a:lstStyle/>
+          <a:p>
+            <a:r>
+              <a:rPr sz="2800" b="1">
+                <a:solidFill>
+                  <a:srgbClr val="102D5E"/>
+                </a:solidFill>
+                <a:latin typeface="Garamond"/>
+              </a:rPr>
+              <a:t>What the CPS observes, of why teachers leave</a:t>
+            </a:r>
+          </a:p>
+        </p:txBody>
+      </p:sp>
+      <p:sp>
+        <p:nvSpPr>
+          <p:cNvPr id="3" name="TextBox 2"/>
+          <p:cNvSpPr txBox="1"/>
+          <p:nvPr/>
+        </p:nvSpPr>
+        <p:spPr>
+          <a:xfrm>
+            <a:off x="11384280" y="6446520"/>
+            <a:ext cx="640080" cy="292608"/>
+          </a:xfrm>
+          <a:prstGeom prst="rect">
+            <a:avLst/>
+          </a:prstGeom>
+          <a:noFill/>
+        </p:spPr>
+        <p:txBody>
+          <a:bodyPr wrap="none" lIns="0" rIns="0" tIns="0" bIns="0">
+            <a:spAutoFit/>
+          </a:bodyPr>
+          <a:lstStyle/>
+          <a:p>
+            <a:pPr algn="r"/>
+            <a:r>
+              <a:rPr sz="1100">
+                <a:solidFill>
+                  <a:srgbClr val="6B7480"/>
+                </a:solidFill>
+                <a:latin typeface="Garamond"/>
+              </a:rPr>
+              <a:t>52</a:t>
             </a:r>
           </a:p>
         </p:txBody>

--- a/report/data_cluster/Proyect_US_cluster.pptx
+++ b/report/data_cluster/Proyect_US_cluster.pptx
@@ -28796,7 +28796,7 @@
                 </a:solidFill>
                 <a:latin typeface="Garamond"/>
               </a:rPr>
-              <a:t>One teacher group, three coding regimes</a:t>
+              <a:t>Who counts as a teacher?</a:t>
             </a:r>
           </a:p>
         </p:txBody>
@@ -28844,36 +28844,45 @@
         </p:nvSpPr>
         <p:spPr>
           <a:xfrm>
-            <a:off x="4663440" y="1417320"/>
-            <a:ext cx="1737360" cy="365760"/>
-          </a:xfrm>
-          <a:prstGeom prst="rect">
-            <a:avLst/>
-          </a:prstGeom>
-          <a:noFill/>
-        </p:spPr>
-        <p:txBody>
-          <a:bodyPr wrap="square" lIns="0" rIns="0" tIns="0" bIns="0">
-            <a:spAutoFit/>
-          </a:bodyPr>
-          <a:lstStyle/>
-          <a:p>
-            <a:pPr algn="ctr">
-              <a:lnSpc>
-                <a:spcPts val="2048"/>
-              </a:lnSpc>
-              <a:spcAft>
-                <a:spcPts val="0"/>
-              </a:spcAft>
-            </a:pPr>
-            <a:r>
-              <a:rPr sz="1600" b="0" i="0">
-                <a:solidFill>
-                  <a:srgbClr val="6B7480"/>
-                </a:solidFill>
-                <a:latin typeface="Garamond"/>
-              </a:rPr>
-              <a:t>1998–2002</a:t>
+            <a:off x="822960" y="1417320"/>
+            <a:ext cx="10789920" cy="1828800"/>
+          </a:xfrm>
+          <a:prstGeom prst="rect">
+            <a:avLst/>
+          </a:prstGeom>
+          <a:noFill/>
+        </p:spPr>
+        <p:txBody>
+          <a:bodyPr wrap="square" lIns="0" rIns="0" tIns="0" bIns="0">
+            <a:spAutoFit/>
+          </a:bodyPr>
+          <a:lstStyle/>
+          <a:p>
+            <a:pPr algn="l">
+              <a:lnSpc>
+                <a:spcPts val="2560"/>
+              </a:lnSpc>
+              <a:spcAft>
+                <a:spcPts val="1000"/>
+              </a:spcAft>
+            </a:pPr>
+            <a:r>
+              <a:rPr sz="2000" b="1" i="0">
+                <a:solidFill>
+                  <a:srgbClr val="2D6CB5"/>
+                </a:solidFill>
+                <a:latin typeface="Garamond"/>
+              </a:rPr>
+              <a:t>▪  </a:t>
+            </a:r>
+            <a:r>
+              <a:rPr sz="2000" b="0" i="0">
+                <a:solidFill>
+                  <a:srgbClr val="212529"/>
+                </a:solidFill>
+                <a:latin typeface="Garamond"/>
+              </a:rPr>
+              <a:t>The census assigns every worker a detailed occupation code for the job held longest last year. We count as a teacher anyone classified in one of the five school-teaching categories:</a:t>
             </a:r>
           </a:p>
         </p:txBody>
@@ -28886,36 +28895,157 @@
         </p:nvSpPr>
         <p:spPr>
           <a:xfrm>
-            <a:off x="7223760" y="1417320"/>
-            <a:ext cx="1737360" cy="365760"/>
-          </a:xfrm>
-          <a:prstGeom prst="rect">
-            <a:avLst/>
-          </a:prstGeom>
-          <a:noFill/>
-        </p:spPr>
-        <p:txBody>
-          <a:bodyPr wrap="square" lIns="0" rIns="0" tIns="0" bIns="0">
-            <a:spAutoFit/>
-          </a:bodyPr>
-          <a:lstStyle/>
-          <a:p>
-            <a:pPr algn="ctr">
-              <a:lnSpc>
-                <a:spcPts val="2048"/>
-              </a:lnSpc>
-              <a:spcAft>
-                <a:spcPts val="0"/>
-              </a:spcAft>
-            </a:pPr>
-            <a:r>
-              <a:rPr sz="1600" b="0" i="0">
-                <a:solidFill>
-                  <a:srgbClr val="6B7480"/>
-                </a:solidFill>
-                <a:latin typeface="Garamond"/>
-              </a:rPr>
-              <a:t>2003–2019</a:t>
+            <a:off x="1417320" y="2542032"/>
+            <a:ext cx="10058400" cy="2011680"/>
+          </a:xfrm>
+          <a:prstGeom prst="rect">
+            <a:avLst/>
+          </a:prstGeom>
+          <a:noFill/>
+        </p:spPr>
+        <p:txBody>
+          <a:bodyPr wrap="square" lIns="0" rIns="0" tIns="0" bIns="0">
+            <a:spAutoFit/>
+          </a:bodyPr>
+          <a:lstStyle/>
+          <a:p>
+            <a:pPr algn="l">
+              <a:lnSpc>
+                <a:spcPts val="2432"/>
+              </a:lnSpc>
+              <a:spcAft>
+                <a:spcPts val="600"/>
+              </a:spcAft>
+            </a:pPr>
+            <a:r>
+              <a:rPr sz="1900" b="1" i="0">
+                <a:solidFill>
+                  <a:srgbClr val="102D5E"/>
+                </a:solidFill>
+                <a:latin typeface="Garamond"/>
+              </a:rPr>
+              <a:t>(a)  </a:t>
+            </a:r>
+            <a:r>
+              <a:rPr sz="1900" b="0" i="0">
+                <a:solidFill>
+                  <a:srgbClr val="212529"/>
+                </a:solidFill>
+                <a:latin typeface="Garamond"/>
+              </a:rPr>
+              <a:t>Preschool and kindergarten teachers</a:t>
+            </a:r>
+          </a:p>
+          <a:p>
+            <a:pPr algn="l">
+              <a:lnSpc>
+                <a:spcPts val="2432"/>
+              </a:lnSpc>
+              <a:spcAft>
+                <a:spcPts val="600"/>
+              </a:spcAft>
+            </a:pPr>
+            <a:r>
+              <a:rPr sz="1900" b="1" i="0">
+                <a:solidFill>
+                  <a:srgbClr val="102D5E"/>
+                </a:solidFill>
+                <a:latin typeface="Garamond"/>
+              </a:rPr>
+              <a:t>(b)  </a:t>
+            </a:r>
+            <a:r>
+              <a:rPr sz="1900" b="0" i="0">
+                <a:solidFill>
+                  <a:srgbClr val="212529"/>
+                </a:solidFill>
+                <a:latin typeface="Garamond"/>
+              </a:rPr>
+              <a:t>Elementary and middle school teachers</a:t>
+            </a:r>
+          </a:p>
+          <a:p>
+            <a:pPr algn="l">
+              <a:lnSpc>
+                <a:spcPts val="2432"/>
+              </a:lnSpc>
+              <a:spcAft>
+                <a:spcPts val="600"/>
+              </a:spcAft>
+            </a:pPr>
+            <a:r>
+              <a:rPr sz="1900" b="1" i="0">
+                <a:solidFill>
+                  <a:srgbClr val="102D5E"/>
+                </a:solidFill>
+                <a:latin typeface="Garamond"/>
+              </a:rPr>
+              <a:t>(c)  </a:t>
+            </a:r>
+            <a:r>
+              <a:rPr sz="1900" b="0" i="0">
+                <a:solidFill>
+                  <a:srgbClr val="212529"/>
+                </a:solidFill>
+                <a:latin typeface="Garamond"/>
+              </a:rPr>
+              <a:t>Secondary school teachers</a:t>
+            </a:r>
+          </a:p>
+          <a:p>
+            <a:pPr algn="l">
+              <a:lnSpc>
+                <a:spcPts val="2432"/>
+              </a:lnSpc>
+              <a:spcAft>
+                <a:spcPts val="600"/>
+              </a:spcAft>
+            </a:pPr>
+            <a:r>
+              <a:rPr sz="1900" b="1" i="0">
+                <a:solidFill>
+                  <a:srgbClr val="102D5E"/>
+                </a:solidFill>
+                <a:latin typeface="Garamond"/>
+              </a:rPr>
+              <a:t>(d)  </a:t>
+            </a:r>
+            <a:r>
+              <a:rPr sz="1900" b="0" i="0">
+                <a:solidFill>
+                  <a:srgbClr val="212529"/>
+                </a:solidFill>
+                <a:latin typeface="Garamond"/>
+              </a:rPr>
+              <a:t>Special education teachers</a:t>
+            </a:r>
+          </a:p>
+          <a:p>
+            <a:pPr algn="l">
+              <a:lnSpc>
+                <a:spcPts val="2432"/>
+              </a:lnSpc>
+              <a:spcAft>
+                <a:spcPts val="600"/>
+              </a:spcAft>
+            </a:pPr>
+            <a:r>
+              <a:rPr sz="1900" b="1" i="0">
+                <a:solidFill>
+                  <a:srgbClr val="102D5E"/>
+                </a:solidFill>
+                <a:latin typeface="Garamond"/>
+              </a:rPr>
+              <a:t>(e)  </a:t>
+            </a:r>
+            <a:r>
+              <a:rPr sz="1900" b="0" i="0">
+                <a:solidFill>
+                  <a:srgbClr val="212529"/>
+                </a:solidFill>
+                <a:latin typeface="Garamond"/>
+              </a:rPr>
+              <a:t>Other teachers and instructors</a:t>
             </a:r>
           </a:p>
         </p:txBody>
@@ -28928,50 +29058,8 @@
         </p:nvSpPr>
         <p:spPr>
           <a:xfrm>
-            <a:off x="9784080" y="1417320"/>
-            <a:ext cx="1737360" cy="365760"/>
-          </a:xfrm>
-          <a:prstGeom prst="rect">
-            <a:avLst/>
-          </a:prstGeom>
-          <a:noFill/>
-        </p:spPr>
-        <p:txBody>
-          <a:bodyPr wrap="square" lIns="0" rIns="0" tIns="0" bIns="0">
-            <a:spAutoFit/>
-          </a:bodyPr>
-          <a:lstStyle/>
-          <a:p>
-            <a:pPr algn="ctr">
-              <a:lnSpc>
-                <a:spcPts val="2048"/>
-              </a:lnSpc>
-              <a:spcAft>
-                <a:spcPts val="0"/>
-              </a:spcAft>
-            </a:pPr>
-            <a:r>
-              <a:rPr sz="1600" b="0" i="0">
-                <a:solidFill>
-                  <a:srgbClr val="6B7480"/>
-                </a:solidFill>
-                <a:latin typeface="Garamond"/>
-              </a:rPr>
-              <a:t>2020–2025</a:t>
-            </a:r>
-          </a:p>
-        </p:txBody>
-      </p:sp>
-      <p:sp>
-        <p:nvSpPr>
-          <p:cNvPr id="7" name="TextBox 6"/>
-          <p:cNvSpPr txBox="1"/>
-          <p:nvPr/>
-        </p:nvSpPr>
-        <p:spPr>
-          <a:xfrm>
-            <a:off x="822960" y="1965960"/>
-            <a:ext cx="3657600" cy="411480"/>
+            <a:off x="822960" y="4892040"/>
+            <a:ext cx="10789920" cy="1188720"/>
           </a:xfrm>
           <a:prstGeom prst="rect">
             <a:avLst/>
@@ -28986,1287 +29074,36 @@
           <a:p>
             <a:pPr algn="l">
               <a:lnSpc>
-                <a:spcPts val="2304"/>
-              </a:lnSpc>
-              <a:spcAft>
-                <a:spcPts val="0"/>
-              </a:spcAft>
-            </a:pPr>
-            <a:r>
-              <a:rPr sz="1800" b="0" i="0">
+                <a:spcPts val="2560"/>
+              </a:lnSpc>
+              <a:spcAft>
+                <a:spcPts val="0"/>
+              </a:spcAft>
+            </a:pPr>
+            <a:r>
+              <a:rPr sz="2000" b="1" i="0">
+                <a:solidFill>
+                  <a:srgbClr val="2D6CB5"/>
+                </a:solidFill>
+                <a:latin typeface="Garamond"/>
+              </a:rPr>
+              <a:t>▪  </a:t>
+            </a:r>
+            <a:r>
+              <a:rPr sz="2000" b="0" i="0">
                 <a:solidFill>
                   <a:srgbClr val="212529"/>
                 </a:solidFill>
                 <a:latin typeface="Garamond"/>
               </a:rPr>
-              <a:t>Pre-K and kindergarten</a:t>
-            </a:r>
-          </a:p>
-        </p:txBody>
-      </p:sp>
-      <p:sp>
-        <p:nvSpPr>
-          <p:cNvPr id="8" name="TextBox 7"/>
-          <p:cNvSpPr txBox="1"/>
-          <p:nvPr/>
-        </p:nvSpPr>
-        <p:spPr>
-          <a:xfrm>
-            <a:off x="4663440" y="1965960"/>
-            <a:ext cx="1737360" cy="411480"/>
-          </a:xfrm>
-          <a:prstGeom prst="rect">
-            <a:avLst/>
-          </a:prstGeom>
-          <a:noFill/>
-        </p:spPr>
-        <p:txBody>
-          <a:bodyPr wrap="square" lIns="0" rIns="0" tIns="0" bIns="0">
-            <a:spAutoFit/>
-          </a:bodyPr>
-          <a:lstStyle/>
-          <a:p>
-            <a:pPr algn="ctr">
-              <a:lnSpc>
-                <a:spcPts val="2304"/>
-              </a:lnSpc>
-              <a:spcAft>
-                <a:spcPts val="0"/>
-              </a:spcAft>
-            </a:pPr>
-            <a:r>
-              <a:rPr sz="1800" b="1" i="0">
-                <a:solidFill>
-                  <a:srgbClr val="102D5E"/>
-                </a:solidFill>
-                <a:latin typeface="Garamond"/>
-              </a:rPr>
-              <a:t>155</a:t>
-            </a:r>
-          </a:p>
-        </p:txBody>
-      </p:sp>
-      <p:sp>
-        <p:nvSpPr>
-          <p:cNvPr id="9" name="TextBox 8"/>
-          <p:cNvSpPr txBox="1"/>
-          <p:nvPr/>
-        </p:nvSpPr>
-        <p:spPr>
-          <a:xfrm>
-            <a:off x="6309360" y="1965960"/>
-            <a:ext cx="1005840" cy="411480"/>
-          </a:xfrm>
-          <a:prstGeom prst="rect">
-            <a:avLst/>
-          </a:prstGeom>
-          <a:noFill/>
-        </p:spPr>
-        <p:txBody>
-          <a:bodyPr wrap="square" lIns="0" rIns="0" tIns="0" bIns="0">
-            <a:spAutoFit/>
-          </a:bodyPr>
-          <a:lstStyle/>
-          <a:p>
-            <a:pPr algn="ctr">
-              <a:lnSpc>
-                <a:spcPts val="2304"/>
-              </a:lnSpc>
-              <a:spcAft>
-                <a:spcPts val="0"/>
-              </a:spcAft>
-            </a:pPr>
-            <a:r>
-              <a:rPr sz="1800" b="0" i="0">
-                <a:solidFill>
-                  <a:srgbClr val="6B7480"/>
-                </a:solidFill>
-                <a:latin typeface="Garamond"/>
-              </a:rPr>
-              <a:t>→</a:t>
-            </a:r>
-          </a:p>
-        </p:txBody>
-      </p:sp>
-      <p:sp>
-        <p:nvSpPr>
-          <p:cNvPr id="10" name="TextBox 9"/>
-          <p:cNvSpPr txBox="1"/>
-          <p:nvPr/>
-        </p:nvSpPr>
-        <p:spPr>
-          <a:xfrm>
-            <a:off x="7223760" y="1965960"/>
-            <a:ext cx="1737360" cy="411480"/>
-          </a:xfrm>
-          <a:prstGeom prst="rect">
-            <a:avLst/>
-          </a:prstGeom>
-          <a:noFill/>
-        </p:spPr>
-        <p:txBody>
-          <a:bodyPr wrap="square" lIns="0" rIns="0" tIns="0" bIns="0">
-            <a:spAutoFit/>
-          </a:bodyPr>
-          <a:lstStyle/>
-          <a:p>
-            <a:pPr algn="ctr">
-              <a:lnSpc>
-                <a:spcPts val="2304"/>
-              </a:lnSpc>
-              <a:spcAft>
-                <a:spcPts val="0"/>
-              </a:spcAft>
-            </a:pPr>
-            <a:r>
-              <a:rPr sz="1800" b="1" i="0">
-                <a:solidFill>
-                  <a:srgbClr val="102D5E"/>
-                </a:solidFill>
-                <a:latin typeface="Garamond"/>
-              </a:rPr>
-              <a:t>2300</a:t>
-            </a:r>
-          </a:p>
-        </p:txBody>
-      </p:sp>
-      <p:sp>
-        <p:nvSpPr>
-          <p:cNvPr id="11" name="TextBox 10"/>
-          <p:cNvSpPr txBox="1"/>
-          <p:nvPr/>
-        </p:nvSpPr>
-        <p:spPr>
-          <a:xfrm>
-            <a:off x="8869680" y="1965960"/>
-            <a:ext cx="1005840" cy="411480"/>
-          </a:xfrm>
-          <a:prstGeom prst="rect">
-            <a:avLst/>
-          </a:prstGeom>
-          <a:noFill/>
-        </p:spPr>
-        <p:txBody>
-          <a:bodyPr wrap="square" lIns="0" rIns="0" tIns="0" bIns="0">
-            <a:spAutoFit/>
-          </a:bodyPr>
-          <a:lstStyle/>
-          <a:p>
-            <a:pPr algn="ctr">
-              <a:lnSpc>
-                <a:spcPts val="2304"/>
-              </a:lnSpc>
-              <a:spcAft>
-                <a:spcPts val="0"/>
-              </a:spcAft>
-            </a:pPr>
-            <a:r>
-              <a:rPr sz="1800" b="0" i="0">
-                <a:solidFill>
-                  <a:srgbClr val="6B7480"/>
-                </a:solidFill>
-                <a:latin typeface="Garamond"/>
-              </a:rPr>
-              <a:t>=</a:t>
-            </a:r>
-          </a:p>
-        </p:txBody>
-      </p:sp>
-      <p:sp>
-        <p:nvSpPr>
-          <p:cNvPr id="12" name="TextBox 11"/>
-          <p:cNvSpPr txBox="1"/>
-          <p:nvPr/>
-        </p:nvSpPr>
-        <p:spPr>
-          <a:xfrm>
-            <a:off x="9784080" y="1965960"/>
-            <a:ext cx="1737360" cy="411480"/>
-          </a:xfrm>
-          <a:prstGeom prst="rect">
-            <a:avLst/>
-          </a:prstGeom>
-          <a:noFill/>
-        </p:spPr>
-        <p:txBody>
-          <a:bodyPr wrap="square" lIns="0" rIns="0" tIns="0" bIns="0">
-            <a:spAutoFit/>
-          </a:bodyPr>
-          <a:lstStyle/>
-          <a:p>
-            <a:pPr algn="ctr">
-              <a:lnSpc>
-                <a:spcPts val="2304"/>
-              </a:lnSpc>
-              <a:spcAft>
-                <a:spcPts val="0"/>
-              </a:spcAft>
-            </a:pPr>
-            <a:r>
-              <a:rPr sz="1800" b="1" i="0">
-                <a:solidFill>
-                  <a:srgbClr val="102D5E"/>
-                </a:solidFill>
-                <a:latin typeface="Garamond"/>
-              </a:rPr>
-              <a:t>2300</a:t>
-            </a:r>
-          </a:p>
-        </p:txBody>
-      </p:sp>
-      <p:sp>
-        <p:nvSpPr>
-          <p:cNvPr id="13" name="TextBox 12"/>
-          <p:cNvSpPr txBox="1"/>
-          <p:nvPr/>
-        </p:nvSpPr>
-        <p:spPr>
-          <a:xfrm>
-            <a:off x="822960" y="2532888"/>
-            <a:ext cx="3657600" cy="411480"/>
-          </a:xfrm>
-          <a:prstGeom prst="rect">
-            <a:avLst/>
-          </a:prstGeom>
-          <a:noFill/>
-        </p:spPr>
-        <p:txBody>
-          <a:bodyPr wrap="square" lIns="0" rIns="0" tIns="0" bIns="0">
-            <a:spAutoFit/>
-          </a:bodyPr>
-          <a:lstStyle/>
-          <a:p>
-            <a:pPr algn="l">
-              <a:lnSpc>
-                <a:spcPts val="2304"/>
-              </a:lnSpc>
-              <a:spcAft>
-                <a:spcPts val="0"/>
-              </a:spcAft>
-            </a:pPr>
-            <a:r>
-              <a:rPr sz="1800" b="0" i="0">
-                <a:solidFill>
-                  <a:srgbClr val="212529"/>
-                </a:solidFill>
-                <a:latin typeface="Garamond"/>
-              </a:rPr>
-              <a:t>Elementary (and middle)</a:t>
-            </a:r>
-          </a:p>
-        </p:txBody>
-      </p:sp>
-      <p:sp>
-        <p:nvSpPr>
-          <p:cNvPr id="14" name="TextBox 13"/>
-          <p:cNvSpPr txBox="1"/>
-          <p:nvPr/>
-        </p:nvSpPr>
-        <p:spPr>
-          <a:xfrm>
-            <a:off x="4663440" y="2532888"/>
-            <a:ext cx="1737360" cy="411480"/>
-          </a:xfrm>
-          <a:prstGeom prst="rect">
-            <a:avLst/>
-          </a:prstGeom>
-          <a:noFill/>
-        </p:spPr>
-        <p:txBody>
-          <a:bodyPr wrap="square" lIns="0" rIns="0" tIns="0" bIns="0">
-            <a:spAutoFit/>
-          </a:bodyPr>
-          <a:lstStyle/>
-          <a:p>
-            <a:pPr algn="ctr">
-              <a:lnSpc>
-                <a:spcPts val="2304"/>
-              </a:lnSpc>
-              <a:spcAft>
-                <a:spcPts val="0"/>
-              </a:spcAft>
-            </a:pPr>
-            <a:r>
-              <a:rPr sz="1800" b="1" i="0">
-                <a:solidFill>
-                  <a:srgbClr val="102D5E"/>
-                </a:solidFill>
-                <a:latin typeface="Garamond"/>
-              </a:rPr>
-              <a:t>156</a:t>
-            </a:r>
-          </a:p>
-        </p:txBody>
-      </p:sp>
-      <p:sp>
-        <p:nvSpPr>
-          <p:cNvPr id="15" name="TextBox 14"/>
-          <p:cNvSpPr txBox="1"/>
-          <p:nvPr/>
-        </p:nvSpPr>
-        <p:spPr>
-          <a:xfrm>
-            <a:off x="6309360" y="2532888"/>
-            <a:ext cx="1005840" cy="411480"/>
-          </a:xfrm>
-          <a:prstGeom prst="rect">
-            <a:avLst/>
-          </a:prstGeom>
-          <a:noFill/>
-        </p:spPr>
-        <p:txBody>
-          <a:bodyPr wrap="square" lIns="0" rIns="0" tIns="0" bIns="0">
-            <a:spAutoFit/>
-          </a:bodyPr>
-          <a:lstStyle/>
-          <a:p>
-            <a:pPr algn="ctr">
-              <a:lnSpc>
-                <a:spcPts val="2304"/>
-              </a:lnSpc>
-              <a:spcAft>
-                <a:spcPts val="0"/>
-              </a:spcAft>
-            </a:pPr>
-            <a:r>
-              <a:rPr sz="1800" b="0" i="0">
-                <a:solidFill>
-                  <a:srgbClr val="6B7480"/>
-                </a:solidFill>
-                <a:latin typeface="Garamond"/>
-              </a:rPr>
-              <a:t>→</a:t>
-            </a:r>
-          </a:p>
-        </p:txBody>
-      </p:sp>
-      <p:sp>
-        <p:nvSpPr>
-          <p:cNvPr id="16" name="TextBox 15"/>
-          <p:cNvSpPr txBox="1"/>
-          <p:nvPr/>
-        </p:nvSpPr>
-        <p:spPr>
-          <a:xfrm>
-            <a:off x="7223760" y="2532888"/>
-            <a:ext cx="1737360" cy="411480"/>
-          </a:xfrm>
-          <a:prstGeom prst="rect">
-            <a:avLst/>
-          </a:prstGeom>
-          <a:noFill/>
-        </p:spPr>
-        <p:txBody>
-          <a:bodyPr wrap="square" lIns="0" rIns="0" tIns="0" bIns="0">
-            <a:spAutoFit/>
-          </a:bodyPr>
-          <a:lstStyle/>
-          <a:p>
-            <a:pPr algn="ctr">
-              <a:lnSpc>
-                <a:spcPts val="2304"/>
-              </a:lnSpc>
-              <a:spcAft>
-                <a:spcPts val="0"/>
-              </a:spcAft>
-            </a:pPr>
-            <a:r>
-              <a:rPr sz="1800" b="1" i="0">
-                <a:solidFill>
-                  <a:srgbClr val="102D5E"/>
-                </a:solidFill>
-                <a:latin typeface="Garamond"/>
-              </a:rPr>
-              <a:t>2310</a:t>
-            </a:r>
-          </a:p>
-        </p:txBody>
-      </p:sp>
-      <p:sp>
-        <p:nvSpPr>
-          <p:cNvPr id="17" name="TextBox 16"/>
-          <p:cNvSpPr txBox="1"/>
-          <p:nvPr/>
-        </p:nvSpPr>
-        <p:spPr>
-          <a:xfrm>
-            <a:off x="8869680" y="2532888"/>
-            <a:ext cx="1005840" cy="411480"/>
-          </a:xfrm>
-          <a:prstGeom prst="rect">
-            <a:avLst/>
-          </a:prstGeom>
-          <a:noFill/>
-        </p:spPr>
-        <p:txBody>
-          <a:bodyPr wrap="square" lIns="0" rIns="0" tIns="0" bIns="0">
-            <a:spAutoFit/>
-          </a:bodyPr>
-          <a:lstStyle/>
-          <a:p>
-            <a:pPr algn="ctr">
-              <a:lnSpc>
-                <a:spcPts val="2304"/>
-              </a:lnSpc>
-              <a:spcAft>
-                <a:spcPts val="0"/>
-              </a:spcAft>
-            </a:pPr>
-            <a:r>
-              <a:rPr sz="1800" b="0" i="0">
-                <a:solidFill>
-                  <a:srgbClr val="6B7480"/>
-                </a:solidFill>
-                <a:latin typeface="Garamond"/>
-              </a:rPr>
-              <a:t>=</a:t>
-            </a:r>
-          </a:p>
-        </p:txBody>
-      </p:sp>
-      <p:sp>
-        <p:nvSpPr>
-          <p:cNvPr id="18" name="TextBox 17"/>
-          <p:cNvSpPr txBox="1"/>
-          <p:nvPr/>
-        </p:nvSpPr>
-        <p:spPr>
-          <a:xfrm>
-            <a:off x="9784080" y="2532888"/>
-            <a:ext cx="1737360" cy="411480"/>
-          </a:xfrm>
-          <a:prstGeom prst="rect">
-            <a:avLst/>
-          </a:prstGeom>
-          <a:noFill/>
-        </p:spPr>
-        <p:txBody>
-          <a:bodyPr wrap="square" lIns="0" rIns="0" tIns="0" bIns="0">
-            <a:spAutoFit/>
-          </a:bodyPr>
-          <a:lstStyle/>
-          <a:p>
-            <a:pPr algn="ctr">
-              <a:lnSpc>
-                <a:spcPts val="2304"/>
-              </a:lnSpc>
-              <a:spcAft>
-                <a:spcPts val="0"/>
-              </a:spcAft>
-            </a:pPr>
-            <a:r>
-              <a:rPr sz="1800" b="1" i="0">
-                <a:solidFill>
-                  <a:srgbClr val="102D5E"/>
-                </a:solidFill>
-                <a:latin typeface="Garamond"/>
-              </a:rPr>
-              <a:t>2310</a:t>
-            </a:r>
-          </a:p>
-        </p:txBody>
-      </p:sp>
-      <p:sp>
-        <p:nvSpPr>
-          <p:cNvPr id="19" name="TextBox 18"/>
-          <p:cNvSpPr txBox="1"/>
-          <p:nvPr/>
-        </p:nvSpPr>
-        <p:spPr>
-          <a:xfrm>
-            <a:off x="822960" y="3099816"/>
-            <a:ext cx="3657600" cy="411480"/>
-          </a:xfrm>
-          <a:prstGeom prst="rect">
-            <a:avLst/>
-          </a:prstGeom>
-          <a:noFill/>
-        </p:spPr>
-        <p:txBody>
-          <a:bodyPr wrap="square" lIns="0" rIns="0" tIns="0" bIns="0">
-            <a:spAutoFit/>
-          </a:bodyPr>
-          <a:lstStyle/>
-          <a:p>
-            <a:pPr algn="l">
-              <a:lnSpc>
-                <a:spcPts val="2304"/>
-              </a:lnSpc>
-              <a:spcAft>
-                <a:spcPts val="0"/>
-              </a:spcAft>
-            </a:pPr>
-            <a:r>
-              <a:rPr sz="1800" b="0" i="0">
-                <a:solidFill>
-                  <a:srgbClr val="212529"/>
-                </a:solidFill>
-                <a:latin typeface="Garamond"/>
-              </a:rPr>
-              <a:t>Secondary</a:t>
-            </a:r>
-          </a:p>
-        </p:txBody>
-      </p:sp>
-      <p:sp>
-        <p:nvSpPr>
-          <p:cNvPr id="20" name="TextBox 19"/>
-          <p:cNvSpPr txBox="1"/>
-          <p:nvPr/>
-        </p:nvSpPr>
-        <p:spPr>
-          <a:xfrm>
-            <a:off x="4663440" y="3099816"/>
-            <a:ext cx="1737360" cy="411480"/>
-          </a:xfrm>
-          <a:prstGeom prst="rect">
-            <a:avLst/>
-          </a:prstGeom>
-          <a:noFill/>
-        </p:spPr>
-        <p:txBody>
-          <a:bodyPr wrap="square" lIns="0" rIns="0" tIns="0" bIns="0">
-            <a:spAutoFit/>
-          </a:bodyPr>
-          <a:lstStyle/>
-          <a:p>
-            <a:pPr algn="ctr">
-              <a:lnSpc>
-                <a:spcPts val="2304"/>
-              </a:lnSpc>
-              <a:spcAft>
-                <a:spcPts val="0"/>
-              </a:spcAft>
-            </a:pPr>
-            <a:r>
-              <a:rPr sz="1800" b="1" i="0">
-                <a:solidFill>
-                  <a:srgbClr val="102D5E"/>
-                </a:solidFill>
-                <a:latin typeface="Garamond"/>
-              </a:rPr>
-              <a:t>157</a:t>
-            </a:r>
-          </a:p>
-        </p:txBody>
-      </p:sp>
-      <p:sp>
-        <p:nvSpPr>
-          <p:cNvPr id="21" name="TextBox 20"/>
-          <p:cNvSpPr txBox="1"/>
-          <p:nvPr/>
-        </p:nvSpPr>
-        <p:spPr>
-          <a:xfrm>
-            <a:off x="6309360" y="3099816"/>
-            <a:ext cx="1005840" cy="411480"/>
-          </a:xfrm>
-          <a:prstGeom prst="rect">
-            <a:avLst/>
-          </a:prstGeom>
-          <a:noFill/>
-        </p:spPr>
-        <p:txBody>
-          <a:bodyPr wrap="square" lIns="0" rIns="0" tIns="0" bIns="0">
-            <a:spAutoFit/>
-          </a:bodyPr>
-          <a:lstStyle/>
-          <a:p>
-            <a:pPr algn="ctr">
-              <a:lnSpc>
-                <a:spcPts val="2304"/>
-              </a:lnSpc>
-              <a:spcAft>
-                <a:spcPts val="0"/>
-              </a:spcAft>
-            </a:pPr>
-            <a:r>
-              <a:rPr sz="1800" b="0" i="0">
-                <a:solidFill>
-                  <a:srgbClr val="6B7480"/>
-                </a:solidFill>
-                <a:latin typeface="Garamond"/>
-              </a:rPr>
-              <a:t>→</a:t>
-            </a:r>
-          </a:p>
-        </p:txBody>
-      </p:sp>
-      <p:sp>
-        <p:nvSpPr>
-          <p:cNvPr id="22" name="TextBox 21"/>
-          <p:cNvSpPr txBox="1"/>
-          <p:nvPr/>
-        </p:nvSpPr>
-        <p:spPr>
-          <a:xfrm>
-            <a:off x="7223760" y="3099816"/>
-            <a:ext cx="1737360" cy="411480"/>
-          </a:xfrm>
-          <a:prstGeom prst="rect">
-            <a:avLst/>
-          </a:prstGeom>
-          <a:noFill/>
-        </p:spPr>
-        <p:txBody>
-          <a:bodyPr wrap="square" lIns="0" rIns="0" tIns="0" bIns="0">
-            <a:spAutoFit/>
-          </a:bodyPr>
-          <a:lstStyle/>
-          <a:p>
-            <a:pPr algn="ctr">
-              <a:lnSpc>
-                <a:spcPts val="2304"/>
-              </a:lnSpc>
-              <a:spcAft>
-                <a:spcPts val="0"/>
-              </a:spcAft>
-            </a:pPr>
-            <a:r>
-              <a:rPr sz="1800" b="1" i="0">
-                <a:solidFill>
-                  <a:srgbClr val="102D5E"/>
-                </a:solidFill>
-                <a:latin typeface="Garamond"/>
-              </a:rPr>
-              <a:t>2320</a:t>
-            </a:r>
-          </a:p>
-        </p:txBody>
-      </p:sp>
-      <p:sp>
-        <p:nvSpPr>
-          <p:cNvPr id="23" name="TextBox 22"/>
-          <p:cNvSpPr txBox="1"/>
-          <p:nvPr/>
-        </p:nvSpPr>
-        <p:spPr>
-          <a:xfrm>
-            <a:off x="8869680" y="3099816"/>
-            <a:ext cx="1005840" cy="411480"/>
-          </a:xfrm>
-          <a:prstGeom prst="rect">
-            <a:avLst/>
-          </a:prstGeom>
-          <a:noFill/>
-        </p:spPr>
-        <p:txBody>
-          <a:bodyPr wrap="square" lIns="0" rIns="0" tIns="0" bIns="0">
-            <a:spAutoFit/>
-          </a:bodyPr>
-          <a:lstStyle/>
-          <a:p>
-            <a:pPr algn="ctr">
-              <a:lnSpc>
-                <a:spcPts val="2304"/>
-              </a:lnSpc>
-              <a:spcAft>
-                <a:spcPts val="0"/>
-              </a:spcAft>
-            </a:pPr>
-            <a:r>
-              <a:rPr sz="1800" b="0" i="0">
-                <a:solidFill>
-                  <a:srgbClr val="6B7480"/>
-                </a:solidFill>
-                <a:latin typeface="Garamond"/>
-              </a:rPr>
-              <a:t>=</a:t>
-            </a:r>
-          </a:p>
-        </p:txBody>
-      </p:sp>
-      <p:sp>
-        <p:nvSpPr>
-          <p:cNvPr id="24" name="TextBox 23"/>
-          <p:cNvSpPr txBox="1"/>
-          <p:nvPr/>
-        </p:nvSpPr>
-        <p:spPr>
-          <a:xfrm>
-            <a:off x="9784080" y="3099816"/>
-            <a:ext cx="1737360" cy="411480"/>
-          </a:xfrm>
-          <a:prstGeom prst="rect">
-            <a:avLst/>
-          </a:prstGeom>
-          <a:noFill/>
-        </p:spPr>
-        <p:txBody>
-          <a:bodyPr wrap="square" lIns="0" rIns="0" tIns="0" bIns="0">
-            <a:spAutoFit/>
-          </a:bodyPr>
-          <a:lstStyle/>
-          <a:p>
-            <a:pPr algn="ctr">
-              <a:lnSpc>
-                <a:spcPts val="2304"/>
-              </a:lnSpc>
-              <a:spcAft>
-                <a:spcPts val="0"/>
-              </a:spcAft>
-            </a:pPr>
-            <a:r>
-              <a:rPr sz="1800" b="1" i="0">
-                <a:solidFill>
-                  <a:srgbClr val="102D5E"/>
-                </a:solidFill>
-                <a:latin typeface="Garamond"/>
-              </a:rPr>
-              <a:t>2320</a:t>
-            </a:r>
-          </a:p>
-        </p:txBody>
-      </p:sp>
-      <p:sp>
-        <p:nvSpPr>
-          <p:cNvPr id="25" name="TextBox 24"/>
-          <p:cNvSpPr txBox="1"/>
-          <p:nvPr/>
-        </p:nvSpPr>
-        <p:spPr>
-          <a:xfrm>
-            <a:off x="822960" y="3666744"/>
-            <a:ext cx="3657600" cy="411480"/>
-          </a:xfrm>
-          <a:prstGeom prst="rect">
-            <a:avLst/>
-          </a:prstGeom>
-          <a:noFill/>
-        </p:spPr>
-        <p:txBody>
-          <a:bodyPr wrap="square" lIns="0" rIns="0" tIns="0" bIns="0">
-            <a:spAutoFit/>
-          </a:bodyPr>
-          <a:lstStyle/>
-          <a:p>
-            <a:pPr algn="l">
-              <a:lnSpc>
-                <a:spcPts val="2304"/>
-              </a:lnSpc>
-              <a:spcAft>
-                <a:spcPts val="0"/>
-              </a:spcAft>
-            </a:pPr>
-            <a:r>
-              <a:rPr sz="1800" b="0" i="0">
-                <a:solidFill>
-                  <a:srgbClr val="212529"/>
-                </a:solidFill>
-                <a:latin typeface="Garamond"/>
-              </a:rPr>
-              <a:t>Special education</a:t>
-            </a:r>
-          </a:p>
-        </p:txBody>
-      </p:sp>
-      <p:sp>
-        <p:nvSpPr>
-          <p:cNvPr id="26" name="TextBox 25"/>
-          <p:cNvSpPr txBox="1"/>
-          <p:nvPr/>
-        </p:nvSpPr>
-        <p:spPr>
-          <a:xfrm>
-            <a:off x="4663440" y="3666744"/>
-            <a:ext cx="1737360" cy="411480"/>
-          </a:xfrm>
-          <a:prstGeom prst="rect">
-            <a:avLst/>
-          </a:prstGeom>
-          <a:noFill/>
-        </p:spPr>
-        <p:txBody>
-          <a:bodyPr wrap="square" lIns="0" rIns="0" tIns="0" bIns="0">
-            <a:spAutoFit/>
-          </a:bodyPr>
-          <a:lstStyle/>
-          <a:p>
-            <a:pPr algn="ctr">
-              <a:lnSpc>
-                <a:spcPts val="2304"/>
-              </a:lnSpc>
-              <a:spcAft>
-                <a:spcPts val="0"/>
-              </a:spcAft>
-            </a:pPr>
-            <a:r>
-              <a:rPr sz="1800" b="1" i="0">
-                <a:solidFill>
-                  <a:srgbClr val="102D5E"/>
-                </a:solidFill>
-                <a:latin typeface="Garamond"/>
-              </a:rPr>
-              <a:t>158</a:t>
-            </a:r>
-          </a:p>
-        </p:txBody>
-      </p:sp>
-      <p:sp>
-        <p:nvSpPr>
-          <p:cNvPr id="27" name="TextBox 26"/>
-          <p:cNvSpPr txBox="1"/>
-          <p:nvPr/>
-        </p:nvSpPr>
-        <p:spPr>
-          <a:xfrm>
-            <a:off x="6309360" y="3666744"/>
-            <a:ext cx="1005840" cy="411480"/>
-          </a:xfrm>
-          <a:prstGeom prst="rect">
-            <a:avLst/>
-          </a:prstGeom>
-          <a:noFill/>
-        </p:spPr>
-        <p:txBody>
-          <a:bodyPr wrap="square" lIns="0" rIns="0" tIns="0" bIns="0">
-            <a:spAutoFit/>
-          </a:bodyPr>
-          <a:lstStyle/>
-          <a:p>
-            <a:pPr algn="ctr">
-              <a:lnSpc>
-                <a:spcPts val="2304"/>
-              </a:lnSpc>
-              <a:spcAft>
-                <a:spcPts val="0"/>
-              </a:spcAft>
-            </a:pPr>
-            <a:r>
-              <a:rPr sz="1800" b="0" i="0">
-                <a:solidFill>
-                  <a:srgbClr val="6B7480"/>
-                </a:solidFill>
-                <a:latin typeface="Garamond"/>
-              </a:rPr>
-              <a:t>→</a:t>
-            </a:r>
-          </a:p>
-        </p:txBody>
-      </p:sp>
-      <p:sp>
-        <p:nvSpPr>
-          <p:cNvPr id="28" name="TextBox 27"/>
-          <p:cNvSpPr txBox="1"/>
-          <p:nvPr/>
-        </p:nvSpPr>
-        <p:spPr>
-          <a:xfrm>
-            <a:off x="7223760" y="3666744"/>
-            <a:ext cx="1737360" cy="411480"/>
-          </a:xfrm>
-          <a:prstGeom prst="rect">
-            <a:avLst/>
-          </a:prstGeom>
-          <a:noFill/>
-        </p:spPr>
-        <p:txBody>
-          <a:bodyPr wrap="square" lIns="0" rIns="0" tIns="0" bIns="0">
-            <a:spAutoFit/>
-          </a:bodyPr>
-          <a:lstStyle/>
-          <a:p>
-            <a:pPr algn="ctr">
-              <a:lnSpc>
-                <a:spcPts val="2304"/>
-              </a:lnSpc>
-              <a:spcAft>
-                <a:spcPts val="0"/>
-              </a:spcAft>
-            </a:pPr>
-            <a:r>
-              <a:rPr sz="1800" b="1" i="0">
-                <a:solidFill>
-                  <a:srgbClr val="102D5E"/>
-                </a:solidFill>
-                <a:latin typeface="Garamond"/>
-              </a:rPr>
-              <a:t>2330</a:t>
-            </a:r>
-          </a:p>
-        </p:txBody>
-      </p:sp>
-      <p:sp>
-        <p:nvSpPr>
-          <p:cNvPr id="29" name="TextBox 28"/>
-          <p:cNvSpPr txBox="1"/>
-          <p:nvPr/>
-        </p:nvSpPr>
-        <p:spPr>
-          <a:xfrm>
-            <a:off x="8869680" y="3666744"/>
-            <a:ext cx="1005840" cy="411480"/>
-          </a:xfrm>
-          <a:prstGeom prst="rect">
-            <a:avLst/>
-          </a:prstGeom>
-          <a:noFill/>
-        </p:spPr>
-        <p:txBody>
-          <a:bodyPr wrap="square" lIns="0" rIns="0" tIns="0" bIns="0">
-            <a:spAutoFit/>
-          </a:bodyPr>
-          <a:lstStyle/>
-          <a:p>
-            <a:pPr algn="ctr">
-              <a:lnSpc>
-                <a:spcPts val="2304"/>
-              </a:lnSpc>
-              <a:spcAft>
-                <a:spcPts val="0"/>
-              </a:spcAft>
-            </a:pPr>
-            <a:r>
-              <a:rPr sz="1800" b="0" i="0">
-                <a:solidFill>
-                  <a:srgbClr val="6B7480"/>
-                </a:solidFill>
-                <a:latin typeface="Garamond"/>
-              </a:rPr>
-              <a:t>=</a:t>
-            </a:r>
-          </a:p>
-        </p:txBody>
-      </p:sp>
-      <p:sp>
-        <p:nvSpPr>
-          <p:cNvPr id="30" name="TextBox 29"/>
-          <p:cNvSpPr txBox="1"/>
-          <p:nvPr/>
-        </p:nvSpPr>
-        <p:spPr>
-          <a:xfrm>
-            <a:off x="9784080" y="3666744"/>
-            <a:ext cx="1737360" cy="411480"/>
-          </a:xfrm>
-          <a:prstGeom prst="rect">
-            <a:avLst/>
-          </a:prstGeom>
-          <a:noFill/>
-        </p:spPr>
-        <p:txBody>
-          <a:bodyPr wrap="square" lIns="0" rIns="0" tIns="0" bIns="0">
-            <a:spAutoFit/>
-          </a:bodyPr>
-          <a:lstStyle/>
-          <a:p>
-            <a:pPr algn="ctr">
-              <a:lnSpc>
-                <a:spcPts val="2304"/>
-              </a:lnSpc>
-              <a:spcAft>
-                <a:spcPts val="0"/>
-              </a:spcAft>
-            </a:pPr>
-            <a:r>
-              <a:rPr sz="1800" b="1" i="0">
-                <a:solidFill>
-                  <a:srgbClr val="102D5E"/>
-                </a:solidFill>
-                <a:latin typeface="Garamond"/>
-              </a:rPr>
-              <a:t>2330</a:t>
-            </a:r>
-          </a:p>
-        </p:txBody>
-      </p:sp>
-      <p:sp>
-        <p:nvSpPr>
-          <p:cNvPr id="31" name="TextBox 30"/>
-          <p:cNvSpPr txBox="1"/>
-          <p:nvPr/>
-        </p:nvSpPr>
-        <p:spPr>
-          <a:xfrm>
-            <a:off x="822960" y="4233672"/>
-            <a:ext cx="3657600" cy="411480"/>
-          </a:xfrm>
-          <a:prstGeom prst="rect">
-            <a:avLst/>
-          </a:prstGeom>
-          <a:noFill/>
-        </p:spPr>
-        <p:txBody>
-          <a:bodyPr wrap="square" lIns="0" rIns="0" tIns="0" bIns="0">
-            <a:spAutoFit/>
-          </a:bodyPr>
-          <a:lstStyle/>
-          <a:p>
-            <a:pPr algn="l">
-              <a:lnSpc>
-                <a:spcPts val="2304"/>
-              </a:lnSpc>
-              <a:spcAft>
-                <a:spcPts val="0"/>
-              </a:spcAft>
-            </a:pPr>
-            <a:r>
-              <a:rPr sz="1800" b="0" i="0">
-                <a:solidFill>
-                  <a:srgbClr val="212529"/>
-                </a:solidFill>
-                <a:latin typeface="Garamond"/>
-              </a:rPr>
-              <a:t>Other teachers and instructors</a:t>
-            </a:r>
-          </a:p>
-        </p:txBody>
-      </p:sp>
-      <p:sp>
-        <p:nvSpPr>
-          <p:cNvPr id="32" name="TextBox 31"/>
-          <p:cNvSpPr txBox="1"/>
-          <p:nvPr/>
-        </p:nvSpPr>
-        <p:spPr>
-          <a:xfrm>
-            <a:off x="4663440" y="4233672"/>
-            <a:ext cx="1737360" cy="411480"/>
-          </a:xfrm>
-          <a:prstGeom prst="rect">
-            <a:avLst/>
-          </a:prstGeom>
-          <a:noFill/>
-        </p:spPr>
-        <p:txBody>
-          <a:bodyPr wrap="square" lIns="0" rIns="0" tIns="0" bIns="0">
-            <a:spAutoFit/>
-          </a:bodyPr>
-          <a:lstStyle/>
-          <a:p>
-            <a:pPr algn="ctr">
-              <a:lnSpc>
-                <a:spcPts val="2304"/>
-              </a:lnSpc>
-              <a:spcAft>
-                <a:spcPts val="0"/>
-              </a:spcAft>
-            </a:pPr>
-            <a:r>
-              <a:rPr sz="1800" b="1" i="0">
-                <a:solidFill>
-                  <a:srgbClr val="102D5E"/>
-                </a:solidFill>
-                <a:latin typeface="Garamond"/>
-              </a:rPr>
-              <a:t>159</a:t>
-            </a:r>
-          </a:p>
-        </p:txBody>
-      </p:sp>
-      <p:sp>
-        <p:nvSpPr>
-          <p:cNvPr id="33" name="TextBox 32"/>
-          <p:cNvSpPr txBox="1"/>
-          <p:nvPr/>
-        </p:nvSpPr>
-        <p:spPr>
-          <a:xfrm>
-            <a:off x="6309360" y="4233672"/>
-            <a:ext cx="1005840" cy="411480"/>
-          </a:xfrm>
-          <a:prstGeom prst="rect">
-            <a:avLst/>
-          </a:prstGeom>
-          <a:noFill/>
-        </p:spPr>
-        <p:txBody>
-          <a:bodyPr wrap="square" lIns="0" rIns="0" tIns="0" bIns="0">
-            <a:spAutoFit/>
-          </a:bodyPr>
-          <a:lstStyle/>
-          <a:p>
-            <a:pPr algn="ctr">
-              <a:lnSpc>
-                <a:spcPts val="2304"/>
-              </a:lnSpc>
-              <a:spcAft>
-                <a:spcPts val="0"/>
-              </a:spcAft>
-            </a:pPr>
-            <a:r>
-              <a:rPr sz="1800" b="0" i="0">
-                <a:solidFill>
-                  <a:srgbClr val="6B7480"/>
-                </a:solidFill>
-                <a:latin typeface="Garamond"/>
-              </a:rPr>
-              <a:t>→</a:t>
-            </a:r>
-          </a:p>
-        </p:txBody>
-      </p:sp>
-      <p:sp>
-        <p:nvSpPr>
-          <p:cNvPr id="34" name="TextBox 33"/>
-          <p:cNvSpPr txBox="1"/>
-          <p:nvPr/>
-        </p:nvSpPr>
-        <p:spPr>
-          <a:xfrm>
-            <a:off x="7223760" y="4233672"/>
-            <a:ext cx="1737360" cy="411480"/>
-          </a:xfrm>
-          <a:prstGeom prst="rect">
-            <a:avLst/>
-          </a:prstGeom>
-          <a:noFill/>
-        </p:spPr>
-        <p:txBody>
-          <a:bodyPr wrap="square" lIns="0" rIns="0" tIns="0" bIns="0">
-            <a:spAutoFit/>
-          </a:bodyPr>
-          <a:lstStyle/>
-          <a:p>
-            <a:pPr algn="ctr">
-              <a:lnSpc>
-                <a:spcPts val="2304"/>
-              </a:lnSpc>
-              <a:spcAft>
-                <a:spcPts val="0"/>
-              </a:spcAft>
-            </a:pPr>
-            <a:r>
-              <a:rPr sz="1800" b="1" i="0">
-                <a:solidFill>
-                  <a:srgbClr val="102D5E"/>
-                </a:solidFill>
-                <a:latin typeface="Garamond"/>
-              </a:rPr>
-              <a:t>2340</a:t>
-            </a:r>
-          </a:p>
-        </p:txBody>
-      </p:sp>
-      <p:sp>
-        <p:nvSpPr>
-          <p:cNvPr id="35" name="TextBox 34"/>
-          <p:cNvSpPr txBox="1"/>
-          <p:nvPr/>
-        </p:nvSpPr>
-        <p:spPr>
-          <a:xfrm>
-            <a:off x="8869680" y="4233672"/>
-            <a:ext cx="1005840" cy="411480"/>
-          </a:xfrm>
-          <a:prstGeom prst="rect">
-            <a:avLst/>
-          </a:prstGeom>
-          <a:noFill/>
-        </p:spPr>
-        <p:txBody>
-          <a:bodyPr wrap="square" lIns="0" rIns="0" tIns="0" bIns="0">
-            <a:spAutoFit/>
-          </a:bodyPr>
-          <a:lstStyle/>
-          <a:p>
-            <a:pPr algn="ctr">
-              <a:lnSpc>
-                <a:spcPts val="2304"/>
-              </a:lnSpc>
-              <a:spcAft>
-                <a:spcPts val="0"/>
-              </a:spcAft>
-            </a:pPr>
-            <a:r>
-              <a:rPr sz="1800" b="1" i="0">
-                <a:solidFill>
-                  <a:srgbClr val="8F2B36"/>
-                </a:solidFill>
-                <a:latin typeface="Garamond"/>
-              </a:rPr>
-              <a:t>→</a:t>
-            </a:r>
-          </a:p>
-        </p:txBody>
-      </p:sp>
-      <p:sp>
-        <p:nvSpPr>
-          <p:cNvPr id="36" name="TextBox 35"/>
-          <p:cNvSpPr txBox="1"/>
-          <p:nvPr/>
-        </p:nvSpPr>
-        <p:spPr>
-          <a:xfrm>
-            <a:off x="9784080" y="4233672"/>
-            <a:ext cx="1737360" cy="411480"/>
-          </a:xfrm>
-          <a:prstGeom prst="rect">
-            <a:avLst/>
-          </a:prstGeom>
-          <a:noFill/>
-        </p:spPr>
-        <p:txBody>
-          <a:bodyPr wrap="square" lIns="0" rIns="0" tIns="0" bIns="0">
-            <a:spAutoFit/>
-          </a:bodyPr>
-          <a:lstStyle/>
-          <a:p>
-            <a:pPr algn="ctr">
-              <a:lnSpc>
-                <a:spcPts val="2304"/>
-              </a:lnSpc>
-              <a:spcAft>
-                <a:spcPts val="0"/>
-              </a:spcAft>
-            </a:pPr>
-            <a:r>
-              <a:rPr sz="1800" b="1" i="0">
-                <a:solidFill>
-                  <a:srgbClr val="8F2B36"/>
-                </a:solidFill>
-                <a:latin typeface="Garamond"/>
-              </a:rPr>
-              <a:t>2360</a:t>
-            </a:r>
-          </a:p>
-        </p:txBody>
-      </p:sp>
-      <p:sp>
-        <p:nvSpPr>
-          <p:cNvPr id="37" name="TextBox 36"/>
-          <p:cNvSpPr txBox="1"/>
-          <p:nvPr/>
-        </p:nvSpPr>
-        <p:spPr>
-          <a:xfrm>
-            <a:off x="822960" y="5120640"/>
-            <a:ext cx="10789920" cy="914400"/>
-          </a:xfrm>
-          <a:prstGeom prst="rect">
-            <a:avLst/>
-          </a:prstGeom>
-          <a:noFill/>
-        </p:spPr>
-        <p:txBody>
-          <a:bodyPr wrap="square" lIns="0" rIns="0" tIns="0" bIns="0">
-            <a:spAutoFit/>
-          </a:bodyPr>
-          <a:lstStyle/>
-          <a:p>
-            <a:pPr algn="l">
-              <a:lnSpc>
-                <a:spcPts val="2304"/>
-              </a:lnSpc>
-              <a:spcAft>
-                <a:spcPts val="0"/>
-              </a:spcAft>
-            </a:pPr>
-            <a:r>
-              <a:rPr sz="1800" b="0" i="0">
-                <a:solidFill>
-                  <a:srgbClr val="212529"/>
-                </a:solidFill>
-                <a:latin typeface="Garamond"/>
-              </a:rPr>
-              <a:t>In 2003 every code changed but the five categories did not. In 2020 a single code changed. We always use the block, never a single code across regimes.</a:t>
-            </a:r>
-          </a:p>
-        </p:txBody>
-      </p:sp>
-      <p:sp>
-        <p:nvSpPr>
-          <p:cNvPr id="38" name="Rounded Rectangle 37">
+              <a:t>Our results are robust to this boundary: dropping special education teachers (d) and the residual category (e) moves the pooled leaving rate by 0.1 points (8.7 to 8.6).</a:t>
+            </a:r>
+          </a:p>
+        </p:txBody>
+      </p:sp>
+      <p:sp>
+        <p:nvSpPr>
+          <p:cNvPr id="7" name="Rounded Rectangle 6">
             <a:hlinkClick action="ppaction://hlinksldjump" r:id="rId2"/>
           </p:cNvPr>
           <p:cNvSpPr/>

--- a/report/data_cluster/Proyect_US_cluster.pptx
+++ b/report/data_cluster/Proyect_US_cluster.pptx
@@ -29096,7 +29096,7 @@
                 </a:solidFill>
                 <a:latin typeface="Garamond"/>
               </a:rPr>
-              <a:t>Our results are robust to this boundary: dropping special education teachers (d) and the residual category (e) moves the pooled leaving rate by 0.1 points (8.7 to 8.6).</a:t>
+              <a:t>Our results are robust to this boundary: dropping special education teachers (d) and the residual category (e) moves the pooled leaving rate by 0.1 points (8.6 to 8.7).</a:t>
             </a:r>
           </a:p>
         </p:txBody>

--- a/report/data_cluster/Proyect_US_cluster.pptx
+++ b/report/data_cluster/Proyect_US_cluster.pptx
@@ -20903,7 +20903,7 @@
                 </a:solidFill>
                 <a:latin typeface="Garamond"/>
               </a:rPr>
-              <a:t>Recomputing the whole series on the narrow core moves the pooled rate by 0.1 points. The 2003 and 2020 reclassifications leave no visible break.</a:t>
+              <a:t>Recomputing the whole series on the three core codes moves the 1997–2024 average from 8.6 to 8.7. The 2003 and 2020 reclassifications leave no visible break.</a:t>
             </a:r>
           </a:p>
         </p:txBody>
@@ -29096,7 +29096,7 @@
                 </a:solidFill>
                 <a:latin typeface="Garamond"/>
               </a:rPr>
-              <a:t>Our results are robust to this boundary: dropping special education teachers (d) and the residual category (e) moves the pooled leaving rate by 0.1 points (8.6 to 8.7).</a:t>
+              <a:t>Our results are robust to this boundary: dropping special education teachers (d) and the residual category (e) moves the 1997–2024 average leaving rate from 8.6 to 8.7.</a:t>
             </a:r>
           </a:p>
         </p:txBody>

--- a/report/data_cluster/Proyect_US_cluster.pptx
+++ b/report/data_cluster/Proyect_US_cluster.pptx
@@ -10026,7 +10026,7 @@
       </p:sp>
       <p:pic>
         <p:nvPicPr>
-          <p:cNvPr id="4" name="Picture 3" descr="study_olf55.png"/>
+          <p:cNvPr id="4" name="Picture 3" descr="study_bygroup.png"/>
           <p:cNvPicPr>
             <a:picLocks noChangeAspect="1"/>
           </p:cNvPicPr>
@@ -10040,8 +10040,8 @@
         </p:blipFill>
         <p:spPr>
           <a:xfrm>
-            <a:off x="1184987" y="1051560"/>
-            <a:ext cx="9791544" cy="4526280"/>
+            <a:off x="1357685" y="1051560"/>
+            <a:ext cx="9446149" cy="4526280"/>
           </a:xfrm>
           <a:prstGeom prst="rect">
             <a:avLst/>
@@ -10094,7 +10094,7 @@
                 </a:solidFill>
                 <a:latin typeface="Garamond"/>
               </a:rPr>
-              <a:t>Leaving to study follows age, and teacher leavers mirror the typical graduate out of the labor force: 45% of those under 30 are enrolled in school, next to 60% among all graduates. After 40, almost none study.</a:t>
+              <a:t>Studying is the exit of the young and the childless, not of the mothers. Among leavers under 30, almost half are enrolled in school.</a:t>
             </a:r>
           </a:p>
         </p:txBody>
@@ -10221,7 +10221,16 @@
                 </a:solidFill>
                 <a:latin typeface="Garamond"/>
               </a:rPr>
-              <a:t>Retirees</a:t>
+              <a:t>Retirees </a:t>
+            </a:r>
+            <a:r>
+              <a:rPr sz="1800" b="0" i="0">
+                <a:solidFill>
+                  <a:srgbClr val="6B7480"/>
+                </a:solidFill>
+                <a:latin typeface="Garamond"/>
+              </a:rPr>
+              <a:t>(out of the labor force, over 55)</a:t>
             </a:r>
           </a:p>
         </p:txBody>
@@ -10305,7 +10314,16 @@
                 </a:solidFill>
                 <a:latin typeface="Garamond"/>
               </a:rPr>
-              <a:t>Switchers</a:t>
+              <a:t>Switchers </a:t>
+            </a:r>
+            <a:r>
+              <a:rPr sz="1800" b="0" i="0">
+                <a:solidFill>
+                  <a:srgbClr val="6B7480"/>
+                </a:solidFill>
+                <a:latin typeface="Garamond"/>
+              </a:rPr>
+              <a:t>(employed in another job)</a:t>
             </a:r>
           </a:p>
         </p:txBody>
@@ -10389,7 +10407,16 @@
                 </a:solidFill>
                 <a:latin typeface="Garamond"/>
               </a:rPr>
-              <a:t>Early exits</a:t>
+              <a:t>Early exits </a:t>
+            </a:r>
+            <a:r>
+              <a:rPr sz="1800" b="0" i="0">
+                <a:solidFill>
+                  <a:srgbClr val="6B7480"/>
+                </a:solidFill>
+                <a:latin typeface="Garamond"/>
+              </a:rPr>
+              <a:t>(out of the labor force, under 55)</a:t>
             </a:r>
           </a:p>
         </p:txBody>

--- a/report/data_cluster/Proyect_US_cluster.pptx
+++ b/report/data_cluster/Proyect_US_cluster.pptx
@@ -4661,7 +4661,7 @@
                 </a:solidFill>
                 <a:latin typeface="Garamond"/>
               </a:rPr>
-              <a:t>Less sample. One observation per person per year (~3,700 teachers) against ~11,000 monthly teacher observations.</a:t>
+              <a:t>Less sample. We keep one month per year: ~110–150k adults in the ASEC against about one million basic interviews over the twelve months (~3,700 vs ~11,000 teacher observations a year).</a:t>
             </a:r>
           </a:p>
           <a:p>

--- a/report/data_cluster/Proyect_US_cluster.pptx
+++ b/report/data_cluster/Proyect_US_cluster.pptx
@@ -4661,7 +4661,7 @@
                 </a:solidFill>
                 <a:latin typeface="Garamond"/>
               </a:rPr>
-              <a:t>Less sample. We keep one month per year: ~110–150k adults in the ASEC against about one million basic interviews over the twelve months (~3,700 vs ~11,000 teacher observations a year).</a:t>
+              <a:t>Less sample. The ASEC sees each teacher once a year, ~4,000 in all. The twelve monthly files see ~11,000 distinct teachers, about three times each. We give up two of every three teachers in exchange for the retrospective questions, which only March asks.</a:t>
             </a:r>
           </a:p>
           <a:p>

--- a/report/data_cluster/Proyect_US_cluster.pptx
+++ b/report/data_cluster/Proyect_US_cluster.pptx
@@ -4661,7 +4661,7 @@
                 </a:solidFill>
                 <a:latin typeface="Garamond"/>
               </a:rPr>
-              <a:t>Less sample. The ASEC sees each teacher once a year, ~4,000 in all. The twelve monthly files see ~11,000 distinct teachers, about three times each. We give up two of every three teachers in exchange for the retrospective questions, which only March asks.</a:t>
+              <a:t>Less sample. Using only March, we observe ~4,000 teachers a year, once each. Using all twelve months we would observe ~11,000 teachers, three times each — but the retrospective questions that define the leaving rate are only asked in March.</a:t>
             </a:r>
           </a:p>
           <a:p>
@@ -28745,7 +28745,7 @@
                 </a:solidFill>
                 <a:latin typeface="Garamond"/>
               </a:rPr>
-              <a:t>About 90,000 households, counting the March sample plus oversamples interviewed in February and April.</a:t>
+              <a:t>About 70,000 interviewed households a year (78,000 in 2002, 56,000 in 2024): the March sample plus oversamples interviewed in February and April.</a:t>
             </a:r>
           </a:p>
           <a:p>

--- a/report/data_cluster/Proyect_US_cluster.pptx
+++ b/report/data_cluster/Proyect_US_cluster.pptx
@@ -28745,7 +28745,7 @@
                 </a:solidFill>
                 <a:latin typeface="Garamond"/>
               </a:rPr>
-              <a:t>About 70,000 interviewed households a year (78,000 in 2002, 56,000 in 2024): the March sample plus oversamples interviewed in February and April.</a:t>
+              <a:t>In a normal month the CPS interviews about 50,000 households; in March the supplement adds some 20,000 more, interviewed in February and April — about 70,000 households in all.</a:t>
             </a:r>
           </a:p>
           <a:p>

--- a/report/data_cluster/Proyect_US_cluster.pptx
+++ b/report/data_cluster/Proyect_US_cluster.pptx
@@ -4406,14 +4406,14 @@
           <a:p>
             <a:pPr algn="l">
               <a:lnSpc>
-                <a:spcPts val="2048"/>
-              </a:lnSpc>
-              <a:spcAft>
-                <a:spcPts val="1500"/>
-              </a:spcAft>
-            </a:pPr>
-            <a:r>
-              <a:rPr sz="1600" b="1" i="0">
+                <a:spcPts val="1920"/>
+              </a:lnSpc>
+              <a:spcAft>
+                <a:spcPts val="1300"/>
+              </a:spcAft>
+            </a:pPr>
+            <a:r>
+              <a:rPr sz="1500" b="1" i="0">
                 <a:solidFill>
                   <a:srgbClr val="2D6CB5"/>
                 </a:solidFill>
@@ -4422,26 +4422,26 @@
               <a:t>1.   </a:t>
             </a:r>
             <a:r>
-              <a:rPr sz="1600" b="0" i="0">
+              <a:rPr sz="1500" b="0" i="0">
                 <a:solidFill>
                   <a:srgbClr val="212529"/>
                 </a:solidFill>
                 <a:latin typeface="Garamond"/>
               </a:rPr>
-              <a:t>Identity is not certain, validation can admit noisy people.</a:t>
+              <a:t>Individual matching errors: the sex–race–age check discards ~5% of links; a same-profile replacement slipping through is not measurable.</a:t>
             </a:r>
           </a:p>
           <a:p>
             <a:pPr algn="l">
               <a:lnSpc>
-                <a:spcPts val="2048"/>
-              </a:lnSpc>
-              <a:spcAft>
-                <a:spcPts val="1500"/>
-              </a:spcAft>
-            </a:pPr>
-            <a:r>
-              <a:rPr sz="1600" b="1" i="0">
+                <a:spcPts val="1920"/>
+              </a:lnSpc>
+              <a:spcAft>
+                <a:spcPts val="1300"/>
+              </a:spcAft>
+            </a:pPr>
+            <a:r>
+              <a:rPr sz="1500" b="1" i="0">
                 <a:solidFill>
                   <a:srgbClr val="2D6CB5"/>
                 </a:solidFill>
@@ -4450,26 +4450,26 @@
               <a:t>2.   </a:t>
             </a:r>
             <a:r>
-              <a:rPr sz="1600" b="0" i="0">
+              <a:rPr sz="1500" b="0" i="0">
                 <a:solidFill>
                   <a:srgbClr val="212529"/>
                 </a:solidFill>
                 <a:latin typeface="Garamond"/>
               </a:rPr>
-              <a:t>Movers are lost. About 25% of addresses are not found a year later.</a:t>
+              <a:t>Internal migration: ~8% of people move home each year, and a move breaks the address link.</a:t>
             </a:r>
           </a:p>
           <a:p>
             <a:pPr algn="l">
               <a:lnSpc>
-                <a:spcPts val="2048"/>
-              </a:lnSpc>
-              <a:spcAft>
-                <a:spcPts val="1500"/>
-              </a:spcAft>
-            </a:pPr>
-            <a:r>
-              <a:rPr sz="1600" b="1" i="0">
+                <a:spcPts val="1920"/>
+              </a:lnSpc>
+              <a:spcAft>
+                <a:spcPts val="1300"/>
+              </a:spcAft>
+            </a:pPr>
+            <a:r>
+              <a:rPr sz="1500" b="1" i="0">
                 <a:solidFill>
                   <a:srgbClr val="2D6CB5"/>
                 </a:solidFill>
@@ -4478,26 +4478,26 @@
               <a:t>3.   </a:t>
             </a:r>
             <a:r>
-              <a:rPr sz="1600" b="0" i="0">
+              <a:rPr sz="1500" b="0" i="0">
                 <a:solidFill>
                   <a:srgbClr val="212529"/>
                 </a:solidFill>
                 <a:latin typeface="Garamond"/>
               </a:rPr>
-              <a:t>Normal household attrition on top.</a:t>
+              <a:t>Normal survey attrition: 6–9% of due re-interviews are missed each month; ~17% of teachers never reappear in year 2.</a:t>
             </a:r>
           </a:p>
           <a:p>
             <a:pPr algn="l">
               <a:lnSpc>
-                <a:spcPts val="2048"/>
-              </a:lnSpc>
-              <a:spcAft>
-                <a:spcPts val="1500"/>
-              </a:spcAft>
-            </a:pPr>
-            <a:r>
-              <a:rPr sz="1600" b="1" i="0">
+                <a:spcPts val="1920"/>
+              </a:lnSpc>
+              <a:spcAft>
+                <a:spcPts val="1300"/>
+              </a:spcAft>
+            </a:pPr>
+            <a:r>
+              <a:rPr sz="1500" b="1" i="0">
                 <a:solidFill>
                   <a:srgbClr val="2D6CB5"/>
                 </a:solidFill>
@@ -4506,7 +4506,7 @@
               <a:t>4.   </a:t>
             </a:r>
             <a:r>
-              <a:rPr sz="1600" b="0" i="0">
+              <a:rPr sz="1500" b="0" i="0">
                 <a:solidFill>
                   <a:srgbClr val="212529"/>
                 </a:solidFill>
@@ -4518,14 +4518,14 @@
           <a:p>
             <a:pPr algn="l">
               <a:lnSpc>
-                <a:spcPts val="2048"/>
-              </a:lnSpc>
-              <a:spcAft>
-                <a:spcPts val="0"/>
-              </a:spcAft>
-            </a:pPr>
-            <a:r>
-              <a:rPr sz="1600" b="1" i="0">
+                <a:spcPts val="1920"/>
+              </a:lnSpc>
+              <a:spcAft>
+                <a:spcPts val="0"/>
+              </a:spcAft>
+            </a:pPr>
+            <a:r>
+              <a:rPr sz="1500" b="1" i="0">
                 <a:solidFill>
                   <a:srgbClr val="2D6CB5"/>
                 </a:solidFill>
@@ -4534,7 +4534,7 @@
               <a:t>5.   </a:t>
             </a:r>
             <a:r>
-              <a:rPr sz="1600" b="0" i="0">
+              <a:rPr sz="1500" b="0" i="0">
                 <a:solidFill>
                   <a:srgbClr val="212529"/>
                 </a:solidFill>

--- a/report/data_cluster/Proyect_US_cluster.pptx
+++ b/report/data_cluster/Proyect_US_cluster.pptx
@@ -4456,7 +4456,7 @@
                 </a:solidFill>
                 <a:latin typeface="Garamond"/>
               </a:rPr>
-              <a:t>Internal migration: ~8% of people move home each year, and a move breaks the address link.</a:t>
+              <a:t>Internal migration: ~8% a year — the address responds but the person has moved (the Census mover rate is 8%).</a:t>
             </a:r>
           </a:p>
           <a:p>
@@ -4484,7 +4484,7 @@
                 </a:solidFill>
                 <a:latin typeface="Garamond"/>
               </a:rPr>
-              <a:t>Normal survey attrition: 6–9% of due re-interviews are missed each month; ~17% of teachers never reappear in year 2.</a:t>
+              <a:t>Normal survey attrition: ~10% a year — the address is due for re-interview but never responds again (7% in 2015, 12% in 2023).</a:t>
             </a:r>
           </a:p>
           <a:p>

--- a/report/data_cluster/Proyect_US_cluster.pptx
+++ b/report/data_cluster/Proyect_US_cluster.pptx
@@ -8967,7 +8967,7 @@
                 </a:solidFill>
                 <a:latin typeface="Garamond"/>
               </a:rPr>
-              <a:t>A third find another job, a third retire, and the rest split between early labor-force exit and unemployment.</a:t>
+              <a:t>Teachers are not being poached: 7 of every 10 leavers exit employment altogether — to retirement, home or unemployment. Only 3 in 10 trade teaching for another job.</a:t>
             </a:r>
           </a:p>
         </p:txBody>

--- a/report/data_cluster/Proyect_US_cluster.pptx
+++ b/report/data_cluster/Proyect_US_cluster.pptx
@@ -10596,14 +10596,14 @@
           <a:p>
             <a:pPr algn="l">
               <a:lnSpc>
-                <a:spcPts val="2048"/>
-              </a:lnSpc>
-              <a:spcAft>
-                <a:spcPts val="0"/>
-              </a:spcAft>
-            </a:pPr>
-            <a:r>
-              <a:rPr sz="1600" b="1" i="0">
+                <a:spcPts val="1855"/>
+              </a:lnSpc>
+              <a:spcAft>
+                <a:spcPts val="0"/>
+              </a:spcAft>
+            </a:pPr>
+            <a:r>
+              <a:rPr sz="1450" b="1" i="0">
                 <a:solidFill>
                   <a:srgbClr val="102D5E"/>
                 </a:solidFill>
@@ -10612,13 +10612,13 @@
               <a:t>Key message.  </a:t>
             </a:r>
             <a:r>
-              <a:rPr sz="1600" b="0" i="0">
+              <a:rPr sz="1450" b="0" i="0">
                 <a:solidFill>
                   <a:srgbClr val="212529"/>
                 </a:solidFill>
                 <a:latin typeface="Garamond"/>
               </a:rPr>
-              <a:t>The risk of leaving is highest at the two ends of the career. The young leave for other jobs; the old leave the labor force.</a:t>
+              <a:t>The two peaks call for different levers: the young trade teaching for other jobs — a retention problem (mentorship, secure placements, early-career conditions); the old leave the labor force — a timing problem (extending careers). Re-attraction can only work on the first.</a:t>
             </a:r>
           </a:p>
         </p:txBody>

--- a/report/data_cluster/Proyect_US_cluster.pptx
+++ b/report/data_cluster/Proyect_US_cluster.pptx
@@ -10596,14 +10596,14 @@
           <a:p>
             <a:pPr algn="l">
               <a:lnSpc>
-                <a:spcPts val="1855"/>
-              </a:lnSpc>
-              <a:spcAft>
-                <a:spcPts val="0"/>
-              </a:spcAft>
-            </a:pPr>
-            <a:r>
-              <a:rPr sz="1450" b="1" i="0">
+                <a:spcPts val="2048"/>
+              </a:lnSpc>
+              <a:spcAft>
+                <a:spcPts val="0"/>
+              </a:spcAft>
+            </a:pPr>
+            <a:r>
+              <a:rPr sz="1600" b="1" i="0">
                 <a:solidFill>
                   <a:srgbClr val="102D5E"/>
                 </a:solidFill>
@@ -10612,13 +10612,13 @@
               <a:t>Key message.  </a:t>
             </a:r>
             <a:r>
-              <a:rPr sz="1450" b="0" i="0">
+              <a:rPr sz="1600" b="0" i="0">
                 <a:solidFill>
                   <a:srgbClr val="212529"/>
                 </a:solidFill>
                 <a:latin typeface="Garamond"/>
               </a:rPr>
-              <a:t>The two peaks call for different levers: the young trade teaching for other jobs — a retention problem (mentorship, secure placements, early-career conditions); the old leave the labor force — a timing problem (extending careers). Re-attraction can only work on the first.</a:t>
+              <a:t>Each peak needs its own lever: retention for the young, who leave for other jobs; career extension for the old, who retire.</a:t>
             </a:r>
           </a:p>
         </p:txBody>

--- a/report/data_cluster/Proyect_US_cluster.pptx
+++ b/report/data_cluster/Proyect_US_cluster.pptx
@@ -10618,7 +10618,7 @@
                 </a:solidFill>
                 <a:latin typeface="Garamond"/>
               </a:rPr>
-              <a:t>Each peak needs its own lever: retention for the young, who leave for other jobs; career extension for the old, who retire.</a:t>
+              <a:t>The young leave for other jobs and the old retire: two exits, two different policy problems.</a:t>
             </a:r>
           </a:p>
         </p:txBody>

--- a/report/data_cluster/Proyect_US_cluster.pptx
+++ b/report/data_cluster/Proyect_US_cluster.pptx
@@ -10618,7 +10618,7 @@
                 </a:solidFill>
                 <a:latin typeface="Garamond"/>
               </a:rPr>
-              <a:t>The young leave for other jobs and the old retire: two exits, two different policy problems.</a:t>
+              <a:t>Put retention efforts where they can work: the first years of the career (mentoring, stable placements). Retirements can only be planned for, not prevented.</a:t>
             </a:r>
           </a:p>
         </p:txBody>

--- a/report/data_cluster/Proyect_US_cluster.pptx
+++ b/report/data_cluster/Proyect_US_cluster.pptx
@@ -12014,8 +12014,8 @@
         </p:nvSpPr>
         <p:spPr>
           <a:xfrm>
-            <a:off x="822960" y="1600200"/>
-            <a:ext cx="10789920" cy="548640"/>
+            <a:off x="822960" y="1417320"/>
+            <a:ext cx="10789920" cy="822960"/>
           </a:xfrm>
           <a:prstGeom prst="rect">
             <a:avLst/>
@@ -12043,7 +12043,7 @@
                 </a:solidFill>
                 <a:latin typeface="Garamond"/>
               </a:rPr>
-              <a:t>We use the Current Population Survey to</a:t>
+              <a:t>We build one of the longest continuous measures of teacher attrition in the United States: twenty-eight consecutive years, 1998–2025.</a:t>
             </a:r>
           </a:p>
         </p:txBody>
@@ -12056,7 +12056,7 @@
         </p:nvSpPr>
         <p:spPr>
           <a:xfrm>
-            <a:off x="822960" y="2788920"/>
+            <a:off x="822960" y="2743200"/>
             <a:ext cx="10789920" cy="5120640"/>
           </a:xfrm>
           <a:prstGeom prst="rect">
@@ -12072,57 +12072,112 @@
           <a:p>
             <a:pPr algn="l">
               <a:lnSpc>
-                <a:spcPts val="2816"/>
-              </a:lnSpc>
-              <a:spcAft>
-                <a:spcPts val="4400"/>
-              </a:spcAft>
-            </a:pPr>
-            <a:r>
-              <a:rPr sz="2200" b="1" i="0">
+                <a:spcPts val="2560"/>
+              </a:lnSpc>
+              <a:spcAft>
+                <a:spcPts val="3000"/>
+              </a:spcAft>
+            </a:pPr>
+            <a:r>
+              <a:rPr sz="2000" b="1" i="0">
                 <a:solidFill>
                   <a:srgbClr val="2D6CB5"/>
                 </a:solidFill>
                 <a:latin typeface="Garamond"/>
               </a:rPr>
-              <a:t>1.   </a:t>
-            </a:r>
-            <a:r>
-              <a:rPr sz="2200" b="0" i="0">
+              <a:t>▪  </a:t>
+            </a:r>
+            <a:r>
+              <a:rPr sz="2000" b="1" i="0">
+                <a:solidFill>
+                  <a:srgbClr val="102D5E"/>
+                </a:solidFill>
+                <a:latin typeface="Garamond"/>
+              </a:rPr>
+              <a:t>One source.  </a:t>
+            </a:r>
+            <a:r>
+              <a:rPr sz="2000" b="0" i="0">
                 <a:solidFill>
                   <a:srgbClr val="212529"/>
                 </a:solidFill>
                 <a:latin typeface="Garamond"/>
               </a:rPr>
-              <a:t>reproduce and extend the official statistics on teachers leaving the profession;</a:t>
+              <a:t>Every number comes from the same instrument — the CPS March supplement — under a single definition, with no splicing of surveys.</a:t>
             </a:r>
           </a:p>
           <a:p>
             <a:pPr algn="l">
               <a:lnSpc>
-                <a:spcPts val="2816"/>
-              </a:lnSpc>
-              <a:spcAft>
-                <a:spcPts val="0"/>
-              </a:spcAft>
-            </a:pPr>
-            <a:r>
-              <a:rPr sz="2200" b="1" i="0">
+                <a:spcPts val="2560"/>
+              </a:lnSpc>
+              <a:spcAft>
+                <a:spcPts val="3000"/>
+              </a:spcAft>
+            </a:pPr>
+            <a:r>
+              <a:rPr sz="2000" b="1" i="0">
                 <a:solidFill>
                   <a:srgbClr val="2D6CB5"/>
                 </a:solidFill>
                 <a:latin typeface="Garamond"/>
               </a:rPr>
-              <a:t>2.   </a:t>
-            </a:r>
-            <a:r>
-              <a:rPr sz="2200" b="0" i="0">
+              <a:t>▪  </a:t>
+            </a:r>
+            <a:r>
+              <a:rPr sz="2000" b="1" i="0">
+                <a:solidFill>
+                  <a:srgbClr val="102D5E"/>
+                </a:solidFill>
+                <a:latin typeface="Garamond"/>
+              </a:rPr>
+              <a:t>No gaps.  </a:t>
+            </a:r>
+            <a:r>
+              <a:rPr sz="2000" b="0" i="0">
                 <a:solidFill>
                   <a:srgbClr val="212529"/>
                 </a:solidFill>
                 <a:latin typeface="Garamond"/>
               </a:rPr>
-              <a:t>having achieved A, study in detail how many leave, where they go, and why.</a:t>
+              <a:t>Twenty-eight consecutive annual observations; the official benchmark measures once every four or more years.</a:t>
+            </a:r>
+          </a:p>
+          <a:p>
+            <a:pPr algn="l">
+              <a:lnSpc>
+                <a:spcPts val="2560"/>
+              </a:lnSpc>
+              <a:spcAft>
+                <a:spcPts val="0"/>
+              </a:spcAft>
+            </a:pPr>
+            <a:r>
+              <a:rPr sz="2000" b="1" i="0">
+                <a:solidFill>
+                  <a:srgbClr val="2D6CB5"/>
+                </a:solidFill>
+                <a:latin typeface="Garamond"/>
+              </a:rPr>
+              <a:t>▪  </a:t>
+            </a:r>
+            <a:r>
+              <a:rPr sz="2000" b="1" i="0">
+                <a:solidFill>
+                  <a:srgbClr val="102D5E"/>
+                </a:solidFill>
+                <a:latin typeface="Garamond"/>
+              </a:rPr>
+              <a:t>Beyond the rate.  </a:t>
+            </a:r>
+            <a:r>
+              <a:rPr sz="2000" b="0" i="0">
+                <a:solidFill>
+                  <a:srgbClr val="212529"/>
+                </a:solidFill>
+                <a:latin typeface="Garamond"/>
+              </a:rPr>
+              <a:t>The same files show who leaves, where they go, what leaving pays, who returns, and what moves the rate.</a:t>
             </a:r>
           </a:p>
         </p:txBody>

--- a/report/data_cluster/Proyect_US_cluster.pptx
+++ b/report/data_cluster/Proyect_US_cluster.pptx
@@ -12043,7 +12043,7 @@
                 </a:solidFill>
                 <a:latin typeface="Garamond"/>
               </a:rPr>
-              <a:t>We build one of the longest continuous measures of teacher attrition in the United States: twenty-eight consecutive years, 1998–2025.</a:t>
+              <a:t>We build one of the longest continuous measures of teacher attrition in the United States, twenty-eight consecutive years (1998–2025).</a:t>
             </a:r>
           </a:p>
         </p:txBody>
@@ -12103,7 +12103,7 @@
                 </a:solidFill>
                 <a:latin typeface="Garamond"/>
               </a:rPr>
-              <a:t>Every number comes from the same instrument — the CPS March supplement — under a single definition, with no splicing of surveys.</a:t>
+              <a:t>A single instrument and a single definition over the whole period.</a:t>
             </a:r>
           </a:p>
           <a:p>
@@ -12140,7 +12140,7 @@
                 </a:solidFill>
                 <a:latin typeface="Garamond"/>
               </a:rPr>
-              <a:t>Twenty-eight consecutive annual observations; the official benchmark measures once every four or more years.</a:t>
+              <a:t>Twenty-eight consecutive years against a quadrennial official benchmark.</a:t>
             </a:r>
           </a:p>
           <a:p>
@@ -12177,7 +12177,7 @@
                 </a:solidFill>
                 <a:latin typeface="Garamond"/>
               </a:rPr>
-              <a:t>The same files show who leaves, where they go, what leaving pays, who returns, and what moves the rate.</a:t>
+              <a:t>Who leaves, where they go, and what leaving pays.</a:t>
             </a:r>
           </a:p>
         </p:txBody>

--- a/report/data_cluster/Proyect_US_cluster.pptx
+++ b/report/data_cluster/Proyect_US_cluster.pptx
@@ -27805,7 +27805,7 @@
                 </a:solidFill>
                 <a:latin typeface="Garamond"/>
               </a:rPr>
-              <a:t>What the CPS observes, of why teachers leave</a:t>
+              <a:t>Determinants of leaving the teaching profession</a:t>
             </a:r>
           </a:p>
         </p:txBody>
@@ -27845,42 +27845,48 @@
           </a:p>
         </p:txBody>
       </p:sp>
-      <p:cxnSp>
-        <p:nvCxnSpPr>
-          <p:cNvPr id="4" name="Connector 3"/>
-          <p:cNvCxnSpPr/>
-          <p:nvPr/>
-        </p:nvCxnSpPr>
-        <p:spPr>
-          <a:xfrm>
-            <a:off x="822960" y="1645920"/>
-            <a:ext cx="10241280" cy="0"/>
-          </a:xfrm>
-          <a:prstGeom prst="line">
-            <a:avLst/>
-          </a:prstGeom>
-          <a:ln w="16510">
-            <a:solidFill>
-              <a:srgbClr val="212529"/>
-            </a:solidFill>
-          </a:ln>
-          <a:effectLst/>
-        </p:spPr>
-        <p:style>
-          <a:lnRef idx="2">
-            <a:schemeClr val="accent1"/>
-          </a:lnRef>
-          <a:fillRef idx="0">
-            <a:schemeClr val="accent1"/>
-          </a:fillRef>
-          <a:effectRef idx="1">
-            <a:schemeClr val="accent1"/>
-          </a:effectRef>
-          <a:fontRef idx="minor">
-            <a:schemeClr val="tx1"/>
-          </a:fontRef>
-        </p:style>
-      </p:cxnSp>
+      <p:sp>
+        <p:nvSpPr>
+          <p:cNvPr id="4" name="TextBox 3"/>
+          <p:cNvSpPr txBox="1"/>
+          <p:nvPr/>
+        </p:nvSpPr>
+        <p:spPr>
+          <a:xfrm>
+            <a:off x="822960" y="1115568"/>
+            <a:ext cx="10789920" cy="365760"/>
+          </a:xfrm>
+          <a:prstGeom prst="rect">
+            <a:avLst/>
+          </a:prstGeom>
+          <a:noFill/>
+        </p:spPr>
+        <p:txBody>
+          <a:bodyPr wrap="square" lIns="0" rIns="0" tIns="0" bIns="0">
+            <a:spAutoFit/>
+          </a:bodyPr>
+          <a:lstStyle/>
+          <a:p>
+            <a:pPr algn="l">
+              <a:lnSpc>
+                <a:spcPts val="1920"/>
+              </a:lnSpc>
+              <a:spcAft>
+                <a:spcPts val="0"/>
+              </a:spcAft>
+            </a:pPr>
+            <a:r>
+              <a:rPr sz="1500" b="0" i="1">
+                <a:solidFill>
+                  <a:srgbClr val="6B7480"/>
+                </a:solidFill>
+                <a:latin typeface="Garamond"/>
+              </a:rPr>
+              <a:t>From the initial literature review of our policy paper</a:t>
+            </a:r>
+          </a:p>
+        </p:txBody>
+      </p:sp>
       <p:sp>
         <p:nvSpPr>
           <p:cNvPr id="5" name="TextBox 4"/>
@@ -27889,8 +27895,8 @@
         </p:nvSpPr>
         <p:spPr>
           <a:xfrm>
-            <a:off x="822960" y="1755648"/>
-            <a:ext cx="6949440" cy="420624"/>
+            <a:off x="822960" y="1847088"/>
+            <a:ext cx="10789920" cy="365760"/>
           </a:xfrm>
           <a:prstGeom prst="rect">
             <a:avLst/>
@@ -27905,102 +27911,200 @@
           <a:p>
             <a:pPr algn="l">
               <a:lnSpc>
-                <a:spcPts val="2048"/>
-              </a:lnSpc>
-              <a:spcAft>
-                <a:spcPts val="0"/>
-              </a:spcAft>
-            </a:pPr>
-            <a:r>
-              <a:rPr sz="1600" b="1" i="0">
+                <a:spcPts val="2432"/>
+              </a:lnSpc>
+              <a:spcAft>
+                <a:spcPts val="0"/>
+              </a:spcAft>
+            </a:pPr>
+            <a:r>
+              <a:rPr sz="1900" b="1" i="0">
+                <a:solidFill>
+                  <a:srgbClr val="6B7480"/>
+                </a:solidFill>
+                <a:latin typeface="Garamond"/>
+              </a:rPr>
+              <a:t>In the literature, but not in the CPS</a:t>
+            </a:r>
+          </a:p>
+        </p:txBody>
+      </p:sp>
+      <p:sp>
+        <p:nvSpPr>
+          <p:cNvPr id="6" name="TextBox 5"/>
+          <p:cNvSpPr txBox="1"/>
+          <p:nvPr/>
+        </p:nvSpPr>
+        <p:spPr>
+          <a:xfrm>
+            <a:off x="822960" y="2359152"/>
+            <a:ext cx="10789920" cy="5120640"/>
+          </a:xfrm>
+          <a:prstGeom prst="rect">
+            <a:avLst/>
+          </a:prstGeom>
+          <a:noFill/>
+        </p:spPr>
+        <p:txBody>
+          <a:bodyPr wrap="square" lIns="0" rIns="0" tIns="0" bIns="0">
+            <a:spAutoFit/>
+          </a:bodyPr>
+          <a:lstStyle/>
+          <a:p>
+            <a:pPr algn="l">
+              <a:lnSpc>
+                <a:spcPts val="2176"/>
+              </a:lnSpc>
+              <a:spcAft>
+                <a:spcPts val="1200"/>
+              </a:spcAft>
+            </a:pPr>
+            <a:r>
+              <a:rPr sz="1700" b="1" i="0">
+                <a:solidFill>
+                  <a:srgbClr val="6B7480"/>
+                </a:solidFill>
+                <a:latin typeface="Garamond"/>
+              </a:rPr>
+              <a:t>▪  </a:t>
+            </a:r>
+            <a:r>
+              <a:rPr sz="1700" b="1" i="0">
+                <a:solidFill>
+                  <a:srgbClr val="102D5E"/>
+                </a:solidFill>
+                <a:latin typeface="Garamond"/>
+              </a:rPr>
+              <a:t>Working conditions.  </a:t>
+            </a:r>
+            <a:r>
+              <a:rPr sz="1700" b="0" i="0">
                 <a:solidFill>
                   <a:srgbClr val="212529"/>
                 </a:solidFill>
                 <a:latin typeface="Garamond"/>
               </a:rPr>
-              <a:t>Reasons in the literature</a:t>
-            </a:r>
-          </a:p>
-        </p:txBody>
-      </p:sp>
-      <p:sp>
-        <p:nvSpPr>
-          <p:cNvPr id="6" name="TextBox 5"/>
-          <p:cNvSpPr txBox="1"/>
-          <p:nvPr/>
-        </p:nvSpPr>
-        <p:spPr>
-          <a:xfrm>
-            <a:off x="7955279" y="1755648"/>
-            <a:ext cx="3108960" cy="420624"/>
-          </a:xfrm>
-          <a:prstGeom prst="rect">
-            <a:avLst/>
-          </a:prstGeom>
-          <a:noFill/>
-        </p:spPr>
-        <p:txBody>
-          <a:bodyPr wrap="square" lIns="0" rIns="0" tIns="0" bIns="0">
-            <a:spAutoFit/>
-          </a:bodyPr>
-          <a:lstStyle/>
+              <a:t>Workload, class size, and student behavior.</a:t>
+            </a:r>
+          </a:p>
           <a:p>
             <a:pPr algn="l">
               <a:lnSpc>
-                <a:spcPts val="2048"/>
-              </a:lnSpc>
-              <a:spcAft>
-                <a:spcPts val="0"/>
-              </a:spcAft>
-            </a:pPr>
-            <a:r>
-              <a:rPr sz="1600" b="1" i="0">
+                <a:spcPts val="2176"/>
+              </a:lnSpc>
+              <a:spcAft>
+                <a:spcPts val="1200"/>
+              </a:spcAft>
+            </a:pPr>
+            <a:r>
+              <a:rPr sz="1700" b="1" i="0">
+                <a:solidFill>
+                  <a:srgbClr val="6B7480"/>
+                </a:solidFill>
+                <a:latin typeface="Garamond"/>
+              </a:rPr>
+              <a:t>▪  </a:t>
+            </a:r>
+            <a:r>
+              <a:rPr sz="1700" b="1" i="0">
+                <a:solidFill>
+                  <a:srgbClr val="102D5E"/>
+                </a:solidFill>
+                <a:latin typeface="Garamond"/>
+              </a:rPr>
+              <a:t>Organizational support.  </a:t>
+            </a:r>
+            <a:r>
+              <a:rPr sz="1700" b="0" i="0">
                 <a:solidFill>
                   <a:srgbClr val="212529"/>
                 </a:solidFill>
                 <a:latin typeface="Garamond"/>
               </a:rPr>
-              <a:t>In the CPS?</a:t>
-            </a:r>
-          </a:p>
-        </p:txBody>
-      </p:sp>
-      <p:cxnSp>
-        <p:nvCxnSpPr>
-          <p:cNvPr id="7" name="Connector 6"/>
-          <p:cNvCxnSpPr/>
-          <p:nvPr/>
-        </p:nvCxnSpPr>
-        <p:spPr>
-          <a:xfrm>
-            <a:off x="822960" y="2194560"/>
-            <a:ext cx="10241280" cy="0"/>
-          </a:xfrm>
-          <a:prstGeom prst="line">
-            <a:avLst/>
-          </a:prstGeom>
-          <a:ln w="8890">
-            <a:solidFill>
-              <a:srgbClr val="212529"/>
-            </a:solidFill>
-          </a:ln>
-          <a:effectLst/>
-        </p:spPr>
-        <p:style>
-          <a:lnRef idx="2">
-            <a:schemeClr val="accent1"/>
-          </a:lnRef>
-          <a:fillRef idx="0">
-            <a:schemeClr val="accent1"/>
-          </a:fillRef>
-          <a:effectRef idx="1">
-            <a:schemeClr val="accent1"/>
-          </a:effectRef>
-          <a:fontRef idx="minor">
-            <a:schemeClr val="tx1"/>
-          </a:fontRef>
-        </p:style>
-      </p:cxnSp>
+              <a:t>Leadership, mentoring, and school climate.</a:t>
+            </a:r>
+          </a:p>
+          <a:p>
+            <a:pPr algn="l">
+              <a:lnSpc>
+                <a:spcPts val="2176"/>
+              </a:lnSpc>
+              <a:spcAft>
+                <a:spcPts val="0"/>
+              </a:spcAft>
+            </a:pPr>
+            <a:r>
+              <a:rPr sz="1700" b="1" i="0">
+                <a:solidFill>
+                  <a:srgbClr val="6B7480"/>
+                </a:solidFill>
+                <a:latin typeface="Garamond"/>
+              </a:rPr>
+              <a:t>▪  </a:t>
+            </a:r>
+            <a:r>
+              <a:rPr sz="1700" b="1" i="0">
+                <a:solidFill>
+                  <a:srgbClr val="102D5E"/>
+                </a:solidFill>
+                <a:latin typeface="Garamond"/>
+              </a:rPr>
+              <a:t>Autonomy and intrinsic motives.  </a:t>
+            </a:r>
+            <a:r>
+              <a:rPr sz="1700" b="0" i="0">
+                <a:solidFill>
+                  <a:srgbClr val="212529"/>
+                </a:solidFill>
+                <a:latin typeface="Garamond"/>
+              </a:rPr>
+              <a:t>Control over one's own work and the sense of vocation.</a:t>
+            </a:r>
+          </a:p>
+        </p:txBody>
+      </p:sp>
+      <p:sp>
+        <p:nvSpPr>
+          <p:cNvPr id="7" name="TextBox 6"/>
+          <p:cNvSpPr txBox="1"/>
+          <p:nvPr/>
+        </p:nvSpPr>
+        <p:spPr>
+          <a:xfrm>
+            <a:off x="822960" y="4041648"/>
+            <a:ext cx="10789920" cy="365760"/>
+          </a:xfrm>
+          <a:prstGeom prst="rect">
+            <a:avLst/>
+          </a:prstGeom>
+          <a:noFill/>
+        </p:spPr>
+        <p:txBody>
+          <a:bodyPr wrap="square" lIns="0" rIns="0" tIns="0" bIns="0">
+            <a:spAutoFit/>
+          </a:bodyPr>
+          <a:lstStyle/>
+          <a:p>
+            <a:pPr algn="l">
+              <a:lnSpc>
+                <a:spcPts val="2432"/>
+              </a:lnSpc>
+              <a:spcAft>
+                <a:spcPts val="0"/>
+              </a:spcAft>
+            </a:pPr>
+            <a:r>
+              <a:rPr sz="1900" b="1" i="0">
+                <a:solidFill>
+                  <a:srgbClr val="102D5E"/>
+                </a:solidFill>
+                <a:latin typeface="Garamond"/>
+              </a:rPr>
+              <a:t>What the CPS observes</a:t>
+            </a:r>
+          </a:p>
+        </p:txBody>
+      </p:sp>
       <p:sp>
         <p:nvSpPr>
           <p:cNvPr id="8" name="TextBox 7"/>
@@ -28009,8 +28113,8 @@
         </p:nvSpPr>
         <p:spPr>
           <a:xfrm>
-            <a:off x="822960" y="2304288"/>
-            <a:ext cx="6949440" cy="420624"/>
+            <a:off x="822960" y="4553712"/>
+            <a:ext cx="10789920" cy="5120640"/>
           </a:xfrm>
           <a:prstGeom prst="rect">
             <a:avLst/>
@@ -28025,561 +28129,119 @@
           <a:p>
             <a:pPr algn="l">
               <a:lnSpc>
-                <a:spcPts val="2048"/>
-              </a:lnSpc>
-              <a:spcAft>
-                <a:spcPts val="0"/>
-              </a:spcAft>
-            </a:pPr>
-            <a:r>
-              <a:rPr sz="1600" b="0" i="0">
+                <a:spcPts val="2176"/>
+              </a:lnSpc>
+              <a:spcAft>
+                <a:spcPts val="1200"/>
+              </a:spcAft>
+            </a:pPr>
+            <a:r>
+              <a:rPr sz="1700" b="1" i="0">
+                <a:solidFill>
+                  <a:srgbClr val="2D6CB5"/>
+                </a:solidFill>
+                <a:latin typeface="Garamond"/>
+              </a:rPr>
+              <a:t>▪  </a:t>
+            </a:r>
+            <a:r>
+              <a:rPr sz="1700" b="1" i="0">
+                <a:solidFill>
+                  <a:srgbClr val="102D5E"/>
+                </a:solidFill>
+                <a:latin typeface="Garamond"/>
+              </a:rPr>
+              <a:t>Financial factors.  </a:t>
+            </a:r>
+            <a:r>
+              <a:rPr sz="1700" b="0" i="0">
                 <a:solidFill>
                   <a:srgbClr val="212529"/>
                 </a:solidFill>
                 <a:latin typeface="Garamond"/>
               </a:rPr>
-              <a:t>Working conditions</a:t>
-            </a:r>
-          </a:p>
-        </p:txBody>
-      </p:sp>
-      <p:sp>
-        <p:nvSpPr>
-          <p:cNvPr id="9" name="TextBox 8"/>
-          <p:cNvSpPr txBox="1"/>
-          <p:nvPr/>
-        </p:nvSpPr>
-        <p:spPr>
-          <a:xfrm>
-            <a:off x="7955279" y="2304288"/>
-            <a:ext cx="3108960" cy="420624"/>
-          </a:xfrm>
-          <a:prstGeom prst="rect">
-            <a:avLst/>
-          </a:prstGeom>
-          <a:noFill/>
-        </p:spPr>
-        <p:txBody>
-          <a:bodyPr wrap="square" lIns="0" rIns="0" tIns="0" bIns="0">
-            <a:spAutoFit/>
-          </a:bodyPr>
-          <a:lstStyle/>
+              <a:t>Own earnings, household income, and the pay of the outside options.</a:t>
+            </a:r>
+          </a:p>
           <a:p>
             <a:pPr algn="l">
               <a:lnSpc>
-                <a:spcPts val="2048"/>
-              </a:lnSpc>
-              <a:spcAft>
-                <a:spcPts val="0"/>
-              </a:spcAft>
-            </a:pPr>
-            <a:r>
-              <a:rPr sz="1600" b="0" i="0">
-                <a:solidFill>
-                  <a:srgbClr val="6B7480"/>
-                </a:solidFill>
-                <a:latin typeface="Garamond"/>
-              </a:rPr>
-              <a:t>no</a:t>
-            </a:r>
-          </a:p>
-        </p:txBody>
-      </p:sp>
-      <p:sp>
-        <p:nvSpPr>
-          <p:cNvPr id="10" name="TextBox 9"/>
-          <p:cNvSpPr txBox="1"/>
-          <p:nvPr/>
-        </p:nvSpPr>
-        <p:spPr>
-          <a:xfrm>
-            <a:off x="822960" y="2724912"/>
-            <a:ext cx="6949440" cy="420624"/>
-          </a:xfrm>
-          <a:prstGeom prst="rect">
-            <a:avLst/>
-          </a:prstGeom>
-          <a:noFill/>
-        </p:spPr>
-        <p:txBody>
-          <a:bodyPr wrap="square" lIns="0" rIns="0" tIns="0" bIns="0">
-            <a:spAutoFit/>
-          </a:bodyPr>
-          <a:lstStyle/>
+                <a:spcPts val="2176"/>
+              </a:lnSpc>
+              <a:spcAft>
+                <a:spcPts val="1200"/>
+              </a:spcAft>
+            </a:pPr>
+            <a:r>
+              <a:rPr sz="1700" b="1" i="0">
+                <a:solidFill>
+                  <a:srgbClr val="2D6CB5"/>
+                </a:solidFill>
+                <a:latin typeface="Garamond"/>
+              </a:rPr>
+              <a:t>▪  </a:t>
+            </a:r>
+            <a:r>
+              <a:rPr sz="1700" b="1" i="0">
+                <a:solidFill>
+                  <a:srgbClr val="102D5E"/>
+                </a:solidFill>
+                <a:latin typeface="Garamond"/>
+              </a:rPr>
+              <a:t>Personal life-cycle motives.  </a:t>
+            </a:r>
+            <a:r>
+              <a:rPr sz="1700" b="0" i="0">
+                <a:solidFill>
+                  <a:srgbClr val="212529"/>
+                </a:solidFill>
+                <a:latin typeface="Garamond"/>
+              </a:rPr>
+              <a:t>Marriage, children, health, and retirement timing.</a:t>
+            </a:r>
+          </a:p>
           <a:p>
             <a:pPr algn="l">
               <a:lnSpc>
-                <a:spcPts val="2048"/>
-              </a:lnSpc>
-              <a:spcAft>
-                <a:spcPts val="0"/>
-              </a:spcAft>
-            </a:pPr>
-            <a:r>
-              <a:rPr sz="1600" b="0" i="0">
+                <a:spcPts val="2176"/>
+              </a:lnSpc>
+              <a:spcAft>
+                <a:spcPts val="0"/>
+              </a:spcAft>
+            </a:pPr>
+            <a:r>
+              <a:rPr sz="1700" b="1" i="0">
+                <a:solidFill>
+                  <a:srgbClr val="2D6CB5"/>
+                </a:solidFill>
+                <a:latin typeface="Garamond"/>
+              </a:rPr>
+              <a:t>▪  </a:t>
+            </a:r>
+            <a:r>
+              <a:rPr sz="1700" b="1" i="0">
+                <a:solidFill>
+                  <a:srgbClr val="102D5E"/>
+                </a:solidFill>
+                <a:latin typeface="Garamond"/>
+              </a:rPr>
+              <a:t>Sociodemographics.  </a:t>
+            </a:r>
+            <a:r>
+              <a:rPr sz="1700" b="0" i="0">
                 <a:solidFill>
                   <a:srgbClr val="212529"/>
                 </a:solidFill>
                 <a:latin typeface="Garamond"/>
               </a:rPr>
-              <a:t>Organizational support</a:t>
-            </a:r>
-          </a:p>
-        </p:txBody>
-      </p:sp>
-      <p:sp>
-        <p:nvSpPr>
-          <p:cNvPr id="11" name="TextBox 10"/>
-          <p:cNvSpPr txBox="1"/>
-          <p:nvPr/>
-        </p:nvSpPr>
-        <p:spPr>
-          <a:xfrm>
-            <a:off x="7955279" y="2724912"/>
-            <a:ext cx="3108960" cy="420624"/>
-          </a:xfrm>
-          <a:prstGeom prst="rect">
-            <a:avLst/>
-          </a:prstGeom>
-          <a:noFill/>
-        </p:spPr>
-        <p:txBody>
-          <a:bodyPr wrap="square" lIns="0" rIns="0" tIns="0" bIns="0">
-            <a:spAutoFit/>
-          </a:bodyPr>
-          <a:lstStyle/>
-          <a:p>
-            <a:pPr algn="l">
-              <a:lnSpc>
-                <a:spcPts val="2048"/>
-              </a:lnSpc>
-              <a:spcAft>
-                <a:spcPts val="0"/>
-              </a:spcAft>
-            </a:pPr>
-            <a:r>
-              <a:rPr sz="1600" b="0" i="0">
-                <a:solidFill>
-                  <a:srgbClr val="6B7480"/>
-                </a:solidFill>
-                <a:latin typeface="Garamond"/>
-              </a:rPr>
-              <a:t>no</a:t>
-            </a:r>
-          </a:p>
-        </p:txBody>
-      </p:sp>
-      <p:sp>
-        <p:nvSpPr>
-          <p:cNvPr id="12" name="TextBox 11"/>
-          <p:cNvSpPr txBox="1"/>
-          <p:nvPr/>
-        </p:nvSpPr>
-        <p:spPr>
-          <a:xfrm>
-            <a:off x="822960" y="3145536"/>
-            <a:ext cx="6949440" cy="420624"/>
-          </a:xfrm>
-          <a:prstGeom prst="rect">
-            <a:avLst/>
-          </a:prstGeom>
-          <a:noFill/>
-        </p:spPr>
-        <p:txBody>
-          <a:bodyPr wrap="square" lIns="0" rIns="0" tIns="0" bIns="0">
-            <a:spAutoFit/>
-          </a:bodyPr>
-          <a:lstStyle/>
-          <a:p>
-            <a:pPr algn="l">
-              <a:lnSpc>
-                <a:spcPts val="2048"/>
-              </a:lnSpc>
-              <a:spcAft>
-                <a:spcPts val="0"/>
-              </a:spcAft>
-            </a:pPr>
-            <a:r>
-              <a:rPr sz="1600" b="0" i="0">
-                <a:solidFill>
-                  <a:srgbClr val="212529"/>
-                </a:solidFill>
-                <a:latin typeface="Garamond"/>
-              </a:rPr>
-              <a:t>Autonomy and intrinsic motives</a:t>
-            </a:r>
-          </a:p>
-        </p:txBody>
-      </p:sp>
-      <p:sp>
-        <p:nvSpPr>
-          <p:cNvPr id="13" name="TextBox 12"/>
-          <p:cNvSpPr txBox="1"/>
-          <p:nvPr/>
-        </p:nvSpPr>
-        <p:spPr>
-          <a:xfrm>
-            <a:off x="7955279" y="3145536"/>
-            <a:ext cx="3108960" cy="420624"/>
-          </a:xfrm>
-          <a:prstGeom prst="rect">
-            <a:avLst/>
-          </a:prstGeom>
-          <a:noFill/>
-        </p:spPr>
-        <p:txBody>
-          <a:bodyPr wrap="square" lIns="0" rIns="0" tIns="0" bIns="0">
-            <a:spAutoFit/>
-          </a:bodyPr>
-          <a:lstStyle/>
-          <a:p>
-            <a:pPr algn="l">
-              <a:lnSpc>
-                <a:spcPts val="2048"/>
-              </a:lnSpc>
-              <a:spcAft>
-                <a:spcPts val="0"/>
-              </a:spcAft>
-            </a:pPr>
-            <a:r>
-              <a:rPr sz="1600" b="0" i="0">
-                <a:solidFill>
-                  <a:srgbClr val="6B7480"/>
-                </a:solidFill>
-                <a:latin typeface="Garamond"/>
-              </a:rPr>
-              <a:t>no</a:t>
-            </a:r>
-          </a:p>
-        </p:txBody>
-      </p:sp>
-      <p:sp>
-        <p:nvSpPr>
-          <p:cNvPr id="14" name="TextBox 13"/>
-          <p:cNvSpPr txBox="1"/>
-          <p:nvPr/>
-        </p:nvSpPr>
-        <p:spPr>
-          <a:xfrm>
-            <a:off x="822960" y="3566160"/>
-            <a:ext cx="6949440" cy="420624"/>
-          </a:xfrm>
-          <a:prstGeom prst="rect">
-            <a:avLst/>
-          </a:prstGeom>
-          <a:noFill/>
-        </p:spPr>
-        <p:txBody>
-          <a:bodyPr wrap="square" lIns="0" rIns="0" tIns="0" bIns="0">
-            <a:spAutoFit/>
-          </a:bodyPr>
-          <a:lstStyle/>
-          <a:p>
-            <a:pPr algn="l">
-              <a:lnSpc>
-                <a:spcPts val="2048"/>
-              </a:lnSpc>
-              <a:spcAft>
-                <a:spcPts val="0"/>
-              </a:spcAft>
-            </a:pPr>
-            <a:r>
-              <a:rPr sz="1600" b="0" i="0">
-                <a:solidFill>
-                  <a:srgbClr val="212529"/>
-                </a:solidFill>
-                <a:latin typeface="Garamond"/>
-              </a:rPr>
-              <a:t>Financial factors</a:t>
-            </a:r>
-          </a:p>
-        </p:txBody>
-      </p:sp>
-      <p:sp>
-        <p:nvSpPr>
-          <p:cNvPr id="15" name="TextBox 14"/>
-          <p:cNvSpPr txBox="1"/>
-          <p:nvPr/>
-        </p:nvSpPr>
-        <p:spPr>
-          <a:xfrm>
-            <a:off x="7955279" y="3566160"/>
-            <a:ext cx="3108960" cy="420624"/>
-          </a:xfrm>
-          <a:prstGeom prst="rect">
-            <a:avLst/>
-          </a:prstGeom>
-          <a:noFill/>
-        </p:spPr>
-        <p:txBody>
-          <a:bodyPr wrap="square" lIns="0" rIns="0" tIns="0" bIns="0">
-            <a:spAutoFit/>
-          </a:bodyPr>
-          <a:lstStyle/>
-          <a:p>
-            <a:pPr algn="l">
-              <a:lnSpc>
-                <a:spcPts val="2048"/>
-              </a:lnSpc>
-              <a:spcAft>
-                <a:spcPts val="0"/>
-              </a:spcAft>
-            </a:pPr>
-            <a:r>
-              <a:rPr sz="1600" b="1" i="0">
-                <a:solidFill>
-                  <a:srgbClr val="102D5E"/>
-                </a:solidFill>
-                <a:latin typeface="Garamond"/>
-              </a:rPr>
-              <a:t>yes</a:t>
-            </a:r>
-          </a:p>
-        </p:txBody>
-      </p:sp>
-      <p:sp>
-        <p:nvSpPr>
-          <p:cNvPr id="16" name="TextBox 15"/>
-          <p:cNvSpPr txBox="1"/>
-          <p:nvPr/>
-        </p:nvSpPr>
-        <p:spPr>
-          <a:xfrm>
-            <a:off x="822960" y="3986784"/>
-            <a:ext cx="6949440" cy="420624"/>
-          </a:xfrm>
-          <a:prstGeom prst="rect">
-            <a:avLst/>
-          </a:prstGeom>
-          <a:noFill/>
-        </p:spPr>
-        <p:txBody>
-          <a:bodyPr wrap="square" lIns="0" rIns="0" tIns="0" bIns="0">
-            <a:spAutoFit/>
-          </a:bodyPr>
-          <a:lstStyle/>
-          <a:p>
-            <a:pPr algn="l">
-              <a:lnSpc>
-                <a:spcPts val="2048"/>
-              </a:lnSpc>
-              <a:spcAft>
-                <a:spcPts val="0"/>
-              </a:spcAft>
-            </a:pPr>
-            <a:r>
-              <a:rPr sz="1600" b="0" i="0">
-                <a:solidFill>
-                  <a:srgbClr val="212529"/>
-                </a:solidFill>
-                <a:latin typeface="Garamond"/>
-              </a:rPr>
-              <a:t>Personal life-cycle motives</a:t>
-            </a:r>
-          </a:p>
-        </p:txBody>
-      </p:sp>
-      <p:sp>
-        <p:nvSpPr>
-          <p:cNvPr id="17" name="TextBox 16"/>
-          <p:cNvSpPr txBox="1"/>
-          <p:nvPr/>
-        </p:nvSpPr>
-        <p:spPr>
-          <a:xfrm>
-            <a:off x="7955279" y="3986784"/>
-            <a:ext cx="3108960" cy="420624"/>
-          </a:xfrm>
-          <a:prstGeom prst="rect">
-            <a:avLst/>
-          </a:prstGeom>
-          <a:noFill/>
-        </p:spPr>
-        <p:txBody>
-          <a:bodyPr wrap="square" lIns="0" rIns="0" tIns="0" bIns="0">
-            <a:spAutoFit/>
-          </a:bodyPr>
-          <a:lstStyle/>
-          <a:p>
-            <a:pPr algn="l">
-              <a:lnSpc>
-                <a:spcPts val="2048"/>
-              </a:lnSpc>
-              <a:spcAft>
-                <a:spcPts val="0"/>
-              </a:spcAft>
-            </a:pPr>
-            <a:r>
-              <a:rPr sz="1600" b="1" i="0">
-                <a:solidFill>
-                  <a:srgbClr val="102D5E"/>
-                </a:solidFill>
-                <a:latin typeface="Garamond"/>
-              </a:rPr>
-              <a:t>yes</a:t>
-            </a:r>
-          </a:p>
-        </p:txBody>
-      </p:sp>
-      <p:cxnSp>
-        <p:nvCxnSpPr>
-          <p:cNvPr id="18" name="Connector 17"/>
-          <p:cNvCxnSpPr/>
-          <p:nvPr/>
-        </p:nvCxnSpPr>
-        <p:spPr>
-          <a:xfrm>
-            <a:off x="822960" y="4425696"/>
-            <a:ext cx="10241280" cy="0"/>
-          </a:xfrm>
-          <a:prstGeom prst="line">
-            <a:avLst/>
-          </a:prstGeom>
-          <a:ln w="8890">
-            <a:solidFill>
-              <a:srgbClr val="212529"/>
-            </a:solidFill>
-          </a:ln>
-          <a:effectLst/>
-        </p:spPr>
-        <p:style>
-          <a:lnRef idx="2">
-            <a:schemeClr val="accent1"/>
-          </a:lnRef>
-          <a:fillRef idx="0">
-            <a:schemeClr val="accent1"/>
-          </a:fillRef>
-          <a:effectRef idx="1">
-            <a:schemeClr val="accent1"/>
-          </a:effectRef>
-          <a:fontRef idx="minor">
-            <a:schemeClr val="tx1"/>
-          </a:fontRef>
-        </p:style>
-      </p:cxnSp>
-      <p:sp>
-        <p:nvSpPr>
-          <p:cNvPr id="19" name="TextBox 18"/>
-          <p:cNvSpPr txBox="1"/>
-          <p:nvPr/>
-        </p:nvSpPr>
-        <p:spPr>
-          <a:xfrm>
-            <a:off x="822960" y="4535424"/>
-            <a:ext cx="6949440" cy="420624"/>
-          </a:xfrm>
-          <a:prstGeom prst="rect">
-            <a:avLst/>
-          </a:prstGeom>
-          <a:noFill/>
-        </p:spPr>
-        <p:txBody>
-          <a:bodyPr wrap="square" lIns="0" rIns="0" tIns="0" bIns="0">
-            <a:spAutoFit/>
-          </a:bodyPr>
-          <a:lstStyle/>
-          <a:p>
-            <a:pPr algn="l">
-              <a:lnSpc>
-                <a:spcPts val="2048"/>
-              </a:lnSpc>
-              <a:spcAft>
-                <a:spcPts val="0"/>
-              </a:spcAft>
-            </a:pPr>
-            <a:r>
-              <a:rPr sz="1600" b="0" i="0">
-                <a:solidFill>
-                  <a:srgbClr val="212529"/>
-                </a:solidFill>
-                <a:latin typeface="Garamond"/>
-              </a:rPr>
-              <a:t>Sociodemographics</a:t>
-            </a:r>
-          </a:p>
-        </p:txBody>
-      </p:sp>
-      <p:sp>
-        <p:nvSpPr>
-          <p:cNvPr id="20" name="TextBox 19"/>
-          <p:cNvSpPr txBox="1"/>
-          <p:nvPr/>
-        </p:nvSpPr>
-        <p:spPr>
-          <a:xfrm>
-            <a:off x="7955279" y="4535424"/>
-            <a:ext cx="3108960" cy="420624"/>
-          </a:xfrm>
-          <a:prstGeom prst="rect">
-            <a:avLst/>
-          </a:prstGeom>
-          <a:noFill/>
-        </p:spPr>
-        <p:txBody>
-          <a:bodyPr wrap="square" lIns="0" rIns="0" tIns="0" bIns="0">
-            <a:spAutoFit/>
-          </a:bodyPr>
-          <a:lstStyle/>
-          <a:p>
-            <a:pPr algn="l">
-              <a:lnSpc>
-                <a:spcPts val="2048"/>
-              </a:lnSpc>
-              <a:spcAft>
-                <a:spcPts val="0"/>
-              </a:spcAft>
-            </a:pPr>
-            <a:r>
-              <a:rPr sz="1600" b="1" i="0">
-                <a:solidFill>
-                  <a:srgbClr val="102D5E"/>
-                </a:solidFill>
-                <a:latin typeface="Garamond"/>
-              </a:rPr>
-              <a:t>yes</a:t>
-            </a:r>
-          </a:p>
-        </p:txBody>
-      </p:sp>
-      <p:cxnSp>
-        <p:nvCxnSpPr>
-          <p:cNvPr id="21" name="Connector 20"/>
-          <p:cNvCxnSpPr/>
-          <p:nvPr/>
-        </p:nvCxnSpPr>
-        <p:spPr>
-          <a:xfrm>
-            <a:off x="822960" y="4992624"/>
-            <a:ext cx="10241280" cy="0"/>
-          </a:xfrm>
-          <a:prstGeom prst="line">
-            <a:avLst/>
-          </a:prstGeom>
-          <a:ln w="16510">
-            <a:solidFill>
-              <a:srgbClr val="212529"/>
-            </a:solidFill>
-          </a:ln>
-          <a:effectLst/>
-        </p:spPr>
-        <p:style>
-          <a:lnRef idx="2">
-            <a:schemeClr val="accent1"/>
-          </a:lnRef>
-          <a:fillRef idx="0">
-            <a:schemeClr val="accent1"/>
-          </a:fillRef>
-          <a:effectRef idx="1">
-            <a:schemeClr val="accent1"/>
-          </a:effectRef>
-          <a:fontRef idx="minor">
-            <a:schemeClr val="tx1"/>
-          </a:fontRef>
-        </p:style>
-      </p:cxnSp>
-      <p:sp>
-        <p:nvSpPr>
-          <p:cNvPr id="22" name="Rounded Rectangle 21">
+              <a:t>Sex, age, education, race and ethnicity, and state.</a:t>
+            </a:r>
+          </a:p>
+        </p:txBody>
+      </p:sp>
+      <p:sp>
+        <p:nvSpPr>
+          <p:cNvPr id="9" name="Rounded Rectangle 8">
             <a:hlinkClick action="ppaction://hlinksldjump" r:id="rId2"/>
           </p:cNvPr>
           <p:cNvSpPr/>
